--- a/downloads/presentations/modules/int-190.pptx
+++ b/downloads/presentations/modules/int-190.pptx
@@ -615,7 +615,8 @@
               <a:t>Topic Deep Dive
 AI for Social Good begins with problem definition. The problem should be a public health problem, not a technology opportunity. For example, “use a chatbot” is not a problem definition. “Reduce delays in connecting families to local nutrition, housing, transportation, and home visiting resources” is a stronger public health problem definition. Starting with the problem helps agencies avoid technology-driven solutions that do not address root needs.
 Equity by design requires agencies to identify who is included, who is excluded, and who bears risk. This includes reviewing data representativeness, digital access, language access, disability access, rural access, immigration-related concerns, privacy expectations, and historical mistrust. Equity review should shape the use case, data sources, interface, outreach strategy, and evaluation metrics.
-Community engagement should occur before deployment, not only after concerns arise. Affected communities can help identify priorities, unacceptable uses, preferred communication channels, needed safeguards, and measures of success. Engagement does not mean asking communities to approve a predetermined tool. It means allowing community input to change the design, scope, or decision to proceed.</a:t>
+Community engagement should occur before deployment, not only after concerns arise. Affected communities can help identify priorities, unacceptable uses, preferred communication channels, needed safeguards, and measures of success. Engagement does not mean asking communities to approve a predetermined tool. It means allowing community input to change the design, scope, or decision to proceed.
+Application guidance: Connect the concept to public health purpose, responsible use, required safeguards, documentation, and the next action a department should take.</a:t>
             </a:r>
             <a:endParaRPr lang="en-US" dirty="0"/>
           </a:p>
@@ -705,7 +706,8 @@
               <a:rPr lang="en-US" dirty="0"/>
               <a:t>Topic Deep Dive
 Measuring social good requires more than counting users or outputs. Agencies should measure whether the AI-supported workflow improves timeliness, access, quality, fairness, staff burden, community trust, and public health outcomes. They should also monitor unintended consequences, such as reduced service quality, increased complaints, inequitable uptake, or inaccurate referrals.
-Responsible innovation includes sunset and rollback planning. If an AI tool does not produce expected benefit, creates harm, or becomes outdated, the agency should be prepared to modify, pause, or retire it. Social good depends on ongoing accountability, not one-time approval.</a:t>
+Responsible innovation includes sunset and rollback planning. If an AI tool does not produce expected benefit, creates harm, or becomes outdated, the agency should be prepared to modify, pause, or retire it. Social good depends on ongoing accountability, not one-time approval.
+Application guidance: Connect the concept to public health purpose, responsible use, required safeguards, documentation, and the next action a department should take.</a:t>
             </a:r>
             <a:endParaRPr lang="en-US" dirty="0"/>
           </a:p>
@@ -796,7 +798,8 @@
               <a:t>Risks, Failure Modes, and Guardrails
 Technology-first design. A tool may be adopted because it is novel rather than because it solves a public health problem. Guardrails include problem-first planning, alternatives analysis, and public value criteria.
 Unequal benefit. AI may help people with strong digital access while excluding others. Guardrails include language access, accessibility, offline options, and human fallback.
-Stigma and surveillance burden. AI may label communities or increase monitoring without support. Guardrails include equity framing, community engagement, and supportive-use restrictions.</a:t>
+Stigma and surveillance burden. AI may label communities or increase monitoring without support. Guardrails include equity framing, community engagement, and supportive-use restrictions.
+Application guidance: Identify what could go wrong, who could be affected, what safeguards are needed, and what evidence should be reviewed before use expands.</a:t>
             </a:r>
             <a:endParaRPr lang="en-US" dirty="0"/>
           </a:p>
@@ -885,7 +888,8 @@
             <a:r>
               <a:rPr lang="en-US" dirty="0"/>
               <a:t>Risks, Failure Modes, and Guardrails
-Resource diversion. AI projects may consume resources that could be used for more effective interventions. Guardrails include impact measurement, cost-benefit review, and periodic reassessment.</a:t>
+Resource diversion. AI projects may consume resources that could be used for more effective interventions. Guardrails include impact measurement, cost-benefit review, and periodic reassessment.
+Application guidance: Identify what could go wrong, who could be affected, what safeguards are needed, and what evidence should be reviewed before use expands.</a:t>
             </a:r>
             <a:endParaRPr lang="en-US" dirty="0"/>
           </a:p>
@@ -975,7 +979,8 @@
               <a:rPr lang="en-US" dirty="0"/>
               <a:t>Application to AI-Supported Workflows
 AI for Social Good applies to every AI method. Generative AI may improve plain-language communication, but it must be accurate, accessible, and culturally appropriate. Predictive analytics may guide supportive outreach, but it should not become a tool for exclusion. RAG systems may improve staff access to guidance, but they must include current and authorized content. Agentic workflows may reduce burden, but they require boundaries and human accountability.
-The strongest public health AI projects define social good in operational terms. They identify the population benefit, the equity goal, the workflow change, the safeguards, and the measurement plan. They also acknowledge tradeoffs and document why AI is an appropriate tool compared with non-AI alternatives.</a:t>
+The strongest public health AI projects define social good in operational terms. They identify the population benefit, the equity goal, the workflow change, the safeguards, and the measurement plan. They also acknowledge tradeoffs and document why AI is an appropriate tool compared with non-AI alternatives.
+Application guidance: Use the concept to clarify workflow changes, dependencies, staffing, procurement requirements, training needs, and implementation checkpoints.</a:t>
             </a:r>
             <a:endParaRPr lang="en-US" dirty="0"/>
           </a:p>
@@ -1066,7 +1071,8 @@
               <a:t>Reflection Questions
 What public health problem would this AI use address?
 Who would benefit, and who could be excluded or harmed?
-How were affected communities involved in defining the need and safeguards?</a:t>
+How were affected communities involved in defining the need and safeguards?
+Application guidance: Connect the concept to public health purpose, responsible use, required safeguards, documentation, and the next action a department should take.</a:t>
             </a:r>
             <a:endParaRPr lang="en-US" dirty="0"/>
           </a:p>
@@ -1156,7 +1162,8 @@
               <a:rPr lang="en-US" dirty="0"/>
               <a:t>Reflection Questions
 What non-AI alternatives should be considered?
-How will the agency measure public value, equity, trust, and unintended consequences?</a:t>
+How will the agency measure public value, equity, trust, and unintended consequences?
+Application guidance: Connect the concept to public health purpose, responsible use, required safeguards, documentation, and the next action a department should take.</a:t>
             </a:r>
             <a:endParaRPr lang="en-US" dirty="0"/>
           </a:p>
@@ -1246,7 +1253,8 @@
               <a:rPr lang="en-US" dirty="0"/>
               <a:t>Practical Exercise
 Create an AI for Social Good review brief for one public health use case. The brief should define the public health problem, intended public benefit, affected communities, equity considerations, non-AI alternatives, proposed AI role, safeguards, community engagement plan, evaluation measures, and sunset or rollback criteria.
-The exercise should result in a decision-support document that helps leaders and governance reviewers determine whether the proposed AI use advances public health values.</a:t>
+The exercise should result in a decision-support document that helps leaders and governance reviewers determine whether the proposed AI use advances public health values.
+Application guidance: Use the assignment to test whether you can explain the concept, apply it to a realistic public health situation, and identify what would need review before the work moves forward.</a:t>
             </a:r>
             <a:endParaRPr lang="en-US" dirty="0"/>
           </a:p>
@@ -1337,7 +1345,8 @@
               <a:t>Expected Artifact or Evidence
 AI for Social Good review brief
 Public value and equity assessment
-Community engagement and accessibility plan</a:t>
+Community engagement and accessibility plan
+Application guidance: Connect the concept to public health purpose, responsible use, required safeguards, documentation, and the next action a department should take.</a:t>
             </a:r>
             <a:endParaRPr lang="en-US" dirty="0"/>
           </a:p>
@@ -1426,7 +1435,8 @@
             <a:r>
               <a:rPr lang="en-US" dirty="0"/>
               <a:t>Expected Artifact or Evidence
-Impact and unintended-consequence measurement plan</a:t>
+Impact and unintended-consequence measurement plan
+Application guidance: Connect the concept to public health purpose, responsible use, required safeguards, documentation, and the next action a department should take.</a:t>
             </a:r>
             <a:endParaRPr lang="en-US" dirty="0"/>
           </a:p>
@@ -1610,7 +1620,8 @@
 AI for Social Good review brief
 Public value and equity assessment
 Community engagement and accessibility plan
-Impact and unintended-consequence measurement plan</a:t>
+Impact and unintended-consequence measurement plan
+Application guidance: Use the assignment to test whether you can explain the concept, apply it to a realistic public health situation, and identify what would need review before the work moves forward.</a:t>
             </a:r>
             <a:endParaRPr lang="en-US" dirty="0"/>
           </a:p>
@@ -1703,7 +1714,8 @@
 2. Why is efficiency alone not enough to show social good?
 3. What does equity by design require?
 4. Which use best reflects AI for Social Good?
-5. What is strong completion evidence for this module?</a:t>
+5. What is strong completion evidence for this module?
+Application guidance: Use the assignment to test whether you can explain the concept, apply it to a realistic public health situation, and identify what would need review before the work moves forward.</a:t>
             </a:r>
             <a:endParaRPr lang="en-US" dirty="0"/>
           </a:p>
@@ -1796,7 +1808,8 @@
 WHO Guidance on Large Multi-Modal Models: https://www.who.int/publications/i/item/9789240084759
 NIST Artificial Intelligence Risk Management Framework: https://www.nist.gov/itl/ai-risk-management-framework
 CDC Public Health Data Strategy: https://www.cdc.gov/public-health-data-strategy/php/about/index.html
-Agency equity, community engagement, accessibility, and language access policies</a:t>
+Agency equity, community engagement, accessibility, and language access policies
+Application guidance: Connect the concept to public health purpose, responsible use, required safeguards, documentation, and the next action a department should take.</a:t>
             </a:r>
             <a:endParaRPr lang="en-US" dirty="0"/>
           </a:p>
@@ -2075,7 +2088,8 @@
 Distinguish public benefit from novelty, efficiency, or automation alone.
 Identify how AI can support public health values, including equity, transparency, accessibility, accountability, and community trust.
 Assess potential harms, including exclusion, surveillance burden, stigma, resource diversion, and unequal benefit.
-Design community-centered safeguards for socially beneficial AI use.</a:t>
+Design community-centered safeguards for socially beneficial AI use.
+Application guidance: Use the assignment to test whether you can explain the concept, apply it to a realistic public health situation, and identify what would need review before the work moves forward.</a:t>
             </a:r>
             <a:endParaRPr lang="en-US" dirty="0"/>
           </a:p>
@@ -2164,7 +2178,8 @@
             <a:r>
               <a:rPr lang="en-US" dirty="0"/>
               <a:t>Learning Objectives
-Produce an AI for Social Good review brief for a public health use case.</a:t>
+Produce an AI for Social Good review brief for a public health use case.
+Application guidance: Use the assignment to test whether you can explain the concept, apply it to a realistic public health situation, and identify what would need review before the work moves forward.</a:t>
             </a:r>
             <a:endParaRPr lang="en-US" dirty="0"/>
           </a:p>
@@ -2255,7 +2270,8 @@
               <a:t>Module Overview
 AI for Social Good refers to the intentional use of artificial intelligence to improve public well-being, reduce inequities, strengthen institutions, and address complex social problems. For public health, this concept is not abstract. Public health agencies already work to prevent disease, protect communities, improve access, and reduce inequities. AI for Social Good should therefore be judged by whether it advances public health values in measurable, accountable, and community-centered ways.
 This training helps learners distinguish socially beneficial AI from AI that is merely innovative or efficient. A tool can be technically impressive and still fail to advance the public good if it increases surveillance burden, excludes communities, weakens transparency, or diverts resources from more effective interventions. Conversely, a modest AI tool may create meaningful public value if it reduces staff burden, improves language access, directs services to underserved communities, or helps agencies respond faster and more fairly.
-The module emphasizes public purpose, equity by design, community engagement, responsible innovation, transparency, measurement, and avoidance of unintended harm. Learners will develop an AI for Social Good review brief for a public health use case.</a:t>
+The module emphasizes public purpose, equity by design, community engagement, responsible innovation, transparency, measurement, and avoidance of unintended harm. Learners will develop an AI for Social Good review brief for a public health use case.
+Application guidance: Connect the concept to public health purpose, responsible use, required safeguards, documentation, and the next action a department should take.</a:t>
             </a:r>
             <a:endParaRPr lang="en-US" dirty="0"/>
           </a:p>
@@ -2346,7 +2362,8 @@
               <a:t>Why This Topic Matters for Public Health AI
 Public health is uniquely positioned to use AI for social good because its mission is population well-being rather than private gain. AI can help agencies identify emerging needs, improve access to information, reduce administrative burden, support community outreach, and allocate resources more effectively. These benefits are especially important when agencies face workforce shortages, fragmented systems, and increasing demands.
 However, AI for Social Good is not guaranteed by good intentions. Tools built for efficiency may shift burden onto communities, reduce human contact, or make services harder to access for people with limited digital literacy. Predictive tools may label communities as risky without addressing structural causes. Chatbots may improve information access for some users while excluding people who need language, disability, or offline support.
-The public health standard for social good should be rigorous. Agencies should define the public problem, identify who benefits, identify who could be harmed, involve affected communities, measure outcomes, and document safeguards. The central question is not “Can AI do this?” but “Should AI be used for this purpose, and under what conditions would it create public value?”</a:t>
+The public health standard for social good should be rigorous. Agencies should define the public problem, identify who benefits, identify who could be harmed, involve affected communities, measure outcomes, and document safeguards. The central question is not “Can AI do this?” but “Should AI be used for this purpose, and under what conditions would it create public value?”
+Application guidance: Connect the concept to public health purpose, responsible use, required safeguards, documentation, and the next action a department should take.</a:t>
             </a:r>
             <a:endParaRPr lang="en-US" dirty="0"/>
           </a:p>
@@ -2436,7 +2453,8 @@
               <a:rPr lang="en-US" dirty="0"/>
               <a:t>Public Health Example
 A health department may use AI to improve access to maternal and child health resources. A tool could help staff identify service gaps, summarize eligibility rules, translate plain-language information, and route families to local support. If designed well, the tool could reduce administrative burden and improve timely access to services.
-The same tool could fail if it assumes internet access, uses only English content, provides outdated referral information, exposes sensitive information, or replaces trusted human navigators. An AI for Social Good review would examine community needs, access barriers, language and disability accommodations, privacy, human fallback options, and measurable outcomes.</a:t>
+The same tool could fail if it assumes internet access, uses only English content, provides outdated referral information, exposes sensitive information, or replaces trusted human navigators. An AI for Social Good review would examine community needs, access barriers, language and disability accommodations, privacy, human fallback options, and measurable outcomes.
+Application guidance: Connect the concept to public health purpose, responsible use, required safeguards, documentation, and the next action a department should take.</a:t>
             </a:r>
             <a:endParaRPr lang="en-US" dirty="0"/>
           </a:p>
@@ -3207,8 +3225,8 @@
         </p:nvSpPr>
         <p:spPr>
           <a:xfrm>
-            <a:off x="9966960" y="6537960"/>
-            <a:ext cx="1645920" cy="201168"/>
+            <a:off x="9646920" y="6537960"/>
+            <a:ext cx="1965960" cy="201168"/>
           </a:xfrm>
           <a:prstGeom prst="rect">
             <a:avLst/>
@@ -3232,7 +3250,7 @@
                 <a:ea typeface="Aptos" pitchFamily="34" charset="-122"/>
                 <a:cs typeface="Aptos" pitchFamily="34" charset="-120"/>
               </a:rPr>
-              <a:t>Â© Paula Soper</a:t>
+              <a:t>Copyright Paula Soper</a:t>
             </a:r>
             <a:endParaRPr lang="en-US" sz="800" dirty="0"/>
           </a:p>
@@ -3279,77 +3297,13 @@
       </p:sp>
       <p:sp>
         <p:nvSpPr>
-          <p:cNvPr id="8" name="Shape 6"/>
+          <p:cNvPr id="8" name="Text 6"/>
           <p:cNvSpPr/>
           <p:nvPr/>
         </p:nvSpPr>
         <p:spPr>
           <a:xfrm>
             <a:off x="640080" y="658368"/>
-            <a:ext cx="420624" cy="420624"/>
-          </a:xfrm>
-          <a:prstGeom prst="ellipse">
-            <a:avLst/>
-          </a:prstGeom>
-          <a:solidFill>
-            <a:srgbClr val="0068B7"/>
-          </a:solidFill>
-          <a:ln w="12700">
-            <a:solidFill>
-              <a:srgbClr val="0068B7"/>
-            </a:solidFill>
-            <a:prstDash val="solid"/>
-          </a:ln>
-        </p:spPr>
-      </p:sp>
-      <p:sp>
-        <p:nvSpPr>
-          <p:cNvPr id="9" name="Text 7"/>
-          <p:cNvSpPr/>
-          <p:nvPr/>
-        </p:nvSpPr>
-        <p:spPr>
-          <a:xfrm>
-            <a:off x="640080" y="731520"/>
-            <a:ext cx="420624" cy="164592"/>
-          </a:xfrm>
-          <a:prstGeom prst="rect">
-            <a:avLst/>
-          </a:prstGeom>
-          <a:noFill/>
-          <a:ln/>
-        </p:spPr>
-        <p:txBody>
-          <a:bodyPr wrap="square" lIns="0" tIns="0" rIns="0" bIns="0" rtlCol="0" anchor="ctr"/>
-          <a:lstStyle/>
-          <a:p>
-            <a:pPr algn="ctr" indent="0" marL="0">
-              <a:buNone/>
-            </a:pPr>
-            <a:r>
-              <a:rPr lang="en-US" sz="1100" b="1" dirty="0">
-                <a:solidFill>
-                  <a:srgbClr val="FFFFFF"/>
-                </a:solidFill>
-                <a:latin typeface="Aptos" pitchFamily="34" charset="0"/>
-                <a:ea typeface="Aptos" pitchFamily="34" charset="-122"/>
-                <a:cs typeface="Aptos" pitchFamily="34" charset="-120"/>
-              </a:rPr>
-              <a:t>5</a:t>
-            </a:r>
-            <a:endParaRPr lang="en-US" sz="1100" dirty="0"/>
-          </a:p>
-        </p:txBody>
-      </p:sp>
-      <p:sp>
-        <p:nvSpPr>
-          <p:cNvPr id="10" name="Text 8"/>
-          <p:cNvSpPr/>
-          <p:nvPr/>
-        </p:nvSpPr>
-        <p:spPr>
-          <a:xfrm>
-            <a:off x="640080" y="621792"/>
             <a:ext cx="10881360" cy="713232"/>
           </a:xfrm>
           <a:prstGeom prst="rect">
@@ -3384,14 +3338,14 @@
       </p:sp>
       <p:sp>
         <p:nvSpPr>
-          <p:cNvPr id="11" name="Text 9"/>
+          <p:cNvPr id="9" name="Text 7"/>
           <p:cNvSpPr/>
           <p:nvPr/>
         </p:nvSpPr>
         <p:spPr>
           <a:xfrm>
             <a:off x="868680" y="1508760"/>
-            <a:ext cx="6537960" cy="4160520"/>
+            <a:ext cx="6309360" cy="4160520"/>
           </a:xfrm>
           <a:prstGeom prst="rect">
             <a:avLst/>
@@ -3450,18 +3404,18 @@
       </p:sp>
       <p:sp>
         <p:nvSpPr>
-          <p:cNvPr id="12" name="Shape 10"/>
-          <p:cNvSpPr/>
-          <p:nvPr/>
-        </p:nvSpPr>
-        <p:spPr>
-          <a:xfrm>
-            <a:off x="7909560" y="1417320"/>
-            <a:ext cx="3154680" cy="1828800"/>
+          <p:cNvPr id="10" name="Shape 8"/>
+          <p:cNvSpPr/>
+          <p:nvPr/>
+        </p:nvSpPr>
+        <p:spPr>
+          <a:xfrm>
+            <a:off x="7635240" y="1325880"/>
+            <a:ext cx="3474720" cy="1325880"/>
           </a:xfrm>
           <a:prstGeom prst="roundRect">
             <a:avLst>
-              <a:gd name="adj" fmla="val 6000"/>
+              <a:gd name="adj" fmla="val 8276"/>
             </a:avLst>
           </a:prstGeom>
           <a:solidFill>
@@ -3477,14 +3431,14 @@
       </p:sp>
       <p:sp>
         <p:nvSpPr>
-          <p:cNvPr id="13" name="Text 11"/>
-          <p:cNvSpPr/>
-          <p:nvPr/>
-        </p:nvSpPr>
-        <p:spPr>
-          <a:xfrm>
-            <a:off x="8074152" y="1563624"/>
-            <a:ext cx="2825496" cy="256032"/>
+          <p:cNvPr id="11" name="Text 9"/>
+          <p:cNvSpPr/>
+          <p:nvPr/>
+        </p:nvSpPr>
+        <p:spPr>
+          <a:xfrm>
+            <a:off x="7799832" y="1472184"/>
+            <a:ext cx="3145536" cy="256032"/>
           </a:xfrm>
           <a:prstGeom prst="rect">
             <a:avLst/>
@@ -3508,7 +3462,7 @@
                 <a:ea typeface="Aptos" pitchFamily="34" charset="-122"/>
                 <a:cs typeface="Aptos" pitchFamily="34" charset="-120"/>
               </a:rPr>
-              <a:t>Key idea</a:t>
+              <a:t>Core concept</a:t>
             </a:r>
             <a:endParaRPr lang="en-US" sz="1300" dirty="0"/>
           </a:p>
@@ -3516,14 +3470,14 @@
       </p:sp>
       <p:sp>
         <p:nvSpPr>
-          <p:cNvPr id="14" name="Text 12"/>
-          <p:cNvSpPr/>
-          <p:nvPr/>
-        </p:nvSpPr>
-        <p:spPr>
-          <a:xfrm>
-            <a:off x="8074152" y="1920240"/>
-            <a:ext cx="2825496" cy="1188720"/>
+          <p:cNvPr id="12" name="Text 10"/>
+          <p:cNvSpPr/>
+          <p:nvPr/>
+        </p:nvSpPr>
+        <p:spPr>
+          <a:xfrm>
+            <a:off x="7799832" y="1828800"/>
+            <a:ext cx="3145536" cy="685800"/>
           </a:xfrm>
           <a:prstGeom prst="rect">
             <a:avLst/>
@@ -3557,18 +3511,159 @@
       </p:sp>
       <p:sp>
         <p:nvSpPr>
-          <p:cNvPr id="15" name="Shape 13"/>
-          <p:cNvSpPr/>
-          <p:nvPr/>
-        </p:nvSpPr>
-        <p:spPr>
-          <a:xfrm>
-            <a:off x="7909560" y="3520440"/>
-            <a:ext cx="3154680" cy="1737360"/>
+          <p:cNvPr id="13" name="Shape 11"/>
+          <p:cNvSpPr/>
+          <p:nvPr/>
+        </p:nvSpPr>
+        <p:spPr>
+          <a:xfrm>
+            <a:off x="7635240" y="2788920"/>
+            <a:ext cx="3474720" cy="1536192"/>
           </a:xfrm>
           <a:prstGeom prst="roundRect">
             <a:avLst>
-              <a:gd name="adj" fmla="val 6316"/>
+              <a:gd name="adj" fmla="val 7143"/>
+            </a:avLst>
+          </a:prstGeom>
+          <a:solidFill>
+            <a:srgbClr val="FFFFFF">
+              <a:alpha val="88000"/>
+            </a:srgbClr>
+          </a:solidFill>
+          <a:ln w="12700">
+            <a:solidFill>
+              <a:srgbClr val="D6E8F2"/>
+            </a:solidFill>
+            <a:prstDash val="solid"/>
+          </a:ln>
+        </p:spPr>
+      </p:sp>
+      <p:sp>
+        <p:nvSpPr>
+          <p:cNvPr id="14" name="Shape 12"/>
+          <p:cNvSpPr/>
+          <p:nvPr/>
+        </p:nvSpPr>
+        <p:spPr>
+          <a:xfrm>
+            <a:off x="8074152" y="3291840"/>
+            <a:ext cx="2596896" cy="749808"/>
+          </a:xfrm>
+          <a:prstGeom prst="rect">
+            <a:avLst/>
+          </a:prstGeom>
+          <a:solidFill>
+            <a:srgbClr val="EAF6F8"/>
+          </a:solidFill>
+          <a:ln w="12700">
+            <a:solidFill>
+              <a:srgbClr val="8ABBD8"/>
+            </a:solidFill>
+            <a:prstDash val="solid"/>
+          </a:ln>
+        </p:spPr>
+      </p:sp>
+      <p:sp>
+        <p:nvSpPr>
+          <p:cNvPr id="15" name="Shape 13"/>
+          <p:cNvSpPr/>
+          <p:nvPr/>
+        </p:nvSpPr>
+        <p:spPr>
+          <a:xfrm>
+            <a:off x="8202168" y="3721608"/>
+            <a:ext cx="2340864" cy="0"/>
+          </a:xfrm>
+          <a:prstGeom prst="line">
+            <a:avLst/>
+          </a:prstGeom>
+          <a:noFill/>
+          <a:ln w="19050">
+            <a:solidFill>
+              <a:srgbClr val="0068B7"/>
+            </a:solidFill>
+            <a:prstDash val="solid"/>
+          </a:ln>
+        </p:spPr>
+      </p:sp>
+      <p:sp>
+        <p:nvSpPr>
+          <p:cNvPr id="16" name="Shape 14"/>
+          <p:cNvSpPr/>
+          <p:nvPr/>
+        </p:nvSpPr>
+        <p:spPr>
+          <a:xfrm>
+            <a:off x="9198864" y="4206240"/>
+            <a:ext cx="347472" cy="347472"/>
+          </a:xfrm>
+          <a:prstGeom prst="ellipse">
+            <a:avLst/>
+          </a:prstGeom>
+          <a:solidFill>
+            <a:srgbClr val="2F8A28"/>
+          </a:solidFill>
+          <a:ln w="12700">
+            <a:solidFill>
+              <a:srgbClr val="2F8A28"/>
+            </a:solidFill>
+            <a:prstDash val="solid"/>
+          </a:ln>
+        </p:spPr>
+      </p:sp>
+      <p:sp>
+        <p:nvSpPr>
+          <p:cNvPr id="17" name="Text 15"/>
+          <p:cNvSpPr/>
+          <p:nvPr/>
+        </p:nvSpPr>
+        <p:spPr>
+          <a:xfrm>
+            <a:off x="7909560" y="3977640"/>
+            <a:ext cx="2926080" cy="182880"/>
+          </a:xfrm>
+          <a:prstGeom prst="rect">
+            <a:avLst/>
+          </a:prstGeom>
+          <a:noFill/>
+          <a:ln/>
+        </p:spPr>
+        <p:txBody>
+          <a:bodyPr wrap="square" lIns="0" tIns="0" rIns="0" bIns="0" rtlCol="0" anchor="ctr"/>
+          <a:lstStyle/>
+          <a:p>
+            <a:pPr algn="ctr" indent="0" marL="0">
+              <a:buNone/>
+            </a:pPr>
+            <a:r>
+              <a:rPr lang="en-US" sz="1000" dirty="0">
+                <a:solidFill>
+                  <a:srgbClr val="003A63"/>
+                </a:solidFill>
+                <a:latin typeface="Aptos" pitchFamily="34" charset="0"/>
+                <a:ea typeface="Aptos" pitchFamily="34" charset="-122"/>
+                <a:cs typeface="Aptos" pitchFamily="34" charset="-120"/>
+              </a:rPr>
+              <a:t>Concept to action</a:t>
+            </a:r>
+            <a:endParaRPr lang="en-US" sz="1000" dirty="0"/>
+          </a:p>
+        </p:txBody>
+      </p:sp>
+      <p:sp>
+        <p:nvSpPr>
+          <p:cNvPr id="18" name="Shape 16"/>
+          <p:cNvSpPr/>
+          <p:nvPr/>
+        </p:nvSpPr>
+        <p:spPr>
+          <a:xfrm>
+            <a:off x="7635240" y="4498848"/>
+            <a:ext cx="3474720" cy="1143000"/>
+          </a:xfrm>
+          <a:prstGeom prst="roundRect">
+            <a:avLst>
+              <a:gd name="adj" fmla="val 9600"/>
             </a:avLst>
           </a:prstGeom>
           <a:solidFill>
@@ -3584,14 +3679,14 @@
       </p:sp>
       <p:sp>
         <p:nvSpPr>
-          <p:cNvPr id="16" name="Text 14"/>
-          <p:cNvSpPr/>
-          <p:nvPr/>
-        </p:nvSpPr>
-        <p:spPr>
-          <a:xfrm>
-            <a:off x="8074152" y="3666744"/>
-            <a:ext cx="2825496" cy="256032"/>
+          <p:cNvPr id="19" name="Text 17"/>
+          <p:cNvSpPr/>
+          <p:nvPr/>
+        </p:nvSpPr>
+        <p:spPr>
+          <a:xfrm>
+            <a:off x="7799832" y="4645152"/>
+            <a:ext cx="3145536" cy="256032"/>
           </a:xfrm>
           <a:prstGeom prst="rect">
             <a:avLst/>
@@ -3615,7 +3710,7 @@
                 <a:ea typeface="Aptos" pitchFamily="34" charset="-122"/>
                 <a:cs typeface="Aptos" pitchFamily="34" charset="-120"/>
               </a:rPr>
-              <a:t>Use this for</a:t>
+              <a:t>Apply it</a:t>
             </a:r>
             <a:endParaRPr lang="en-US" sz="1300" dirty="0"/>
           </a:p>
@@ -3623,14 +3718,14 @@
       </p:sp>
       <p:sp>
         <p:nvSpPr>
-          <p:cNvPr id="17" name="Text 15"/>
-          <p:cNvSpPr/>
-          <p:nvPr/>
-        </p:nvSpPr>
-        <p:spPr>
-          <a:xfrm>
-            <a:off x="8074152" y="4023360"/>
-            <a:ext cx="2825496" cy="1097280"/>
+          <p:cNvPr id="20" name="Text 18"/>
+          <p:cNvSpPr/>
+          <p:nvPr/>
+        </p:nvSpPr>
+        <p:spPr>
+          <a:xfrm>
+            <a:off x="7799832" y="5001768"/>
+            <a:ext cx="3145536" cy="502920"/>
           </a:xfrm>
           <a:prstGeom prst="rect">
             <a:avLst/>
@@ -3656,7 +3751,7 @@
                 <a:ea typeface="Aptos" pitchFamily="34" charset="-122"/>
                 <a:cs typeface="Aptos" pitchFamily="34" charset="-120"/>
               </a:rPr>
-              <a:t>Connect the concept to public health decisions, safeguards, documentation, or implementation work.</a:t>
+              <a:t>Connect the concept to public health purpose, responsible use, required safeguards, documentation, and the next action a department should take.</a:t>
             </a:r>
             <a:endParaRPr lang="en-US" sz="1550" dirty="0"/>
           </a:p>
@@ -3830,8 +3925,8 @@
         </p:nvSpPr>
         <p:spPr>
           <a:xfrm>
-            <a:off x="9966960" y="6537960"/>
-            <a:ext cx="1645920" cy="201168"/>
+            <a:off x="9646920" y="6537960"/>
+            <a:ext cx="1965960" cy="201168"/>
           </a:xfrm>
           <a:prstGeom prst="rect">
             <a:avLst/>
@@ -3855,7 +3950,7 @@
                 <a:ea typeface="Aptos" pitchFamily="34" charset="-122"/>
                 <a:cs typeface="Aptos" pitchFamily="34" charset="-120"/>
               </a:rPr>
-              <a:t>Â© Paula Soper</a:t>
+              <a:t>Copyright Paula Soper</a:t>
             </a:r>
             <a:endParaRPr lang="en-US" sz="800" dirty="0"/>
           </a:p>
@@ -3950,7 +4045,7 @@
         <p:spPr>
           <a:xfrm>
             <a:off x="868680" y="1508760"/>
-            <a:ext cx="6537960" cy="4160520"/>
+            <a:ext cx="6309360" cy="4160520"/>
           </a:xfrm>
           <a:prstGeom prst="rect">
             <a:avLst/>
@@ -4015,12 +4110,12 @@
         </p:nvSpPr>
         <p:spPr>
           <a:xfrm>
-            <a:off x="7909560" y="1417320"/>
-            <a:ext cx="3154680" cy="1828800"/>
+            <a:off x="7635240" y="1325880"/>
+            <a:ext cx="3474720" cy="1325880"/>
           </a:xfrm>
           <a:prstGeom prst="roundRect">
             <a:avLst>
-              <a:gd name="adj" fmla="val 6000"/>
+              <a:gd name="adj" fmla="val 8276"/>
             </a:avLst>
           </a:prstGeom>
           <a:solidFill>
@@ -4042,8 +4137,8 @@
         </p:nvSpPr>
         <p:spPr>
           <a:xfrm>
-            <a:off x="8074152" y="1563624"/>
-            <a:ext cx="2825496" cy="256032"/>
+            <a:off x="7799832" y="1472184"/>
+            <a:ext cx="3145536" cy="256032"/>
           </a:xfrm>
           <a:prstGeom prst="rect">
             <a:avLst/>
@@ -4067,7 +4162,7 @@
                 <a:ea typeface="Aptos" pitchFamily="34" charset="-122"/>
                 <a:cs typeface="Aptos" pitchFamily="34" charset="-120"/>
               </a:rPr>
-              <a:t>Key idea</a:t>
+              <a:t>Core concept</a:t>
             </a:r>
             <a:endParaRPr lang="en-US" sz="1300" dirty="0"/>
           </a:p>
@@ -4081,8 +4176,8 @@
         </p:nvSpPr>
         <p:spPr>
           <a:xfrm>
-            <a:off x="8074152" y="1920240"/>
-            <a:ext cx="2825496" cy="1188720"/>
+            <a:off x="7799832" y="1828800"/>
+            <a:ext cx="3145536" cy="685800"/>
           </a:xfrm>
           <a:prstGeom prst="rect">
             <a:avLst/>
@@ -4122,12 +4217,153 @@
         </p:nvSpPr>
         <p:spPr>
           <a:xfrm>
-            <a:off x="7909560" y="3520440"/>
-            <a:ext cx="3154680" cy="1737360"/>
+            <a:off x="7635240" y="2788920"/>
+            <a:ext cx="3474720" cy="1536192"/>
           </a:xfrm>
           <a:prstGeom prst="roundRect">
             <a:avLst>
-              <a:gd name="adj" fmla="val 6316"/>
+              <a:gd name="adj" fmla="val 7143"/>
+            </a:avLst>
+          </a:prstGeom>
+          <a:solidFill>
+            <a:srgbClr val="FFFFFF">
+              <a:alpha val="88000"/>
+            </a:srgbClr>
+          </a:solidFill>
+          <a:ln w="12700">
+            <a:solidFill>
+              <a:srgbClr val="D6E8F2"/>
+            </a:solidFill>
+            <a:prstDash val="solid"/>
+          </a:ln>
+        </p:spPr>
+      </p:sp>
+      <p:sp>
+        <p:nvSpPr>
+          <p:cNvPr id="14" name="Shape 12"/>
+          <p:cNvSpPr/>
+          <p:nvPr/>
+        </p:nvSpPr>
+        <p:spPr>
+          <a:xfrm>
+            <a:off x="8074152" y="3291840"/>
+            <a:ext cx="2596896" cy="749808"/>
+          </a:xfrm>
+          <a:prstGeom prst="rect">
+            <a:avLst/>
+          </a:prstGeom>
+          <a:solidFill>
+            <a:srgbClr val="EAF6F8"/>
+          </a:solidFill>
+          <a:ln w="12700">
+            <a:solidFill>
+              <a:srgbClr val="8ABBD8"/>
+            </a:solidFill>
+            <a:prstDash val="solid"/>
+          </a:ln>
+        </p:spPr>
+      </p:sp>
+      <p:sp>
+        <p:nvSpPr>
+          <p:cNvPr id="15" name="Shape 13"/>
+          <p:cNvSpPr/>
+          <p:nvPr/>
+        </p:nvSpPr>
+        <p:spPr>
+          <a:xfrm>
+            <a:off x="8202168" y="3721608"/>
+            <a:ext cx="2340864" cy="0"/>
+          </a:xfrm>
+          <a:prstGeom prst="line">
+            <a:avLst/>
+          </a:prstGeom>
+          <a:noFill/>
+          <a:ln w="19050">
+            <a:solidFill>
+              <a:srgbClr val="0068B7"/>
+            </a:solidFill>
+            <a:prstDash val="solid"/>
+          </a:ln>
+        </p:spPr>
+      </p:sp>
+      <p:sp>
+        <p:nvSpPr>
+          <p:cNvPr id="16" name="Shape 14"/>
+          <p:cNvSpPr/>
+          <p:nvPr/>
+        </p:nvSpPr>
+        <p:spPr>
+          <a:xfrm>
+            <a:off x="9198864" y="4206240"/>
+            <a:ext cx="347472" cy="347472"/>
+          </a:xfrm>
+          <a:prstGeom prst="ellipse">
+            <a:avLst/>
+          </a:prstGeom>
+          <a:solidFill>
+            <a:srgbClr val="2F8A28"/>
+          </a:solidFill>
+          <a:ln w="12700">
+            <a:solidFill>
+              <a:srgbClr val="2F8A28"/>
+            </a:solidFill>
+            <a:prstDash val="solid"/>
+          </a:ln>
+        </p:spPr>
+      </p:sp>
+      <p:sp>
+        <p:nvSpPr>
+          <p:cNvPr id="17" name="Text 15"/>
+          <p:cNvSpPr/>
+          <p:nvPr/>
+        </p:nvSpPr>
+        <p:spPr>
+          <a:xfrm>
+            <a:off x="7909560" y="3977640"/>
+            <a:ext cx="2926080" cy="182880"/>
+          </a:xfrm>
+          <a:prstGeom prst="rect">
+            <a:avLst/>
+          </a:prstGeom>
+          <a:noFill/>
+          <a:ln/>
+        </p:spPr>
+        <p:txBody>
+          <a:bodyPr wrap="square" lIns="0" tIns="0" rIns="0" bIns="0" rtlCol="0" anchor="ctr"/>
+          <a:lstStyle/>
+          <a:p>
+            <a:pPr algn="ctr" indent="0" marL="0">
+              <a:buNone/>
+            </a:pPr>
+            <a:r>
+              <a:rPr lang="en-US" sz="1000" dirty="0">
+                <a:solidFill>
+                  <a:srgbClr val="003A63"/>
+                </a:solidFill>
+                <a:latin typeface="Aptos" pitchFamily="34" charset="0"/>
+                <a:ea typeface="Aptos" pitchFamily="34" charset="-122"/>
+                <a:cs typeface="Aptos" pitchFamily="34" charset="-120"/>
+              </a:rPr>
+              <a:t>Concept to action</a:t>
+            </a:r>
+            <a:endParaRPr lang="en-US" sz="1000" dirty="0"/>
+          </a:p>
+        </p:txBody>
+      </p:sp>
+      <p:sp>
+        <p:nvSpPr>
+          <p:cNvPr id="18" name="Shape 16"/>
+          <p:cNvSpPr/>
+          <p:nvPr/>
+        </p:nvSpPr>
+        <p:spPr>
+          <a:xfrm>
+            <a:off x="7635240" y="4498848"/>
+            <a:ext cx="3474720" cy="1143000"/>
+          </a:xfrm>
+          <a:prstGeom prst="roundRect">
+            <a:avLst>
+              <a:gd name="adj" fmla="val 9600"/>
             </a:avLst>
           </a:prstGeom>
           <a:solidFill>
@@ -4143,14 +4379,14 @@
       </p:sp>
       <p:sp>
         <p:nvSpPr>
-          <p:cNvPr id="14" name="Text 12"/>
-          <p:cNvSpPr/>
-          <p:nvPr/>
-        </p:nvSpPr>
-        <p:spPr>
-          <a:xfrm>
-            <a:off x="8074152" y="3666744"/>
-            <a:ext cx="2825496" cy="256032"/>
+          <p:cNvPr id="19" name="Text 17"/>
+          <p:cNvSpPr/>
+          <p:nvPr/>
+        </p:nvSpPr>
+        <p:spPr>
+          <a:xfrm>
+            <a:off x="7799832" y="4645152"/>
+            <a:ext cx="3145536" cy="256032"/>
           </a:xfrm>
           <a:prstGeom prst="rect">
             <a:avLst/>
@@ -4174,7 +4410,7 @@
                 <a:ea typeface="Aptos" pitchFamily="34" charset="-122"/>
                 <a:cs typeface="Aptos" pitchFamily="34" charset="-120"/>
               </a:rPr>
-              <a:t>Use this for</a:t>
+              <a:t>Apply it</a:t>
             </a:r>
             <a:endParaRPr lang="en-US" sz="1300" dirty="0"/>
           </a:p>
@@ -4182,14 +4418,14 @@
       </p:sp>
       <p:sp>
         <p:nvSpPr>
-          <p:cNvPr id="15" name="Text 13"/>
-          <p:cNvSpPr/>
-          <p:nvPr/>
-        </p:nvSpPr>
-        <p:spPr>
-          <a:xfrm>
-            <a:off x="8074152" y="4023360"/>
-            <a:ext cx="2825496" cy="1097280"/>
+          <p:cNvPr id="20" name="Text 18"/>
+          <p:cNvSpPr/>
+          <p:nvPr/>
+        </p:nvSpPr>
+        <p:spPr>
+          <a:xfrm>
+            <a:off x="7799832" y="5001768"/>
+            <a:ext cx="3145536" cy="502920"/>
           </a:xfrm>
           <a:prstGeom prst="rect">
             <a:avLst/>
@@ -4215,7 +4451,7 @@
                 <a:ea typeface="Aptos" pitchFamily="34" charset="-122"/>
                 <a:cs typeface="Aptos" pitchFamily="34" charset="-120"/>
               </a:rPr>
-              <a:t>Connect the concept to public health decisions, safeguards, documentation, or implementation work.</a:t>
+              <a:t>Connect the concept to public health purpose, responsible use, required safeguards, documentation, and the next action a department should take.</a:t>
             </a:r>
             <a:endParaRPr lang="en-US" sz="1550" dirty="0"/>
           </a:p>
@@ -4389,8 +4625,8 @@
         </p:nvSpPr>
         <p:spPr>
           <a:xfrm>
-            <a:off x="9966960" y="6537960"/>
-            <a:ext cx="1645920" cy="201168"/>
+            <a:off x="9646920" y="6537960"/>
+            <a:ext cx="1965960" cy="201168"/>
           </a:xfrm>
           <a:prstGeom prst="rect">
             <a:avLst/>
@@ -4414,7 +4650,7 @@
                 <a:ea typeface="Aptos" pitchFamily="34" charset="-122"/>
                 <a:cs typeface="Aptos" pitchFamily="34" charset="-120"/>
               </a:rPr>
-              <a:t>Â© Paula Soper</a:t>
+              <a:t>Copyright Paula Soper</a:t>
             </a:r>
             <a:endParaRPr lang="en-US" sz="800" dirty="0"/>
           </a:p>
@@ -4461,77 +4697,13 @@
       </p:sp>
       <p:sp>
         <p:nvSpPr>
-          <p:cNvPr id="8" name="Shape 6"/>
+          <p:cNvPr id="8" name="Text 6"/>
           <p:cNvSpPr/>
           <p:nvPr/>
         </p:nvSpPr>
         <p:spPr>
           <a:xfrm>
             <a:off x="640080" y="658368"/>
-            <a:ext cx="420624" cy="420624"/>
-          </a:xfrm>
-          <a:prstGeom prst="ellipse">
-            <a:avLst/>
-          </a:prstGeom>
-          <a:solidFill>
-            <a:srgbClr val="0068B7"/>
-          </a:solidFill>
-          <a:ln w="12700">
-            <a:solidFill>
-              <a:srgbClr val="0068B7"/>
-            </a:solidFill>
-            <a:prstDash val="solid"/>
-          </a:ln>
-        </p:spPr>
-      </p:sp>
-      <p:sp>
-        <p:nvSpPr>
-          <p:cNvPr id="9" name="Text 7"/>
-          <p:cNvSpPr/>
-          <p:nvPr/>
-        </p:nvSpPr>
-        <p:spPr>
-          <a:xfrm>
-            <a:off x="640080" y="731520"/>
-            <a:ext cx="420624" cy="164592"/>
-          </a:xfrm>
-          <a:prstGeom prst="rect">
-            <a:avLst/>
-          </a:prstGeom>
-          <a:noFill/>
-          <a:ln/>
-        </p:spPr>
-        <p:txBody>
-          <a:bodyPr wrap="square" lIns="0" tIns="0" rIns="0" bIns="0" rtlCol="0" anchor="ctr"/>
-          <a:lstStyle/>
-          <a:p>
-            <a:pPr algn="ctr" indent="0" marL="0">
-              <a:buNone/>
-            </a:pPr>
-            <a:r>
-              <a:rPr lang="en-US" sz="1100" b="1" dirty="0">
-                <a:solidFill>
-                  <a:srgbClr val="FFFFFF"/>
-                </a:solidFill>
-                <a:latin typeface="Aptos" pitchFamily="34" charset="0"/>
-                <a:ea typeface="Aptos" pitchFamily="34" charset="-122"/>
-                <a:cs typeface="Aptos" pitchFamily="34" charset="-120"/>
-              </a:rPr>
-              <a:t>6</a:t>
-            </a:r>
-            <a:endParaRPr lang="en-US" sz="1100" dirty="0"/>
-          </a:p>
-        </p:txBody>
-      </p:sp>
-      <p:sp>
-        <p:nvSpPr>
-          <p:cNvPr id="10" name="Text 8"/>
-          <p:cNvSpPr/>
-          <p:nvPr/>
-        </p:nvSpPr>
-        <p:spPr>
-          <a:xfrm>
-            <a:off x="640080" y="621792"/>
             <a:ext cx="10881360" cy="713232"/>
           </a:xfrm>
           <a:prstGeom prst="rect">
@@ -4566,14 +4738,14 @@
       </p:sp>
       <p:sp>
         <p:nvSpPr>
-          <p:cNvPr id="11" name="Text 9"/>
+          <p:cNvPr id="9" name="Text 7"/>
           <p:cNvSpPr/>
           <p:nvPr/>
         </p:nvSpPr>
         <p:spPr>
           <a:xfrm>
             <a:off x="868680" y="1508760"/>
-            <a:ext cx="6537960" cy="4160520"/>
+            <a:ext cx="6309360" cy="4160520"/>
           </a:xfrm>
           <a:prstGeom prst="rect">
             <a:avLst/>
@@ -4632,18 +4804,18 @@
       </p:sp>
       <p:sp>
         <p:nvSpPr>
-          <p:cNvPr id="12" name="Shape 10"/>
-          <p:cNvSpPr/>
-          <p:nvPr/>
-        </p:nvSpPr>
-        <p:spPr>
-          <a:xfrm>
-            <a:off x="7909560" y="1417320"/>
-            <a:ext cx="3154680" cy="1828800"/>
+          <p:cNvPr id="10" name="Shape 8"/>
+          <p:cNvSpPr/>
+          <p:nvPr/>
+        </p:nvSpPr>
+        <p:spPr>
+          <a:xfrm>
+            <a:off x="7635240" y="1325880"/>
+            <a:ext cx="3474720" cy="1325880"/>
           </a:xfrm>
           <a:prstGeom prst="roundRect">
             <a:avLst>
-              <a:gd name="adj" fmla="val 6000"/>
+              <a:gd name="adj" fmla="val 8276"/>
             </a:avLst>
           </a:prstGeom>
           <a:solidFill>
@@ -4659,14 +4831,14 @@
       </p:sp>
       <p:sp>
         <p:nvSpPr>
-          <p:cNvPr id="13" name="Text 11"/>
-          <p:cNvSpPr/>
-          <p:nvPr/>
-        </p:nvSpPr>
-        <p:spPr>
-          <a:xfrm>
-            <a:off x="8074152" y="1563624"/>
-            <a:ext cx="2825496" cy="256032"/>
+          <p:cNvPr id="11" name="Text 9"/>
+          <p:cNvSpPr/>
+          <p:nvPr/>
+        </p:nvSpPr>
+        <p:spPr>
+          <a:xfrm>
+            <a:off x="7799832" y="1472184"/>
+            <a:ext cx="3145536" cy="256032"/>
           </a:xfrm>
           <a:prstGeom prst="rect">
             <a:avLst/>
@@ -4690,7 +4862,7 @@
                 <a:ea typeface="Aptos" pitchFamily="34" charset="-122"/>
                 <a:cs typeface="Aptos" pitchFamily="34" charset="-120"/>
               </a:rPr>
-              <a:t>Key idea</a:t>
+              <a:t>Risk check</a:t>
             </a:r>
             <a:endParaRPr lang="en-US" sz="1300" dirty="0"/>
           </a:p>
@@ -4698,14 +4870,14 @@
       </p:sp>
       <p:sp>
         <p:nvSpPr>
-          <p:cNvPr id="14" name="Text 12"/>
-          <p:cNvSpPr/>
-          <p:nvPr/>
-        </p:nvSpPr>
-        <p:spPr>
-          <a:xfrm>
-            <a:off x="8074152" y="1920240"/>
-            <a:ext cx="2825496" cy="1188720"/>
+          <p:cNvPr id="12" name="Text 10"/>
+          <p:cNvSpPr/>
+          <p:nvPr/>
+        </p:nvSpPr>
+        <p:spPr>
+          <a:xfrm>
+            <a:off x="7799832" y="1828800"/>
+            <a:ext cx="3145536" cy="685800"/>
           </a:xfrm>
           <a:prstGeom prst="rect">
             <a:avLst/>
@@ -4739,18 +4911,171 @@
       </p:sp>
       <p:sp>
         <p:nvSpPr>
-          <p:cNvPr id="15" name="Shape 13"/>
-          <p:cNvSpPr/>
-          <p:nvPr/>
-        </p:nvSpPr>
-        <p:spPr>
-          <a:xfrm>
-            <a:off x="7909560" y="3520440"/>
-            <a:ext cx="3154680" cy="1737360"/>
+          <p:cNvPr id="13" name="Shape 11"/>
+          <p:cNvSpPr/>
+          <p:nvPr/>
+        </p:nvSpPr>
+        <p:spPr>
+          <a:xfrm>
+            <a:off x="7635240" y="2788920"/>
+            <a:ext cx="3474720" cy="1536192"/>
           </a:xfrm>
           <a:prstGeom prst="roundRect">
             <a:avLst>
-              <a:gd name="adj" fmla="val 6316"/>
+              <a:gd name="adj" fmla="val 7143"/>
+            </a:avLst>
+          </a:prstGeom>
+          <a:solidFill>
+            <a:srgbClr val="FFFFFF">
+              <a:alpha val="88000"/>
+            </a:srgbClr>
+          </a:solidFill>
+          <a:ln w="12700">
+            <a:solidFill>
+              <a:srgbClr val="D6E8F2"/>
+            </a:solidFill>
+            <a:prstDash val="solid"/>
+          </a:ln>
+        </p:spPr>
+      </p:sp>
+      <p:sp>
+        <p:nvSpPr>
+          <p:cNvPr id="14" name="Shape 12"/>
+          <p:cNvSpPr/>
+          <p:nvPr/>
+        </p:nvSpPr>
+        <p:spPr>
+          <a:xfrm>
+            <a:off x="8046720" y="3108960"/>
+            <a:ext cx="2651760" cy="896112"/>
+          </a:xfrm>
+          <a:prstGeom prst="arc">
+            <a:avLst/>
+          </a:prstGeom>
+          <a:noFill/>
+          <a:ln w="25400">
+            <a:solidFill>
+              <a:srgbClr val="0068B7"/>
+            </a:solidFill>
+            <a:prstDash val="solid"/>
+          </a:ln>
+        </p:spPr>
+      </p:sp>
+      <p:sp>
+        <p:nvSpPr>
+          <p:cNvPr id="15" name="Text 13"/>
+          <p:cNvSpPr/>
+          <p:nvPr/>
+        </p:nvSpPr>
+        <p:spPr>
+          <a:xfrm>
+            <a:off x="7909560" y="3099816"/>
+            <a:ext cx="2926080" cy="256032"/>
+          </a:xfrm>
+          <a:prstGeom prst="rect">
+            <a:avLst/>
+          </a:prstGeom>
+          <a:noFill/>
+          <a:ln/>
+        </p:spPr>
+        <p:txBody>
+          <a:bodyPr wrap="square" lIns="0" tIns="0" rIns="0" bIns="0" rtlCol="0" anchor="ctr"/>
+          <a:lstStyle/>
+          <a:p>
+            <a:pPr algn="ctr" indent="0" marL="0">
+              <a:buNone/>
+            </a:pPr>
+            <a:r>
+              <a:rPr lang="en-US" sz="1500" b="1" dirty="0">
+                <a:solidFill>
+                  <a:srgbClr val="003A63"/>
+                </a:solidFill>
+                <a:latin typeface="Aptos" pitchFamily="34" charset="0"/>
+                <a:ea typeface="Aptos" pitchFamily="34" charset="-122"/>
+                <a:cs typeface="Aptos" pitchFamily="34" charset="-120"/>
+              </a:rPr>
+              <a:t>Risk</a:t>
+            </a:r>
+            <a:endParaRPr lang="en-US" sz="1500" dirty="0"/>
+          </a:p>
+        </p:txBody>
+      </p:sp>
+      <p:sp>
+        <p:nvSpPr>
+          <p:cNvPr id="16" name="Shape 14"/>
+          <p:cNvSpPr/>
+          <p:nvPr/>
+        </p:nvSpPr>
+        <p:spPr>
+          <a:xfrm>
+            <a:off x="8366760" y="3639312"/>
+            <a:ext cx="2011680" cy="0"/>
+          </a:xfrm>
+          <a:prstGeom prst="line">
+            <a:avLst/>
+          </a:prstGeom>
+          <a:noFill/>
+          <a:ln w="63500">
+            <a:solidFill>
+              <a:srgbClr val="2F8A28"/>
+            </a:solidFill>
+            <a:prstDash val="solid"/>
+          </a:ln>
+        </p:spPr>
+      </p:sp>
+      <p:sp>
+        <p:nvSpPr>
+          <p:cNvPr id="17" name="Text 15"/>
+          <p:cNvSpPr/>
+          <p:nvPr/>
+        </p:nvSpPr>
+        <p:spPr>
+          <a:xfrm>
+            <a:off x="7909560" y="3849624"/>
+            <a:ext cx="2926080" cy="164592"/>
+          </a:xfrm>
+          <a:prstGeom prst="rect">
+            <a:avLst/>
+          </a:prstGeom>
+          <a:noFill/>
+          <a:ln/>
+        </p:spPr>
+        <p:txBody>
+          <a:bodyPr wrap="square" lIns="0" tIns="0" rIns="0" bIns="0" rtlCol="0" anchor="ctr"/>
+          <a:lstStyle/>
+          <a:p>
+            <a:pPr algn="ctr" indent="0" marL="0">
+              <a:buNone/>
+            </a:pPr>
+            <a:r>
+              <a:rPr lang="en-US" sz="900" dirty="0">
+                <a:solidFill>
+                  <a:srgbClr val="003A63"/>
+                </a:solidFill>
+                <a:latin typeface="Aptos" pitchFamily="34" charset="0"/>
+                <a:ea typeface="Aptos" pitchFamily="34" charset="-122"/>
+                <a:cs typeface="Aptos" pitchFamily="34" charset="-120"/>
+              </a:rPr>
+              <a:t>Human review</a:t>
+            </a:r>
+            <a:endParaRPr lang="en-US" sz="900" dirty="0"/>
+          </a:p>
+        </p:txBody>
+      </p:sp>
+      <p:sp>
+        <p:nvSpPr>
+          <p:cNvPr id="18" name="Shape 16"/>
+          <p:cNvSpPr/>
+          <p:nvPr/>
+        </p:nvSpPr>
+        <p:spPr>
+          <a:xfrm>
+            <a:off x="7635240" y="4498848"/>
+            <a:ext cx="3474720" cy="1143000"/>
+          </a:xfrm>
+          <a:prstGeom prst="roundRect">
+            <a:avLst>
+              <a:gd name="adj" fmla="val 9600"/>
             </a:avLst>
           </a:prstGeom>
           <a:solidFill>
@@ -4766,14 +5091,14 @@
       </p:sp>
       <p:sp>
         <p:nvSpPr>
-          <p:cNvPr id="16" name="Text 14"/>
-          <p:cNvSpPr/>
-          <p:nvPr/>
-        </p:nvSpPr>
-        <p:spPr>
-          <a:xfrm>
-            <a:off x="8074152" y="3666744"/>
-            <a:ext cx="2825496" cy="256032"/>
+          <p:cNvPr id="19" name="Text 17"/>
+          <p:cNvSpPr/>
+          <p:nvPr/>
+        </p:nvSpPr>
+        <p:spPr>
+          <a:xfrm>
+            <a:off x="7799832" y="4645152"/>
+            <a:ext cx="3145536" cy="256032"/>
           </a:xfrm>
           <a:prstGeom prst="rect">
             <a:avLst/>
@@ -4797,7 +5122,7 @@
                 <a:ea typeface="Aptos" pitchFamily="34" charset="-122"/>
                 <a:cs typeface="Aptos" pitchFamily="34" charset="-120"/>
               </a:rPr>
-              <a:t>Use this for</a:t>
+              <a:t>Safeguard to plan</a:t>
             </a:r>
             <a:endParaRPr lang="en-US" sz="1300" dirty="0"/>
           </a:p>
@@ -4805,14 +5130,14 @@
       </p:sp>
       <p:sp>
         <p:nvSpPr>
-          <p:cNvPr id="17" name="Text 15"/>
-          <p:cNvSpPr/>
-          <p:nvPr/>
-        </p:nvSpPr>
-        <p:spPr>
-          <a:xfrm>
-            <a:off x="8074152" y="4023360"/>
-            <a:ext cx="2825496" cy="1097280"/>
+          <p:cNvPr id="20" name="Text 18"/>
+          <p:cNvSpPr/>
+          <p:nvPr/>
+        </p:nvSpPr>
+        <p:spPr>
+          <a:xfrm>
+            <a:off x="7799832" y="5001768"/>
+            <a:ext cx="3145536" cy="502920"/>
           </a:xfrm>
           <a:prstGeom prst="rect">
             <a:avLst/>
@@ -4838,7 +5163,7 @@
                 <a:ea typeface="Aptos" pitchFamily="34" charset="-122"/>
                 <a:cs typeface="Aptos" pitchFamily="34" charset="-120"/>
               </a:rPr>
-              <a:t>Connect the concept to public health decisions, safeguards, documentation, or implementation work.</a:t>
+              <a:t>Identify what could go wrong, who could be affected, what safeguards are needed, and what evidence should be reviewed before use expands.</a:t>
             </a:r>
             <a:endParaRPr lang="en-US" sz="1550" dirty="0"/>
           </a:p>
@@ -5012,8 +5337,8 @@
         </p:nvSpPr>
         <p:spPr>
           <a:xfrm>
-            <a:off x="9966960" y="6537960"/>
-            <a:ext cx="1645920" cy="201168"/>
+            <a:off x="9646920" y="6537960"/>
+            <a:ext cx="1965960" cy="201168"/>
           </a:xfrm>
           <a:prstGeom prst="rect">
             <a:avLst/>
@@ -5037,7 +5362,7 @@
                 <a:ea typeface="Aptos" pitchFamily="34" charset="-122"/>
                 <a:cs typeface="Aptos" pitchFamily="34" charset="-120"/>
               </a:rPr>
-              <a:t>Â© Paula Soper</a:t>
+              <a:t>Copyright Paula Soper</a:t>
             </a:r>
             <a:endParaRPr lang="en-US" sz="800" dirty="0"/>
           </a:p>
@@ -5132,7 +5457,7 @@
         <p:spPr>
           <a:xfrm>
             <a:off x="868680" y="1508760"/>
-            <a:ext cx="6537960" cy="4160520"/>
+            <a:ext cx="6309360" cy="4160520"/>
           </a:xfrm>
           <a:prstGeom prst="rect">
             <a:avLst/>
@@ -5197,12 +5522,12 @@
         </p:nvSpPr>
         <p:spPr>
           <a:xfrm>
-            <a:off x="7909560" y="1417320"/>
-            <a:ext cx="3154680" cy="1828800"/>
+            <a:off x="7635240" y="1325880"/>
+            <a:ext cx="3474720" cy="1325880"/>
           </a:xfrm>
           <a:prstGeom prst="roundRect">
             <a:avLst>
-              <a:gd name="adj" fmla="val 6000"/>
+              <a:gd name="adj" fmla="val 8276"/>
             </a:avLst>
           </a:prstGeom>
           <a:solidFill>
@@ -5224,8 +5549,8 @@
         </p:nvSpPr>
         <p:spPr>
           <a:xfrm>
-            <a:off x="8074152" y="1563624"/>
-            <a:ext cx="2825496" cy="256032"/>
+            <a:off x="7799832" y="1472184"/>
+            <a:ext cx="3145536" cy="256032"/>
           </a:xfrm>
           <a:prstGeom prst="rect">
             <a:avLst/>
@@ -5249,7 +5574,7 @@
                 <a:ea typeface="Aptos" pitchFamily="34" charset="-122"/>
                 <a:cs typeface="Aptos" pitchFamily="34" charset="-120"/>
               </a:rPr>
-              <a:t>Key idea</a:t>
+              <a:t>Risk check</a:t>
             </a:r>
             <a:endParaRPr lang="en-US" sz="1300" dirty="0"/>
           </a:p>
@@ -5263,8 +5588,8 @@
         </p:nvSpPr>
         <p:spPr>
           <a:xfrm>
-            <a:off x="8074152" y="1920240"/>
-            <a:ext cx="2825496" cy="1188720"/>
+            <a:off x="7799832" y="1828800"/>
+            <a:ext cx="3145536" cy="685800"/>
           </a:xfrm>
           <a:prstGeom prst="rect">
             <a:avLst/>
@@ -5304,12 +5629,165 @@
         </p:nvSpPr>
         <p:spPr>
           <a:xfrm>
-            <a:off x="7909560" y="3520440"/>
-            <a:ext cx="3154680" cy="1737360"/>
+            <a:off x="7635240" y="2788920"/>
+            <a:ext cx="3474720" cy="1536192"/>
           </a:xfrm>
           <a:prstGeom prst="roundRect">
             <a:avLst>
-              <a:gd name="adj" fmla="val 6316"/>
+              <a:gd name="adj" fmla="val 7143"/>
+            </a:avLst>
+          </a:prstGeom>
+          <a:solidFill>
+            <a:srgbClr val="FFFFFF">
+              <a:alpha val="88000"/>
+            </a:srgbClr>
+          </a:solidFill>
+          <a:ln w="12700">
+            <a:solidFill>
+              <a:srgbClr val="D6E8F2"/>
+            </a:solidFill>
+            <a:prstDash val="solid"/>
+          </a:ln>
+        </p:spPr>
+      </p:sp>
+      <p:sp>
+        <p:nvSpPr>
+          <p:cNvPr id="14" name="Shape 12"/>
+          <p:cNvSpPr/>
+          <p:nvPr/>
+        </p:nvSpPr>
+        <p:spPr>
+          <a:xfrm>
+            <a:off x="8046720" y="3108960"/>
+            <a:ext cx="2651760" cy="896112"/>
+          </a:xfrm>
+          <a:prstGeom prst="arc">
+            <a:avLst/>
+          </a:prstGeom>
+          <a:noFill/>
+          <a:ln w="25400">
+            <a:solidFill>
+              <a:srgbClr val="0068B7"/>
+            </a:solidFill>
+            <a:prstDash val="solid"/>
+          </a:ln>
+        </p:spPr>
+      </p:sp>
+      <p:sp>
+        <p:nvSpPr>
+          <p:cNvPr id="15" name="Text 13"/>
+          <p:cNvSpPr/>
+          <p:nvPr/>
+        </p:nvSpPr>
+        <p:spPr>
+          <a:xfrm>
+            <a:off x="7909560" y="3099816"/>
+            <a:ext cx="2926080" cy="256032"/>
+          </a:xfrm>
+          <a:prstGeom prst="rect">
+            <a:avLst/>
+          </a:prstGeom>
+          <a:noFill/>
+          <a:ln/>
+        </p:spPr>
+        <p:txBody>
+          <a:bodyPr wrap="square" lIns="0" tIns="0" rIns="0" bIns="0" rtlCol="0" anchor="ctr"/>
+          <a:lstStyle/>
+          <a:p>
+            <a:pPr algn="ctr" indent="0" marL="0">
+              <a:buNone/>
+            </a:pPr>
+            <a:r>
+              <a:rPr lang="en-US" sz="1500" b="1" dirty="0">
+                <a:solidFill>
+                  <a:srgbClr val="003A63"/>
+                </a:solidFill>
+                <a:latin typeface="Aptos" pitchFamily="34" charset="0"/>
+                <a:ea typeface="Aptos" pitchFamily="34" charset="-122"/>
+                <a:cs typeface="Aptos" pitchFamily="34" charset="-120"/>
+              </a:rPr>
+              <a:t>Risk</a:t>
+            </a:r>
+            <a:endParaRPr lang="en-US" sz="1500" dirty="0"/>
+          </a:p>
+        </p:txBody>
+      </p:sp>
+      <p:sp>
+        <p:nvSpPr>
+          <p:cNvPr id="16" name="Shape 14"/>
+          <p:cNvSpPr/>
+          <p:nvPr/>
+        </p:nvSpPr>
+        <p:spPr>
+          <a:xfrm>
+            <a:off x="8366760" y="3639312"/>
+            <a:ext cx="2011680" cy="0"/>
+          </a:xfrm>
+          <a:prstGeom prst="line">
+            <a:avLst/>
+          </a:prstGeom>
+          <a:noFill/>
+          <a:ln w="63500">
+            <a:solidFill>
+              <a:srgbClr val="2F8A28"/>
+            </a:solidFill>
+            <a:prstDash val="solid"/>
+          </a:ln>
+        </p:spPr>
+      </p:sp>
+      <p:sp>
+        <p:nvSpPr>
+          <p:cNvPr id="17" name="Text 15"/>
+          <p:cNvSpPr/>
+          <p:nvPr/>
+        </p:nvSpPr>
+        <p:spPr>
+          <a:xfrm>
+            <a:off x="7909560" y="3849624"/>
+            <a:ext cx="2926080" cy="164592"/>
+          </a:xfrm>
+          <a:prstGeom prst="rect">
+            <a:avLst/>
+          </a:prstGeom>
+          <a:noFill/>
+          <a:ln/>
+        </p:spPr>
+        <p:txBody>
+          <a:bodyPr wrap="square" lIns="0" tIns="0" rIns="0" bIns="0" rtlCol="0" anchor="ctr"/>
+          <a:lstStyle/>
+          <a:p>
+            <a:pPr algn="ctr" indent="0" marL="0">
+              <a:buNone/>
+            </a:pPr>
+            <a:r>
+              <a:rPr lang="en-US" sz="900" dirty="0">
+                <a:solidFill>
+                  <a:srgbClr val="003A63"/>
+                </a:solidFill>
+                <a:latin typeface="Aptos" pitchFamily="34" charset="0"/>
+                <a:ea typeface="Aptos" pitchFamily="34" charset="-122"/>
+                <a:cs typeface="Aptos" pitchFamily="34" charset="-120"/>
+              </a:rPr>
+              <a:t>Human review</a:t>
+            </a:r>
+            <a:endParaRPr lang="en-US" sz="900" dirty="0"/>
+          </a:p>
+        </p:txBody>
+      </p:sp>
+      <p:sp>
+        <p:nvSpPr>
+          <p:cNvPr id="18" name="Shape 16"/>
+          <p:cNvSpPr/>
+          <p:nvPr/>
+        </p:nvSpPr>
+        <p:spPr>
+          <a:xfrm>
+            <a:off x="7635240" y="4498848"/>
+            <a:ext cx="3474720" cy="1143000"/>
+          </a:xfrm>
+          <a:prstGeom prst="roundRect">
+            <a:avLst>
+              <a:gd name="adj" fmla="val 9600"/>
             </a:avLst>
           </a:prstGeom>
           <a:solidFill>
@@ -5325,14 +5803,14 @@
       </p:sp>
       <p:sp>
         <p:nvSpPr>
-          <p:cNvPr id="14" name="Text 12"/>
-          <p:cNvSpPr/>
-          <p:nvPr/>
-        </p:nvSpPr>
-        <p:spPr>
-          <a:xfrm>
-            <a:off x="8074152" y="3666744"/>
-            <a:ext cx="2825496" cy="256032"/>
+          <p:cNvPr id="19" name="Text 17"/>
+          <p:cNvSpPr/>
+          <p:nvPr/>
+        </p:nvSpPr>
+        <p:spPr>
+          <a:xfrm>
+            <a:off x="7799832" y="4645152"/>
+            <a:ext cx="3145536" cy="256032"/>
           </a:xfrm>
           <a:prstGeom prst="rect">
             <a:avLst/>
@@ -5356,7 +5834,7 @@
                 <a:ea typeface="Aptos" pitchFamily="34" charset="-122"/>
                 <a:cs typeface="Aptos" pitchFamily="34" charset="-120"/>
               </a:rPr>
-              <a:t>Use this for</a:t>
+              <a:t>Safeguard to plan</a:t>
             </a:r>
             <a:endParaRPr lang="en-US" sz="1300" dirty="0"/>
           </a:p>
@@ -5364,14 +5842,14 @@
       </p:sp>
       <p:sp>
         <p:nvSpPr>
-          <p:cNvPr id="15" name="Text 13"/>
-          <p:cNvSpPr/>
-          <p:nvPr/>
-        </p:nvSpPr>
-        <p:spPr>
-          <a:xfrm>
-            <a:off x="8074152" y="4023360"/>
-            <a:ext cx="2825496" cy="1097280"/>
+          <p:cNvPr id="20" name="Text 18"/>
+          <p:cNvSpPr/>
+          <p:nvPr/>
+        </p:nvSpPr>
+        <p:spPr>
+          <a:xfrm>
+            <a:off x="7799832" y="5001768"/>
+            <a:ext cx="3145536" cy="502920"/>
           </a:xfrm>
           <a:prstGeom prst="rect">
             <a:avLst/>
@@ -5397,7 +5875,7 @@
                 <a:ea typeface="Aptos" pitchFamily="34" charset="-122"/>
                 <a:cs typeface="Aptos" pitchFamily="34" charset="-120"/>
               </a:rPr>
-              <a:t>Connect the concept to public health decisions, safeguards, documentation, or implementation work.</a:t>
+              <a:t>Identify what could go wrong, who could be affected, what safeguards are needed, and what evidence should be reviewed before use expands.</a:t>
             </a:r>
             <a:endParaRPr lang="en-US" sz="1550" dirty="0"/>
           </a:p>
@@ -5571,8 +6049,8 @@
         </p:nvSpPr>
         <p:spPr>
           <a:xfrm>
-            <a:off x="9966960" y="6537960"/>
-            <a:ext cx="1645920" cy="201168"/>
+            <a:off x="9646920" y="6537960"/>
+            <a:ext cx="1965960" cy="201168"/>
           </a:xfrm>
           <a:prstGeom prst="rect">
             <a:avLst/>
@@ -5596,7 +6074,7 @@
                 <a:ea typeface="Aptos" pitchFamily="34" charset="-122"/>
                 <a:cs typeface="Aptos" pitchFamily="34" charset="-120"/>
               </a:rPr>
-              <a:t>Â© Paula Soper</a:t>
+              <a:t>Copyright Paula Soper</a:t>
             </a:r>
             <a:endParaRPr lang="en-US" sz="800" dirty="0"/>
           </a:p>
@@ -5643,17 +6121,262 @@
       </p:sp>
       <p:sp>
         <p:nvSpPr>
-          <p:cNvPr id="8" name="Shape 6"/>
+          <p:cNvPr id="8" name="Text 6"/>
           <p:cNvSpPr/>
           <p:nvPr/>
         </p:nvSpPr>
         <p:spPr>
           <a:xfrm>
             <a:off x="640080" y="658368"/>
-            <a:ext cx="420624" cy="420624"/>
-          </a:xfrm>
-          <a:prstGeom prst="ellipse">
-            <a:avLst/>
+            <a:ext cx="10881360" cy="713232"/>
+          </a:xfrm>
+          <a:prstGeom prst="rect">
+            <a:avLst/>
+          </a:prstGeom>
+          <a:noFill/>
+          <a:ln/>
+        </p:spPr>
+        <p:txBody>
+          <a:bodyPr wrap="square" lIns="0" tIns="0" rIns="0" bIns="0" rtlCol="0" anchor="ctr">
+            <a:normAutofit/>
+          </a:bodyPr>
+          <a:lstStyle/>
+          <a:p>
+            <a:pPr indent="0" marL="0">
+              <a:buNone/>
+            </a:pPr>
+            <a:r>
+              <a:rPr lang="en-US" sz="3400" b="1" dirty="0">
+                <a:solidFill>
+                  <a:srgbClr val="003A63"/>
+                </a:solidFill>
+                <a:latin typeface="Aptos Display" pitchFamily="34" charset="0"/>
+                <a:ea typeface="Aptos Display" pitchFamily="34" charset="-122"/>
+                <a:cs typeface="Aptos Display" pitchFamily="34" charset="-120"/>
+              </a:rPr>
+              <a:t>Application to AI-Supported Workflows</a:t>
+            </a:r>
+            <a:endParaRPr lang="en-US" sz="3400" dirty="0"/>
+          </a:p>
+        </p:txBody>
+      </p:sp>
+      <p:sp>
+        <p:nvSpPr>
+          <p:cNvPr id="9" name="Text 7"/>
+          <p:cNvSpPr/>
+          <p:nvPr/>
+        </p:nvSpPr>
+        <p:spPr>
+          <a:xfrm>
+            <a:off x="868680" y="1508760"/>
+            <a:ext cx="6309360" cy="4160520"/>
+          </a:xfrm>
+          <a:prstGeom prst="rect">
+            <a:avLst/>
+          </a:prstGeom>
+          <a:noFill/>
+          <a:ln/>
+        </p:spPr>
+        <p:txBody>
+          <a:bodyPr wrap="square" lIns="635" tIns="635" rIns="635" bIns="635" rtlCol="0" anchor="t">
+            <a:normAutofit/>
+          </a:bodyPr>
+          <a:lstStyle/>
+          <a:p>
+            <a:r>
+              <a:rPr lang="en-US" sz="2100" dirty="0">
+                <a:solidFill>
+                  <a:srgbClr val="17364A"/>
+                </a:solidFill>
+                <a:latin typeface="Aptos" pitchFamily="34" charset="0"/>
+                <a:ea typeface="Aptos" pitchFamily="34" charset="-122"/>
+                <a:cs typeface="Aptos" pitchFamily="34" charset="-120"/>
+              </a:rPr>
+              <a:t>AI for Social Good applies to every AI method.</a:t>
+            </a:r>
+            <a:endParaRPr lang="en-US" sz="2100" dirty="0"/>
+          </a:p>
+          <a:p>
+            <a:r>
+              <a:rPr lang="en-US" sz="2100" dirty="0">
+                <a:solidFill>
+                  <a:srgbClr val="17364A"/>
+                </a:solidFill>
+                <a:latin typeface="Aptos" pitchFamily="34" charset="0"/>
+                <a:ea typeface="Aptos" pitchFamily="34" charset="-122"/>
+                <a:cs typeface="Aptos" pitchFamily="34" charset="-120"/>
+              </a:rPr>
+              <a:t>Generative AI may improve plain-language communication, but it must be accurate, accessible, and.</a:t>
+            </a:r>
+            <a:endParaRPr lang="en-US" sz="2100" dirty="0"/>
+          </a:p>
+          <a:p>
+            <a:r>
+              <a:rPr lang="en-US" sz="2100" dirty="0">
+                <a:solidFill>
+                  <a:srgbClr val="17364A"/>
+                </a:solidFill>
+                <a:latin typeface="Aptos" pitchFamily="34" charset="0"/>
+                <a:ea typeface="Aptos" pitchFamily="34" charset="-122"/>
+                <a:cs typeface="Aptos" pitchFamily="34" charset="-120"/>
+              </a:rPr>
+              <a:t>Predictive analytics may guide supportive outreach, but it should not become a tool for exclusion.</a:t>
+            </a:r>
+            <a:endParaRPr lang="en-US" sz="2100" dirty="0"/>
+          </a:p>
+        </p:txBody>
+      </p:sp>
+      <p:sp>
+        <p:nvSpPr>
+          <p:cNvPr id="10" name="Shape 8"/>
+          <p:cNvSpPr/>
+          <p:nvPr/>
+        </p:nvSpPr>
+        <p:spPr>
+          <a:xfrm>
+            <a:off x="7635240" y="1325880"/>
+            <a:ext cx="3474720" cy="1325880"/>
+          </a:xfrm>
+          <a:prstGeom prst="roundRect">
+            <a:avLst>
+              <a:gd name="adj" fmla="val 8276"/>
+            </a:avLst>
+          </a:prstGeom>
+          <a:solidFill>
+            <a:srgbClr val="EEF8ED"/>
+          </a:solidFill>
+          <a:ln w="12700">
+            <a:solidFill>
+              <a:srgbClr val="B9D7E6"/>
+            </a:solidFill>
+            <a:prstDash val="solid"/>
+          </a:ln>
+        </p:spPr>
+      </p:sp>
+      <p:sp>
+        <p:nvSpPr>
+          <p:cNvPr id="11" name="Text 9"/>
+          <p:cNvSpPr/>
+          <p:nvPr/>
+        </p:nvSpPr>
+        <p:spPr>
+          <a:xfrm>
+            <a:off x="7799832" y="1472184"/>
+            <a:ext cx="3145536" cy="256032"/>
+          </a:xfrm>
+          <a:prstGeom prst="rect">
+            <a:avLst/>
+          </a:prstGeom>
+          <a:noFill/>
+          <a:ln/>
+        </p:spPr>
+        <p:txBody>
+          <a:bodyPr wrap="square" lIns="0" tIns="0" rIns="0" bIns="0" rtlCol="0" anchor="ctr"/>
+          <a:lstStyle/>
+          <a:p>
+            <a:pPr indent="0" marL="0">
+              <a:buNone/>
+            </a:pPr>
+            <a:r>
+              <a:rPr lang="en-US" sz="1300" b="1" dirty="0">
+                <a:solidFill>
+                  <a:srgbClr val="0068B7"/>
+                </a:solidFill>
+                <a:latin typeface="Aptos" pitchFamily="34" charset="0"/>
+                <a:ea typeface="Aptos" pitchFamily="34" charset="-122"/>
+                <a:cs typeface="Aptos" pitchFamily="34" charset="-120"/>
+              </a:rPr>
+              <a:t>Implementation cue</a:t>
+            </a:r>
+            <a:endParaRPr lang="en-US" sz="1300" dirty="0"/>
+          </a:p>
+        </p:txBody>
+      </p:sp>
+      <p:sp>
+        <p:nvSpPr>
+          <p:cNvPr id="12" name="Text 10"/>
+          <p:cNvSpPr/>
+          <p:nvPr/>
+        </p:nvSpPr>
+        <p:spPr>
+          <a:xfrm>
+            <a:off x="7799832" y="1828800"/>
+            <a:ext cx="3145536" cy="685800"/>
+          </a:xfrm>
+          <a:prstGeom prst="rect">
+            <a:avLst/>
+          </a:prstGeom>
+          <a:noFill/>
+          <a:ln/>
+        </p:spPr>
+        <p:txBody>
+          <a:bodyPr wrap="square" lIns="0" tIns="0" rIns="0" bIns="0" rtlCol="0" anchor="t">
+            <a:normAutofit/>
+          </a:bodyPr>
+          <a:lstStyle/>
+          <a:p>
+            <a:pPr indent="0" marL="0">
+              <a:buNone/>
+            </a:pPr>
+            <a:r>
+              <a:rPr lang="en-US" sz="1550" dirty="0">
+                <a:solidFill>
+                  <a:srgbClr val="17364A"/>
+                </a:solidFill>
+                <a:latin typeface="Aptos" pitchFamily="34" charset="0"/>
+                <a:ea typeface="Aptos" pitchFamily="34" charset="-122"/>
+                <a:cs typeface="Aptos" pitchFamily="34" charset="-120"/>
+              </a:rPr>
+              <a:t>AI for Social Good applies to every AI method.</a:t>
+            </a:r>
+            <a:endParaRPr lang="en-US" sz="1550" dirty="0"/>
+          </a:p>
+        </p:txBody>
+      </p:sp>
+      <p:sp>
+        <p:nvSpPr>
+          <p:cNvPr id="13" name="Shape 11"/>
+          <p:cNvSpPr/>
+          <p:nvPr/>
+        </p:nvSpPr>
+        <p:spPr>
+          <a:xfrm>
+            <a:off x="7635240" y="2788920"/>
+            <a:ext cx="3474720" cy="1536192"/>
+          </a:xfrm>
+          <a:prstGeom prst="roundRect">
+            <a:avLst>
+              <a:gd name="adj" fmla="val 7143"/>
+            </a:avLst>
+          </a:prstGeom>
+          <a:solidFill>
+            <a:srgbClr val="FFFFFF">
+              <a:alpha val="88000"/>
+            </a:srgbClr>
+          </a:solidFill>
+          <a:ln w="12700">
+            <a:solidFill>
+              <a:srgbClr val="D6E8F2"/>
+            </a:solidFill>
+            <a:prstDash val="solid"/>
+          </a:ln>
+        </p:spPr>
+      </p:sp>
+      <p:sp>
+        <p:nvSpPr>
+          <p:cNvPr id="14" name="Shape 12"/>
+          <p:cNvSpPr/>
+          <p:nvPr/>
+        </p:nvSpPr>
+        <p:spPr>
+          <a:xfrm>
+            <a:off x="7927848" y="3319272"/>
+            <a:ext cx="792480" cy="749808"/>
+          </a:xfrm>
+          <a:prstGeom prst="roundRect">
+            <a:avLst>
+              <a:gd name="adj" fmla="val 14634"/>
+            </a:avLst>
           </a:prstGeom>
           <a:solidFill>
             <a:srgbClr val="0068B7"/>
@@ -5668,53 +6391,14 @@
       </p:sp>
       <p:sp>
         <p:nvSpPr>
-          <p:cNvPr id="9" name="Text 7"/>
-          <p:cNvSpPr/>
-          <p:nvPr/>
-        </p:nvSpPr>
-        <p:spPr>
-          <a:xfrm>
-            <a:off x="640080" y="731520"/>
-            <a:ext cx="420624" cy="164592"/>
-          </a:xfrm>
-          <a:prstGeom prst="rect">
-            <a:avLst/>
-          </a:prstGeom>
-          <a:noFill/>
-          <a:ln/>
-        </p:spPr>
-        <p:txBody>
-          <a:bodyPr wrap="square" lIns="0" tIns="0" rIns="0" bIns="0" rtlCol="0" anchor="ctr"/>
-          <a:lstStyle/>
-          <a:p>
-            <a:pPr algn="ctr" indent="0" marL="0">
-              <a:buNone/>
-            </a:pPr>
-            <a:r>
-              <a:rPr lang="en-US" sz="1100" b="1" dirty="0">
-                <a:solidFill>
-                  <a:srgbClr val="FFFFFF"/>
-                </a:solidFill>
-                <a:latin typeface="Aptos" pitchFamily="34" charset="0"/>
-                <a:ea typeface="Aptos" pitchFamily="34" charset="-122"/>
-                <a:cs typeface="Aptos" pitchFamily="34" charset="-120"/>
-              </a:rPr>
-              <a:t>7</a:t>
-            </a:r>
-            <a:endParaRPr lang="en-US" sz="1100" dirty="0"/>
-          </a:p>
-        </p:txBody>
-      </p:sp>
-      <p:sp>
-        <p:nvSpPr>
-          <p:cNvPr id="10" name="Text 8"/>
-          <p:cNvSpPr/>
-          <p:nvPr/>
-        </p:nvSpPr>
-        <p:spPr>
-          <a:xfrm>
-            <a:off x="640080" y="621792"/>
-            <a:ext cx="10881360" cy="713232"/>
+          <p:cNvPr id="15" name="Text 13"/>
+          <p:cNvSpPr/>
+          <p:nvPr/>
+        </p:nvSpPr>
+        <p:spPr>
+          <a:xfrm>
+            <a:off x="8001000" y="3511296"/>
+            <a:ext cx="646176" cy="310896"/>
           </a:xfrm>
           <a:prstGeom prst="rect">
             <a:avLst/>
@@ -5728,112 +6412,46 @@
           </a:bodyPr>
           <a:lstStyle/>
           <a:p>
-            <a:pPr indent="0" marL="0">
-              <a:buNone/>
-            </a:pPr>
-            <a:r>
-              <a:rPr lang="en-US" sz="3400" b="1" dirty="0">
-                <a:solidFill>
-                  <a:srgbClr val="003A63"/>
-                </a:solidFill>
-                <a:latin typeface="Aptos Display" pitchFamily="34" charset="0"/>
-                <a:ea typeface="Aptos Display" pitchFamily="34" charset="-122"/>
-                <a:cs typeface="Aptos Display" pitchFamily="34" charset="-120"/>
-              </a:rPr>
-              <a:t>Application to AI-Supported Workflows</a:t>
-            </a:r>
-            <a:endParaRPr lang="en-US" sz="3400" dirty="0"/>
-          </a:p>
-        </p:txBody>
-      </p:sp>
-      <p:sp>
-        <p:nvSpPr>
-          <p:cNvPr id="11" name="Text 9"/>
-          <p:cNvSpPr/>
-          <p:nvPr/>
-        </p:nvSpPr>
-        <p:spPr>
-          <a:xfrm>
-            <a:off x="868680" y="1508760"/>
-            <a:ext cx="6537960" cy="4160520"/>
-          </a:xfrm>
-          <a:prstGeom prst="rect">
-            <a:avLst/>
-          </a:prstGeom>
-          <a:noFill/>
-          <a:ln/>
-        </p:spPr>
-        <p:txBody>
-          <a:bodyPr wrap="square" lIns="635" tIns="635" rIns="635" bIns="635" rtlCol="0" anchor="t">
-            <a:normAutofit/>
-          </a:bodyPr>
-          <a:lstStyle/>
-          <a:p>
-            <a:r>
-              <a:rPr lang="en-US" sz="2100" dirty="0">
-                <a:solidFill>
-                  <a:srgbClr val="17364A"/>
-                </a:solidFill>
-                <a:latin typeface="Aptos" pitchFamily="34" charset="0"/>
-                <a:ea typeface="Aptos" pitchFamily="34" charset="-122"/>
-                <a:cs typeface="Aptos" pitchFamily="34" charset="-120"/>
-              </a:rPr>
-              <a:t>AI for Social Good applies to every AI method.</a:t>
-            </a:r>
-            <a:endParaRPr lang="en-US" sz="2100" dirty="0"/>
-          </a:p>
-          <a:p>
-            <a:r>
-              <a:rPr lang="en-US" sz="2100" dirty="0">
-                <a:solidFill>
-                  <a:srgbClr val="17364A"/>
-                </a:solidFill>
-                <a:latin typeface="Aptos" pitchFamily="34" charset="0"/>
-                <a:ea typeface="Aptos" pitchFamily="34" charset="-122"/>
-                <a:cs typeface="Aptos" pitchFamily="34" charset="-120"/>
-              </a:rPr>
-              <a:t>Generative AI may improve plain-language communication, but it must be accurate, accessible, and.</a:t>
-            </a:r>
-            <a:endParaRPr lang="en-US" sz="2100" dirty="0"/>
-          </a:p>
-          <a:p>
-            <a:r>
-              <a:rPr lang="en-US" sz="2100" dirty="0">
-                <a:solidFill>
-                  <a:srgbClr val="17364A"/>
-                </a:solidFill>
-                <a:latin typeface="Aptos" pitchFamily="34" charset="0"/>
-                <a:ea typeface="Aptos" pitchFamily="34" charset="-122"/>
-                <a:cs typeface="Aptos" pitchFamily="34" charset="-120"/>
-              </a:rPr>
-              <a:t>Predictive analytics may guide supportive outreach, but it should not become a tool for exclusion.</a:t>
-            </a:r>
-            <a:endParaRPr lang="en-US" sz="2100" dirty="0"/>
-          </a:p>
-        </p:txBody>
-      </p:sp>
-      <p:sp>
-        <p:nvSpPr>
-          <p:cNvPr id="12" name="Shape 10"/>
-          <p:cNvSpPr/>
-          <p:nvPr/>
-        </p:nvSpPr>
-        <p:spPr>
-          <a:xfrm>
-            <a:off x="7909560" y="1417320"/>
-            <a:ext cx="3154680" cy="1828800"/>
+            <a:pPr algn="ctr" indent="0" marL="0">
+              <a:buNone/>
+            </a:pPr>
+            <a:r>
+              <a:rPr lang="en-US" sz="1500" b="1" dirty="0">
+                <a:solidFill>
+                  <a:srgbClr val="FFFFFF"/>
+                </a:solidFill>
+                <a:latin typeface="Aptos" pitchFamily="34" charset="0"/>
+                <a:ea typeface="Aptos" pitchFamily="34" charset="-122"/>
+                <a:cs typeface="Aptos" pitchFamily="34" charset="-120"/>
+              </a:rPr>
+              <a:t>Plan</a:t>
+            </a:r>
+            <a:endParaRPr lang="en-US" sz="1500" dirty="0"/>
+          </a:p>
+        </p:txBody>
+      </p:sp>
+      <p:sp>
+        <p:nvSpPr>
+          <p:cNvPr id="16" name="Shape 14"/>
+          <p:cNvSpPr/>
+          <p:nvPr/>
+        </p:nvSpPr>
+        <p:spPr>
+          <a:xfrm>
+            <a:off x="8976360" y="3319272"/>
+            <a:ext cx="792480" cy="749808"/>
           </a:xfrm>
           <a:prstGeom prst="roundRect">
             <a:avLst>
-              <a:gd name="adj" fmla="val 6000"/>
+              <a:gd name="adj" fmla="val 14634"/>
             </a:avLst>
           </a:prstGeom>
           <a:solidFill>
-            <a:srgbClr val="EEF8ED"/>
+            <a:srgbClr val="2F8A28"/>
           </a:solidFill>
           <a:ln w="12700">
             <a:solidFill>
-              <a:srgbClr val="B9D7E6"/>
+              <a:srgbClr val="2F8A28"/>
             </a:solidFill>
             <a:prstDash val="solid"/>
           </a:ln>
@@ -5841,98 +6459,189 @@
       </p:sp>
       <p:sp>
         <p:nvSpPr>
-          <p:cNvPr id="13" name="Text 11"/>
-          <p:cNvSpPr/>
-          <p:nvPr/>
-        </p:nvSpPr>
-        <p:spPr>
-          <a:xfrm>
-            <a:off x="8074152" y="1563624"/>
-            <a:ext cx="2825496" cy="256032"/>
-          </a:xfrm>
-          <a:prstGeom prst="rect">
-            <a:avLst/>
-          </a:prstGeom>
-          <a:noFill/>
-          <a:ln/>
-        </p:spPr>
-        <p:txBody>
-          <a:bodyPr wrap="square" lIns="0" tIns="0" rIns="0" bIns="0" rtlCol="0" anchor="ctr"/>
-          <a:lstStyle/>
-          <a:p>
-            <a:pPr indent="0" marL="0">
-              <a:buNone/>
-            </a:pPr>
-            <a:r>
-              <a:rPr lang="en-US" sz="1300" b="1" dirty="0">
-                <a:solidFill>
-                  <a:srgbClr val="0068B7"/>
-                </a:solidFill>
-                <a:latin typeface="Aptos" pitchFamily="34" charset="0"/>
-                <a:ea typeface="Aptos" pitchFamily="34" charset="-122"/>
-                <a:cs typeface="Aptos" pitchFamily="34" charset="-120"/>
-              </a:rPr>
-              <a:t>Key idea</a:t>
-            </a:r>
-            <a:endParaRPr lang="en-US" sz="1300" dirty="0"/>
-          </a:p>
-        </p:txBody>
-      </p:sp>
-      <p:sp>
-        <p:nvSpPr>
-          <p:cNvPr id="14" name="Text 12"/>
-          <p:cNvSpPr/>
-          <p:nvPr/>
-        </p:nvSpPr>
-        <p:spPr>
-          <a:xfrm>
-            <a:off x="8074152" y="1920240"/>
-            <a:ext cx="2825496" cy="1188720"/>
-          </a:xfrm>
-          <a:prstGeom prst="rect">
-            <a:avLst/>
-          </a:prstGeom>
-          <a:noFill/>
-          <a:ln/>
-        </p:spPr>
-        <p:txBody>
-          <a:bodyPr wrap="square" lIns="0" tIns="0" rIns="0" bIns="0" rtlCol="0" anchor="t">
+          <p:cNvPr id="17" name="Text 15"/>
+          <p:cNvSpPr/>
+          <p:nvPr/>
+        </p:nvSpPr>
+        <p:spPr>
+          <a:xfrm>
+            <a:off x="9049512" y="3511296"/>
+            <a:ext cx="646176" cy="310896"/>
+          </a:xfrm>
+          <a:prstGeom prst="rect">
+            <a:avLst/>
+          </a:prstGeom>
+          <a:noFill/>
+          <a:ln/>
+        </p:spPr>
+        <p:txBody>
+          <a:bodyPr wrap="square" lIns="0" tIns="0" rIns="0" bIns="0" rtlCol="0" anchor="ctr">
             <a:normAutofit/>
           </a:bodyPr>
           <a:lstStyle/>
           <a:p>
-            <a:pPr indent="0" marL="0">
-              <a:buNone/>
-            </a:pPr>
-            <a:r>
-              <a:rPr lang="en-US" sz="1550" dirty="0">
-                <a:solidFill>
-                  <a:srgbClr val="17364A"/>
-                </a:solidFill>
-                <a:latin typeface="Aptos" pitchFamily="34" charset="0"/>
-                <a:ea typeface="Aptos" pitchFamily="34" charset="-122"/>
-                <a:cs typeface="Aptos" pitchFamily="34" charset="-120"/>
-              </a:rPr>
-              <a:t>AI for Social Good applies to every AI method.</a:t>
-            </a:r>
-            <a:endParaRPr lang="en-US" sz="1550" dirty="0"/>
-          </a:p>
-        </p:txBody>
-      </p:sp>
-      <p:sp>
-        <p:nvSpPr>
-          <p:cNvPr id="15" name="Shape 13"/>
-          <p:cNvSpPr/>
-          <p:nvPr/>
-        </p:nvSpPr>
-        <p:spPr>
-          <a:xfrm>
-            <a:off x="7909560" y="3520440"/>
-            <a:ext cx="3154680" cy="1737360"/>
+            <a:pPr algn="ctr" indent="0" marL="0">
+              <a:buNone/>
+            </a:pPr>
+            <a:r>
+              <a:rPr lang="en-US" sz="1500" b="1" dirty="0">
+                <a:solidFill>
+                  <a:srgbClr val="FFFFFF"/>
+                </a:solidFill>
+                <a:latin typeface="Aptos" pitchFamily="34" charset="0"/>
+                <a:ea typeface="Aptos" pitchFamily="34" charset="-122"/>
+                <a:cs typeface="Aptos" pitchFamily="34" charset="-120"/>
+              </a:rPr>
+              <a:t>Do</a:t>
+            </a:r>
+            <a:endParaRPr lang="en-US" sz="1500" dirty="0"/>
+          </a:p>
+        </p:txBody>
+      </p:sp>
+      <p:sp>
+        <p:nvSpPr>
+          <p:cNvPr id="18" name="Shape 16"/>
+          <p:cNvSpPr/>
+          <p:nvPr/>
+        </p:nvSpPr>
+        <p:spPr>
+          <a:xfrm>
+            <a:off x="10024872" y="3319272"/>
+            <a:ext cx="792480" cy="749808"/>
           </a:xfrm>
           <a:prstGeom prst="roundRect">
             <a:avLst>
-              <a:gd name="adj" fmla="val 6316"/>
+              <a:gd name="adj" fmla="val 14634"/>
+            </a:avLst>
+          </a:prstGeom>
+          <a:solidFill>
+            <a:srgbClr val="D69A2D"/>
+          </a:solidFill>
+          <a:ln w="12700">
+            <a:solidFill>
+              <a:srgbClr val="D69A2D"/>
+            </a:solidFill>
+            <a:prstDash val="solid"/>
+          </a:ln>
+        </p:spPr>
+      </p:sp>
+      <p:sp>
+        <p:nvSpPr>
+          <p:cNvPr id="19" name="Text 17"/>
+          <p:cNvSpPr/>
+          <p:nvPr/>
+        </p:nvSpPr>
+        <p:spPr>
+          <a:xfrm>
+            <a:off x="10098024" y="3511296"/>
+            <a:ext cx="646176" cy="310896"/>
+          </a:xfrm>
+          <a:prstGeom prst="rect">
+            <a:avLst/>
+          </a:prstGeom>
+          <a:noFill/>
+          <a:ln/>
+        </p:spPr>
+        <p:txBody>
+          <a:bodyPr wrap="square" lIns="0" tIns="0" rIns="0" bIns="0" rtlCol="0" anchor="ctr">
+            <a:normAutofit/>
+          </a:bodyPr>
+          <a:lstStyle/>
+          <a:p>
+            <a:pPr algn="ctr" indent="0" marL="0">
+              <a:buNone/>
+            </a:pPr>
+            <a:r>
+              <a:rPr lang="en-US" sz="1500" b="1" dirty="0">
+                <a:solidFill>
+                  <a:srgbClr val="FFFFFF"/>
+                </a:solidFill>
+                <a:latin typeface="Aptos" pitchFamily="34" charset="0"/>
+                <a:ea typeface="Aptos" pitchFamily="34" charset="-122"/>
+                <a:cs typeface="Aptos" pitchFamily="34" charset="-120"/>
+              </a:rPr>
+              <a:t>Review</a:t>
+            </a:r>
+            <a:endParaRPr lang="en-US" sz="1500" dirty="0"/>
+          </a:p>
+        </p:txBody>
+      </p:sp>
+      <p:sp>
+        <p:nvSpPr>
+          <p:cNvPr id="20" name="Shape 18"/>
+          <p:cNvSpPr/>
+          <p:nvPr/>
+        </p:nvSpPr>
+        <p:spPr>
+          <a:xfrm>
+            <a:off x="8293608" y="4389120"/>
+            <a:ext cx="2157984" cy="0"/>
+          </a:xfrm>
+          <a:prstGeom prst="line">
+            <a:avLst/>
+          </a:prstGeom>
+          <a:noFill/>
+          <a:ln w="25400">
+            <a:solidFill>
+              <a:srgbClr val="8ABBD8"/>
+            </a:solidFill>
+            <a:prstDash val="solid"/>
+          </a:ln>
+        </p:spPr>
+      </p:sp>
+      <p:sp>
+        <p:nvSpPr>
+          <p:cNvPr id="21" name="Text 19"/>
+          <p:cNvSpPr/>
+          <p:nvPr/>
+        </p:nvSpPr>
+        <p:spPr>
+          <a:xfrm>
+            <a:off x="7909560" y="3977640"/>
+            <a:ext cx="2926080" cy="182880"/>
+          </a:xfrm>
+          <a:prstGeom prst="rect">
+            <a:avLst/>
+          </a:prstGeom>
+          <a:noFill/>
+          <a:ln/>
+        </p:spPr>
+        <p:txBody>
+          <a:bodyPr wrap="square" lIns="0" tIns="0" rIns="0" bIns="0" rtlCol="0" anchor="ctr"/>
+          <a:lstStyle/>
+          <a:p>
+            <a:pPr algn="ctr" indent="0" marL="0">
+              <a:buNone/>
+            </a:pPr>
+            <a:r>
+              <a:rPr lang="en-US" sz="1000" dirty="0">
+                <a:solidFill>
+                  <a:srgbClr val="003A63"/>
+                </a:solidFill>
+                <a:latin typeface="Aptos" pitchFamily="34" charset="0"/>
+                <a:ea typeface="Aptos" pitchFamily="34" charset="-122"/>
+                <a:cs typeface="Aptos" pitchFamily="34" charset="-120"/>
+              </a:rPr>
+              <a:t>Dependencies visible</a:t>
+            </a:r>
+            <a:endParaRPr lang="en-US" sz="1000" dirty="0"/>
+          </a:p>
+        </p:txBody>
+      </p:sp>
+      <p:sp>
+        <p:nvSpPr>
+          <p:cNvPr id="22" name="Shape 20"/>
+          <p:cNvSpPr/>
+          <p:nvPr/>
+        </p:nvSpPr>
+        <p:spPr>
+          <a:xfrm>
+            <a:off x="7635240" y="4498848"/>
+            <a:ext cx="3474720" cy="1143000"/>
+          </a:xfrm>
+          <a:prstGeom prst="roundRect">
+            <a:avLst>
+              <a:gd name="adj" fmla="val 9600"/>
             </a:avLst>
           </a:prstGeom>
           <a:solidFill>
@@ -5948,14 +6657,14 @@
       </p:sp>
       <p:sp>
         <p:nvSpPr>
-          <p:cNvPr id="16" name="Text 14"/>
-          <p:cNvSpPr/>
-          <p:nvPr/>
-        </p:nvSpPr>
-        <p:spPr>
-          <a:xfrm>
-            <a:off x="8074152" y="3666744"/>
-            <a:ext cx="2825496" cy="256032"/>
+          <p:cNvPr id="23" name="Text 21"/>
+          <p:cNvSpPr/>
+          <p:nvPr/>
+        </p:nvSpPr>
+        <p:spPr>
+          <a:xfrm>
+            <a:off x="7799832" y="4645152"/>
+            <a:ext cx="3145536" cy="256032"/>
           </a:xfrm>
           <a:prstGeom prst="rect">
             <a:avLst/>
@@ -5979,7 +6688,7 @@
                 <a:ea typeface="Aptos" pitchFamily="34" charset="-122"/>
                 <a:cs typeface="Aptos" pitchFamily="34" charset="-120"/>
               </a:rPr>
-              <a:t>Use this for</a:t>
+              <a:t>Next action</a:t>
             </a:r>
             <a:endParaRPr lang="en-US" sz="1300" dirty="0"/>
           </a:p>
@@ -5987,14 +6696,14 @@
       </p:sp>
       <p:sp>
         <p:nvSpPr>
-          <p:cNvPr id="17" name="Text 15"/>
-          <p:cNvSpPr/>
-          <p:nvPr/>
-        </p:nvSpPr>
-        <p:spPr>
-          <a:xfrm>
-            <a:off x="8074152" y="4023360"/>
-            <a:ext cx="2825496" cy="1097280"/>
+          <p:cNvPr id="24" name="Text 22"/>
+          <p:cNvSpPr/>
+          <p:nvPr/>
+        </p:nvSpPr>
+        <p:spPr>
+          <a:xfrm>
+            <a:off x="7799832" y="5001768"/>
+            <a:ext cx="3145536" cy="502920"/>
           </a:xfrm>
           <a:prstGeom prst="rect">
             <a:avLst/>
@@ -6020,7 +6729,7 @@
                 <a:ea typeface="Aptos" pitchFamily="34" charset="-122"/>
                 <a:cs typeface="Aptos" pitchFamily="34" charset="-120"/>
               </a:rPr>
-              <a:t>Connect the concept to public health decisions, safeguards, documentation, or implementation work.</a:t>
+              <a:t>Use the concept to clarify workflow changes, dependencies, staffing, procurement requirements, training needs, and implementation checkpoints.</a:t>
             </a:r>
             <a:endParaRPr lang="en-US" sz="1550" dirty="0"/>
           </a:p>
@@ -6194,8 +6903,8 @@
         </p:nvSpPr>
         <p:spPr>
           <a:xfrm>
-            <a:off x="9966960" y="6537960"/>
-            <a:ext cx="1645920" cy="201168"/>
+            <a:off x="9646920" y="6537960"/>
+            <a:ext cx="1965960" cy="201168"/>
           </a:xfrm>
           <a:prstGeom prst="rect">
             <a:avLst/>
@@ -6219,7 +6928,7 @@
                 <a:ea typeface="Aptos" pitchFamily="34" charset="-122"/>
                 <a:cs typeface="Aptos" pitchFamily="34" charset="-120"/>
               </a:rPr>
-              <a:t>Â© Paula Soper</a:t>
+              <a:t>Copyright Paula Soper</a:t>
             </a:r>
             <a:endParaRPr lang="en-US" sz="800" dirty="0"/>
           </a:p>
@@ -6266,77 +6975,13 @@
       </p:sp>
       <p:sp>
         <p:nvSpPr>
-          <p:cNvPr id="8" name="Shape 6"/>
+          <p:cNvPr id="8" name="Text 6"/>
           <p:cNvSpPr/>
           <p:nvPr/>
         </p:nvSpPr>
         <p:spPr>
           <a:xfrm>
             <a:off x="640080" y="658368"/>
-            <a:ext cx="420624" cy="420624"/>
-          </a:xfrm>
-          <a:prstGeom prst="ellipse">
-            <a:avLst/>
-          </a:prstGeom>
-          <a:solidFill>
-            <a:srgbClr val="0068B7"/>
-          </a:solidFill>
-          <a:ln w="12700">
-            <a:solidFill>
-              <a:srgbClr val="0068B7"/>
-            </a:solidFill>
-            <a:prstDash val="solid"/>
-          </a:ln>
-        </p:spPr>
-      </p:sp>
-      <p:sp>
-        <p:nvSpPr>
-          <p:cNvPr id="9" name="Text 7"/>
-          <p:cNvSpPr/>
-          <p:nvPr/>
-        </p:nvSpPr>
-        <p:spPr>
-          <a:xfrm>
-            <a:off x="640080" y="731520"/>
-            <a:ext cx="420624" cy="164592"/>
-          </a:xfrm>
-          <a:prstGeom prst="rect">
-            <a:avLst/>
-          </a:prstGeom>
-          <a:noFill/>
-          <a:ln/>
-        </p:spPr>
-        <p:txBody>
-          <a:bodyPr wrap="square" lIns="0" tIns="0" rIns="0" bIns="0" rtlCol="0" anchor="ctr"/>
-          <a:lstStyle/>
-          <a:p>
-            <a:pPr algn="ctr" indent="0" marL="0">
-              <a:buNone/>
-            </a:pPr>
-            <a:r>
-              <a:rPr lang="en-US" sz="1100" b="1" dirty="0">
-                <a:solidFill>
-                  <a:srgbClr val="FFFFFF"/>
-                </a:solidFill>
-                <a:latin typeface="Aptos" pitchFamily="34" charset="0"/>
-                <a:ea typeface="Aptos" pitchFamily="34" charset="-122"/>
-                <a:cs typeface="Aptos" pitchFamily="34" charset="-120"/>
-              </a:rPr>
-              <a:t>8</a:t>
-            </a:r>
-            <a:endParaRPr lang="en-US" sz="1100" dirty="0"/>
-          </a:p>
-        </p:txBody>
-      </p:sp>
-      <p:sp>
-        <p:nvSpPr>
-          <p:cNvPr id="10" name="Text 8"/>
-          <p:cNvSpPr/>
-          <p:nvPr/>
-        </p:nvSpPr>
-        <p:spPr>
-          <a:xfrm>
-            <a:off x="640080" y="621792"/>
             <a:ext cx="10881360" cy="713232"/>
           </a:xfrm>
           <a:prstGeom prst="rect">
@@ -6371,14 +7016,14 @@
       </p:sp>
       <p:sp>
         <p:nvSpPr>
-          <p:cNvPr id="11" name="Text 9"/>
+          <p:cNvPr id="9" name="Text 7"/>
           <p:cNvSpPr/>
           <p:nvPr/>
         </p:nvSpPr>
         <p:spPr>
           <a:xfrm>
             <a:off x="868680" y="1508760"/>
-            <a:ext cx="6537960" cy="4160520"/>
+            <a:ext cx="6309360" cy="4160520"/>
           </a:xfrm>
           <a:prstGeom prst="rect">
             <a:avLst/>
@@ -6437,18 +7082,18 @@
       </p:sp>
       <p:sp>
         <p:nvSpPr>
-          <p:cNvPr id="12" name="Shape 10"/>
-          <p:cNvSpPr/>
-          <p:nvPr/>
-        </p:nvSpPr>
-        <p:spPr>
-          <a:xfrm>
-            <a:off x="7909560" y="1417320"/>
-            <a:ext cx="3154680" cy="1828800"/>
+          <p:cNvPr id="10" name="Shape 8"/>
+          <p:cNvSpPr/>
+          <p:nvPr/>
+        </p:nvSpPr>
+        <p:spPr>
+          <a:xfrm>
+            <a:off x="7635240" y="1325880"/>
+            <a:ext cx="3474720" cy="1325880"/>
           </a:xfrm>
           <a:prstGeom prst="roundRect">
             <a:avLst>
-              <a:gd name="adj" fmla="val 6000"/>
+              <a:gd name="adj" fmla="val 8276"/>
             </a:avLst>
           </a:prstGeom>
           <a:solidFill>
@@ -6464,14 +7109,14 @@
       </p:sp>
       <p:sp>
         <p:nvSpPr>
-          <p:cNvPr id="13" name="Text 11"/>
-          <p:cNvSpPr/>
-          <p:nvPr/>
-        </p:nvSpPr>
-        <p:spPr>
-          <a:xfrm>
-            <a:off x="8074152" y="1563624"/>
-            <a:ext cx="2825496" cy="256032"/>
+          <p:cNvPr id="11" name="Text 9"/>
+          <p:cNvSpPr/>
+          <p:nvPr/>
+        </p:nvSpPr>
+        <p:spPr>
+          <a:xfrm>
+            <a:off x="7799832" y="1472184"/>
+            <a:ext cx="3145536" cy="256032"/>
           </a:xfrm>
           <a:prstGeom prst="rect">
             <a:avLst/>
@@ -6495,7 +7140,7 @@
                 <a:ea typeface="Aptos" pitchFamily="34" charset="-122"/>
                 <a:cs typeface="Aptos" pitchFamily="34" charset="-120"/>
               </a:rPr>
-              <a:t>Key idea</a:t>
+              <a:t>Core concept</a:t>
             </a:r>
             <a:endParaRPr lang="en-US" sz="1300" dirty="0"/>
           </a:p>
@@ -6503,14 +7148,14 @@
       </p:sp>
       <p:sp>
         <p:nvSpPr>
-          <p:cNvPr id="14" name="Text 12"/>
-          <p:cNvSpPr/>
-          <p:nvPr/>
-        </p:nvSpPr>
-        <p:spPr>
-          <a:xfrm>
-            <a:off x="8074152" y="1920240"/>
-            <a:ext cx="2825496" cy="1188720"/>
+          <p:cNvPr id="12" name="Text 10"/>
+          <p:cNvSpPr/>
+          <p:nvPr/>
+        </p:nvSpPr>
+        <p:spPr>
+          <a:xfrm>
+            <a:off x="7799832" y="1828800"/>
+            <a:ext cx="3145536" cy="685800"/>
           </a:xfrm>
           <a:prstGeom prst="rect">
             <a:avLst/>
@@ -6544,18 +7189,159 @@
       </p:sp>
       <p:sp>
         <p:nvSpPr>
-          <p:cNvPr id="15" name="Shape 13"/>
-          <p:cNvSpPr/>
-          <p:nvPr/>
-        </p:nvSpPr>
-        <p:spPr>
-          <a:xfrm>
-            <a:off x="7909560" y="3520440"/>
-            <a:ext cx="3154680" cy="1737360"/>
+          <p:cNvPr id="13" name="Shape 11"/>
+          <p:cNvSpPr/>
+          <p:nvPr/>
+        </p:nvSpPr>
+        <p:spPr>
+          <a:xfrm>
+            <a:off x="7635240" y="2788920"/>
+            <a:ext cx="3474720" cy="1536192"/>
           </a:xfrm>
           <a:prstGeom prst="roundRect">
             <a:avLst>
-              <a:gd name="adj" fmla="val 6316"/>
+              <a:gd name="adj" fmla="val 7143"/>
+            </a:avLst>
+          </a:prstGeom>
+          <a:solidFill>
+            <a:srgbClr val="FFFFFF">
+              <a:alpha val="88000"/>
+            </a:srgbClr>
+          </a:solidFill>
+          <a:ln w="12700">
+            <a:solidFill>
+              <a:srgbClr val="D6E8F2"/>
+            </a:solidFill>
+            <a:prstDash val="solid"/>
+          </a:ln>
+        </p:spPr>
+      </p:sp>
+      <p:sp>
+        <p:nvSpPr>
+          <p:cNvPr id="14" name="Shape 12"/>
+          <p:cNvSpPr/>
+          <p:nvPr/>
+        </p:nvSpPr>
+        <p:spPr>
+          <a:xfrm>
+            <a:off x="8074152" y="3291840"/>
+            <a:ext cx="2596896" cy="749808"/>
+          </a:xfrm>
+          <a:prstGeom prst="rect">
+            <a:avLst/>
+          </a:prstGeom>
+          <a:solidFill>
+            <a:srgbClr val="EAF6F8"/>
+          </a:solidFill>
+          <a:ln w="12700">
+            <a:solidFill>
+              <a:srgbClr val="8ABBD8"/>
+            </a:solidFill>
+            <a:prstDash val="solid"/>
+          </a:ln>
+        </p:spPr>
+      </p:sp>
+      <p:sp>
+        <p:nvSpPr>
+          <p:cNvPr id="15" name="Shape 13"/>
+          <p:cNvSpPr/>
+          <p:nvPr/>
+        </p:nvSpPr>
+        <p:spPr>
+          <a:xfrm>
+            <a:off x="8202168" y="3721608"/>
+            <a:ext cx="2340864" cy="0"/>
+          </a:xfrm>
+          <a:prstGeom prst="line">
+            <a:avLst/>
+          </a:prstGeom>
+          <a:noFill/>
+          <a:ln w="19050">
+            <a:solidFill>
+              <a:srgbClr val="0068B7"/>
+            </a:solidFill>
+            <a:prstDash val="solid"/>
+          </a:ln>
+        </p:spPr>
+      </p:sp>
+      <p:sp>
+        <p:nvSpPr>
+          <p:cNvPr id="16" name="Shape 14"/>
+          <p:cNvSpPr/>
+          <p:nvPr/>
+        </p:nvSpPr>
+        <p:spPr>
+          <a:xfrm>
+            <a:off x="9198864" y="4206240"/>
+            <a:ext cx="347472" cy="347472"/>
+          </a:xfrm>
+          <a:prstGeom prst="ellipse">
+            <a:avLst/>
+          </a:prstGeom>
+          <a:solidFill>
+            <a:srgbClr val="2F8A28"/>
+          </a:solidFill>
+          <a:ln w="12700">
+            <a:solidFill>
+              <a:srgbClr val="2F8A28"/>
+            </a:solidFill>
+            <a:prstDash val="solid"/>
+          </a:ln>
+        </p:spPr>
+      </p:sp>
+      <p:sp>
+        <p:nvSpPr>
+          <p:cNvPr id="17" name="Text 15"/>
+          <p:cNvSpPr/>
+          <p:nvPr/>
+        </p:nvSpPr>
+        <p:spPr>
+          <a:xfrm>
+            <a:off x="7909560" y="3977640"/>
+            <a:ext cx="2926080" cy="182880"/>
+          </a:xfrm>
+          <a:prstGeom prst="rect">
+            <a:avLst/>
+          </a:prstGeom>
+          <a:noFill/>
+          <a:ln/>
+        </p:spPr>
+        <p:txBody>
+          <a:bodyPr wrap="square" lIns="0" tIns="0" rIns="0" bIns="0" rtlCol="0" anchor="ctr"/>
+          <a:lstStyle/>
+          <a:p>
+            <a:pPr algn="ctr" indent="0" marL="0">
+              <a:buNone/>
+            </a:pPr>
+            <a:r>
+              <a:rPr lang="en-US" sz="1000" dirty="0">
+                <a:solidFill>
+                  <a:srgbClr val="003A63"/>
+                </a:solidFill>
+                <a:latin typeface="Aptos" pitchFamily="34" charset="0"/>
+                <a:ea typeface="Aptos" pitchFamily="34" charset="-122"/>
+                <a:cs typeface="Aptos" pitchFamily="34" charset="-120"/>
+              </a:rPr>
+              <a:t>Concept to action</a:t>
+            </a:r>
+            <a:endParaRPr lang="en-US" sz="1000" dirty="0"/>
+          </a:p>
+        </p:txBody>
+      </p:sp>
+      <p:sp>
+        <p:nvSpPr>
+          <p:cNvPr id="18" name="Shape 16"/>
+          <p:cNvSpPr/>
+          <p:nvPr/>
+        </p:nvSpPr>
+        <p:spPr>
+          <a:xfrm>
+            <a:off x="7635240" y="4498848"/>
+            <a:ext cx="3474720" cy="1143000"/>
+          </a:xfrm>
+          <a:prstGeom prst="roundRect">
+            <a:avLst>
+              <a:gd name="adj" fmla="val 9600"/>
             </a:avLst>
           </a:prstGeom>
           <a:solidFill>
@@ -6571,14 +7357,14 @@
       </p:sp>
       <p:sp>
         <p:nvSpPr>
-          <p:cNvPr id="16" name="Text 14"/>
-          <p:cNvSpPr/>
-          <p:nvPr/>
-        </p:nvSpPr>
-        <p:spPr>
-          <a:xfrm>
-            <a:off x="8074152" y="3666744"/>
-            <a:ext cx="2825496" cy="256032"/>
+          <p:cNvPr id="19" name="Text 17"/>
+          <p:cNvSpPr/>
+          <p:nvPr/>
+        </p:nvSpPr>
+        <p:spPr>
+          <a:xfrm>
+            <a:off x="7799832" y="4645152"/>
+            <a:ext cx="3145536" cy="256032"/>
           </a:xfrm>
           <a:prstGeom prst="rect">
             <a:avLst/>
@@ -6602,7 +7388,7 @@
                 <a:ea typeface="Aptos" pitchFamily="34" charset="-122"/>
                 <a:cs typeface="Aptos" pitchFamily="34" charset="-120"/>
               </a:rPr>
-              <a:t>Use this for</a:t>
+              <a:t>Apply it</a:t>
             </a:r>
             <a:endParaRPr lang="en-US" sz="1300" dirty="0"/>
           </a:p>
@@ -6610,14 +7396,14 @@
       </p:sp>
       <p:sp>
         <p:nvSpPr>
-          <p:cNvPr id="17" name="Text 15"/>
-          <p:cNvSpPr/>
-          <p:nvPr/>
-        </p:nvSpPr>
-        <p:spPr>
-          <a:xfrm>
-            <a:off x="8074152" y="4023360"/>
-            <a:ext cx="2825496" cy="1097280"/>
+          <p:cNvPr id="20" name="Text 18"/>
+          <p:cNvSpPr/>
+          <p:nvPr/>
+        </p:nvSpPr>
+        <p:spPr>
+          <a:xfrm>
+            <a:off x="7799832" y="5001768"/>
+            <a:ext cx="3145536" cy="502920"/>
           </a:xfrm>
           <a:prstGeom prst="rect">
             <a:avLst/>
@@ -6643,7 +7429,7 @@
                 <a:ea typeface="Aptos" pitchFamily="34" charset="-122"/>
                 <a:cs typeface="Aptos" pitchFamily="34" charset="-120"/>
               </a:rPr>
-              <a:t>Connect the concept to public health decisions, safeguards, documentation, or implementation work.</a:t>
+              <a:t>Connect the concept to public health purpose, responsible use, required safeguards, documentation, and the next action a department should take.</a:t>
             </a:r>
             <a:endParaRPr lang="en-US" sz="1550" dirty="0"/>
           </a:p>
@@ -6817,8 +7603,8 @@
         </p:nvSpPr>
         <p:spPr>
           <a:xfrm>
-            <a:off x="9966960" y="6537960"/>
-            <a:ext cx="1645920" cy="201168"/>
+            <a:off x="9646920" y="6537960"/>
+            <a:ext cx="1965960" cy="201168"/>
           </a:xfrm>
           <a:prstGeom prst="rect">
             <a:avLst/>
@@ -6842,7 +7628,7 @@
                 <a:ea typeface="Aptos" pitchFamily="34" charset="-122"/>
                 <a:cs typeface="Aptos" pitchFamily="34" charset="-120"/>
               </a:rPr>
-              <a:t>Â© Paula Soper</a:t>
+              <a:t>Copyright Paula Soper</a:t>
             </a:r>
             <a:endParaRPr lang="en-US" sz="800" dirty="0"/>
           </a:p>
@@ -6937,7 +7723,7 @@
         <p:spPr>
           <a:xfrm>
             <a:off x="868680" y="1508760"/>
-            <a:ext cx="6537960" cy="4160520"/>
+            <a:ext cx="6309360" cy="4160520"/>
           </a:xfrm>
           <a:prstGeom prst="rect">
             <a:avLst/>
@@ -6988,12 +7774,12 @@
         </p:nvSpPr>
         <p:spPr>
           <a:xfrm>
-            <a:off x="7909560" y="1417320"/>
-            <a:ext cx="3154680" cy="1828800"/>
+            <a:off x="7635240" y="1325880"/>
+            <a:ext cx="3474720" cy="1325880"/>
           </a:xfrm>
           <a:prstGeom prst="roundRect">
             <a:avLst>
-              <a:gd name="adj" fmla="val 6000"/>
+              <a:gd name="adj" fmla="val 8276"/>
             </a:avLst>
           </a:prstGeom>
           <a:solidFill>
@@ -7015,8 +7801,8 @@
         </p:nvSpPr>
         <p:spPr>
           <a:xfrm>
-            <a:off x="8074152" y="1563624"/>
-            <a:ext cx="2825496" cy="256032"/>
+            <a:off x="7799832" y="1472184"/>
+            <a:ext cx="3145536" cy="256032"/>
           </a:xfrm>
           <a:prstGeom prst="rect">
             <a:avLst/>
@@ -7040,7 +7826,7 @@
                 <a:ea typeface="Aptos" pitchFamily="34" charset="-122"/>
                 <a:cs typeface="Aptos" pitchFamily="34" charset="-120"/>
               </a:rPr>
-              <a:t>Key idea</a:t>
+              <a:t>Core concept</a:t>
             </a:r>
             <a:endParaRPr lang="en-US" sz="1300" dirty="0"/>
           </a:p>
@@ -7054,8 +7840,8 @@
         </p:nvSpPr>
         <p:spPr>
           <a:xfrm>
-            <a:off x="8074152" y="1920240"/>
-            <a:ext cx="2825496" cy="1188720"/>
+            <a:off x="7799832" y="1828800"/>
+            <a:ext cx="3145536" cy="685800"/>
           </a:xfrm>
           <a:prstGeom prst="rect">
             <a:avLst/>
@@ -7095,12 +7881,153 @@
         </p:nvSpPr>
         <p:spPr>
           <a:xfrm>
-            <a:off x="7909560" y="3520440"/>
-            <a:ext cx="3154680" cy="1737360"/>
+            <a:off x="7635240" y="2788920"/>
+            <a:ext cx="3474720" cy="1536192"/>
           </a:xfrm>
           <a:prstGeom prst="roundRect">
             <a:avLst>
-              <a:gd name="adj" fmla="val 6316"/>
+              <a:gd name="adj" fmla="val 7143"/>
+            </a:avLst>
+          </a:prstGeom>
+          <a:solidFill>
+            <a:srgbClr val="FFFFFF">
+              <a:alpha val="88000"/>
+            </a:srgbClr>
+          </a:solidFill>
+          <a:ln w="12700">
+            <a:solidFill>
+              <a:srgbClr val="D6E8F2"/>
+            </a:solidFill>
+            <a:prstDash val="solid"/>
+          </a:ln>
+        </p:spPr>
+      </p:sp>
+      <p:sp>
+        <p:nvSpPr>
+          <p:cNvPr id="14" name="Shape 12"/>
+          <p:cNvSpPr/>
+          <p:nvPr/>
+        </p:nvSpPr>
+        <p:spPr>
+          <a:xfrm>
+            <a:off x="8074152" y="3291840"/>
+            <a:ext cx="2596896" cy="749808"/>
+          </a:xfrm>
+          <a:prstGeom prst="rect">
+            <a:avLst/>
+          </a:prstGeom>
+          <a:solidFill>
+            <a:srgbClr val="EAF6F8"/>
+          </a:solidFill>
+          <a:ln w="12700">
+            <a:solidFill>
+              <a:srgbClr val="8ABBD8"/>
+            </a:solidFill>
+            <a:prstDash val="solid"/>
+          </a:ln>
+        </p:spPr>
+      </p:sp>
+      <p:sp>
+        <p:nvSpPr>
+          <p:cNvPr id="15" name="Shape 13"/>
+          <p:cNvSpPr/>
+          <p:nvPr/>
+        </p:nvSpPr>
+        <p:spPr>
+          <a:xfrm>
+            <a:off x="8202168" y="3721608"/>
+            <a:ext cx="2340864" cy="0"/>
+          </a:xfrm>
+          <a:prstGeom prst="line">
+            <a:avLst/>
+          </a:prstGeom>
+          <a:noFill/>
+          <a:ln w="19050">
+            <a:solidFill>
+              <a:srgbClr val="0068B7"/>
+            </a:solidFill>
+            <a:prstDash val="solid"/>
+          </a:ln>
+        </p:spPr>
+      </p:sp>
+      <p:sp>
+        <p:nvSpPr>
+          <p:cNvPr id="16" name="Shape 14"/>
+          <p:cNvSpPr/>
+          <p:nvPr/>
+        </p:nvSpPr>
+        <p:spPr>
+          <a:xfrm>
+            <a:off x="9198864" y="4206240"/>
+            <a:ext cx="347472" cy="347472"/>
+          </a:xfrm>
+          <a:prstGeom prst="ellipse">
+            <a:avLst/>
+          </a:prstGeom>
+          <a:solidFill>
+            <a:srgbClr val="2F8A28"/>
+          </a:solidFill>
+          <a:ln w="12700">
+            <a:solidFill>
+              <a:srgbClr val="2F8A28"/>
+            </a:solidFill>
+            <a:prstDash val="solid"/>
+          </a:ln>
+        </p:spPr>
+      </p:sp>
+      <p:sp>
+        <p:nvSpPr>
+          <p:cNvPr id="17" name="Text 15"/>
+          <p:cNvSpPr/>
+          <p:nvPr/>
+        </p:nvSpPr>
+        <p:spPr>
+          <a:xfrm>
+            <a:off x="7909560" y="3977640"/>
+            <a:ext cx="2926080" cy="182880"/>
+          </a:xfrm>
+          <a:prstGeom prst="rect">
+            <a:avLst/>
+          </a:prstGeom>
+          <a:noFill/>
+          <a:ln/>
+        </p:spPr>
+        <p:txBody>
+          <a:bodyPr wrap="square" lIns="0" tIns="0" rIns="0" bIns="0" rtlCol="0" anchor="ctr"/>
+          <a:lstStyle/>
+          <a:p>
+            <a:pPr algn="ctr" indent="0" marL="0">
+              <a:buNone/>
+            </a:pPr>
+            <a:r>
+              <a:rPr lang="en-US" sz="1000" dirty="0">
+                <a:solidFill>
+                  <a:srgbClr val="003A63"/>
+                </a:solidFill>
+                <a:latin typeface="Aptos" pitchFamily="34" charset="0"/>
+                <a:ea typeface="Aptos" pitchFamily="34" charset="-122"/>
+                <a:cs typeface="Aptos" pitchFamily="34" charset="-120"/>
+              </a:rPr>
+              <a:t>Concept to action</a:t>
+            </a:r>
+            <a:endParaRPr lang="en-US" sz="1000" dirty="0"/>
+          </a:p>
+        </p:txBody>
+      </p:sp>
+      <p:sp>
+        <p:nvSpPr>
+          <p:cNvPr id="18" name="Shape 16"/>
+          <p:cNvSpPr/>
+          <p:nvPr/>
+        </p:nvSpPr>
+        <p:spPr>
+          <a:xfrm>
+            <a:off x="7635240" y="4498848"/>
+            <a:ext cx="3474720" cy="1143000"/>
+          </a:xfrm>
+          <a:prstGeom prst="roundRect">
+            <a:avLst>
+              <a:gd name="adj" fmla="val 9600"/>
             </a:avLst>
           </a:prstGeom>
           <a:solidFill>
@@ -7116,14 +8043,14 @@
       </p:sp>
       <p:sp>
         <p:nvSpPr>
-          <p:cNvPr id="14" name="Text 12"/>
-          <p:cNvSpPr/>
-          <p:nvPr/>
-        </p:nvSpPr>
-        <p:spPr>
-          <a:xfrm>
-            <a:off x="8074152" y="3666744"/>
-            <a:ext cx="2825496" cy="256032"/>
+          <p:cNvPr id="19" name="Text 17"/>
+          <p:cNvSpPr/>
+          <p:nvPr/>
+        </p:nvSpPr>
+        <p:spPr>
+          <a:xfrm>
+            <a:off x="7799832" y="4645152"/>
+            <a:ext cx="3145536" cy="256032"/>
           </a:xfrm>
           <a:prstGeom prst="rect">
             <a:avLst/>
@@ -7147,7 +8074,7 @@
                 <a:ea typeface="Aptos" pitchFamily="34" charset="-122"/>
                 <a:cs typeface="Aptos" pitchFamily="34" charset="-120"/>
               </a:rPr>
-              <a:t>Use this for</a:t>
+              <a:t>Apply it</a:t>
             </a:r>
             <a:endParaRPr lang="en-US" sz="1300" dirty="0"/>
           </a:p>
@@ -7155,14 +8082,14 @@
       </p:sp>
       <p:sp>
         <p:nvSpPr>
-          <p:cNvPr id="15" name="Text 13"/>
-          <p:cNvSpPr/>
-          <p:nvPr/>
-        </p:nvSpPr>
-        <p:spPr>
-          <a:xfrm>
-            <a:off x="8074152" y="4023360"/>
-            <a:ext cx="2825496" cy="1097280"/>
+          <p:cNvPr id="20" name="Text 18"/>
+          <p:cNvSpPr/>
+          <p:nvPr/>
+        </p:nvSpPr>
+        <p:spPr>
+          <a:xfrm>
+            <a:off x="7799832" y="5001768"/>
+            <a:ext cx="3145536" cy="502920"/>
           </a:xfrm>
           <a:prstGeom prst="rect">
             <a:avLst/>
@@ -7188,7 +8115,7 @@
                 <a:ea typeface="Aptos" pitchFamily="34" charset="-122"/>
                 <a:cs typeface="Aptos" pitchFamily="34" charset="-120"/>
               </a:rPr>
-              <a:t>Connect the concept to public health decisions, safeguards, documentation, or implementation work.</a:t>
+              <a:t>Connect the concept to public health purpose, responsible use, required safeguards, documentation, and the next action a department should take.</a:t>
             </a:r>
             <a:endParaRPr lang="en-US" sz="1550" dirty="0"/>
           </a:p>
@@ -7362,8 +8289,8 @@
         </p:nvSpPr>
         <p:spPr>
           <a:xfrm>
-            <a:off x="9966960" y="6537960"/>
-            <a:ext cx="1645920" cy="201168"/>
+            <a:off x="9646920" y="6537960"/>
+            <a:ext cx="1965960" cy="201168"/>
           </a:xfrm>
           <a:prstGeom prst="rect">
             <a:avLst/>
@@ -7387,7 +8314,7 @@
                 <a:ea typeface="Aptos" pitchFamily="34" charset="-122"/>
                 <a:cs typeface="Aptos" pitchFamily="34" charset="-120"/>
               </a:rPr>
-              <a:t>Â© Paula Soper</a:t>
+              <a:t>Copyright Paula Soper</a:t>
             </a:r>
             <a:endParaRPr lang="en-US" sz="800" dirty="0"/>
           </a:p>
@@ -7434,77 +8361,13 @@
       </p:sp>
       <p:sp>
         <p:nvSpPr>
-          <p:cNvPr id="8" name="Shape 6"/>
+          <p:cNvPr id="8" name="Text 6"/>
           <p:cNvSpPr/>
           <p:nvPr/>
         </p:nvSpPr>
         <p:spPr>
           <a:xfrm>
             <a:off x="640080" y="658368"/>
-            <a:ext cx="420624" cy="420624"/>
-          </a:xfrm>
-          <a:prstGeom prst="ellipse">
-            <a:avLst/>
-          </a:prstGeom>
-          <a:solidFill>
-            <a:srgbClr val="0068B7"/>
-          </a:solidFill>
-          <a:ln w="12700">
-            <a:solidFill>
-              <a:srgbClr val="0068B7"/>
-            </a:solidFill>
-            <a:prstDash val="solid"/>
-          </a:ln>
-        </p:spPr>
-      </p:sp>
-      <p:sp>
-        <p:nvSpPr>
-          <p:cNvPr id="9" name="Text 7"/>
-          <p:cNvSpPr/>
-          <p:nvPr/>
-        </p:nvSpPr>
-        <p:spPr>
-          <a:xfrm>
-            <a:off x="640080" y="731520"/>
-            <a:ext cx="420624" cy="164592"/>
-          </a:xfrm>
-          <a:prstGeom prst="rect">
-            <a:avLst/>
-          </a:prstGeom>
-          <a:noFill/>
-          <a:ln/>
-        </p:spPr>
-        <p:txBody>
-          <a:bodyPr wrap="square" lIns="0" tIns="0" rIns="0" bIns="0" rtlCol="0" anchor="ctr"/>
-          <a:lstStyle/>
-          <a:p>
-            <a:pPr algn="ctr" indent="0" marL="0">
-              <a:buNone/>
-            </a:pPr>
-            <a:r>
-              <a:rPr lang="en-US" sz="1100" b="1" dirty="0">
-                <a:solidFill>
-                  <a:srgbClr val="FFFFFF"/>
-                </a:solidFill>
-                <a:latin typeface="Aptos" pitchFamily="34" charset="0"/>
-                <a:ea typeface="Aptos" pitchFamily="34" charset="-122"/>
-                <a:cs typeface="Aptos" pitchFamily="34" charset="-120"/>
-              </a:rPr>
-              <a:t>9</a:t>
-            </a:r>
-            <a:endParaRPr lang="en-US" sz="1100" dirty="0"/>
-          </a:p>
-        </p:txBody>
-      </p:sp>
-      <p:sp>
-        <p:nvSpPr>
-          <p:cNvPr id="10" name="Text 8"/>
-          <p:cNvSpPr/>
-          <p:nvPr/>
-        </p:nvSpPr>
-        <p:spPr>
-          <a:xfrm>
-            <a:off x="640080" y="621792"/>
             <a:ext cx="10881360" cy="713232"/>
           </a:xfrm>
           <a:prstGeom prst="rect">
@@ -7539,14 +8402,14 @@
       </p:sp>
       <p:sp>
         <p:nvSpPr>
-          <p:cNvPr id="11" name="Text 9"/>
+          <p:cNvPr id="9" name="Text 7"/>
           <p:cNvSpPr/>
           <p:nvPr/>
         </p:nvSpPr>
         <p:spPr>
           <a:xfrm>
             <a:off x="868680" y="1508760"/>
-            <a:ext cx="6537960" cy="4160520"/>
+            <a:ext cx="6309360" cy="4160520"/>
           </a:xfrm>
           <a:prstGeom prst="rect">
             <a:avLst/>
@@ -7605,18 +8468,18 @@
       </p:sp>
       <p:sp>
         <p:nvSpPr>
-          <p:cNvPr id="12" name="Shape 10"/>
-          <p:cNvSpPr/>
-          <p:nvPr/>
-        </p:nvSpPr>
-        <p:spPr>
-          <a:xfrm>
-            <a:off x="7909560" y="1417320"/>
-            <a:ext cx="3154680" cy="1828800"/>
+          <p:cNvPr id="10" name="Shape 8"/>
+          <p:cNvSpPr/>
+          <p:nvPr/>
+        </p:nvSpPr>
+        <p:spPr>
+          <a:xfrm>
+            <a:off x="7635240" y="1325880"/>
+            <a:ext cx="3474720" cy="1325880"/>
           </a:xfrm>
           <a:prstGeom prst="roundRect">
             <a:avLst>
-              <a:gd name="adj" fmla="val 6000"/>
+              <a:gd name="adj" fmla="val 8276"/>
             </a:avLst>
           </a:prstGeom>
           <a:solidFill>
@@ -7632,14 +8495,14 @@
       </p:sp>
       <p:sp>
         <p:nvSpPr>
-          <p:cNvPr id="13" name="Text 11"/>
-          <p:cNvSpPr/>
-          <p:nvPr/>
-        </p:nvSpPr>
-        <p:spPr>
-          <a:xfrm>
-            <a:off x="8074152" y="1563624"/>
-            <a:ext cx="2825496" cy="256032"/>
+          <p:cNvPr id="11" name="Text 9"/>
+          <p:cNvSpPr/>
+          <p:nvPr/>
+        </p:nvSpPr>
+        <p:spPr>
+          <a:xfrm>
+            <a:off x="7799832" y="1472184"/>
+            <a:ext cx="3145536" cy="256032"/>
           </a:xfrm>
           <a:prstGeom prst="rect">
             <a:avLst/>
@@ -7663,7 +8526,7 @@
                 <a:ea typeface="Aptos" pitchFamily="34" charset="-122"/>
                 <a:cs typeface="Aptos" pitchFamily="34" charset="-120"/>
               </a:rPr>
-              <a:t>Key idea</a:t>
+              <a:t>Practice focus</a:t>
             </a:r>
             <a:endParaRPr lang="en-US" sz="1300" dirty="0"/>
           </a:p>
@@ -7671,14 +8534,14 @@
       </p:sp>
       <p:sp>
         <p:nvSpPr>
-          <p:cNvPr id="14" name="Text 12"/>
-          <p:cNvSpPr/>
-          <p:nvPr/>
-        </p:nvSpPr>
-        <p:spPr>
-          <a:xfrm>
-            <a:off x="8074152" y="1920240"/>
-            <a:ext cx="2825496" cy="1188720"/>
+          <p:cNvPr id="12" name="Text 10"/>
+          <p:cNvSpPr/>
+          <p:nvPr/>
+        </p:nvSpPr>
+        <p:spPr>
+          <a:xfrm>
+            <a:off x="7799832" y="1828800"/>
+            <a:ext cx="3145536" cy="685800"/>
           </a:xfrm>
           <a:prstGeom prst="rect">
             <a:avLst/>
@@ -7712,18 +8575,159 @@
       </p:sp>
       <p:sp>
         <p:nvSpPr>
-          <p:cNvPr id="15" name="Shape 13"/>
-          <p:cNvSpPr/>
-          <p:nvPr/>
-        </p:nvSpPr>
-        <p:spPr>
-          <a:xfrm>
-            <a:off x="7909560" y="3520440"/>
-            <a:ext cx="3154680" cy="1737360"/>
+          <p:cNvPr id="13" name="Shape 11"/>
+          <p:cNvSpPr/>
+          <p:nvPr/>
+        </p:nvSpPr>
+        <p:spPr>
+          <a:xfrm>
+            <a:off x="7635240" y="2788920"/>
+            <a:ext cx="3474720" cy="1536192"/>
           </a:xfrm>
           <a:prstGeom prst="roundRect">
             <a:avLst>
-              <a:gd name="adj" fmla="val 6316"/>
+              <a:gd name="adj" fmla="val 7143"/>
+            </a:avLst>
+          </a:prstGeom>
+          <a:solidFill>
+            <a:srgbClr val="FFFFFF">
+              <a:alpha val="88000"/>
+            </a:srgbClr>
+          </a:solidFill>
+          <a:ln w="12700">
+            <a:solidFill>
+              <a:srgbClr val="D6E8F2"/>
+            </a:solidFill>
+            <a:prstDash val="solid"/>
+          </a:ln>
+        </p:spPr>
+      </p:sp>
+      <p:sp>
+        <p:nvSpPr>
+          <p:cNvPr id="14" name="Shape 12"/>
+          <p:cNvSpPr/>
+          <p:nvPr/>
+        </p:nvSpPr>
+        <p:spPr>
+          <a:xfrm>
+            <a:off x="8074152" y="3291840"/>
+            <a:ext cx="2596896" cy="749808"/>
+          </a:xfrm>
+          <a:prstGeom prst="rect">
+            <a:avLst/>
+          </a:prstGeom>
+          <a:solidFill>
+            <a:srgbClr val="EAF6F8"/>
+          </a:solidFill>
+          <a:ln w="12700">
+            <a:solidFill>
+              <a:srgbClr val="8ABBD8"/>
+            </a:solidFill>
+            <a:prstDash val="solid"/>
+          </a:ln>
+        </p:spPr>
+      </p:sp>
+      <p:sp>
+        <p:nvSpPr>
+          <p:cNvPr id="15" name="Shape 13"/>
+          <p:cNvSpPr/>
+          <p:nvPr/>
+        </p:nvSpPr>
+        <p:spPr>
+          <a:xfrm>
+            <a:off x="8202168" y="3721608"/>
+            <a:ext cx="2340864" cy="0"/>
+          </a:xfrm>
+          <a:prstGeom prst="line">
+            <a:avLst/>
+          </a:prstGeom>
+          <a:noFill/>
+          <a:ln w="19050">
+            <a:solidFill>
+              <a:srgbClr val="0068B7"/>
+            </a:solidFill>
+            <a:prstDash val="solid"/>
+          </a:ln>
+        </p:spPr>
+      </p:sp>
+      <p:sp>
+        <p:nvSpPr>
+          <p:cNvPr id="16" name="Shape 14"/>
+          <p:cNvSpPr/>
+          <p:nvPr/>
+        </p:nvSpPr>
+        <p:spPr>
+          <a:xfrm>
+            <a:off x="9198864" y="4206240"/>
+            <a:ext cx="347472" cy="347472"/>
+          </a:xfrm>
+          <a:prstGeom prst="ellipse">
+            <a:avLst/>
+          </a:prstGeom>
+          <a:solidFill>
+            <a:srgbClr val="2F8A28"/>
+          </a:solidFill>
+          <a:ln w="12700">
+            <a:solidFill>
+              <a:srgbClr val="2F8A28"/>
+            </a:solidFill>
+            <a:prstDash val="solid"/>
+          </a:ln>
+        </p:spPr>
+      </p:sp>
+      <p:sp>
+        <p:nvSpPr>
+          <p:cNvPr id="17" name="Text 15"/>
+          <p:cNvSpPr/>
+          <p:nvPr/>
+        </p:nvSpPr>
+        <p:spPr>
+          <a:xfrm>
+            <a:off x="7909560" y="3977640"/>
+            <a:ext cx="2926080" cy="182880"/>
+          </a:xfrm>
+          <a:prstGeom prst="rect">
+            <a:avLst/>
+          </a:prstGeom>
+          <a:noFill/>
+          <a:ln/>
+        </p:spPr>
+        <p:txBody>
+          <a:bodyPr wrap="square" lIns="0" tIns="0" rIns="0" bIns="0" rtlCol="0" anchor="ctr"/>
+          <a:lstStyle/>
+          <a:p>
+            <a:pPr algn="ctr" indent="0" marL="0">
+              <a:buNone/>
+            </a:pPr>
+            <a:r>
+              <a:rPr lang="en-US" sz="1000" dirty="0">
+                <a:solidFill>
+                  <a:srgbClr val="003A63"/>
+                </a:solidFill>
+                <a:latin typeface="Aptos" pitchFamily="34" charset="0"/>
+                <a:ea typeface="Aptos" pitchFamily="34" charset="-122"/>
+                <a:cs typeface="Aptos" pitchFamily="34" charset="-120"/>
+              </a:rPr>
+              <a:t>Concept to action</a:t>
+            </a:r>
+            <a:endParaRPr lang="en-US" sz="1000" dirty="0"/>
+          </a:p>
+        </p:txBody>
+      </p:sp>
+      <p:sp>
+        <p:nvSpPr>
+          <p:cNvPr id="18" name="Shape 16"/>
+          <p:cNvSpPr/>
+          <p:nvPr/>
+        </p:nvSpPr>
+        <p:spPr>
+          <a:xfrm>
+            <a:off x="7635240" y="4498848"/>
+            <a:ext cx="3474720" cy="1143000"/>
+          </a:xfrm>
+          <a:prstGeom prst="roundRect">
+            <a:avLst>
+              <a:gd name="adj" fmla="val 9600"/>
             </a:avLst>
           </a:prstGeom>
           <a:solidFill>
@@ -7739,14 +8743,14 @@
       </p:sp>
       <p:sp>
         <p:nvSpPr>
-          <p:cNvPr id="16" name="Text 14"/>
-          <p:cNvSpPr/>
-          <p:nvPr/>
-        </p:nvSpPr>
-        <p:spPr>
-          <a:xfrm>
-            <a:off x="8074152" y="3666744"/>
-            <a:ext cx="2825496" cy="256032"/>
+          <p:cNvPr id="19" name="Text 17"/>
+          <p:cNvSpPr/>
+          <p:nvPr/>
+        </p:nvSpPr>
+        <p:spPr>
+          <a:xfrm>
+            <a:off x="7799832" y="4645152"/>
+            <a:ext cx="3145536" cy="256032"/>
           </a:xfrm>
           <a:prstGeom prst="rect">
             <a:avLst/>
@@ -7770,7 +8774,7 @@
                 <a:ea typeface="Aptos" pitchFamily="34" charset="-122"/>
                 <a:cs typeface="Aptos" pitchFamily="34" charset="-120"/>
               </a:rPr>
-              <a:t>Use this for</a:t>
+              <a:t>What to produce</a:t>
             </a:r>
             <a:endParaRPr lang="en-US" sz="1300" dirty="0"/>
           </a:p>
@@ -7778,14 +8782,14 @@
       </p:sp>
       <p:sp>
         <p:nvSpPr>
-          <p:cNvPr id="17" name="Text 15"/>
-          <p:cNvSpPr/>
-          <p:nvPr/>
-        </p:nvSpPr>
-        <p:spPr>
-          <a:xfrm>
-            <a:off x="8074152" y="4023360"/>
-            <a:ext cx="2825496" cy="1097280"/>
+          <p:cNvPr id="20" name="Text 18"/>
+          <p:cNvSpPr/>
+          <p:nvPr/>
+        </p:nvSpPr>
+        <p:spPr>
+          <a:xfrm>
+            <a:off x="7799832" y="5001768"/>
+            <a:ext cx="3145536" cy="502920"/>
           </a:xfrm>
           <a:prstGeom prst="rect">
             <a:avLst/>
@@ -7811,7 +8815,7 @@
                 <a:ea typeface="Aptos" pitchFamily="34" charset="-122"/>
                 <a:cs typeface="Aptos" pitchFamily="34" charset="-120"/>
               </a:rPr>
-              <a:t>Connect the concept to public health decisions, safeguards, documentation, or implementation work.</a:t>
+              <a:t>Use the assignment to test whether you can explain the concept, apply it to a realistic public health situation, and identify what would need review before the work moves forward.</a:t>
             </a:r>
             <a:endParaRPr lang="en-US" sz="1550" dirty="0"/>
           </a:p>
@@ -7985,8 +8989,8 @@
         </p:nvSpPr>
         <p:spPr>
           <a:xfrm>
-            <a:off x="9966960" y="6537960"/>
-            <a:ext cx="1645920" cy="201168"/>
+            <a:off x="9646920" y="6537960"/>
+            <a:ext cx="1965960" cy="201168"/>
           </a:xfrm>
           <a:prstGeom prst="rect">
             <a:avLst/>
@@ -8010,7 +9014,7 @@
                 <a:ea typeface="Aptos" pitchFamily="34" charset="-122"/>
                 <a:cs typeface="Aptos" pitchFamily="34" charset="-120"/>
               </a:rPr>
-              <a:t>Â© Paula Soper</a:t>
+              <a:t>Copyright Paula Soper</a:t>
             </a:r>
             <a:endParaRPr lang="en-US" sz="800" dirty="0"/>
           </a:p>
@@ -8057,77 +9061,13 @@
       </p:sp>
       <p:sp>
         <p:nvSpPr>
-          <p:cNvPr id="8" name="Shape 6"/>
+          <p:cNvPr id="8" name="Text 6"/>
           <p:cNvSpPr/>
           <p:nvPr/>
         </p:nvSpPr>
         <p:spPr>
           <a:xfrm>
             <a:off x="640080" y="658368"/>
-            <a:ext cx="420624" cy="420624"/>
-          </a:xfrm>
-          <a:prstGeom prst="ellipse">
-            <a:avLst/>
-          </a:prstGeom>
-          <a:solidFill>
-            <a:srgbClr val="0068B7"/>
-          </a:solidFill>
-          <a:ln w="12700">
-            <a:solidFill>
-              <a:srgbClr val="0068B7"/>
-            </a:solidFill>
-            <a:prstDash val="solid"/>
-          </a:ln>
-        </p:spPr>
-      </p:sp>
-      <p:sp>
-        <p:nvSpPr>
-          <p:cNvPr id="9" name="Text 7"/>
-          <p:cNvSpPr/>
-          <p:nvPr/>
-        </p:nvSpPr>
-        <p:spPr>
-          <a:xfrm>
-            <a:off x="640080" y="731520"/>
-            <a:ext cx="420624" cy="164592"/>
-          </a:xfrm>
-          <a:prstGeom prst="rect">
-            <a:avLst/>
-          </a:prstGeom>
-          <a:noFill/>
-          <a:ln/>
-        </p:spPr>
-        <p:txBody>
-          <a:bodyPr wrap="square" lIns="0" tIns="0" rIns="0" bIns="0" rtlCol="0" anchor="ctr"/>
-          <a:lstStyle/>
-          <a:p>
-            <a:pPr algn="ctr" indent="0" marL="0">
-              <a:buNone/>
-            </a:pPr>
-            <a:r>
-              <a:rPr lang="en-US" sz="1100" b="1" dirty="0">
-                <a:solidFill>
-                  <a:srgbClr val="FFFFFF"/>
-                </a:solidFill>
-                <a:latin typeface="Aptos" pitchFamily="34" charset="0"/>
-                <a:ea typeface="Aptos" pitchFamily="34" charset="-122"/>
-                <a:cs typeface="Aptos" pitchFamily="34" charset="-120"/>
-              </a:rPr>
-              <a:t>10</a:t>
-            </a:r>
-            <a:endParaRPr lang="en-US" sz="1100" dirty="0"/>
-          </a:p>
-        </p:txBody>
-      </p:sp>
-      <p:sp>
-        <p:nvSpPr>
-          <p:cNvPr id="10" name="Text 8"/>
-          <p:cNvSpPr/>
-          <p:nvPr/>
-        </p:nvSpPr>
-        <p:spPr>
-          <a:xfrm>
-            <a:off x="640080" y="621792"/>
             <a:ext cx="10881360" cy="713232"/>
           </a:xfrm>
           <a:prstGeom prst="rect">
@@ -8162,14 +9102,14 @@
       </p:sp>
       <p:sp>
         <p:nvSpPr>
-          <p:cNvPr id="11" name="Text 9"/>
+          <p:cNvPr id="9" name="Text 7"/>
           <p:cNvSpPr/>
           <p:nvPr/>
         </p:nvSpPr>
         <p:spPr>
           <a:xfrm>
             <a:off x="868680" y="1508760"/>
-            <a:ext cx="6537960" cy="4160520"/>
+            <a:ext cx="6309360" cy="4160520"/>
           </a:xfrm>
           <a:prstGeom prst="rect">
             <a:avLst/>
@@ -8228,18 +9168,18 @@
       </p:sp>
       <p:sp>
         <p:nvSpPr>
-          <p:cNvPr id="12" name="Shape 10"/>
-          <p:cNvSpPr/>
-          <p:nvPr/>
-        </p:nvSpPr>
-        <p:spPr>
-          <a:xfrm>
-            <a:off x="7909560" y="1417320"/>
-            <a:ext cx="3154680" cy="1828800"/>
+          <p:cNvPr id="10" name="Shape 8"/>
+          <p:cNvSpPr/>
+          <p:nvPr/>
+        </p:nvSpPr>
+        <p:spPr>
+          <a:xfrm>
+            <a:off x="7635240" y="1325880"/>
+            <a:ext cx="3474720" cy="1325880"/>
           </a:xfrm>
           <a:prstGeom prst="roundRect">
             <a:avLst>
-              <a:gd name="adj" fmla="val 6000"/>
+              <a:gd name="adj" fmla="val 8276"/>
             </a:avLst>
           </a:prstGeom>
           <a:solidFill>
@@ -8255,14 +9195,14 @@
       </p:sp>
       <p:sp>
         <p:nvSpPr>
-          <p:cNvPr id="13" name="Text 11"/>
-          <p:cNvSpPr/>
-          <p:nvPr/>
-        </p:nvSpPr>
-        <p:spPr>
-          <a:xfrm>
-            <a:off x="8074152" y="1563624"/>
-            <a:ext cx="2825496" cy="256032"/>
+          <p:cNvPr id="11" name="Text 9"/>
+          <p:cNvSpPr/>
+          <p:nvPr/>
+        </p:nvSpPr>
+        <p:spPr>
+          <a:xfrm>
+            <a:off x="7799832" y="1472184"/>
+            <a:ext cx="3145536" cy="256032"/>
           </a:xfrm>
           <a:prstGeom prst="rect">
             <a:avLst/>
@@ -8286,7 +9226,7 @@
                 <a:ea typeface="Aptos" pitchFamily="34" charset="-122"/>
                 <a:cs typeface="Aptos" pitchFamily="34" charset="-120"/>
               </a:rPr>
-              <a:t>Key idea</a:t>
+              <a:t>Core concept</a:t>
             </a:r>
             <a:endParaRPr lang="en-US" sz="1300" dirty="0"/>
           </a:p>
@@ -8294,14 +9234,14 @@
       </p:sp>
       <p:sp>
         <p:nvSpPr>
-          <p:cNvPr id="14" name="Text 12"/>
-          <p:cNvSpPr/>
-          <p:nvPr/>
-        </p:nvSpPr>
-        <p:spPr>
-          <a:xfrm>
-            <a:off x="8074152" y="1920240"/>
-            <a:ext cx="2825496" cy="1188720"/>
+          <p:cNvPr id="12" name="Text 10"/>
+          <p:cNvSpPr/>
+          <p:nvPr/>
+        </p:nvSpPr>
+        <p:spPr>
+          <a:xfrm>
+            <a:off x="7799832" y="1828800"/>
+            <a:ext cx="3145536" cy="685800"/>
           </a:xfrm>
           <a:prstGeom prst="rect">
             <a:avLst/>
@@ -8335,18 +9275,159 @@
       </p:sp>
       <p:sp>
         <p:nvSpPr>
-          <p:cNvPr id="15" name="Shape 13"/>
-          <p:cNvSpPr/>
-          <p:nvPr/>
-        </p:nvSpPr>
-        <p:spPr>
-          <a:xfrm>
-            <a:off x="7909560" y="3520440"/>
-            <a:ext cx="3154680" cy="1737360"/>
+          <p:cNvPr id="13" name="Shape 11"/>
+          <p:cNvSpPr/>
+          <p:nvPr/>
+        </p:nvSpPr>
+        <p:spPr>
+          <a:xfrm>
+            <a:off x="7635240" y="2788920"/>
+            <a:ext cx="3474720" cy="1536192"/>
           </a:xfrm>
           <a:prstGeom prst="roundRect">
             <a:avLst>
-              <a:gd name="adj" fmla="val 6316"/>
+              <a:gd name="adj" fmla="val 7143"/>
+            </a:avLst>
+          </a:prstGeom>
+          <a:solidFill>
+            <a:srgbClr val="FFFFFF">
+              <a:alpha val="88000"/>
+            </a:srgbClr>
+          </a:solidFill>
+          <a:ln w="12700">
+            <a:solidFill>
+              <a:srgbClr val="D6E8F2"/>
+            </a:solidFill>
+            <a:prstDash val="solid"/>
+          </a:ln>
+        </p:spPr>
+      </p:sp>
+      <p:sp>
+        <p:nvSpPr>
+          <p:cNvPr id="14" name="Shape 12"/>
+          <p:cNvSpPr/>
+          <p:nvPr/>
+        </p:nvSpPr>
+        <p:spPr>
+          <a:xfrm>
+            <a:off x="8074152" y="3291840"/>
+            <a:ext cx="2596896" cy="749808"/>
+          </a:xfrm>
+          <a:prstGeom prst="rect">
+            <a:avLst/>
+          </a:prstGeom>
+          <a:solidFill>
+            <a:srgbClr val="EAF6F8"/>
+          </a:solidFill>
+          <a:ln w="12700">
+            <a:solidFill>
+              <a:srgbClr val="8ABBD8"/>
+            </a:solidFill>
+            <a:prstDash val="solid"/>
+          </a:ln>
+        </p:spPr>
+      </p:sp>
+      <p:sp>
+        <p:nvSpPr>
+          <p:cNvPr id="15" name="Shape 13"/>
+          <p:cNvSpPr/>
+          <p:nvPr/>
+        </p:nvSpPr>
+        <p:spPr>
+          <a:xfrm>
+            <a:off x="8202168" y="3721608"/>
+            <a:ext cx="2340864" cy="0"/>
+          </a:xfrm>
+          <a:prstGeom prst="line">
+            <a:avLst/>
+          </a:prstGeom>
+          <a:noFill/>
+          <a:ln w="19050">
+            <a:solidFill>
+              <a:srgbClr val="0068B7"/>
+            </a:solidFill>
+            <a:prstDash val="solid"/>
+          </a:ln>
+        </p:spPr>
+      </p:sp>
+      <p:sp>
+        <p:nvSpPr>
+          <p:cNvPr id="16" name="Shape 14"/>
+          <p:cNvSpPr/>
+          <p:nvPr/>
+        </p:nvSpPr>
+        <p:spPr>
+          <a:xfrm>
+            <a:off x="9198864" y="4206240"/>
+            <a:ext cx="347472" cy="347472"/>
+          </a:xfrm>
+          <a:prstGeom prst="ellipse">
+            <a:avLst/>
+          </a:prstGeom>
+          <a:solidFill>
+            <a:srgbClr val="2F8A28"/>
+          </a:solidFill>
+          <a:ln w="12700">
+            <a:solidFill>
+              <a:srgbClr val="2F8A28"/>
+            </a:solidFill>
+            <a:prstDash val="solid"/>
+          </a:ln>
+        </p:spPr>
+      </p:sp>
+      <p:sp>
+        <p:nvSpPr>
+          <p:cNvPr id="17" name="Text 15"/>
+          <p:cNvSpPr/>
+          <p:nvPr/>
+        </p:nvSpPr>
+        <p:spPr>
+          <a:xfrm>
+            <a:off x="7909560" y="3977640"/>
+            <a:ext cx="2926080" cy="182880"/>
+          </a:xfrm>
+          <a:prstGeom prst="rect">
+            <a:avLst/>
+          </a:prstGeom>
+          <a:noFill/>
+          <a:ln/>
+        </p:spPr>
+        <p:txBody>
+          <a:bodyPr wrap="square" lIns="0" tIns="0" rIns="0" bIns="0" rtlCol="0" anchor="ctr"/>
+          <a:lstStyle/>
+          <a:p>
+            <a:pPr algn="ctr" indent="0" marL="0">
+              <a:buNone/>
+            </a:pPr>
+            <a:r>
+              <a:rPr lang="en-US" sz="1000" dirty="0">
+                <a:solidFill>
+                  <a:srgbClr val="003A63"/>
+                </a:solidFill>
+                <a:latin typeface="Aptos" pitchFamily="34" charset="0"/>
+                <a:ea typeface="Aptos" pitchFamily="34" charset="-122"/>
+                <a:cs typeface="Aptos" pitchFamily="34" charset="-120"/>
+              </a:rPr>
+              <a:t>Concept to action</a:t>
+            </a:r>
+            <a:endParaRPr lang="en-US" sz="1000" dirty="0"/>
+          </a:p>
+        </p:txBody>
+      </p:sp>
+      <p:sp>
+        <p:nvSpPr>
+          <p:cNvPr id="18" name="Shape 16"/>
+          <p:cNvSpPr/>
+          <p:nvPr/>
+        </p:nvSpPr>
+        <p:spPr>
+          <a:xfrm>
+            <a:off x="7635240" y="4498848"/>
+            <a:ext cx="3474720" cy="1143000"/>
+          </a:xfrm>
+          <a:prstGeom prst="roundRect">
+            <a:avLst>
+              <a:gd name="adj" fmla="val 9600"/>
             </a:avLst>
           </a:prstGeom>
           <a:solidFill>
@@ -8362,14 +9443,14 @@
       </p:sp>
       <p:sp>
         <p:nvSpPr>
-          <p:cNvPr id="16" name="Text 14"/>
-          <p:cNvSpPr/>
-          <p:nvPr/>
-        </p:nvSpPr>
-        <p:spPr>
-          <a:xfrm>
-            <a:off x="8074152" y="3666744"/>
-            <a:ext cx="2825496" cy="256032"/>
+          <p:cNvPr id="19" name="Text 17"/>
+          <p:cNvSpPr/>
+          <p:nvPr/>
+        </p:nvSpPr>
+        <p:spPr>
+          <a:xfrm>
+            <a:off x="7799832" y="4645152"/>
+            <a:ext cx="3145536" cy="256032"/>
           </a:xfrm>
           <a:prstGeom prst="rect">
             <a:avLst/>
@@ -8393,7 +9474,7 @@
                 <a:ea typeface="Aptos" pitchFamily="34" charset="-122"/>
                 <a:cs typeface="Aptos" pitchFamily="34" charset="-120"/>
               </a:rPr>
-              <a:t>Use this for</a:t>
+              <a:t>Apply it</a:t>
             </a:r>
             <a:endParaRPr lang="en-US" sz="1300" dirty="0"/>
           </a:p>
@@ -8401,14 +9482,14 @@
       </p:sp>
       <p:sp>
         <p:nvSpPr>
-          <p:cNvPr id="17" name="Text 15"/>
-          <p:cNvSpPr/>
-          <p:nvPr/>
-        </p:nvSpPr>
-        <p:spPr>
-          <a:xfrm>
-            <a:off x="8074152" y="4023360"/>
-            <a:ext cx="2825496" cy="1097280"/>
+          <p:cNvPr id="20" name="Text 18"/>
+          <p:cNvSpPr/>
+          <p:nvPr/>
+        </p:nvSpPr>
+        <p:spPr>
+          <a:xfrm>
+            <a:off x="7799832" y="5001768"/>
+            <a:ext cx="3145536" cy="502920"/>
           </a:xfrm>
           <a:prstGeom prst="rect">
             <a:avLst/>
@@ -8434,7 +9515,7 @@
                 <a:ea typeface="Aptos" pitchFamily="34" charset="-122"/>
                 <a:cs typeface="Aptos" pitchFamily="34" charset="-120"/>
               </a:rPr>
-              <a:t>Connect the concept to public health decisions, safeguards, documentation, or implementation work.</a:t>
+              <a:t>Connect the concept to public health purpose, responsible use, required safeguards, documentation, and the next action a department should take.</a:t>
             </a:r>
             <a:endParaRPr lang="en-US" sz="1550" dirty="0"/>
           </a:p>
@@ -8608,8 +9689,8 @@
         </p:nvSpPr>
         <p:spPr>
           <a:xfrm>
-            <a:off x="9966960" y="6537960"/>
-            <a:ext cx="1645920" cy="201168"/>
+            <a:off x="9646920" y="6537960"/>
+            <a:ext cx="1965960" cy="201168"/>
           </a:xfrm>
           <a:prstGeom prst="rect">
             <a:avLst/>
@@ -8633,7 +9714,7 @@
                 <a:ea typeface="Aptos" pitchFamily="34" charset="-122"/>
                 <a:cs typeface="Aptos" pitchFamily="34" charset="-120"/>
               </a:rPr>
-              <a:t>Â© Paula Soper</a:t>
+              <a:t>Copyright Paula Soper</a:t>
             </a:r>
             <a:endParaRPr lang="en-US" sz="800" dirty="0"/>
           </a:p>
@@ -8728,7 +9809,7 @@
         <p:spPr>
           <a:xfrm>
             <a:off x="868680" y="1508760"/>
-            <a:ext cx="6537960" cy="4160520"/>
+            <a:ext cx="6309360" cy="4160520"/>
           </a:xfrm>
           <a:prstGeom prst="rect">
             <a:avLst/>
@@ -8765,12 +9846,12 @@
         </p:nvSpPr>
         <p:spPr>
           <a:xfrm>
-            <a:off x="7909560" y="1417320"/>
-            <a:ext cx="3154680" cy="1828800"/>
+            <a:off x="7635240" y="1325880"/>
+            <a:ext cx="3474720" cy="1325880"/>
           </a:xfrm>
           <a:prstGeom prst="roundRect">
             <a:avLst>
-              <a:gd name="adj" fmla="val 6000"/>
+              <a:gd name="adj" fmla="val 8276"/>
             </a:avLst>
           </a:prstGeom>
           <a:solidFill>
@@ -8792,8 +9873,8 @@
         </p:nvSpPr>
         <p:spPr>
           <a:xfrm>
-            <a:off x="8074152" y="1563624"/>
-            <a:ext cx="2825496" cy="256032"/>
+            <a:off x="7799832" y="1472184"/>
+            <a:ext cx="3145536" cy="256032"/>
           </a:xfrm>
           <a:prstGeom prst="rect">
             <a:avLst/>
@@ -8817,7 +9898,7 @@
                 <a:ea typeface="Aptos" pitchFamily="34" charset="-122"/>
                 <a:cs typeface="Aptos" pitchFamily="34" charset="-120"/>
               </a:rPr>
-              <a:t>Key idea</a:t>
+              <a:t>Core concept</a:t>
             </a:r>
             <a:endParaRPr lang="en-US" sz="1300" dirty="0"/>
           </a:p>
@@ -8831,8 +9912,8 @@
         </p:nvSpPr>
         <p:spPr>
           <a:xfrm>
-            <a:off x="8074152" y="1920240"/>
-            <a:ext cx="2825496" cy="1188720"/>
+            <a:off x="7799832" y="1828800"/>
+            <a:ext cx="3145536" cy="685800"/>
           </a:xfrm>
           <a:prstGeom prst="rect">
             <a:avLst/>
@@ -8872,12 +9953,153 @@
         </p:nvSpPr>
         <p:spPr>
           <a:xfrm>
-            <a:off x="7909560" y="3520440"/>
-            <a:ext cx="3154680" cy="1737360"/>
+            <a:off x="7635240" y="2788920"/>
+            <a:ext cx="3474720" cy="1536192"/>
           </a:xfrm>
           <a:prstGeom prst="roundRect">
             <a:avLst>
-              <a:gd name="adj" fmla="val 6316"/>
+              <a:gd name="adj" fmla="val 7143"/>
+            </a:avLst>
+          </a:prstGeom>
+          <a:solidFill>
+            <a:srgbClr val="FFFFFF">
+              <a:alpha val="88000"/>
+            </a:srgbClr>
+          </a:solidFill>
+          <a:ln w="12700">
+            <a:solidFill>
+              <a:srgbClr val="D6E8F2"/>
+            </a:solidFill>
+            <a:prstDash val="solid"/>
+          </a:ln>
+        </p:spPr>
+      </p:sp>
+      <p:sp>
+        <p:nvSpPr>
+          <p:cNvPr id="14" name="Shape 12"/>
+          <p:cNvSpPr/>
+          <p:nvPr/>
+        </p:nvSpPr>
+        <p:spPr>
+          <a:xfrm>
+            <a:off x="8074152" y="3291840"/>
+            <a:ext cx="2596896" cy="749808"/>
+          </a:xfrm>
+          <a:prstGeom prst="rect">
+            <a:avLst/>
+          </a:prstGeom>
+          <a:solidFill>
+            <a:srgbClr val="EAF6F8"/>
+          </a:solidFill>
+          <a:ln w="12700">
+            <a:solidFill>
+              <a:srgbClr val="8ABBD8"/>
+            </a:solidFill>
+            <a:prstDash val="solid"/>
+          </a:ln>
+        </p:spPr>
+      </p:sp>
+      <p:sp>
+        <p:nvSpPr>
+          <p:cNvPr id="15" name="Shape 13"/>
+          <p:cNvSpPr/>
+          <p:nvPr/>
+        </p:nvSpPr>
+        <p:spPr>
+          <a:xfrm>
+            <a:off x="8202168" y="3721608"/>
+            <a:ext cx="2340864" cy="0"/>
+          </a:xfrm>
+          <a:prstGeom prst="line">
+            <a:avLst/>
+          </a:prstGeom>
+          <a:noFill/>
+          <a:ln w="19050">
+            <a:solidFill>
+              <a:srgbClr val="0068B7"/>
+            </a:solidFill>
+            <a:prstDash val="solid"/>
+          </a:ln>
+        </p:spPr>
+      </p:sp>
+      <p:sp>
+        <p:nvSpPr>
+          <p:cNvPr id="16" name="Shape 14"/>
+          <p:cNvSpPr/>
+          <p:nvPr/>
+        </p:nvSpPr>
+        <p:spPr>
+          <a:xfrm>
+            <a:off x="9198864" y="4206240"/>
+            <a:ext cx="347472" cy="347472"/>
+          </a:xfrm>
+          <a:prstGeom prst="ellipse">
+            <a:avLst/>
+          </a:prstGeom>
+          <a:solidFill>
+            <a:srgbClr val="2F8A28"/>
+          </a:solidFill>
+          <a:ln w="12700">
+            <a:solidFill>
+              <a:srgbClr val="2F8A28"/>
+            </a:solidFill>
+            <a:prstDash val="solid"/>
+          </a:ln>
+        </p:spPr>
+      </p:sp>
+      <p:sp>
+        <p:nvSpPr>
+          <p:cNvPr id="17" name="Text 15"/>
+          <p:cNvSpPr/>
+          <p:nvPr/>
+        </p:nvSpPr>
+        <p:spPr>
+          <a:xfrm>
+            <a:off x="7909560" y="3977640"/>
+            <a:ext cx="2926080" cy="182880"/>
+          </a:xfrm>
+          <a:prstGeom prst="rect">
+            <a:avLst/>
+          </a:prstGeom>
+          <a:noFill/>
+          <a:ln/>
+        </p:spPr>
+        <p:txBody>
+          <a:bodyPr wrap="square" lIns="0" tIns="0" rIns="0" bIns="0" rtlCol="0" anchor="ctr"/>
+          <a:lstStyle/>
+          <a:p>
+            <a:pPr algn="ctr" indent="0" marL="0">
+              <a:buNone/>
+            </a:pPr>
+            <a:r>
+              <a:rPr lang="en-US" sz="1000" dirty="0">
+                <a:solidFill>
+                  <a:srgbClr val="003A63"/>
+                </a:solidFill>
+                <a:latin typeface="Aptos" pitchFamily="34" charset="0"/>
+                <a:ea typeface="Aptos" pitchFamily="34" charset="-122"/>
+                <a:cs typeface="Aptos" pitchFamily="34" charset="-120"/>
+              </a:rPr>
+              <a:t>Concept to action</a:t>
+            </a:r>
+            <a:endParaRPr lang="en-US" sz="1000" dirty="0"/>
+          </a:p>
+        </p:txBody>
+      </p:sp>
+      <p:sp>
+        <p:nvSpPr>
+          <p:cNvPr id="18" name="Shape 16"/>
+          <p:cNvSpPr/>
+          <p:nvPr/>
+        </p:nvSpPr>
+        <p:spPr>
+          <a:xfrm>
+            <a:off x="7635240" y="4498848"/>
+            <a:ext cx="3474720" cy="1143000"/>
+          </a:xfrm>
+          <a:prstGeom prst="roundRect">
+            <a:avLst>
+              <a:gd name="adj" fmla="val 9600"/>
             </a:avLst>
           </a:prstGeom>
           <a:solidFill>
@@ -8893,14 +10115,14 @@
       </p:sp>
       <p:sp>
         <p:nvSpPr>
-          <p:cNvPr id="14" name="Text 12"/>
-          <p:cNvSpPr/>
-          <p:nvPr/>
-        </p:nvSpPr>
-        <p:spPr>
-          <a:xfrm>
-            <a:off x="8074152" y="3666744"/>
-            <a:ext cx="2825496" cy="256032"/>
+          <p:cNvPr id="19" name="Text 17"/>
+          <p:cNvSpPr/>
+          <p:nvPr/>
+        </p:nvSpPr>
+        <p:spPr>
+          <a:xfrm>
+            <a:off x="7799832" y="4645152"/>
+            <a:ext cx="3145536" cy="256032"/>
           </a:xfrm>
           <a:prstGeom prst="rect">
             <a:avLst/>
@@ -8924,7 +10146,7 @@
                 <a:ea typeface="Aptos" pitchFamily="34" charset="-122"/>
                 <a:cs typeface="Aptos" pitchFamily="34" charset="-120"/>
               </a:rPr>
-              <a:t>Use this for</a:t>
+              <a:t>Apply it</a:t>
             </a:r>
             <a:endParaRPr lang="en-US" sz="1300" dirty="0"/>
           </a:p>
@@ -8932,14 +10154,14 @@
       </p:sp>
       <p:sp>
         <p:nvSpPr>
-          <p:cNvPr id="15" name="Text 13"/>
-          <p:cNvSpPr/>
-          <p:nvPr/>
-        </p:nvSpPr>
-        <p:spPr>
-          <a:xfrm>
-            <a:off x="8074152" y="4023360"/>
-            <a:ext cx="2825496" cy="1097280"/>
+          <p:cNvPr id="20" name="Text 18"/>
+          <p:cNvSpPr/>
+          <p:nvPr/>
+        </p:nvSpPr>
+        <p:spPr>
+          <a:xfrm>
+            <a:off x="7799832" y="5001768"/>
+            <a:ext cx="3145536" cy="502920"/>
           </a:xfrm>
           <a:prstGeom prst="rect">
             <a:avLst/>
@@ -8965,7 +10187,7 @@
                 <a:ea typeface="Aptos" pitchFamily="34" charset="-122"/>
                 <a:cs typeface="Aptos" pitchFamily="34" charset="-120"/>
               </a:rPr>
-              <a:t>Connect the concept to public health decisions, safeguards, documentation, or implementation work.</a:t>
+              <a:t>Connect the concept to public health purpose, responsible use, required safeguards, documentation, and the next action a department should take.</a:t>
             </a:r>
             <a:endParaRPr lang="en-US" sz="1550" dirty="0"/>
           </a:p>
@@ -9139,8 +10361,8 @@
         </p:nvSpPr>
         <p:spPr>
           <a:xfrm>
-            <a:off x="9966960" y="6537960"/>
-            <a:ext cx="1645920" cy="201168"/>
+            <a:off x="9646920" y="6537960"/>
+            <a:ext cx="1965960" cy="201168"/>
           </a:xfrm>
           <a:prstGeom prst="rect">
             <a:avLst/>
@@ -9164,7 +10386,7 @@
                 <a:ea typeface="Aptos" pitchFamily="34" charset="-122"/>
                 <a:cs typeface="Aptos" pitchFamily="34" charset="-120"/>
               </a:rPr>
-              <a:t>Â© Paula Soper</a:t>
+              <a:t>Copyright Paula Soper</a:t>
             </a:r>
             <a:endParaRPr lang="en-US" sz="800" dirty="0"/>
           </a:p>
@@ -9527,46 +10749,7 @@
       </p:sp>
       <p:sp>
         <p:nvSpPr>
-          <p:cNvPr id="15" name="Text 13"/>
-          <p:cNvSpPr/>
-          <p:nvPr/>
-        </p:nvSpPr>
-        <p:spPr>
-          <a:xfrm>
-            <a:off x="8695944" y="3941064"/>
-            <a:ext cx="201168" cy="256032"/>
-          </a:xfrm>
-          <a:prstGeom prst="rect">
-            <a:avLst/>
-          </a:prstGeom>
-          <a:noFill/>
-          <a:ln/>
-        </p:spPr>
-        <p:txBody>
-          <a:bodyPr wrap="square" lIns="0" tIns="0" rIns="0" bIns="0" rtlCol="0" anchor="ctr"/>
-          <a:lstStyle/>
-          <a:p>
-            <a:pPr algn="ctr" indent="0" marL="0">
-              <a:buNone/>
-            </a:pPr>
-            <a:r>
-              <a:rPr lang="en-US" sz="1800" b="1" dirty="0">
-                <a:solidFill>
-                  <a:srgbClr val="0068B7"/>
-                </a:solidFill>
-                <a:latin typeface="Aptos" pitchFamily="34" charset="0"/>
-                <a:ea typeface="Aptos" pitchFamily="34" charset="-122"/>
-                <a:cs typeface="Aptos" pitchFamily="34" charset="-120"/>
-              </a:rPr>
-              <a:t>â†’</a:t>
-            </a:r>
-            <a:endParaRPr lang="en-US" sz="1800" dirty="0"/>
-          </a:p>
-        </p:txBody>
-      </p:sp>
-      <p:sp>
-        <p:nvSpPr>
-          <p:cNvPr id="16" name="Shape 14"/>
+          <p:cNvPr id="15" name="Shape 13"/>
           <p:cNvSpPr/>
           <p:nvPr/>
         </p:nvSpPr>
@@ -9593,7 +10776,7 @@
       </p:sp>
       <p:sp>
         <p:nvSpPr>
-          <p:cNvPr id="17" name="Text 15"/>
+          <p:cNvPr id="16" name="Text 14"/>
           <p:cNvSpPr/>
           <p:nvPr/>
         </p:nvSpPr>
@@ -9634,46 +10817,7 @@
       </p:sp>
       <p:sp>
         <p:nvSpPr>
-          <p:cNvPr id="18" name="Text 16"/>
-          <p:cNvSpPr/>
-          <p:nvPr/>
-        </p:nvSpPr>
-        <p:spPr>
-          <a:xfrm>
-            <a:off x="9985248" y="3941064"/>
-            <a:ext cx="201168" cy="256032"/>
-          </a:xfrm>
-          <a:prstGeom prst="rect">
-            <a:avLst/>
-          </a:prstGeom>
-          <a:noFill/>
-          <a:ln/>
-        </p:spPr>
-        <p:txBody>
-          <a:bodyPr wrap="square" lIns="0" tIns="0" rIns="0" bIns="0" rtlCol="0" anchor="ctr"/>
-          <a:lstStyle/>
-          <a:p>
-            <a:pPr algn="ctr" indent="0" marL="0">
-              <a:buNone/>
-            </a:pPr>
-            <a:r>
-              <a:rPr lang="en-US" sz="1800" b="1" dirty="0">
-                <a:solidFill>
-                  <a:srgbClr val="0068B7"/>
-                </a:solidFill>
-                <a:latin typeface="Aptos" pitchFamily="34" charset="0"/>
-                <a:ea typeface="Aptos" pitchFamily="34" charset="-122"/>
-                <a:cs typeface="Aptos" pitchFamily="34" charset="-120"/>
-              </a:rPr>
-              <a:t>â†’</a:t>
-            </a:r>
-            <a:endParaRPr lang="en-US" sz="1800" dirty="0"/>
-          </a:p>
-        </p:txBody>
-      </p:sp>
-      <p:sp>
-        <p:nvSpPr>
-          <p:cNvPr id="19" name="Shape 17"/>
+          <p:cNvPr id="17" name="Shape 15"/>
           <p:cNvSpPr/>
           <p:nvPr/>
         </p:nvSpPr>
@@ -9700,7 +10844,7 @@
       </p:sp>
       <p:sp>
         <p:nvSpPr>
-          <p:cNvPr id="20" name="Text 18"/>
+          <p:cNvPr id="18" name="Text 16"/>
           <p:cNvSpPr/>
           <p:nvPr/>
         </p:nvSpPr>
@@ -9907,8 +11051,8 @@
         </p:nvSpPr>
         <p:spPr>
           <a:xfrm>
-            <a:off x="9966960" y="6537960"/>
-            <a:ext cx="1645920" cy="201168"/>
+            <a:off x="9646920" y="6537960"/>
+            <a:ext cx="1965960" cy="201168"/>
           </a:xfrm>
           <a:prstGeom prst="rect">
             <a:avLst/>
@@ -9932,7 +11076,7 @@
                 <a:ea typeface="Aptos" pitchFamily="34" charset="-122"/>
                 <a:cs typeface="Aptos" pitchFamily="34" charset="-120"/>
               </a:rPr>
-              <a:t>Â© Paula Soper</a:t>
+              <a:t>Copyright Paula Soper</a:t>
             </a:r>
             <a:endParaRPr lang="en-US" sz="800" dirty="0"/>
           </a:p>
@@ -9979,77 +11123,13 @@
       </p:sp>
       <p:sp>
         <p:nvSpPr>
-          <p:cNvPr id="8" name="Shape 6"/>
+          <p:cNvPr id="8" name="Text 6"/>
           <p:cNvSpPr/>
           <p:nvPr/>
         </p:nvSpPr>
         <p:spPr>
           <a:xfrm>
             <a:off x="640080" y="658368"/>
-            <a:ext cx="420624" cy="420624"/>
-          </a:xfrm>
-          <a:prstGeom prst="ellipse">
-            <a:avLst/>
-          </a:prstGeom>
-          <a:solidFill>
-            <a:srgbClr val="0068B7"/>
-          </a:solidFill>
-          <a:ln w="12700">
-            <a:solidFill>
-              <a:srgbClr val="0068B7"/>
-            </a:solidFill>
-            <a:prstDash val="solid"/>
-          </a:ln>
-        </p:spPr>
-      </p:sp>
-      <p:sp>
-        <p:nvSpPr>
-          <p:cNvPr id="9" name="Text 7"/>
-          <p:cNvSpPr/>
-          <p:nvPr/>
-        </p:nvSpPr>
-        <p:spPr>
-          <a:xfrm>
-            <a:off x="640080" y="731520"/>
-            <a:ext cx="420624" cy="164592"/>
-          </a:xfrm>
-          <a:prstGeom prst="rect">
-            <a:avLst/>
-          </a:prstGeom>
-          <a:noFill/>
-          <a:ln/>
-        </p:spPr>
-        <p:txBody>
-          <a:bodyPr wrap="square" lIns="0" tIns="0" rIns="0" bIns="0" rtlCol="0" anchor="ctr"/>
-          <a:lstStyle/>
-          <a:p>
-            <a:pPr algn="ctr" indent="0" marL="0">
-              <a:buNone/>
-            </a:pPr>
-            <a:r>
-              <a:rPr lang="en-US" sz="1100" b="1" dirty="0">
-                <a:solidFill>
-                  <a:srgbClr val="FFFFFF"/>
-                </a:solidFill>
-                <a:latin typeface="Aptos" pitchFamily="34" charset="0"/>
-                <a:ea typeface="Aptos" pitchFamily="34" charset="-122"/>
-                <a:cs typeface="Aptos" pitchFamily="34" charset="-120"/>
-              </a:rPr>
-              <a:t>11</a:t>
-            </a:r>
-            <a:endParaRPr lang="en-US" sz="1100" dirty="0"/>
-          </a:p>
-        </p:txBody>
-      </p:sp>
-      <p:sp>
-        <p:nvSpPr>
-          <p:cNvPr id="10" name="Text 8"/>
-          <p:cNvSpPr/>
-          <p:nvPr/>
-        </p:nvSpPr>
-        <p:spPr>
-          <a:xfrm>
-            <a:off x="640080" y="621792"/>
             <a:ext cx="10881360" cy="713232"/>
           </a:xfrm>
           <a:prstGeom prst="rect">
@@ -10084,14 +11164,14 @@
       </p:sp>
       <p:sp>
         <p:nvSpPr>
-          <p:cNvPr id="11" name="Text 9"/>
+          <p:cNvPr id="9" name="Text 7"/>
           <p:cNvSpPr/>
           <p:nvPr/>
         </p:nvSpPr>
         <p:spPr>
           <a:xfrm>
             <a:off x="868680" y="1508760"/>
-            <a:ext cx="6537960" cy="4160520"/>
+            <a:ext cx="6309360" cy="4160520"/>
           </a:xfrm>
           <a:prstGeom prst="rect">
             <a:avLst/>
@@ -10150,18 +11230,18 @@
       </p:sp>
       <p:sp>
         <p:nvSpPr>
-          <p:cNvPr id="12" name="Shape 10"/>
-          <p:cNvSpPr/>
-          <p:nvPr/>
-        </p:nvSpPr>
-        <p:spPr>
-          <a:xfrm>
-            <a:off x="7909560" y="1417320"/>
-            <a:ext cx="3154680" cy="1828800"/>
+          <p:cNvPr id="10" name="Shape 8"/>
+          <p:cNvSpPr/>
+          <p:nvPr/>
+        </p:nvSpPr>
+        <p:spPr>
+          <a:xfrm>
+            <a:off x="7635240" y="1325880"/>
+            <a:ext cx="3474720" cy="1325880"/>
           </a:xfrm>
           <a:prstGeom prst="roundRect">
             <a:avLst>
-              <a:gd name="adj" fmla="val 6000"/>
+              <a:gd name="adj" fmla="val 8276"/>
             </a:avLst>
           </a:prstGeom>
           <a:solidFill>
@@ -10177,14 +11257,14 @@
       </p:sp>
       <p:sp>
         <p:nvSpPr>
-          <p:cNvPr id="13" name="Text 11"/>
-          <p:cNvSpPr/>
-          <p:nvPr/>
-        </p:nvSpPr>
-        <p:spPr>
-          <a:xfrm>
-            <a:off x="8074152" y="1563624"/>
-            <a:ext cx="2825496" cy="256032"/>
+          <p:cNvPr id="11" name="Text 9"/>
+          <p:cNvSpPr/>
+          <p:nvPr/>
+        </p:nvSpPr>
+        <p:spPr>
+          <a:xfrm>
+            <a:off x="7799832" y="1472184"/>
+            <a:ext cx="3145536" cy="256032"/>
           </a:xfrm>
           <a:prstGeom prst="rect">
             <a:avLst/>
@@ -10208,7 +11288,7 @@
                 <a:ea typeface="Aptos" pitchFamily="34" charset="-122"/>
                 <a:cs typeface="Aptos" pitchFamily="34" charset="-120"/>
               </a:rPr>
-              <a:t>Key idea</a:t>
+              <a:t>Practice focus</a:t>
             </a:r>
             <a:endParaRPr lang="en-US" sz="1300" dirty="0"/>
           </a:p>
@@ -10216,14 +11296,14 @@
       </p:sp>
       <p:sp>
         <p:nvSpPr>
-          <p:cNvPr id="14" name="Text 12"/>
-          <p:cNvSpPr/>
-          <p:nvPr/>
-        </p:nvSpPr>
-        <p:spPr>
-          <a:xfrm>
-            <a:off x="8074152" y="1920240"/>
-            <a:ext cx="2825496" cy="1188720"/>
+          <p:cNvPr id="12" name="Text 10"/>
+          <p:cNvSpPr/>
+          <p:nvPr/>
+        </p:nvSpPr>
+        <p:spPr>
+          <a:xfrm>
+            <a:off x="7799832" y="1828800"/>
+            <a:ext cx="3145536" cy="685800"/>
           </a:xfrm>
           <a:prstGeom prst="rect">
             <a:avLst/>
@@ -10257,18 +11337,159 @@
       </p:sp>
       <p:sp>
         <p:nvSpPr>
-          <p:cNvPr id="15" name="Shape 13"/>
-          <p:cNvSpPr/>
-          <p:nvPr/>
-        </p:nvSpPr>
-        <p:spPr>
-          <a:xfrm>
-            <a:off x="7909560" y="3520440"/>
-            <a:ext cx="3154680" cy="1737360"/>
+          <p:cNvPr id="13" name="Shape 11"/>
+          <p:cNvSpPr/>
+          <p:nvPr/>
+        </p:nvSpPr>
+        <p:spPr>
+          <a:xfrm>
+            <a:off x="7635240" y="2788920"/>
+            <a:ext cx="3474720" cy="1536192"/>
           </a:xfrm>
           <a:prstGeom prst="roundRect">
             <a:avLst>
-              <a:gd name="adj" fmla="val 6316"/>
+              <a:gd name="adj" fmla="val 7143"/>
+            </a:avLst>
+          </a:prstGeom>
+          <a:solidFill>
+            <a:srgbClr val="FFFFFF">
+              <a:alpha val="88000"/>
+            </a:srgbClr>
+          </a:solidFill>
+          <a:ln w="12700">
+            <a:solidFill>
+              <a:srgbClr val="D6E8F2"/>
+            </a:solidFill>
+            <a:prstDash val="solid"/>
+          </a:ln>
+        </p:spPr>
+      </p:sp>
+      <p:sp>
+        <p:nvSpPr>
+          <p:cNvPr id="14" name="Shape 12"/>
+          <p:cNvSpPr/>
+          <p:nvPr/>
+        </p:nvSpPr>
+        <p:spPr>
+          <a:xfrm>
+            <a:off x="8074152" y="3291840"/>
+            <a:ext cx="2596896" cy="749808"/>
+          </a:xfrm>
+          <a:prstGeom prst="rect">
+            <a:avLst/>
+          </a:prstGeom>
+          <a:solidFill>
+            <a:srgbClr val="EAF6F8"/>
+          </a:solidFill>
+          <a:ln w="12700">
+            <a:solidFill>
+              <a:srgbClr val="8ABBD8"/>
+            </a:solidFill>
+            <a:prstDash val="solid"/>
+          </a:ln>
+        </p:spPr>
+      </p:sp>
+      <p:sp>
+        <p:nvSpPr>
+          <p:cNvPr id="15" name="Shape 13"/>
+          <p:cNvSpPr/>
+          <p:nvPr/>
+        </p:nvSpPr>
+        <p:spPr>
+          <a:xfrm>
+            <a:off x="8202168" y="3721608"/>
+            <a:ext cx="2340864" cy="0"/>
+          </a:xfrm>
+          <a:prstGeom prst="line">
+            <a:avLst/>
+          </a:prstGeom>
+          <a:noFill/>
+          <a:ln w="19050">
+            <a:solidFill>
+              <a:srgbClr val="0068B7"/>
+            </a:solidFill>
+            <a:prstDash val="solid"/>
+          </a:ln>
+        </p:spPr>
+      </p:sp>
+      <p:sp>
+        <p:nvSpPr>
+          <p:cNvPr id="16" name="Shape 14"/>
+          <p:cNvSpPr/>
+          <p:nvPr/>
+        </p:nvSpPr>
+        <p:spPr>
+          <a:xfrm>
+            <a:off x="9198864" y="4206240"/>
+            <a:ext cx="347472" cy="347472"/>
+          </a:xfrm>
+          <a:prstGeom prst="ellipse">
+            <a:avLst/>
+          </a:prstGeom>
+          <a:solidFill>
+            <a:srgbClr val="2F8A28"/>
+          </a:solidFill>
+          <a:ln w="12700">
+            <a:solidFill>
+              <a:srgbClr val="2F8A28"/>
+            </a:solidFill>
+            <a:prstDash val="solid"/>
+          </a:ln>
+        </p:spPr>
+      </p:sp>
+      <p:sp>
+        <p:nvSpPr>
+          <p:cNvPr id="17" name="Text 15"/>
+          <p:cNvSpPr/>
+          <p:nvPr/>
+        </p:nvSpPr>
+        <p:spPr>
+          <a:xfrm>
+            <a:off x="7909560" y="3977640"/>
+            <a:ext cx="2926080" cy="182880"/>
+          </a:xfrm>
+          <a:prstGeom prst="rect">
+            <a:avLst/>
+          </a:prstGeom>
+          <a:noFill/>
+          <a:ln/>
+        </p:spPr>
+        <p:txBody>
+          <a:bodyPr wrap="square" lIns="0" tIns="0" rIns="0" bIns="0" rtlCol="0" anchor="ctr"/>
+          <a:lstStyle/>
+          <a:p>
+            <a:pPr algn="ctr" indent="0" marL="0">
+              <a:buNone/>
+            </a:pPr>
+            <a:r>
+              <a:rPr lang="en-US" sz="1000" dirty="0">
+                <a:solidFill>
+                  <a:srgbClr val="003A63"/>
+                </a:solidFill>
+                <a:latin typeface="Aptos" pitchFamily="34" charset="0"/>
+                <a:ea typeface="Aptos" pitchFamily="34" charset="-122"/>
+                <a:cs typeface="Aptos" pitchFamily="34" charset="-120"/>
+              </a:rPr>
+              <a:t>Concept to action</a:t>
+            </a:r>
+            <a:endParaRPr lang="en-US" sz="1000" dirty="0"/>
+          </a:p>
+        </p:txBody>
+      </p:sp>
+      <p:sp>
+        <p:nvSpPr>
+          <p:cNvPr id="18" name="Shape 16"/>
+          <p:cNvSpPr/>
+          <p:nvPr/>
+        </p:nvSpPr>
+        <p:spPr>
+          <a:xfrm>
+            <a:off x="7635240" y="4498848"/>
+            <a:ext cx="3474720" cy="1143000"/>
+          </a:xfrm>
+          <a:prstGeom prst="roundRect">
+            <a:avLst>
+              <a:gd name="adj" fmla="val 9600"/>
             </a:avLst>
           </a:prstGeom>
           <a:solidFill>
@@ -10284,14 +11505,14 @@
       </p:sp>
       <p:sp>
         <p:nvSpPr>
-          <p:cNvPr id="16" name="Text 14"/>
-          <p:cNvSpPr/>
-          <p:nvPr/>
-        </p:nvSpPr>
-        <p:spPr>
-          <a:xfrm>
-            <a:off x="8074152" y="3666744"/>
-            <a:ext cx="2825496" cy="256032"/>
+          <p:cNvPr id="19" name="Text 17"/>
+          <p:cNvSpPr/>
+          <p:nvPr/>
+        </p:nvSpPr>
+        <p:spPr>
+          <a:xfrm>
+            <a:off x="7799832" y="4645152"/>
+            <a:ext cx="3145536" cy="256032"/>
           </a:xfrm>
           <a:prstGeom prst="rect">
             <a:avLst/>
@@ -10315,7 +11536,7 @@
                 <a:ea typeface="Aptos" pitchFamily="34" charset="-122"/>
                 <a:cs typeface="Aptos" pitchFamily="34" charset="-120"/>
               </a:rPr>
-              <a:t>Use this for</a:t>
+              <a:t>What to produce</a:t>
             </a:r>
             <a:endParaRPr lang="en-US" sz="1300" dirty="0"/>
           </a:p>
@@ -10323,14 +11544,14 @@
       </p:sp>
       <p:sp>
         <p:nvSpPr>
-          <p:cNvPr id="17" name="Text 15"/>
-          <p:cNvSpPr/>
-          <p:nvPr/>
-        </p:nvSpPr>
-        <p:spPr>
-          <a:xfrm>
-            <a:off x="8074152" y="4023360"/>
-            <a:ext cx="2825496" cy="1097280"/>
+          <p:cNvPr id="20" name="Text 18"/>
+          <p:cNvSpPr/>
+          <p:nvPr/>
+        </p:nvSpPr>
+        <p:spPr>
+          <a:xfrm>
+            <a:off x="7799832" y="5001768"/>
+            <a:ext cx="3145536" cy="502920"/>
           </a:xfrm>
           <a:prstGeom prst="rect">
             <a:avLst/>
@@ -10356,7 +11577,7 @@
                 <a:ea typeface="Aptos" pitchFamily="34" charset="-122"/>
                 <a:cs typeface="Aptos" pitchFamily="34" charset="-120"/>
               </a:rPr>
-              <a:t>Connect the concept to public health decisions, safeguards, documentation, or implementation work.</a:t>
+              <a:t>Use the assignment to test whether you can explain the concept, apply it to a realistic public health situation, and identify what would need review before the work moves forward.</a:t>
             </a:r>
             <a:endParaRPr lang="en-US" sz="1550" dirty="0"/>
           </a:p>
@@ -10530,8 +11751,8 @@
         </p:nvSpPr>
         <p:spPr>
           <a:xfrm>
-            <a:off x="9966960" y="6537960"/>
-            <a:ext cx="1645920" cy="201168"/>
+            <a:off x="9646920" y="6537960"/>
+            <a:ext cx="1965960" cy="201168"/>
           </a:xfrm>
           <a:prstGeom prst="rect">
             <a:avLst/>
@@ -10555,7 +11776,7 @@
                 <a:ea typeface="Aptos" pitchFamily="34" charset="-122"/>
                 <a:cs typeface="Aptos" pitchFamily="34" charset="-120"/>
               </a:rPr>
-              <a:t>Â© Paula Soper</a:t>
+              <a:t>Copyright Paula Soper</a:t>
             </a:r>
             <a:endParaRPr lang="en-US" sz="800" dirty="0"/>
           </a:p>
@@ -10602,77 +11823,13 @@
       </p:sp>
       <p:sp>
         <p:nvSpPr>
-          <p:cNvPr id="8" name="Shape 6"/>
+          <p:cNvPr id="8" name="Text 6"/>
           <p:cNvSpPr/>
           <p:nvPr/>
         </p:nvSpPr>
         <p:spPr>
           <a:xfrm>
             <a:off x="640080" y="658368"/>
-            <a:ext cx="420624" cy="420624"/>
-          </a:xfrm>
-          <a:prstGeom prst="ellipse">
-            <a:avLst/>
-          </a:prstGeom>
-          <a:solidFill>
-            <a:srgbClr val="0068B7"/>
-          </a:solidFill>
-          <a:ln w="12700">
-            <a:solidFill>
-              <a:srgbClr val="0068B7"/>
-            </a:solidFill>
-            <a:prstDash val="solid"/>
-          </a:ln>
-        </p:spPr>
-      </p:sp>
-      <p:sp>
-        <p:nvSpPr>
-          <p:cNvPr id="9" name="Text 7"/>
-          <p:cNvSpPr/>
-          <p:nvPr/>
-        </p:nvSpPr>
-        <p:spPr>
-          <a:xfrm>
-            <a:off x="640080" y="731520"/>
-            <a:ext cx="420624" cy="164592"/>
-          </a:xfrm>
-          <a:prstGeom prst="rect">
-            <a:avLst/>
-          </a:prstGeom>
-          <a:noFill/>
-          <a:ln/>
-        </p:spPr>
-        <p:txBody>
-          <a:bodyPr wrap="square" lIns="0" tIns="0" rIns="0" bIns="0" rtlCol="0" anchor="ctr"/>
-          <a:lstStyle/>
-          <a:p>
-            <a:pPr algn="ctr" indent="0" marL="0">
-              <a:buNone/>
-            </a:pPr>
-            <a:r>
-              <a:rPr lang="en-US" sz="1100" b="1" dirty="0">
-                <a:solidFill>
-                  <a:srgbClr val="FFFFFF"/>
-                </a:solidFill>
-                <a:latin typeface="Aptos" pitchFamily="34" charset="0"/>
-                <a:ea typeface="Aptos" pitchFamily="34" charset="-122"/>
-                <a:cs typeface="Aptos" pitchFamily="34" charset="-120"/>
-              </a:rPr>
-              <a:t>12</a:t>
-            </a:r>
-            <a:endParaRPr lang="en-US" sz="1100" dirty="0"/>
-          </a:p>
-        </p:txBody>
-      </p:sp>
-      <p:sp>
-        <p:nvSpPr>
-          <p:cNvPr id="10" name="Text 8"/>
-          <p:cNvSpPr/>
-          <p:nvPr/>
-        </p:nvSpPr>
-        <p:spPr>
-          <a:xfrm>
-            <a:off x="640080" y="621792"/>
             <a:ext cx="10881360" cy="713232"/>
           </a:xfrm>
           <a:prstGeom prst="rect">
@@ -10707,14 +11864,14 @@
       </p:sp>
       <p:sp>
         <p:nvSpPr>
-          <p:cNvPr id="11" name="Text 9"/>
+          <p:cNvPr id="9" name="Text 7"/>
           <p:cNvSpPr/>
           <p:nvPr/>
         </p:nvSpPr>
         <p:spPr>
           <a:xfrm>
             <a:off x="868680" y="1508760"/>
-            <a:ext cx="6537960" cy="4160520"/>
+            <a:ext cx="6309360" cy="4160520"/>
           </a:xfrm>
           <a:prstGeom prst="rect">
             <a:avLst/>
@@ -10773,18 +11930,18 @@
       </p:sp>
       <p:sp>
         <p:nvSpPr>
-          <p:cNvPr id="12" name="Shape 10"/>
-          <p:cNvSpPr/>
-          <p:nvPr/>
-        </p:nvSpPr>
-        <p:spPr>
-          <a:xfrm>
-            <a:off x="7909560" y="1417320"/>
-            <a:ext cx="3154680" cy="1828800"/>
+          <p:cNvPr id="10" name="Shape 8"/>
+          <p:cNvSpPr/>
+          <p:nvPr/>
+        </p:nvSpPr>
+        <p:spPr>
+          <a:xfrm>
+            <a:off x="7635240" y="1325880"/>
+            <a:ext cx="3474720" cy="1325880"/>
           </a:xfrm>
           <a:prstGeom prst="roundRect">
             <a:avLst>
-              <a:gd name="adj" fmla="val 6000"/>
+              <a:gd name="adj" fmla="val 8276"/>
             </a:avLst>
           </a:prstGeom>
           <a:solidFill>
@@ -10800,14 +11957,14 @@
       </p:sp>
       <p:sp>
         <p:nvSpPr>
-          <p:cNvPr id="13" name="Text 11"/>
-          <p:cNvSpPr/>
-          <p:nvPr/>
-        </p:nvSpPr>
-        <p:spPr>
-          <a:xfrm>
-            <a:off x="8074152" y="1563624"/>
-            <a:ext cx="2825496" cy="256032"/>
+          <p:cNvPr id="11" name="Text 9"/>
+          <p:cNvSpPr/>
+          <p:nvPr/>
+        </p:nvSpPr>
+        <p:spPr>
+          <a:xfrm>
+            <a:off x="7799832" y="1472184"/>
+            <a:ext cx="3145536" cy="256032"/>
           </a:xfrm>
           <a:prstGeom prst="rect">
             <a:avLst/>
@@ -10831,7 +11988,7 @@
                 <a:ea typeface="Aptos" pitchFamily="34" charset="-122"/>
                 <a:cs typeface="Aptos" pitchFamily="34" charset="-120"/>
               </a:rPr>
-              <a:t>Key idea</a:t>
+              <a:t>Practice focus</a:t>
             </a:r>
             <a:endParaRPr lang="en-US" sz="1300" dirty="0"/>
           </a:p>
@@ -10839,14 +11996,14 @@
       </p:sp>
       <p:sp>
         <p:nvSpPr>
-          <p:cNvPr id="14" name="Text 12"/>
-          <p:cNvSpPr/>
-          <p:nvPr/>
-        </p:nvSpPr>
-        <p:spPr>
-          <a:xfrm>
-            <a:off x="8074152" y="1920240"/>
-            <a:ext cx="2825496" cy="1188720"/>
+          <p:cNvPr id="12" name="Text 10"/>
+          <p:cNvSpPr/>
+          <p:nvPr/>
+        </p:nvSpPr>
+        <p:spPr>
+          <a:xfrm>
+            <a:off x="7799832" y="1828800"/>
+            <a:ext cx="3145536" cy="685800"/>
           </a:xfrm>
           <a:prstGeom prst="rect">
             <a:avLst/>
@@ -10880,18 +12037,159 @@
       </p:sp>
       <p:sp>
         <p:nvSpPr>
-          <p:cNvPr id="15" name="Shape 13"/>
-          <p:cNvSpPr/>
-          <p:nvPr/>
-        </p:nvSpPr>
-        <p:spPr>
-          <a:xfrm>
-            <a:off x="7909560" y="3520440"/>
-            <a:ext cx="3154680" cy="1737360"/>
+          <p:cNvPr id="13" name="Shape 11"/>
+          <p:cNvSpPr/>
+          <p:nvPr/>
+        </p:nvSpPr>
+        <p:spPr>
+          <a:xfrm>
+            <a:off x="7635240" y="2788920"/>
+            <a:ext cx="3474720" cy="1536192"/>
           </a:xfrm>
           <a:prstGeom prst="roundRect">
             <a:avLst>
-              <a:gd name="adj" fmla="val 6316"/>
+              <a:gd name="adj" fmla="val 7143"/>
+            </a:avLst>
+          </a:prstGeom>
+          <a:solidFill>
+            <a:srgbClr val="FFFFFF">
+              <a:alpha val="88000"/>
+            </a:srgbClr>
+          </a:solidFill>
+          <a:ln w="12700">
+            <a:solidFill>
+              <a:srgbClr val="D6E8F2"/>
+            </a:solidFill>
+            <a:prstDash val="solid"/>
+          </a:ln>
+        </p:spPr>
+      </p:sp>
+      <p:sp>
+        <p:nvSpPr>
+          <p:cNvPr id="14" name="Shape 12"/>
+          <p:cNvSpPr/>
+          <p:nvPr/>
+        </p:nvSpPr>
+        <p:spPr>
+          <a:xfrm>
+            <a:off x="8074152" y="3291840"/>
+            <a:ext cx="2596896" cy="749808"/>
+          </a:xfrm>
+          <a:prstGeom prst="rect">
+            <a:avLst/>
+          </a:prstGeom>
+          <a:solidFill>
+            <a:srgbClr val="EAF6F8"/>
+          </a:solidFill>
+          <a:ln w="12700">
+            <a:solidFill>
+              <a:srgbClr val="8ABBD8"/>
+            </a:solidFill>
+            <a:prstDash val="solid"/>
+          </a:ln>
+        </p:spPr>
+      </p:sp>
+      <p:sp>
+        <p:nvSpPr>
+          <p:cNvPr id="15" name="Shape 13"/>
+          <p:cNvSpPr/>
+          <p:nvPr/>
+        </p:nvSpPr>
+        <p:spPr>
+          <a:xfrm>
+            <a:off x="8202168" y="3721608"/>
+            <a:ext cx="2340864" cy="0"/>
+          </a:xfrm>
+          <a:prstGeom prst="line">
+            <a:avLst/>
+          </a:prstGeom>
+          <a:noFill/>
+          <a:ln w="19050">
+            <a:solidFill>
+              <a:srgbClr val="0068B7"/>
+            </a:solidFill>
+            <a:prstDash val="solid"/>
+          </a:ln>
+        </p:spPr>
+      </p:sp>
+      <p:sp>
+        <p:nvSpPr>
+          <p:cNvPr id="16" name="Shape 14"/>
+          <p:cNvSpPr/>
+          <p:nvPr/>
+        </p:nvSpPr>
+        <p:spPr>
+          <a:xfrm>
+            <a:off x="9198864" y="4206240"/>
+            <a:ext cx="347472" cy="347472"/>
+          </a:xfrm>
+          <a:prstGeom prst="ellipse">
+            <a:avLst/>
+          </a:prstGeom>
+          <a:solidFill>
+            <a:srgbClr val="2F8A28"/>
+          </a:solidFill>
+          <a:ln w="12700">
+            <a:solidFill>
+              <a:srgbClr val="2F8A28"/>
+            </a:solidFill>
+            <a:prstDash val="solid"/>
+          </a:ln>
+        </p:spPr>
+      </p:sp>
+      <p:sp>
+        <p:nvSpPr>
+          <p:cNvPr id="17" name="Text 15"/>
+          <p:cNvSpPr/>
+          <p:nvPr/>
+        </p:nvSpPr>
+        <p:spPr>
+          <a:xfrm>
+            <a:off x="7909560" y="3977640"/>
+            <a:ext cx="2926080" cy="182880"/>
+          </a:xfrm>
+          <a:prstGeom prst="rect">
+            <a:avLst/>
+          </a:prstGeom>
+          <a:noFill/>
+          <a:ln/>
+        </p:spPr>
+        <p:txBody>
+          <a:bodyPr wrap="square" lIns="0" tIns="0" rIns="0" bIns="0" rtlCol="0" anchor="ctr"/>
+          <a:lstStyle/>
+          <a:p>
+            <a:pPr algn="ctr" indent="0" marL="0">
+              <a:buNone/>
+            </a:pPr>
+            <a:r>
+              <a:rPr lang="en-US" sz="1000" dirty="0">
+                <a:solidFill>
+                  <a:srgbClr val="003A63"/>
+                </a:solidFill>
+                <a:latin typeface="Aptos" pitchFamily="34" charset="0"/>
+                <a:ea typeface="Aptos" pitchFamily="34" charset="-122"/>
+                <a:cs typeface="Aptos" pitchFamily="34" charset="-120"/>
+              </a:rPr>
+              <a:t>Concept to action</a:t>
+            </a:r>
+            <a:endParaRPr lang="en-US" sz="1000" dirty="0"/>
+          </a:p>
+        </p:txBody>
+      </p:sp>
+      <p:sp>
+        <p:nvSpPr>
+          <p:cNvPr id="18" name="Shape 16"/>
+          <p:cNvSpPr/>
+          <p:nvPr/>
+        </p:nvSpPr>
+        <p:spPr>
+          <a:xfrm>
+            <a:off x="7635240" y="4498848"/>
+            <a:ext cx="3474720" cy="1143000"/>
+          </a:xfrm>
+          <a:prstGeom prst="roundRect">
+            <a:avLst>
+              <a:gd name="adj" fmla="val 9600"/>
             </a:avLst>
           </a:prstGeom>
           <a:solidFill>
@@ -10907,14 +12205,14 @@
       </p:sp>
       <p:sp>
         <p:nvSpPr>
-          <p:cNvPr id="16" name="Text 14"/>
-          <p:cNvSpPr/>
-          <p:nvPr/>
-        </p:nvSpPr>
-        <p:spPr>
-          <a:xfrm>
-            <a:off x="8074152" y="3666744"/>
-            <a:ext cx="2825496" cy="256032"/>
+          <p:cNvPr id="19" name="Text 17"/>
+          <p:cNvSpPr/>
+          <p:nvPr/>
+        </p:nvSpPr>
+        <p:spPr>
+          <a:xfrm>
+            <a:off x="7799832" y="4645152"/>
+            <a:ext cx="3145536" cy="256032"/>
           </a:xfrm>
           <a:prstGeom prst="rect">
             <a:avLst/>
@@ -10938,7 +12236,7 @@
                 <a:ea typeface="Aptos" pitchFamily="34" charset="-122"/>
                 <a:cs typeface="Aptos" pitchFamily="34" charset="-120"/>
               </a:rPr>
-              <a:t>Use this for</a:t>
+              <a:t>What to produce</a:t>
             </a:r>
             <a:endParaRPr lang="en-US" sz="1300" dirty="0"/>
           </a:p>
@@ -10946,14 +12244,14 @@
       </p:sp>
       <p:sp>
         <p:nvSpPr>
-          <p:cNvPr id="17" name="Text 15"/>
-          <p:cNvSpPr/>
-          <p:nvPr/>
-        </p:nvSpPr>
-        <p:spPr>
-          <a:xfrm>
-            <a:off x="8074152" y="4023360"/>
-            <a:ext cx="2825496" cy="1097280"/>
+          <p:cNvPr id="20" name="Text 18"/>
+          <p:cNvSpPr/>
+          <p:nvPr/>
+        </p:nvSpPr>
+        <p:spPr>
+          <a:xfrm>
+            <a:off x="7799832" y="5001768"/>
+            <a:ext cx="3145536" cy="502920"/>
           </a:xfrm>
           <a:prstGeom prst="rect">
             <a:avLst/>
@@ -10979,7 +12277,7 @@
                 <a:ea typeface="Aptos" pitchFamily="34" charset="-122"/>
                 <a:cs typeface="Aptos" pitchFamily="34" charset="-120"/>
               </a:rPr>
-              <a:t>Connect the concept to public health decisions, safeguards, documentation, or implementation work.</a:t>
+              <a:t>Use the assignment to test whether you can explain the concept, apply it to a realistic public health situation, and identify what would need review before the work moves forward.</a:t>
             </a:r>
             <a:endParaRPr lang="en-US" sz="1550" dirty="0"/>
           </a:p>
@@ -11153,8 +12451,8 @@
         </p:nvSpPr>
         <p:spPr>
           <a:xfrm>
-            <a:off x="9966960" y="6537960"/>
-            <a:ext cx="1645920" cy="201168"/>
+            <a:off x="9646920" y="6537960"/>
+            <a:ext cx="1965960" cy="201168"/>
           </a:xfrm>
           <a:prstGeom prst="rect">
             <a:avLst/>
@@ -11178,7 +12476,7 @@
                 <a:ea typeface="Aptos" pitchFamily="34" charset="-122"/>
                 <a:cs typeface="Aptos" pitchFamily="34" charset="-120"/>
               </a:rPr>
-              <a:t>Â© Paula Soper</a:t>
+              <a:t>Copyright Paula Soper</a:t>
             </a:r>
             <a:endParaRPr lang="en-US" sz="800" dirty="0"/>
           </a:p>
@@ -11225,77 +12523,13 @@
       </p:sp>
       <p:sp>
         <p:nvSpPr>
-          <p:cNvPr id="8" name="Shape 6"/>
+          <p:cNvPr id="8" name="Text 6"/>
           <p:cNvSpPr/>
           <p:nvPr/>
         </p:nvSpPr>
         <p:spPr>
           <a:xfrm>
             <a:off x="640080" y="658368"/>
-            <a:ext cx="420624" cy="420624"/>
-          </a:xfrm>
-          <a:prstGeom prst="ellipse">
-            <a:avLst/>
-          </a:prstGeom>
-          <a:solidFill>
-            <a:srgbClr val="0068B7"/>
-          </a:solidFill>
-          <a:ln w="12700">
-            <a:solidFill>
-              <a:srgbClr val="0068B7"/>
-            </a:solidFill>
-            <a:prstDash val="solid"/>
-          </a:ln>
-        </p:spPr>
-      </p:sp>
-      <p:sp>
-        <p:nvSpPr>
-          <p:cNvPr id="9" name="Text 7"/>
-          <p:cNvSpPr/>
-          <p:nvPr/>
-        </p:nvSpPr>
-        <p:spPr>
-          <a:xfrm>
-            <a:off x="640080" y="731520"/>
-            <a:ext cx="420624" cy="164592"/>
-          </a:xfrm>
-          <a:prstGeom prst="rect">
-            <a:avLst/>
-          </a:prstGeom>
-          <a:noFill/>
-          <a:ln/>
-        </p:spPr>
-        <p:txBody>
-          <a:bodyPr wrap="square" lIns="0" tIns="0" rIns="0" bIns="0" rtlCol="0" anchor="ctr"/>
-          <a:lstStyle/>
-          <a:p>
-            <a:pPr algn="ctr" indent="0" marL="0">
-              <a:buNone/>
-            </a:pPr>
-            <a:r>
-              <a:rPr lang="en-US" sz="1100" b="1" dirty="0">
-                <a:solidFill>
-                  <a:srgbClr val="FFFFFF"/>
-                </a:solidFill>
-                <a:latin typeface="Aptos" pitchFamily="34" charset="0"/>
-                <a:ea typeface="Aptos" pitchFamily="34" charset="-122"/>
-                <a:cs typeface="Aptos" pitchFamily="34" charset="-120"/>
-              </a:rPr>
-              <a:t>13</a:t>
-            </a:r>
-            <a:endParaRPr lang="en-US" sz="1100" dirty="0"/>
-          </a:p>
-        </p:txBody>
-      </p:sp>
-      <p:sp>
-        <p:nvSpPr>
-          <p:cNvPr id="10" name="Text 8"/>
-          <p:cNvSpPr/>
-          <p:nvPr/>
-        </p:nvSpPr>
-        <p:spPr>
-          <a:xfrm>
-            <a:off x="640080" y="621792"/>
             <a:ext cx="10881360" cy="713232"/>
           </a:xfrm>
           <a:prstGeom prst="rect">
@@ -11330,14 +12564,14 @@
       </p:sp>
       <p:sp>
         <p:nvSpPr>
-          <p:cNvPr id="11" name="Text 9"/>
+          <p:cNvPr id="9" name="Text 7"/>
           <p:cNvSpPr/>
           <p:nvPr/>
         </p:nvSpPr>
         <p:spPr>
           <a:xfrm>
             <a:off x="868680" y="1508760"/>
-            <a:ext cx="6537960" cy="4160520"/>
+            <a:ext cx="6309360" cy="4160520"/>
           </a:xfrm>
           <a:prstGeom prst="rect">
             <a:avLst/>
@@ -11396,18 +12630,18 @@
       </p:sp>
       <p:sp>
         <p:nvSpPr>
-          <p:cNvPr id="12" name="Shape 10"/>
-          <p:cNvSpPr/>
-          <p:nvPr/>
-        </p:nvSpPr>
-        <p:spPr>
-          <a:xfrm>
-            <a:off x="7909560" y="1417320"/>
-            <a:ext cx="3154680" cy="1828800"/>
+          <p:cNvPr id="10" name="Shape 8"/>
+          <p:cNvSpPr/>
+          <p:nvPr/>
+        </p:nvSpPr>
+        <p:spPr>
+          <a:xfrm>
+            <a:off x="7635240" y="1325880"/>
+            <a:ext cx="3474720" cy="1325880"/>
           </a:xfrm>
           <a:prstGeom prst="roundRect">
             <a:avLst>
-              <a:gd name="adj" fmla="val 6000"/>
+              <a:gd name="adj" fmla="val 8276"/>
             </a:avLst>
           </a:prstGeom>
           <a:solidFill>
@@ -11423,14 +12657,14 @@
       </p:sp>
       <p:sp>
         <p:nvSpPr>
-          <p:cNvPr id="13" name="Text 11"/>
-          <p:cNvSpPr/>
-          <p:nvPr/>
-        </p:nvSpPr>
-        <p:spPr>
-          <a:xfrm>
-            <a:off x="8074152" y="1563624"/>
-            <a:ext cx="2825496" cy="256032"/>
+          <p:cNvPr id="11" name="Text 9"/>
+          <p:cNvSpPr/>
+          <p:nvPr/>
+        </p:nvSpPr>
+        <p:spPr>
+          <a:xfrm>
+            <a:off x="7799832" y="1472184"/>
+            <a:ext cx="3145536" cy="256032"/>
           </a:xfrm>
           <a:prstGeom prst="rect">
             <a:avLst/>
@@ -11454,7 +12688,7 @@
                 <a:ea typeface="Aptos" pitchFamily="34" charset="-122"/>
                 <a:cs typeface="Aptos" pitchFamily="34" charset="-120"/>
               </a:rPr>
-              <a:t>Key idea</a:t>
+              <a:t>Core concept</a:t>
             </a:r>
             <a:endParaRPr lang="en-US" sz="1300" dirty="0"/>
           </a:p>
@@ -11462,14 +12696,14 @@
       </p:sp>
       <p:sp>
         <p:nvSpPr>
-          <p:cNvPr id="14" name="Text 12"/>
-          <p:cNvSpPr/>
-          <p:nvPr/>
-        </p:nvSpPr>
-        <p:spPr>
-          <a:xfrm>
-            <a:off x="8074152" y="1920240"/>
-            <a:ext cx="2825496" cy="1188720"/>
+          <p:cNvPr id="12" name="Text 10"/>
+          <p:cNvSpPr/>
+          <p:nvPr/>
+        </p:nvSpPr>
+        <p:spPr>
+          <a:xfrm>
+            <a:off x="7799832" y="1828800"/>
+            <a:ext cx="3145536" cy="685800"/>
           </a:xfrm>
           <a:prstGeom prst="rect">
             <a:avLst/>
@@ -11503,18 +12737,159 @@
       </p:sp>
       <p:sp>
         <p:nvSpPr>
-          <p:cNvPr id="15" name="Shape 13"/>
-          <p:cNvSpPr/>
-          <p:nvPr/>
-        </p:nvSpPr>
-        <p:spPr>
-          <a:xfrm>
-            <a:off x="7909560" y="3520440"/>
-            <a:ext cx="3154680" cy="1737360"/>
+          <p:cNvPr id="13" name="Shape 11"/>
+          <p:cNvSpPr/>
+          <p:nvPr/>
+        </p:nvSpPr>
+        <p:spPr>
+          <a:xfrm>
+            <a:off x="7635240" y="2788920"/>
+            <a:ext cx="3474720" cy="1536192"/>
           </a:xfrm>
           <a:prstGeom prst="roundRect">
             <a:avLst>
-              <a:gd name="adj" fmla="val 6316"/>
+              <a:gd name="adj" fmla="val 7143"/>
+            </a:avLst>
+          </a:prstGeom>
+          <a:solidFill>
+            <a:srgbClr val="FFFFFF">
+              <a:alpha val="88000"/>
+            </a:srgbClr>
+          </a:solidFill>
+          <a:ln w="12700">
+            <a:solidFill>
+              <a:srgbClr val="D6E8F2"/>
+            </a:solidFill>
+            <a:prstDash val="solid"/>
+          </a:ln>
+        </p:spPr>
+      </p:sp>
+      <p:sp>
+        <p:nvSpPr>
+          <p:cNvPr id="14" name="Shape 12"/>
+          <p:cNvSpPr/>
+          <p:nvPr/>
+        </p:nvSpPr>
+        <p:spPr>
+          <a:xfrm>
+            <a:off x="8074152" y="3291840"/>
+            <a:ext cx="2596896" cy="749808"/>
+          </a:xfrm>
+          <a:prstGeom prst="rect">
+            <a:avLst/>
+          </a:prstGeom>
+          <a:solidFill>
+            <a:srgbClr val="EAF6F8"/>
+          </a:solidFill>
+          <a:ln w="12700">
+            <a:solidFill>
+              <a:srgbClr val="8ABBD8"/>
+            </a:solidFill>
+            <a:prstDash val="solid"/>
+          </a:ln>
+        </p:spPr>
+      </p:sp>
+      <p:sp>
+        <p:nvSpPr>
+          <p:cNvPr id="15" name="Shape 13"/>
+          <p:cNvSpPr/>
+          <p:nvPr/>
+        </p:nvSpPr>
+        <p:spPr>
+          <a:xfrm>
+            <a:off x="8202168" y="3721608"/>
+            <a:ext cx="2340864" cy="0"/>
+          </a:xfrm>
+          <a:prstGeom prst="line">
+            <a:avLst/>
+          </a:prstGeom>
+          <a:noFill/>
+          <a:ln w="19050">
+            <a:solidFill>
+              <a:srgbClr val="0068B7"/>
+            </a:solidFill>
+            <a:prstDash val="solid"/>
+          </a:ln>
+        </p:spPr>
+      </p:sp>
+      <p:sp>
+        <p:nvSpPr>
+          <p:cNvPr id="16" name="Shape 14"/>
+          <p:cNvSpPr/>
+          <p:nvPr/>
+        </p:nvSpPr>
+        <p:spPr>
+          <a:xfrm>
+            <a:off x="9198864" y="4206240"/>
+            <a:ext cx="347472" cy="347472"/>
+          </a:xfrm>
+          <a:prstGeom prst="ellipse">
+            <a:avLst/>
+          </a:prstGeom>
+          <a:solidFill>
+            <a:srgbClr val="2F8A28"/>
+          </a:solidFill>
+          <a:ln w="12700">
+            <a:solidFill>
+              <a:srgbClr val="2F8A28"/>
+            </a:solidFill>
+            <a:prstDash val="solid"/>
+          </a:ln>
+        </p:spPr>
+      </p:sp>
+      <p:sp>
+        <p:nvSpPr>
+          <p:cNvPr id="17" name="Text 15"/>
+          <p:cNvSpPr/>
+          <p:nvPr/>
+        </p:nvSpPr>
+        <p:spPr>
+          <a:xfrm>
+            <a:off x="7909560" y="3977640"/>
+            <a:ext cx="2926080" cy="182880"/>
+          </a:xfrm>
+          <a:prstGeom prst="rect">
+            <a:avLst/>
+          </a:prstGeom>
+          <a:noFill/>
+          <a:ln/>
+        </p:spPr>
+        <p:txBody>
+          <a:bodyPr wrap="square" lIns="0" tIns="0" rIns="0" bIns="0" rtlCol="0" anchor="ctr"/>
+          <a:lstStyle/>
+          <a:p>
+            <a:pPr algn="ctr" indent="0" marL="0">
+              <a:buNone/>
+            </a:pPr>
+            <a:r>
+              <a:rPr lang="en-US" sz="1000" dirty="0">
+                <a:solidFill>
+                  <a:srgbClr val="003A63"/>
+                </a:solidFill>
+                <a:latin typeface="Aptos" pitchFamily="34" charset="0"/>
+                <a:ea typeface="Aptos" pitchFamily="34" charset="-122"/>
+                <a:cs typeface="Aptos" pitchFamily="34" charset="-120"/>
+              </a:rPr>
+              <a:t>Concept to action</a:t>
+            </a:r>
+            <a:endParaRPr lang="en-US" sz="1000" dirty="0"/>
+          </a:p>
+        </p:txBody>
+      </p:sp>
+      <p:sp>
+        <p:nvSpPr>
+          <p:cNvPr id="18" name="Shape 16"/>
+          <p:cNvSpPr/>
+          <p:nvPr/>
+        </p:nvSpPr>
+        <p:spPr>
+          <a:xfrm>
+            <a:off x="7635240" y="4498848"/>
+            <a:ext cx="3474720" cy="1143000"/>
+          </a:xfrm>
+          <a:prstGeom prst="roundRect">
+            <a:avLst>
+              <a:gd name="adj" fmla="val 9600"/>
             </a:avLst>
           </a:prstGeom>
           <a:solidFill>
@@ -11530,14 +12905,14 @@
       </p:sp>
       <p:sp>
         <p:nvSpPr>
-          <p:cNvPr id="16" name="Text 14"/>
-          <p:cNvSpPr/>
-          <p:nvPr/>
-        </p:nvSpPr>
-        <p:spPr>
-          <a:xfrm>
-            <a:off x="8074152" y="3666744"/>
-            <a:ext cx="2825496" cy="256032"/>
+          <p:cNvPr id="19" name="Text 17"/>
+          <p:cNvSpPr/>
+          <p:nvPr/>
+        </p:nvSpPr>
+        <p:spPr>
+          <a:xfrm>
+            <a:off x="7799832" y="4645152"/>
+            <a:ext cx="3145536" cy="256032"/>
           </a:xfrm>
           <a:prstGeom prst="rect">
             <a:avLst/>
@@ -11561,7 +12936,7 @@
                 <a:ea typeface="Aptos" pitchFamily="34" charset="-122"/>
                 <a:cs typeface="Aptos" pitchFamily="34" charset="-120"/>
               </a:rPr>
-              <a:t>Use this for</a:t>
+              <a:t>Apply it</a:t>
             </a:r>
             <a:endParaRPr lang="en-US" sz="1300" dirty="0"/>
           </a:p>
@@ -11569,14 +12944,14 @@
       </p:sp>
       <p:sp>
         <p:nvSpPr>
-          <p:cNvPr id="17" name="Text 15"/>
-          <p:cNvSpPr/>
-          <p:nvPr/>
-        </p:nvSpPr>
-        <p:spPr>
-          <a:xfrm>
-            <a:off x="8074152" y="4023360"/>
-            <a:ext cx="2825496" cy="1097280"/>
+          <p:cNvPr id="20" name="Text 18"/>
+          <p:cNvSpPr/>
+          <p:nvPr/>
+        </p:nvSpPr>
+        <p:spPr>
+          <a:xfrm>
+            <a:off x="7799832" y="5001768"/>
+            <a:ext cx="3145536" cy="502920"/>
           </a:xfrm>
           <a:prstGeom prst="rect">
             <a:avLst/>
@@ -11602,7 +12977,7 @@
                 <a:ea typeface="Aptos" pitchFamily="34" charset="-122"/>
                 <a:cs typeface="Aptos" pitchFamily="34" charset="-120"/>
               </a:rPr>
-              <a:t>Connect the concept to public health decisions, safeguards, documentation, or implementation work.</a:t>
+              <a:t>Connect the concept to public health purpose, responsible use, required safeguards, documentation, and the next action a department should take.</a:t>
             </a:r>
             <a:endParaRPr lang="en-US" sz="1550" dirty="0"/>
           </a:p>
@@ -11776,8 +13151,8 @@
         </p:nvSpPr>
         <p:spPr>
           <a:xfrm>
-            <a:off x="9966960" y="6537960"/>
-            <a:ext cx="1645920" cy="201168"/>
+            <a:off x="9646920" y="6537960"/>
+            <a:ext cx="1965960" cy="201168"/>
           </a:xfrm>
           <a:prstGeom prst="rect">
             <a:avLst/>
@@ -11801,7 +13176,7 @@
                 <a:ea typeface="Aptos" pitchFamily="34" charset="-122"/>
                 <a:cs typeface="Aptos" pitchFamily="34" charset="-120"/>
               </a:rPr>
-              <a:t>Â© Paula Soper</a:t>
+              <a:t>Copyright Paula Soper</a:t>
             </a:r>
             <a:endParaRPr lang="en-US" sz="800" dirty="0"/>
           </a:p>
@@ -12144,46 +13519,7 @@
       </p:sp>
       <p:sp>
         <p:nvSpPr>
-          <p:cNvPr id="15" name="Text 13"/>
-          <p:cNvSpPr/>
-          <p:nvPr/>
-        </p:nvSpPr>
-        <p:spPr>
-          <a:xfrm>
-            <a:off x="8817864" y="4187952"/>
-            <a:ext cx="201168" cy="256032"/>
-          </a:xfrm>
-          <a:prstGeom prst="rect">
-            <a:avLst/>
-          </a:prstGeom>
-          <a:noFill/>
-          <a:ln/>
-        </p:spPr>
-        <p:txBody>
-          <a:bodyPr wrap="square" lIns="0" tIns="0" rIns="0" bIns="0" rtlCol="0" anchor="ctr"/>
-          <a:lstStyle/>
-          <a:p>
-            <a:pPr algn="ctr" indent="0" marL="0">
-              <a:buNone/>
-            </a:pPr>
-            <a:r>
-              <a:rPr lang="en-US" sz="1800" b="1" dirty="0">
-                <a:solidFill>
-                  <a:srgbClr val="0068B7"/>
-                </a:solidFill>
-                <a:latin typeface="Aptos" pitchFamily="34" charset="0"/>
-                <a:ea typeface="Aptos" pitchFamily="34" charset="-122"/>
-                <a:cs typeface="Aptos" pitchFamily="34" charset="-120"/>
-              </a:rPr>
-              <a:t>â†’</a:t>
-            </a:r>
-            <a:endParaRPr lang="en-US" sz="1800" dirty="0"/>
-          </a:p>
-        </p:txBody>
-      </p:sp>
-      <p:sp>
-        <p:nvSpPr>
-          <p:cNvPr id="16" name="Shape 14"/>
+          <p:cNvPr id="15" name="Shape 13"/>
           <p:cNvSpPr/>
           <p:nvPr/>
         </p:nvSpPr>
@@ -12210,7 +13546,7 @@
       </p:sp>
       <p:sp>
         <p:nvSpPr>
-          <p:cNvPr id="17" name="Text 15"/>
+          <p:cNvPr id="16" name="Text 14"/>
           <p:cNvSpPr/>
           <p:nvPr/>
         </p:nvSpPr>
@@ -12251,46 +13587,7 @@
       </p:sp>
       <p:sp>
         <p:nvSpPr>
-          <p:cNvPr id="18" name="Text 16"/>
-          <p:cNvSpPr/>
-          <p:nvPr/>
-        </p:nvSpPr>
-        <p:spPr>
-          <a:xfrm>
-            <a:off x="10046208" y="4187952"/>
-            <a:ext cx="201168" cy="256032"/>
-          </a:xfrm>
-          <a:prstGeom prst="rect">
-            <a:avLst/>
-          </a:prstGeom>
-          <a:noFill/>
-          <a:ln/>
-        </p:spPr>
-        <p:txBody>
-          <a:bodyPr wrap="square" lIns="0" tIns="0" rIns="0" bIns="0" rtlCol="0" anchor="ctr"/>
-          <a:lstStyle/>
-          <a:p>
-            <a:pPr algn="ctr" indent="0" marL="0">
-              <a:buNone/>
-            </a:pPr>
-            <a:r>
-              <a:rPr lang="en-US" sz="1800" b="1" dirty="0">
-                <a:solidFill>
-                  <a:srgbClr val="0068B7"/>
-                </a:solidFill>
-                <a:latin typeface="Aptos" pitchFamily="34" charset="0"/>
-                <a:ea typeface="Aptos" pitchFamily="34" charset="-122"/>
-                <a:cs typeface="Aptos" pitchFamily="34" charset="-120"/>
-              </a:rPr>
-              <a:t>â†’</a:t>
-            </a:r>
-            <a:endParaRPr lang="en-US" sz="1800" dirty="0"/>
-          </a:p>
-        </p:txBody>
-      </p:sp>
-      <p:sp>
-        <p:nvSpPr>
-          <p:cNvPr id="19" name="Shape 17"/>
+          <p:cNvPr id="17" name="Shape 15"/>
           <p:cNvSpPr/>
           <p:nvPr/>
         </p:nvSpPr>
@@ -12317,7 +13614,7 @@
       </p:sp>
       <p:sp>
         <p:nvSpPr>
-          <p:cNvPr id="20" name="Text 18"/>
+          <p:cNvPr id="18" name="Text 16"/>
           <p:cNvSpPr/>
           <p:nvPr/>
         </p:nvSpPr>
@@ -12524,8 +13821,8 @@
         </p:nvSpPr>
         <p:spPr>
           <a:xfrm>
-            <a:off x="9966960" y="6537960"/>
-            <a:ext cx="1645920" cy="201168"/>
+            <a:off x="9646920" y="6537960"/>
+            <a:ext cx="1965960" cy="201168"/>
           </a:xfrm>
           <a:prstGeom prst="rect">
             <a:avLst/>
@@ -12549,7 +13846,7 @@
                 <a:ea typeface="Aptos" pitchFamily="34" charset="-122"/>
                 <a:cs typeface="Aptos" pitchFamily="34" charset="-120"/>
               </a:rPr>
-              <a:t>Â© Paula Soper</a:t>
+              <a:t>Copyright Paula Soper</a:t>
             </a:r>
             <a:endParaRPr lang="en-US" sz="800" dirty="0"/>
           </a:p>
@@ -12892,46 +14189,7 @@
       </p:sp>
       <p:sp>
         <p:nvSpPr>
-          <p:cNvPr id="15" name="Text 13"/>
-          <p:cNvSpPr/>
-          <p:nvPr/>
-        </p:nvSpPr>
-        <p:spPr>
-          <a:xfrm>
-            <a:off x="8817864" y="4187952"/>
-            <a:ext cx="201168" cy="256032"/>
-          </a:xfrm>
-          <a:prstGeom prst="rect">
-            <a:avLst/>
-          </a:prstGeom>
-          <a:noFill/>
-          <a:ln/>
-        </p:spPr>
-        <p:txBody>
-          <a:bodyPr wrap="square" lIns="0" tIns="0" rIns="0" bIns="0" rtlCol="0" anchor="ctr"/>
-          <a:lstStyle/>
-          <a:p>
-            <a:pPr algn="ctr" indent="0" marL="0">
-              <a:buNone/>
-            </a:pPr>
-            <a:r>
-              <a:rPr lang="en-US" sz="1800" b="1" dirty="0">
-                <a:solidFill>
-                  <a:srgbClr val="0068B7"/>
-                </a:solidFill>
-                <a:latin typeface="Aptos" pitchFamily="34" charset="0"/>
-                <a:ea typeface="Aptos" pitchFamily="34" charset="-122"/>
-                <a:cs typeface="Aptos" pitchFamily="34" charset="-120"/>
-              </a:rPr>
-              <a:t>â†’</a:t>
-            </a:r>
-            <a:endParaRPr lang="en-US" sz="1800" dirty="0"/>
-          </a:p>
-        </p:txBody>
-      </p:sp>
-      <p:sp>
-        <p:nvSpPr>
-          <p:cNvPr id="16" name="Shape 14"/>
+          <p:cNvPr id="15" name="Shape 13"/>
           <p:cNvSpPr/>
           <p:nvPr/>
         </p:nvSpPr>
@@ -12958,7 +14216,7 @@
       </p:sp>
       <p:sp>
         <p:nvSpPr>
-          <p:cNvPr id="17" name="Text 15"/>
+          <p:cNvPr id="16" name="Text 14"/>
           <p:cNvSpPr/>
           <p:nvPr/>
         </p:nvSpPr>
@@ -12999,46 +14257,7 @@
       </p:sp>
       <p:sp>
         <p:nvSpPr>
-          <p:cNvPr id="18" name="Text 16"/>
-          <p:cNvSpPr/>
-          <p:nvPr/>
-        </p:nvSpPr>
-        <p:spPr>
-          <a:xfrm>
-            <a:off x="10046208" y="4187952"/>
-            <a:ext cx="201168" cy="256032"/>
-          </a:xfrm>
-          <a:prstGeom prst="rect">
-            <a:avLst/>
-          </a:prstGeom>
-          <a:noFill/>
-          <a:ln/>
-        </p:spPr>
-        <p:txBody>
-          <a:bodyPr wrap="square" lIns="0" tIns="0" rIns="0" bIns="0" rtlCol="0" anchor="ctr"/>
-          <a:lstStyle/>
-          <a:p>
-            <a:pPr algn="ctr" indent="0" marL="0">
-              <a:buNone/>
-            </a:pPr>
-            <a:r>
-              <a:rPr lang="en-US" sz="1800" b="1" dirty="0">
-                <a:solidFill>
-                  <a:srgbClr val="0068B7"/>
-                </a:solidFill>
-                <a:latin typeface="Aptos" pitchFamily="34" charset="0"/>
-                <a:ea typeface="Aptos" pitchFamily="34" charset="-122"/>
-                <a:cs typeface="Aptos" pitchFamily="34" charset="-120"/>
-              </a:rPr>
-              <a:t>â†’</a:t>
-            </a:r>
-            <a:endParaRPr lang="en-US" sz="1800" dirty="0"/>
-          </a:p>
-        </p:txBody>
-      </p:sp>
-      <p:sp>
-        <p:nvSpPr>
-          <p:cNvPr id="19" name="Shape 17"/>
+          <p:cNvPr id="17" name="Shape 15"/>
           <p:cNvSpPr/>
           <p:nvPr/>
         </p:nvSpPr>
@@ -13065,7 +14284,7 @@
       </p:sp>
       <p:sp>
         <p:nvSpPr>
-          <p:cNvPr id="20" name="Text 18"/>
+          <p:cNvPr id="18" name="Text 16"/>
           <p:cNvSpPr/>
           <p:nvPr/>
         </p:nvSpPr>
@@ -13272,8 +14491,8 @@
         </p:nvSpPr>
         <p:spPr>
           <a:xfrm>
-            <a:off x="9966960" y="6537960"/>
-            <a:ext cx="1645920" cy="201168"/>
+            <a:off x="9646920" y="6537960"/>
+            <a:ext cx="1965960" cy="201168"/>
           </a:xfrm>
           <a:prstGeom prst="rect">
             <a:avLst/>
@@ -13297,7 +14516,7 @@
                 <a:ea typeface="Aptos" pitchFamily="34" charset="-122"/>
                 <a:cs typeface="Aptos" pitchFamily="34" charset="-120"/>
               </a:rPr>
-              <a:t>Â© Paula Soper</a:t>
+              <a:t>Copyright Paula Soper</a:t>
             </a:r>
             <a:endParaRPr lang="en-US" sz="800" dirty="0"/>
           </a:p>
@@ -13344,77 +14563,13 @@
       </p:sp>
       <p:sp>
         <p:nvSpPr>
-          <p:cNvPr id="8" name="Shape 6"/>
+          <p:cNvPr id="8" name="Text 6"/>
           <p:cNvSpPr/>
           <p:nvPr/>
         </p:nvSpPr>
         <p:spPr>
           <a:xfrm>
             <a:off x="640080" y="658368"/>
-            <a:ext cx="420624" cy="420624"/>
-          </a:xfrm>
-          <a:prstGeom prst="ellipse">
-            <a:avLst/>
-          </a:prstGeom>
-          <a:solidFill>
-            <a:srgbClr val="0068B7"/>
-          </a:solidFill>
-          <a:ln w="12700">
-            <a:solidFill>
-              <a:srgbClr val="0068B7"/>
-            </a:solidFill>
-            <a:prstDash val="solid"/>
-          </a:ln>
-        </p:spPr>
-      </p:sp>
-      <p:sp>
-        <p:nvSpPr>
-          <p:cNvPr id="9" name="Text 7"/>
-          <p:cNvSpPr/>
-          <p:nvPr/>
-        </p:nvSpPr>
-        <p:spPr>
-          <a:xfrm>
-            <a:off x="640080" y="731520"/>
-            <a:ext cx="420624" cy="164592"/>
-          </a:xfrm>
-          <a:prstGeom prst="rect">
-            <a:avLst/>
-          </a:prstGeom>
-          <a:noFill/>
-          <a:ln/>
-        </p:spPr>
-        <p:txBody>
-          <a:bodyPr wrap="square" lIns="0" tIns="0" rIns="0" bIns="0" rtlCol="0" anchor="ctr"/>
-          <a:lstStyle/>
-          <a:p>
-            <a:pPr algn="ctr" indent="0" marL="0">
-              <a:buNone/>
-            </a:pPr>
-            <a:r>
-              <a:rPr lang="en-US" sz="1100" b="1" dirty="0">
-                <a:solidFill>
-                  <a:srgbClr val="FFFFFF"/>
-                </a:solidFill>
-                <a:latin typeface="Aptos" pitchFamily="34" charset="0"/>
-                <a:ea typeface="Aptos" pitchFamily="34" charset="-122"/>
-                <a:cs typeface="Aptos" pitchFamily="34" charset="-120"/>
-              </a:rPr>
-              <a:t>1</a:t>
-            </a:r>
-            <a:endParaRPr lang="en-US" sz="1100" dirty="0"/>
-          </a:p>
-        </p:txBody>
-      </p:sp>
-      <p:sp>
-        <p:nvSpPr>
-          <p:cNvPr id="10" name="Text 8"/>
-          <p:cNvSpPr/>
-          <p:nvPr/>
-        </p:nvSpPr>
-        <p:spPr>
-          <a:xfrm>
-            <a:off x="640080" y="621792"/>
             <a:ext cx="10881360" cy="713232"/>
           </a:xfrm>
           <a:prstGeom prst="rect">
@@ -13449,14 +14604,14 @@
       </p:sp>
       <p:sp>
         <p:nvSpPr>
-          <p:cNvPr id="11" name="Text 9"/>
+          <p:cNvPr id="9" name="Text 7"/>
           <p:cNvSpPr/>
           <p:nvPr/>
         </p:nvSpPr>
         <p:spPr>
           <a:xfrm>
             <a:off x="868680" y="1508760"/>
-            <a:ext cx="6537960" cy="4160520"/>
+            <a:ext cx="6309360" cy="4160520"/>
           </a:xfrm>
           <a:prstGeom prst="rect">
             <a:avLst/>
@@ -13515,18 +14670,18 @@
       </p:sp>
       <p:sp>
         <p:nvSpPr>
-          <p:cNvPr id="12" name="Shape 10"/>
-          <p:cNvSpPr/>
-          <p:nvPr/>
-        </p:nvSpPr>
-        <p:spPr>
-          <a:xfrm>
-            <a:off x="7909560" y="1417320"/>
-            <a:ext cx="3154680" cy="1828800"/>
+          <p:cNvPr id="10" name="Shape 8"/>
+          <p:cNvSpPr/>
+          <p:nvPr/>
+        </p:nvSpPr>
+        <p:spPr>
+          <a:xfrm>
+            <a:off x="7635240" y="1325880"/>
+            <a:ext cx="3474720" cy="1325880"/>
           </a:xfrm>
           <a:prstGeom prst="roundRect">
             <a:avLst>
-              <a:gd name="adj" fmla="val 6000"/>
+              <a:gd name="adj" fmla="val 8276"/>
             </a:avLst>
           </a:prstGeom>
           <a:solidFill>
@@ -13542,14 +14697,14 @@
       </p:sp>
       <p:sp>
         <p:nvSpPr>
-          <p:cNvPr id="13" name="Text 11"/>
-          <p:cNvSpPr/>
-          <p:nvPr/>
-        </p:nvSpPr>
-        <p:spPr>
-          <a:xfrm>
-            <a:off x="8074152" y="1563624"/>
-            <a:ext cx="2825496" cy="256032"/>
+          <p:cNvPr id="11" name="Text 9"/>
+          <p:cNvSpPr/>
+          <p:nvPr/>
+        </p:nvSpPr>
+        <p:spPr>
+          <a:xfrm>
+            <a:off x="7799832" y="1472184"/>
+            <a:ext cx="3145536" cy="256032"/>
           </a:xfrm>
           <a:prstGeom prst="rect">
             <a:avLst/>
@@ -13573,7 +14728,7 @@
                 <a:ea typeface="Aptos" pitchFamily="34" charset="-122"/>
                 <a:cs typeface="Aptos" pitchFamily="34" charset="-120"/>
               </a:rPr>
-              <a:t>Key idea</a:t>
+              <a:t>Practice focus</a:t>
             </a:r>
             <a:endParaRPr lang="en-US" sz="1300" dirty="0"/>
           </a:p>
@@ -13581,14 +14736,14 @@
       </p:sp>
       <p:sp>
         <p:nvSpPr>
-          <p:cNvPr id="14" name="Text 12"/>
-          <p:cNvSpPr/>
-          <p:nvPr/>
-        </p:nvSpPr>
-        <p:spPr>
-          <a:xfrm>
-            <a:off x="8074152" y="1920240"/>
-            <a:ext cx="2825496" cy="1188720"/>
+          <p:cNvPr id="12" name="Text 10"/>
+          <p:cNvSpPr/>
+          <p:nvPr/>
+        </p:nvSpPr>
+        <p:spPr>
+          <a:xfrm>
+            <a:off x="7799832" y="1828800"/>
+            <a:ext cx="3145536" cy="685800"/>
           </a:xfrm>
           <a:prstGeom prst="rect">
             <a:avLst/>
@@ -13622,18 +14777,159 @@
       </p:sp>
       <p:sp>
         <p:nvSpPr>
-          <p:cNvPr id="15" name="Shape 13"/>
-          <p:cNvSpPr/>
-          <p:nvPr/>
-        </p:nvSpPr>
-        <p:spPr>
-          <a:xfrm>
-            <a:off x="7909560" y="3520440"/>
-            <a:ext cx="3154680" cy="1737360"/>
+          <p:cNvPr id="13" name="Shape 11"/>
+          <p:cNvSpPr/>
+          <p:nvPr/>
+        </p:nvSpPr>
+        <p:spPr>
+          <a:xfrm>
+            <a:off x="7635240" y="2788920"/>
+            <a:ext cx="3474720" cy="1536192"/>
           </a:xfrm>
           <a:prstGeom prst="roundRect">
             <a:avLst>
-              <a:gd name="adj" fmla="val 6316"/>
+              <a:gd name="adj" fmla="val 7143"/>
+            </a:avLst>
+          </a:prstGeom>
+          <a:solidFill>
+            <a:srgbClr val="FFFFFF">
+              <a:alpha val="88000"/>
+            </a:srgbClr>
+          </a:solidFill>
+          <a:ln w="12700">
+            <a:solidFill>
+              <a:srgbClr val="D6E8F2"/>
+            </a:solidFill>
+            <a:prstDash val="solid"/>
+          </a:ln>
+        </p:spPr>
+      </p:sp>
+      <p:sp>
+        <p:nvSpPr>
+          <p:cNvPr id="14" name="Shape 12"/>
+          <p:cNvSpPr/>
+          <p:nvPr/>
+        </p:nvSpPr>
+        <p:spPr>
+          <a:xfrm>
+            <a:off x="8074152" y="3291840"/>
+            <a:ext cx="2596896" cy="749808"/>
+          </a:xfrm>
+          <a:prstGeom prst="rect">
+            <a:avLst/>
+          </a:prstGeom>
+          <a:solidFill>
+            <a:srgbClr val="EAF6F8"/>
+          </a:solidFill>
+          <a:ln w="12700">
+            <a:solidFill>
+              <a:srgbClr val="8ABBD8"/>
+            </a:solidFill>
+            <a:prstDash val="solid"/>
+          </a:ln>
+        </p:spPr>
+      </p:sp>
+      <p:sp>
+        <p:nvSpPr>
+          <p:cNvPr id="15" name="Shape 13"/>
+          <p:cNvSpPr/>
+          <p:nvPr/>
+        </p:nvSpPr>
+        <p:spPr>
+          <a:xfrm>
+            <a:off x="8202168" y="3721608"/>
+            <a:ext cx="2340864" cy="0"/>
+          </a:xfrm>
+          <a:prstGeom prst="line">
+            <a:avLst/>
+          </a:prstGeom>
+          <a:noFill/>
+          <a:ln w="19050">
+            <a:solidFill>
+              <a:srgbClr val="0068B7"/>
+            </a:solidFill>
+            <a:prstDash val="solid"/>
+          </a:ln>
+        </p:spPr>
+      </p:sp>
+      <p:sp>
+        <p:nvSpPr>
+          <p:cNvPr id="16" name="Shape 14"/>
+          <p:cNvSpPr/>
+          <p:nvPr/>
+        </p:nvSpPr>
+        <p:spPr>
+          <a:xfrm>
+            <a:off x="9198864" y="4206240"/>
+            <a:ext cx="347472" cy="347472"/>
+          </a:xfrm>
+          <a:prstGeom prst="ellipse">
+            <a:avLst/>
+          </a:prstGeom>
+          <a:solidFill>
+            <a:srgbClr val="2F8A28"/>
+          </a:solidFill>
+          <a:ln w="12700">
+            <a:solidFill>
+              <a:srgbClr val="2F8A28"/>
+            </a:solidFill>
+            <a:prstDash val="solid"/>
+          </a:ln>
+        </p:spPr>
+      </p:sp>
+      <p:sp>
+        <p:nvSpPr>
+          <p:cNvPr id="17" name="Text 15"/>
+          <p:cNvSpPr/>
+          <p:nvPr/>
+        </p:nvSpPr>
+        <p:spPr>
+          <a:xfrm>
+            <a:off x="7909560" y="3977640"/>
+            <a:ext cx="2926080" cy="182880"/>
+          </a:xfrm>
+          <a:prstGeom prst="rect">
+            <a:avLst/>
+          </a:prstGeom>
+          <a:noFill/>
+          <a:ln/>
+        </p:spPr>
+        <p:txBody>
+          <a:bodyPr wrap="square" lIns="0" tIns="0" rIns="0" bIns="0" rtlCol="0" anchor="ctr"/>
+          <a:lstStyle/>
+          <a:p>
+            <a:pPr algn="ctr" indent="0" marL="0">
+              <a:buNone/>
+            </a:pPr>
+            <a:r>
+              <a:rPr lang="en-US" sz="1000" dirty="0">
+                <a:solidFill>
+                  <a:srgbClr val="003A63"/>
+                </a:solidFill>
+                <a:latin typeface="Aptos" pitchFamily="34" charset="0"/>
+                <a:ea typeface="Aptos" pitchFamily="34" charset="-122"/>
+                <a:cs typeface="Aptos" pitchFamily="34" charset="-120"/>
+              </a:rPr>
+              <a:t>Concept to action</a:t>
+            </a:r>
+            <a:endParaRPr lang="en-US" sz="1000" dirty="0"/>
+          </a:p>
+        </p:txBody>
+      </p:sp>
+      <p:sp>
+        <p:nvSpPr>
+          <p:cNvPr id="18" name="Shape 16"/>
+          <p:cNvSpPr/>
+          <p:nvPr/>
+        </p:nvSpPr>
+        <p:spPr>
+          <a:xfrm>
+            <a:off x="7635240" y="4498848"/>
+            <a:ext cx="3474720" cy="1143000"/>
+          </a:xfrm>
+          <a:prstGeom prst="roundRect">
+            <a:avLst>
+              <a:gd name="adj" fmla="val 9600"/>
             </a:avLst>
           </a:prstGeom>
           <a:solidFill>
@@ -13649,14 +14945,14 @@
       </p:sp>
       <p:sp>
         <p:nvSpPr>
-          <p:cNvPr id="16" name="Text 14"/>
-          <p:cNvSpPr/>
-          <p:nvPr/>
-        </p:nvSpPr>
-        <p:spPr>
-          <a:xfrm>
-            <a:off x="8074152" y="3666744"/>
-            <a:ext cx="2825496" cy="256032"/>
+          <p:cNvPr id="19" name="Text 17"/>
+          <p:cNvSpPr/>
+          <p:nvPr/>
+        </p:nvSpPr>
+        <p:spPr>
+          <a:xfrm>
+            <a:off x="7799832" y="4645152"/>
+            <a:ext cx="3145536" cy="256032"/>
           </a:xfrm>
           <a:prstGeom prst="rect">
             <a:avLst/>
@@ -13680,7 +14976,7 @@
                 <a:ea typeface="Aptos" pitchFamily="34" charset="-122"/>
                 <a:cs typeface="Aptos" pitchFamily="34" charset="-120"/>
               </a:rPr>
-              <a:t>Use this for</a:t>
+              <a:t>What to produce</a:t>
             </a:r>
             <a:endParaRPr lang="en-US" sz="1300" dirty="0"/>
           </a:p>
@@ -13688,14 +14984,14 @@
       </p:sp>
       <p:sp>
         <p:nvSpPr>
-          <p:cNvPr id="17" name="Text 15"/>
-          <p:cNvSpPr/>
-          <p:nvPr/>
-        </p:nvSpPr>
-        <p:spPr>
-          <a:xfrm>
-            <a:off x="8074152" y="4023360"/>
-            <a:ext cx="2825496" cy="1097280"/>
+          <p:cNvPr id="20" name="Text 18"/>
+          <p:cNvSpPr/>
+          <p:nvPr/>
+        </p:nvSpPr>
+        <p:spPr>
+          <a:xfrm>
+            <a:off x="7799832" y="5001768"/>
+            <a:ext cx="3145536" cy="502920"/>
           </a:xfrm>
           <a:prstGeom prst="rect">
             <a:avLst/>
@@ -13721,7 +15017,7 @@
                 <a:ea typeface="Aptos" pitchFamily="34" charset="-122"/>
                 <a:cs typeface="Aptos" pitchFamily="34" charset="-120"/>
               </a:rPr>
-              <a:t>Connect the concept to public health decisions, safeguards, documentation, or implementation work.</a:t>
+              <a:t>Use the assignment to test whether you can explain the concept, apply it to a realistic public health situation, and identify what would need review before the work moves forward.</a:t>
             </a:r>
             <a:endParaRPr lang="en-US" sz="1550" dirty="0"/>
           </a:p>
@@ -13895,8 +15191,8 @@
         </p:nvSpPr>
         <p:spPr>
           <a:xfrm>
-            <a:off x="9966960" y="6537960"/>
-            <a:ext cx="1645920" cy="201168"/>
+            <a:off x="9646920" y="6537960"/>
+            <a:ext cx="1965960" cy="201168"/>
           </a:xfrm>
           <a:prstGeom prst="rect">
             <a:avLst/>
@@ -13920,7 +15216,7 @@
                 <a:ea typeface="Aptos" pitchFamily="34" charset="-122"/>
                 <a:cs typeface="Aptos" pitchFamily="34" charset="-120"/>
               </a:rPr>
-              <a:t>Â© Paula Soper</a:t>
+              <a:t>Copyright Paula Soper</a:t>
             </a:r>
             <a:endParaRPr lang="en-US" sz="800" dirty="0"/>
           </a:p>
@@ -14015,7 +15311,7 @@
         <p:spPr>
           <a:xfrm>
             <a:off x="868680" y="1508760"/>
-            <a:ext cx="6537960" cy="4160520"/>
+            <a:ext cx="6309360" cy="4160520"/>
           </a:xfrm>
           <a:prstGeom prst="rect">
             <a:avLst/>
@@ -14052,12 +15348,12 @@
         </p:nvSpPr>
         <p:spPr>
           <a:xfrm>
-            <a:off x="7909560" y="1417320"/>
-            <a:ext cx="3154680" cy="1828800"/>
+            <a:off x="7635240" y="1325880"/>
+            <a:ext cx="3474720" cy="1325880"/>
           </a:xfrm>
           <a:prstGeom prst="roundRect">
             <a:avLst>
-              <a:gd name="adj" fmla="val 6000"/>
+              <a:gd name="adj" fmla="val 8276"/>
             </a:avLst>
           </a:prstGeom>
           <a:solidFill>
@@ -14079,8 +15375,8 @@
         </p:nvSpPr>
         <p:spPr>
           <a:xfrm>
-            <a:off x="8074152" y="1563624"/>
-            <a:ext cx="2825496" cy="256032"/>
+            <a:off x="7799832" y="1472184"/>
+            <a:ext cx="3145536" cy="256032"/>
           </a:xfrm>
           <a:prstGeom prst="rect">
             <a:avLst/>
@@ -14104,7 +15400,7 @@
                 <a:ea typeface="Aptos" pitchFamily="34" charset="-122"/>
                 <a:cs typeface="Aptos" pitchFamily="34" charset="-120"/>
               </a:rPr>
-              <a:t>Key idea</a:t>
+              <a:t>Practice focus</a:t>
             </a:r>
             <a:endParaRPr lang="en-US" sz="1300" dirty="0"/>
           </a:p>
@@ -14118,8 +15414,8 @@
         </p:nvSpPr>
         <p:spPr>
           <a:xfrm>
-            <a:off x="8074152" y="1920240"/>
-            <a:ext cx="2825496" cy="1188720"/>
+            <a:off x="7799832" y="1828800"/>
+            <a:ext cx="3145536" cy="685800"/>
           </a:xfrm>
           <a:prstGeom prst="rect">
             <a:avLst/>
@@ -14159,12 +15455,153 @@
         </p:nvSpPr>
         <p:spPr>
           <a:xfrm>
-            <a:off x="7909560" y="3520440"/>
-            <a:ext cx="3154680" cy="1737360"/>
+            <a:off x="7635240" y="2788920"/>
+            <a:ext cx="3474720" cy="1536192"/>
           </a:xfrm>
           <a:prstGeom prst="roundRect">
             <a:avLst>
-              <a:gd name="adj" fmla="val 6316"/>
+              <a:gd name="adj" fmla="val 7143"/>
+            </a:avLst>
+          </a:prstGeom>
+          <a:solidFill>
+            <a:srgbClr val="FFFFFF">
+              <a:alpha val="88000"/>
+            </a:srgbClr>
+          </a:solidFill>
+          <a:ln w="12700">
+            <a:solidFill>
+              <a:srgbClr val="D6E8F2"/>
+            </a:solidFill>
+            <a:prstDash val="solid"/>
+          </a:ln>
+        </p:spPr>
+      </p:sp>
+      <p:sp>
+        <p:nvSpPr>
+          <p:cNvPr id="14" name="Shape 12"/>
+          <p:cNvSpPr/>
+          <p:nvPr/>
+        </p:nvSpPr>
+        <p:spPr>
+          <a:xfrm>
+            <a:off x="8074152" y="3291840"/>
+            <a:ext cx="2596896" cy="749808"/>
+          </a:xfrm>
+          <a:prstGeom prst="rect">
+            <a:avLst/>
+          </a:prstGeom>
+          <a:solidFill>
+            <a:srgbClr val="EAF6F8"/>
+          </a:solidFill>
+          <a:ln w="12700">
+            <a:solidFill>
+              <a:srgbClr val="8ABBD8"/>
+            </a:solidFill>
+            <a:prstDash val="solid"/>
+          </a:ln>
+        </p:spPr>
+      </p:sp>
+      <p:sp>
+        <p:nvSpPr>
+          <p:cNvPr id="15" name="Shape 13"/>
+          <p:cNvSpPr/>
+          <p:nvPr/>
+        </p:nvSpPr>
+        <p:spPr>
+          <a:xfrm>
+            <a:off x="8202168" y="3721608"/>
+            <a:ext cx="2340864" cy="0"/>
+          </a:xfrm>
+          <a:prstGeom prst="line">
+            <a:avLst/>
+          </a:prstGeom>
+          <a:noFill/>
+          <a:ln w="19050">
+            <a:solidFill>
+              <a:srgbClr val="0068B7"/>
+            </a:solidFill>
+            <a:prstDash val="solid"/>
+          </a:ln>
+        </p:spPr>
+      </p:sp>
+      <p:sp>
+        <p:nvSpPr>
+          <p:cNvPr id="16" name="Shape 14"/>
+          <p:cNvSpPr/>
+          <p:nvPr/>
+        </p:nvSpPr>
+        <p:spPr>
+          <a:xfrm>
+            <a:off x="9198864" y="4206240"/>
+            <a:ext cx="347472" cy="347472"/>
+          </a:xfrm>
+          <a:prstGeom prst="ellipse">
+            <a:avLst/>
+          </a:prstGeom>
+          <a:solidFill>
+            <a:srgbClr val="2F8A28"/>
+          </a:solidFill>
+          <a:ln w="12700">
+            <a:solidFill>
+              <a:srgbClr val="2F8A28"/>
+            </a:solidFill>
+            <a:prstDash val="solid"/>
+          </a:ln>
+        </p:spPr>
+      </p:sp>
+      <p:sp>
+        <p:nvSpPr>
+          <p:cNvPr id="17" name="Text 15"/>
+          <p:cNvSpPr/>
+          <p:nvPr/>
+        </p:nvSpPr>
+        <p:spPr>
+          <a:xfrm>
+            <a:off x="7909560" y="3977640"/>
+            <a:ext cx="2926080" cy="182880"/>
+          </a:xfrm>
+          <a:prstGeom prst="rect">
+            <a:avLst/>
+          </a:prstGeom>
+          <a:noFill/>
+          <a:ln/>
+        </p:spPr>
+        <p:txBody>
+          <a:bodyPr wrap="square" lIns="0" tIns="0" rIns="0" bIns="0" rtlCol="0" anchor="ctr"/>
+          <a:lstStyle/>
+          <a:p>
+            <a:pPr algn="ctr" indent="0" marL="0">
+              <a:buNone/>
+            </a:pPr>
+            <a:r>
+              <a:rPr lang="en-US" sz="1000" dirty="0">
+                <a:solidFill>
+                  <a:srgbClr val="003A63"/>
+                </a:solidFill>
+                <a:latin typeface="Aptos" pitchFamily="34" charset="0"/>
+                <a:ea typeface="Aptos" pitchFamily="34" charset="-122"/>
+                <a:cs typeface="Aptos" pitchFamily="34" charset="-120"/>
+              </a:rPr>
+              <a:t>Concept to action</a:t>
+            </a:r>
+            <a:endParaRPr lang="en-US" sz="1000" dirty="0"/>
+          </a:p>
+        </p:txBody>
+      </p:sp>
+      <p:sp>
+        <p:nvSpPr>
+          <p:cNvPr id="18" name="Shape 16"/>
+          <p:cNvSpPr/>
+          <p:nvPr/>
+        </p:nvSpPr>
+        <p:spPr>
+          <a:xfrm>
+            <a:off x="7635240" y="4498848"/>
+            <a:ext cx="3474720" cy="1143000"/>
+          </a:xfrm>
+          <a:prstGeom prst="roundRect">
+            <a:avLst>
+              <a:gd name="adj" fmla="val 9600"/>
             </a:avLst>
           </a:prstGeom>
           <a:solidFill>
@@ -14180,14 +15617,14 @@
       </p:sp>
       <p:sp>
         <p:nvSpPr>
-          <p:cNvPr id="14" name="Text 12"/>
-          <p:cNvSpPr/>
-          <p:nvPr/>
-        </p:nvSpPr>
-        <p:spPr>
-          <a:xfrm>
-            <a:off x="8074152" y="3666744"/>
-            <a:ext cx="2825496" cy="256032"/>
+          <p:cNvPr id="19" name="Text 17"/>
+          <p:cNvSpPr/>
+          <p:nvPr/>
+        </p:nvSpPr>
+        <p:spPr>
+          <a:xfrm>
+            <a:off x="7799832" y="4645152"/>
+            <a:ext cx="3145536" cy="256032"/>
           </a:xfrm>
           <a:prstGeom prst="rect">
             <a:avLst/>
@@ -14211,7 +15648,7 @@
                 <a:ea typeface="Aptos" pitchFamily="34" charset="-122"/>
                 <a:cs typeface="Aptos" pitchFamily="34" charset="-120"/>
               </a:rPr>
-              <a:t>Use this for</a:t>
+              <a:t>What to produce</a:t>
             </a:r>
             <a:endParaRPr lang="en-US" sz="1300" dirty="0"/>
           </a:p>
@@ -14219,14 +15656,14 @@
       </p:sp>
       <p:sp>
         <p:nvSpPr>
-          <p:cNvPr id="15" name="Text 13"/>
-          <p:cNvSpPr/>
-          <p:nvPr/>
-        </p:nvSpPr>
-        <p:spPr>
-          <a:xfrm>
-            <a:off x="8074152" y="4023360"/>
-            <a:ext cx="2825496" cy="1097280"/>
+          <p:cNvPr id="20" name="Text 18"/>
+          <p:cNvSpPr/>
+          <p:nvPr/>
+        </p:nvSpPr>
+        <p:spPr>
+          <a:xfrm>
+            <a:off x="7799832" y="5001768"/>
+            <a:ext cx="3145536" cy="502920"/>
           </a:xfrm>
           <a:prstGeom prst="rect">
             <a:avLst/>
@@ -14252,7 +15689,7 @@
                 <a:ea typeface="Aptos" pitchFamily="34" charset="-122"/>
                 <a:cs typeface="Aptos" pitchFamily="34" charset="-120"/>
               </a:rPr>
-              <a:t>Connect the concept to public health decisions, safeguards, documentation, or implementation work.</a:t>
+              <a:t>Use the assignment to test whether you can explain the concept, apply it to a realistic public health situation, and identify what would need review before the work moves forward.</a:t>
             </a:r>
             <a:endParaRPr lang="en-US" sz="1550" dirty="0"/>
           </a:p>
@@ -14426,8 +15863,8 @@
         </p:nvSpPr>
         <p:spPr>
           <a:xfrm>
-            <a:off x="9966960" y="6537960"/>
-            <a:ext cx="1645920" cy="201168"/>
+            <a:off x="9646920" y="6537960"/>
+            <a:ext cx="1965960" cy="201168"/>
           </a:xfrm>
           <a:prstGeom prst="rect">
             <a:avLst/>
@@ -14451,7 +15888,7 @@
                 <a:ea typeface="Aptos" pitchFamily="34" charset="-122"/>
                 <a:cs typeface="Aptos" pitchFamily="34" charset="-120"/>
               </a:rPr>
-              <a:t>Â© Paula Soper</a:t>
+              <a:t>Copyright Paula Soper</a:t>
             </a:r>
             <a:endParaRPr lang="en-US" sz="800" dirty="0"/>
           </a:p>
@@ -14498,77 +15935,13 @@
       </p:sp>
       <p:sp>
         <p:nvSpPr>
-          <p:cNvPr id="8" name="Shape 6"/>
+          <p:cNvPr id="8" name="Text 6"/>
           <p:cNvSpPr/>
           <p:nvPr/>
         </p:nvSpPr>
         <p:spPr>
           <a:xfrm>
             <a:off x="640080" y="658368"/>
-            <a:ext cx="420624" cy="420624"/>
-          </a:xfrm>
-          <a:prstGeom prst="ellipse">
-            <a:avLst/>
-          </a:prstGeom>
-          <a:solidFill>
-            <a:srgbClr val="0068B7"/>
-          </a:solidFill>
-          <a:ln w="12700">
-            <a:solidFill>
-              <a:srgbClr val="0068B7"/>
-            </a:solidFill>
-            <a:prstDash val="solid"/>
-          </a:ln>
-        </p:spPr>
-      </p:sp>
-      <p:sp>
-        <p:nvSpPr>
-          <p:cNvPr id="9" name="Text 7"/>
-          <p:cNvSpPr/>
-          <p:nvPr/>
-        </p:nvSpPr>
-        <p:spPr>
-          <a:xfrm>
-            <a:off x="640080" y="731520"/>
-            <a:ext cx="420624" cy="164592"/>
-          </a:xfrm>
-          <a:prstGeom prst="rect">
-            <a:avLst/>
-          </a:prstGeom>
-          <a:noFill/>
-          <a:ln/>
-        </p:spPr>
-        <p:txBody>
-          <a:bodyPr wrap="square" lIns="0" tIns="0" rIns="0" bIns="0" rtlCol="0" anchor="ctr"/>
-          <a:lstStyle/>
-          <a:p>
-            <a:pPr algn="ctr" indent="0" marL="0">
-              <a:buNone/>
-            </a:pPr>
-            <a:r>
-              <a:rPr lang="en-US" sz="1100" b="1" dirty="0">
-                <a:solidFill>
-                  <a:srgbClr val="FFFFFF"/>
-                </a:solidFill>
-                <a:latin typeface="Aptos" pitchFamily="34" charset="0"/>
-                <a:ea typeface="Aptos" pitchFamily="34" charset="-122"/>
-                <a:cs typeface="Aptos" pitchFamily="34" charset="-120"/>
-              </a:rPr>
-              <a:t>2</a:t>
-            </a:r>
-            <a:endParaRPr lang="en-US" sz="1100" dirty="0"/>
-          </a:p>
-        </p:txBody>
-      </p:sp>
-      <p:sp>
-        <p:nvSpPr>
-          <p:cNvPr id="10" name="Text 8"/>
-          <p:cNvSpPr/>
-          <p:nvPr/>
-        </p:nvSpPr>
-        <p:spPr>
-          <a:xfrm>
-            <a:off x="640080" y="621792"/>
             <a:ext cx="10881360" cy="713232"/>
           </a:xfrm>
           <a:prstGeom prst="rect">
@@ -14603,14 +15976,14 @@
       </p:sp>
       <p:sp>
         <p:nvSpPr>
-          <p:cNvPr id="11" name="Text 9"/>
+          <p:cNvPr id="9" name="Text 7"/>
           <p:cNvSpPr/>
           <p:nvPr/>
         </p:nvSpPr>
         <p:spPr>
           <a:xfrm>
             <a:off x="868680" y="1508760"/>
-            <a:ext cx="6537960" cy="4160520"/>
+            <a:ext cx="6309360" cy="4160520"/>
           </a:xfrm>
           <a:prstGeom prst="rect">
             <a:avLst/>
@@ -14669,18 +16042,18 @@
       </p:sp>
       <p:sp>
         <p:nvSpPr>
-          <p:cNvPr id="12" name="Shape 10"/>
-          <p:cNvSpPr/>
-          <p:nvPr/>
-        </p:nvSpPr>
-        <p:spPr>
-          <a:xfrm>
-            <a:off x="7909560" y="1417320"/>
-            <a:ext cx="3154680" cy="1828800"/>
+          <p:cNvPr id="10" name="Shape 8"/>
+          <p:cNvSpPr/>
+          <p:nvPr/>
+        </p:nvSpPr>
+        <p:spPr>
+          <a:xfrm>
+            <a:off x="7635240" y="1325880"/>
+            <a:ext cx="3474720" cy="1325880"/>
           </a:xfrm>
           <a:prstGeom prst="roundRect">
             <a:avLst>
-              <a:gd name="adj" fmla="val 6000"/>
+              <a:gd name="adj" fmla="val 8276"/>
             </a:avLst>
           </a:prstGeom>
           <a:solidFill>
@@ -14696,14 +16069,14 @@
       </p:sp>
       <p:sp>
         <p:nvSpPr>
-          <p:cNvPr id="13" name="Text 11"/>
-          <p:cNvSpPr/>
-          <p:nvPr/>
-        </p:nvSpPr>
-        <p:spPr>
-          <a:xfrm>
-            <a:off x="8074152" y="1563624"/>
-            <a:ext cx="2825496" cy="256032"/>
+          <p:cNvPr id="11" name="Text 9"/>
+          <p:cNvSpPr/>
+          <p:nvPr/>
+        </p:nvSpPr>
+        <p:spPr>
+          <a:xfrm>
+            <a:off x="7799832" y="1472184"/>
+            <a:ext cx="3145536" cy="256032"/>
           </a:xfrm>
           <a:prstGeom prst="rect">
             <a:avLst/>
@@ -14727,7 +16100,7 @@
                 <a:ea typeface="Aptos" pitchFamily="34" charset="-122"/>
                 <a:cs typeface="Aptos" pitchFamily="34" charset="-120"/>
               </a:rPr>
-              <a:t>Key idea</a:t>
+              <a:t>Core concept</a:t>
             </a:r>
             <a:endParaRPr lang="en-US" sz="1300" dirty="0"/>
           </a:p>
@@ -14735,14 +16108,14 @@
       </p:sp>
       <p:sp>
         <p:nvSpPr>
-          <p:cNvPr id="14" name="Text 12"/>
-          <p:cNvSpPr/>
-          <p:nvPr/>
-        </p:nvSpPr>
-        <p:spPr>
-          <a:xfrm>
-            <a:off x="8074152" y="1920240"/>
-            <a:ext cx="2825496" cy="1188720"/>
+          <p:cNvPr id="12" name="Text 10"/>
+          <p:cNvSpPr/>
+          <p:nvPr/>
+        </p:nvSpPr>
+        <p:spPr>
+          <a:xfrm>
+            <a:off x="7799832" y="1828800"/>
+            <a:ext cx="3145536" cy="685800"/>
           </a:xfrm>
           <a:prstGeom prst="rect">
             <a:avLst/>
@@ -14776,18 +16149,159 @@
       </p:sp>
       <p:sp>
         <p:nvSpPr>
-          <p:cNvPr id="15" name="Shape 13"/>
-          <p:cNvSpPr/>
-          <p:nvPr/>
-        </p:nvSpPr>
-        <p:spPr>
-          <a:xfrm>
-            <a:off x="7909560" y="3520440"/>
-            <a:ext cx="3154680" cy="1737360"/>
+          <p:cNvPr id="13" name="Shape 11"/>
+          <p:cNvSpPr/>
+          <p:nvPr/>
+        </p:nvSpPr>
+        <p:spPr>
+          <a:xfrm>
+            <a:off x="7635240" y="2788920"/>
+            <a:ext cx="3474720" cy="1536192"/>
           </a:xfrm>
           <a:prstGeom prst="roundRect">
             <a:avLst>
-              <a:gd name="adj" fmla="val 6316"/>
+              <a:gd name="adj" fmla="val 7143"/>
+            </a:avLst>
+          </a:prstGeom>
+          <a:solidFill>
+            <a:srgbClr val="FFFFFF">
+              <a:alpha val="88000"/>
+            </a:srgbClr>
+          </a:solidFill>
+          <a:ln w="12700">
+            <a:solidFill>
+              <a:srgbClr val="D6E8F2"/>
+            </a:solidFill>
+            <a:prstDash val="solid"/>
+          </a:ln>
+        </p:spPr>
+      </p:sp>
+      <p:sp>
+        <p:nvSpPr>
+          <p:cNvPr id="14" name="Shape 12"/>
+          <p:cNvSpPr/>
+          <p:nvPr/>
+        </p:nvSpPr>
+        <p:spPr>
+          <a:xfrm>
+            <a:off x="8074152" y="3291840"/>
+            <a:ext cx="2596896" cy="749808"/>
+          </a:xfrm>
+          <a:prstGeom prst="rect">
+            <a:avLst/>
+          </a:prstGeom>
+          <a:solidFill>
+            <a:srgbClr val="EAF6F8"/>
+          </a:solidFill>
+          <a:ln w="12700">
+            <a:solidFill>
+              <a:srgbClr val="8ABBD8"/>
+            </a:solidFill>
+            <a:prstDash val="solid"/>
+          </a:ln>
+        </p:spPr>
+      </p:sp>
+      <p:sp>
+        <p:nvSpPr>
+          <p:cNvPr id="15" name="Shape 13"/>
+          <p:cNvSpPr/>
+          <p:nvPr/>
+        </p:nvSpPr>
+        <p:spPr>
+          <a:xfrm>
+            <a:off x="8202168" y="3721608"/>
+            <a:ext cx="2340864" cy="0"/>
+          </a:xfrm>
+          <a:prstGeom prst="line">
+            <a:avLst/>
+          </a:prstGeom>
+          <a:noFill/>
+          <a:ln w="19050">
+            <a:solidFill>
+              <a:srgbClr val="0068B7"/>
+            </a:solidFill>
+            <a:prstDash val="solid"/>
+          </a:ln>
+        </p:spPr>
+      </p:sp>
+      <p:sp>
+        <p:nvSpPr>
+          <p:cNvPr id="16" name="Shape 14"/>
+          <p:cNvSpPr/>
+          <p:nvPr/>
+        </p:nvSpPr>
+        <p:spPr>
+          <a:xfrm>
+            <a:off x="9198864" y="4206240"/>
+            <a:ext cx="347472" cy="347472"/>
+          </a:xfrm>
+          <a:prstGeom prst="ellipse">
+            <a:avLst/>
+          </a:prstGeom>
+          <a:solidFill>
+            <a:srgbClr val="2F8A28"/>
+          </a:solidFill>
+          <a:ln w="12700">
+            <a:solidFill>
+              <a:srgbClr val="2F8A28"/>
+            </a:solidFill>
+            <a:prstDash val="solid"/>
+          </a:ln>
+        </p:spPr>
+      </p:sp>
+      <p:sp>
+        <p:nvSpPr>
+          <p:cNvPr id="17" name="Text 15"/>
+          <p:cNvSpPr/>
+          <p:nvPr/>
+        </p:nvSpPr>
+        <p:spPr>
+          <a:xfrm>
+            <a:off x="7909560" y="3977640"/>
+            <a:ext cx="2926080" cy="182880"/>
+          </a:xfrm>
+          <a:prstGeom prst="rect">
+            <a:avLst/>
+          </a:prstGeom>
+          <a:noFill/>
+          <a:ln/>
+        </p:spPr>
+        <p:txBody>
+          <a:bodyPr wrap="square" lIns="0" tIns="0" rIns="0" bIns="0" rtlCol="0" anchor="ctr"/>
+          <a:lstStyle/>
+          <a:p>
+            <a:pPr algn="ctr" indent="0" marL="0">
+              <a:buNone/>
+            </a:pPr>
+            <a:r>
+              <a:rPr lang="en-US" sz="1000" dirty="0">
+                <a:solidFill>
+                  <a:srgbClr val="003A63"/>
+                </a:solidFill>
+                <a:latin typeface="Aptos" pitchFamily="34" charset="0"/>
+                <a:ea typeface="Aptos" pitchFamily="34" charset="-122"/>
+                <a:cs typeface="Aptos" pitchFamily="34" charset="-120"/>
+              </a:rPr>
+              <a:t>Concept to action</a:t>
+            </a:r>
+            <a:endParaRPr lang="en-US" sz="1000" dirty="0"/>
+          </a:p>
+        </p:txBody>
+      </p:sp>
+      <p:sp>
+        <p:nvSpPr>
+          <p:cNvPr id="18" name="Shape 16"/>
+          <p:cNvSpPr/>
+          <p:nvPr/>
+        </p:nvSpPr>
+        <p:spPr>
+          <a:xfrm>
+            <a:off x="7635240" y="4498848"/>
+            <a:ext cx="3474720" cy="1143000"/>
+          </a:xfrm>
+          <a:prstGeom prst="roundRect">
+            <a:avLst>
+              <a:gd name="adj" fmla="val 9600"/>
             </a:avLst>
           </a:prstGeom>
           <a:solidFill>
@@ -14803,14 +16317,14 @@
       </p:sp>
       <p:sp>
         <p:nvSpPr>
-          <p:cNvPr id="16" name="Text 14"/>
-          <p:cNvSpPr/>
-          <p:nvPr/>
-        </p:nvSpPr>
-        <p:spPr>
-          <a:xfrm>
-            <a:off x="8074152" y="3666744"/>
-            <a:ext cx="2825496" cy="256032"/>
+          <p:cNvPr id="19" name="Text 17"/>
+          <p:cNvSpPr/>
+          <p:nvPr/>
+        </p:nvSpPr>
+        <p:spPr>
+          <a:xfrm>
+            <a:off x="7799832" y="4645152"/>
+            <a:ext cx="3145536" cy="256032"/>
           </a:xfrm>
           <a:prstGeom prst="rect">
             <a:avLst/>
@@ -14834,7 +16348,7 @@
                 <a:ea typeface="Aptos" pitchFamily="34" charset="-122"/>
                 <a:cs typeface="Aptos" pitchFamily="34" charset="-120"/>
               </a:rPr>
-              <a:t>Use this for</a:t>
+              <a:t>Apply it</a:t>
             </a:r>
             <a:endParaRPr lang="en-US" sz="1300" dirty="0"/>
           </a:p>
@@ -14842,14 +16356,14 @@
       </p:sp>
       <p:sp>
         <p:nvSpPr>
-          <p:cNvPr id="17" name="Text 15"/>
-          <p:cNvSpPr/>
-          <p:nvPr/>
-        </p:nvSpPr>
-        <p:spPr>
-          <a:xfrm>
-            <a:off x="8074152" y="4023360"/>
-            <a:ext cx="2825496" cy="1097280"/>
+          <p:cNvPr id="20" name="Text 18"/>
+          <p:cNvSpPr/>
+          <p:nvPr/>
+        </p:nvSpPr>
+        <p:spPr>
+          <a:xfrm>
+            <a:off x="7799832" y="5001768"/>
+            <a:ext cx="3145536" cy="502920"/>
           </a:xfrm>
           <a:prstGeom prst="rect">
             <a:avLst/>
@@ -14875,7 +16389,7 @@
                 <a:ea typeface="Aptos" pitchFamily="34" charset="-122"/>
                 <a:cs typeface="Aptos" pitchFamily="34" charset="-120"/>
               </a:rPr>
-              <a:t>Connect the concept to public health decisions, safeguards, documentation, or implementation work.</a:t>
+              <a:t>Connect the concept to public health purpose, responsible use, required safeguards, documentation, and the next action a department should take.</a:t>
             </a:r>
             <a:endParaRPr lang="en-US" sz="1550" dirty="0"/>
           </a:p>
@@ -15049,8 +16563,8 @@
         </p:nvSpPr>
         <p:spPr>
           <a:xfrm>
-            <a:off x="9966960" y="6537960"/>
-            <a:ext cx="1645920" cy="201168"/>
+            <a:off x="9646920" y="6537960"/>
+            <a:ext cx="1965960" cy="201168"/>
           </a:xfrm>
           <a:prstGeom prst="rect">
             <a:avLst/>
@@ -15074,7 +16588,7 @@
                 <a:ea typeface="Aptos" pitchFamily="34" charset="-122"/>
                 <a:cs typeface="Aptos" pitchFamily="34" charset="-120"/>
               </a:rPr>
-              <a:t>Â© Paula Soper</a:t>
+              <a:t>Copyright Paula Soper</a:t>
             </a:r>
             <a:endParaRPr lang="en-US" sz="800" dirty="0"/>
           </a:p>
@@ -15121,77 +16635,13 @@
       </p:sp>
       <p:sp>
         <p:nvSpPr>
-          <p:cNvPr id="8" name="Shape 6"/>
+          <p:cNvPr id="8" name="Text 6"/>
           <p:cNvSpPr/>
           <p:nvPr/>
         </p:nvSpPr>
         <p:spPr>
           <a:xfrm>
             <a:off x="640080" y="658368"/>
-            <a:ext cx="420624" cy="420624"/>
-          </a:xfrm>
-          <a:prstGeom prst="ellipse">
-            <a:avLst/>
-          </a:prstGeom>
-          <a:solidFill>
-            <a:srgbClr val="0068B7"/>
-          </a:solidFill>
-          <a:ln w="12700">
-            <a:solidFill>
-              <a:srgbClr val="0068B7"/>
-            </a:solidFill>
-            <a:prstDash val="solid"/>
-          </a:ln>
-        </p:spPr>
-      </p:sp>
-      <p:sp>
-        <p:nvSpPr>
-          <p:cNvPr id="9" name="Text 7"/>
-          <p:cNvSpPr/>
-          <p:nvPr/>
-        </p:nvSpPr>
-        <p:spPr>
-          <a:xfrm>
-            <a:off x="640080" y="731520"/>
-            <a:ext cx="420624" cy="164592"/>
-          </a:xfrm>
-          <a:prstGeom prst="rect">
-            <a:avLst/>
-          </a:prstGeom>
-          <a:noFill/>
-          <a:ln/>
-        </p:spPr>
-        <p:txBody>
-          <a:bodyPr wrap="square" lIns="0" tIns="0" rIns="0" bIns="0" rtlCol="0" anchor="ctr"/>
-          <a:lstStyle/>
-          <a:p>
-            <a:pPr algn="ctr" indent="0" marL="0">
-              <a:buNone/>
-            </a:pPr>
-            <a:r>
-              <a:rPr lang="en-US" sz="1100" b="1" dirty="0">
-                <a:solidFill>
-                  <a:srgbClr val="FFFFFF"/>
-                </a:solidFill>
-                <a:latin typeface="Aptos" pitchFamily="34" charset="0"/>
-                <a:ea typeface="Aptos" pitchFamily="34" charset="-122"/>
-                <a:cs typeface="Aptos" pitchFamily="34" charset="-120"/>
-              </a:rPr>
-              <a:t>3</a:t>
-            </a:r>
-            <a:endParaRPr lang="en-US" sz="1100" dirty="0"/>
-          </a:p>
-        </p:txBody>
-      </p:sp>
-      <p:sp>
-        <p:nvSpPr>
-          <p:cNvPr id="10" name="Text 8"/>
-          <p:cNvSpPr/>
-          <p:nvPr/>
-        </p:nvSpPr>
-        <p:spPr>
-          <a:xfrm>
-            <a:off x="640080" y="621792"/>
             <a:ext cx="10881360" cy="713232"/>
           </a:xfrm>
           <a:prstGeom prst="rect">
@@ -15226,14 +16676,14 @@
       </p:sp>
       <p:sp>
         <p:nvSpPr>
-          <p:cNvPr id="11" name="Text 9"/>
+          <p:cNvPr id="9" name="Text 7"/>
           <p:cNvSpPr/>
           <p:nvPr/>
         </p:nvSpPr>
         <p:spPr>
           <a:xfrm>
             <a:off x="868680" y="1508760"/>
-            <a:ext cx="6537960" cy="4160520"/>
+            <a:ext cx="6309360" cy="4160520"/>
           </a:xfrm>
           <a:prstGeom prst="rect">
             <a:avLst/>
@@ -15292,18 +16742,18 @@
       </p:sp>
       <p:sp>
         <p:nvSpPr>
-          <p:cNvPr id="12" name="Shape 10"/>
-          <p:cNvSpPr/>
-          <p:nvPr/>
-        </p:nvSpPr>
-        <p:spPr>
-          <a:xfrm>
-            <a:off x="7909560" y="1417320"/>
-            <a:ext cx="3154680" cy="1828800"/>
+          <p:cNvPr id="10" name="Shape 8"/>
+          <p:cNvSpPr/>
+          <p:nvPr/>
+        </p:nvSpPr>
+        <p:spPr>
+          <a:xfrm>
+            <a:off x="7635240" y="1325880"/>
+            <a:ext cx="3474720" cy="1325880"/>
           </a:xfrm>
           <a:prstGeom prst="roundRect">
             <a:avLst>
-              <a:gd name="adj" fmla="val 6000"/>
+              <a:gd name="adj" fmla="val 8276"/>
             </a:avLst>
           </a:prstGeom>
           <a:solidFill>
@@ -15319,14 +16769,14 @@
       </p:sp>
       <p:sp>
         <p:nvSpPr>
-          <p:cNvPr id="13" name="Text 11"/>
-          <p:cNvSpPr/>
-          <p:nvPr/>
-        </p:nvSpPr>
-        <p:spPr>
-          <a:xfrm>
-            <a:off x="8074152" y="1563624"/>
-            <a:ext cx="2825496" cy="256032"/>
+          <p:cNvPr id="11" name="Text 9"/>
+          <p:cNvSpPr/>
+          <p:nvPr/>
+        </p:nvSpPr>
+        <p:spPr>
+          <a:xfrm>
+            <a:off x="7799832" y="1472184"/>
+            <a:ext cx="3145536" cy="256032"/>
           </a:xfrm>
           <a:prstGeom prst="rect">
             <a:avLst/>
@@ -15350,7 +16800,7 @@
                 <a:ea typeface="Aptos" pitchFamily="34" charset="-122"/>
                 <a:cs typeface="Aptos" pitchFamily="34" charset="-120"/>
               </a:rPr>
-              <a:t>Key idea</a:t>
+              <a:t>Core concept</a:t>
             </a:r>
             <a:endParaRPr lang="en-US" sz="1300" dirty="0"/>
           </a:p>
@@ -15358,14 +16808,14 @@
       </p:sp>
       <p:sp>
         <p:nvSpPr>
-          <p:cNvPr id="14" name="Text 12"/>
-          <p:cNvSpPr/>
-          <p:nvPr/>
-        </p:nvSpPr>
-        <p:spPr>
-          <a:xfrm>
-            <a:off x="8074152" y="1920240"/>
-            <a:ext cx="2825496" cy="1188720"/>
+          <p:cNvPr id="12" name="Text 10"/>
+          <p:cNvSpPr/>
+          <p:nvPr/>
+        </p:nvSpPr>
+        <p:spPr>
+          <a:xfrm>
+            <a:off x="7799832" y="1828800"/>
+            <a:ext cx="3145536" cy="685800"/>
           </a:xfrm>
           <a:prstGeom prst="rect">
             <a:avLst/>
@@ -15399,18 +16849,159 @@
       </p:sp>
       <p:sp>
         <p:nvSpPr>
-          <p:cNvPr id="15" name="Shape 13"/>
-          <p:cNvSpPr/>
-          <p:nvPr/>
-        </p:nvSpPr>
-        <p:spPr>
-          <a:xfrm>
-            <a:off x="7909560" y="3520440"/>
-            <a:ext cx="3154680" cy="1737360"/>
+          <p:cNvPr id="13" name="Shape 11"/>
+          <p:cNvSpPr/>
+          <p:nvPr/>
+        </p:nvSpPr>
+        <p:spPr>
+          <a:xfrm>
+            <a:off x="7635240" y="2788920"/>
+            <a:ext cx="3474720" cy="1536192"/>
           </a:xfrm>
           <a:prstGeom prst="roundRect">
             <a:avLst>
-              <a:gd name="adj" fmla="val 6316"/>
+              <a:gd name="adj" fmla="val 7143"/>
+            </a:avLst>
+          </a:prstGeom>
+          <a:solidFill>
+            <a:srgbClr val="FFFFFF">
+              <a:alpha val="88000"/>
+            </a:srgbClr>
+          </a:solidFill>
+          <a:ln w="12700">
+            <a:solidFill>
+              <a:srgbClr val="D6E8F2"/>
+            </a:solidFill>
+            <a:prstDash val="solid"/>
+          </a:ln>
+        </p:spPr>
+      </p:sp>
+      <p:sp>
+        <p:nvSpPr>
+          <p:cNvPr id="14" name="Shape 12"/>
+          <p:cNvSpPr/>
+          <p:nvPr/>
+        </p:nvSpPr>
+        <p:spPr>
+          <a:xfrm>
+            <a:off x="8074152" y="3291840"/>
+            <a:ext cx="2596896" cy="749808"/>
+          </a:xfrm>
+          <a:prstGeom prst="rect">
+            <a:avLst/>
+          </a:prstGeom>
+          <a:solidFill>
+            <a:srgbClr val="EAF6F8"/>
+          </a:solidFill>
+          <a:ln w="12700">
+            <a:solidFill>
+              <a:srgbClr val="8ABBD8"/>
+            </a:solidFill>
+            <a:prstDash val="solid"/>
+          </a:ln>
+        </p:spPr>
+      </p:sp>
+      <p:sp>
+        <p:nvSpPr>
+          <p:cNvPr id="15" name="Shape 13"/>
+          <p:cNvSpPr/>
+          <p:nvPr/>
+        </p:nvSpPr>
+        <p:spPr>
+          <a:xfrm>
+            <a:off x="8202168" y="3721608"/>
+            <a:ext cx="2340864" cy="0"/>
+          </a:xfrm>
+          <a:prstGeom prst="line">
+            <a:avLst/>
+          </a:prstGeom>
+          <a:noFill/>
+          <a:ln w="19050">
+            <a:solidFill>
+              <a:srgbClr val="0068B7"/>
+            </a:solidFill>
+            <a:prstDash val="solid"/>
+          </a:ln>
+        </p:spPr>
+      </p:sp>
+      <p:sp>
+        <p:nvSpPr>
+          <p:cNvPr id="16" name="Shape 14"/>
+          <p:cNvSpPr/>
+          <p:nvPr/>
+        </p:nvSpPr>
+        <p:spPr>
+          <a:xfrm>
+            <a:off x="9198864" y="4206240"/>
+            <a:ext cx="347472" cy="347472"/>
+          </a:xfrm>
+          <a:prstGeom prst="ellipse">
+            <a:avLst/>
+          </a:prstGeom>
+          <a:solidFill>
+            <a:srgbClr val="2F8A28"/>
+          </a:solidFill>
+          <a:ln w="12700">
+            <a:solidFill>
+              <a:srgbClr val="2F8A28"/>
+            </a:solidFill>
+            <a:prstDash val="solid"/>
+          </a:ln>
+        </p:spPr>
+      </p:sp>
+      <p:sp>
+        <p:nvSpPr>
+          <p:cNvPr id="17" name="Text 15"/>
+          <p:cNvSpPr/>
+          <p:nvPr/>
+        </p:nvSpPr>
+        <p:spPr>
+          <a:xfrm>
+            <a:off x="7909560" y="3977640"/>
+            <a:ext cx="2926080" cy="182880"/>
+          </a:xfrm>
+          <a:prstGeom prst="rect">
+            <a:avLst/>
+          </a:prstGeom>
+          <a:noFill/>
+          <a:ln/>
+        </p:spPr>
+        <p:txBody>
+          <a:bodyPr wrap="square" lIns="0" tIns="0" rIns="0" bIns="0" rtlCol="0" anchor="ctr"/>
+          <a:lstStyle/>
+          <a:p>
+            <a:pPr algn="ctr" indent="0" marL="0">
+              <a:buNone/>
+            </a:pPr>
+            <a:r>
+              <a:rPr lang="en-US" sz="1000" dirty="0">
+                <a:solidFill>
+                  <a:srgbClr val="003A63"/>
+                </a:solidFill>
+                <a:latin typeface="Aptos" pitchFamily="34" charset="0"/>
+                <a:ea typeface="Aptos" pitchFamily="34" charset="-122"/>
+                <a:cs typeface="Aptos" pitchFamily="34" charset="-120"/>
+              </a:rPr>
+              <a:t>Concept to action</a:t>
+            </a:r>
+            <a:endParaRPr lang="en-US" sz="1000" dirty="0"/>
+          </a:p>
+        </p:txBody>
+      </p:sp>
+      <p:sp>
+        <p:nvSpPr>
+          <p:cNvPr id="18" name="Shape 16"/>
+          <p:cNvSpPr/>
+          <p:nvPr/>
+        </p:nvSpPr>
+        <p:spPr>
+          <a:xfrm>
+            <a:off x="7635240" y="4498848"/>
+            <a:ext cx="3474720" cy="1143000"/>
+          </a:xfrm>
+          <a:prstGeom prst="roundRect">
+            <a:avLst>
+              <a:gd name="adj" fmla="val 9600"/>
             </a:avLst>
           </a:prstGeom>
           <a:solidFill>
@@ -15426,14 +17017,14 @@
       </p:sp>
       <p:sp>
         <p:nvSpPr>
-          <p:cNvPr id="16" name="Text 14"/>
-          <p:cNvSpPr/>
-          <p:nvPr/>
-        </p:nvSpPr>
-        <p:spPr>
-          <a:xfrm>
-            <a:off x="8074152" y="3666744"/>
-            <a:ext cx="2825496" cy="256032"/>
+          <p:cNvPr id="19" name="Text 17"/>
+          <p:cNvSpPr/>
+          <p:nvPr/>
+        </p:nvSpPr>
+        <p:spPr>
+          <a:xfrm>
+            <a:off x="7799832" y="4645152"/>
+            <a:ext cx="3145536" cy="256032"/>
           </a:xfrm>
           <a:prstGeom prst="rect">
             <a:avLst/>
@@ -15457,7 +17048,7 @@
                 <a:ea typeface="Aptos" pitchFamily="34" charset="-122"/>
                 <a:cs typeface="Aptos" pitchFamily="34" charset="-120"/>
               </a:rPr>
-              <a:t>Use this for</a:t>
+              <a:t>Apply it</a:t>
             </a:r>
             <a:endParaRPr lang="en-US" sz="1300" dirty="0"/>
           </a:p>
@@ -15465,14 +17056,14 @@
       </p:sp>
       <p:sp>
         <p:nvSpPr>
-          <p:cNvPr id="17" name="Text 15"/>
-          <p:cNvSpPr/>
-          <p:nvPr/>
-        </p:nvSpPr>
-        <p:spPr>
-          <a:xfrm>
-            <a:off x="8074152" y="4023360"/>
-            <a:ext cx="2825496" cy="1097280"/>
+          <p:cNvPr id="20" name="Text 18"/>
+          <p:cNvSpPr/>
+          <p:nvPr/>
+        </p:nvSpPr>
+        <p:spPr>
+          <a:xfrm>
+            <a:off x="7799832" y="5001768"/>
+            <a:ext cx="3145536" cy="502920"/>
           </a:xfrm>
           <a:prstGeom prst="rect">
             <a:avLst/>
@@ -15498,7 +17089,7 @@
                 <a:ea typeface="Aptos" pitchFamily="34" charset="-122"/>
                 <a:cs typeface="Aptos" pitchFamily="34" charset="-120"/>
               </a:rPr>
-              <a:t>Connect the concept to public health decisions, safeguards, documentation, or implementation work.</a:t>
+              <a:t>Connect the concept to public health purpose, responsible use, required safeguards, documentation, and the next action a department should take.</a:t>
             </a:r>
             <a:endParaRPr lang="en-US" sz="1550" dirty="0"/>
           </a:p>
@@ -15672,8 +17263,8 @@
         </p:nvSpPr>
         <p:spPr>
           <a:xfrm>
-            <a:off x="9966960" y="6537960"/>
-            <a:ext cx="1645920" cy="201168"/>
+            <a:off x="9646920" y="6537960"/>
+            <a:ext cx="1965960" cy="201168"/>
           </a:xfrm>
           <a:prstGeom prst="rect">
             <a:avLst/>
@@ -15697,7 +17288,7 @@
                 <a:ea typeface="Aptos" pitchFamily="34" charset="-122"/>
                 <a:cs typeface="Aptos" pitchFamily="34" charset="-120"/>
               </a:rPr>
-              <a:t>Â© Paula Soper</a:t>
+              <a:t>Copyright Paula Soper</a:t>
             </a:r>
             <a:endParaRPr lang="en-US" sz="800" dirty="0"/>
           </a:p>
@@ -15744,77 +17335,13 @@
       </p:sp>
       <p:sp>
         <p:nvSpPr>
-          <p:cNvPr id="8" name="Shape 6"/>
+          <p:cNvPr id="8" name="Text 6"/>
           <p:cNvSpPr/>
           <p:nvPr/>
         </p:nvSpPr>
         <p:spPr>
           <a:xfrm>
             <a:off x="640080" y="658368"/>
-            <a:ext cx="420624" cy="420624"/>
-          </a:xfrm>
-          <a:prstGeom prst="ellipse">
-            <a:avLst/>
-          </a:prstGeom>
-          <a:solidFill>
-            <a:srgbClr val="0068B7"/>
-          </a:solidFill>
-          <a:ln w="12700">
-            <a:solidFill>
-              <a:srgbClr val="0068B7"/>
-            </a:solidFill>
-            <a:prstDash val="solid"/>
-          </a:ln>
-        </p:spPr>
-      </p:sp>
-      <p:sp>
-        <p:nvSpPr>
-          <p:cNvPr id="9" name="Text 7"/>
-          <p:cNvSpPr/>
-          <p:nvPr/>
-        </p:nvSpPr>
-        <p:spPr>
-          <a:xfrm>
-            <a:off x="640080" y="731520"/>
-            <a:ext cx="420624" cy="164592"/>
-          </a:xfrm>
-          <a:prstGeom prst="rect">
-            <a:avLst/>
-          </a:prstGeom>
-          <a:noFill/>
-          <a:ln/>
-        </p:spPr>
-        <p:txBody>
-          <a:bodyPr wrap="square" lIns="0" tIns="0" rIns="0" bIns="0" rtlCol="0" anchor="ctr"/>
-          <a:lstStyle/>
-          <a:p>
-            <a:pPr algn="ctr" indent="0" marL="0">
-              <a:buNone/>
-            </a:pPr>
-            <a:r>
-              <a:rPr lang="en-US" sz="1100" b="1" dirty="0">
-                <a:solidFill>
-                  <a:srgbClr val="FFFFFF"/>
-                </a:solidFill>
-                <a:latin typeface="Aptos" pitchFamily="34" charset="0"/>
-                <a:ea typeface="Aptos" pitchFamily="34" charset="-122"/>
-                <a:cs typeface="Aptos" pitchFamily="34" charset="-120"/>
-              </a:rPr>
-              <a:t>4</a:t>
-            </a:r>
-            <a:endParaRPr lang="en-US" sz="1100" dirty="0"/>
-          </a:p>
-        </p:txBody>
-      </p:sp>
-      <p:sp>
-        <p:nvSpPr>
-          <p:cNvPr id="10" name="Text 8"/>
-          <p:cNvSpPr/>
-          <p:nvPr/>
-        </p:nvSpPr>
-        <p:spPr>
-          <a:xfrm>
-            <a:off x="640080" y="621792"/>
             <a:ext cx="10881360" cy="713232"/>
           </a:xfrm>
           <a:prstGeom prst="rect">
@@ -15849,14 +17376,14 @@
       </p:sp>
       <p:sp>
         <p:nvSpPr>
-          <p:cNvPr id="11" name="Text 9"/>
+          <p:cNvPr id="9" name="Text 7"/>
           <p:cNvSpPr/>
           <p:nvPr/>
         </p:nvSpPr>
         <p:spPr>
           <a:xfrm>
             <a:off x="868680" y="1508760"/>
-            <a:ext cx="6537960" cy="4160520"/>
+            <a:ext cx="6309360" cy="4160520"/>
           </a:xfrm>
           <a:prstGeom prst="rect">
             <a:avLst/>
@@ -15915,18 +17442,18 @@
       </p:sp>
       <p:sp>
         <p:nvSpPr>
-          <p:cNvPr id="12" name="Shape 10"/>
-          <p:cNvSpPr/>
-          <p:nvPr/>
-        </p:nvSpPr>
-        <p:spPr>
-          <a:xfrm>
-            <a:off x="7909560" y="1417320"/>
-            <a:ext cx="3154680" cy="1828800"/>
+          <p:cNvPr id="10" name="Shape 8"/>
+          <p:cNvSpPr/>
+          <p:nvPr/>
+        </p:nvSpPr>
+        <p:spPr>
+          <a:xfrm>
+            <a:off x="7635240" y="1325880"/>
+            <a:ext cx="3474720" cy="1325880"/>
           </a:xfrm>
           <a:prstGeom prst="roundRect">
             <a:avLst>
-              <a:gd name="adj" fmla="val 6000"/>
+              <a:gd name="adj" fmla="val 8276"/>
             </a:avLst>
           </a:prstGeom>
           <a:solidFill>
@@ -15942,14 +17469,14 @@
       </p:sp>
       <p:sp>
         <p:nvSpPr>
-          <p:cNvPr id="13" name="Text 11"/>
-          <p:cNvSpPr/>
-          <p:nvPr/>
-        </p:nvSpPr>
-        <p:spPr>
-          <a:xfrm>
-            <a:off x="8074152" y="1563624"/>
-            <a:ext cx="2825496" cy="256032"/>
+          <p:cNvPr id="11" name="Text 9"/>
+          <p:cNvSpPr/>
+          <p:nvPr/>
+        </p:nvSpPr>
+        <p:spPr>
+          <a:xfrm>
+            <a:off x="7799832" y="1472184"/>
+            <a:ext cx="3145536" cy="256032"/>
           </a:xfrm>
           <a:prstGeom prst="rect">
             <a:avLst/>
@@ -15973,7 +17500,7 @@
                 <a:ea typeface="Aptos" pitchFamily="34" charset="-122"/>
                 <a:cs typeface="Aptos" pitchFamily="34" charset="-120"/>
               </a:rPr>
-              <a:t>Key idea</a:t>
+              <a:t>Core concept</a:t>
             </a:r>
             <a:endParaRPr lang="en-US" sz="1300" dirty="0"/>
           </a:p>
@@ -15981,14 +17508,14 @@
       </p:sp>
       <p:sp>
         <p:nvSpPr>
-          <p:cNvPr id="14" name="Text 12"/>
-          <p:cNvSpPr/>
-          <p:nvPr/>
-        </p:nvSpPr>
-        <p:spPr>
-          <a:xfrm>
-            <a:off x="8074152" y="1920240"/>
-            <a:ext cx="2825496" cy="1188720"/>
+          <p:cNvPr id="12" name="Text 10"/>
+          <p:cNvSpPr/>
+          <p:nvPr/>
+        </p:nvSpPr>
+        <p:spPr>
+          <a:xfrm>
+            <a:off x="7799832" y="1828800"/>
+            <a:ext cx="3145536" cy="685800"/>
           </a:xfrm>
           <a:prstGeom prst="rect">
             <a:avLst/>
@@ -16022,18 +17549,159 @@
       </p:sp>
       <p:sp>
         <p:nvSpPr>
-          <p:cNvPr id="15" name="Shape 13"/>
-          <p:cNvSpPr/>
-          <p:nvPr/>
-        </p:nvSpPr>
-        <p:spPr>
-          <a:xfrm>
-            <a:off x="7909560" y="3520440"/>
-            <a:ext cx="3154680" cy="1737360"/>
+          <p:cNvPr id="13" name="Shape 11"/>
+          <p:cNvSpPr/>
+          <p:nvPr/>
+        </p:nvSpPr>
+        <p:spPr>
+          <a:xfrm>
+            <a:off x="7635240" y="2788920"/>
+            <a:ext cx="3474720" cy="1536192"/>
           </a:xfrm>
           <a:prstGeom prst="roundRect">
             <a:avLst>
-              <a:gd name="adj" fmla="val 6316"/>
+              <a:gd name="adj" fmla="val 7143"/>
+            </a:avLst>
+          </a:prstGeom>
+          <a:solidFill>
+            <a:srgbClr val="FFFFFF">
+              <a:alpha val="88000"/>
+            </a:srgbClr>
+          </a:solidFill>
+          <a:ln w="12700">
+            <a:solidFill>
+              <a:srgbClr val="D6E8F2"/>
+            </a:solidFill>
+            <a:prstDash val="solid"/>
+          </a:ln>
+        </p:spPr>
+      </p:sp>
+      <p:sp>
+        <p:nvSpPr>
+          <p:cNvPr id="14" name="Shape 12"/>
+          <p:cNvSpPr/>
+          <p:nvPr/>
+        </p:nvSpPr>
+        <p:spPr>
+          <a:xfrm>
+            <a:off x="8074152" y="3291840"/>
+            <a:ext cx="2596896" cy="749808"/>
+          </a:xfrm>
+          <a:prstGeom prst="rect">
+            <a:avLst/>
+          </a:prstGeom>
+          <a:solidFill>
+            <a:srgbClr val="EAF6F8"/>
+          </a:solidFill>
+          <a:ln w="12700">
+            <a:solidFill>
+              <a:srgbClr val="8ABBD8"/>
+            </a:solidFill>
+            <a:prstDash val="solid"/>
+          </a:ln>
+        </p:spPr>
+      </p:sp>
+      <p:sp>
+        <p:nvSpPr>
+          <p:cNvPr id="15" name="Shape 13"/>
+          <p:cNvSpPr/>
+          <p:nvPr/>
+        </p:nvSpPr>
+        <p:spPr>
+          <a:xfrm>
+            <a:off x="8202168" y="3721608"/>
+            <a:ext cx="2340864" cy="0"/>
+          </a:xfrm>
+          <a:prstGeom prst="line">
+            <a:avLst/>
+          </a:prstGeom>
+          <a:noFill/>
+          <a:ln w="19050">
+            <a:solidFill>
+              <a:srgbClr val="0068B7"/>
+            </a:solidFill>
+            <a:prstDash val="solid"/>
+          </a:ln>
+        </p:spPr>
+      </p:sp>
+      <p:sp>
+        <p:nvSpPr>
+          <p:cNvPr id="16" name="Shape 14"/>
+          <p:cNvSpPr/>
+          <p:nvPr/>
+        </p:nvSpPr>
+        <p:spPr>
+          <a:xfrm>
+            <a:off x="9198864" y="4206240"/>
+            <a:ext cx="347472" cy="347472"/>
+          </a:xfrm>
+          <a:prstGeom prst="ellipse">
+            <a:avLst/>
+          </a:prstGeom>
+          <a:solidFill>
+            <a:srgbClr val="2F8A28"/>
+          </a:solidFill>
+          <a:ln w="12700">
+            <a:solidFill>
+              <a:srgbClr val="2F8A28"/>
+            </a:solidFill>
+            <a:prstDash val="solid"/>
+          </a:ln>
+        </p:spPr>
+      </p:sp>
+      <p:sp>
+        <p:nvSpPr>
+          <p:cNvPr id="17" name="Text 15"/>
+          <p:cNvSpPr/>
+          <p:nvPr/>
+        </p:nvSpPr>
+        <p:spPr>
+          <a:xfrm>
+            <a:off x="7909560" y="3977640"/>
+            <a:ext cx="2926080" cy="182880"/>
+          </a:xfrm>
+          <a:prstGeom prst="rect">
+            <a:avLst/>
+          </a:prstGeom>
+          <a:noFill/>
+          <a:ln/>
+        </p:spPr>
+        <p:txBody>
+          <a:bodyPr wrap="square" lIns="0" tIns="0" rIns="0" bIns="0" rtlCol="0" anchor="ctr"/>
+          <a:lstStyle/>
+          <a:p>
+            <a:pPr algn="ctr" indent="0" marL="0">
+              <a:buNone/>
+            </a:pPr>
+            <a:r>
+              <a:rPr lang="en-US" sz="1000" dirty="0">
+                <a:solidFill>
+                  <a:srgbClr val="003A63"/>
+                </a:solidFill>
+                <a:latin typeface="Aptos" pitchFamily="34" charset="0"/>
+                <a:ea typeface="Aptos" pitchFamily="34" charset="-122"/>
+                <a:cs typeface="Aptos" pitchFamily="34" charset="-120"/>
+              </a:rPr>
+              <a:t>Concept to action</a:t>
+            </a:r>
+            <a:endParaRPr lang="en-US" sz="1000" dirty="0"/>
+          </a:p>
+        </p:txBody>
+      </p:sp>
+      <p:sp>
+        <p:nvSpPr>
+          <p:cNvPr id="18" name="Shape 16"/>
+          <p:cNvSpPr/>
+          <p:nvPr/>
+        </p:nvSpPr>
+        <p:spPr>
+          <a:xfrm>
+            <a:off x="7635240" y="4498848"/>
+            <a:ext cx="3474720" cy="1143000"/>
+          </a:xfrm>
+          <a:prstGeom prst="roundRect">
+            <a:avLst>
+              <a:gd name="adj" fmla="val 9600"/>
             </a:avLst>
           </a:prstGeom>
           <a:solidFill>
@@ -16049,14 +17717,14 @@
       </p:sp>
       <p:sp>
         <p:nvSpPr>
-          <p:cNvPr id="16" name="Text 14"/>
-          <p:cNvSpPr/>
-          <p:nvPr/>
-        </p:nvSpPr>
-        <p:spPr>
-          <a:xfrm>
-            <a:off x="8074152" y="3666744"/>
-            <a:ext cx="2825496" cy="256032"/>
+          <p:cNvPr id="19" name="Text 17"/>
+          <p:cNvSpPr/>
+          <p:nvPr/>
+        </p:nvSpPr>
+        <p:spPr>
+          <a:xfrm>
+            <a:off x="7799832" y="4645152"/>
+            <a:ext cx="3145536" cy="256032"/>
           </a:xfrm>
           <a:prstGeom prst="rect">
             <a:avLst/>
@@ -16080,7 +17748,7 @@
                 <a:ea typeface="Aptos" pitchFamily="34" charset="-122"/>
                 <a:cs typeface="Aptos" pitchFamily="34" charset="-120"/>
               </a:rPr>
-              <a:t>Use this for</a:t>
+              <a:t>Apply it</a:t>
             </a:r>
             <a:endParaRPr lang="en-US" sz="1300" dirty="0"/>
           </a:p>
@@ -16088,14 +17756,14 @@
       </p:sp>
       <p:sp>
         <p:nvSpPr>
-          <p:cNvPr id="17" name="Text 15"/>
-          <p:cNvSpPr/>
-          <p:nvPr/>
-        </p:nvSpPr>
-        <p:spPr>
-          <a:xfrm>
-            <a:off x="8074152" y="4023360"/>
-            <a:ext cx="2825496" cy="1097280"/>
+          <p:cNvPr id="20" name="Text 18"/>
+          <p:cNvSpPr/>
+          <p:nvPr/>
+        </p:nvSpPr>
+        <p:spPr>
+          <a:xfrm>
+            <a:off x="7799832" y="5001768"/>
+            <a:ext cx="3145536" cy="502920"/>
           </a:xfrm>
           <a:prstGeom prst="rect">
             <a:avLst/>
@@ -16121,7 +17789,7 @@
                 <a:ea typeface="Aptos" pitchFamily="34" charset="-122"/>
                 <a:cs typeface="Aptos" pitchFamily="34" charset="-120"/>
               </a:rPr>
-              <a:t>Connect the concept to public health decisions, safeguards, documentation, or implementation work.</a:t>
+              <a:t>Connect the concept to public health purpose, responsible use, required safeguards, documentation, and the next action a department should take.</a:t>
             </a:r>
             <a:endParaRPr lang="en-US" sz="1550" dirty="0"/>
           </a:p>

--- a/downloads/presentations/modules/int-190.pptx
+++ b/downloads/presentations/modules/int-190.pptx
@@ -3526,13 +3526,11 @@
             </a:avLst>
           </a:prstGeom>
           <a:solidFill>
-            <a:srgbClr val="FFFFFF">
-              <a:alpha val="88000"/>
-            </a:srgbClr>
+            <a:srgbClr val="FFFFFF"/>
           </a:solidFill>
           <a:ln w="12700">
             <a:solidFill>
-              <a:srgbClr val="D6E8F2"/>
+              <a:srgbClr val="B9D7E6"/>
             </a:solidFill>
             <a:prstDash val="solid"/>
           </a:ln>
@@ -3540,119 +3538,112 @@
       </p:sp>
       <p:sp>
         <p:nvSpPr>
-          <p:cNvPr id="14" name="Shape 12"/>
-          <p:cNvSpPr/>
-          <p:nvPr/>
-        </p:nvSpPr>
-        <p:spPr>
-          <a:xfrm>
-            <a:off x="8074152" y="3291840"/>
-            <a:ext cx="2596896" cy="749808"/>
-          </a:xfrm>
-          <a:prstGeom prst="rect">
-            <a:avLst/>
-          </a:prstGeom>
-          <a:solidFill>
-            <a:srgbClr val="EAF6F8"/>
-          </a:solidFill>
-          <a:ln w="12700">
-            <a:solidFill>
-              <a:srgbClr val="8ABBD8"/>
-            </a:solidFill>
-            <a:prstDash val="solid"/>
-          </a:ln>
-        </p:spPr>
-      </p:sp>
-      <p:sp>
-        <p:nvSpPr>
-          <p:cNvPr id="15" name="Shape 13"/>
-          <p:cNvSpPr/>
-          <p:nvPr/>
-        </p:nvSpPr>
-        <p:spPr>
-          <a:xfrm>
-            <a:off x="8202168" y="3721608"/>
-            <a:ext cx="2340864" cy="0"/>
-          </a:xfrm>
-          <a:prstGeom prst="line">
-            <a:avLst/>
-          </a:prstGeom>
-          <a:noFill/>
-          <a:ln w="19050">
-            <a:solidFill>
-              <a:srgbClr val="0068B7"/>
-            </a:solidFill>
-            <a:prstDash val="solid"/>
-          </a:ln>
-        </p:spPr>
+          <p:cNvPr id="14" name="Text 12"/>
+          <p:cNvSpPr/>
+          <p:nvPr/>
+        </p:nvSpPr>
+        <p:spPr>
+          <a:xfrm>
+            <a:off x="7799832" y="2935224"/>
+            <a:ext cx="3145536" cy="256032"/>
+          </a:xfrm>
+          <a:prstGeom prst="rect">
+            <a:avLst/>
+          </a:prstGeom>
+          <a:noFill/>
+          <a:ln/>
+        </p:spPr>
+        <p:txBody>
+          <a:bodyPr wrap="square" lIns="0" tIns="0" rIns="0" bIns="0" rtlCol="0" anchor="ctr"/>
+          <a:lstStyle/>
+          <a:p>
+            <a:pPr indent="0" marL="0">
+              <a:buNone/>
+            </a:pPr>
+            <a:r>
+              <a:rPr lang="en-US" sz="1300" b="1" dirty="0">
+                <a:solidFill>
+                  <a:srgbClr val="0068B7"/>
+                </a:solidFill>
+                <a:latin typeface="Aptos" pitchFamily="34" charset="0"/>
+                <a:ea typeface="Aptos" pitchFamily="34" charset="-122"/>
+                <a:cs typeface="Aptos" pitchFamily="34" charset="-120"/>
+              </a:rPr>
+              <a:t>Concept checkpoints</a:t>
+            </a:r>
+            <a:endParaRPr lang="en-US" sz="1300" dirty="0"/>
+          </a:p>
+        </p:txBody>
+      </p:sp>
+      <p:sp>
+        <p:nvSpPr>
+          <p:cNvPr id="15" name="Text 13"/>
+          <p:cNvSpPr/>
+          <p:nvPr/>
+        </p:nvSpPr>
+        <p:spPr>
+          <a:xfrm>
+            <a:off x="7818120" y="3300984"/>
+            <a:ext cx="3090672" cy="877824"/>
+          </a:xfrm>
+          <a:prstGeom prst="rect">
+            <a:avLst/>
+          </a:prstGeom>
+          <a:noFill/>
+          <a:ln/>
+        </p:spPr>
+        <p:txBody>
+          <a:bodyPr wrap="square" lIns="254" tIns="254" rIns="254" bIns="254" rtlCol="0" anchor="t">
+            <a:normAutofit/>
+          </a:bodyPr>
+          <a:lstStyle/>
+          <a:p>
+            <a:r>
+              <a:rPr lang="en-US" sz="1380" dirty="0">
+                <a:solidFill>
+                  <a:srgbClr val="17364A"/>
+                </a:solidFill>
+                <a:latin typeface="Aptos" pitchFamily="34" charset="0"/>
+                <a:ea typeface="Aptos" pitchFamily="34" charset="-122"/>
+                <a:cs typeface="Aptos" pitchFamily="34" charset="-120"/>
+              </a:rPr>
+              <a:t>For example, “use a chatbot” is not a problem definition. “Reduce delays in connecting.</a:t>
+            </a:r>
+            <a:endParaRPr lang="en-US" sz="1380" dirty="0"/>
+          </a:p>
+          <a:p>
+            <a:r>
+              <a:rPr lang="en-US" sz="1380" dirty="0">
+                <a:solidFill>
+                  <a:srgbClr val="17364A"/>
+                </a:solidFill>
+                <a:latin typeface="Aptos" pitchFamily="34" charset="0"/>
+                <a:ea typeface="Aptos" pitchFamily="34" charset="-122"/>
+                <a:cs typeface="Aptos" pitchFamily="34" charset="-120"/>
+              </a:rPr>
+              <a:t>Starting with the problem helps agencies avoid technology-driven solutions that do not.</a:t>
+            </a:r>
+            <a:endParaRPr lang="en-US" sz="1380" dirty="0"/>
+          </a:p>
+          <a:p>
+            <a:r>
+              <a:rPr lang="en-US" sz="1380" dirty="0">
+                <a:solidFill>
+                  <a:srgbClr val="17364A"/>
+                </a:solidFill>
+                <a:latin typeface="Aptos" pitchFamily="34" charset="0"/>
+                <a:ea typeface="Aptos" pitchFamily="34" charset="-122"/>
+                <a:cs typeface="Aptos" pitchFamily="34" charset="-120"/>
+              </a:rPr>
+              <a:t>Equity by design requires agencies to identify who is included, who is excluded, and who.</a:t>
+            </a:r>
+            <a:endParaRPr lang="en-US" sz="1380" dirty="0"/>
+          </a:p>
+        </p:txBody>
       </p:sp>
       <p:sp>
         <p:nvSpPr>
           <p:cNvPr id="16" name="Shape 14"/>
-          <p:cNvSpPr/>
-          <p:nvPr/>
-        </p:nvSpPr>
-        <p:spPr>
-          <a:xfrm>
-            <a:off x="9198864" y="4206240"/>
-            <a:ext cx="347472" cy="347472"/>
-          </a:xfrm>
-          <a:prstGeom prst="ellipse">
-            <a:avLst/>
-          </a:prstGeom>
-          <a:solidFill>
-            <a:srgbClr val="2F8A28"/>
-          </a:solidFill>
-          <a:ln w="12700">
-            <a:solidFill>
-              <a:srgbClr val="2F8A28"/>
-            </a:solidFill>
-            <a:prstDash val="solid"/>
-          </a:ln>
-        </p:spPr>
-      </p:sp>
-      <p:sp>
-        <p:nvSpPr>
-          <p:cNvPr id="17" name="Text 15"/>
-          <p:cNvSpPr/>
-          <p:nvPr/>
-        </p:nvSpPr>
-        <p:spPr>
-          <a:xfrm>
-            <a:off x="7909560" y="3977640"/>
-            <a:ext cx="2926080" cy="182880"/>
-          </a:xfrm>
-          <a:prstGeom prst="rect">
-            <a:avLst/>
-          </a:prstGeom>
-          <a:noFill/>
-          <a:ln/>
-        </p:spPr>
-        <p:txBody>
-          <a:bodyPr wrap="square" lIns="0" tIns="0" rIns="0" bIns="0" rtlCol="0" anchor="ctr"/>
-          <a:lstStyle/>
-          <a:p>
-            <a:pPr algn="ctr" indent="0" marL="0">
-              <a:buNone/>
-            </a:pPr>
-            <a:r>
-              <a:rPr lang="en-US" sz="1000" dirty="0">
-                <a:solidFill>
-                  <a:srgbClr val="003A63"/>
-                </a:solidFill>
-                <a:latin typeface="Aptos" pitchFamily="34" charset="0"/>
-                <a:ea typeface="Aptos" pitchFamily="34" charset="-122"/>
-                <a:cs typeface="Aptos" pitchFamily="34" charset="-120"/>
-              </a:rPr>
-              <a:t>Concept to action</a:t>
-            </a:r>
-            <a:endParaRPr lang="en-US" sz="1000" dirty="0"/>
-          </a:p>
-        </p:txBody>
-      </p:sp>
-      <p:sp>
-        <p:nvSpPr>
-          <p:cNvPr id="18" name="Shape 16"/>
           <p:cNvSpPr/>
           <p:nvPr/>
         </p:nvSpPr>
@@ -3679,7 +3670,7 @@
       </p:sp>
       <p:sp>
         <p:nvSpPr>
-          <p:cNvPr id="19" name="Text 17"/>
+          <p:cNvPr id="17" name="Text 15"/>
           <p:cNvSpPr/>
           <p:nvPr/>
         </p:nvSpPr>
@@ -3718,7 +3709,7 @@
       </p:sp>
       <p:sp>
         <p:nvSpPr>
-          <p:cNvPr id="20" name="Text 18"/>
+          <p:cNvPr id="18" name="Text 16"/>
           <p:cNvSpPr/>
           <p:nvPr/>
         </p:nvSpPr>
@@ -4226,13 +4217,11 @@
             </a:avLst>
           </a:prstGeom>
           <a:solidFill>
-            <a:srgbClr val="FFFFFF">
-              <a:alpha val="88000"/>
-            </a:srgbClr>
+            <a:srgbClr val="FFFFFF"/>
           </a:solidFill>
           <a:ln w="12700">
             <a:solidFill>
-              <a:srgbClr val="D6E8F2"/>
+              <a:srgbClr val="B9D7E6"/>
             </a:solidFill>
             <a:prstDash val="solid"/>
           </a:ln>
@@ -4240,119 +4229,112 @@
       </p:sp>
       <p:sp>
         <p:nvSpPr>
-          <p:cNvPr id="14" name="Shape 12"/>
-          <p:cNvSpPr/>
-          <p:nvPr/>
-        </p:nvSpPr>
-        <p:spPr>
-          <a:xfrm>
-            <a:off x="8074152" y="3291840"/>
-            <a:ext cx="2596896" cy="749808"/>
-          </a:xfrm>
-          <a:prstGeom prst="rect">
-            <a:avLst/>
-          </a:prstGeom>
-          <a:solidFill>
-            <a:srgbClr val="EAF6F8"/>
-          </a:solidFill>
-          <a:ln w="12700">
-            <a:solidFill>
-              <a:srgbClr val="8ABBD8"/>
-            </a:solidFill>
-            <a:prstDash val="solid"/>
-          </a:ln>
-        </p:spPr>
-      </p:sp>
-      <p:sp>
-        <p:nvSpPr>
-          <p:cNvPr id="15" name="Shape 13"/>
-          <p:cNvSpPr/>
-          <p:nvPr/>
-        </p:nvSpPr>
-        <p:spPr>
-          <a:xfrm>
-            <a:off x="8202168" y="3721608"/>
-            <a:ext cx="2340864" cy="0"/>
-          </a:xfrm>
-          <a:prstGeom prst="line">
-            <a:avLst/>
-          </a:prstGeom>
-          <a:noFill/>
-          <a:ln w="19050">
-            <a:solidFill>
-              <a:srgbClr val="0068B7"/>
-            </a:solidFill>
-            <a:prstDash val="solid"/>
-          </a:ln>
-        </p:spPr>
+          <p:cNvPr id="14" name="Text 12"/>
+          <p:cNvSpPr/>
+          <p:nvPr/>
+        </p:nvSpPr>
+        <p:spPr>
+          <a:xfrm>
+            <a:off x="7799832" y="2935224"/>
+            <a:ext cx="3145536" cy="256032"/>
+          </a:xfrm>
+          <a:prstGeom prst="rect">
+            <a:avLst/>
+          </a:prstGeom>
+          <a:noFill/>
+          <a:ln/>
+        </p:spPr>
+        <p:txBody>
+          <a:bodyPr wrap="square" lIns="0" tIns="0" rIns="0" bIns="0" rtlCol="0" anchor="ctr"/>
+          <a:lstStyle/>
+          <a:p>
+            <a:pPr indent="0" marL="0">
+              <a:buNone/>
+            </a:pPr>
+            <a:r>
+              <a:rPr lang="en-US" sz="1300" b="1" dirty="0">
+                <a:solidFill>
+                  <a:srgbClr val="0068B7"/>
+                </a:solidFill>
+                <a:latin typeface="Aptos" pitchFamily="34" charset="0"/>
+                <a:ea typeface="Aptos" pitchFamily="34" charset="-122"/>
+                <a:cs typeface="Aptos" pitchFamily="34" charset="-120"/>
+              </a:rPr>
+              <a:t>Concept checkpoints</a:t>
+            </a:r>
+            <a:endParaRPr lang="en-US" sz="1300" dirty="0"/>
+          </a:p>
+        </p:txBody>
+      </p:sp>
+      <p:sp>
+        <p:nvSpPr>
+          <p:cNvPr id="15" name="Text 13"/>
+          <p:cNvSpPr/>
+          <p:nvPr/>
+        </p:nvSpPr>
+        <p:spPr>
+          <a:xfrm>
+            <a:off x="7818120" y="3300984"/>
+            <a:ext cx="3090672" cy="877824"/>
+          </a:xfrm>
+          <a:prstGeom prst="rect">
+            <a:avLst/>
+          </a:prstGeom>
+          <a:noFill/>
+          <a:ln/>
+        </p:spPr>
+        <p:txBody>
+          <a:bodyPr wrap="square" lIns="254" tIns="254" rIns="254" bIns="254" rtlCol="0" anchor="t">
+            <a:normAutofit/>
+          </a:bodyPr>
+          <a:lstStyle/>
+          <a:p>
+            <a:r>
+              <a:rPr lang="en-US" sz="1380" dirty="0">
+                <a:solidFill>
+                  <a:srgbClr val="17364A"/>
+                </a:solidFill>
+                <a:latin typeface="Aptos" pitchFamily="34" charset="0"/>
+                <a:ea typeface="Aptos" pitchFamily="34" charset="-122"/>
+                <a:cs typeface="Aptos" pitchFamily="34" charset="-120"/>
+              </a:rPr>
+              <a:t>Agencies should measure whether the AI-supported workflow improves timeliness, access,.</a:t>
+            </a:r>
+            <a:endParaRPr lang="en-US" sz="1380" dirty="0"/>
+          </a:p>
+          <a:p>
+            <a:r>
+              <a:rPr lang="en-US" sz="1380" dirty="0">
+                <a:solidFill>
+                  <a:srgbClr val="17364A"/>
+                </a:solidFill>
+                <a:latin typeface="Aptos" pitchFamily="34" charset="0"/>
+                <a:ea typeface="Aptos" pitchFamily="34" charset="-122"/>
+                <a:cs typeface="Aptos" pitchFamily="34" charset="-120"/>
+              </a:rPr>
+              <a:t>They should also monitor unintended consequences, such as reduced service quality,.</a:t>
+            </a:r>
+            <a:endParaRPr lang="en-US" sz="1380" dirty="0"/>
+          </a:p>
+          <a:p>
+            <a:r>
+              <a:rPr lang="en-US" sz="1380" dirty="0">
+                <a:solidFill>
+                  <a:srgbClr val="17364A"/>
+                </a:solidFill>
+                <a:latin typeface="Aptos" pitchFamily="34" charset="0"/>
+                <a:ea typeface="Aptos" pitchFamily="34" charset="-122"/>
+                <a:cs typeface="Aptos" pitchFamily="34" charset="-120"/>
+              </a:rPr>
+              <a:t>Responsible innovation includes sunset and rollback planning.</a:t>
+            </a:r>
+            <a:endParaRPr lang="en-US" sz="1380" dirty="0"/>
+          </a:p>
+        </p:txBody>
       </p:sp>
       <p:sp>
         <p:nvSpPr>
           <p:cNvPr id="16" name="Shape 14"/>
-          <p:cNvSpPr/>
-          <p:nvPr/>
-        </p:nvSpPr>
-        <p:spPr>
-          <a:xfrm>
-            <a:off x="9198864" y="4206240"/>
-            <a:ext cx="347472" cy="347472"/>
-          </a:xfrm>
-          <a:prstGeom prst="ellipse">
-            <a:avLst/>
-          </a:prstGeom>
-          <a:solidFill>
-            <a:srgbClr val="2F8A28"/>
-          </a:solidFill>
-          <a:ln w="12700">
-            <a:solidFill>
-              <a:srgbClr val="2F8A28"/>
-            </a:solidFill>
-            <a:prstDash val="solid"/>
-          </a:ln>
-        </p:spPr>
-      </p:sp>
-      <p:sp>
-        <p:nvSpPr>
-          <p:cNvPr id="17" name="Text 15"/>
-          <p:cNvSpPr/>
-          <p:nvPr/>
-        </p:nvSpPr>
-        <p:spPr>
-          <a:xfrm>
-            <a:off x="7909560" y="3977640"/>
-            <a:ext cx="2926080" cy="182880"/>
-          </a:xfrm>
-          <a:prstGeom prst="rect">
-            <a:avLst/>
-          </a:prstGeom>
-          <a:noFill/>
-          <a:ln/>
-        </p:spPr>
-        <p:txBody>
-          <a:bodyPr wrap="square" lIns="0" tIns="0" rIns="0" bIns="0" rtlCol="0" anchor="ctr"/>
-          <a:lstStyle/>
-          <a:p>
-            <a:pPr algn="ctr" indent="0" marL="0">
-              <a:buNone/>
-            </a:pPr>
-            <a:r>
-              <a:rPr lang="en-US" sz="1000" dirty="0">
-                <a:solidFill>
-                  <a:srgbClr val="003A63"/>
-                </a:solidFill>
-                <a:latin typeface="Aptos" pitchFamily="34" charset="0"/>
-                <a:ea typeface="Aptos" pitchFamily="34" charset="-122"/>
-                <a:cs typeface="Aptos" pitchFamily="34" charset="-120"/>
-              </a:rPr>
-              <a:t>Concept to action</a:t>
-            </a:r>
-            <a:endParaRPr lang="en-US" sz="1000" dirty="0"/>
-          </a:p>
-        </p:txBody>
-      </p:sp>
-      <p:sp>
-        <p:nvSpPr>
-          <p:cNvPr id="18" name="Shape 16"/>
           <p:cNvSpPr/>
           <p:nvPr/>
         </p:nvSpPr>
@@ -4379,7 +4361,7 @@
       </p:sp>
       <p:sp>
         <p:nvSpPr>
-          <p:cNvPr id="19" name="Text 17"/>
+          <p:cNvPr id="17" name="Text 15"/>
           <p:cNvSpPr/>
           <p:nvPr/>
         </p:nvSpPr>
@@ -4418,7 +4400,7 @@
       </p:sp>
       <p:sp>
         <p:nvSpPr>
-          <p:cNvPr id="20" name="Text 18"/>
+          <p:cNvPr id="18" name="Text 16"/>
           <p:cNvSpPr/>
           <p:nvPr/>
         </p:nvSpPr>
@@ -4926,13 +4908,11 @@
             </a:avLst>
           </a:prstGeom>
           <a:solidFill>
-            <a:srgbClr val="FFFFFF">
-              <a:alpha val="88000"/>
-            </a:srgbClr>
+            <a:srgbClr val="FFFFFF"/>
           </a:solidFill>
           <a:ln w="12700">
             <a:solidFill>
-              <a:srgbClr val="D6E8F2"/>
+              <a:srgbClr val="B9D7E6"/>
             </a:solidFill>
             <a:prstDash val="solid"/>
           </a:ln>
@@ -4940,26 +4920,42 @@
       </p:sp>
       <p:sp>
         <p:nvSpPr>
-          <p:cNvPr id="14" name="Shape 12"/>
-          <p:cNvSpPr/>
-          <p:nvPr/>
-        </p:nvSpPr>
-        <p:spPr>
-          <a:xfrm>
-            <a:off x="8046720" y="3108960"/>
-            <a:ext cx="2651760" cy="896112"/>
-          </a:xfrm>
-          <a:prstGeom prst="arc">
-            <a:avLst/>
-          </a:prstGeom>
-          <a:noFill/>
-          <a:ln w="25400">
-            <a:solidFill>
-              <a:srgbClr val="0068B7"/>
-            </a:solidFill>
-            <a:prstDash val="solid"/>
-          </a:ln>
-        </p:spPr>
+          <p:cNvPr id="14" name="Text 12"/>
+          <p:cNvSpPr/>
+          <p:nvPr/>
+        </p:nvSpPr>
+        <p:spPr>
+          <a:xfrm>
+            <a:off x="7799832" y="2935224"/>
+            <a:ext cx="3145536" cy="256032"/>
+          </a:xfrm>
+          <a:prstGeom prst="rect">
+            <a:avLst/>
+          </a:prstGeom>
+          <a:noFill/>
+          <a:ln/>
+        </p:spPr>
+        <p:txBody>
+          <a:bodyPr wrap="square" lIns="0" tIns="0" rIns="0" bIns="0" rtlCol="0" anchor="ctr"/>
+          <a:lstStyle/>
+          <a:p>
+            <a:pPr indent="0" marL="0">
+              <a:buNone/>
+            </a:pPr>
+            <a:r>
+              <a:rPr lang="en-US" sz="1300" b="1" dirty="0">
+                <a:solidFill>
+                  <a:srgbClr val="0068B7"/>
+                </a:solidFill>
+                <a:latin typeface="Aptos" pitchFamily="34" charset="0"/>
+                <a:ea typeface="Aptos" pitchFamily="34" charset="-122"/>
+                <a:cs typeface="Aptos" pitchFamily="34" charset="-120"/>
+              </a:rPr>
+              <a:t>Concept checkpoints</a:t>
+            </a:r>
+            <a:endParaRPr lang="en-US" sz="1300" dirty="0"/>
+          </a:p>
+        </p:txBody>
       </p:sp>
       <p:sp>
         <p:nvSpPr>
@@ -4969,102 +4965,67 @@
         </p:nvSpPr>
         <p:spPr>
           <a:xfrm>
-            <a:off x="7909560" y="3099816"/>
-            <a:ext cx="2926080" cy="256032"/>
-          </a:xfrm>
-          <a:prstGeom prst="rect">
-            <a:avLst/>
-          </a:prstGeom>
-          <a:noFill/>
-          <a:ln/>
-        </p:spPr>
-        <p:txBody>
-          <a:bodyPr wrap="square" lIns="0" tIns="0" rIns="0" bIns="0" rtlCol="0" anchor="ctr"/>
-          <a:lstStyle/>
-          <a:p>
-            <a:pPr algn="ctr" indent="0" marL="0">
-              <a:buNone/>
-            </a:pPr>
-            <a:r>
-              <a:rPr lang="en-US" sz="1500" b="1" dirty="0">
-                <a:solidFill>
-                  <a:srgbClr val="003A63"/>
-                </a:solidFill>
-                <a:latin typeface="Aptos" pitchFamily="34" charset="0"/>
-                <a:ea typeface="Aptos" pitchFamily="34" charset="-122"/>
-                <a:cs typeface="Aptos" pitchFamily="34" charset="-120"/>
-              </a:rPr>
-              <a:t>Risk</a:t>
-            </a:r>
-            <a:endParaRPr lang="en-US" sz="1500" dirty="0"/>
+            <a:off x="7818120" y="3300984"/>
+            <a:ext cx="3090672" cy="877824"/>
+          </a:xfrm>
+          <a:prstGeom prst="rect">
+            <a:avLst/>
+          </a:prstGeom>
+          <a:noFill/>
+          <a:ln/>
+        </p:spPr>
+        <p:txBody>
+          <a:bodyPr wrap="square" lIns="254" tIns="254" rIns="254" bIns="254" rtlCol="0" anchor="t">
+            <a:normAutofit/>
+          </a:bodyPr>
+          <a:lstStyle/>
+          <a:p>
+            <a:r>
+              <a:rPr lang="en-US" sz="1380" dirty="0">
+                <a:solidFill>
+                  <a:srgbClr val="17364A"/>
+                </a:solidFill>
+                <a:latin typeface="Aptos" pitchFamily="34" charset="0"/>
+                <a:ea typeface="Aptos" pitchFamily="34" charset="-122"/>
+                <a:cs typeface="Aptos" pitchFamily="34" charset="-120"/>
+              </a:rPr>
+              <a:t>Unequal benefit.</a:t>
+            </a:r>
+            <a:endParaRPr lang="en-US" sz="1380" dirty="0"/>
+          </a:p>
+          <a:p>
+            <a:r>
+              <a:rPr lang="en-US" sz="1380" dirty="0">
+                <a:solidFill>
+                  <a:srgbClr val="17364A"/>
+                </a:solidFill>
+                <a:latin typeface="Aptos" pitchFamily="34" charset="0"/>
+                <a:ea typeface="Aptos" pitchFamily="34" charset="-122"/>
+                <a:cs typeface="Aptos" pitchFamily="34" charset="-120"/>
+              </a:rPr>
+              <a:t>AI may help people with strong digital access while excluding others.</a:t>
+            </a:r>
+            <a:endParaRPr lang="en-US" sz="1380" dirty="0"/>
+          </a:p>
+          <a:p>
+            <a:r>
+              <a:rPr lang="en-US" sz="1380" dirty="0">
+                <a:solidFill>
+                  <a:srgbClr val="17364A"/>
+                </a:solidFill>
+                <a:latin typeface="Aptos" pitchFamily="34" charset="0"/>
+                <a:ea typeface="Aptos" pitchFamily="34" charset="-122"/>
+                <a:cs typeface="Aptos" pitchFamily="34" charset="-120"/>
+              </a:rPr>
+              <a:t>Guardrails include language access, accessibility, offline options, and human fallback.</a:t>
+            </a:r>
+            <a:endParaRPr lang="en-US" sz="1380" dirty="0"/>
           </a:p>
         </p:txBody>
       </p:sp>
       <p:sp>
         <p:nvSpPr>
           <p:cNvPr id="16" name="Shape 14"/>
-          <p:cNvSpPr/>
-          <p:nvPr/>
-        </p:nvSpPr>
-        <p:spPr>
-          <a:xfrm>
-            <a:off x="8366760" y="3639312"/>
-            <a:ext cx="2011680" cy="0"/>
-          </a:xfrm>
-          <a:prstGeom prst="line">
-            <a:avLst/>
-          </a:prstGeom>
-          <a:noFill/>
-          <a:ln w="63500">
-            <a:solidFill>
-              <a:srgbClr val="2F8A28"/>
-            </a:solidFill>
-            <a:prstDash val="solid"/>
-          </a:ln>
-        </p:spPr>
-      </p:sp>
-      <p:sp>
-        <p:nvSpPr>
-          <p:cNvPr id="17" name="Text 15"/>
-          <p:cNvSpPr/>
-          <p:nvPr/>
-        </p:nvSpPr>
-        <p:spPr>
-          <a:xfrm>
-            <a:off x="7909560" y="3849624"/>
-            <a:ext cx="2926080" cy="164592"/>
-          </a:xfrm>
-          <a:prstGeom prst="rect">
-            <a:avLst/>
-          </a:prstGeom>
-          <a:noFill/>
-          <a:ln/>
-        </p:spPr>
-        <p:txBody>
-          <a:bodyPr wrap="square" lIns="0" tIns="0" rIns="0" bIns="0" rtlCol="0" anchor="ctr"/>
-          <a:lstStyle/>
-          <a:p>
-            <a:pPr algn="ctr" indent="0" marL="0">
-              <a:buNone/>
-            </a:pPr>
-            <a:r>
-              <a:rPr lang="en-US" sz="900" dirty="0">
-                <a:solidFill>
-                  <a:srgbClr val="003A63"/>
-                </a:solidFill>
-                <a:latin typeface="Aptos" pitchFamily="34" charset="0"/>
-                <a:ea typeface="Aptos" pitchFamily="34" charset="-122"/>
-                <a:cs typeface="Aptos" pitchFamily="34" charset="-120"/>
-              </a:rPr>
-              <a:t>Human review</a:t>
-            </a:r>
-            <a:endParaRPr lang="en-US" sz="900" dirty="0"/>
-          </a:p>
-        </p:txBody>
-      </p:sp>
-      <p:sp>
-        <p:nvSpPr>
-          <p:cNvPr id="18" name="Shape 16"/>
           <p:cNvSpPr/>
           <p:nvPr/>
         </p:nvSpPr>
@@ -5091,7 +5052,7 @@
       </p:sp>
       <p:sp>
         <p:nvSpPr>
-          <p:cNvPr id="19" name="Text 17"/>
+          <p:cNvPr id="17" name="Text 15"/>
           <p:cNvSpPr/>
           <p:nvPr/>
         </p:nvSpPr>
@@ -5130,7 +5091,7 @@
       </p:sp>
       <p:sp>
         <p:nvSpPr>
-          <p:cNvPr id="20" name="Text 18"/>
+          <p:cNvPr id="18" name="Text 16"/>
           <p:cNvSpPr/>
           <p:nvPr/>
         </p:nvSpPr>
@@ -5638,13 +5599,11 @@
             </a:avLst>
           </a:prstGeom>
           <a:solidFill>
-            <a:srgbClr val="FFFFFF">
-              <a:alpha val="88000"/>
-            </a:srgbClr>
+            <a:srgbClr val="FFFFFF"/>
           </a:solidFill>
           <a:ln w="12700">
             <a:solidFill>
-              <a:srgbClr val="D6E8F2"/>
+              <a:srgbClr val="B9D7E6"/>
             </a:solidFill>
             <a:prstDash val="solid"/>
           </a:ln>
@@ -5652,26 +5611,42 @@
       </p:sp>
       <p:sp>
         <p:nvSpPr>
-          <p:cNvPr id="14" name="Shape 12"/>
-          <p:cNvSpPr/>
-          <p:nvPr/>
-        </p:nvSpPr>
-        <p:spPr>
-          <a:xfrm>
-            <a:off x="8046720" y="3108960"/>
-            <a:ext cx="2651760" cy="896112"/>
-          </a:xfrm>
-          <a:prstGeom prst="arc">
-            <a:avLst/>
-          </a:prstGeom>
-          <a:noFill/>
-          <a:ln w="25400">
-            <a:solidFill>
-              <a:srgbClr val="0068B7"/>
-            </a:solidFill>
-            <a:prstDash val="solid"/>
-          </a:ln>
-        </p:spPr>
+          <p:cNvPr id="14" name="Text 12"/>
+          <p:cNvSpPr/>
+          <p:nvPr/>
+        </p:nvSpPr>
+        <p:spPr>
+          <a:xfrm>
+            <a:off x="7799832" y="2935224"/>
+            <a:ext cx="3145536" cy="256032"/>
+          </a:xfrm>
+          <a:prstGeom prst="rect">
+            <a:avLst/>
+          </a:prstGeom>
+          <a:noFill/>
+          <a:ln/>
+        </p:spPr>
+        <p:txBody>
+          <a:bodyPr wrap="square" lIns="0" tIns="0" rIns="0" bIns="0" rtlCol="0" anchor="ctr"/>
+          <a:lstStyle/>
+          <a:p>
+            <a:pPr indent="0" marL="0">
+              <a:buNone/>
+            </a:pPr>
+            <a:r>
+              <a:rPr lang="en-US" sz="1300" b="1" dirty="0">
+                <a:solidFill>
+                  <a:srgbClr val="0068B7"/>
+                </a:solidFill>
+                <a:latin typeface="Aptos" pitchFamily="34" charset="0"/>
+                <a:ea typeface="Aptos" pitchFamily="34" charset="-122"/>
+                <a:cs typeface="Aptos" pitchFamily="34" charset="-120"/>
+              </a:rPr>
+              <a:t>Concept checkpoints</a:t>
+            </a:r>
+            <a:endParaRPr lang="en-US" sz="1300" dirty="0"/>
+          </a:p>
+        </p:txBody>
       </p:sp>
       <p:sp>
         <p:nvSpPr>
@@ -5681,102 +5656,67 @@
         </p:nvSpPr>
         <p:spPr>
           <a:xfrm>
-            <a:off x="7909560" y="3099816"/>
-            <a:ext cx="2926080" cy="256032"/>
-          </a:xfrm>
-          <a:prstGeom prst="rect">
-            <a:avLst/>
-          </a:prstGeom>
-          <a:noFill/>
-          <a:ln/>
-        </p:spPr>
-        <p:txBody>
-          <a:bodyPr wrap="square" lIns="0" tIns="0" rIns="0" bIns="0" rtlCol="0" anchor="ctr"/>
-          <a:lstStyle/>
-          <a:p>
-            <a:pPr algn="ctr" indent="0" marL="0">
-              <a:buNone/>
-            </a:pPr>
-            <a:r>
-              <a:rPr lang="en-US" sz="1500" b="1" dirty="0">
-                <a:solidFill>
-                  <a:srgbClr val="003A63"/>
-                </a:solidFill>
-                <a:latin typeface="Aptos" pitchFamily="34" charset="0"/>
-                <a:ea typeface="Aptos" pitchFamily="34" charset="-122"/>
-                <a:cs typeface="Aptos" pitchFamily="34" charset="-120"/>
-              </a:rPr>
-              <a:t>Risk</a:t>
-            </a:r>
-            <a:endParaRPr lang="en-US" sz="1500" dirty="0"/>
+            <a:off x="7818120" y="3300984"/>
+            <a:ext cx="3090672" cy="877824"/>
+          </a:xfrm>
+          <a:prstGeom prst="rect">
+            <a:avLst/>
+          </a:prstGeom>
+          <a:noFill/>
+          <a:ln/>
+        </p:spPr>
+        <p:txBody>
+          <a:bodyPr wrap="square" lIns="254" tIns="254" rIns="254" bIns="254" rtlCol="0" anchor="t">
+            <a:normAutofit/>
+          </a:bodyPr>
+          <a:lstStyle/>
+          <a:p>
+            <a:r>
+              <a:rPr lang="en-US" sz="1380" dirty="0">
+                <a:solidFill>
+                  <a:srgbClr val="17364A"/>
+                </a:solidFill>
+                <a:latin typeface="Aptos" pitchFamily="34" charset="0"/>
+                <a:ea typeface="Aptos" pitchFamily="34" charset="-122"/>
+                <a:cs typeface="Aptos" pitchFamily="34" charset="-120"/>
+              </a:rPr>
+              <a:t>Resource diversion.</a:t>
+            </a:r>
+            <a:endParaRPr lang="en-US" sz="1380" dirty="0"/>
+          </a:p>
+          <a:p>
+            <a:r>
+              <a:rPr lang="en-US" sz="1380" dirty="0">
+                <a:solidFill>
+                  <a:srgbClr val="17364A"/>
+                </a:solidFill>
+                <a:latin typeface="Aptos" pitchFamily="34" charset="0"/>
+                <a:ea typeface="Aptos" pitchFamily="34" charset="-122"/>
+                <a:cs typeface="Aptos" pitchFamily="34" charset="-120"/>
+              </a:rPr>
+              <a:t>AI projects may consume resources that could be used for more effective interventions.</a:t>
+            </a:r>
+            <a:endParaRPr lang="en-US" sz="1380" dirty="0"/>
+          </a:p>
+          <a:p>
+            <a:r>
+              <a:rPr lang="en-US" sz="1380" dirty="0">
+                <a:solidFill>
+                  <a:srgbClr val="17364A"/>
+                </a:solidFill>
+                <a:latin typeface="Aptos" pitchFamily="34" charset="0"/>
+                <a:ea typeface="Aptos" pitchFamily="34" charset="-122"/>
+                <a:cs typeface="Aptos" pitchFamily="34" charset="-120"/>
+              </a:rPr>
+              <a:t>Guardrails include impact measurement, cost-benefit review, and periodic reassessment.</a:t>
+            </a:r>
+            <a:endParaRPr lang="en-US" sz="1380" dirty="0"/>
           </a:p>
         </p:txBody>
       </p:sp>
       <p:sp>
         <p:nvSpPr>
           <p:cNvPr id="16" name="Shape 14"/>
-          <p:cNvSpPr/>
-          <p:nvPr/>
-        </p:nvSpPr>
-        <p:spPr>
-          <a:xfrm>
-            <a:off x="8366760" y="3639312"/>
-            <a:ext cx="2011680" cy="0"/>
-          </a:xfrm>
-          <a:prstGeom prst="line">
-            <a:avLst/>
-          </a:prstGeom>
-          <a:noFill/>
-          <a:ln w="63500">
-            <a:solidFill>
-              <a:srgbClr val="2F8A28"/>
-            </a:solidFill>
-            <a:prstDash val="solid"/>
-          </a:ln>
-        </p:spPr>
-      </p:sp>
-      <p:sp>
-        <p:nvSpPr>
-          <p:cNvPr id="17" name="Text 15"/>
-          <p:cNvSpPr/>
-          <p:nvPr/>
-        </p:nvSpPr>
-        <p:spPr>
-          <a:xfrm>
-            <a:off x="7909560" y="3849624"/>
-            <a:ext cx="2926080" cy="164592"/>
-          </a:xfrm>
-          <a:prstGeom prst="rect">
-            <a:avLst/>
-          </a:prstGeom>
-          <a:noFill/>
-          <a:ln/>
-        </p:spPr>
-        <p:txBody>
-          <a:bodyPr wrap="square" lIns="0" tIns="0" rIns="0" bIns="0" rtlCol="0" anchor="ctr"/>
-          <a:lstStyle/>
-          <a:p>
-            <a:pPr algn="ctr" indent="0" marL="0">
-              <a:buNone/>
-            </a:pPr>
-            <a:r>
-              <a:rPr lang="en-US" sz="900" dirty="0">
-                <a:solidFill>
-                  <a:srgbClr val="003A63"/>
-                </a:solidFill>
-                <a:latin typeface="Aptos" pitchFamily="34" charset="0"/>
-                <a:ea typeface="Aptos" pitchFamily="34" charset="-122"/>
-                <a:cs typeface="Aptos" pitchFamily="34" charset="-120"/>
-              </a:rPr>
-              <a:t>Human review</a:t>
-            </a:r>
-            <a:endParaRPr lang="en-US" sz="900" dirty="0"/>
-          </a:p>
-        </p:txBody>
-      </p:sp>
-      <p:sp>
-        <p:nvSpPr>
-          <p:cNvPr id="18" name="Shape 16"/>
           <p:cNvSpPr/>
           <p:nvPr/>
         </p:nvSpPr>
@@ -5803,7 +5743,7 @@
       </p:sp>
       <p:sp>
         <p:nvSpPr>
-          <p:cNvPr id="19" name="Text 17"/>
+          <p:cNvPr id="17" name="Text 15"/>
           <p:cNvSpPr/>
           <p:nvPr/>
         </p:nvSpPr>
@@ -5842,7 +5782,7 @@
       </p:sp>
       <p:sp>
         <p:nvSpPr>
-          <p:cNvPr id="20" name="Text 18"/>
+          <p:cNvPr id="18" name="Text 16"/>
           <p:cNvSpPr/>
           <p:nvPr/>
         </p:nvSpPr>
@@ -6350,13 +6290,11 @@
             </a:avLst>
           </a:prstGeom>
           <a:solidFill>
-            <a:srgbClr val="FFFFFF">
-              <a:alpha val="88000"/>
-            </a:srgbClr>
+            <a:srgbClr val="FFFFFF"/>
           </a:solidFill>
           <a:ln w="12700">
             <a:solidFill>
-              <a:srgbClr val="D6E8F2"/>
+              <a:srgbClr val="B9D7E6"/>
             </a:solidFill>
             <a:prstDash val="solid"/>
           </a:ln>
@@ -6364,30 +6302,42 @@
       </p:sp>
       <p:sp>
         <p:nvSpPr>
-          <p:cNvPr id="14" name="Shape 12"/>
-          <p:cNvSpPr/>
-          <p:nvPr/>
-        </p:nvSpPr>
-        <p:spPr>
-          <a:xfrm>
-            <a:off x="7927848" y="3319272"/>
-            <a:ext cx="792480" cy="749808"/>
-          </a:xfrm>
-          <a:prstGeom prst="roundRect">
-            <a:avLst>
-              <a:gd name="adj" fmla="val 14634"/>
-            </a:avLst>
-          </a:prstGeom>
-          <a:solidFill>
-            <a:srgbClr val="0068B7"/>
-          </a:solidFill>
-          <a:ln w="12700">
-            <a:solidFill>
-              <a:srgbClr val="0068B7"/>
-            </a:solidFill>
-            <a:prstDash val="solid"/>
-          </a:ln>
-        </p:spPr>
+          <p:cNvPr id="14" name="Text 12"/>
+          <p:cNvSpPr/>
+          <p:nvPr/>
+        </p:nvSpPr>
+        <p:spPr>
+          <a:xfrm>
+            <a:off x="7799832" y="2935224"/>
+            <a:ext cx="3145536" cy="256032"/>
+          </a:xfrm>
+          <a:prstGeom prst="rect">
+            <a:avLst/>
+          </a:prstGeom>
+          <a:noFill/>
+          <a:ln/>
+        </p:spPr>
+        <p:txBody>
+          <a:bodyPr wrap="square" lIns="0" tIns="0" rIns="0" bIns="0" rtlCol="0" anchor="ctr"/>
+          <a:lstStyle/>
+          <a:p>
+            <a:pPr indent="0" marL="0">
+              <a:buNone/>
+            </a:pPr>
+            <a:r>
+              <a:rPr lang="en-US" sz="1300" b="1" dirty="0">
+                <a:solidFill>
+                  <a:srgbClr val="0068B7"/>
+                </a:solidFill>
+                <a:latin typeface="Aptos" pitchFamily="34" charset="0"/>
+                <a:ea typeface="Aptos" pitchFamily="34" charset="-122"/>
+                <a:cs typeface="Aptos" pitchFamily="34" charset="-120"/>
+              </a:rPr>
+              <a:t>Concept checkpoints</a:t>
+            </a:r>
+            <a:endParaRPr lang="en-US" sz="1300" dirty="0"/>
+          </a:p>
+        </p:txBody>
       </p:sp>
       <p:sp>
         <p:nvSpPr>
@@ -6397,240 +6347,67 @@
         </p:nvSpPr>
         <p:spPr>
           <a:xfrm>
-            <a:off x="8001000" y="3511296"/>
-            <a:ext cx="646176" cy="310896"/>
-          </a:xfrm>
-          <a:prstGeom prst="rect">
-            <a:avLst/>
-          </a:prstGeom>
-          <a:noFill/>
-          <a:ln/>
-        </p:spPr>
-        <p:txBody>
-          <a:bodyPr wrap="square" lIns="0" tIns="0" rIns="0" bIns="0" rtlCol="0" anchor="ctr">
+            <a:off x="7818120" y="3300984"/>
+            <a:ext cx="3090672" cy="877824"/>
+          </a:xfrm>
+          <a:prstGeom prst="rect">
+            <a:avLst/>
+          </a:prstGeom>
+          <a:noFill/>
+          <a:ln/>
+        </p:spPr>
+        <p:txBody>
+          <a:bodyPr wrap="square" lIns="254" tIns="254" rIns="254" bIns="254" rtlCol="0" anchor="t">
             <a:normAutofit/>
           </a:bodyPr>
           <a:lstStyle/>
           <a:p>
-            <a:pPr algn="ctr" indent="0" marL="0">
-              <a:buNone/>
-            </a:pPr>
-            <a:r>
-              <a:rPr lang="en-US" sz="1500" b="1" dirty="0">
-                <a:solidFill>
-                  <a:srgbClr val="FFFFFF"/>
-                </a:solidFill>
-                <a:latin typeface="Aptos" pitchFamily="34" charset="0"/>
-                <a:ea typeface="Aptos" pitchFamily="34" charset="-122"/>
-                <a:cs typeface="Aptos" pitchFamily="34" charset="-120"/>
-              </a:rPr>
-              <a:t>Plan</a:t>
-            </a:r>
-            <a:endParaRPr lang="en-US" sz="1500" dirty="0"/>
+            <a:r>
+              <a:rPr lang="en-US" sz="1380" dirty="0">
+                <a:solidFill>
+                  <a:srgbClr val="17364A"/>
+                </a:solidFill>
+                <a:latin typeface="Aptos" pitchFamily="34" charset="0"/>
+                <a:ea typeface="Aptos" pitchFamily="34" charset="-122"/>
+                <a:cs typeface="Aptos" pitchFamily="34" charset="-120"/>
+              </a:rPr>
+              <a:t>Generative AI may improve plain-language communication, but it must be accurate,.</a:t>
+            </a:r>
+            <a:endParaRPr lang="en-US" sz="1380" dirty="0"/>
+          </a:p>
+          <a:p>
+            <a:r>
+              <a:rPr lang="en-US" sz="1380" dirty="0">
+                <a:solidFill>
+                  <a:srgbClr val="17364A"/>
+                </a:solidFill>
+                <a:latin typeface="Aptos" pitchFamily="34" charset="0"/>
+                <a:ea typeface="Aptos" pitchFamily="34" charset="-122"/>
+                <a:cs typeface="Aptos" pitchFamily="34" charset="-120"/>
+              </a:rPr>
+              <a:t>RAG systems may improve staff access to guidance, but they must include current and.</a:t>
+            </a:r>
+            <a:endParaRPr lang="en-US" sz="1380" dirty="0"/>
+          </a:p>
+          <a:p>
+            <a:r>
+              <a:rPr lang="en-US" sz="1380" dirty="0">
+                <a:solidFill>
+                  <a:srgbClr val="17364A"/>
+                </a:solidFill>
+                <a:latin typeface="Aptos" pitchFamily="34" charset="0"/>
+                <a:ea typeface="Aptos" pitchFamily="34" charset="-122"/>
+                <a:cs typeface="Aptos" pitchFamily="34" charset="-120"/>
+              </a:rPr>
+              <a:t>Agentic workflows may reduce burden, but they require boundaries and human accountability.</a:t>
+            </a:r>
+            <a:endParaRPr lang="en-US" sz="1380" dirty="0"/>
           </a:p>
         </p:txBody>
       </p:sp>
       <p:sp>
         <p:nvSpPr>
           <p:cNvPr id="16" name="Shape 14"/>
-          <p:cNvSpPr/>
-          <p:nvPr/>
-        </p:nvSpPr>
-        <p:spPr>
-          <a:xfrm>
-            <a:off x="8976360" y="3319272"/>
-            <a:ext cx="792480" cy="749808"/>
-          </a:xfrm>
-          <a:prstGeom prst="roundRect">
-            <a:avLst>
-              <a:gd name="adj" fmla="val 14634"/>
-            </a:avLst>
-          </a:prstGeom>
-          <a:solidFill>
-            <a:srgbClr val="2F8A28"/>
-          </a:solidFill>
-          <a:ln w="12700">
-            <a:solidFill>
-              <a:srgbClr val="2F8A28"/>
-            </a:solidFill>
-            <a:prstDash val="solid"/>
-          </a:ln>
-        </p:spPr>
-      </p:sp>
-      <p:sp>
-        <p:nvSpPr>
-          <p:cNvPr id="17" name="Text 15"/>
-          <p:cNvSpPr/>
-          <p:nvPr/>
-        </p:nvSpPr>
-        <p:spPr>
-          <a:xfrm>
-            <a:off x="9049512" y="3511296"/>
-            <a:ext cx="646176" cy="310896"/>
-          </a:xfrm>
-          <a:prstGeom prst="rect">
-            <a:avLst/>
-          </a:prstGeom>
-          <a:noFill/>
-          <a:ln/>
-        </p:spPr>
-        <p:txBody>
-          <a:bodyPr wrap="square" lIns="0" tIns="0" rIns="0" bIns="0" rtlCol="0" anchor="ctr">
-            <a:normAutofit/>
-          </a:bodyPr>
-          <a:lstStyle/>
-          <a:p>
-            <a:pPr algn="ctr" indent="0" marL="0">
-              <a:buNone/>
-            </a:pPr>
-            <a:r>
-              <a:rPr lang="en-US" sz="1500" b="1" dirty="0">
-                <a:solidFill>
-                  <a:srgbClr val="FFFFFF"/>
-                </a:solidFill>
-                <a:latin typeface="Aptos" pitchFamily="34" charset="0"/>
-                <a:ea typeface="Aptos" pitchFamily="34" charset="-122"/>
-                <a:cs typeface="Aptos" pitchFamily="34" charset="-120"/>
-              </a:rPr>
-              <a:t>Do</a:t>
-            </a:r>
-            <a:endParaRPr lang="en-US" sz="1500" dirty="0"/>
-          </a:p>
-        </p:txBody>
-      </p:sp>
-      <p:sp>
-        <p:nvSpPr>
-          <p:cNvPr id="18" name="Shape 16"/>
-          <p:cNvSpPr/>
-          <p:nvPr/>
-        </p:nvSpPr>
-        <p:spPr>
-          <a:xfrm>
-            <a:off x="10024872" y="3319272"/>
-            <a:ext cx="792480" cy="749808"/>
-          </a:xfrm>
-          <a:prstGeom prst="roundRect">
-            <a:avLst>
-              <a:gd name="adj" fmla="val 14634"/>
-            </a:avLst>
-          </a:prstGeom>
-          <a:solidFill>
-            <a:srgbClr val="D69A2D"/>
-          </a:solidFill>
-          <a:ln w="12700">
-            <a:solidFill>
-              <a:srgbClr val="D69A2D"/>
-            </a:solidFill>
-            <a:prstDash val="solid"/>
-          </a:ln>
-        </p:spPr>
-      </p:sp>
-      <p:sp>
-        <p:nvSpPr>
-          <p:cNvPr id="19" name="Text 17"/>
-          <p:cNvSpPr/>
-          <p:nvPr/>
-        </p:nvSpPr>
-        <p:spPr>
-          <a:xfrm>
-            <a:off x="10098024" y="3511296"/>
-            <a:ext cx="646176" cy="310896"/>
-          </a:xfrm>
-          <a:prstGeom prst="rect">
-            <a:avLst/>
-          </a:prstGeom>
-          <a:noFill/>
-          <a:ln/>
-        </p:spPr>
-        <p:txBody>
-          <a:bodyPr wrap="square" lIns="0" tIns="0" rIns="0" bIns="0" rtlCol="0" anchor="ctr">
-            <a:normAutofit/>
-          </a:bodyPr>
-          <a:lstStyle/>
-          <a:p>
-            <a:pPr algn="ctr" indent="0" marL="0">
-              <a:buNone/>
-            </a:pPr>
-            <a:r>
-              <a:rPr lang="en-US" sz="1500" b="1" dirty="0">
-                <a:solidFill>
-                  <a:srgbClr val="FFFFFF"/>
-                </a:solidFill>
-                <a:latin typeface="Aptos" pitchFamily="34" charset="0"/>
-                <a:ea typeface="Aptos" pitchFamily="34" charset="-122"/>
-                <a:cs typeface="Aptos" pitchFamily="34" charset="-120"/>
-              </a:rPr>
-              <a:t>Review</a:t>
-            </a:r>
-            <a:endParaRPr lang="en-US" sz="1500" dirty="0"/>
-          </a:p>
-        </p:txBody>
-      </p:sp>
-      <p:sp>
-        <p:nvSpPr>
-          <p:cNvPr id="20" name="Shape 18"/>
-          <p:cNvSpPr/>
-          <p:nvPr/>
-        </p:nvSpPr>
-        <p:spPr>
-          <a:xfrm>
-            <a:off x="8293608" y="4389120"/>
-            <a:ext cx="2157984" cy="0"/>
-          </a:xfrm>
-          <a:prstGeom prst="line">
-            <a:avLst/>
-          </a:prstGeom>
-          <a:noFill/>
-          <a:ln w="25400">
-            <a:solidFill>
-              <a:srgbClr val="8ABBD8"/>
-            </a:solidFill>
-            <a:prstDash val="solid"/>
-          </a:ln>
-        </p:spPr>
-      </p:sp>
-      <p:sp>
-        <p:nvSpPr>
-          <p:cNvPr id="21" name="Text 19"/>
-          <p:cNvSpPr/>
-          <p:nvPr/>
-        </p:nvSpPr>
-        <p:spPr>
-          <a:xfrm>
-            <a:off x="7909560" y="3977640"/>
-            <a:ext cx="2926080" cy="182880"/>
-          </a:xfrm>
-          <a:prstGeom prst="rect">
-            <a:avLst/>
-          </a:prstGeom>
-          <a:noFill/>
-          <a:ln/>
-        </p:spPr>
-        <p:txBody>
-          <a:bodyPr wrap="square" lIns="0" tIns="0" rIns="0" bIns="0" rtlCol="0" anchor="ctr"/>
-          <a:lstStyle/>
-          <a:p>
-            <a:pPr algn="ctr" indent="0" marL="0">
-              <a:buNone/>
-            </a:pPr>
-            <a:r>
-              <a:rPr lang="en-US" sz="1000" dirty="0">
-                <a:solidFill>
-                  <a:srgbClr val="003A63"/>
-                </a:solidFill>
-                <a:latin typeface="Aptos" pitchFamily="34" charset="0"/>
-                <a:ea typeface="Aptos" pitchFamily="34" charset="-122"/>
-                <a:cs typeface="Aptos" pitchFamily="34" charset="-120"/>
-              </a:rPr>
-              <a:t>Dependencies visible</a:t>
-            </a:r>
-            <a:endParaRPr lang="en-US" sz="1000" dirty="0"/>
-          </a:p>
-        </p:txBody>
-      </p:sp>
-      <p:sp>
-        <p:nvSpPr>
-          <p:cNvPr id="22" name="Shape 20"/>
           <p:cNvSpPr/>
           <p:nvPr/>
         </p:nvSpPr>
@@ -6657,7 +6434,7 @@
       </p:sp>
       <p:sp>
         <p:nvSpPr>
-          <p:cNvPr id="23" name="Text 21"/>
+          <p:cNvPr id="17" name="Text 15"/>
           <p:cNvSpPr/>
           <p:nvPr/>
         </p:nvSpPr>
@@ -6696,7 +6473,7 @@
       </p:sp>
       <p:sp>
         <p:nvSpPr>
-          <p:cNvPr id="24" name="Text 22"/>
+          <p:cNvPr id="18" name="Text 16"/>
           <p:cNvSpPr/>
           <p:nvPr/>
         </p:nvSpPr>
@@ -7204,13 +6981,11 @@
             </a:avLst>
           </a:prstGeom>
           <a:solidFill>
-            <a:srgbClr val="FFFFFF">
-              <a:alpha val="88000"/>
-            </a:srgbClr>
+            <a:srgbClr val="FFFFFF"/>
           </a:solidFill>
           <a:ln w="12700">
             <a:solidFill>
-              <a:srgbClr val="D6E8F2"/>
+              <a:srgbClr val="B9D7E6"/>
             </a:solidFill>
             <a:prstDash val="solid"/>
           </a:ln>
@@ -7218,119 +6993,112 @@
       </p:sp>
       <p:sp>
         <p:nvSpPr>
-          <p:cNvPr id="14" name="Shape 12"/>
-          <p:cNvSpPr/>
-          <p:nvPr/>
-        </p:nvSpPr>
-        <p:spPr>
-          <a:xfrm>
-            <a:off x="8074152" y="3291840"/>
-            <a:ext cx="2596896" cy="749808"/>
-          </a:xfrm>
-          <a:prstGeom prst="rect">
-            <a:avLst/>
-          </a:prstGeom>
-          <a:solidFill>
-            <a:srgbClr val="EAF6F8"/>
-          </a:solidFill>
-          <a:ln w="12700">
-            <a:solidFill>
-              <a:srgbClr val="8ABBD8"/>
-            </a:solidFill>
-            <a:prstDash val="solid"/>
-          </a:ln>
-        </p:spPr>
-      </p:sp>
-      <p:sp>
-        <p:nvSpPr>
-          <p:cNvPr id="15" name="Shape 13"/>
-          <p:cNvSpPr/>
-          <p:nvPr/>
-        </p:nvSpPr>
-        <p:spPr>
-          <a:xfrm>
-            <a:off x="8202168" y="3721608"/>
-            <a:ext cx="2340864" cy="0"/>
-          </a:xfrm>
-          <a:prstGeom prst="line">
-            <a:avLst/>
-          </a:prstGeom>
-          <a:noFill/>
-          <a:ln w="19050">
-            <a:solidFill>
-              <a:srgbClr val="0068B7"/>
-            </a:solidFill>
-            <a:prstDash val="solid"/>
-          </a:ln>
-        </p:spPr>
+          <p:cNvPr id="14" name="Text 12"/>
+          <p:cNvSpPr/>
+          <p:nvPr/>
+        </p:nvSpPr>
+        <p:spPr>
+          <a:xfrm>
+            <a:off x="7799832" y="2935224"/>
+            <a:ext cx="3145536" cy="256032"/>
+          </a:xfrm>
+          <a:prstGeom prst="rect">
+            <a:avLst/>
+          </a:prstGeom>
+          <a:noFill/>
+          <a:ln/>
+        </p:spPr>
+        <p:txBody>
+          <a:bodyPr wrap="square" lIns="0" tIns="0" rIns="0" bIns="0" rtlCol="0" anchor="ctr"/>
+          <a:lstStyle/>
+          <a:p>
+            <a:pPr indent="0" marL="0">
+              <a:buNone/>
+            </a:pPr>
+            <a:r>
+              <a:rPr lang="en-US" sz="1300" b="1" dirty="0">
+                <a:solidFill>
+                  <a:srgbClr val="0068B7"/>
+                </a:solidFill>
+                <a:latin typeface="Aptos" pitchFamily="34" charset="0"/>
+                <a:ea typeface="Aptos" pitchFamily="34" charset="-122"/>
+                <a:cs typeface="Aptos" pitchFamily="34" charset="-120"/>
+              </a:rPr>
+              <a:t>Concept checkpoints</a:t>
+            </a:r>
+            <a:endParaRPr lang="en-US" sz="1300" dirty="0"/>
+          </a:p>
+        </p:txBody>
+      </p:sp>
+      <p:sp>
+        <p:nvSpPr>
+          <p:cNvPr id="15" name="Text 13"/>
+          <p:cNvSpPr/>
+          <p:nvPr/>
+        </p:nvSpPr>
+        <p:spPr>
+          <a:xfrm>
+            <a:off x="7818120" y="3300984"/>
+            <a:ext cx="3090672" cy="877824"/>
+          </a:xfrm>
+          <a:prstGeom prst="rect">
+            <a:avLst/>
+          </a:prstGeom>
+          <a:noFill/>
+          <a:ln/>
+        </p:spPr>
+        <p:txBody>
+          <a:bodyPr wrap="square" lIns="254" tIns="254" rIns="254" bIns="254" rtlCol="0" anchor="t">
+            <a:normAutofit/>
+          </a:bodyPr>
+          <a:lstStyle/>
+          <a:p>
+            <a:r>
+              <a:rPr lang="en-US" sz="1380" dirty="0">
+                <a:solidFill>
+                  <a:srgbClr val="17364A"/>
+                </a:solidFill>
+                <a:latin typeface="Aptos" pitchFamily="34" charset="0"/>
+                <a:ea typeface="Aptos" pitchFamily="34" charset="-122"/>
+                <a:cs typeface="Aptos" pitchFamily="34" charset="-120"/>
+              </a:rPr>
+              <a:t>What public health problem would this AI use address?</a:t>
+            </a:r>
+            <a:endParaRPr lang="en-US" sz="1380" dirty="0"/>
+          </a:p>
+          <a:p>
+            <a:r>
+              <a:rPr lang="en-US" sz="1380" dirty="0">
+                <a:solidFill>
+                  <a:srgbClr val="17364A"/>
+                </a:solidFill>
+                <a:latin typeface="Aptos" pitchFamily="34" charset="0"/>
+                <a:ea typeface="Aptos" pitchFamily="34" charset="-122"/>
+                <a:cs typeface="Aptos" pitchFamily="34" charset="-120"/>
+              </a:rPr>
+              <a:t>Who would benefit, and who could be excluded or harmed?</a:t>
+            </a:r>
+            <a:endParaRPr lang="en-US" sz="1380" dirty="0"/>
+          </a:p>
+          <a:p>
+            <a:r>
+              <a:rPr lang="en-US" sz="1380" dirty="0">
+                <a:solidFill>
+                  <a:srgbClr val="17364A"/>
+                </a:solidFill>
+                <a:latin typeface="Aptos" pitchFamily="34" charset="0"/>
+                <a:ea typeface="Aptos" pitchFamily="34" charset="-122"/>
+                <a:cs typeface="Aptos" pitchFamily="34" charset="-120"/>
+              </a:rPr>
+              <a:t>How were affected communities involved in defining the need and safeguards?</a:t>
+            </a:r>
+            <a:endParaRPr lang="en-US" sz="1380" dirty="0"/>
+          </a:p>
+        </p:txBody>
       </p:sp>
       <p:sp>
         <p:nvSpPr>
           <p:cNvPr id="16" name="Shape 14"/>
-          <p:cNvSpPr/>
-          <p:nvPr/>
-        </p:nvSpPr>
-        <p:spPr>
-          <a:xfrm>
-            <a:off x="9198864" y="4206240"/>
-            <a:ext cx="347472" cy="347472"/>
-          </a:xfrm>
-          <a:prstGeom prst="ellipse">
-            <a:avLst/>
-          </a:prstGeom>
-          <a:solidFill>
-            <a:srgbClr val="2F8A28"/>
-          </a:solidFill>
-          <a:ln w="12700">
-            <a:solidFill>
-              <a:srgbClr val="2F8A28"/>
-            </a:solidFill>
-            <a:prstDash val="solid"/>
-          </a:ln>
-        </p:spPr>
-      </p:sp>
-      <p:sp>
-        <p:nvSpPr>
-          <p:cNvPr id="17" name="Text 15"/>
-          <p:cNvSpPr/>
-          <p:nvPr/>
-        </p:nvSpPr>
-        <p:spPr>
-          <a:xfrm>
-            <a:off x="7909560" y="3977640"/>
-            <a:ext cx="2926080" cy="182880"/>
-          </a:xfrm>
-          <a:prstGeom prst="rect">
-            <a:avLst/>
-          </a:prstGeom>
-          <a:noFill/>
-          <a:ln/>
-        </p:spPr>
-        <p:txBody>
-          <a:bodyPr wrap="square" lIns="0" tIns="0" rIns="0" bIns="0" rtlCol="0" anchor="ctr"/>
-          <a:lstStyle/>
-          <a:p>
-            <a:pPr algn="ctr" indent="0" marL="0">
-              <a:buNone/>
-            </a:pPr>
-            <a:r>
-              <a:rPr lang="en-US" sz="1000" dirty="0">
-                <a:solidFill>
-                  <a:srgbClr val="003A63"/>
-                </a:solidFill>
-                <a:latin typeface="Aptos" pitchFamily="34" charset="0"/>
-                <a:ea typeface="Aptos" pitchFamily="34" charset="-122"/>
-                <a:cs typeface="Aptos" pitchFamily="34" charset="-120"/>
-              </a:rPr>
-              <a:t>Concept to action</a:t>
-            </a:r>
-            <a:endParaRPr lang="en-US" sz="1000" dirty="0"/>
-          </a:p>
-        </p:txBody>
-      </p:sp>
-      <p:sp>
-        <p:nvSpPr>
-          <p:cNvPr id="18" name="Shape 16"/>
           <p:cNvSpPr/>
           <p:nvPr/>
         </p:nvSpPr>
@@ -7357,7 +7125,7 @@
       </p:sp>
       <p:sp>
         <p:nvSpPr>
-          <p:cNvPr id="19" name="Text 17"/>
+          <p:cNvPr id="17" name="Text 15"/>
           <p:cNvSpPr/>
           <p:nvPr/>
         </p:nvSpPr>
@@ -7396,7 +7164,7 @@
       </p:sp>
       <p:sp>
         <p:nvSpPr>
-          <p:cNvPr id="20" name="Text 18"/>
+          <p:cNvPr id="18" name="Text 16"/>
           <p:cNvSpPr/>
           <p:nvPr/>
         </p:nvSpPr>
@@ -7890,13 +7658,11 @@
             </a:avLst>
           </a:prstGeom>
           <a:solidFill>
-            <a:srgbClr val="FFFFFF">
-              <a:alpha val="88000"/>
-            </a:srgbClr>
+            <a:srgbClr val="FFFFFF"/>
           </a:solidFill>
           <a:ln w="12700">
             <a:solidFill>
-              <a:srgbClr val="D6E8F2"/>
+              <a:srgbClr val="B9D7E6"/>
             </a:solidFill>
             <a:prstDash val="solid"/>
           </a:ln>
@@ -7904,119 +7670,98 @@
       </p:sp>
       <p:sp>
         <p:nvSpPr>
-          <p:cNvPr id="14" name="Shape 12"/>
-          <p:cNvSpPr/>
-          <p:nvPr/>
-        </p:nvSpPr>
-        <p:spPr>
-          <a:xfrm>
-            <a:off x="8074152" y="3291840"/>
-            <a:ext cx="2596896" cy="749808"/>
-          </a:xfrm>
-          <a:prstGeom prst="rect">
-            <a:avLst/>
-          </a:prstGeom>
-          <a:solidFill>
-            <a:srgbClr val="EAF6F8"/>
-          </a:solidFill>
-          <a:ln w="12700">
-            <a:solidFill>
-              <a:srgbClr val="8ABBD8"/>
-            </a:solidFill>
-            <a:prstDash val="solid"/>
-          </a:ln>
-        </p:spPr>
-      </p:sp>
-      <p:sp>
-        <p:nvSpPr>
-          <p:cNvPr id="15" name="Shape 13"/>
-          <p:cNvSpPr/>
-          <p:nvPr/>
-        </p:nvSpPr>
-        <p:spPr>
-          <a:xfrm>
-            <a:off x="8202168" y="3721608"/>
-            <a:ext cx="2340864" cy="0"/>
-          </a:xfrm>
-          <a:prstGeom prst="line">
-            <a:avLst/>
-          </a:prstGeom>
-          <a:noFill/>
-          <a:ln w="19050">
-            <a:solidFill>
-              <a:srgbClr val="0068B7"/>
-            </a:solidFill>
-            <a:prstDash val="solid"/>
-          </a:ln>
-        </p:spPr>
+          <p:cNvPr id="14" name="Text 12"/>
+          <p:cNvSpPr/>
+          <p:nvPr/>
+        </p:nvSpPr>
+        <p:spPr>
+          <a:xfrm>
+            <a:off x="7799832" y="2935224"/>
+            <a:ext cx="3145536" cy="256032"/>
+          </a:xfrm>
+          <a:prstGeom prst="rect">
+            <a:avLst/>
+          </a:prstGeom>
+          <a:noFill/>
+          <a:ln/>
+        </p:spPr>
+        <p:txBody>
+          <a:bodyPr wrap="square" lIns="0" tIns="0" rIns="0" bIns="0" rtlCol="0" anchor="ctr"/>
+          <a:lstStyle/>
+          <a:p>
+            <a:pPr indent="0" marL="0">
+              <a:buNone/>
+            </a:pPr>
+            <a:r>
+              <a:rPr lang="en-US" sz="1300" b="1" dirty="0">
+                <a:solidFill>
+                  <a:srgbClr val="0068B7"/>
+                </a:solidFill>
+                <a:latin typeface="Aptos" pitchFamily="34" charset="0"/>
+                <a:ea typeface="Aptos" pitchFamily="34" charset="-122"/>
+                <a:cs typeface="Aptos" pitchFamily="34" charset="-120"/>
+              </a:rPr>
+              <a:t>Concept checkpoints</a:t>
+            </a:r>
+            <a:endParaRPr lang="en-US" sz="1300" dirty="0"/>
+          </a:p>
+        </p:txBody>
+      </p:sp>
+      <p:sp>
+        <p:nvSpPr>
+          <p:cNvPr id="15" name="Text 13"/>
+          <p:cNvSpPr/>
+          <p:nvPr/>
+        </p:nvSpPr>
+        <p:spPr>
+          <a:xfrm>
+            <a:off x="7818120" y="3300984"/>
+            <a:ext cx="3090672" cy="877824"/>
+          </a:xfrm>
+          <a:prstGeom prst="rect">
+            <a:avLst/>
+          </a:prstGeom>
+          <a:noFill/>
+          <a:ln/>
+        </p:spPr>
+        <p:txBody>
+          <a:bodyPr wrap="square" lIns="254" tIns="254" rIns="254" bIns="254" rtlCol="0" anchor="t">
+            <a:normAutofit/>
+          </a:bodyPr>
+          <a:lstStyle/>
+          <a:p>
+            <a:r>
+              <a:rPr lang="en-US" sz="1380" dirty="0">
+                <a:solidFill>
+                  <a:srgbClr val="17364A"/>
+                </a:solidFill>
+                <a:latin typeface="Aptos" pitchFamily="34" charset="0"/>
+                <a:ea typeface="Aptos" pitchFamily="34" charset="-122"/>
+                <a:cs typeface="Aptos" pitchFamily="34" charset="-120"/>
+              </a:rPr>
+              <a:t>What non-AI alternatives should be considered?</a:t>
+            </a:r>
+            <a:endParaRPr lang="en-US" sz="1380" dirty="0"/>
+          </a:p>
+          <a:p>
+            <a:r>
+              <a:rPr lang="en-US" sz="1380" dirty="0">
+                <a:solidFill>
+                  <a:srgbClr val="17364A"/>
+                </a:solidFill>
+                <a:latin typeface="Aptos" pitchFamily="34" charset="0"/>
+                <a:ea typeface="Aptos" pitchFamily="34" charset="-122"/>
+                <a:cs typeface="Aptos" pitchFamily="34" charset="-120"/>
+              </a:rPr>
+              <a:t>How will the agency measure public value, equity, trust, and unintended consequences?</a:t>
+            </a:r>
+            <a:endParaRPr lang="en-US" sz="1380" dirty="0"/>
+          </a:p>
+        </p:txBody>
       </p:sp>
       <p:sp>
         <p:nvSpPr>
           <p:cNvPr id="16" name="Shape 14"/>
-          <p:cNvSpPr/>
-          <p:nvPr/>
-        </p:nvSpPr>
-        <p:spPr>
-          <a:xfrm>
-            <a:off x="9198864" y="4206240"/>
-            <a:ext cx="347472" cy="347472"/>
-          </a:xfrm>
-          <a:prstGeom prst="ellipse">
-            <a:avLst/>
-          </a:prstGeom>
-          <a:solidFill>
-            <a:srgbClr val="2F8A28"/>
-          </a:solidFill>
-          <a:ln w="12700">
-            <a:solidFill>
-              <a:srgbClr val="2F8A28"/>
-            </a:solidFill>
-            <a:prstDash val="solid"/>
-          </a:ln>
-        </p:spPr>
-      </p:sp>
-      <p:sp>
-        <p:nvSpPr>
-          <p:cNvPr id="17" name="Text 15"/>
-          <p:cNvSpPr/>
-          <p:nvPr/>
-        </p:nvSpPr>
-        <p:spPr>
-          <a:xfrm>
-            <a:off x="7909560" y="3977640"/>
-            <a:ext cx="2926080" cy="182880"/>
-          </a:xfrm>
-          <a:prstGeom prst="rect">
-            <a:avLst/>
-          </a:prstGeom>
-          <a:noFill/>
-          <a:ln/>
-        </p:spPr>
-        <p:txBody>
-          <a:bodyPr wrap="square" lIns="0" tIns="0" rIns="0" bIns="0" rtlCol="0" anchor="ctr"/>
-          <a:lstStyle/>
-          <a:p>
-            <a:pPr algn="ctr" indent="0" marL="0">
-              <a:buNone/>
-            </a:pPr>
-            <a:r>
-              <a:rPr lang="en-US" sz="1000" dirty="0">
-                <a:solidFill>
-                  <a:srgbClr val="003A63"/>
-                </a:solidFill>
-                <a:latin typeface="Aptos" pitchFamily="34" charset="0"/>
-                <a:ea typeface="Aptos" pitchFamily="34" charset="-122"/>
-                <a:cs typeface="Aptos" pitchFamily="34" charset="-120"/>
-              </a:rPr>
-              <a:t>Concept to action</a:t>
-            </a:r>
-            <a:endParaRPr lang="en-US" sz="1000" dirty="0"/>
-          </a:p>
-        </p:txBody>
-      </p:sp>
-      <p:sp>
-        <p:nvSpPr>
-          <p:cNvPr id="18" name="Shape 16"/>
           <p:cNvSpPr/>
           <p:nvPr/>
         </p:nvSpPr>
@@ -8043,7 +7788,7 @@
       </p:sp>
       <p:sp>
         <p:nvSpPr>
-          <p:cNvPr id="19" name="Text 17"/>
+          <p:cNvPr id="17" name="Text 15"/>
           <p:cNvSpPr/>
           <p:nvPr/>
         </p:nvSpPr>
@@ -8082,7 +7827,7 @@
       </p:sp>
       <p:sp>
         <p:nvSpPr>
-          <p:cNvPr id="20" name="Text 18"/>
+          <p:cNvPr id="18" name="Text 16"/>
           <p:cNvSpPr/>
           <p:nvPr/>
         </p:nvSpPr>
@@ -8590,13 +8335,11 @@
             </a:avLst>
           </a:prstGeom>
           <a:solidFill>
-            <a:srgbClr val="FFFFFF">
-              <a:alpha val="88000"/>
-            </a:srgbClr>
+            <a:srgbClr val="FFFFFF"/>
           </a:solidFill>
           <a:ln w="12700">
             <a:solidFill>
-              <a:srgbClr val="D6E8F2"/>
+              <a:srgbClr val="B9D7E6"/>
             </a:solidFill>
             <a:prstDash val="solid"/>
           </a:ln>
@@ -8604,119 +8347,98 @@
       </p:sp>
       <p:sp>
         <p:nvSpPr>
-          <p:cNvPr id="14" name="Shape 12"/>
-          <p:cNvSpPr/>
-          <p:nvPr/>
-        </p:nvSpPr>
-        <p:spPr>
-          <a:xfrm>
-            <a:off x="8074152" y="3291840"/>
-            <a:ext cx="2596896" cy="749808"/>
-          </a:xfrm>
-          <a:prstGeom prst="rect">
-            <a:avLst/>
-          </a:prstGeom>
-          <a:solidFill>
-            <a:srgbClr val="EAF6F8"/>
-          </a:solidFill>
-          <a:ln w="12700">
-            <a:solidFill>
-              <a:srgbClr val="8ABBD8"/>
-            </a:solidFill>
-            <a:prstDash val="solid"/>
-          </a:ln>
-        </p:spPr>
-      </p:sp>
-      <p:sp>
-        <p:nvSpPr>
-          <p:cNvPr id="15" name="Shape 13"/>
-          <p:cNvSpPr/>
-          <p:nvPr/>
-        </p:nvSpPr>
-        <p:spPr>
-          <a:xfrm>
-            <a:off x="8202168" y="3721608"/>
-            <a:ext cx="2340864" cy="0"/>
-          </a:xfrm>
-          <a:prstGeom prst="line">
-            <a:avLst/>
-          </a:prstGeom>
-          <a:noFill/>
-          <a:ln w="19050">
-            <a:solidFill>
-              <a:srgbClr val="0068B7"/>
-            </a:solidFill>
-            <a:prstDash val="solid"/>
-          </a:ln>
-        </p:spPr>
+          <p:cNvPr id="14" name="Text 12"/>
+          <p:cNvSpPr/>
+          <p:nvPr/>
+        </p:nvSpPr>
+        <p:spPr>
+          <a:xfrm>
+            <a:off x="7799832" y="2935224"/>
+            <a:ext cx="3145536" cy="256032"/>
+          </a:xfrm>
+          <a:prstGeom prst="rect">
+            <a:avLst/>
+          </a:prstGeom>
+          <a:noFill/>
+          <a:ln/>
+        </p:spPr>
+        <p:txBody>
+          <a:bodyPr wrap="square" lIns="0" tIns="0" rIns="0" bIns="0" rtlCol="0" anchor="ctr"/>
+          <a:lstStyle/>
+          <a:p>
+            <a:pPr indent="0" marL="0">
+              <a:buNone/>
+            </a:pPr>
+            <a:r>
+              <a:rPr lang="en-US" sz="1300" b="1" dirty="0">
+                <a:solidFill>
+                  <a:srgbClr val="0068B7"/>
+                </a:solidFill>
+                <a:latin typeface="Aptos" pitchFamily="34" charset="0"/>
+                <a:ea typeface="Aptos" pitchFamily="34" charset="-122"/>
+                <a:cs typeface="Aptos" pitchFamily="34" charset="-120"/>
+              </a:rPr>
+              <a:t>Concept checkpoints</a:t>
+            </a:r>
+            <a:endParaRPr lang="en-US" sz="1300" dirty="0"/>
+          </a:p>
+        </p:txBody>
+      </p:sp>
+      <p:sp>
+        <p:nvSpPr>
+          <p:cNvPr id="15" name="Text 13"/>
+          <p:cNvSpPr/>
+          <p:nvPr/>
+        </p:nvSpPr>
+        <p:spPr>
+          <a:xfrm>
+            <a:off x="7818120" y="3300984"/>
+            <a:ext cx="3090672" cy="877824"/>
+          </a:xfrm>
+          <a:prstGeom prst="rect">
+            <a:avLst/>
+          </a:prstGeom>
+          <a:noFill/>
+          <a:ln/>
+        </p:spPr>
+        <p:txBody>
+          <a:bodyPr wrap="square" lIns="254" tIns="254" rIns="254" bIns="254" rtlCol="0" anchor="t">
+            <a:normAutofit/>
+          </a:bodyPr>
+          <a:lstStyle/>
+          <a:p>
+            <a:r>
+              <a:rPr lang="en-US" sz="1380" dirty="0">
+                <a:solidFill>
+                  <a:srgbClr val="17364A"/>
+                </a:solidFill>
+                <a:latin typeface="Aptos" pitchFamily="34" charset="0"/>
+                <a:ea typeface="Aptos" pitchFamily="34" charset="-122"/>
+                <a:cs typeface="Aptos" pitchFamily="34" charset="-120"/>
+              </a:rPr>
+              <a:t>The brief should define the public health problem, intended public benefit, affected.</a:t>
+            </a:r>
+            <a:endParaRPr lang="en-US" sz="1380" dirty="0"/>
+          </a:p>
+          <a:p>
+            <a:r>
+              <a:rPr lang="en-US" sz="1380" dirty="0">
+                <a:solidFill>
+                  <a:srgbClr val="17364A"/>
+                </a:solidFill>
+                <a:latin typeface="Aptos" pitchFamily="34" charset="0"/>
+                <a:ea typeface="Aptos" pitchFamily="34" charset="-122"/>
+                <a:cs typeface="Aptos" pitchFamily="34" charset="-120"/>
+              </a:rPr>
+              <a:t>The exercise should result in a decision-support document that helps leaders and.</a:t>
+            </a:r>
+            <a:endParaRPr lang="en-US" sz="1380" dirty="0"/>
+          </a:p>
+        </p:txBody>
       </p:sp>
       <p:sp>
         <p:nvSpPr>
           <p:cNvPr id="16" name="Shape 14"/>
-          <p:cNvSpPr/>
-          <p:nvPr/>
-        </p:nvSpPr>
-        <p:spPr>
-          <a:xfrm>
-            <a:off x="9198864" y="4206240"/>
-            <a:ext cx="347472" cy="347472"/>
-          </a:xfrm>
-          <a:prstGeom prst="ellipse">
-            <a:avLst/>
-          </a:prstGeom>
-          <a:solidFill>
-            <a:srgbClr val="2F8A28"/>
-          </a:solidFill>
-          <a:ln w="12700">
-            <a:solidFill>
-              <a:srgbClr val="2F8A28"/>
-            </a:solidFill>
-            <a:prstDash val="solid"/>
-          </a:ln>
-        </p:spPr>
-      </p:sp>
-      <p:sp>
-        <p:nvSpPr>
-          <p:cNvPr id="17" name="Text 15"/>
-          <p:cNvSpPr/>
-          <p:nvPr/>
-        </p:nvSpPr>
-        <p:spPr>
-          <a:xfrm>
-            <a:off x="7909560" y="3977640"/>
-            <a:ext cx="2926080" cy="182880"/>
-          </a:xfrm>
-          <a:prstGeom prst="rect">
-            <a:avLst/>
-          </a:prstGeom>
-          <a:noFill/>
-          <a:ln/>
-        </p:spPr>
-        <p:txBody>
-          <a:bodyPr wrap="square" lIns="0" tIns="0" rIns="0" bIns="0" rtlCol="0" anchor="ctr"/>
-          <a:lstStyle/>
-          <a:p>
-            <a:pPr algn="ctr" indent="0" marL="0">
-              <a:buNone/>
-            </a:pPr>
-            <a:r>
-              <a:rPr lang="en-US" sz="1000" dirty="0">
-                <a:solidFill>
-                  <a:srgbClr val="003A63"/>
-                </a:solidFill>
-                <a:latin typeface="Aptos" pitchFamily="34" charset="0"/>
-                <a:ea typeface="Aptos" pitchFamily="34" charset="-122"/>
-                <a:cs typeface="Aptos" pitchFamily="34" charset="-120"/>
-              </a:rPr>
-              <a:t>Concept to action</a:t>
-            </a:r>
-            <a:endParaRPr lang="en-US" sz="1000" dirty="0"/>
-          </a:p>
-        </p:txBody>
-      </p:sp>
-      <p:sp>
-        <p:nvSpPr>
-          <p:cNvPr id="18" name="Shape 16"/>
           <p:cNvSpPr/>
           <p:nvPr/>
         </p:nvSpPr>
@@ -8743,7 +8465,7 @@
       </p:sp>
       <p:sp>
         <p:nvSpPr>
-          <p:cNvPr id="19" name="Text 17"/>
+          <p:cNvPr id="17" name="Text 15"/>
           <p:cNvSpPr/>
           <p:nvPr/>
         </p:nvSpPr>
@@ -8782,7 +8504,7 @@
       </p:sp>
       <p:sp>
         <p:nvSpPr>
-          <p:cNvPr id="20" name="Text 18"/>
+          <p:cNvPr id="18" name="Text 16"/>
           <p:cNvSpPr/>
           <p:nvPr/>
         </p:nvSpPr>
@@ -9290,13 +9012,11 @@
             </a:avLst>
           </a:prstGeom>
           <a:solidFill>
-            <a:srgbClr val="FFFFFF">
-              <a:alpha val="88000"/>
-            </a:srgbClr>
+            <a:srgbClr val="FFFFFF"/>
           </a:solidFill>
           <a:ln w="12700">
             <a:solidFill>
-              <a:srgbClr val="D6E8F2"/>
+              <a:srgbClr val="B9D7E6"/>
             </a:solidFill>
             <a:prstDash val="solid"/>
           </a:ln>
@@ -9304,119 +9024,112 @@
       </p:sp>
       <p:sp>
         <p:nvSpPr>
-          <p:cNvPr id="14" name="Shape 12"/>
-          <p:cNvSpPr/>
-          <p:nvPr/>
-        </p:nvSpPr>
-        <p:spPr>
-          <a:xfrm>
-            <a:off x="8074152" y="3291840"/>
-            <a:ext cx="2596896" cy="749808"/>
-          </a:xfrm>
-          <a:prstGeom prst="rect">
-            <a:avLst/>
-          </a:prstGeom>
-          <a:solidFill>
-            <a:srgbClr val="EAF6F8"/>
-          </a:solidFill>
-          <a:ln w="12700">
-            <a:solidFill>
-              <a:srgbClr val="8ABBD8"/>
-            </a:solidFill>
-            <a:prstDash val="solid"/>
-          </a:ln>
-        </p:spPr>
-      </p:sp>
-      <p:sp>
-        <p:nvSpPr>
-          <p:cNvPr id="15" name="Shape 13"/>
-          <p:cNvSpPr/>
-          <p:nvPr/>
-        </p:nvSpPr>
-        <p:spPr>
-          <a:xfrm>
-            <a:off x="8202168" y="3721608"/>
-            <a:ext cx="2340864" cy="0"/>
-          </a:xfrm>
-          <a:prstGeom prst="line">
-            <a:avLst/>
-          </a:prstGeom>
-          <a:noFill/>
-          <a:ln w="19050">
-            <a:solidFill>
-              <a:srgbClr val="0068B7"/>
-            </a:solidFill>
-            <a:prstDash val="solid"/>
-          </a:ln>
-        </p:spPr>
+          <p:cNvPr id="14" name="Text 12"/>
+          <p:cNvSpPr/>
+          <p:nvPr/>
+        </p:nvSpPr>
+        <p:spPr>
+          <a:xfrm>
+            <a:off x="7799832" y="2935224"/>
+            <a:ext cx="3145536" cy="256032"/>
+          </a:xfrm>
+          <a:prstGeom prst="rect">
+            <a:avLst/>
+          </a:prstGeom>
+          <a:noFill/>
+          <a:ln/>
+        </p:spPr>
+        <p:txBody>
+          <a:bodyPr wrap="square" lIns="0" tIns="0" rIns="0" bIns="0" rtlCol="0" anchor="ctr"/>
+          <a:lstStyle/>
+          <a:p>
+            <a:pPr indent="0" marL="0">
+              <a:buNone/>
+            </a:pPr>
+            <a:r>
+              <a:rPr lang="en-US" sz="1300" b="1" dirty="0">
+                <a:solidFill>
+                  <a:srgbClr val="0068B7"/>
+                </a:solidFill>
+                <a:latin typeface="Aptos" pitchFamily="34" charset="0"/>
+                <a:ea typeface="Aptos" pitchFamily="34" charset="-122"/>
+                <a:cs typeface="Aptos" pitchFamily="34" charset="-120"/>
+              </a:rPr>
+              <a:t>Concept checkpoints</a:t>
+            </a:r>
+            <a:endParaRPr lang="en-US" sz="1300" dirty="0"/>
+          </a:p>
+        </p:txBody>
+      </p:sp>
+      <p:sp>
+        <p:nvSpPr>
+          <p:cNvPr id="15" name="Text 13"/>
+          <p:cNvSpPr/>
+          <p:nvPr/>
+        </p:nvSpPr>
+        <p:spPr>
+          <a:xfrm>
+            <a:off x="7818120" y="3300984"/>
+            <a:ext cx="3090672" cy="877824"/>
+          </a:xfrm>
+          <a:prstGeom prst="rect">
+            <a:avLst/>
+          </a:prstGeom>
+          <a:noFill/>
+          <a:ln/>
+        </p:spPr>
+        <p:txBody>
+          <a:bodyPr wrap="square" lIns="254" tIns="254" rIns="254" bIns="254" rtlCol="0" anchor="t">
+            <a:normAutofit/>
+          </a:bodyPr>
+          <a:lstStyle/>
+          <a:p>
+            <a:r>
+              <a:rPr lang="en-US" sz="1380" dirty="0">
+                <a:solidFill>
+                  <a:srgbClr val="17364A"/>
+                </a:solidFill>
+                <a:latin typeface="Aptos" pitchFamily="34" charset="0"/>
+                <a:ea typeface="Aptos" pitchFamily="34" charset="-122"/>
+                <a:cs typeface="Aptos" pitchFamily="34" charset="-120"/>
+              </a:rPr>
+              <a:t>AI for Social Good review brief</a:t>
+            </a:r>
+            <a:endParaRPr lang="en-US" sz="1380" dirty="0"/>
+          </a:p>
+          <a:p>
+            <a:r>
+              <a:rPr lang="en-US" sz="1380" dirty="0">
+                <a:solidFill>
+                  <a:srgbClr val="17364A"/>
+                </a:solidFill>
+                <a:latin typeface="Aptos" pitchFamily="34" charset="0"/>
+                <a:ea typeface="Aptos" pitchFamily="34" charset="-122"/>
+                <a:cs typeface="Aptos" pitchFamily="34" charset="-120"/>
+              </a:rPr>
+              <a:t>Public value and equity assessment</a:t>
+            </a:r>
+            <a:endParaRPr lang="en-US" sz="1380" dirty="0"/>
+          </a:p>
+          <a:p>
+            <a:r>
+              <a:rPr lang="en-US" sz="1380" dirty="0">
+                <a:solidFill>
+                  <a:srgbClr val="17364A"/>
+                </a:solidFill>
+                <a:latin typeface="Aptos" pitchFamily="34" charset="0"/>
+                <a:ea typeface="Aptos" pitchFamily="34" charset="-122"/>
+                <a:cs typeface="Aptos" pitchFamily="34" charset="-120"/>
+              </a:rPr>
+              <a:t>Community engagement and accessibility plan</a:t>
+            </a:r>
+            <a:endParaRPr lang="en-US" sz="1380" dirty="0"/>
+          </a:p>
+        </p:txBody>
       </p:sp>
       <p:sp>
         <p:nvSpPr>
           <p:cNvPr id="16" name="Shape 14"/>
-          <p:cNvSpPr/>
-          <p:nvPr/>
-        </p:nvSpPr>
-        <p:spPr>
-          <a:xfrm>
-            <a:off x="9198864" y="4206240"/>
-            <a:ext cx="347472" cy="347472"/>
-          </a:xfrm>
-          <a:prstGeom prst="ellipse">
-            <a:avLst/>
-          </a:prstGeom>
-          <a:solidFill>
-            <a:srgbClr val="2F8A28"/>
-          </a:solidFill>
-          <a:ln w="12700">
-            <a:solidFill>
-              <a:srgbClr val="2F8A28"/>
-            </a:solidFill>
-            <a:prstDash val="solid"/>
-          </a:ln>
-        </p:spPr>
-      </p:sp>
-      <p:sp>
-        <p:nvSpPr>
-          <p:cNvPr id="17" name="Text 15"/>
-          <p:cNvSpPr/>
-          <p:nvPr/>
-        </p:nvSpPr>
-        <p:spPr>
-          <a:xfrm>
-            <a:off x="7909560" y="3977640"/>
-            <a:ext cx="2926080" cy="182880"/>
-          </a:xfrm>
-          <a:prstGeom prst="rect">
-            <a:avLst/>
-          </a:prstGeom>
-          <a:noFill/>
-          <a:ln/>
-        </p:spPr>
-        <p:txBody>
-          <a:bodyPr wrap="square" lIns="0" tIns="0" rIns="0" bIns="0" rtlCol="0" anchor="ctr"/>
-          <a:lstStyle/>
-          <a:p>
-            <a:pPr algn="ctr" indent="0" marL="0">
-              <a:buNone/>
-            </a:pPr>
-            <a:r>
-              <a:rPr lang="en-US" sz="1000" dirty="0">
-                <a:solidFill>
-                  <a:srgbClr val="003A63"/>
-                </a:solidFill>
-                <a:latin typeface="Aptos" pitchFamily="34" charset="0"/>
-                <a:ea typeface="Aptos" pitchFamily="34" charset="-122"/>
-                <a:cs typeface="Aptos" pitchFamily="34" charset="-120"/>
-              </a:rPr>
-              <a:t>Concept to action</a:t>
-            </a:r>
-            <a:endParaRPr lang="en-US" sz="1000" dirty="0"/>
-          </a:p>
-        </p:txBody>
-      </p:sp>
-      <p:sp>
-        <p:nvSpPr>
-          <p:cNvPr id="18" name="Shape 16"/>
           <p:cNvSpPr/>
           <p:nvPr/>
         </p:nvSpPr>
@@ -9443,7 +9156,7 @@
       </p:sp>
       <p:sp>
         <p:nvSpPr>
-          <p:cNvPr id="19" name="Text 17"/>
+          <p:cNvPr id="17" name="Text 15"/>
           <p:cNvSpPr/>
           <p:nvPr/>
         </p:nvSpPr>
@@ -9482,7 +9195,7 @@
       </p:sp>
       <p:sp>
         <p:nvSpPr>
-          <p:cNvPr id="20" name="Text 18"/>
+          <p:cNvPr id="18" name="Text 16"/>
           <p:cNvSpPr/>
           <p:nvPr/>
         </p:nvSpPr>
@@ -9962,13 +9675,11 @@
             </a:avLst>
           </a:prstGeom>
           <a:solidFill>
-            <a:srgbClr val="FFFFFF">
-              <a:alpha val="88000"/>
-            </a:srgbClr>
+            <a:srgbClr val="FFFFFF"/>
           </a:solidFill>
           <a:ln w="12700">
             <a:solidFill>
-              <a:srgbClr val="D6E8F2"/>
+              <a:srgbClr val="B9D7E6"/>
             </a:solidFill>
             <a:prstDash val="solid"/>
           </a:ln>
@@ -9976,119 +9687,84 @@
       </p:sp>
       <p:sp>
         <p:nvSpPr>
-          <p:cNvPr id="14" name="Shape 12"/>
-          <p:cNvSpPr/>
-          <p:nvPr/>
-        </p:nvSpPr>
-        <p:spPr>
-          <a:xfrm>
-            <a:off x="8074152" y="3291840"/>
-            <a:ext cx="2596896" cy="749808"/>
-          </a:xfrm>
-          <a:prstGeom prst="rect">
-            <a:avLst/>
-          </a:prstGeom>
-          <a:solidFill>
-            <a:srgbClr val="EAF6F8"/>
-          </a:solidFill>
-          <a:ln w="12700">
-            <a:solidFill>
-              <a:srgbClr val="8ABBD8"/>
-            </a:solidFill>
-            <a:prstDash val="solid"/>
-          </a:ln>
-        </p:spPr>
-      </p:sp>
-      <p:sp>
-        <p:nvSpPr>
-          <p:cNvPr id="15" name="Shape 13"/>
-          <p:cNvSpPr/>
-          <p:nvPr/>
-        </p:nvSpPr>
-        <p:spPr>
-          <a:xfrm>
-            <a:off x="8202168" y="3721608"/>
-            <a:ext cx="2340864" cy="0"/>
-          </a:xfrm>
-          <a:prstGeom prst="line">
-            <a:avLst/>
-          </a:prstGeom>
-          <a:noFill/>
-          <a:ln w="19050">
-            <a:solidFill>
-              <a:srgbClr val="0068B7"/>
-            </a:solidFill>
-            <a:prstDash val="solid"/>
-          </a:ln>
-        </p:spPr>
+          <p:cNvPr id="14" name="Text 12"/>
+          <p:cNvSpPr/>
+          <p:nvPr/>
+        </p:nvSpPr>
+        <p:spPr>
+          <a:xfrm>
+            <a:off x="7799832" y="2935224"/>
+            <a:ext cx="3145536" cy="256032"/>
+          </a:xfrm>
+          <a:prstGeom prst="rect">
+            <a:avLst/>
+          </a:prstGeom>
+          <a:noFill/>
+          <a:ln/>
+        </p:spPr>
+        <p:txBody>
+          <a:bodyPr wrap="square" lIns="0" tIns="0" rIns="0" bIns="0" rtlCol="0" anchor="ctr"/>
+          <a:lstStyle/>
+          <a:p>
+            <a:pPr indent="0" marL="0">
+              <a:buNone/>
+            </a:pPr>
+            <a:r>
+              <a:rPr lang="en-US" sz="1300" b="1" dirty="0">
+                <a:solidFill>
+                  <a:srgbClr val="0068B7"/>
+                </a:solidFill>
+                <a:latin typeface="Aptos" pitchFamily="34" charset="0"/>
+                <a:ea typeface="Aptos" pitchFamily="34" charset="-122"/>
+                <a:cs typeface="Aptos" pitchFamily="34" charset="-120"/>
+              </a:rPr>
+              <a:t>Concept checkpoints</a:t>
+            </a:r>
+            <a:endParaRPr lang="en-US" sz="1300" dirty="0"/>
+          </a:p>
+        </p:txBody>
+      </p:sp>
+      <p:sp>
+        <p:nvSpPr>
+          <p:cNvPr id="15" name="Text 13"/>
+          <p:cNvSpPr/>
+          <p:nvPr/>
+        </p:nvSpPr>
+        <p:spPr>
+          <a:xfrm>
+            <a:off x="7818120" y="3300984"/>
+            <a:ext cx="3090672" cy="877824"/>
+          </a:xfrm>
+          <a:prstGeom prst="rect">
+            <a:avLst/>
+          </a:prstGeom>
+          <a:noFill/>
+          <a:ln/>
+        </p:spPr>
+        <p:txBody>
+          <a:bodyPr wrap="square" lIns="254" tIns="254" rIns="254" bIns="254" rtlCol="0" anchor="t">
+            <a:normAutofit/>
+          </a:bodyPr>
+          <a:lstStyle/>
+          <a:p>
+            <a:r>
+              <a:rPr lang="en-US" sz="1380" dirty="0">
+                <a:solidFill>
+                  <a:srgbClr val="17364A"/>
+                </a:solidFill>
+                <a:latin typeface="Aptos" pitchFamily="34" charset="0"/>
+                <a:ea typeface="Aptos" pitchFamily="34" charset="-122"/>
+                <a:cs typeface="Aptos" pitchFamily="34" charset="-120"/>
+              </a:rPr>
+              <a:t>Impact and unintended-consequence measurement plan</a:t>
+            </a:r>
+            <a:endParaRPr lang="en-US" sz="1380" dirty="0"/>
+          </a:p>
+        </p:txBody>
       </p:sp>
       <p:sp>
         <p:nvSpPr>
           <p:cNvPr id="16" name="Shape 14"/>
-          <p:cNvSpPr/>
-          <p:nvPr/>
-        </p:nvSpPr>
-        <p:spPr>
-          <a:xfrm>
-            <a:off x="9198864" y="4206240"/>
-            <a:ext cx="347472" cy="347472"/>
-          </a:xfrm>
-          <a:prstGeom prst="ellipse">
-            <a:avLst/>
-          </a:prstGeom>
-          <a:solidFill>
-            <a:srgbClr val="2F8A28"/>
-          </a:solidFill>
-          <a:ln w="12700">
-            <a:solidFill>
-              <a:srgbClr val="2F8A28"/>
-            </a:solidFill>
-            <a:prstDash val="solid"/>
-          </a:ln>
-        </p:spPr>
-      </p:sp>
-      <p:sp>
-        <p:nvSpPr>
-          <p:cNvPr id="17" name="Text 15"/>
-          <p:cNvSpPr/>
-          <p:nvPr/>
-        </p:nvSpPr>
-        <p:spPr>
-          <a:xfrm>
-            <a:off x="7909560" y="3977640"/>
-            <a:ext cx="2926080" cy="182880"/>
-          </a:xfrm>
-          <a:prstGeom prst="rect">
-            <a:avLst/>
-          </a:prstGeom>
-          <a:noFill/>
-          <a:ln/>
-        </p:spPr>
-        <p:txBody>
-          <a:bodyPr wrap="square" lIns="0" tIns="0" rIns="0" bIns="0" rtlCol="0" anchor="ctr"/>
-          <a:lstStyle/>
-          <a:p>
-            <a:pPr algn="ctr" indent="0" marL="0">
-              <a:buNone/>
-            </a:pPr>
-            <a:r>
-              <a:rPr lang="en-US" sz="1000" dirty="0">
-                <a:solidFill>
-                  <a:srgbClr val="003A63"/>
-                </a:solidFill>
-                <a:latin typeface="Aptos" pitchFamily="34" charset="0"/>
-                <a:ea typeface="Aptos" pitchFamily="34" charset="-122"/>
-                <a:cs typeface="Aptos" pitchFamily="34" charset="-120"/>
-              </a:rPr>
-              <a:t>Concept to action</a:t>
-            </a:r>
-            <a:endParaRPr lang="en-US" sz="1000" dirty="0"/>
-          </a:p>
-        </p:txBody>
-      </p:sp>
-      <p:sp>
-        <p:nvSpPr>
-          <p:cNvPr id="18" name="Shape 16"/>
           <p:cNvSpPr/>
           <p:nvPr/>
         </p:nvSpPr>
@@ -10115,7 +9791,7 @@
       </p:sp>
       <p:sp>
         <p:nvSpPr>
-          <p:cNvPr id="19" name="Text 17"/>
+          <p:cNvPr id="17" name="Text 15"/>
           <p:cNvSpPr/>
           <p:nvPr/>
         </p:nvSpPr>
@@ -10154,7 +9830,7 @@
       </p:sp>
       <p:sp>
         <p:nvSpPr>
-          <p:cNvPr id="20" name="Text 18"/>
+          <p:cNvPr id="18" name="Text 16"/>
           <p:cNvSpPr/>
           <p:nvPr/>
         </p:nvSpPr>
@@ -10687,20 +10363,20 @@
         </p:nvSpPr>
         <p:spPr>
           <a:xfrm>
-            <a:off x="7635240" y="3730752"/>
-            <a:ext cx="1033272" cy="749808"/>
+            <a:off x="7909560" y="3675888"/>
+            <a:ext cx="3154680" cy="1691640"/>
           </a:xfrm>
           <a:prstGeom prst="roundRect">
             <a:avLst>
-              <a:gd name="adj" fmla="val 14634"/>
+              <a:gd name="adj" fmla="val 6486"/>
             </a:avLst>
           </a:prstGeom>
           <a:solidFill>
-            <a:srgbClr val="0068B7"/>
+            <a:srgbClr val="FFFFFF"/>
           </a:solidFill>
           <a:ln w="12700">
             <a:solidFill>
-              <a:srgbClr val="0068B7"/>
+              <a:srgbClr val="B9D7E6"/>
             </a:solidFill>
             <a:prstDash val="solid"/>
           </a:ln>
@@ -10714,172 +10390,100 @@
         </p:nvSpPr>
         <p:spPr>
           <a:xfrm>
-            <a:off x="7708392" y="3922776"/>
-            <a:ext cx="886968" cy="310896"/>
-          </a:xfrm>
-          <a:prstGeom prst="rect">
-            <a:avLst/>
-          </a:prstGeom>
-          <a:noFill/>
-          <a:ln/>
-        </p:spPr>
-        <p:txBody>
-          <a:bodyPr wrap="square" lIns="0" tIns="0" rIns="0" bIns="0" rtlCol="0" anchor="ctr">
+            <a:off x="8074152" y="3822192"/>
+            <a:ext cx="2825496" cy="256032"/>
+          </a:xfrm>
+          <a:prstGeom prst="rect">
+            <a:avLst/>
+          </a:prstGeom>
+          <a:noFill/>
+          <a:ln/>
+        </p:spPr>
+        <p:txBody>
+          <a:bodyPr wrap="square" lIns="0" tIns="0" rIns="0" bIns="0" rtlCol="0" anchor="ctr"/>
+          <a:lstStyle/>
+          <a:p>
+            <a:pPr indent="0" marL="0">
+              <a:buNone/>
+            </a:pPr>
+            <a:r>
+              <a:rPr lang="en-US" sz="1300" b="1" dirty="0">
+                <a:solidFill>
+                  <a:srgbClr val="0068B7"/>
+                </a:solidFill>
+                <a:latin typeface="Aptos" pitchFamily="34" charset="0"/>
+                <a:ea typeface="Aptos" pitchFamily="34" charset="-122"/>
+                <a:cs typeface="Aptos" pitchFamily="34" charset="-120"/>
+              </a:rPr>
+              <a:t>Learning sequence</a:t>
+            </a:r>
+            <a:endParaRPr lang="en-US" sz="1300" dirty="0"/>
+          </a:p>
+        </p:txBody>
+      </p:sp>
+      <p:sp>
+        <p:nvSpPr>
+          <p:cNvPr id="15" name="Text 13"/>
+          <p:cNvSpPr/>
+          <p:nvPr/>
+        </p:nvSpPr>
+        <p:spPr>
+          <a:xfrm>
+            <a:off x="8092440" y="4187952"/>
+            <a:ext cx="2770632" cy="1033272"/>
+          </a:xfrm>
+          <a:prstGeom prst="rect">
+            <a:avLst/>
+          </a:prstGeom>
+          <a:noFill/>
+          <a:ln/>
+        </p:spPr>
+        <p:txBody>
+          <a:bodyPr wrap="square" lIns="254" tIns="254" rIns="254" bIns="254" rtlCol="0" anchor="t">
             <a:normAutofit/>
           </a:bodyPr>
           <a:lstStyle/>
           <a:p>
-            <a:pPr algn="ctr" indent="0" marL="0">
-              <a:buNone/>
-            </a:pPr>
-            <a:r>
-              <a:rPr lang="en-US" sz="1500" b="1" dirty="0">
-                <a:solidFill>
-                  <a:srgbClr val="FFFFFF"/>
-                </a:solidFill>
-                <a:latin typeface="Aptos" pitchFamily="34" charset="0"/>
-                <a:ea typeface="Aptos" pitchFamily="34" charset="-122"/>
-                <a:cs typeface="Aptos" pitchFamily="34" charset="-120"/>
-              </a:rPr>
-              <a:t>Learn</a:t>
-            </a:r>
-            <a:endParaRPr lang="en-US" sz="1500" dirty="0"/>
-          </a:p>
-        </p:txBody>
-      </p:sp>
-      <p:sp>
-        <p:nvSpPr>
-          <p:cNvPr id="15" name="Shape 13"/>
-          <p:cNvSpPr/>
-          <p:nvPr/>
-        </p:nvSpPr>
-        <p:spPr>
-          <a:xfrm>
-            <a:off x="8924544" y="3730752"/>
-            <a:ext cx="1033272" cy="749808"/>
-          </a:xfrm>
-          <a:prstGeom prst="roundRect">
-            <a:avLst>
-              <a:gd name="adj" fmla="val 14634"/>
-            </a:avLst>
-          </a:prstGeom>
-          <a:solidFill>
-            <a:srgbClr val="2F8A28"/>
-          </a:solidFill>
-          <a:ln w="12700">
-            <a:solidFill>
-              <a:srgbClr val="2F8A28"/>
-            </a:solidFill>
-            <a:prstDash val="solid"/>
-          </a:ln>
-        </p:spPr>
-      </p:sp>
-      <p:sp>
-        <p:nvSpPr>
-          <p:cNvPr id="16" name="Text 14"/>
-          <p:cNvSpPr/>
-          <p:nvPr/>
-        </p:nvSpPr>
-        <p:spPr>
-          <a:xfrm>
-            <a:off x="8997696" y="3922776"/>
-            <a:ext cx="886968" cy="310896"/>
-          </a:xfrm>
-          <a:prstGeom prst="rect">
-            <a:avLst/>
-          </a:prstGeom>
-          <a:noFill/>
-          <a:ln/>
-        </p:spPr>
-        <p:txBody>
-          <a:bodyPr wrap="square" lIns="0" tIns="0" rIns="0" bIns="0" rtlCol="0" anchor="ctr">
-            <a:normAutofit/>
-          </a:bodyPr>
-          <a:lstStyle/>
-          <a:p>
-            <a:pPr algn="ctr" indent="0" marL="0">
-              <a:buNone/>
-            </a:pPr>
-            <a:r>
-              <a:rPr lang="en-US" sz="1500" b="1" dirty="0">
-                <a:solidFill>
-                  <a:srgbClr val="FFFFFF"/>
-                </a:solidFill>
-                <a:latin typeface="Aptos" pitchFamily="34" charset="0"/>
-                <a:ea typeface="Aptos" pitchFamily="34" charset="-122"/>
-                <a:cs typeface="Aptos" pitchFamily="34" charset="-120"/>
-              </a:rPr>
-              <a:t>Apply</a:t>
-            </a:r>
-            <a:endParaRPr lang="en-US" sz="1500" dirty="0"/>
-          </a:p>
-        </p:txBody>
-      </p:sp>
-      <p:sp>
-        <p:nvSpPr>
-          <p:cNvPr id="17" name="Shape 15"/>
-          <p:cNvSpPr/>
-          <p:nvPr/>
-        </p:nvSpPr>
-        <p:spPr>
-          <a:xfrm>
-            <a:off x="10213848" y="3730752"/>
-            <a:ext cx="1033272" cy="749808"/>
-          </a:xfrm>
-          <a:prstGeom prst="roundRect">
-            <a:avLst>
-              <a:gd name="adj" fmla="val 14634"/>
-            </a:avLst>
-          </a:prstGeom>
-          <a:solidFill>
-            <a:srgbClr val="6A4CA3"/>
-          </a:solidFill>
-          <a:ln w="12700">
-            <a:solidFill>
-              <a:srgbClr val="6A4CA3"/>
-            </a:solidFill>
-            <a:prstDash val="solid"/>
-          </a:ln>
-        </p:spPr>
-      </p:sp>
-      <p:sp>
-        <p:nvSpPr>
-          <p:cNvPr id="18" name="Text 16"/>
-          <p:cNvSpPr/>
-          <p:nvPr/>
-        </p:nvSpPr>
-        <p:spPr>
-          <a:xfrm>
-            <a:off x="10287000" y="3922776"/>
-            <a:ext cx="886968" cy="310896"/>
-          </a:xfrm>
-          <a:prstGeom prst="rect">
-            <a:avLst/>
-          </a:prstGeom>
-          <a:noFill/>
-          <a:ln/>
-        </p:spPr>
-        <p:txBody>
-          <a:bodyPr wrap="square" lIns="0" tIns="0" rIns="0" bIns="0" rtlCol="0" anchor="ctr">
-            <a:normAutofit/>
-          </a:bodyPr>
-          <a:lstStyle/>
-          <a:p>
-            <a:pPr algn="ctr" indent="0" marL="0">
-              <a:buNone/>
-            </a:pPr>
-            <a:r>
-              <a:rPr lang="en-US" sz="1500" b="1" dirty="0">
-                <a:solidFill>
-                  <a:srgbClr val="FFFFFF"/>
-                </a:solidFill>
-                <a:latin typeface="Aptos" pitchFamily="34" charset="0"/>
-                <a:ea typeface="Aptos" pitchFamily="34" charset="-122"/>
-                <a:cs typeface="Aptos" pitchFamily="34" charset="-120"/>
-              </a:rPr>
-              <a:t>Document</a:t>
-            </a:r>
-            <a:endParaRPr lang="en-US" sz="1500" dirty="0"/>
+            <a:r>
+              <a:rPr lang="en-US" sz="1380" dirty="0">
+                <a:solidFill>
+                  <a:srgbClr val="17364A"/>
+                </a:solidFill>
+                <a:latin typeface="Aptos" pitchFamily="34" charset="0"/>
+                <a:ea typeface="Aptos" pitchFamily="34" charset="-122"/>
+                <a:cs typeface="Aptos" pitchFamily="34" charset="-120"/>
+              </a:rPr>
+              <a:t>Read the module for shared vocabulary and context.</a:t>
+            </a:r>
+            <a:endParaRPr lang="en-US" sz="1380" dirty="0"/>
+          </a:p>
+          <a:p>
+            <a:r>
+              <a:rPr lang="en-US" sz="1380" dirty="0">
+                <a:solidFill>
+                  <a:srgbClr val="17364A"/>
+                </a:solidFill>
+                <a:latin typeface="Aptos" pitchFamily="34" charset="0"/>
+                <a:ea typeface="Aptos" pitchFamily="34" charset="-122"/>
+                <a:cs typeface="Aptos" pitchFamily="34" charset="-120"/>
+              </a:rPr>
+              <a:t>Complete the practical exercise to apply the concept.</a:t>
+            </a:r>
+            <a:endParaRPr lang="en-US" sz="1380" dirty="0"/>
+          </a:p>
+          <a:p>
+            <a:r>
+              <a:rPr lang="en-US" sz="1380" dirty="0">
+                <a:solidFill>
+                  <a:srgbClr val="17364A"/>
+                </a:solidFill>
+                <a:latin typeface="Aptos" pitchFamily="34" charset="0"/>
+                <a:ea typeface="Aptos" pitchFamily="34" charset="-122"/>
+                <a:cs typeface="Aptos" pitchFamily="34" charset="-120"/>
+              </a:rPr>
+              <a:t>Use the notes and references for deeper review.</a:t>
+            </a:r>
+            <a:endParaRPr lang="en-US" sz="1380" dirty="0"/>
           </a:p>
         </p:txBody>
       </p:sp>
@@ -11352,13 +10956,11 @@
             </a:avLst>
           </a:prstGeom>
           <a:solidFill>
-            <a:srgbClr val="FFFFFF">
-              <a:alpha val="88000"/>
-            </a:srgbClr>
+            <a:srgbClr val="FFFFFF"/>
           </a:solidFill>
           <a:ln w="12700">
             <a:solidFill>
-              <a:srgbClr val="D6E8F2"/>
+              <a:srgbClr val="B9D7E6"/>
             </a:solidFill>
             <a:prstDash val="solid"/>
           </a:ln>
@@ -11366,119 +10968,112 @@
       </p:sp>
       <p:sp>
         <p:nvSpPr>
-          <p:cNvPr id="14" name="Shape 12"/>
-          <p:cNvSpPr/>
-          <p:nvPr/>
-        </p:nvSpPr>
-        <p:spPr>
-          <a:xfrm>
-            <a:off x="8074152" y="3291840"/>
-            <a:ext cx="2596896" cy="749808"/>
-          </a:xfrm>
-          <a:prstGeom prst="rect">
-            <a:avLst/>
-          </a:prstGeom>
-          <a:solidFill>
-            <a:srgbClr val="EAF6F8"/>
-          </a:solidFill>
-          <a:ln w="12700">
-            <a:solidFill>
-              <a:srgbClr val="8ABBD8"/>
-            </a:solidFill>
-            <a:prstDash val="solid"/>
-          </a:ln>
-        </p:spPr>
-      </p:sp>
-      <p:sp>
-        <p:nvSpPr>
-          <p:cNvPr id="15" name="Shape 13"/>
-          <p:cNvSpPr/>
-          <p:nvPr/>
-        </p:nvSpPr>
-        <p:spPr>
-          <a:xfrm>
-            <a:off x="8202168" y="3721608"/>
-            <a:ext cx="2340864" cy="0"/>
-          </a:xfrm>
-          <a:prstGeom prst="line">
-            <a:avLst/>
-          </a:prstGeom>
-          <a:noFill/>
-          <a:ln w="19050">
-            <a:solidFill>
-              <a:srgbClr val="0068B7"/>
-            </a:solidFill>
-            <a:prstDash val="solid"/>
-          </a:ln>
-        </p:spPr>
+          <p:cNvPr id="14" name="Text 12"/>
+          <p:cNvSpPr/>
+          <p:nvPr/>
+        </p:nvSpPr>
+        <p:spPr>
+          <a:xfrm>
+            <a:off x="7799832" y="2935224"/>
+            <a:ext cx="3145536" cy="256032"/>
+          </a:xfrm>
+          <a:prstGeom prst="rect">
+            <a:avLst/>
+          </a:prstGeom>
+          <a:noFill/>
+          <a:ln/>
+        </p:spPr>
+        <p:txBody>
+          <a:bodyPr wrap="square" lIns="0" tIns="0" rIns="0" bIns="0" rtlCol="0" anchor="ctr"/>
+          <a:lstStyle/>
+          <a:p>
+            <a:pPr indent="0" marL="0">
+              <a:buNone/>
+            </a:pPr>
+            <a:r>
+              <a:rPr lang="en-US" sz="1300" b="1" dirty="0">
+                <a:solidFill>
+                  <a:srgbClr val="0068B7"/>
+                </a:solidFill>
+                <a:latin typeface="Aptos" pitchFamily="34" charset="0"/>
+                <a:ea typeface="Aptos" pitchFamily="34" charset="-122"/>
+                <a:cs typeface="Aptos" pitchFamily="34" charset="-120"/>
+              </a:rPr>
+              <a:t>Concept checkpoints</a:t>
+            </a:r>
+            <a:endParaRPr lang="en-US" sz="1300" dirty="0"/>
+          </a:p>
+        </p:txBody>
+      </p:sp>
+      <p:sp>
+        <p:nvSpPr>
+          <p:cNvPr id="15" name="Text 13"/>
+          <p:cNvSpPr/>
+          <p:nvPr/>
+        </p:nvSpPr>
+        <p:spPr>
+          <a:xfrm>
+            <a:off x="7818120" y="3300984"/>
+            <a:ext cx="3090672" cy="877824"/>
+          </a:xfrm>
+          <a:prstGeom prst="rect">
+            <a:avLst/>
+          </a:prstGeom>
+          <a:noFill/>
+          <a:ln/>
+        </p:spPr>
+        <p:txBody>
+          <a:bodyPr wrap="square" lIns="254" tIns="254" rIns="254" bIns="254" rtlCol="0" anchor="t">
+            <a:normAutofit/>
+          </a:bodyPr>
+          <a:lstStyle/>
+          <a:p>
+            <a:r>
+              <a:rPr lang="en-US" sz="1380" dirty="0">
+                <a:solidFill>
+                  <a:srgbClr val="17364A"/>
+                </a:solidFill>
+                <a:latin typeface="Aptos" pitchFamily="34" charset="0"/>
+                <a:ea typeface="Aptos" pitchFamily="34" charset="-122"/>
+                <a:cs typeface="Aptos" pitchFamily="34" charset="-120"/>
+              </a:rPr>
+              <a:t>AI for Social Good review brief</a:t>
+            </a:r>
+            <a:endParaRPr lang="en-US" sz="1380" dirty="0"/>
+          </a:p>
+          <a:p>
+            <a:r>
+              <a:rPr lang="en-US" sz="1380" dirty="0">
+                <a:solidFill>
+                  <a:srgbClr val="17364A"/>
+                </a:solidFill>
+                <a:latin typeface="Aptos" pitchFamily="34" charset="0"/>
+                <a:ea typeface="Aptos" pitchFamily="34" charset="-122"/>
+                <a:cs typeface="Aptos" pitchFamily="34" charset="-120"/>
+              </a:rPr>
+              <a:t>Public value and equity assessment</a:t>
+            </a:r>
+            <a:endParaRPr lang="en-US" sz="1380" dirty="0"/>
+          </a:p>
+          <a:p>
+            <a:r>
+              <a:rPr lang="en-US" sz="1380" dirty="0">
+                <a:solidFill>
+                  <a:srgbClr val="17364A"/>
+                </a:solidFill>
+                <a:latin typeface="Aptos" pitchFamily="34" charset="0"/>
+                <a:ea typeface="Aptos" pitchFamily="34" charset="-122"/>
+                <a:cs typeface="Aptos" pitchFamily="34" charset="-120"/>
+              </a:rPr>
+              <a:t>Community engagement and accessibility plan</a:t>
+            </a:r>
+            <a:endParaRPr lang="en-US" sz="1380" dirty="0"/>
+          </a:p>
+        </p:txBody>
       </p:sp>
       <p:sp>
         <p:nvSpPr>
           <p:cNvPr id="16" name="Shape 14"/>
-          <p:cNvSpPr/>
-          <p:nvPr/>
-        </p:nvSpPr>
-        <p:spPr>
-          <a:xfrm>
-            <a:off x="9198864" y="4206240"/>
-            <a:ext cx="347472" cy="347472"/>
-          </a:xfrm>
-          <a:prstGeom prst="ellipse">
-            <a:avLst/>
-          </a:prstGeom>
-          <a:solidFill>
-            <a:srgbClr val="2F8A28"/>
-          </a:solidFill>
-          <a:ln w="12700">
-            <a:solidFill>
-              <a:srgbClr val="2F8A28"/>
-            </a:solidFill>
-            <a:prstDash val="solid"/>
-          </a:ln>
-        </p:spPr>
-      </p:sp>
-      <p:sp>
-        <p:nvSpPr>
-          <p:cNvPr id="17" name="Text 15"/>
-          <p:cNvSpPr/>
-          <p:nvPr/>
-        </p:nvSpPr>
-        <p:spPr>
-          <a:xfrm>
-            <a:off x="7909560" y="3977640"/>
-            <a:ext cx="2926080" cy="182880"/>
-          </a:xfrm>
-          <a:prstGeom prst="rect">
-            <a:avLst/>
-          </a:prstGeom>
-          <a:noFill/>
-          <a:ln/>
-        </p:spPr>
-        <p:txBody>
-          <a:bodyPr wrap="square" lIns="0" tIns="0" rIns="0" bIns="0" rtlCol="0" anchor="ctr"/>
-          <a:lstStyle/>
-          <a:p>
-            <a:pPr algn="ctr" indent="0" marL="0">
-              <a:buNone/>
-            </a:pPr>
-            <a:r>
-              <a:rPr lang="en-US" sz="1000" dirty="0">
-                <a:solidFill>
-                  <a:srgbClr val="003A63"/>
-                </a:solidFill>
-                <a:latin typeface="Aptos" pitchFamily="34" charset="0"/>
-                <a:ea typeface="Aptos" pitchFamily="34" charset="-122"/>
-                <a:cs typeface="Aptos" pitchFamily="34" charset="-120"/>
-              </a:rPr>
-              <a:t>Concept to action</a:t>
-            </a:r>
-            <a:endParaRPr lang="en-US" sz="1000" dirty="0"/>
-          </a:p>
-        </p:txBody>
-      </p:sp>
-      <p:sp>
-        <p:nvSpPr>
-          <p:cNvPr id="18" name="Shape 16"/>
           <p:cNvSpPr/>
           <p:nvPr/>
         </p:nvSpPr>
@@ -11505,7 +11100,7 @@
       </p:sp>
       <p:sp>
         <p:nvSpPr>
-          <p:cNvPr id="19" name="Text 17"/>
+          <p:cNvPr id="17" name="Text 15"/>
           <p:cNvSpPr/>
           <p:nvPr/>
         </p:nvSpPr>
@@ -11544,7 +11139,7 @@
       </p:sp>
       <p:sp>
         <p:nvSpPr>
-          <p:cNvPr id="20" name="Text 18"/>
+          <p:cNvPr id="18" name="Text 16"/>
           <p:cNvSpPr/>
           <p:nvPr/>
         </p:nvSpPr>
@@ -12052,13 +11647,11 @@
             </a:avLst>
           </a:prstGeom>
           <a:solidFill>
-            <a:srgbClr val="FFFFFF">
-              <a:alpha val="88000"/>
-            </a:srgbClr>
+            <a:srgbClr val="FFFFFF"/>
           </a:solidFill>
           <a:ln w="12700">
             <a:solidFill>
-              <a:srgbClr val="D6E8F2"/>
+              <a:srgbClr val="B9D7E6"/>
             </a:solidFill>
             <a:prstDash val="solid"/>
           </a:ln>
@@ -12066,119 +11659,112 @@
       </p:sp>
       <p:sp>
         <p:nvSpPr>
-          <p:cNvPr id="14" name="Shape 12"/>
-          <p:cNvSpPr/>
-          <p:nvPr/>
-        </p:nvSpPr>
-        <p:spPr>
-          <a:xfrm>
-            <a:off x="8074152" y="3291840"/>
-            <a:ext cx="2596896" cy="749808"/>
-          </a:xfrm>
-          <a:prstGeom prst="rect">
-            <a:avLst/>
-          </a:prstGeom>
-          <a:solidFill>
-            <a:srgbClr val="EAF6F8"/>
-          </a:solidFill>
-          <a:ln w="12700">
-            <a:solidFill>
-              <a:srgbClr val="8ABBD8"/>
-            </a:solidFill>
-            <a:prstDash val="solid"/>
-          </a:ln>
-        </p:spPr>
-      </p:sp>
-      <p:sp>
-        <p:nvSpPr>
-          <p:cNvPr id="15" name="Shape 13"/>
-          <p:cNvSpPr/>
-          <p:nvPr/>
-        </p:nvSpPr>
-        <p:spPr>
-          <a:xfrm>
-            <a:off x="8202168" y="3721608"/>
-            <a:ext cx="2340864" cy="0"/>
-          </a:xfrm>
-          <a:prstGeom prst="line">
-            <a:avLst/>
-          </a:prstGeom>
-          <a:noFill/>
-          <a:ln w="19050">
-            <a:solidFill>
-              <a:srgbClr val="0068B7"/>
-            </a:solidFill>
-            <a:prstDash val="solid"/>
-          </a:ln>
-        </p:spPr>
+          <p:cNvPr id="14" name="Text 12"/>
+          <p:cNvSpPr/>
+          <p:nvPr/>
+        </p:nvSpPr>
+        <p:spPr>
+          <a:xfrm>
+            <a:off x="7799832" y="2935224"/>
+            <a:ext cx="3145536" cy="256032"/>
+          </a:xfrm>
+          <a:prstGeom prst="rect">
+            <a:avLst/>
+          </a:prstGeom>
+          <a:noFill/>
+          <a:ln/>
+        </p:spPr>
+        <p:txBody>
+          <a:bodyPr wrap="square" lIns="0" tIns="0" rIns="0" bIns="0" rtlCol="0" anchor="ctr"/>
+          <a:lstStyle/>
+          <a:p>
+            <a:pPr indent="0" marL="0">
+              <a:buNone/>
+            </a:pPr>
+            <a:r>
+              <a:rPr lang="en-US" sz="1300" b="1" dirty="0">
+                <a:solidFill>
+                  <a:srgbClr val="0068B7"/>
+                </a:solidFill>
+                <a:latin typeface="Aptos" pitchFamily="34" charset="0"/>
+                <a:ea typeface="Aptos" pitchFamily="34" charset="-122"/>
+                <a:cs typeface="Aptos" pitchFamily="34" charset="-120"/>
+              </a:rPr>
+              <a:t>Concept checkpoints</a:t>
+            </a:r>
+            <a:endParaRPr lang="en-US" sz="1300" dirty="0"/>
+          </a:p>
+        </p:txBody>
+      </p:sp>
+      <p:sp>
+        <p:nvSpPr>
+          <p:cNvPr id="15" name="Text 13"/>
+          <p:cNvSpPr/>
+          <p:nvPr/>
+        </p:nvSpPr>
+        <p:spPr>
+          <a:xfrm>
+            <a:off x="7818120" y="3300984"/>
+            <a:ext cx="3090672" cy="877824"/>
+          </a:xfrm>
+          <a:prstGeom prst="rect">
+            <a:avLst/>
+          </a:prstGeom>
+          <a:noFill/>
+          <a:ln/>
+        </p:spPr>
+        <p:txBody>
+          <a:bodyPr wrap="square" lIns="254" tIns="254" rIns="254" bIns="254" rtlCol="0" anchor="t">
+            <a:normAutofit/>
+          </a:bodyPr>
+          <a:lstStyle/>
+          <a:p>
+            <a:r>
+              <a:rPr lang="en-US" sz="1380" dirty="0">
+                <a:solidFill>
+                  <a:srgbClr val="17364A"/>
+                </a:solidFill>
+                <a:latin typeface="Aptos" pitchFamily="34" charset="0"/>
+                <a:ea typeface="Aptos" pitchFamily="34" charset="-122"/>
+                <a:cs typeface="Aptos" pitchFamily="34" charset="-120"/>
+              </a:rPr>
+              <a:t>1.</a:t>
+            </a:r>
+            <a:endParaRPr lang="en-US" sz="1380" dirty="0"/>
+          </a:p>
+          <a:p>
+            <a:r>
+              <a:rPr lang="en-US" sz="1380" dirty="0">
+                <a:solidFill>
+                  <a:srgbClr val="17364A"/>
+                </a:solidFill>
+                <a:latin typeface="Aptos" pitchFamily="34" charset="0"/>
+                <a:ea typeface="Aptos" pitchFamily="34" charset="-122"/>
+                <a:cs typeface="Aptos" pitchFamily="34" charset="-120"/>
+              </a:rPr>
+              <a:t>What is the best definition of AI for Social Good in public health?</a:t>
+            </a:r>
+            <a:endParaRPr lang="en-US" sz="1380" dirty="0"/>
+          </a:p>
+          <a:p>
+            <a:r>
+              <a:rPr lang="en-US" sz="1380" dirty="0">
+                <a:solidFill>
+                  <a:srgbClr val="17364A"/>
+                </a:solidFill>
+                <a:latin typeface="Aptos" pitchFamily="34" charset="0"/>
+                <a:ea typeface="Aptos" pitchFamily="34" charset="-122"/>
+                <a:cs typeface="Aptos" pitchFamily="34" charset="-120"/>
+              </a:rPr>
+              <a:t>2.</a:t>
+            </a:r>
+            <a:endParaRPr lang="en-US" sz="1380" dirty="0"/>
+          </a:p>
+        </p:txBody>
       </p:sp>
       <p:sp>
         <p:nvSpPr>
           <p:cNvPr id="16" name="Shape 14"/>
-          <p:cNvSpPr/>
-          <p:nvPr/>
-        </p:nvSpPr>
-        <p:spPr>
-          <a:xfrm>
-            <a:off x="9198864" y="4206240"/>
-            <a:ext cx="347472" cy="347472"/>
-          </a:xfrm>
-          <a:prstGeom prst="ellipse">
-            <a:avLst/>
-          </a:prstGeom>
-          <a:solidFill>
-            <a:srgbClr val="2F8A28"/>
-          </a:solidFill>
-          <a:ln w="12700">
-            <a:solidFill>
-              <a:srgbClr val="2F8A28"/>
-            </a:solidFill>
-            <a:prstDash val="solid"/>
-          </a:ln>
-        </p:spPr>
-      </p:sp>
-      <p:sp>
-        <p:nvSpPr>
-          <p:cNvPr id="17" name="Text 15"/>
-          <p:cNvSpPr/>
-          <p:nvPr/>
-        </p:nvSpPr>
-        <p:spPr>
-          <a:xfrm>
-            <a:off x="7909560" y="3977640"/>
-            <a:ext cx="2926080" cy="182880"/>
-          </a:xfrm>
-          <a:prstGeom prst="rect">
-            <a:avLst/>
-          </a:prstGeom>
-          <a:noFill/>
-          <a:ln/>
-        </p:spPr>
-        <p:txBody>
-          <a:bodyPr wrap="square" lIns="0" tIns="0" rIns="0" bIns="0" rtlCol="0" anchor="ctr"/>
-          <a:lstStyle/>
-          <a:p>
-            <a:pPr algn="ctr" indent="0" marL="0">
-              <a:buNone/>
-            </a:pPr>
-            <a:r>
-              <a:rPr lang="en-US" sz="1000" dirty="0">
-                <a:solidFill>
-                  <a:srgbClr val="003A63"/>
-                </a:solidFill>
-                <a:latin typeface="Aptos" pitchFamily="34" charset="0"/>
-                <a:ea typeface="Aptos" pitchFamily="34" charset="-122"/>
-                <a:cs typeface="Aptos" pitchFamily="34" charset="-120"/>
-              </a:rPr>
-              <a:t>Concept to action</a:t>
-            </a:r>
-            <a:endParaRPr lang="en-US" sz="1000" dirty="0"/>
-          </a:p>
-        </p:txBody>
-      </p:sp>
-      <p:sp>
-        <p:nvSpPr>
-          <p:cNvPr id="18" name="Shape 16"/>
           <p:cNvSpPr/>
           <p:nvPr/>
         </p:nvSpPr>
@@ -12205,7 +11791,7 @@
       </p:sp>
       <p:sp>
         <p:nvSpPr>
-          <p:cNvPr id="19" name="Text 17"/>
+          <p:cNvPr id="17" name="Text 15"/>
           <p:cNvSpPr/>
           <p:nvPr/>
         </p:nvSpPr>
@@ -12244,7 +11830,7 @@
       </p:sp>
       <p:sp>
         <p:nvSpPr>
-          <p:cNvPr id="20" name="Text 18"/>
+          <p:cNvPr id="18" name="Text 16"/>
           <p:cNvSpPr/>
           <p:nvPr/>
         </p:nvSpPr>
@@ -12752,13 +12338,11 @@
             </a:avLst>
           </a:prstGeom>
           <a:solidFill>
-            <a:srgbClr val="FFFFFF">
-              <a:alpha val="88000"/>
-            </a:srgbClr>
+            <a:srgbClr val="FFFFFF"/>
           </a:solidFill>
           <a:ln w="12700">
             <a:solidFill>
-              <a:srgbClr val="D6E8F2"/>
+              <a:srgbClr val="B9D7E6"/>
             </a:solidFill>
             <a:prstDash val="solid"/>
           </a:ln>
@@ -12766,119 +12350,112 @@
       </p:sp>
       <p:sp>
         <p:nvSpPr>
-          <p:cNvPr id="14" name="Shape 12"/>
-          <p:cNvSpPr/>
-          <p:nvPr/>
-        </p:nvSpPr>
-        <p:spPr>
-          <a:xfrm>
-            <a:off x="8074152" y="3291840"/>
-            <a:ext cx="2596896" cy="749808"/>
-          </a:xfrm>
-          <a:prstGeom prst="rect">
-            <a:avLst/>
-          </a:prstGeom>
-          <a:solidFill>
-            <a:srgbClr val="EAF6F8"/>
-          </a:solidFill>
-          <a:ln w="12700">
-            <a:solidFill>
-              <a:srgbClr val="8ABBD8"/>
-            </a:solidFill>
-            <a:prstDash val="solid"/>
-          </a:ln>
-        </p:spPr>
-      </p:sp>
-      <p:sp>
-        <p:nvSpPr>
-          <p:cNvPr id="15" name="Shape 13"/>
-          <p:cNvSpPr/>
-          <p:nvPr/>
-        </p:nvSpPr>
-        <p:spPr>
-          <a:xfrm>
-            <a:off x="8202168" y="3721608"/>
-            <a:ext cx="2340864" cy="0"/>
-          </a:xfrm>
-          <a:prstGeom prst="line">
-            <a:avLst/>
-          </a:prstGeom>
-          <a:noFill/>
-          <a:ln w="19050">
-            <a:solidFill>
-              <a:srgbClr val="0068B7"/>
-            </a:solidFill>
-            <a:prstDash val="solid"/>
-          </a:ln>
-        </p:spPr>
+          <p:cNvPr id="14" name="Text 12"/>
+          <p:cNvSpPr/>
+          <p:nvPr/>
+        </p:nvSpPr>
+        <p:spPr>
+          <a:xfrm>
+            <a:off x="7799832" y="2935224"/>
+            <a:ext cx="3145536" cy="256032"/>
+          </a:xfrm>
+          <a:prstGeom prst="rect">
+            <a:avLst/>
+          </a:prstGeom>
+          <a:noFill/>
+          <a:ln/>
+        </p:spPr>
+        <p:txBody>
+          <a:bodyPr wrap="square" lIns="0" tIns="0" rIns="0" bIns="0" rtlCol="0" anchor="ctr"/>
+          <a:lstStyle/>
+          <a:p>
+            <a:pPr indent="0" marL="0">
+              <a:buNone/>
+            </a:pPr>
+            <a:r>
+              <a:rPr lang="en-US" sz="1300" b="1" dirty="0">
+                <a:solidFill>
+                  <a:srgbClr val="0068B7"/>
+                </a:solidFill>
+                <a:latin typeface="Aptos" pitchFamily="34" charset="0"/>
+                <a:ea typeface="Aptos" pitchFamily="34" charset="-122"/>
+                <a:cs typeface="Aptos" pitchFamily="34" charset="-120"/>
+              </a:rPr>
+              <a:t>Concept checkpoints</a:t>
+            </a:r>
+            <a:endParaRPr lang="en-US" sz="1300" dirty="0"/>
+          </a:p>
+        </p:txBody>
+      </p:sp>
+      <p:sp>
+        <p:nvSpPr>
+          <p:cNvPr id="15" name="Text 13"/>
+          <p:cNvSpPr/>
+          <p:nvPr/>
+        </p:nvSpPr>
+        <p:spPr>
+          <a:xfrm>
+            <a:off x="7818120" y="3300984"/>
+            <a:ext cx="3090672" cy="877824"/>
+          </a:xfrm>
+          <a:prstGeom prst="rect">
+            <a:avLst/>
+          </a:prstGeom>
+          <a:noFill/>
+          <a:ln/>
+        </p:spPr>
+        <p:txBody>
+          <a:bodyPr wrap="square" lIns="254" tIns="254" rIns="254" bIns="254" rtlCol="0" anchor="t">
+            <a:normAutofit/>
+          </a:bodyPr>
+          <a:lstStyle/>
+          <a:p>
+            <a:r>
+              <a:rPr lang="en-US" sz="1380" dirty="0">
+                <a:solidFill>
+                  <a:srgbClr val="17364A"/>
+                </a:solidFill>
+                <a:latin typeface="Aptos" pitchFamily="34" charset="0"/>
+                <a:ea typeface="Aptos" pitchFamily="34" charset="-122"/>
+                <a:cs typeface="Aptos" pitchFamily="34" charset="-120"/>
+              </a:rPr>
+              <a:t>WHO Ethics and Governance of Artificial Intelligence for Health:.</a:t>
+            </a:r>
+            <a:endParaRPr lang="en-US" sz="1380" dirty="0"/>
+          </a:p>
+          <a:p>
+            <a:r>
+              <a:rPr lang="en-US" sz="1380" dirty="0">
+                <a:solidFill>
+                  <a:srgbClr val="17364A"/>
+                </a:solidFill>
+                <a:latin typeface="Aptos" pitchFamily="34" charset="0"/>
+                <a:ea typeface="Aptos" pitchFamily="34" charset="-122"/>
+                <a:cs typeface="Aptos" pitchFamily="34" charset="-120"/>
+              </a:rPr>
+              <a:t>NIST Artificial Intelligence Risk Management Framework:.</a:t>
+            </a:r>
+            <a:endParaRPr lang="en-US" sz="1380" dirty="0"/>
+          </a:p>
+          <a:p>
+            <a:r>
+              <a:rPr lang="en-US" sz="1380" dirty="0">
+                <a:solidFill>
+                  <a:srgbClr val="17364A"/>
+                </a:solidFill>
+                <a:latin typeface="Aptos" pitchFamily="34" charset="0"/>
+                <a:ea typeface="Aptos" pitchFamily="34" charset="-122"/>
+                <a:cs typeface="Aptos" pitchFamily="34" charset="-120"/>
+              </a:rPr>
+              <a:t>CDC Public Health Data Strategy:.</a:t>
+            </a:r>
+            <a:endParaRPr lang="en-US" sz="1380" dirty="0"/>
+          </a:p>
+        </p:txBody>
       </p:sp>
       <p:sp>
         <p:nvSpPr>
           <p:cNvPr id="16" name="Shape 14"/>
-          <p:cNvSpPr/>
-          <p:nvPr/>
-        </p:nvSpPr>
-        <p:spPr>
-          <a:xfrm>
-            <a:off x="9198864" y="4206240"/>
-            <a:ext cx="347472" cy="347472"/>
-          </a:xfrm>
-          <a:prstGeom prst="ellipse">
-            <a:avLst/>
-          </a:prstGeom>
-          <a:solidFill>
-            <a:srgbClr val="2F8A28"/>
-          </a:solidFill>
-          <a:ln w="12700">
-            <a:solidFill>
-              <a:srgbClr val="2F8A28"/>
-            </a:solidFill>
-            <a:prstDash val="solid"/>
-          </a:ln>
-        </p:spPr>
-      </p:sp>
-      <p:sp>
-        <p:nvSpPr>
-          <p:cNvPr id="17" name="Text 15"/>
-          <p:cNvSpPr/>
-          <p:nvPr/>
-        </p:nvSpPr>
-        <p:spPr>
-          <a:xfrm>
-            <a:off x="7909560" y="3977640"/>
-            <a:ext cx="2926080" cy="182880"/>
-          </a:xfrm>
-          <a:prstGeom prst="rect">
-            <a:avLst/>
-          </a:prstGeom>
-          <a:noFill/>
-          <a:ln/>
-        </p:spPr>
-        <p:txBody>
-          <a:bodyPr wrap="square" lIns="0" tIns="0" rIns="0" bIns="0" rtlCol="0" anchor="ctr"/>
-          <a:lstStyle/>
-          <a:p>
-            <a:pPr algn="ctr" indent="0" marL="0">
-              <a:buNone/>
-            </a:pPr>
-            <a:r>
-              <a:rPr lang="en-US" sz="1000" dirty="0">
-                <a:solidFill>
-                  <a:srgbClr val="003A63"/>
-                </a:solidFill>
-                <a:latin typeface="Aptos" pitchFamily="34" charset="0"/>
-                <a:ea typeface="Aptos" pitchFamily="34" charset="-122"/>
-                <a:cs typeface="Aptos" pitchFamily="34" charset="-120"/>
-              </a:rPr>
-              <a:t>Concept to action</a:t>
-            </a:r>
-            <a:endParaRPr lang="en-US" sz="1000" dirty="0"/>
-          </a:p>
-        </p:txBody>
-      </p:sp>
-      <p:sp>
-        <p:nvSpPr>
-          <p:cNvPr id="18" name="Shape 16"/>
           <p:cNvSpPr/>
           <p:nvPr/>
         </p:nvSpPr>
@@ -12905,7 +12482,7 @@
       </p:sp>
       <p:sp>
         <p:nvSpPr>
-          <p:cNvPr id="19" name="Text 17"/>
+          <p:cNvPr id="17" name="Text 15"/>
           <p:cNvSpPr/>
           <p:nvPr/>
         </p:nvSpPr>
@@ -12944,7 +12521,7 @@
       </p:sp>
       <p:sp>
         <p:nvSpPr>
-          <p:cNvPr id="20" name="Text 18"/>
+          <p:cNvPr id="18" name="Text 16"/>
           <p:cNvSpPr/>
           <p:nvPr/>
         </p:nvSpPr>
@@ -13457,20 +13034,20 @@
         </p:nvSpPr>
         <p:spPr>
           <a:xfrm>
-            <a:off x="7818120" y="3977640"/>
-            <a:ext cx="972312" cy="749808"/>
+            <a:off x="8046720" y="3794760"/>
+            <a:ext cx="3063240" cy="1600200"/>
           </a:xfrm>
           <a:prstGeom prst="roundRect">
             <a:avLst>
-              <a:gd name="adj" fmla="val 14634"/>
+              <a:gd name="adj" fmla="val 6857"/>
             </a:avLst>
           </a:prstGeom>
           <a:solidFill>
-            <a:srgbClr val="0068B7"/>
+            <a:srgbClr val="FFFFFF"/>
           </a:solidFill>
           <a:ln w="12700">
             <a:solidFill>
-              <a:srgbClr val="0068B7"/>
+              <a:srgbClr val="B9D7E6"/>
             </a:solidFill>
             <a:prstDash val="solid"/>
           </a:ln>
@@ -13484,172 +13061,100 @@
         </p:nvSpPr>
         <p:spPr>
           <a:xfrm>
-            <a:off x="7891272" y="4169664"/>
-            <a:ext cx="826008" cy="310896"/>
-          </a:xfrm>
-          <a:prstGeom prst="rect">
-            <a:avLst/>
-          </a:prstGeom>
-          <a:noFill/>
-          <a:ln/>
-        </p:spPr>
-        <p:txBody>
-          <a:bodyPr wrap="square" lIns="0" tIns="0" rIns="0" bIns="0" rtlCol="0" anchor="ctr">
+            <a:off x="8211312" y="3941064"/>
+            <a:ext cx="2734056" cy="256032"/>
+          </a:xfrm>
+          <a:prstGeom prst="rect">
+            <a:avLst/>
+          </a:prstGeom>
+          <a:noFill/>
+          <a:ln/>
+        </p:spPr>
+        <p:txBody>
+          <a:bodyPr wrap="square" lIns="0" tIns="0" rIns="0" bIns="0" rtlCol="0" anchor="ctr"/>
+          <a:lstStyle/>
+          <a:p>
+            <a:pPr indent="0" marL="0">
+              <a:buNone/>
+            </a:pPr>
+            <a:r>
+              <a:rPr lang="en-US" sz="1300" b="1" dirty="0">
+                <a:solidFill>
+                  <a:srgbClr val="0068B7"/>
+                </a:solidFill>
+                <a:latin typeface="Aptos" pitchFamily="34" charset="0"/>
+                <a:ea typeface="Aptos" pitchFamily="34" charset="-122"/>
+                <a:cs typeface="Aptos" pitchFamily="34" charset="-120"/>
+              </a:rPr>
+              <a:t>Use the play links to</a:t>
+            </a:r>
+            <a:endParaRPr lang="en-US" sz="1300" dirty="0"/>
+          </a:p>
+        </p:txBody>
+      </p:sp>
+      <p:sp>
+        <p:nvSpPr>
+          <p:cNvPr id="15" name="Text 13"/>
+          <p:cNvSpPr/>
+          <p:nvPr/>
+        </p:nvSpPr>
+        <p:spPr>
+          <a:xfrm>
+            <a:off x="8229600" y="4306824"/>
+            <a:ext cx="2679192" cy="941832"/>
+          </a:xfrm>
+          <a:prstGeom prst="rect">
+            <a:avLst/>
+          </a:prstGeom>
+          <a:noFill/>
+          <a:ln/>
+        </p:spPr>
+        <p:txBody>
+          <a:bodyPr wrap="square" lIns="254" tIns="254" rIns="254" bIns="254" rtlCol="0" anchor="t">
             <a:normAutofit/>
           </a:bodyPr>
           <a:lstStyle/>
           <a:p>
-            <a:pPr algn="ctr" indent="0" marL="0">
-              <a:buNone/>
-            </a:pPr>
-            <a:r>
-              <a:rPr lang="en-US" sz="1500" b="1" dirty="0">
-                <a:solidFill>
-                  <a:srgbClr val="FFFFFF"/>
-                </a:solidFill>
-                <a:latin typeface="Aptos" pitchFamily="34" charset="0"/>
-                <a:ea typeface="Aptos" pitchFamily="34" charset="-122"/>
-                <a:cs typeface="Aptos" pitchFamily="34" charset="-120"/>
-              </a:rPr>
-              <a:t>Lesson</a:t>
-            </a:r>
-            <a:endParaRPr lang="en-US" sz="1500" dirty="0"/>
-          </a:p>
-        </p:txBody>
-      </p:sp>
-      <p:sp>
-        <p:nvSpPr>
-          <p:cNvPr id="15" name="Shape 13"/>
-          <p:cNvSpPr/>
-          <p:nvPr/>
-        </p:nvSpPr>
-        <p:spPr>
-          <a:xfrm>
-            <a:off x="9046464" y="3977640"/>
-            <a:ext cx="972312" cy="749808"/>
-          </a:xfrm>
-          <a:prstGeom prst="roundRect">
-            <a:avLst>
-              <a:gd name="adj" fmla="val 14634"/>
-            </a:avLst>
-          </a:prstGeom>
-          <a:solidFill>
-            <a:srgbClr val="2F8A28"/>
-          </a:solidFill>
-          <a:ln w="12700">
-            <a:solidFill>
-              <a:srgbClr val="2F8A28"/>
-            </a:solidFill>
-            <a:prstDash val="solid"/>
-          </a:ln>
-        </p:spPr>
-      </p:sp>
-      <p:sp>
-        <p:nvSpPr>
-          <p:cNvPr id="16" name="Text 14"/>
-          <p:cNvSpPr/>
-          <p:nvPr/>
-        </p:nvSpPr>
-        <p:spPr>
-          <a:xfrm>
-            <a:off x="9119616" y="4169664"/>
-            <a:ext cx="826008" cy="310896"/>
-          </a:xfrm>
-          <a:prstGeom prst="rect">
-            <a:avLst/>
-          </a:prstGeom>
-          <a:noFill/>
-          <a:ln/>
-        </p:spPr>
-        <p:txBody>
-          <a:bodyPr wrap="square" lIns="0" tIns="0" rIns="0" bIns="0" rtlCol="0" anchor="ctr">
-            <a:normAutofit/>
-          </a:bodyPr>
-          <a:lstStyle/>
-          <a:p>
-            <a:pPr algn="ctr" indent="0" marL="0">
-              <a:buNone/>
-            </a:pPr>
-            <a:r>
-              <a:rPr lang="en-US" sz="1500" b="1" dirty="0">
-                <a:solidFill>
-                  <a:srgbClr val="FFFFFF"/>
-                </a:solidFill>
-                <a:latin typeface="Aptos" pitchFamily="34" charset="0"/>
-                <a:ea typeface="Aptos" pitchFamily="34" charset="-122"/>
-                <a:cs typeface="Aptos" pitchFamily="34" charset="-120"/>
-              </a:rPr>
-              <a:t>Plays</a:t>
-            </a:r>
-            <a:endParaRPr lang="en-US" sz="1500" dirty="0"/>
-          </a:p>
-        </p:txBody>
-      </p:sp>
-      <p:sp>
-        <p:nvSpPr>
-          <p:cNvPr id="17" name="Shape 15"/>
-          <p:cNvSpPr/>
-          <p:nvPr/>
-        </p:nvSpPr>
-        <p:spPr>
-          <a:xfrm>
-            <a:off x="10274808" y="3977640"/>
-            <a:ext cx="972312" cy="749808"/>
-          </a:xfrm>
-          <a:prstGeom prst="roundRect">
-            <a:avLst>
-              <a:gd name="adj" fmla="val 14634"/>
-            </a:avLst>
-          </a:prstGeom>
-          <a:solidFill>
-            <a:srgbClr val="6A4CA3"/>
-          </a:solidFill>
-          <a:ln w="12700">
-            <a:solidFill>
-              <a:srgbClr val="6A4CA3"/>
-            </a:solidFill>
-            <a:prstDash val="solid"/>
-          </a:ln>
-        </p:spPr>
-      </p:sp>
-      <p:sp>
-        <p:nvSpPr>
-          <p:cNvPr id="18" name="Text 16"/>
-          <p:cNvSpPr/>
-          <p:nvPr/>
-        </p:nvSpPr>
-        <p:spPr>
-          <a:xfrm>
-            <a:off x="10347960" y="4169664"/>
-            <a:ext cx="826008" cy="310896"/>
-          </a:xfrm>
-          <a:prstGeom prst="rect">
-            <a:avLst/>
-          </a:prstGeom>
-          <a:noFill/>
-          <a:ln/>
-        </p:spPr>
-        <p:txBody>
-          <a:bodyPr wrap="square" lIns="0" tIns="0" rIns="0" bIns="0" rtlCol="0" anchor="ctr">
-            <a:normAutofit/>
-          </a:bodyPr>
-          <a:lstStyle/>
-          <a:p>
-            <a:pPr algn="ctr" indent="0" marL="0">
-              <a:buNone/>
-            </a:pPr>
-            <a:r>
-              <a:rPr lang="en-US" sz="1500" b="1" dirty="0">
-                <a:solidFill>
-                  <a:srgbClr val="FFFFFF"/>
-                </a:solidFill>
-                <a:latin typeface="Aptos" pitchFamily="34" charset="0"/>
-                <a:ea typeface="Aptos" pitchFamily="34" charset="-122"/>
-                <a:cs typeface="Aptos" pitchFamily="34" charset="-120"/>
-              </a:rPr>
-              <a:t>Action</a:t>
-            </a:r>
-            <a:endParaRPr lang="en-US" sz="1500" dirty="0"/>
+            <a:r>
+              <a:rPr lang="en-US" sz="1380" dirty="0">
+                <a:solidFill>
+                  <a:srgbClr val="17364A"/>
+                </a:solidFill>
+                <a:latin typeface="Aptos" pitchFamily="34" charset="0"/>
+                <a:ea typeface="Aptos" pitchFamily="34" charset="-122"/>
+                <a:cs typeface="Aptos" pitchFamily="34" charset="-120"/>
+              </a:rPr>
+              <a:t>Locate the decision point in the playbook sequence.</a:t>
+            </a:r>
+            <a:endParaRPr lang="en-US" sz="1380" dirty="0"/>
+          </a:p>
+          <a:p>
+            <a:r>
+              <a:rPr lang="en-US" sz="1380" dirty="0">
+                <a:solidFill>
+                  <a:srgbClr val="17364A"/>
+                </a:solidFill>
+                <a:latin typeface="Aptos" pitchFamily="34" charset="0"/>
+                <a:ea typeface="Aptos" pitchFamily="34" charset="-122"/>
+                <a:cs typeface="Aptos" pitchFamily="34" charset="-120"/>
+              </a:rPr>
+              <a:t>Identify who should participate in the work.</a:t>
+            </a:r>
+            <a:endParaRPr lang="en-US" sz="1380" dirty="0"/>
+          </a:p>
+          <a:p>
+            <a:r>
+              <a:rPr lang="en-US" sz="1380" dirty="0">
+                <a:solidFill>
+                  <a:srgbClr val="17364A"/>
+                </a:solidFill>
+                <a:latin typeface="Aptos" pitchFamily="34" charset="0"/>
+                <a:ea typeface="Aptos" pitchFamily="34" charset="-122"/>
+                <a:cs typeface="Aptos" pitchFamily="34" charset="-120"/>
+              </a:rPr>
+              <a:t>Document the review, approval, or implementation step.</a:t>
+            </a:r>
+            <a:endParaRPr lang="en-US" sz="1380" dirty="0"/>
           </a:p>
         </p:txBody>
       </p:sp>
@@ -14127,20 +13632,20 @@
         </p:nvSpPr>
         <p:spPr>
           <a:xfrm>
-            <a:off x="7818120" y="3977640"/>
-            <a:ext cx="972312" cy="749808"/>
+            <a:off x="8046720" y="3794760"/>
+            <a:ext cx="3063240" cy="1600200"/>
           </a:xfrm>
           <a:prstGeom prst="roundRect">
             <a:avLst>
-              <a:gd name="adj" fmla="val 14634"/>
+              <a:gd name="adj" fmla="val 6857"/>
             </a:avLst>
           </a:prstGeom>
           <a:solidFill>
-            <a:srgbClr val="0068B7"/>
+            <a:srgbClr val="FFFFFF"/>
           </a:solidFill>
           <a:ln w="12700">
             <a:solidFill>
-              <a:srgbClr val="0068B7"/>
+              <a:srgbClr val="B9D7E6"/>
             </a:solidFill>
             <a:prstDash val="solid"/>
           </a:ln>
@@ -14154,172 +13659,100 @@
         </p:nvSpPr>
         <p:spPr>
           <a:xfrm>
-            <a:off x="7891272" y="4169664"/>
-            <a:ext cx="826008" cy="310896"/>
-          </a:xfrm>
-          <a:prstGeom prst="rect">
-            <a:avLst/>
-          </a:prstGeom>
-          <a:noFill/>
-          <a:ln/>
-        </p:spPr>
-        <p:txBody>
-          <a:bodyPr wrap="square" lIns="0" tIns="0" rIns="0" bIns="0" rtlCol="0" anchor="ctr">
+            <a:off x="8211312" y="3941064"/>
+            <a:ext cx="2734056" cy="256032"/>
+          </a:xfrm>
+          <a:prstGeom prst="rect">
+            <a:avLst/>
+          </a:prstGeom>
+          <a:noFill/>
+          <a:ln/>
+        </p:spPr>
+        <p:txBody>
+          <a:bodyPr wrap="square" lIns="0" tIns="0" rIns="0" bIns="0" rtlCol="0" anchor="ctr"/>
+          <a:lstStyle/>
+          <a:p>
+            <a:pPr indent="0" marL="0">
+              <a:buNone/>
+            </a:pPr>
+            <a:r>
+              <a:rPr lang="en-US" sz="1300" b="1" dirty="0">
+                <a:solidFill>
+                  <a:srgbClr val="0068B7"/>
+                </a:solidFill>
+                <a:latin typeface="Aptos" pitchFamily="34" charset="0"/>
+                <a:ea typeface="Aptos" pitchFamily="34" charset="-122"/>
+                <a:cs typeface="Aptos" pitchFamily="34" charset="-120"/>
+              </a:rPr>
+              <a:t>Tool selection cues</a:t>
+            </a:r>
+            <a:endParaRPr lang="en-US" sz="1300" dirty="0"/>
+          </a:p>
+        </p:txBody>
+      </p:sp>
+      <p:sp>
+        <p:nvSpPr>
+          <p:cNvPr id="15" name="Text 13"/>
+          <p:cNvSpPr/>
+          <p:nvPr/>
+        </p:nvSpPr>
+        <p:spPr>
+          <a:xfrm>
+            <a:off x="8229600" y="4306824"/>
+            <a:ext cx="2679192" cy="941832"/>
+          </a:xfrm>
+          <a:prstGeom prst="rect">
+            <a:avLst/>
+          </a:prstGeom>
+          <a:noFill/>
+          <a:ln/>
+        </p:spPr>
+        <p:txBody>
+          <a:bodyPr wrap="square" lIns="254" tIns="254" rIns="254" bIns="254" rtlCol="0" anchor="t">
             <a:normAutofit/>
           </a:bodyPr>
           <a:lstStyle/>
           <a:p>
-            <a:pPr algn="ctr" indent="0" marL="0">
-              <a:buNone/>
-            </a:pPr>
-            <a:r>
-              <a:rPr lang="en-US" sz="1500" b="1" dirty="0">
-                <a:solidFill>
-                  <a:srgbClr val="FFFFFF"/>
-                </a:solidFill>
-                <a:latin typeface="Aptos" pitchFamily="34" charset="0"/>
-                <a:ea typeface="Aptos" pitchFamily="34" charset="-122"/>
-                <a:cs typeface="Aptos" pitchFamily="34" charset="-120"/>
-              </a:rPr>
-              <a:t>Concept</a:t>
-            </a:r>
-            <a:endParaRPr lang="en-US" sz="1500" dirty="0"/>
-          </a:p>
-        </p:txBody>
-      </p:sp>
-      <p:sp>
-        <p:nvSpPr>
-          <p:cNvPr id="15" name="Shape 13"/>
-          <p:cNvSpPr/>
-          <p:nvPr/>
-        </p:nvSpPr>
-        <p:spPr>
-          <a:xfrm>
-            <a:off x="9046464" y="3977640"/>
-            <a:ext cx="972312" cy="749808"/>
-          </a:xfrm>
-          <a:prstGeom prst="roundRect">
-            <a:avLst>
-              <a:gd name="adj" fmla="val 14634"/>
-            </a:avLst>
-          </a:prstGeom>
-          <a:solidFill>
-            <a:srgbClr val="2F8A28"/>
-          </a:solidFill>
-          <a:ln w="12700">
-            <a:solidFill>
-              <a:srgbClr val="2F8A28"/>
-            </a:solidFill>
-            <a:prstDash val="solid"/>
-          </a:ln>
-        </p:spPr>
-      </p:sp>
-      <p:sp>
-        <p:nvSpPr>
-          <p:cNvPr id="16" name="Text 14"/>
-          <p:cNvSpPr/>
-          <p:nvPr/>
-        </p:nvSpPr>
-        <p:spPr>
-          <a:xfrm>
-            <a:off x="9119616" y="4169664"/>
-            <a:ext cx="826008" cy="310896"/>
-          </a:xfrm>
-          <a:prstGeom prst="rect">
-            <a:avLst/>
-          </a:prstGeom>
-          <a:noFill/>
-          <a:ln/>
-        </p:spPr>
-        <p:txBody>
-          <a:bodyPr wrap="square" lIns="0" tIns="0" rIns="0" bIns="0" rtlCol="0" anchor="ctr">
-            <a:normAutofit/>
-          </a:bodyPr>
-          <a:lstStyle/>
-          <a:p>
-            <a:pPr algn="ctr" indent="0" marL="0">
-              <a:buNone/>
-            </a:pPr>
-            <a:r>
-              <a:rPr lang="en-US" sz="1500" b="1" dirty="0">
-                <a:solidFill>
-                  <a:srgbClr val="FFFFFF"/>
-                </a:solidFill>
-                <a:latin typeface="Aptos" pitchFamily="34" charset="0"/>
-                <a:ea typeface="Aptos" pitchFamily="34" charset="-122"/>
-                <a:cs typeface="Aptos" pitchFamily="34" charset="-120"/>
-              </a:rPr>
-              <a:t>Tool</a:t>
-            </a:r>
-            <a:endParaRPr lang="en-US" sz="1500" dirty="0"/>
-          </a:p>
-        </p:txBody>
-      </p:sp>
-      <p:sp>
-        <p:nvSpPr>
-          <p:cNvPr id="17" name="Shape 15"/>
-          <p:cNvSpPr/>
-          <p:nvPr/>
-        </p:nvSpPr>
-        <p:spPr>
-          <a:xfrm>
-            <a:off x="10274808" y="3977640"/>
-            <a:ext cx="972312" cy="749808"/>
-          </a:xfrm>
-          <a:prstGeom prst="roundRect">
-            <a:avLst>
-              <a:gd name="adj" fmla="val 14634"/>
-            </a:avLst>
-          </a:prstGeom>
-          <a:solidFill>
-            <a:srgbClr val="D69A2D"/>
-          </a:solidFill>
-          <a:ln w="12700">
-            <a:solidFill>
-              <a:srgbClr val="D69A2D"/>
-            </a:solidFill>
-            <a:prstDash val="solid"/>
-          </a:ln>
-        </p:spPr>
-      </p:sp>
-      <p:sp>
-        <p:nvSpPr>
-          <p:cNvPr id="18" name="Text 16"/>
-          <p:cNvSpPr/>
-          <p:nvPr/>
-        </p:nvSpPr>
-        <p:spPr>
-          <a:xfrm>
-            <a:off x="10347960" y="4169664"/>
-            <a:ext cx="826008" cy="310896"/>
-          </a:xfrm>
-          <a:prstGeom prst="rect">
-            <a:avLst/>
-          </a:prstGeom>
-          <a:noFill/>
-          <a:ln/>
-        </p:spPr>
-        <p:txBody>
-          <a:bodyPr wrap="square" lIns="0" tIns="0" rIns="0" bIns="0" rtlCol="0" anchor="ctr">
-            <a:normAutofit/>
-          </a:bodyPr>
-          <a:lstStyle/>
-          <a:p>
-            <a:pPr algn="ctr" indent="0" marL="0">
-              <a:buNone/>
-            </a:pPr>
-            <a:r>
-              <a:rPr lang="en-US" sz="1500" b="1" dirty="0">
-                <a:solidFill>
-                  <a:srgbClr val="FFFFFF"/>
-                </a:solidFill>
-                <a:latin typeface="Aptos" pitchFamily="34" charset="0"/>
-                <a:ea typeface="Aptos" pitchFamily="34" charset="-122"/>
-                <a:cs typeface="Aptos" pitchFamily="34" charset="-120"/>
-              </a:rPr>
-              <a:t>Artifact</a:t>
-            </a:r>
-            <a:endParaRPr lang="en-US" sz="1500" dirty="0"/>
+            <a:r>
+              <a:rPr lang="en-US" sz="1380" dirty="0">
+                <a:solidFill>
+                  <a:srgbClr val="17364A"/>
+                </a:solidFill>
+                <a:latin typeface="Aptos" pitchFamily="34" charset="0"/>
+                <a:ea typeface="Aptos" pitchFamily="34" charset="-122"/>
+                <a:cs typeface="Aptos" pitchFamily="34" charset="-120"/>
+              </a:rPr>
+              <a:t>Use a tool when no comparable local process exists.</a:t>
+            </a:r>
+            <a:endParaRPr lang="en-US" sz="1380" dirty="0"/>
+          </a:p>
+          <a:p>
+            <a:r>
+              <a:rPr lang="en-US" sz="1380" dirty="0">
+                <a:solidFill>
+                  <a:srgbClr val="17364A"/>
+                </a:solidFill>
+                <a:latin typeface="Aptos" pitchFamily="34" charset="0"/>
+                <a:ea typeface="Aptos" pitchFamily="34" charset="-122"/>
+                <a:cs typeface="Aptos" pitchFamily="34" charset="-120"/>
+              </a:rPr>
+              <a:t>Adapt existing department templates when they already fit the purpose.</a:t>
+            </a:r>
+            <a:endParaRPr lang="en-US" sz="1380" dirty="0"/>
+          </a:p>
+          <a:p>
+            <a:r>
+              <a:rPr lang="en-US" sz="1380" dirty="0">
+                <a:solidFill>
+                  <a:srgbClr val="17364A"/>
+                </a:solidFill>
+                <a:latin typeface="Aptos" pitchFamily="34" charset="0"/>
+                <a:ea typeface="Aptos" pitchFamily="34" charset="-122"/>
+                <a:cs typeface="Aptos" pitchFamily="34" charset="-120"/>
+              </a:rPr>
+              <a:t>Save the completed artifact as evidence of the decision.</a:t>
+            </a:r>
+            <a:endParaRPr lang="en-US" sz="1380" dirty="0"/>
           </a:p>
         </p:txBody>
       </p:sp>
@@ -14792,13 +14225,11 @@
             </a:avLst>
           </a:prstGeom>
           <a:solidFill>
-            <a:srgbClr val="FFFFFF">
-              <a:alpha val="88000"/>
-            </a:srgbClr>
+            <a:srgbClr val="FFFFFF"/>
           </a:solidFill>
           <a:ln w="12700">
             <a:solidFill>
-              <a:srgbClr val="D6E8F2"/>
+              <a:srgbClr val="B9D7E6"/>
             </a:solidFill>
             <a:prstDash val="solid"/>
           </a:ln>
@@ -14806,119 +14237,112 @@
       </p:sp>
       <p:sp>
         <p:nvSpPr>
-          <p:cNvPr id="14" name="Shape 12"/>
-          <p:cNvSpPr/>
-          <p:nvPr/>
-        </p:nvSpPr>
-        <p:spPr>
-          <a:xfrm>
-            <a:off x="8074152" y="3291840"/>
-            <a:ext cx="2596896" cy="749808"/>
-          </a:xfrm>
-          <a:prstGeom prst="rect">
-            <a:avLst/>
-          </a:prstGeom>
-          <a:solidFill>
-            <a:srgbClr val="EAF6F8"/>
-          </a:solidFill>
-          <a:ln w="12700">
-            <a:solidFill>
-              <a:srgbClr val="8ABBD8"/>
-            </a:solidFill>
-            <a:prstDash val="solid"/>
-          </a:ln>
-        </p:spPr>
-      </p:sp>
-      <p:sp>
-        <p:nvSpPr>
-          <p:cNvPr id="15" name="Shape 13"/>
-          <p:cNvSpPr/>
-          <p:nvPr/>
-        </p:nvSpPr>
-        <p:spPr>
-          <a:xfrm>
-            <a:off x="8202168" y="3721608"/>
-            <a:ext cx="2340864" cy="0"/>
-          </a:xfrm>
-          <a:prstGeom prst="line">
-            <a:avLst/>
-          </a:prstGeom>
-          <a:noFill/>
-          <a:ln w="19050">
-            <a:solidFill>
-              <a:srgbClr val="0068B7"/>
-            </a:solidFill>
-            <a:prstDash val="solid"/>
-          </a:ln>
-        </p:spPr>
+          <p:cNvPr id="14" name="Text 12"/>
+          <p:cNvSpPr/>
+          <p:nvPr/>
+        </p:nvSpPr>
+        <p:spPr>
+          <a:xfrm>
+            <a:off x="7799832" y="2935224"/>
+            <a:ext cx="3145536" cy="256032"/>
+          </a:xfrm>
+          <a:prstGeom prst="rect">
+            <a:avLst/>
+          </a:prstGeom>
+          <a:noFill/>
+          <a:ln/>
+        </p:spPr>
+        <p:txBody>
+          <a:bodyPr wrap="square" lIns="0" tIns="0" rIns="0" bIns="0" rtlCol="0" anchor="ctr"/>
+          <a:lstStyle/>
+          <a:p>
+            <a:pPr indent="0" marL="0">
+              <a:buNone/>
+            </a:pPr>
+            <a:r>
+              <a:rPr lang="en-US" sz="1300" b="1" dirty="0">
+                <a:solidFill>
+                  <a:srgbClr val="0068B7"/>
+                </a:solidFill>
+                <a:latin typeface="Aptos" pitchFamily="34" charset="0"/>
+                <a:ea typeface="Aptos" pitchFamily="34" charset="-122"/>
+                <a:cs typeface="Aptos" pitchFamily="34" charset="-120"/>
+              </a:rPr>
+              <a:t>Concept checkpoints</a:t>
+            </a:r>
+            <a:endParaRPr lang="en-US" sz="1300" dirty="0"/>
+          </a:p>
+        </p:txBody>
+      </p:sp>
+      <p:sp>
+        <p:nvSpPr>
+          <p:cNvPr id="15" name="Text 13"/>
+          <p:cNvSpPr/>
+          <p:nvPr/>
+        </p:nvSpPr>
+        <p:spPr>
+          <a:xfrm>
+            <a:off x="7818120" y="3300984"/>
+            <a:ext cx="3090672" cy="877824"/>
+          </a:xfrm>
+          <a:prstGeom prst="rect">
+            <a:avLst/>
+          </a:prstGeom>
+          <a:noFill/>
+          <a:ln/>
+        </p:spPr>
+        <p:txBody>
+          <a:bodyPr wrap="square" lIns="254" tIns="254" rIns="254" bIns="254" rtlCol="0" anchor="t">
+            <a:normAutofit/>
+          </a:bodyPr>
+          <a:lstStyle/>
+          <a:p>
+            <a:r>
+              <a:rPr lang="en-US" sz="1380" dirty="0">
+                <a:solidFill>
+                  <a:srgbClr val="17364A"/>
+                </a:solidFill>
+                <a:latin typeface="Aptos" pitchFamily="34" charset="0"/>
+                <a:ea typeface="Aptos" pitchFamily="34" charset="-122"/>
+                <a:cs typeface="Aptos" pitchFamily="34" charset="-120"/>
+              </a:rPr>
+              <a:t>Identify how AI can support public health values, including equity, transparency,.</a:t>
+            </a:r>
+            <a:endParaRPr lang="en-US" sz="1380" dirty="0"/>
+          </a:p>
+          <a:p>
+            <a:r>
+              <a:rPr lang="en-US" sz="1380" dirty="0">
+                <a:solidFill>
+                  <a:srgbClr val="17364A"/>
+                </a:solidFill>
+                <a:latin typeface="Aptos" pitchFamily="34" charset="0"/>
+                <a:ea typeface="Aptos" pitchFamily="34" charset="-122"/>
+                <a:cs typeface="Aptos" pitchFamily="34" charset="-120"/>
+              </a:rPr>
+              <a:t>Assess potential harms, including exclusion, surveillance burden, stigma, resource.</a:t>
+            </a:r>
+            <a:endParaRPr lang="en-US" sz="1380" dirty="0"/>
+          </a:p>
+          <a:p>
+            <a:r>
+              <a:rPr lang="en-US" sz="1380" dirty="0">
+                <a:solidFill>
+                  <a:srgbClr val="17364A"/>
+                </a:solidFill>
+                <a:latin typeface="Aptos" pitchFamily="34" charset="0"/>
+                <a:ea typeface="Aptos" pitchFamily="34" charset="-122"/>
+                <a:cs typeface="Aptos" pitchFamily="34" charset="-120"/>
+              </a:rPr>
+              <a:t>Design community-centered safeguards for socially beneficial AI use.</a:t>
+            </a:r>
+            <a:endParaRPr lang="en-US" sz="1380" dirty="0"/>
+          </a:p>
+        </p:txBody>
       </p:sp>
       <p:sp>
         <p:nvSpPr>
           <p:cNvPr id="16" name="Shape 14"/>
-          <p:cNvSpPr/>
-          <p:nvPr/>
-        </p:nvSpPr>
-        <p:spPr>
-          <a:xfrm>
-            <a:off x="9198864" y="4206240"/>
-            <a:ext cx="347472" cy="347472"/>
-          </a:xfrm>
-          <a:prstGeom prst="ellipse">
-            <a:avLst/>
-          </a:prstGeom>
-          <a:solidFill>
-            <a:srgbClr val="2F8A28"/>
-          </a:solidFill>
-          <a:ln w="12700">
-            <a:solidFill>
-              <a:srgbClr val="2F8A28"/>
-            </a:solidFill>
-            <a:prstDash val="solid"/>
-          </a:ln>
-        </p:spPr>
-      </p:sp>
-      <p:sp>
-        <p:nvSpPr>
-          <p:cNvPr id="17" name="Text 15"/>
-          <p:cNvSpPr/>
-          <p:nvPr/>
-        </p:nvSpPr>
-        <p:spPr>
-          <a:xfrm>
-            <a:off x="7909560" y="3977640"/>
-            <a:ext cx="2926080" cy="182880"/>
-          </a:xfrm>
-          <a:prstGeom prst="rect">
-            <a:avLst/>
-          </a:prstGeom>
-          <a:noFill/>
-          <a:ln/>
-        </p:spPr>
-        <p:txBody>
-          <a:bodyPr wrap="square" lIns="0" tIns="0" rIns="0" bIns="0" rtlCol="0" anchor="ctr"/>
-          <a:lstStyle/>
-          <a:p>
-            <a:pPr algn="ctr" indent="0" marL="0">
-              <a:buNone/>
-            </a:pPr>
-            <a:r>
-              <a:rPr lang="en-US" sz="1000" dirty="0">
-                <a:solidFill>
-                  <a:srgbClr val="003A63"/>
-                </a:solidFill>
-                <a:latin typeface="Aptos" pitchFamily="34" charset="0"/>
-                <a:ea typeface="Aptos" pitchFamily="34" charset="-122"/>
-                <a:cs typeface="Aptos" pitchFamily="34" charset="-120"/>
-              </a:rPr>
-              <a:t>Concept to action</a:t>
-            </a:r>
-            <a:endParaRPr lang="en-US" sz="1000" dirty="0"/>
-          </a:p>
-        </p:txBody>
-      </p:sp>
-      <p:sp>
-        <p:nvSpPr>
-          <p:cNvPr id="18" name="Shape 16"/>
           <p:cNvSpPr/>
           <p:nvPr/>
         </p:nvSpPr>
@@ -14945,7 +14369,7 @@
       </p:sp>
       <p:sp>
         <p:nvSpPr>
-          <p:cNvPr id="19" name="Text 17"/>
+          <p:cNvPr id="17" name="Text 15"/>
           <p:cNvSpPr/>
           <p:nvPr/>
         </p:nvSpPr>
@@ -14984,7 +14408,7 @@
       </p:sp>
       <p:sp>
         <p:nvSpPr>
-          <p:cNvPr id="20" name="Text 18"/>
+          <p:cNvPr id="18" name="Text 16"/>
           <p:cNvSpPr/>
           <p:nvPr/>
         </p:nvSpPr>
@@ -15464,13 +14888,11 @@
             </a:avLst>
           </a:prstGeom>
           <a:solidFill>
-            <a:srgbClr val="FFFFFF">
-              <a:alpha val="88000"/>
-            </a:srgbClr>
+            <a:srgbClr val="FFFFFF"/>
           </a:solidFill>
           <a:ln w="12700">
             <a:solidFill>
-              <a:srgbClr val="D6E8F2"/>
+              <a:srgbClr val="B9D7E6"/>
             </a:solidFill>
             <a:prstDash val="solid"/>
           </a:ln>
@@ -15478,119 +14900,84 @@
       </p:sp>
       <p:sp>
         <p:nvSpPr>
-          <p:cNvPr id="14" name="Shape 12"/>
-          <p:cNvSpPr/>
-          <p:nvPr/>
-        </p:nvSpPr>
-        <p:spPr>
-          <a:xfrm>
-            <a:off x="8074152" y="3291840"/>
-            <a:ext cx="2596896" cy="749808"/>
-          </a:xfrm>
-          <a:prstGeom prst="rect">
-            <a:avLst/>
-          </a:prstGeom>
-          <a:solidFill>
-            <a:srgbClr val="EAF6F8"/>
-          </a:solidFill>
-          <a:ln w="12700">
-            <a:solidFill>
-              <a:srgbClr val="8ABBD8"/>
-            </a:solidFill>
-            <a:prstDash val="solid"/>
-          </a:ln>
-        </p:spPr>
-      </p:sp>
-      <p:sp>
-        <p:nvSpPr>
-          <p:cNvPr id="15" name="Shape 13"/>
-          <p:cNvSpPr/>
-          <p:nvPr/>
-        </p:nvSpPr>
-        <p:spPr>
-          <a:xfrm>
-            <a:off x="8202168" y="3721608"/>
-            <a:ext cx="2340864" cy="0"/>
-          </a:xfrm>
-          <a:prstGeom prst="line">
-            <a:avLst/>
-          </a:prstGeom>
-          <a:noFill/>
-          <a:ln w="19050">
-            <a:solidFill>
-              <a:srgbClr val="0068B7"/>
-            </a:solidFill>
-            <a:prstDash val="solid"/>
-          </a:ln>
-        </p:spPr>
+          <p:cNvPr id="14" name="Text 12"/>
+          <p:cNvSpPr/>
+          <p:nvPr/>
+        </p:nvSpPr>
+        <p:spPr>
+          <a:xfrm>
+            <a:off x="7799832" y="2935224"/>
+            <a:ext cx="3145536" cy="256032"/>
+          </a:xfrm>
+          <a:prstGeom prst="rect">
+            <a:avLst/>
+          </a:prstGeom>
+          <a:noFill/>
+          <a:ln/>
+        </p:spPr>
+        <p:txBody>
+          <a:bodyPr wrap="square" lIns="0" tIns="0" rIns="0" bIns="0" rtlCol="0" anchor="ctr"/>
+          <a:lstStyle/>
+          <a:p>
+            <a:pPr indent="0" marL="0">
+              <a:buNone/>
+            </a:pPr>
+            <a:r>
+              <a:rPr lang="en-US" sz="1300" b="1" dirty="0">
+                <a:solidFill>
+                  <a:srgbClr val="0068B7"/>
+                </a:solidFill>
+                <a:latin typeface="Aptos" pitchFamily="34" charset="0"/>
+                <a:ea typeface="Aptos" pitchFamily="34" charset="-122"/>
+                <a:cs typeface="Aptos" pitchFamily="34" charset="-120"/>
+              </a:rPr>
+              <a:t>Concept checkpoints</a:t>
+            </a:r>
+            <a:endParaRPr lang="en-US" sz="1300" dirty="0"/>
+          </a:p>
+        </p:txBody>
+      </p:sp>
+      <p:sp>
+        <p:nvSpPr>
+          <p:cNvPr id="15" name="Text 13"/>
+          <p:cNvSpPr/>
+          <p:nvPr/>
+        </p:nvSpPr>
+        <p:spPr>
+          <a:xfrm>
+            <a:off x="7818120" y="3300984"/>
+            <a:ext cx="3090672" cy="877824"/>
+          </a:xfrm>
+          <a:prstGeom prst="rect">
+            <a:avLst/>
+          </a:prstGeom>
+          <a:noFill/>
+          <a:ln/>
+        </p:spPr>
+        <p:txBody>
+          <a:bodyPr wrap="square" lIns="254" tIns="254" rIns="254" bIns="254" rtlCol="0" anchor="t">
+            <a:normAutofit/>
+          </a:bodyPr>
+          <a:lstStyle/>
+          <a:p>
+            <a:r>
+              <a:rPr lang="en-US" sz="1380" dirty="0">
+                <a:solidFill>
+                  <a:srgbClr val="17364A"/>
+                </a:solidFill>
+                <a:latin typeface="Aptos" pitchFamily="34" charset="0"/>
+                <a:ea typeface="Aptos" pitchFamily="34" charset="-122"/>
+                <a:cs typeface="Aptos" pitchFamily="34" charset="-120"/>
+              </a:rPr>
+              <a:t>Produce an AI for Social Good review brief for a public health use case.</a:t>
+            </a:r>
+            <a:endParaRPr lang="en-US" sz="1380" dirty="0"/>
+          </a:p>
+        </p:txBody>
       </p:sp>
       <p:sp>
         <p:nvSpPr>
           <p:cNvPr id="16" name="Shape 14"/>
-          <p:cNvSpPr/>
-          <p:nvPr/>
-        </p:nvSpPr>
-        <p:spPr>
-          <a:xfrm>
-            <a:off x="9198864" y="4206240"/>
-            <a:ext cx="347472" cy="347472"/>
-          </a:xfrm>
-          <a:prstGeom prst="ellipse">
-            <a:avLst/>
-          </a:prstGeom>
-          <a:solidFill>
-            <a:srgbClr val="2F8A28"/>
-          </a:solidFill>
-          <a:ln w="12700">
-            <a:solidFill>
-              <a:srgbClr val="2F8A28"/>
-            </a:solidFill>
-            <a:prstDash val="solid"/>
-          </a:ln>
-        </p:spPr>
-      </p:sp>
-      <p:sp>
-        <p:nvSpPr>
-          <p:cNvPr id="17" name="Text 15"/>
-          <p:cNvSpPr/>
-          <p:nvPr/>
-        </p:nvSpPr>
-        <p:spPr>
-          <a:xfrm>
-            <a:off x="7909560" y="3977640"/>
-            <a:ext cx="2926080" cy="182880"/>
-          </a:xfrm>
-          <a:prstGeom prst="rect">
-            <a:avLst/>
-          </a:prstGeom>
-          <a:noFill/>
-          <a:ln/>
-        </p:spPr>
-        <p:txBody>
-          <a:bodyPr wrap="square" lIns="0" tIns="0" rIns="0" bIns="0" rtlCol="0" anchor="ctr"/>
-          <a:lstStyle/>
-          <a:p>
-            <a:pPr algn="ctr" indent="0" marL="0">
-              <a:buNone/>
-            </a:pPr>
-            <a:r>
-              <a:rPr lang="en-US" sz="1000" dirty="0">
-                <a:solidFill>
-                  <a:srgbClr val="003A63"/>
-                </a:solidFill>
-                <a:latin typeface="Aptos" pitchFamily="34" charset="0"/>
-                <a:ea typeface="Aptos" pitchFamily="34" charset="-122"/>
-                <a:cs typeface="Aptos" pitchFamily="34" charset="-120"/>
-              </a:rPr>
-              <a:t>Concept to action</a:t>
-            </a:r>
-            <a:endParaRPr lang="en-US" sz="1000" dirty="0"/>
-          </a:p>
-        </p:txBody>
-      </p:sp>
-      <p:sp>
-        <p:nvSpPr>
-          <p:cNvPr id="18" name="Shape 16"/>
           <p:cNvSpPr/>
           <p:nvPr/>
         </p:nvSpPr>
@@ -15617,7 +15004,7 @@
       </p:sp>
       <p:sp>
         <p:nvSpPr>
-          <p:cNvPr id="19" name="Text 17"/>
+          <p:cNvPr id="17" name="Text 15"/>
           <p:cNvSpPr/>
           <p:nvPr/>
         </p:nvSpPr>
@@ -15656,7 +15043,7 @@
       </p:sp>
       <p:sp>
         <p:nvSpPr>
-          <p:cNvPr id="20" name="Text 18"/>
+          <p:cNvPr id="18" name="Text 16"/>
           <p:cNvSpPr/>
           <p:nvPr/>
         </p:nvSpPr>
@@ -16164,13 +15551,11 @@
             </a:avLst>
           </a:prstGeom>
           <a:solidFill>
-            <a:srgbClr val="FFFFFF">
-              <a:alpha val="88000"/>
-            </a:srgbClr>
+            <a:srgbClr val="FFFFFF"/>
           </a:solidFill>
           <a:ln w="12700">
             <a:solidFill>
-              <a:srgbClr val="D6E8F2"/>
+              <a:srgbClr val="B9D7E6"/>
             </a:solidFill>
             <a:prstDash val="solid"/>
           </a:ln>
@@ -16178,119 +15563,112 @@
       </p:sp>
       <p:sp>
         <p:nvSpPr>
-          <p:cNvPr id="14" name="Shape 12"/>
-          <p:cNvSpPr/>
-          <p:nvPr/>
-        </p:nvSpPr>
-        <p:spPr>
-          <a:xfrm>
-            <a:off x="8074152" y="3291840"/>
-            <a:ext cx="2596896" cy="749808"/>
-          </a:xfrm>
-          <a:prstGeom prst="rect">
-            <a:avLst/>
-          </a:prstGeom>
-          <a:solidFill>
-            <a:srgbClr val="EAF6F8"/>
-          </a:solidFill>
-          <a:ln w="12700">
-            <a:solidFill>
-              <a:srgbClr val="8ABBD8"/>
-            </a:solidFill>
-            <a:prstDash val="solid"/>
-          </a:ln>
-        </p:spPr>
-      </p:sp>
-      <p:sp>
-        <p:nvSpPr>
-          <p:cNvPr id="15" name="Shape 13"/>
-          <p:cNvSpPr/>
-          <p:nvPr/>
-        </p:nvSpPr>
-        <p:spPr>
-          <a:xfrm>
-            <a:off x="8202168" y="3721608"/>
-            <a:ext cx="2340864" cy="0"/>
-          </a:xfrm>
-          <a:prstGeom prst="line">
-            <a:avLst/>
-          </a:prstGeom>
-          <a:noFill/>
-          <a:ln w="19050">
-            <a:solidFill>
-              <a:srgbClr val="0068B7"/>
-            </a:solidFill>
-            <a:prstDash val="solid"/>
-          </a:ln>
-        </p:spPr>
+          <p:cNvPr id="14" name="Text 12"/>
+          <p:cNvSpPr/>
+          <p:nvPr/>
+        </p:nvSpPr>
+        <p:spPr>
+          <a:xfrm>
+            <a:off x="7799832" y="2935224"/>
+            <a:ext cx="3145536" cy="256032"/>
+          </a:xfrm>
+          <a:prstGeom prst="rect">
+            <a:avLst/>
+          </a:prstGeom>
+          <a:noFill/>
+          <a:ln/>
+        </p:spPr>
+        <p:txBody>
+          <a:bodyPr wrap="square" lIns="0" tIns="0" rIns="0" bIns="0" rtlCol="0" anchor="ctr"/>
+          <a:lstStyle/>
+          <a:p>
+            <a:pPr indent="0" marL="0">
+              <a:buNone/>
+            </a:pPr>
+            <a:r>
+              <a:rPr lang="en-US" sz="1300" b="1" dirty="0">
+                <a:solidFill>
+                  <a:srgbClr val="0068B7"/>
+                </a:solidFill>
+                <a:latin typeface="Aptos" pitchFamily="34" charset="0"/>
+                <a:ea typeface="Aptos" pitchFamily="34" charset="-122"/>
+                <a:cs typeface="Aptos" pitchFamily="34" charset="-120"/>
+              </a:rPr>
+              <a:t>Concept checkpoints</a:t>
+            </a:r>
+            <a:endParaRPr lang="en-US" sz="1300" dirty="0"/>
+          </a:p>
+        </p:txBody>
+      </p:sp>
+      <p:sp>
+        <p:nvSpPr>
+          <p:cNvPr id="15" name="Text 13"/>
+          <p:cNvSpPr/>
+          <p:nvPr/>
+        </p:nvSpPr>
+        <p:spPr>
+          <a:xfrm>
+            <a:off x="7818120" y="3300984"/>
+            <a:ext cx="3090672" cy="877824"/>
+          </a:xfrm>
+          <a:prstGeom prst="rect">
+            <a:avLst/>
+          </a:prstGeom>
+          <a:noFill/>
+          <a:ln/>
+        </p:spPr>
+        <p:txBody>
+          <a:bodyPr wrap="square" lIns="254" tIns="254" rIns="254" bIns="254" rtlCol="0" anchor="t">
+            <a:normAutofit/>
+          </a:bodyPr>
+          <a:lstStyle/>
+          <a:p>
+            <a:r>
+              <a:rPr lang="en-US" sz="1380" dirty="0">
+                <a:solidFill>
+                  <a:srgbClr val="17364A"/>
+                </a:solidFill>
+                <a:latin typeface="Aptos" pitchFamily="34" charset="0"/>
+                <a:ea typeface="Aptos" pitchFamily="34" charset="-122"/>
+                <a:cs typeface="Aptos" pitchFamily="34" charset="-120"/>
+              </a:rPr>
+              <a:t>AI for Social Good refers to the intentional use of artificial intelligence to improve.</a:t>
+            </a:r>
+            <a:endParaRPr lang="en-US" sz="1380" dirty="0"/>
+          </a:p>
+          <a:p>
+            <a:r>
+              <a:rPr lang="en-US" sz="1380" dirty="0">
+                <a:solidFill>
+                  <a:srgbClr val="17364A"/>
+                </a:solidFill>
+                <a:latin typeface="Aptos" pitchFamily="34" charset="0"/>
+                <a:ea typeface="Aptos" pitchFamily="34" charset="-122"/>
+                <a:cs typeface="Aptos" pitchFamily="34" charset="-120"/>
+              </a:rPr>
+              <a:t>Public health agencies already work to prevent disease, protect communities, improve.</a:t>
+            </a:r>
+            <a:endParaRPr lang="en-US" sz="1380" dirty="0"/>
+          </a:p>
+          <a:p>
+            <a:r>
+              <a:rPr lang="en-US" sz="1380" dirty="0">
+                <a:solidFill>
+                  <a:srgbClr val="17364A"/>
+                </a:solidFill>
+                <a:latin typeface="Aptos" pitchFamily="34" charset="0"/>
+                <a:ea typeface="Aptos" pitchFamily="34" charset="-122"/>
+                <a:cs typeface="Aptos" pitchFamily="34" charset="-120"/>
+              </a:rPr>
+              <a:t>AI for Social Good should therefore be judged by whether it advances public health values.</a:t>
+            </a:r>
+            <a:endParaRPr lang="en-US" sz="1380" dirty="0"/>
+          </a:p>
+        </p:txBody>
       </p:sp>
       <p:sp>
         <p:nvSpPr>
           <p:cNvPr id="16" name="Shape 14"/>
-          <p:cNvSpPr/>
-          <p:nvPr/>
-        </p:nvSpPr>
-        <p:spPr>
-          <a:xfrm>
-            <a:off x="9198864" y="4206240"/>
-            <a:ext cx="347472" cy="347472"/>
-          </a:xfrm>
-          <a:prstGeom prst="ellipse">
-            <a:avLst/>
-          </a:prstGeom>
-          <a:solidFill>
-            <a:srgbClr val="2F8A28"/>
-          </a:solidFill>
-          <a:ln w="12700">
-            <a:solidFill>
-              <a:srgbClr val="2F8A28"/>
-            </a:solidFill>
-            <a:prstDash val="solid"/>
-          </a:ln>
-        </p:spPr>
-      </p:sp>
-      <p:sp>
-        <p:nvSpPr>
-          <p:cNvPr id="17" name="Text 15"/>
-          <p:cNvSpPr/>
-          <p:nvPr/>
-        </p:nvSpPr>
-        <p:spPr>
-          <a:xfrm>
-            <a:off x="7909560" y="3977640"/>
-            <a:ext cx="2926080" cy="182880"/>
-          </a:xfrm>
-          <a:prstGeom prst="rect">
-            <a:avLst/>
-          </a:prstGeom>
-          <a:noFill/>
-          <a:ln/>
-        </p:spPr>
-        <p:txBody>
-          <a:bodyPr wrap="square" lIns="0" tIns="0" rIns="0" bIns="0" rtlCol="0" anchor="ctr"/>
-          <a:lstStyle/>
-          <a:p>
-            <a:pPr algn="ctr" indent="0" marL="0">
-              <a:buNone/>
-            </a:pPr>
-            <a:r>
-              <a:rPr lang="en-US" sz="1000" dirty="0">
-                <a:solidFill>
-                  <a:srgbClr val="003A63"/>
-                </a:solidFill>
-                <a:latin typeface="Aptos" pitchFamily="34" charset="0"/>
-                <a:ea typeface="Aptos" pitchFamily="34" charset="-122"/>
-                <a:cs typeface="Aptos" pitchFamily="34" charset="-120"/>
-              </a:rPr>
-              <a:t>Concept to action</a:t>
-            </a:r>
-            <a:endParaRPr lang="en-US" sz="1000" dirty="0"/>
-          </a:p>
-        </p:txBody>
-      </p:sp>
-      <p:sp>
-        <p:nvSpPr>
-          <p:cNvPr id="18" name="Shape 16"/>
           <p:cNvSpPr/>
           <p:nvPr/>
         </p:nvSpPr>
@@ -16317,7 +15695,7 @@
       </p:sp>
       <p:sp>
         <p:nvSpPr>
-          <p:cNvPr id="19" name="Text 17"/>
+          <p:cNvPr id="17" name="Text 15"/>
           <p:cNvSpPr/>
           <p:nvPr/>
         </p:nvSpPr>
@@ -16356,7 +15734,7 @@
       </p:sp>
       <p:sp>
         <p:nvSpPr>
-          <p:cNvPr id="20" name="Text 18"/>
+          <p:cNvPr id="18" name="Text 16"/>
           <p:cNvSpPr/>
           <p:nvPr/>
         </p:nvSpPr>
@@ -16864,13 +16242,11 @@
             </a:avLst>
           </a:prstGeom>
           <a:solidFill>
-            <a:srgbClr val="FFFFFF">
-              <a:alpha val="88000"/>
-            </a:srgbClr>
+            <a:srgbClr val="FFFFFF"/>
           </a:solidFill>
           <a:ln w="12700">
             <a:solidFill>
-              <a:srgbClr val="D6E8F2"/>
+              <a:srgbClr val="B9D7E6"/>
             </a:solidFill>
             <a:prstDash val="solid"/>
           </a:ln>
@@ -16878,119 +16254,112 @@
       </p:sp>
       <p:sp>
         <p:nvSpPr>
-          <p:cNvPr id="14" name="Shape 12"/>
-          <p:cNvSpPr/>
-          <p:nvPr/>
-        </p:nvSpPr>
-        <p:spPr>
-          <a:xfrm>
-            <a:off x="8074152" y="3291840"/>
-            <a:ext cx="2596896" cy="749808"/>
-          </a:xfrm>
-          <a:prstGeom prst="rect">
-            <a:avLst/>
-          </a:prstGeom>
-          <a:solidFill>
-            <a:srgbClr val="EAF6F8"/>
-          </a:solidFill>
-          <a:ln w="12700">
-            <a:solidFill>
-              <a:srgbClr val="8ABBD8"/>
-            </a:solidFill>
-            <a:prstDash val="solid"/>
-          </a:ln>
-        </p:spPr>
-      </p:sp>
-      <p:sp>
-        <p:nvSpPr>
-          <p:cNvPr id="15" name="Shape 13"/>
-          <p:cNvSpPr/>
-          <p:nvPr/>
-        </p:nvSpPr>
-        <p:spPr>
-          <a:xfrm>
-            <a:off x="8202168" y="3721608"/>
-            <a:ext cx="2340864" cy="0"/>
-          </a:xfrm>
-          <a:prstGeom prst="line">
-            <a:avLst/>
-          </a:prstGeom>
-          <a:noFill/>
-          <a:ln w="19050">
-            <a:solidFill>
-              <a:srgbClr val="0068B7"/>
-            </a:solidFill>
-            <a:prstDash val="solid"/>
-          </a:ln>
-        </p:spPr>
+          <p:cNvPr id="14" name="Text 12"/>
+          <p:cNvSpPr/>
+          <p:nvPr/>
+        </p:nvSpPr>
+        <p:spPr>
+          <a:xfrm>
+            <a:off x="7799832" y="2935224"/>
+            <a:ext cx="3145536" cy="256032"/>
+          </a:xfrm>
+          <a:prstGeom prst="rect">
+            <a:avLst/>
+          </a:prstGeom>
+          <a:noFill/>
+          <a:ln/>
+        </p:spPr>
+        <p:txBody>
+          <a:bodyPr wrap="square" lIns="0" tIns="0" rIns="0" bIns="0" rtlCol="0" anchor="ctr"/>
+          <a:lstStyle/>
+          <a:p>
+            <a:pPr indent="0" marL="0">
+              <a:buNone/>
+            </a:pPr>
+            <a:r>
+              <a:rPr lang="en-US" sz="1300" b="1" dirty="0">
+                <a:solidFill>
+                  <a:srgbClr val="0068B7"/>
+                </a:solidFill>
+                <a:latin typeface="Aptos" pitchFamily="34" charset="0"/>
+                <a:ea typeface="Aptos" pitchFamily="34" charset="-122"/>
+                <a:cs typeface="Aptos" pitchFamily="34" charset="-120"/>
+              </a:rPr>
+              <a:t>Concept checkpoints</a:t>
+            </a:r>
+            <a:endParaRPr lang="en-US" sz="1300" dirty="0"/>
+          </a:p>
+        </p:txBody>
+      </p:sp>
+      <p:sp>
+        <p:nvSpPr>
+          <p:cNvPr id="15" name="Text 13"/>
+          <p:cNvSpPr/>
+          <p:nvPr/>
+        </p:nvSpPr>
+        <p:spPr>
+          <a:xfrm>
+            <a:off x="7818120" y="3300984"/>
+            <a:ext cx="3090672" cy="877824"/>
+          </a:xfrm>
+          <a:prstGeom prst="rect">
+            <a:avLst/>
+          </a:prstGeom>
+          <a:noFill/>
+          <a:ln/>
+        </p:spPr>
+        <p:txBody>
+          <a:bodyPr wrap="square" lIns="254" tIns="254" rIns="254" bIns="254" rtlCol="0" anchor="t">
+            <a:normAutofit/>
+          </a:bodyPr>
+          <a:lstStyle/>
+          <a:p>
+            <a:r>
+              <a:rPr lang="en-US" sz="1380" dirty="0">
+                <a:solidFill>
+                  <a:srgbClr val="17364A"/>
+                </a:solidFill>
+                <a:latin typeface="Aptos" pitchFamily="34" charset="0"/>
+                <a:ea typeface="Aptos" pitchFamily="34" charset="-122"/>
+                <a:cs typeface="Aptos" pitchFamily="34" charset="-120"/>
+              </a:rPr>
+              <a:t>Public health is uniquely positioned to use AI for social good because its mission is.</a:t>
+            </a:r>
+            <a:endParaRPr lang="en-US" sz="1380" dirty="0"/>
+          </a:p>
+          <a:p>
+            <a:r>
+              <a:rPr lang="en-US" sz="1380" dirty="0">
+                <a:solidFill>
+                  <a:srgbClr val="17364A"/>
+                </a:solidFill>
+                <a:latin typeface="Aptos" pitchFamily="34" charset="0"/>
+                <a:ea typeface="Aptos" pitchFamily="34" charset="-122"/>
+                <a:cs typeface="Aptos" pitchFamily="34" charset="-120"/>
+              </a:rPr>
+              <a:t>AI can help agencies identify emerging needs, improve access to information, reduce.</a:t>
+            </a:r>
+            <a:endParaRPr lang="en-US" sz="1380" dirty="0"/>
+          </a:p>
+          <a:p>
+            <a:r>
+              <a:rPr lang="en-US" sz="1380" dirty="0">
+                <a:solidFill>
+                  <a:srgbClr val="17364A"/>
+                </a:solidFill>
+                <a:latin typeface="Aptos" pitchFamily="34" charset="0"/>
+                <a:ea typeface="Aptos" pitchFamily="34" charset="-122"/>
+                <a:cs typeface="Aptos" pitchFamily="34" charset="-120"/>
+              </a:rPr>
+              <a:t>These benefits are especially important when agencies face workforce shortages, fragmented.</a:t>
+            </a:r>
+            <a:endParaRPr lang="en-US" sz="1380" dirty="0"/>
+          </a:p>
+        </p:txBody>
       </p:sp>
       <p:sp>
         <p:nvSpPr>
           <p:cNvPr id="16" name="Shape 14"/>
-          <p:cNvSpPr/>
-          <p:nvPr/>
-        </p:nvSpPr>
-        <p:spPr>
-          <a:xfrm>
-            <a:off x="9198864" y="4206240"/>
-            <a:ext cx="347472" cy="347472"/>
-          </a:xfrm>
-          <a:prstGeom prst="ellipse">
-            <a:avLst/>
-          </a:prstGeom>
-          <a:solidFill>
-            <a:srgbClr val="2F8A28"/>
-          </a:solidFill>
-          <a:ln w="12700">
-            <a:solidFill>
-              <a:srgbClr val="2F8A28"/>
-            </a:solidFill>
-            <a:prstDash val="solid"/>
-          </a:ln>
-        </p:spPr>
-      </p:sp>
-      <p:sp>
-        <p:nvSpPr>
-          <p:cNvPr id="17" name="Text 15"/>
-          <p:cNvSpPr/>
-          <p:nvPr/>
-        </p:nvSpPr>
-        <p:spPr>
-          <a:xfrm>
-            <a:off x="7909560" y="3977640"/>
-            <a:ext cx="2926080" cy="182880"/>
-          </a:xfrm>
-          <a:prstGeom prst="rect">
-            <a:avLst/>
-          </a:prstGeom>
-          <a:noFill/>
-          <a:ln/>
-        </p:spPr>
-        <p:txBody>
-          <a:bodyPr wrap="square" lIns="0" tIns="0" rIns="0" bIns="0" rtlCol="0" anchor="ctr"/>
-          <a:lstStyle/>
-          <a:p>
-            <a:pPr algn="ctr" indent="0" marL="0">
-              <a:buNone/>
-            </a:pPr>
-            <a:r>
-              <a:rPr lang="en-US" sz="1000" dirty="0">
-                <a:solidFill>
-                  <a:srgbClr val="003A63"/>
-                </a:solidFill>
-                <a:latin typeface="Aptos" pitchFamily="34" charset="0"/>
-                <a:ea typeface="Aptos" pitchFamily="34" charset="-122"/>
-                <a:cs typeface="Aptos" pitchFamily="34" charset="-120"/>
-              </a:rPr>
-              <a:t>Concept to action</a:t>
-            </a:r>
-            <a:endParaRPr lang="en-US" sz="1000" dirty="0"/>
-          </a:p>
-        </p:txBody>
-      </p:sp>
-      <p:sp>
-        <p:nvSpPr>
-          <p:cNvPr id="18" name="Shape 16"/>
           <p:cNvSpPr/>
           <p:nvPr/>
         </p:nvSpPr>
@@ -17017,7 +16386,7 @@
       </p:sp>
       <p:sp>
         <p:nvSpPr>
-          <p:cNvPr id="19" name="Text 17"/>
+          <p:cNvPr id="17" name="Text 15"/>
           <p:cNvSpPr/>
           <p:nvPr/>
         </p:nvSpPr>
@@ -17056,7 +16425,7 @@
       </p:sp>
       <p:sp>
         <p:nvSpPr>
-          <p:cNvPr id="20" name="Text 18"/>
+          <p:cNvPr id="18" name="Text 16"/>
           <p:cNvSpPr/>
           <p:nvPr/>
         </p:nvSpPr>
@@ -17564,13 +16933,11 @@
             </a:avLst>
           </a:prstGeom>
           <a:solidFill>
-            <a:srgbClr val="FFFFFF">
-              <a:alpha val="88000"/>
-            </a:srgbClr>
+            <a:srgbClr val="FFFFFF"/>
           </a:solidFill>
           <a:ln w="12700">
             <a:solidFill>
-              <a:srgbClr val="D6E8F2"/>
+              <a:srgbClr val="B9D7E6"/>
             </a:solidFill>
             <a:prstDash val="solid"/>
           </a:ln>
@@ -17578,119 +16945,112 @@
       </p:sp>
       <p:sp>
         <p:nvSpPr>
-          <p:cNvPr id="14" name="Shape 12"/>
-          <p:cNvSpPr/>
-          <p:nvPr/>
-        </p:nvSpPr>
-        <p:spPr>
-          <a:xfrm>
-            <a:off x="8074152" y="3291840"/>
-            <a:ext cx="2596896" cy="749808"/>
-          </a:xfrm>
-          <a:prstGeom prst="rect">
-            <a:avLst/>
-          </a:prstGeom>
-          <a:solidFill>
-            <a:srgbClr val="EAF6F8"/>
-          </a:solidFill>
-          <a:ln w="12700">
-            <a:solidFill>
-              <a:srgbClr val="8ABBD8"/>
-            </a:solidFill>
-            <a:prstDash val="solid"/>
-          </a:ln>
-        </p:spPr>
-      </p:sp>
-      <p:sp>
-        <p:nvSpPr>
-          <p:cNvPr id="15" name="Shape 13"/>
-          <p:cNvSpPr/>
-          <p:nvPr/>
-        </p:nvSpPr>
-        <p:spPr>
-          <a:xfrm>
-            <a:off x="8202168" y="3721608"/>
-            <a:ext cx="2340864" cy="0"/>
-          </a:xfrm>
-          <a:prstGeom prst="line">
-            <a:avLst/>
-          </a:prstGeom>
-          <a:noFill/>
-          <a:ln w="19050">
-            <a:solidFill>
-              <a:srgbClr val="0068B7"/>
-            </a:solidFill>
-            <a:prstDash val="solid"/>
-          </a:ln>
-        </p:spPr>
+          <p:cNvPr id="14" name="Text 12"/>
+          <p:cNvSpPr/>
+          <p:nvPr/>
+        </p:nvSpPr>
+        <p:spPr>
+          <a:xfrm>
+            <a:off x="7799832" y="2935224"/>
+            <a:ext cx="3145536" cy="256032"/>
+          </a:xfrm>
+          <a:prstGeom prst="rect">
+            <a:avLst/>
+          </a:prstGeom>
+          <a:noFill/>
+          <a:ln/>
+        </p:spPr>
+        <p:txBody>
+          <a:bodyPr wrap="square" lIns="0" tIns="0" rIns="0" bIns="0" rtlCol="0" anchor="ctr"/>
+          <a:lstStyle/>
+          <a:p>
+            <a:pPr indent="0" marL="0">
+              <a:buNone/>
+            </a:pPr>
+            <a:r>
+              <a:rPr lang="en-US" sz="1300" b="1" dirty="0">
+                <a:solidFill>
+                  <a:srgbClr val="0068B7"/>
+                </a:solidFill>
+                <a:latin typeface="Aptos" pitchFamily="34" charset="0"/>
+                <a:ea typeface="Aptos" pitchFamily="34" charset="-122"/>
+                <a:cs typeface="Aptos" pitchFamily="34" charset="-120"/>
+              </a:rPr>
+              <a:t>Concept checkpoints</a:t>
+            </a:r>
+            <a:endParaRPr lang="en-US" sz="1300" dirty="0"/>
+          </a:p>
+        </p:txBody>
+      </p:sp>
+      <p:sp>
+        <p:nvSpPr>
+          <p:cNvPr id="15" name="Text 13"/>
+          <p:cNvSpPr/>
+          <p:nvPr/>
+        </p:nvSpPr>
+        <p:spPr>
+          <a:xfrm>
+            <a:off x="7818120" y="3300984"/>
+            <a:ext cx="3090672" cy="877824"/>
+          </a:xfrm>
+          <a:prstGeom prst="rect">
+            <a:avLst/>
+          </a:prstGeom>
+          <a:noFill/>
+          <a:ln/>
+        </p:spPr>
+        <p:txBody>
+          <a:bodyPr wrap="square" lIns="254" tIns="254" rIns="254" bIns="254" rtlCol="0" anchor="t">
+            <a:normAutofit/>
+          </a:bodyPr>
+          <a:lstStyle/>
+          <a:p>
+            <a:r>
+              <a:rPr lang="en-US" sz="1380" dirty="0">
+                <a:solidFill>
+                  <a:srgbClr val="17364A"/>
+                </a:solidFill>
+                <a:latin typeface="Aptos" pitchFamily="34" charset="0"/>
+                <a:ea typeface="Aptos" pitchFamily="34" charset="-122"/>
+                <a:cs typeface="Aptos" pitchFamily="34" charset="-120"/>
+              </a:rPr>
+              <a:t>A tool could help staff identify service gaps, summarize eligibility rules, translate.</a:t>
+            </a:r>
+            <a:endParaRPr lang="en-US" sz="1380" dirty="0"/>
+          </a:p>
+          <a:p>
+            <a:r>
+              <a:rPr lang="en-US" sz="1380" dirty="0">
+                <a:solidFill>
+                  <a:srgbClr val="17364A"/>
+                </a:solidFill>
+                <a:latin typeface="Aptos" pitchFamily="34" charset="0"/>
+                <a:ea typeface="Aptos" pitchFamily="34" charset="-122"/>
+                <a:cs typeface="Aptos" pitchFamily="34" charset="-120"/>
+              </a:rPr>
+              <a:t>The same tool could fail if it assumes internet access, uses only English content,.</a:t>
+            </a:r>
+            <a:endParaRPr lang="en-US" sz="1380" dirty="0"/>
+          </a:p>
+          <a:p>
+            <a:r>
+              <a:rPr lang="en-US" sz="1380" dirty="0">
+                <a:solidFill>
+                  <a:srgbClr val="17364A"/>
+                </a:solidFill>
+                <a:latin typeface="Aptos" pitchFamily="34" charset="0"/>
+                <a:ea typeface="Aptos" pitchFamily="34" charset="-122"/>
+                <a:cs typeface="Aptos" pitchFamily="34" charset="-120"/>
+              </a:rPr>
+              <a:t>An AI for Social Good review would examine community needs, access barriers, language and.</a:t>
+            </a:r>
+            <a:endParaRPr lang="en-US" sz="1380" dirty="0"/>
+          </a:p>
+        </p:txBody>
       </p:sp>
       <p:sp>
         <p:nvSpPr>
           <p:cNvPr id="16" name="Shape 14"/>
-          <p:cNvSpPr/>
-          <p:nvPr/>
-        </p:nvSpPr>
-        <p:spPr>
-          <a:xfrm>
-            <a:off x="9198864" y="4206240"/>
-            <a:ext cx="347472" cy="347472"/>
-          </a:xfrm>
-          <a:prstGeom prst="ellipse">
-            <a:avLst/>
-          </a:prstGeom>
-          <a:solidFill>
-            <a:srgbClr val="2F8A28"/>
-          </a:solidFill>
-          <a:ln w="12700">
-            <a:solidFill>
-              <a:srgbClr val="2F8A28"/>
-            </a:solidFill>
-            <a:prstDash val="solid"/>
-          </a:ln>
-        </p:spPr>
-      </p:sp>
-      <p:sp>
-        <p:nvSpPr>
-          <p:cNvPr id="17" name="Text 15"/>
-          <p:cNvSpPr/>
-          <p:nvPr/>
-        </p:nvSpPr>
-        <p:spPr>
-          <a:xfrm>
-            <a:off x="7909560" y="3977640"/>
-            <a:ext cx="2926080" cy="182880"/>
-          </a:xfrm>
-          <a:prstGeom prst="rect">
-            <a:avLst/>
-          </a:prstGeom>
-          <a:noFill/>
-          <a:ln/>
-        </p:spPr>
-        <p:txBody>
-          <a:bodyPr wrap="square" lIns="0" tIns="0" rIns="0" bIns="0" rtlCol="0" anchor="ctr"/>
-          <a:lstStyle/>
-          <a:p>
-            <a:pPr algn="ctr" indent="0" marL="0">
-              <a:buNone/>
-            </a:pPr>
-            <a:r>
-              <a:rPr lang="en-US" sz="1000" dirty="0">
-                <a:solidFill>
-                  <a:srgbClr val="003A63"/>
-                </a:solidFill>
-                <a:latin typeface="Aptos" pitchFamily="34" charset="0"/>
-                <a:ea typeface="Aptos" pitchFamily="34" charset="-122"/>
-                <a:cs typeface="Aptos" pitchFamily="34" charset="-120"/>
-              </a:rPr>
-              <a:t>Concept to action</a:t>
-            </a:r>
-            <a:endParaRPr lang="en-US" sz="1000" dirty="0"/>
-          </a:p>
-        </p:txBody>
-      </p:sp>
-      <p:sp>
-        <p:nvSpPr>
-          <p:cNvPr id="18" name="Shape 16"/>
           <p:cNvSpPr/>
           <p:nvPr/>
         </p:nvSpPr>
@@ -17717,7 +17077,7 @@
       </p:sp>
       <p:sp>
         <p:nvSpPr>
-          <p:cNvPr id="19" name="Text 17"/>
+          <p:cNvPr id="17" name="Text 15"/>
           <p:cNvSpPr/>
           <p:nvPr/>
         </p:nvSpPr>
@@ -17756,7 +17116,7 @@
       </p:sp>
       <p:sp>
         <p:nvSpPr>
-          <p:cNvPr id="20" name="Text 18"/>
+          <p:cNvPr id="18" name="Text 16"/>
           <p:cNvSpPr/>
           <p:nvPr/>
         </p:nvSpPr>

--- a/downloads/presentations/modules/int-190.pptx
+++ b/downloads/presentations/modules/int-190.pptx
@@ -3354,49 +3354,58 @@
           <a:ln/>
         </p:spPr>
         <p:txBody>
-          <a:bodyPr wrap="square" lIns="635" tIns="635" rIns="635" bIns="635" rtlCol="0" anchor="t">
+          <a:bodyPr wrap="square" lIns="1016" tIns="1016" rIns="1016" bIns="1016" rtlCol="0" anchor="t">
             <a:normAutofit/>
           </a:bodyPr>
           <a:lstStyle/>
           <a:p>
+            <a:pPr indent="0" marL="0">
+              <a:buNone/>
+            </a:pPr>
             <a:r>
               <a:rPr lang="en-US" sz="2100" dirty="0">
                 <a:solidFill>
-                  <a:srgbClr val="17364A"/>
-                </a:solidFill>
-                <a:latin typeface="Aptos" pitchFamily="34" charset="0"/>
-                <a:ea typeface="Aptos" pitchFamily="34" charset="-122"/>
-                <a:cs typeface="Aptos" pitchFamily="34" charset="-120"/>
-              </a:rPr>
-              <a:t>AI for Social Good begins with problem definition.</a:t>
+                  <a:srgbClr val="003A63"/>
+                </a:solidFill>
+                <a:latin typeface="Aptos" pitchFamily="34" charset="0"/>
+                <a:ea typeface="Aptos" pitchFamily="34" charset="-122"/>
+                <a:cs typeface="Aptos" pitchFamily="34" charset="-120"/>
+              </a:rPr>
+              <a:t>• AI for Social Good begins with problem definition.</a:t>
             </a:r>
             <a:endParaRPr lang="en-US" sz="2100" dirty="0"/>
           </a:p>
           <a:p>
+            <a:pPr indent="0" marL="0">
+              <a:buNone/>
+            </a:pPr>
             <a:r>
               <a:rPr lang="en-US" sz="2100" dirty="0">
                 <a:solidFill>
-                  <a:srgbClr val="17364A"/>
-                </a:solidFill>
-                <a:latin typeface="Aptos" pitchFamily="34" charset="0"/>
-                <a:ea typeface="Aptos" pitchFamily="34" charset="-122"/>
-                <a:cs typeface="Aptos" pitchFamily="34" charset="-120"/>
-              </a:rPr>
-              <a:t>The problem should be a public health problem, not a technology opportunity.</a:t>
+                  <a:srgbClr val="003A63"/>
+                </a:solidFill>
+                <a:latin typeface="Aptos" pitchFamily="34" charset="0"/>
+                <a:ea typeface="Aptos" pitchFamily="34" charset="-122"/>
+                <a:cs typeface="Aptos" pitchFamily="34" charset="-120"/>
+              </a:rPr>
+              <a:t>• The problem should be a public health problem, not a technology opportunity.</a:t>
             </a:r>
             <a:endParaRPr lang="en-US" sz="2100" dirty="0"/>
           </a:p>
           <a:p>
+            <a:pPr indent="0" marL="0">
+              <a:buNone/>
+            </a:pPr>
             <a:r>
               <a:rPr lang="en-US" sz="2100" dirty="0">
                 <a:solidFill>
-                  <a:srgbClr val="17364A"/>
-                </a:solidFill>
-                <a:latin typeface="Aptos" pitchFamily="34" charset="0"/>
-                <a:ea typeface="Aptos" pitchFamily="34" charset="-122"/>
-                <a:cs typeface="Aptos" pitchFamily="34" charset="-120"/>
-              </a:rPr>
-              <a:t>For example, “use a chatbot” is not a problem definition. “Reduce delays in connecting families to.</a:t>
+                  <a:srgbClr val="003A63"/>
+                </a:solidFill>
+                <a:latin typeface="Aptos" pitchFamily="34" charset="0"/>
+                <a:ea typeface="Aptos" pitchFamily="34" charset="-122"/>
+                <a:cs typeface="Aptos" pitchFamily="34" charset="-120"/>
+              </a:rPr>
+              <a:t>• For example, “use a chatbot” is not a problem definition. “Reduce delays in connecting.</a:t>
             </a:r>
             <a:endParaRPr lang="en-US" sz="2100" dirty="0"/>
           </a:p>
@@ -3476,17 +3485,17 @@
         </p:nvSpPr>
         <p:spPr>
           <a:xfrm>
-            <a:off x="7799832" y="1828800"/>
-            <a:ext cx="3145536" cy="685800"/>
-          </a:xfrm>
-          <a:prstGeom prst="rect">
-            <a:avLst/>
-          </a:prstGeom>
-          <a:noFill/>
-          <a:ln/>
-        </p:spPr>
-        <p:txBody>
-          <a:bodyPr wrap="square" lIns="0" tIns="0" rIns="0" bIns="0" rtlCol="0" anchor="t">
+            <a:off x="7799832" y="1801368"/>
+            <a:ext cx="3145536" cy="758952"/>
+          </a:xfrm>
+          <a:prstGeom prst="rect">
+            <a:avLst/>
+          </a:prstGeom>
+          <a:noFill/>
+          <a:ln/>
+        </p:spPr>
+        <p:txBody>
+          <a:bodyPr wrap="square" lIns="254" tIns="254" rIns="254" bIns="254" rtlCol="0" anchor="t">
             <a:normAutofit/>
           </a:bodyPr>
           <a:lstStyle/>
@@ -3495,7 +3504,7 @@
               <a:buNone/>
             </a:pPr>
             <a:r>
-              <a:rPr lang="en-US" sz="1550" dirty="0">
+              <a:rPr lang="en-US" sz="1320" dirty="0">
                 <a:solidFill>
                   <a:srgbClr val="17364A"/>
                 </a:solidFill>
@@ -3505,7 +3514,7 @@
               </a:rPr>
               <a:t>AI for Social Good begins with problem definition.</a:t>
             </a:r>
-            <a:endParaRPr lang="en-US" sz="1550" dirty="0"/>
+            <a:endParaRPr lang="en-US" sz="1320" dirty="0"/>
           </a:p>
         </p:txBody>
       </p:sp>
@@ -3593,13 +3602,16 @@
           <a:ln/>
         </p:spPr>
         <p:txBody>
-          <a:bodyPr wrap="square" lIns="254" tIns="254" rIns="254" bIns="254" rtlCol="0" anchor="t">
+          <a:bodyPr wrap="square" lIns="508" tIns="508" rIns="508" bIns="508" rtlCol="0" anchor="t">
             <a:normAutofit/>
           </a:bodyPr>
           <a:lstStyle/>
           <a:p>
-            <a:r>
-              <a:rPr lang="en-US" sz="1380" dirty="0">
+            <a:pPr indent="0" marL="0">
+              <a:buNone/>
+            </a:pPr>
+            <a:r>
+              <a:rPr lang="en-US" sz="1220" dirty="0">
                 <a:solidFill>
                   <a:srgbClr val="17364A"/>
                 </a:solidFill>
@@ -3607,13 +3619,16 @@
                 <a:ea typeface="Aptos" pitchFamily="34" charset="-122"/>
                 <a:cs typeface="Aptos" pitchFamily="34" charset="-120"/>
               </a:rPr>
-              <a:t>For example, “use a chatbot” is not a problem definition. “Reduce delays in connecting.</a:t>
-            </a:r>
-            <a:endParaRPr lang="en-US" sz="1380" dirty="0"/>
-          </a:p>
-          <a:p>
-            <a:r>
-              <a:rPr lang="en-US" sz="1380" dirty="0">
+              <a:t>For example, “use a chatbot” is not a problem definition. “Reduce.</a:t>
+            </a:r>
+            <a:endParaRPr lang="en-US" sz="1220" dirty="0"/>
+          </a:p>
+          <a:p>
+            <a:pPr indent="0" marL="0">
+              <a:buNone/>
+            </a:pPr>
+            <a:r>
+              <a:rPr lang="en-US" sz="1220" dirty="0">
                 <a:solidFill>
                   <a:srgbClr val="17364A"/>
                 </a:solidFill>
@@ -3621,13 +3636,16 @@
                 <a:ea typeface="Aptos" pitchFamily="34" charset="-122"/>
                 <a:cs typeface="Aptos" pitchFamily="34" charset="-120"/>
               </a:rPr>
-              <a:t>Starting with the problem helps agencies avoid technology-driven solutions that do not.</a:t>
-            </a:r>
-            <a:endParaRPr lang="en-US" sz="1380" dirty="0"/>
-          </a:p>
-          <a:p>
-            <a:r>
-              <a:rPr lang="en-US" sz="1380" dirty="0">
+              <a:t>Starting with the problem helps agencies avoid technology-driven.</a:t>
+            </a:r>
+            <a:endParaRPr lang="en-US" sz="1220" dirty="0"/>
+          </a:p>
+          <a:p>
+            <a:pPr indent="0" marL="0">
+              <a:buNone/>
+            </a:pPr>
+            <a:r>
+              <a:rPr lang="en-US" sz="1220" dirty="0">
                 <a:solidFill>
                   <a:srgbClr val="17364A"/>
                 </a:solidFill>
@@ -3635,9 +3653,9 @@
                 <a:ea typeface="Aptos" pitchFamily="34" charset="-122"/>
                 <a:cs typeface="Aptos" pitchFamily="34" charset="-120"/>
               </a:rPr>
-              <a:t>Equity by design requires agencies to identify who is included, who is excluded, and who.</a:t>
-            </a:r>
-            <a:endParaRPr lang="en-US" sz="1380" dirty="0"/>
+              <a:t>Equity by design requires agencies to identify who is included,.</a:t>
+            </a:r>
+            <a:endParaRPr lang="en-US" sz="1220" dirty="0"/>
           </a:p>
         </p:txBody>
       </p:sp>
@@ -3715,17 +3733,17 @@
         </p:nvSpPr>
         <p:spPr>
           <a:xfrm>
-            <a:off x="7799832" y="5001768"/>
-            <a:ext cx="3145536" cy="502920"/>
-          </a:xfrm>
-          <a:prstGeom prst="rect">
-            <a:avLst/>
-          </a:prstGeom>
-          <a:noFill/>
-          <a:ln/>
-        </p:spPr>
-        <p:txBody>
-          <a:bodyPr wrap="square" lIns="0" tIns="0" rIns="0" bIns="0" rtlCol="0" anchor="t">
+            <a:off x="7799832" y="4974336"/>
+            <a:ext cx="3145536" cy="576072"/>
+          </a:xfrm>
+          <a:prstGeom prst="rect">
+            <a:avLst/>
+          </a:prstGeom>
+          <a:noFill/>
+          <a:ln/>
+        </p:spPr>
+        <p:txBody>
+          <a:bodyPr wrap="square" lIns="254" tIns="254" rIns="254" bIns="254" rtlCol="0" anchor="t">
             <a:normAutofit/>
           </a:bodyPr>
           <a:lstStyle/>
@@ -3734,7 +3752,7 @@
               <a:buNone/>
             </a:pPr>
             <a:r>
-              <a:rPr lang="en-US" sz="1550" dirty="0">
+              <a:rPr lang="en-US" sz="1320" dirty="0">
                 <a:solidFill>
                   <a:srgbClr val="17364A"/>
                 </a:solidFill>
@@ -3742,9 +3760,9 @@
                 <a:ea typeface="Aptos" pitchFamily="34" charset="-122"/>
                 <a:cs typeface="Aptos" pitchFamily="34" charset="-120"/>
               </a:rPr>
-              <a:t>Connect the concept to public health purpose, responsible use, required safeguards, documentation, and the next action a department should take.</a:t>
-            </a:r>
-            <a:endParaRPr lang="en-US" sz="1550" dirty="0"/>
+              <a:t>Connect the concept to public health purpose, responsible use, required safeguards, documentation, and the next action a.</a:t>
+            </a:r>
+            <a:endParaRPr lang="en-US" sz="1320" dirty="0"/>
           </a:p>
         </p:txBody>
       </p:sp>
@@ -4045,49 +4063,58 @@
           <a:ln/>
         </p:spPr>
         <p:txBody>
-          <a:bodyPr wrap="square" lIns="635" tIns="635" rIns="635" bIns="635" rtlCol="0" anchor="t">
+          <a:bodyPr wrap="square" lIns="1016" tIns="1016" rIns="1016" bIns="1016" rtlCol="0" anchor="t">
             <a:normAutofit/>
           </a:bodyPr>
           <a:lstStyle/>
           <a:p>
+            <a:pPr indent="0" marL="0">
+              <a:buNone/>
+            </a:pPr>
             <a:r>
               <a:rPr lang="en-US" sz="2100" dirty="0">
                 <a:solidFill>
-                  <a:srgbClr val="17364A"/>
-                </a:solidFill>
-                <a:latin typeface="Aptos" pitchFamily="34" charset="0"/>
-                <a:ea typeface="Aptos" pitchFamily="34" charset="-122"/>
-                <a:cs typeface="Aptos" pitchFamily="34" charset="-120"/>
-              </a:rPr>
-              <a:t>Measuring social good requires more than counting users or outputs.</a:t>
+                  <a:srgbClr val="003A63"/>
+                </a:solidFill>
+                <a:latin typeface="Aptos" pitchFamily="34" charset="0"/>
+                <a:ea typeface="Aptos" pitchFamily="34" charset="-122"/>
+                <a:cs typeface="Aptos" pitchFamily="34" charset="-120"/>
+              </a:rPr>
+              <a:t>• Measuring social good requires more than counting users or outputs.</a:t>
             </a:r>
             <a:endParaRPr lang="en-US" sz="2100" dirty="0"/>
           </a:p>
           <a:p>
+            <a:pPr indent="0" marL="0">
+              <a:buNone/>
+            </a:pPr>
             <a:r>
               <a:rPr lang="en-US" sz="2100" dirty="0">
                 <a:solidFill>
-                  <a:srgbClr val="17364A"/>
-                </a:solidFill>
-                <a:latin typeface="Aptos" pitchFamily="34" charset="0"/>
-                <a:ea typeface="Aptos" pitchFamily="34" charset="-122"/>
-                <a:cs typeface="Aptos" pitchFamily="34" charset="-120"/>
-              </a:rPr>
-              <a:t>Agencies should measure whether the AI-supported workflow improves timeliness, access, quality,.</a:t>
+                  <a:srgbClr val="003A63"/>
+                </a:solidFill>
+                <a:latin typeface="Aptos" pitchFamily="34" charset="0"/>
+                <a:ea typeface="Aptos" pitchFamily="34" charset="-122"/>
+                <a:cs typeface="Aptos" pitchFamily="34" charset="-120"/>
+              </a:rPr>
+              <a:t>• Agencies should measure whether the AI-supported workflow improves timeliness, access, quality,.</a:t>
             </a:r>
             <a:endParaRPr lang="en-US" sz="2100" dirty="0"/>
           </a:p>
           <a:p>
+            <a:pPr indent="0" marL="0">
+              <a:buNone/>
+            </a:pPr>
             <a:r>
               <a:rPr lang="en-US" sz="2100" dirty="0">
                 <a:solidFill>
-                  <a:srgbClr val="17364A"/>
-                </a:solidFill>
-                <a:latin typeface="Aptos" pitchFamily="34" charset="0"/>
-                <a:ea typeface="Aptos" pitchFamily="34" charset="-122"/>
-                <a:cs typeface="Aptos" pitchFamily="34" charset="-120"/>
-              </a:rPr>
-              <a:t>They should also monitor unintended consequences, such as reduced service quality, increased.</a:t>
+                  <a:srgbClr val="003A63"/>
+                </a:solidFill>
+                <a:latin typeface="Aptos" pitchFamily="34" charset="0"/>
+                <a:ea typeface="Aptos" pitchFamily="34" charset="-122"/>
+                <a:cs typeface="Aptos" pitchFamily="34" charset="-120"/>
+              </a:rPr>
+              <a:t>• They should also monitor unintended consequences, such as reduced service quality, increased.</a:t>
             </a:r>
             <a:endParaRPr lang="en-US" sz="2100" dirty="0"/>
           </a:p>
@@ -4167,17 +4194,17 @@
         </p:nvSpPr>
         <p:spPr>
           <a:xfrm>
-            <a:off x="7799832" y="1828800"/>
-            <a:ext cx="3145536" cy="685800"/>
-          </a:xfrm>
-          <a:prstGeom prst="rect">
-            <a:avLst/>
-          </a:prstGeom>
-          <a:noFill/>
-          <a:ln/>
-        </p:spPr>
-        <p:txBody>
-          <a:bodyPr wrap="square" lIns="0" tIns="0" rIns="0" bIns="0" rtlCol="0" anchor="t">
+            <a:off x="7799832" y="1801368"/>
+            <a:ext cx="3145536" cy="758952"/>
+          </a:xfrm>
+          <a:prstGeom prst="rect">
+            <a:avLst/>
+          </a:prstGeom>
+          <a:noFill/>
+          <a:ln/>
+        </p:spPr>
+        <p:txBody>
+          <a:bodyPr wrap="square" lIns="254" tIns="254" rIns="254" bIns="254" rtlCol="0" anchor="t">
             <a:normAutofit/>
           </a:bodyPr>
           <a:lstStyle/>
@@ -4186,7 +4213,7 @@
               <a:buNone/>
             </a:pPr>
             <a:r>
-              <a:rPr lang="en-US" sz="1550" dirty="0">
+              <a:rPr lang="en-US" sz="1320" dirty="0">
                 <a:solidFill>
                   <a:srgbClr val="17364A"/>
                 </a:solidFill>
@@ -4196,7 +4223,7 @@
               </a:rPr>
               <a:t>Measuring social good requires more than counting users or outputs.</a:t>
             </a:r>
-            <a:endParaRPr lang="en-US" sz="1550" dirty="0"/>
+            <a:endParaRPr lang="en-US" sz="1320" dirty="0"/>
           </a:p>
         </p:txBody>
       </p:sp>
@@ -4284,13 +4311,16 @@
           <a:ln/>
         </p:spPr>
         <p:txBody>
-          <a:bodyPr wrap="square" lIns="254" tIns="254" rIns="254" bIns="254" rtlCol="0" anchor="t">
+          <a:bodyPr wrap="square" lIns="508" tIns="508" rIns="508" bIns="508" rtlCol="0" anchor="t">
             <a:normAutofit/>
           </a:bodyPr>
           <a:lstStyle/>
           <a:p>
-            <a:r>
-              <a:rPr lang="en-US" sz="1380" dirty="0">
+            <a:pPr indent="0" marL="0">
+              <a:buNone/>
+            </a:pPr>
+            <a:r>
+              <a:rPr lang="en-US" sz="1220" dirty="0">
                 <a:solidFill>
                   <a:srgbClr val="17364A"/>
                 </a:solidFill>
@@ -4298,13 +4328,16 @@
                 <a:ea typeface="Aptos" pitchFamily="34" charset="-122"/>
                 <a:cs typeface="Aptos" pitchFamily="34" charset="-120"/>
               </a:rPr>
-              <a:t>Agencies should measure whether the AI-supported workflow improves timeliness, access,.</a:t>
-            </a:r>
-            <a:endParaRPr lang="en-US" sz="1380" dirty="0"/>
-          </a:p>
-          <a:p>
-            <a:r>
-              <a:rPr lang="en-US" sz="1380" dirty="0">
+              <a:t>Agencies should measure whether the AI-supported workflow improves.</a:t>
+            </a:r>
+            <a:endParaRPr lang="en-US" sz="1220" dirty="0"/>
+          </a:p>
+          <a:p>
+            <a:pPr indent="0" marL="0">
+              <a:buNone/>
+            </a:pPr>
+            <a:r>
+              <a:rPr lang="en-US" sz="1220" dirty="0">
                 <a:solidFill>
                   <a:srgbClr val="17364A"/>
                 </a:solidFill>
@@ -4312,13 +4345,16 @@
                 <a:ea typeface="Aptos" pitchFamily="34" charset="-122"/>
                 <a:cs typeface="Aptos" pitchFamily="34" charset="-120"/>
               </a:rPr>
-              <a:t>They should also monitor unintended consequences, such as reduced service quality,.</a:t>
-            </a:r>
-            <a:endParaRPr lang="en-US" sz="1380" dirty="0"/>
-          </a:p>
-          <a:p>
-            <a:r>
-              <a:rPr lang="en-US" sz="1380" dirty="0">
+              <a:t>They should also monitor unintended consequences, such as reduced.</a:t>
+            </a:r>
+            <a:endParaRPr lang="en-US" sz="1220" dirty="0"/>
+          </a:p>
+          <a:p>
+            <a:pPr indent="0" marL="0">
+              <a:buNone/>
+            </a:pPr>
+            <a:r>
+              <a:rPr lang="en-US" sz="1220" dirty="0">
                 <a:solidFill>
                   <a:srgbClr val="17364A"/>
                 </a:solidFill>
@@ -4328,7 +4364,7 @@
               </a:rPr>
               <a:t>Responsible innovation includes sunset and rollback planning.</a:t>
             </a:r>
-            <a:endParaRPr lang="en-US" sz="1380" dirty="0"/>
+            <a:endParaRPr lang="en-US" sz="1220" dirty="0"/>
           </a:p>
         </p:txBody>
       </p:sp>
@@ -4406,17 +4442,17 @@
         </p:nvSpPr>
         <p:spPr>
           <a:xfrm>
-            <a:off x="7799832" y="5001768"/>
-            <a:ext cx="3145536" cy="502920"/>
-          </a:xfrm>
-          <a:prstGeom prst="rect">
-            <a:avLst/>
-          </a:prstGeom>
-          <a:noFill/>
-          <a:ln/>
-        </p:spPr>
-        <p:txBody>
-          <a:bodyPr wrap="square" lIns="0" tIns="0" rIns="0" bIns="0" rtlCol="0" anchor="t">
+            <a:off x="7799832" y="4974336"/>
+            <a:ext cx="3145536" cy="576072"/>
+          </a:xfrm>
+          <a:prstGeom prst="rect">
+            <a:avLst/>
+          </a:prstGeom>
+          <a:noFill/>
+          <a:ln/>
+        </p:spPr>
+        <p:txBody>
+          <a:bodyPr wrap="square" lIns="254" tIns="254" rIns="254" bIns="254" rtlCol="0" anchor="t">
             <a:normAutofit/>
           </a:bodyPr>
           <a:lstStyle/>
@@ -4425,7 +4461,7 @@
               <a:buNone/>
             </a:pPr>
             <a:r>
-              <a:rPr lang="en-US" sz="1550" dirty="0">
+              <a:rPr lang="en-US" sz="1320" dirty="0">
                 <a:solidFill>
                   <a:srgbClr val="17364A"/>
                 </a:solidFill>
@@ -4433,9 +4469,9 @@
                 <a:ea typeface="Aptos" pitchFamily="34" charset="-122"/>
                 <a:cs typeface="Aptos" pitchFamily="34" charset="-120"/>
               </a:rPr>
-              <a:t>Connect the concept to public health purpose, responsible use, required safeguards, documentation, and the next action a department should take.</a:t>
-            </a:r>
-            <a:endParaRPr lang="en-US" sz="1550" dirty="0"/>
+              <a:t>Connect the concept to public health purpose, responsible use, required safeguards, documentation, and the next action a.</a:t>
+            </a:r>
+            <a:endParaRPr lang="en-US" sz="1320" dirty="0"/>
           </a:p>
         </p:txBody>
       </p:sp>
@@ -4736,49 +4772,58 @@
           <a:ln/>
         </p:spPr>
         <p:txBody>
-          <a:bodyPr wrap="square" lIns="635" tIns="635" rIns="635" bIns="635" rtlCol="0" anchor="t">
+          <a:bodyPr wrap="square" lIns="1016" tIns="1016" rIns="1016" bIns="1016" rtlCol="0" anchor="t">
             <a:normAutofit/>
           </a:bodyPr>
           <a:lstStyle/>
           <a:p>
+            <a:pPr indent="0" marL="0">
+              <a:buNone/>
+            </a:pPr>
             <a:r>
               <a:rPr lang="en-US" sz="2100" dirty="0">
                 <a:solidFill>
-                  <a:srgbClr val="17364A"/>
-                </a:solidFill>
-                <a:latin typeface="Aptos" pitchFamily="34" charset="0"/>
-                <a:ea typeface="Aptos" pitchFamily="34" charset="-122"/>
-                <a:cs typeface="Aptos" pitchFamily="34" charset="-120"/>
-              </a:rPr>
-              <a:t>Technology-first design.</a:t>
+                  <a:srgbClr val="003A63"/>
+                </a:solidFill>
+                <a:latin typeface="Aptos" pitchFamily="34" charset="0"/>
+                <a:ea typeface="Aptos" pitchFamily="34" charset="-122"/>
+                <a:cs typeface="Aptos" pitchFamily="34" charset="-120"/>
+              </a:rPr>
+              <a:t>• Technology-first design.</a:t>
             </a:r>
             <a:endParaRPr lang="en-US" sz="2100" dirty="0"/>
           </a:p>
           <a:p>
+            <a:pPr indent="0" marL="0">
+              <a:buNone/>
+            </a:pPr>
             <a:r>
               <a:rPr lang="en-US" sz="2100" dirty="0">
                 <a:solidFill>
-                  <a:srgbClr val="17364A"/>
-                </a:solidFill>
-                <a:latin typeface="Aptos" pitchFamily="34" charset="0"/>
-                <a:ea typeface="Aptos" pitchFamily="34" charset="-122"/>
-                <a:cs typeface="Aptos" pitchFamily="34" charset="-120"/>
-              </a:rPr>
-              <a:t>A tool may be adopted because it is novel rather than because it solves a public health problem.</a:t>
+                  <a:srgbClr val="003A63"/>
+                </a:solidFill>
+                <a:latin typeface="Aptos" pitchFamily="34" charset="0"/>
+                <a:ea typeface="Aptos" pitchFamily="34" charset="-122"/>
+                <a:cs typeface="Aptos" pitchFamily="34" charset="-120"/>
+              </a:rPr>
+              <a:t>• A tool may be adopted because it is novel rather than because it solves a public health problem.</a:t>
             </a:r>
             <a:endParaRPr lang="en-US" sz="2100" dirty="0"/>
           </a:p>
           <a:p>
+            <a:pPr indent="0" marL="0">
+              <a:buNone/>
+            </a:pPr>
             <a:r>
               <a:rPr lang="en-US" sz="2100" dirty="0">
                 <a:solidFill>
-                  <a:srgbClr val="17364A"/>
-                </a:solidFill>
-                <a:latin typeface="Aptos" pitchFamily="34" charset="0"/>
-                <a:ea typeface="Aptos" pitchFamily="34" charset="-122"/>
-                <a:cs typeface="Aptos" pitchFamily="34" charset="-120"/>
-              </a:rPr>
-              <a:t>Guardrails include problem-first planning, alternatives analysis, and public value criteria.</a:t>
+                  <a:srgbClr val="003A63"/>
+                </a:solidFill>
+                <a:latin typeface="Aptos" pitchFamily="34" charset="0"/>
+                <a:ea typeface="Aptos" pitchFamily="34" charset="-122"/>
+                <a:cs typeface="Aptos" pitchFamily="34" charset="-120"/>
+              </a:rPr>
+              <a:t>• Guardrails include problem-first planning, alternatives analysis, and public value criteria.</a:t>
             </a:r>
             <a:endParaRPr lang="en-US" sz="2100" dirty="0"/>
           </a:p>
@@ -4858,17 +4903,17 @@
         </p:nvSpPr>
         <p:spPr>
           <a:xfrm>
-            <a:off x="7799832" y="1828800"/>
-            <a:ext cx="3145536" cy="685800"/>
-          </a:xfrm>
-          <a:prstGeom prst="rect">
-            <a:avLst/>
-          </a:prstGeom>
-          <a:noFill/>
-          <a:ln/>
-        </p:spPr>
-        <p:txBody>
-          <a:bodyPr wrap="square" lIns="0" tIns="0" rIns="0" bIns="0" rtlCol="0" anchor="t">
+            <a:off x="7799832" y="1801368"/>
+            <a:ext cx="3145536" cy="758952"/>
+          </a:xfrm>
+          <a:prstGeom prst="rect">
+            <a:avLst/>
+          </a:prstGeom>
+          <a:noFill/>
+          <a:ln/>
+        </p:spPr>
+        <p:txBody>
+          <a:bodyPr wrap="square" lIns="254" tIns="254" rIns="254" bIns="254" rtlCol="0" anchor="t">
             <a:normAutofit/>
           </a:bodyPr>
           <a:lstStyle/>
@@ -4877,7 +4922,7 @@
               <a:buNone/>
             </a:pPr>
             <a:r>
-              <a:rPr lang="en-US" sz="1550" dirty="0">
+              <a:rPr lang="en-US" sz="1320" dirty="0">
                 <a:solidFill>
                   <a:srgbClr val="17364A"/>
                 </a:solidFill>
@@ -4887,7 +4932,7 @@
               </a:rPr>
               <a:t>Technology-first design.</a:t>
             </a:r>
-            <a:endParaRPr lang="en-US" sz="1550" dirty="0"/>
+            <a:endParaRPr lang="en-US" sz="1320" dirty="0"/>
           </a:p>
         </p:txBody>
       </p:sp>
@@ -4975,13 +5020,16 @@
           <a:ln/>
         </p:spPr>
         <p:txBody>
-          <a:bodyPr wrap="square" lIns="254" tIns="254" rIns="254" bIns="254" rtlCol="0" anchor="t">
+          <a:bodyPr wrap="square" lIns="508" tIns="508" rIns="508" bIns="508" rtlCol="0" anchor="t">
             <a:normAutofit/>
           </a:bodyPr>
           <a:lstStyle/>
           <a:p>
-            <a:r>
-              <a:rPr lang="en-US" sz="1380" dirty="0">
+            <a:pPr indent="0" marL="0">
+              <a:buNone/>
+            </a:pPr>
+            <a:r>
+              <a:rPr lang="en-US" sz="1220" dirty="0">
                 <a:solidFill>
                   <a:srgbClr val="17364A"/>
                 </a:solidFill>
@@ -4991,11 +5039,14 @@
               </a:rPr>
               <a:t>Unequal benefit.</a:t>
             </a:r>
-            <a:endParaRPr lang="en-US" sz="1380" dirty="0"/>
-          </a:p>
-          <a:p>
-            <a:r>
-              <a:rPr lang="en-US" sz="1380" dirty="0">
+            <a:endParaRPr lang="en-US" sz="1220" dirty="0"/>
+          </a:p>
+          <a:p>
+            <a:pPr indent="0" marL="0">
+              <a:buNone/>
+            </a:pPr>
+            <a:r>
+              <a:rPr lang="en-US" sz="1220" dirty="0">
                 <a:solidFill>
                   <a:srgbClr val="17364A"/>
                 </a:solidFill>
@@ -5003,13 +5054,16 @@
                 <a:ea typeface="Aptos" pitchFamily="34" charset="-122"/>
                 <a:cs typeface="Aptos" pitchFamily="34" charset="-120"/>
               </a:rPr>
-              <a:t>AI may help people with strong digital access while excluding others.</a:t>
-            </a:r>
-            <a:endParaRPr lang="en-US" sz="1380" dirty="0"/>
-          </a:p>
-          <a:p>
-            <a:r>
-              <a:rPr lang="en-US" sz="1380" dirty="0">
+              <a:t>AI may help people with strong digital access while excluding.</a:t>
+            </a:r>
+            <a:endParaRPr lang="en-US" sz="1220" dirty="0"/>
+          </a:p>
+          <a:p>
+            <a:pPr indent="0" marL="0">
+              <a:buNone/>
+            </a:pPr>
+            <a:r>
+              <a:rPr lang="en-US" sz="1220" dirty="0">
                 <a:solidFill>
                   <a:srgbClr val="17364A"/>
                 </a:solidFill>
@@ -5017,9 +5071,9 @@
                 <a:ea typeface="Aptos" pitchFamily="34" charset="-122"/>
                 <a:cs typeface="Aptos" pitchFamily="34" charset="-120"/>
               </a:rPr>
-              <a:t>Guardrails include language access, accessibility, offline options, and human fallback.</a:t>
-            </a:r>
-            <a:endParaRPr lang="en-US" sz="1380" dirty="0"/>
+              <a:t>Guardrails include language access, accessibility, offline.</a:t>
+            </a:r>
+            <a:endParaRPr lang="en-US" sz="1220" dirty="0"/>
           </a:p>
         </p:txBody>
       </p:sp>
@@ -5097,17 +5151,17 @@
         </p:nvSpPr>
         <p:spPr>
           <a:xfrm>
-            <a:off x="7799832" y="5001768"/>
-            <a:ext cx="3145536" cy="502920"/>
-          </a:xfrm>
-          <a:prstGeom prst="rect">
-            <a:avLst/>
-          </a:prstGeom>
-          <a:noFill/>
-          <a:ln/>
-        </p:spPr>
-        <p:txBody>
-          <a:bodyPr wrap="square" lIns="0" tIns="0" rIns="0" bIns="0" rtlCol="0" anchor="t">
+            <a:off x="7799832" y="4974336"/>
+            <a:ext cx="3145536" cy="576072"/>
+          </a:xfrm>
+          <a:prstGeom prst="rect">
+            <a:avLst/>
+          </a:prstGeom>
+          <a:noFill/>
+          <a:ln/>
+        </p:spPr>
+        <p:txBody>
+          <a:bodyPr wrap="square" lIns="254" tIns="254" rIns="254" bIns="254" rtlCol="0" anchor="t">
             <a:normAutofit/>
           </a:bodyPr>
           <a:lstStyle/>
@@ -5116,7 +5170,7 @@
               <a:buNone/>
             </a:pPr>
             <a:r>
-              <a:rPr lang="en-US" sz="1550" dirty="0">
+              <a:rPr lang="en-US" sz="1320" dirty="0">
                 <a:solidFill>
                   <a:srgbClr val="17364A"/>
                 </a:solidFill>
@@ -5124,9 +5178,9 @@
                 <a:ea typeface="Aptos" pitchFamily="34" charset="-122"/>
                 <a:cs typeface="Aptos" pitchFamily="34" charset="-120"/>
               </a:rPr>
-              <a:t>Identify what could go wrong, who could be affected, what safeguards are needed, and what evidence should be reviewed before use expands.</a:t>
-            </a:r>
-            <a:endParaRPr lang="en-US" sz="1550" dirty="0"/>
+              <a:t>Identify what could go wrong, who could be affected, what safeguards are needed, and what evidence should be reviewed.</a:t>
+            </a:r>
+            <a:endParaRPr lang="en-US" sz="1320" dirty="0"/>
           </a:p>
         </p:txBody>
       </p:sp>
@@ -5427,49 +5481,58 @@
           <a:ln/>
         </p:spPr>
         <p:txBody>
-          <a:bodyPr wrap="square" lIns="635" tIns="635" rIns="635" bIns="635" rtlCol="0" anchor="t">
+          <a:bodyPr wrap="square" lIns="1016" tIns="1016" rIns="1016" bIns="1016" rtlCol="0" anchor="t">
             <a:normAutofit/>
           </a:bodyPr>
           <a:lstStyle/>
           <a:p>
+            <a:pPr indent="0" marL="0">
+              <a:buNone/>
+            </a:pPr>
             <a:r>
               <a:rPr lang="en-US" sz="2100" dirty="0">
                 <a:solidFill>
-                  <a:srgbClr val="17364A"/>
-                </a:solidFill>
-                <a:latin typeface="Aptos" pitchFamily="34" charset="0"/>
-                <a:ea typeface="Aptos" pitchFamily="34" charset="-122"/>
-                <a:cs typeface="Aptos" pitchFamily="34" charset="-120"/>
-              </a:rPr>
-              <a:t>Resource diversion.</a:t>
+                  <a:srgbClr val="003A63"/>
+                </a:solidFill>
+                <a:latin typeface="Aptos" pitchFamily="34" charset="0"/>
+                <a:ea typeface="Aptos" pitchFamily="34" charset="-122"/>
+                <a:cs typeface="Aptos" pitchFamily="34" charset="-120"/>
+              </a:rPr>
+              <a:t>• Resource diversion.</a:t>
             </a:r>
             <a:endParaRPr lang="en-US" sz="2100" dirty="0"/>
           </a:p>
           <a:p>
+            <a:pPr indent="0" marL="0">
+              <a:buNone/>
+            </a:pPr>
             <a:r>
               <a:rPr lang="en-US" sz="2100" dirty="0">
                 <a:solidFill>
-                  <a:srgbClr val="17364A"/>
-                </a:solidFill>
-                <a:latin typeface="Aptos" pitchFamily="34" charset="0"/>
-                <a:ea typeface="Aptos" pitchFamily="34" charset="-122"/>
-                <a:cs typeface="Aptos" pitchFamily="34" charset="-120"/>
-              </a:rPr>
-              <a:t>AI projects may consume resources that could be used for more effective interventions.</a:t>
+                  <a:srgbClr val="003A63"/>
+                </a:solidFill>
+                <a:latin typeface="Aptos" pitchFamily="34" charset="0"/>
+                <a:ea typeface="Aptos" pitchFamily="34" charset="-122"/>
+                <a:cs typeface="Aptos" pitchFamily="34" charset="-120"/>
+              </a:rPr>
+              <a:t>• AI projects may consume resources that could be used for more effective interventions.</a:t>
             </a:r>
             <a:endParaRPr lang="en-US" sz="2100" dirty="0"/>
           </a:p>
           <a:p>
+            <a:pPr indent="0" marL="0">
+              <a:buNone/>
+            </a:pPr>
             <a:r>
               <a:rPr lang="en-US" sz="2100" dirty="0">
                 <a:solidFill>
-                  <a:srgbClr val="17364A"/>
-                </a:solidFill>
-                <a:latin typeface="Aptos" pitchFamily="34" charset="0"/>
-                <a:ea typeface="Aptos" pitchFamily="34" charset="-122"/>
-                <a:cs typeface="Aptos" pitchFamily="34" charset="-120"/>
-              </a:rPr>
-              <a:t>Guardrails include impact measurement, cost-benefit review, and periodic reassessment.</a:t>
+                  <a:srgbClr val="003A63"/>
+                </a:solidFill>
+                <a:latin typeface="Aptos" pitchFamily="34" charset="0"/>
+                <a:ea typeface="Aptos" pitchFamily="34" charset="-122"/>
+                <a:cs typeface="Aptos" pitchFamily="34" charset="-120"/>
+              </a:rPr>
+              <a:t>• Guardrails include impact measurement, cost-benefit review, and periodic reassessment.</a:t>
             </a:r>
             <a:endParaRPr lang="en-US" sz="2100" dirty="0"/>
           </a:p>
@@ -5549,17 +5612,17 @@
         </p:nvSpPr>
         <p:spPr>
           <a:xfrm>
-            <a:off x="7799832" y="1828800"/>
-            <a:ext cx="3145536" cy="685800"/>
-          </a:xfrm>
-          <a:prstGeom prst="rect">
-            <a:avLst/>
-          </a:prstGeom>
-          <a:noFill/>
-          <a:ln/>
-        </p:spPr>
-        <p:txBody>
-          <a:bodyPr wrap="square" lIns="0" tIns="0" rIns="0" bIns="0" rtlCol="0" anchor="t">
+            <a:off x="7799832" y="1801368"/>
+            <a:ext cx="3145536" cy="758952"/>
+          </a:xfrm>
+          <a:prstGeom prst="rect">
+            <a:avLst/>
+          </a:prstGeom>
+          <a:noFill/>
+          <a:ln/>
+        </p:spPr>
+        <p:txBody>
+          <a:bodyPr wrap="square" lIns="254" tIns="254" rIns="254" bIns="254" rtlCol="0" anchor="t">
             <a:normAutofit/>
           </a:bodyPr>
           <a:lstStyle/>
@@ -5568,7 +5631,7 @@
               <a:buNone/>
             </a:pPr>
             <a:r>
-              <a:rPr lang="en-US" sz="1550" dirty="0">
+              <a:rPr lang="en-US" sz="1320" dirty="0">
                 <a:solidFill>
                   <a:srgbClr val="17364A"/>
                 </a:solidFill>
@@ -5578,7 +5641,7 @@
               </a:rPr>
               <a:t>Resource diversion.</a:t>
             </a:r>
-            <a:endParaRPr lang="en-US" sz="1550" dirty="0"/>
+            <a:endParaRPr lang="en-US" sz="1320" dirty="0"/>
           </a:p>
         </p:txBody>
       </p:sp>
@@ -5666,13 +5729,16 @@
           <a:ln/>
         </p:spPr>
         <p:txBody>
-          <a:bodyPr wrap="square" lIns="254" tIns="254" rIns="254" bIns="254" rtlCol="0" anchor="t">
+          <a:bodyPr wrap="square" lIns="508" tIns="508" rIns="508" bIns="508" rtlCol="0" anchor="t">
             <a:normAutofit/>
           </a:bodyPr>
           <a:lstStyle/>
           <a:p>
-            <a:r>
-              <a:rPr lang="en-US" sz="1380" dirty="0">
+            <a:pPr indent="0" marL="0">
+              <a:buNone/>
+            </a:pPr>
+            <a:r>
+              <a:rPr lang="en-US" sz="1220" dirty="0">
                 <a:solidFill>
                   <a:srgbClr val="17364A"/>
                 </a:solidFill>
@@ -5682,11 +5748,14 @@
               </a:rPr>
               <a:t>Resource diversion.</a:t>
             </a:r>
-            <a:endParaRPr lang="en-US" sz="1380" dirty="0"/>
-          </a:p>
-          <a:p>
-            <a:r>
-              <a:rPr lang="en-US" sz="1380" dirty="0">
+            <a:endParaRPr lang="en-US" sz="1220" dirty="0"/>
+          </a:p>
+          <a:p>
+            <a:pPr indent="0" marL="0">
+              <a:buNone/>
+            </a:pPr>
+            <a:r>
+              <a:rPr lang="en-US" sz="1220" dirty="0">
                 <a:solidFill>
                   <a:srgbClr val="17364A"/>
                 </a:solidFill>
@@ -5694,13 +5763,16 @@
                 <a:ea typeface="Aptos" pitchFamily="34" charset="-122"/>
                 <a:cs typeface="Aptos" pitchFamily="34" charset="-120"/>
               </a:rPr>
-              <a:t>AI projects may consume resources that could be used for more effective interventions.</a:t>
-            </a:r>
-            <a:endParaRPr lang="en-US" sz="1380" dirty="0"/>
-          </a:p>
-          <a:p>
-            <a:r>
-              <a:rPr lang="en-US" sz="1380" dirty="0">
+              <a:t>AI projects may consume resources that could be used for more.</a:t>
+            </a:r>
+            <a:endParaRPr lang="en-US" sz="1220" dirty="0"/>
+          </a:p>
+          <a:p>
+            <a:pPr indent="0" marL="0">
+              <a:buNone/>
+            </a:pPr>
+            <a:r>
+              <a:rPr lang="en-US" sz="1220" dirty="0">
                 <a:solidFill>
                   <a:srgbClr val="17364A"/>
                 </a:solidFill>
@@ -5708,9 +5780,9 @@
                 <a:ea typeface="Aptos" pitchFamily="34" charset="-122"/>
                 <a:cs typeface="Aptos" pitchFamily="34" charset="-120"/>
               </a:rPr>
-              <a:t>Guardrails include impact measurement, cost-benefit review, and periodic reassessment.</a:t>
-            </a:r>
-            <a:endParaRPr lang="en-US" sz="1380" dirty="0"/>
+              <a:t>Guardrails include impact measurement, cost-benefit review, and.</a:t>
+            </a:r>
+            <a:endParaRPr lang="en-US" sz="1220" dirty="0"/>
           </a:p>
         </p:txBody>
       </p:sp>
@@ -5788,17 +5860,17 @@
         </p:nvSpPr>
         <p:spPr>
           <a:xfrm>
-            <a:off x="7799832" y="5001768"/>
-            <a:ext cx="3145536" cy="502920"/>
-          </a:xfrm>
-          <a:prstGeom prst="rect">
-            <a:avLst/>
-          </a:prstGeom>
-          <a:noFill/>
-          <a:ln/>
-        </p:spPr>
-        <p:txBody>
-          <a:bodyPr wrap="square" lIns="0" tIns="0" rIns="0" bIns="0" rtlCol="0" anchor="t">
+            <a:off x="7799832" y="4974336"/>
+            <a:ext cx="3145536" cy="576072"/>
+          </a:xfrm>
+          <a:prstGeom prst="rect">
+            <a:avLst/>
+          </a:prstGeom>
+          <a:noFill/>
+          <a:ln/>
+        </p:spPr>
+        <p:txBody>
+          <a:bodyPr wrap="square" lIns="254" tIns="254" rIns="254" bIns="254" rtlCol="0" anchor="t">
             <a:normAutofit/>
           </a:bodyPr>
           <a:lstStyle/>
@@ -5807,7 +5879,7 @@
               <a:buNone/>
             </a:pPr>
             <a:r>
-              <a:rPr lang="en-US" sz="1550" dirty="0">
+              <a:rPr lang="en-US" sz="1320" dirty="0">
                 <a:solidFill>
                   <a:srgbClr val="17364A"/>
                 </a:solidFill>
@@ -5815,9 +5887,9 @@
                 <a:ea typeface="Aptos" pitchFamily="34" charset="-122"/>
                 <a:cs typeface="Aptos" pitchFamily="34" charset="-120"/>
               </a:rPr>
-              <a:t>Identify what could go wrong, who could be affected, what safeguards are needed, and what evidence should be reviewed before use expands.</a:t>
-            </a:r>
-            <a:endParaRPr lang="en-US" sz="1550" dirty="0"/>
+              <a:t>Identify what could go wrong, who could be affected, what safeguards are needed, and what evidence should be reviewed.</a:t>
+            </a:r>
+            <a:endParaRPr lang="en-US" sz="1320" dirty="0"/>
           </a:p>
         </p:txBody>
       </p:sp>
@@ -6118,49 +6190,58 @@
           <a:ln/>
         </p:spPr>
         <p:txBody>
-          <a:bodyPr wrap="square" lIns="635" tIns="635" rIns="635" bIns="635" rtlCol="0" anchor="t">
+          <a:bodyPr wrap="square" lIns="1016" tIns="1016" rIns="1016" bIns="1016" rtlCol="0" anchor="t">
             <a:normAutofit/>
           </a:bodyPr>
           <a:lstStyle/>
           <a:p>
+            <a:pPr indent="0" marL="0">
+              <a:buNone/>
+            </a:pPr>
             <a:r>
               <a:rPr lang="en-US" sz="2100" dirty="0">
                 <a:solidFill>
-                  <a:srgbClr val="17364A"/>
-                </a:solidFill>
-                <a:latin typeface="Aptos" pitchFamily="34" charset="0"/>
-                <a:ea typeface="Aptos" pitchFamily="34" charset="-122"/>
-                <a:cs typeface="Aptos" pitchFamily="34" charset="-120"/>
-              </a:rPr>
-              <a:t>AI for Social Good applies to every AI method.</a:t>
+                  <a:srgbClr val="003A63"/>
+                </a:solidFill>
+                <a:latin typeface="Aptos" pitchFamily="34" charset="0"/>
+                <a:ea typeface="Aptos" pitchFamily="34" charset="-122"/>
+                <a:cs typeface="Aptos" pitchFamily="34" charset="-120"/>
+              </a:rPr>
+              <a:t>• AI for Social Good applies to every AI method.</a:t>
             </a:r>
             <a:endParaRPr lang="en-US" sz="2100" dirty="0"/>
           </a:p>
           <a:p>
+            <a:pPr indent="0" marL="0">
+              <a:buNone/>
+            </a:pPr>
             <a:r>
               <a:rPr lang="en-US" sz="2100" dirty="0">
                 <a:solidFill>
-                  <a:srgbClr val="17364A"/>
-                </a:solidFill>
-                <a:latin typeface="Aptos" pitchFamily="34" charset="0"/>
-                <a:ea typeface="Aptos" pitchFamily="34" charset="-122"/>
-                <a:cs typeface="Aptos" pitchFamily="34" charset="-120"/>
-              </a:rPr>
-              <a:t>Generative AI may improve plain-language communication, but it must be accurate, accessible, and.</a:t>
+                  <a:srgbClr val="003A63"/>
+                </a:solidFill>
+                <a:latin typeface="Aptos" pitchFamily="34" charset="0"/>
+                <a:ea typeface="Aptos" pitchFamily="34" charset="-122"/>
+                <a:cs typeface="Aptos" pitchFamily="34" charset="-120"/>
+              </a:rPr>
+              <a:t>• Generative AI may improve plain-language communication, but it must be accurate, accessible,.</a:t>
             </a:r>
             <a:endParaRPr lang="en-US" sz="2100" dirty="0"/>
           </a:p>
           <a:p>
+            <a:pPr indent="0" marL="0">
+              <a:buNone/>
+            </a:pPr>
             <a:r>
               <a:rPr lang="en-US" sz="2100" dirty="0">
                 <a:solidFill>
-                  <a:srgbClr val="17364A"/>
-                </a:solidFill>
-                <a:latin typeface="Aptos" pitchFamily="34" charset="0"/>
-                <a:ea typeface="Aptos" pitchFamily="34" charset="-122"/>
-                <a:cs typeface="Aptos" pitchFamily="34" charset="-120"/>
-              </a:rPr>
-              <a:t>Predictive analytics may guide supportive outreach, but it should not become a tool for exclusion.</a:t>
+                  <a:srgbClr val="003A63"/>
+                </a:solidFill>
+                <a:latin typeface="Aptos" pitchFamily="34" charset="0"/>
+                <a:ea typeface="Aptos" pitchFamily="34" charset="-122"/>
+                <a:cs typeface="Aptos" pitchFamily="34" charset="-120"/>
+              </a:rPr>
+              <a:t>• Predictive analytics may guide supportive outreach, but it should not become a tool for.</a:t>
             </a:r>
             <a:endParaRPr lang="en-US" sz="2100" dirty="0"/>
           </a:p>
@@ -6240,17 +6321,17 @@
         </p:nvSpPr>
         <p:spPr>
           <a:xfrm>
-            <a:off x="7799832" y="1828800"/>
-            <a:ext cx="3145536" cy="685800"/>
-          </a:xfrm>
-          <a:prstGeom prst="rect">
-            <a:avLst/>
-          </a:prstGeom>
-          <a:noFill/>
-          <a:ln/>
-        </p:spPr>
-        <p:txBody>
-          <a:bodyPr wrap="square" lIns="0" tIns="0" rIns="0" bIns="0" rtlCol="0" anchor="t">
+            <a:off x="7799832" y="1801368"/>
+            <a:ext cx="3145536" cy="758952"/>
+          </a:xfrm>
+          <a:prstGeom prst="rect">
+            <a:avLst/>
+          </a:prstGeom>
+          <a:noFill/>
+          <a:ln/>
+        </p:spPr>
+        <p:txBody>
+          <a:bodyPr wrap="square" lIns="254" tIns="254" rIns="254" bIns="254" rtlCol="0" anchor="t">
             <a:normAutofit/>
           </a:bodyPr>
           <a:lstStyle/>
@@ -6259,7 +6340,7 @@
               <a:buNone/>
             </a:pPr>
             <a:r>
-              <a:rPr lang="en-US" sz="1550" dirty="0">
+              <a:rPr lang="en-US" sz="1320" dirty="0">
                 <a:solidFill>
                   <a:srgbClr val="17364A"/>
                 </a:solidFill>
@@ -6269,7 +6350,7 @@
               </a:rPr>
               <a:t>AI for Social Good applies to every AI method.</a:t>
             </a:r>
-            <a:endParaRPr lang="en-US" sz="1550" dirty="0"/>
+            <a:endParaRPr lang="en-US" sz="1320" dirty="0"/>
           </a:p>
         </p:txBody>
       </p:sp>
@@ -6357,13 +6438,16 @@
           <a:ln/>
         </p:spPr>
         <p:txBody>
-          <a:bodyPr wrap="square" lIns="254" tIns="254" rIns="254" bIns="254" rtlCol="0" anchor="t">
+          <a:bodyPr wrap="square" lIns="508" tIns="508" rIns="508" bIns="508" rtlCol="0" anchor="t">
             <a:normAutofit/>
           </a:bodyPr>
           <a:lstStyle/>
           <a:p>
-            <a:r>
-              <a:rPr lang="en-US" sz="1380" dirty="0">
+            <a:pPr indent="0" marL="0">
+              <a:buNone/>
+            </a:pPr>
+            <a:r>
+              <a:rPr lang="en-US" sz="1220" dirty="0">
                 <a:solidFill>
                   <a:srgbClr val="17364A"/>
                 </a:solidFill>
@@ -6371,13 +6455,16 @@
                 <a:ea typeface="Aptos" pitchFamily="34" charset="-122"/>
                 <a:cs typeface="Aptos" pitchFamily="34" charset="-120"/>
               </a:rPr>
-              <a:t>Generative AI may improve plain-language communication, but it must be accurate,.</a:t>
-            </a:r>
-            <a:endParaRPr lang="en-US" sz="1380" dirty="0"/>
-          </a:p>
-          <a:p>
-            <a:r>
-              <a:rPr lang="en-US" sz="1380" dirty="0">
+              <a:t>Generative AI may improve plain-language communication, but it.</a:t>
+            </a:r>
+            <a:endParaRPr lang="en-US" sz="1220" dirty="0"/>
+          </a:p>
+          <a:p>
+            <a:pPr indent="0" marL="0">
+              <a:buNone/>
+            </a:pPr>
+            <a:r>
+              <a:rPr lang="en-US" sz="1220" dirty="0">
                 <a:solidFill>
                   <a:srgbClr val="17364A"/>
                 </a:solidFill>
@@ -6385,13 +6472,16 @@
                 <a:ea typeface="Aptos" pitchFamily="34" charset="-122"/>
                 <a:cs typeface="Aptos" pitchFamily="34" charset="-120"/>
               </a:rPr>
-              <a:t>RAG systems may improve staff access to guidance, but they must include current and.</a:t>
-            </a:r>
-            <a:endParaRPr lang="en-US" sz="1380" dirty="0"/>
-          </a:p>
-          <a:p>
-            <a:r>
-              <a:rPr lang="en-US" sz="1380" dirty="0">
+              <a:t>RAG systems may improve staff access to guidance, but they must.</a:t>
+            </a:r>
+            <a:endParaRPr lang="en-US" sz="1220" dirty="0"/>
+          </a:p>
+          <a:p>
+            <a:pPr indent="0" marL="0">
+              <a:buNone/>
+            </a:pPr>
+            <a:r>
+              <a:rPr lang="en-US" sz="1220" dirty="0">
                 <a:solidFill>
                   <a:srgbClr val="17364A"/>
                 </a:solidFill>
@@ -6399,9 +6489,9 @@
                 <a:ea typeface="Aptos" pitchFamily="34" charset="-122"/>
                 <a:cs typeface="Aptos" pitchFamily="34" charset="-120"/>
               </a:rPr>
-              <a:t>Agentic workflows may reduce burden, but they require boundaries and human accountability.</a:t>
-            </a:r>
-            <a:endParaRPr lang="en-US" sz="1380" dirty="0"/>
+              <a:t>Agentic workflows may reduce burden, but they require boundaries.</a:t>
+            </a:r>
+            <a:endParaRPr lang="en-US" sz="1220" dirty="0"/>
           </a:p>
         </p:txBody>
       </p:sp>
@@ -6479,17 +6569,17 @@
         </p:nvSpPr>
         <p:spPr>
           <a:xfrm>
-            <a:off x="7799832" y="5001768"/>
-            <a:ext cx="3145536" cy="502920"/>
-          </a:xfrm>
-          <a:prstGeom prst="rect">
-            <a:avLst/>
-          </a:prstGeom>
-          <a:noFill/>
-          <a:ln/>
-        </p:spPr>
-        <p:txBody>
-          <a:bodyPr wrap="square" lIns="0" tIns="0" rIns="0" bIns="0" rtlCol="0" anchor="t">
+            <a:off x="7799832" y="4974336"/>
+            <a:ext cx="3145536" cy="576072"/>
+          </a:xfrm>
+          <a:prstGeom prst="rect">
+            <a:avLst/>
+          </a:prstGeom>
+          <a:noFill/>
+          <a:ln/>
+        </p:spPr>
+        <p:txBody>
+          <a:bodyPr wrap="square" lIns="254" tIns="254" rIns="254" bIns="254" rtlCol="0" anchor="t">
             <a:normAutofit/>
           </a:bodyPr>
           <a:lstStyle/>
@@ -6498,7 +6588,7 @@
               <a:buNone/>
             </a:pPr>
             <a:r>
-              <a:rPr lang="en-US" sz="1550" dirty="0">
+              <a:rPr lang="en-US" sz="1320" dirty="0">
                 <a:solidFill>
                   <a:srgbClr val="17364A"/>
                 </a:solidFill>
@@ -6506,9 +6596,9 @@
                 <a:ea typeface="Aptos" pitchFamily="34" charset="-122"/>
                 <a:cs typeface="Aptos" pitchFamily="34" charset="-120"/>
               </a:rPr>
-              <a:t>Use the concept to clarify workflow changes, dependencies, staffing, procurement requirements, training needs, and implementation checkpoints.</a:t>
-            </a:r>
-            <a:endParaRPr lang="en-US" sz="1550" dirty="0"/>
+              <a:t>Use the concept to clarify workflow changes, dependencies, staffing, procurement requirements, training needs, and.</a:t>
+            </a:r>
+            <a:endParaRPr lang="en-US" sz="1320" dirty="0"/>
           </a:p>
         </p:txBody>
       </p:sp>
@@ -6809,49 +6899,58 @@
           <a:ln/>
         </p:spPr>
         <p:txBody>
-          <a:bodyPr wrap="square" lIns="635" tIns="635" rIns="635" bIns="635" rtlCol="0" anchor="t">
+          <a:bodyPr wrap="square" lIns="1016" tIns="1016" rIns="1016" bIns="1016" rtlCol="0" anchor="t">
             <a:normAutofit/>
           </a:bodyPr>
           <a:lstStyle/>
           <a:p>
+            <a:pPr indent="0" marL="0">
+              <a:buNone/>
+            </a:pPr>
             <a:r>
               <a:rPr lang="en-US" sz="2100" dirty="0">
                 <a:solidFill>
-                  <a:srgbClr val="17364A"/>
-                </a:solidFill>
-                <a:latin typeface="Aptos" pitchFamily="34" charset="0"/>
-                <a:ea typeface="Aptos" pitchFamily="34" charset="-122"/>
-                <a:cs typeface="Aptos" pitchFamily="34" charset="-120"/>
-              </a:rPr>
-              <a:t>What public health problem would this AI use address?</a:t>
+                  <a:srgbClr val="003A63"/>
+                </a:solidFill>
+                <a:latin typeface="Aptos" pitchFamily="34" charset="0"/>
+                <a:ea typeface="Aptos" pitchFamily="34" charset="-122"/>
+                <a:cs typeface="Aptos" pitchFamily="34" charset="-120"/>
+              </a:rPr>
+              <a:t>• What public health problem would this AI use address?</a:t>
             </a:r>
             <a:endParaRPr lang="en-US" sz="2100" dirty="0"/>
           </a:p>
           <a:p>
+            <a:pPr indent="0" marL="0">
+              <a:buNone/>
+            </a:pPr>
             <a:r>
               <a:rPr lang="en-US" sz="2100" dirty="0">
                 <a:solidFill>
-                  <a:srgbClr val="17364A"/>
-                </a:solidFill>
-                <a:latin typeface="Aptos" pitchFamily="34" charset="0"/>
-                <a:ea typeface="Aptos" pitchFamily="34" charset="-122"/>
-                <a:cs typeface="Aptos" pitchFamily="34" charset="-120"/>
-              </a:rPr>
-              <a:t>Who would benefit, and who could be excluded or harmed?</a:t>
+                  <a:srgbClr val="003A63"/>
+                </a:solidFill>
+                <a:latin typeface="Aptos" pitchFamily="34" charset="0"/>
+                <a:ea typeface="Aptos" pitchFamily="34" charset="-122"/>
+                <a:cs typeface="Aptos" pitchFamily="34" charset="-120"/>
+              </a:rPr>
+              <a:t>• Who would benefit, and who could be excluded or harmed?</a:t>
             </a:r>
             <a:endParaRPr lang="en-US" sz="2100" dirty="0"/>
           </a:p>
           <a:p>
+            <a:pPr indent="0" marL="0">
+              <a:buNone/>
+            </a:pPr>
             <a:r>
               <a:rPr lang="en-US" sz="2100" dirty="0">
                 <a:solidFill>
-                  <a:srgbClr val="17364A"/>
-                </a:solidFill>
-                <a:latin typeface="Aptos" pitchFamily="34" charset="0"/>
-                <a:ea typeface="Aptos" pitchFamily="34" charset="-122"/>
-                <a:cs typeface="Aptos" pitchFamily="34" charset="-120"/>
-              </a:rPr>
-              <a:t>How were affected communities involved in defining the need and safeguards?</a:t>
+                  <a:srgbClr val="003A63"/>
+                </a:solidFill>
+                <a:latin typeface="Aptos" pitchFamily="34" charset="0"/>
+                <a:ea typeface="Aptos" pitchFamily="34" charset="-122"/>
+                <a:cs typeface="Aptos" pitchFamily="34" charset="-120"/>
+              </a:rPr>
+              <a:t>• How were affected communities involved in defining the need and safeguards?</a:t>
             </a:r>
             <a:endParaRPr lang="en-US" sz="2100" dirty="0"/>
           </a:p>
@@ -6931,17 +7030,17 @@
         </p:nvSpPr>
         <p:spPr>
           <a:xfrm>
-            <a:off x="7799832" y="1828800"/>
-            <a:ext cx="3145536" cy="685800"/>
-          </a:xfrm>
-          <a:prstGeom prst="rect">
-            <a:avLst/>
-          </a:prstGeom>
-          <a:noFill/>
-          <a:ln/>
-        </p:spPr>
-        <p:txBody>
-          <a:bodyPr wrap="square" lIns="0" tIns="0" rIns="0" bIns="0" rtlCol="0" anchor="t">
+            <a:off x="7799832" y="1801368"/>
+            <a:ext cx="3145536" cy="758952"/>
+          </a:xfrm>
+          <a:prstGeom prst="rect">
+            <a:avLst/>
+          </a:prstGeom>
+          <a:noFill/>
+          <a:ln/>
+        </p:spPr>
+        <p:txBody>
+          <a:bodyPr wrap="square" lIns="254" tIns="254" rIns="254" bIns="254" rtlCol="0" anchor="t">
             <a:normAutofit/>
           </a:bodyPr>
           <a:lstStyle/>
@@ -6950,7 +7049,7 @@
               <a:buNone/>
             </a:pPr>
             <a:r>
-              <a:rPr lang="en-US" sz="1550" dirty="0">
+              <a:rPr lang="en-US" sz="1320" dirty="0">
                 <a:solidFill>
                   <a:srgbClr val="17364A"/>
                 </a:solidFill>
@@ -6960,7 +7059,7 @@
               </a:rPr>
               <a:t>What public health problem would this AI use address?</a:t>
             </a:r>
-            <a:endParaRPr lang="en-US" sz="1550" dirty="0"/>
+            <a:endParaRPr lang="en-US" sz="1320" dirty="0"/>
           </a:p>
         </p:txBody>
       </p:sp>
@@ -7048,13 +7147,16 @@
           <a:ln/>
         </p:spPr>
         <p:txBody>
-          <a:bodyPr wrap="square" lIns="254" tIns="254" rIns="254" bIns="254" rtlCol="0" anchor="t">
+          <a:bodyPr wrap="square" lIns="508" tIns="508" rIns="508" bIns="508" rtlCol="0" anchor="t">
             <a:normAutofit/>
           </a:bodyPr>
           <a:lstStyle/>
           <a:p>
-            <a:r>
-              <a:rPr lang="en-US" sz="1380" dirty="0">
+            <a:pPr indent="0" marL="0">
+              <a:buNone/>
+            </a:pPr>
+            <a:r>
+              <a:rPr lang="en-US" sz="1220" dirty="0">
                 <a:solidFill>
                   <a:srgbClr val="17364A"/>
                 </a:solidFill>
@@ -7064,11 +7166,14 @@
               </a:rPr>
               <a:t>What public health problem would this AI use address?</a:t>
             </a:r>
-            <a:endParaRPr lang="en-US" sz="1380" dirty="0"/>
-          </a:p>
-          <a:p>
-            <a:r>
-              <a:rPr lang="en-US" sz="1380" dirty="0">
+            <a:endParaRPr lang="en-US" sz="1220" dirty="0"/>
+          </a:p>
+          <a:p>
+            <a:pPr indent="0" marL="0">
+              <a:buNone/>
+            </a:pPr>
+            <a:r>
+              <a:rPr lang="en-US" sz="1220" dirty="0">
                 <a:solidFill>
                   <a:srgbClr val="17364A"/>
                 </a:solidFill>
@@ -7078,11 +7183,14 @@
               </a:rPr>
               <a:t>Who would benefit, and who could be excluded or harmed?</a:t>
             </a:r>
-            <a:endParaRPr lang="en-US" sz="1380" dirty="0"/>
-          </a:p>
-          <a:p>
-            <a:r>
-              <a:rPr lang="en-US" sz="1380" dirty="0">
+            <a:endParaRPr lang="en-US" sz="1220" dirty="0"/>
+          </a:p>
+          <a:p>
+            <a:pPr indent="0" marL="0">
+              <a:buNone/>
+            </a:pPr>
+            <a:r>
+              <a:rPr lang="en-US" sz="1220" dirty="0">
                 <a:solidFill>
                   <a:srgbClr val="17364A"/>
                 </a:solidFill>
@@ -7090,9 +7198,9 @@
                 <a:ea typeface="Aptos" pitchFamily="34" charset="-122"/>
                 <a:cs typeface="Aptos" pitchFamily="34" charset="-120"/>
               </a:rPr>
-              <a:t>How were affected communities involved in defining the need and safeguards?</a:t>
-            </a:r>
-            <a:endParaRPr lang="en-US" sz="1380" dirty="0"/>
+              <a:t>How were affected communities involved in defining the need and.</a:t>
+            </a:r>
+            <a:endParaRPr lang="en-US" sz="1220" dirty="0"/>
           </a:p>
         </p:txBody>
       </p:sp>
@@ -7170,17 +7278,17 @@
         </p:nvSpPr>
         <p:spPr>
           <a:xfrm>
-            <a:off x="7799832" y="5001768"/>
-            <a:ext cx="3145536" cy="502920"/>
-          </a:xfrm>
-          <a:prstGeom prst="rect">
-            <a:avLst/>
-          </a:prstGeom>
-          <a:noFill/>
-          <a:ln/>
-        </p:spPr>
-        <p:txBody>
-          <a:bodyPr wrap="square" lIns="0" tIns="0" rIns="0" bIns="0" rtlCol="0" anchor="t">
+            <a:off x="7799832" y="4974336"/>
+            <a:ext cx="3145536" cy="576072"/>
+          </a:xfrm>
+          <a:prstGeom prst="rect">
+            <a:avLst/>
+          </a:prstGeom>
+          <a:noFill/>
+          <a:ln/>
+        </p:spPr>
+        <p:txBody>
+          <a:bodyPr wrap="square" lIns="254" tIns="254" rIns="254" bIns="254" rtlCol="0" anchor="t">
             <a:normAutofit/>
           </a:bodyPr>
           <a:lstStyle/>
@@ -7189,7 +7297,7 @@
               <a:buNone/>
             </a:pPr>
             <a:r>
-              <a:rPr lang="en-US" sz="1550" dirty="0">
+              <a:rPr lang="en-US" sz="1320" dirty="0">
                 <a:solidFill>
                   <a:srgbClr val="17364A"/>
                 </a:solidFill>
@@ -7197,9 +7305,9 @@
                 <a:ea typeface="Aptos" pitchFamily="34" charset="-122"/>
                 <a:cs typeface="Aptos" pitchFamily="34" charset="-120"/>
               </a:rPr>
-              <a:t>Connect the concept to public health purpose, responsible use, required safeguards, documentation, and the next action a department should take.</a:t>
-            </a:r>
-            <a:endParaRPr lang="en-US" sz="1550" dirty="0"/>
+              <a:t>Connect the concept to public health purpose, responsible use, required safeguards, documentation, and the next action a.</a:t>
+            </a:r>
+            <a:endParaRPr lang="en-US" sz="1320" dirty="0"/>
           </a:p>
         </p:txBody>
       </p:sp>
@@ -7500,35 +7608,41 @@
           <a:ln/>
         </p:spPr>
         <p:txBody>
-          <a:bodyPr wrap="square" lIns="635" tIns="635" rIns="635" bIns="635" rtlCol="0" anchor="t">
+          <a:bodyPr wrap="square" lIns="1016" tIns="1016" rIns="1016" bIns="1016" rtlCol="0" anchor="t">
             <a:normAutofit/>
           </a:bodyPr>
           <a:lstStyle/>
           <a:p>
+            <a:pPr indent="0" marL="0">
+              <a:buNone/>
+            </a:pPr>
             <a:r>
               <a:rPr lang="en-US" sz="2100" dirty="0">
                 <a:solidFill>
-                  <a:srgbClr val="17364A"/>
-                </a:solidFill>
-                <a:latin typeface="Aptos" pitchFamily="34" charset="0"/>
-                <a:ea typeface="Aptos" pitchFamily="34" charset="-122"/>
-                <a:cs typeface="Aptos" pitchFamily="34" charset="-120"/>
-              </a:rPr>
-              <a:t>What non-AI alternatives should be considered?</a:t>
+                  <a:srgbClr val="003A63"/>
+                </a:solidFill>
+                <a:latin typeface="Aptos" pitchFamily="34" charset="0"/>
+                <a:ea typeface="Aptos" pitchFamily="34" charset="-122"/>
+                <a:cs typeface="Aptos" pitchFamily="34" charset="-120"/>
+              </a:rPr>
+              <a:t>• What non-AI alternatives should be considered?</a:t>
             </a:r>
             <a:endParaRPr lang="en-US" sz="2100" dirty="0"/>
           </a:p>
           <a:p>
+            <a:pPr indent="0" marL="0">
+              <a:buNone/>
+            </a:pPr>
             <a:r>
               <a:rPr lang="en-US" sz="2100" dirty="0">
                 <a:solidFill>
-                  <a:srgbClr val="17364A"/>
-                </a:solidFill>
-                <a:latin typeface="Aptos" pitchFamily="34" charset="0"/>
-                <a:ea typeface="Aptos" pitchFamily="34" charset="-122"/>
-                <a:cs typeface="Aptos" pitchFamily="34" charset="-120"/>
-              </a:rPr>
-              <a:t>How will the agency measure public value, equity, trust, and unintended consequences?</a:t>
+                  <a:srgbClr val="003A63"/>
+                </a:solidFill>
+                <a:latin typeface="Aptos" pitchFamily="34" charset="0"/>
+                <a:ea typeface="Aptos" pitchFamily="34" charset="-122"/>
+                <a:cs typeface="Aptos" pitchFamily="34" charset="-120"/>
+              </a:rPr>
+              <a:t>• How will the agency measure public value, equity, trust, and unintended consequences?</a:t>
             </a:r>
             <a:endParaRPr lang="en-US" sz="2100" dirty="0"/>
           </a:p>
@@ -7608,17 +7722,17 @@
         </p:nvSpPr>
         <p:spPr>
           <a:xfrm>
-            <a:off x="7799832" y="1828800"/>
-            <a:ext cx="3145536" cy="685800"/>
-          </a:xfrm>
-          <a:prstGeom prst="rect">
-            <a:avLst/>
-          </a:prstGeom>
-          <a:noFill/>
-          <a:ln/>
-        </p:spPr>
-        <p:txBody>
-          <a:bodyPr wrap="square" lIns="0" tIns="0" rIns="0" bIns="0" rtlCol="0" anchor="t">
+            <a:off x="7799832" y="1801368"/>
+            <a:ext cx="3145536" cy="758952"/>
+          </a:xfrm>
+          <a:prstGeom prst="rect">
+            <a:avLst/>
+          </a:prstGeom>
+          <a:noFill/>
+          <a:ln/>
+        </p:spPr>
+        <p:txBody>
+          <a:bodyPr wrap="square" lIns="254" tIns="254" rIns="254" bIns="254" rtlCol="0" anchor="t">
             <a:normAutofit/>
           </a:bodyPr>
           <a:lstStyle/>
@@ -7627,7 +7741,7 @@
               <a:buNone/>
             </a:pPr>
             <a:r>
-              <a:rPr lang="en-US" sz="1550" dirty="0">
+              <a:rPr lang="en-US" sz="1320" dirty="0">
                 <a:solidFill>
                   <a:srgbClr val="17364A"/>
                 </a:solidFill>
@@ -7637,7 +7751,7 @@
               </a:rPr>
               <a:t>What non-AI alternatives should be considered?</a:t>
             </a:r>
-            <a:endParaRPr lang="en-US" sz="1550" dirty="0"/>
+            <a:endParaRPr lang="en-US" sz="1320" dirty="0"/>
           </a:p>
         </p:txBody>
       </p:sp>
@@ -7725,13 +7839,16 @@
           <a:ln/>
         </p:spPr>
         <p:txBody>
-          <a:bodyPr wrap="square" lIns="254" tIns="254" rIns="254" bIns="254" rtlCol="0" anchor="t">
+          <a:bodyPr wrap="square" lIns="508" tIns="508" rIns="508" bIns="508" rtlCol="0" anchor="t">
             <a:normAutofit/>
           </a:bodyPr>
           <a:lstStyle/>
           <a:p>
-            <a:r>
-              <a:rPr lang="en-US" sz="1380" dirty="0">
+            <a:pPr indent="0" marL="0">
+              <a:buNone/>
+            </a:pPr>
+            <a:r>
+              <a:rPr lang="en-US" sz="1220" dirty="0">
                 <a:solidFill>
                   <a:srgbClr val="17364A"/>
                 </a:solidFill>
@@ -7741,11 +7858,14 @@
               </a:rPr>
               <a:t>What non-AI alternatives should be considered?</a:t>
             </a:r>
-            <a:endParaRPr lang="en-US" sz="1380" dirty="0"/>
-          </a:p>
-          <a:p>
-            <a:r>
-              <a:rPr lang="en-US" sz="1380" dirty="0">
+            <a:endParaRPr lang="en-US" sz="1220" dirty="0"/>
+          </a:p>
+          <a:p>
+            <a:pPr indent="0" marL="0">
+              <a:buNone/>
+            </a:pPr>
+            <a:r>
+              <a:rPr lang="en-US" sz="1220" dirty="0">
                 <a:solidFill>
                   <a:srgbClr val="17364A"/>
                 </a:solidFill>
@@ -7753,9 +7873,9 @@
                 <a:ea typeface="Aptos" pitchFamily="34" charset="-122"/>
                 <a:cs typeface="Aptos" pitchFamily="34" charset="-120"/>
               </a:rPr>
-              <a:t>How will the agency measure public value, equity, trust, and unintended consequences?</a:t>
-            </a:r>
-            <a:endParaRPr lang="en-US" sz="1380" dirty="0"/>
+              <a:t>How will the agency measure public value, equity, trust, and.</a:t>
+            </a:r>
+            <a:endParaRPr lang="en-US" sz="1220" dirty="0"/>
           </a:p>
         </p:txBody>
       </p:sp>
@@ -7833,17 +7953,17 @@
         </p:nvSpPr>
         <p:spPr>
           <a:xfrm>
-            <a:off x="7799832" y="5001768"/>
-            <a:ext cx="3145536" cy="502920"/>
-          </a:xfrm>
-          <a:prstGeom prst="rect">
-            <a:avLst/>
-          </a:prstGeom>
-          <a:noFill/>
-          <a:ln/>
-        </p:spPr>
-        <p:txBody>
-          <a:bodyPr wrap="square" lIns="0" tIns="0" rIns="0" bIns="0" rtlCol="0" anchor="t">
+            <a:off x="7799832" y="4974336"/>
+            <a:ext cx="3145536" cy="576072"/>
+          </a:xfrm>
+          <a:prstGeom prst="rect">
+            <a:avLst/>
+          </a:prstGeom>
+          <a:noFill/>
+          <a:ln/>
+        </p:spPr>
+        <p:txBody>
+          <a:bodyPr wrap="square" lIns="254" tIns="254" rIns="254" bIns="254" rtlCol="0" anchor="t">
             <a:normAutofit/>
           </a:bodyPr>
           <a:lstStyle/>
@@ -7852,7 +7972,7 @@
               <a:buNone/>
             </a:pPr>
             <a:r>
-              <a:rPr lang="en-US" sz="1550" dirty="0">
+              <a:rPr lang="en-US" sz="1320" dirty="0">
                 <a:solidFill>
                   <a:srgbClr val="17364A"/>
                 </a:solidFill>
@@ -7860,9 +7980,9 @@
                 <a:ea typeface="Aptos" pitchFamily="34" charset="-122"/>
                 <a:cs typeface="Aptos" pitchFamily="34" charset="-120"/>
               </a:rPr>
-              <a:t>Connect the concept to public health purpose, responsible use, required safeguards, documentation, and the next action a department should take.</a:t>
-            </a:r>
-            <a:endParaRPr lang="en-US" sz="1550" dirty="0"/>
+              <a:t>Connect the concept to public health purpose, responsible use, required safeguards, documentation, and the next action a.</a:t>
+            </a:r>
+            <a:endParaRPr lang="en-US" sz="1320" dirty="0"/>
           </a:p>
         </p:txBody>
       </p:sp>
@@ -8163,49 +8283,58 @@
           <a:ln/>
         </p:spPr>
         <p:txBody>
-          <a:bodyPr wrap="square" lIns="635" tIns="635" rIns="635" bIns="635" rtlCol="0" anchor="t">
+          <a:bodyPr wrap="square" lIns="1016" tIns="1016" rIns="1016" bIns="1016" rtlCol="0" anchor="t">
             <a:normAutofit/>
           </a:bodyPr>
           <a:lstStyle/>
           <a:p>
+            <a:pPr indent="0" marL="0">
+              <a:buNone/>
+            </a:pPr>
             <a:r>
               <a:rPr lang="en-US" sz="2100" dirty="0">
                 <a:solidFill>
-                  <a:srgbClr val="17364A"/>
-                </a:solidFill>
-                <a:latin typeface="Aptos" pitchFamily="34" charset="0"/>
-                <a:ea typeface="Aptos" pitchFamily="34" charset="-122"/>
-                <a:cs typeface="Aptos" pitchFamily="34" charset="-120"/>
-              </a:rPr>
-              <a:t>Create an AI for Social Good review brief for one public health use case.</a:t>
+                  <a:srgbClr val="003A63"/>
+                </a:solidFill>
+                <a:latin typeface="Aptos" pitchFamily="34" charset="0"/>
+                <a:ea typeface="Aptos" pitchFamily="34" charset="-122"/>
+                <a:cs typeface="Aptos" pitchFamily="34" charset="-120"/>
+              </a:rPr>
+              <a:t>• Create an AI for Social Good review brief for one public health use case.</a:t>
             </a:r>
             <a:endParaRPr lang="en-US" sz="2100" dirty="0"/>
           </a:p>
           <a:p>
+            <a:pPr indent="0" marL="0">
+              <a:buNone/>
+            </a:pPr>
             <a:r>
               <a:rPr lang="en-US" sz="2100" dirty="0">
                 <a:solidFill>
-                  <a:srgbClr val="17364A"/>
-                </a:solidFill>
-                <a:latin typeface="Aptos" pitchFamily="34" charset="0"/>
-                <a:ea typeface="Aptos" pitchFamily="34" charset="-122"/>
-                <a:cs typeface="Aptos" pitchFamily="34" charset="-120"/>
-              </a:rPr>
-              <a:t>The brief should define the public health problem, intended public benefit, affected communities,.</a:t>
+                  <a:srgbClr val="003A63"/>
+                </a:solidFill>
+                <a:latin typeface="Aptos" pitchFamily="34" charset="0"/>
+                <a:ea typeface="Aptos" pitchFamily="34" charset="-122"/>
+                <a:cs typeface="Aptos" pitchFamily="34" charset="-120"/>
+              </a:rPr>
+              <a:t>• The brief should define the public health problem, intended public benefit, affected.</a:t>
             </a:r>
             <a:endParaRPr lang="en-US" sz="2100" dirty="0"/>
           </a:p>
           <a:p>
+            <a:pPr indent="0" marL="0">
+              <a:buNone/>
+            </a:pPr>
             <a:r>
               <a:rPr lang="en-US" sz="2100" dirty="0">
                 <a:solidFill>
-                  <a:srgbClr val="17364A"/>
-                </a:solidFill>
-                <a:latin typeface="Aptos" pitchFamily="34" charset="0"/>
-                <a:ea typeface="Aptos" pitchFamily="34" charset="-122"/>
-                <a:cs typeface="Aptos" pitchFamily="34" charset="-120"/>
-              </a:rPr>
-              <a:t>The exercise should result in a decision-support document that helps leaders and governance reviewers.</a:t>
+                  <a:srgbClr val="003A63"/>
+                </a:solidFill>
+                <a:latin typeface="Aptos" pitchFamily="34" charset="0"/>
+                <a:ea typeface="Aptos" pitchFamily="34" charset="-122"/>
+                <a:cs typeface="Aptos" pitchFamily="34" charset="-120"/>
+              </a:rPr>
+              <a:t>• The exercise should result in a decision-support document that helps leaders and governance.</a:t>
             </a:r>
             <a:endParaRPr lang="en-US" sz="2100" dirty="0"/>
           </a:p>
@@ -8285,17 +8414,17 @@
         </p:nvSpPr>
         <p:spPr>
           <a:xfrm>
-            <a:off x="7799832" y="1828800"/>
-            <a:ext cx="3145536" cy="685800"/>
-          </a:xfrm>
-          <a:prstGeom prst="rect">
-            <a:avLst/>
-          </a:prstGeom>
-          <a:noFill/>
-          <a:ln/>
-        </p:spPr>
-        <p:txBody>
-          <a:bodyPr wrap="square" lIns="0" tIns="0" rIns="0" bIns="0" rtlCol="0" anchor="t">
+            <a:off x="7799832" y="1801368"/>
+            <a:ext cx="3145536" cy="758952"/>
+          </a:xfrm>
+          <a:prstGeom prst="rect">
+            <a:avLst/>
+          </a:prstGeom>
+          <a:noFill/>
+          <a:ln/>
+        </p:spPr>
+        <p:txBody>
+          <a:bodyPr wrap="square" lIns="254" tIns="254" rIns="254" bIns="254" rtlCol="0" anchor="t">
             <a:normAutofit/>
           </a:bodyPr>
           <a:lstStyle/>
@@ -8304,7 +8433,7 @@
               <a:buNone/>
             </a:pPr>
             <a:r>
-              <a:rPr lang="en-US" sz="1550" dirty="0">
+              <a:rPr lang="en-US" sz="1320" dirty="0">
                 <a:solidFill>
                   <a:srgbClr val="17364A"/>
                 </a:solidFill>
@@ -8314,7 +8443,7 @@
               </a:rPr>
               <a:t>Create an AI for Social Good review brief for one public health use case.</a:t>
             </a:r>
-            <a:endParaRPr lang="en-US" sz="1550" dirty="0"/>
+            <a:endParaRPr lang="en-US" sz="1320" dirty="0"/>
           </a:p>
         </p:txBody>
       </p:sp>
@@ -8402,13 +8531,16 @@
           <a:ln/>
         </p:spPr>
         <p:txBody>
-          <a:bodyPr wrap="square" lIns="254" tIns="254" rIns="254" bIns="254" rtlCol="0" anchor="t">
+          <a:bodyPr wrap="square" lIns="508" tIns="508" rIns="508" bIns="508" rtlCol="0" anchor="t">
             <a:normAutofit/>
           </a:bodyPr>
           <a:lstStyle/>
           <a:p>
-            <a:r>
-              <a:rPr lang="en-US" sz="1380" dirty="0">
+            <a:pPr indent="0" marL="0">
+              <a:buNone/>
+            </a:pPr>
+            <a:r>
+              <a:rPr lang="en-US" sz="1220" dirty="0">
                 <a:solidFill>
                   <a:srgbClr val="17364A"/>
                 </a:solidFill>
@@ -8416,13 +8548,16 @@
                 <a:ea typeface="Aptos" pitchFamily="34" charset="-122"/>
                 <a:cs typeface="Aptos" pitchFamily="34" charset="-120"/>
               </a:rPr>
-              <a:t>The brief should define the public health problem, intended public benefit, affected.</a:t>
-            </a:r>
-            <a:endParaRPr lang="en-US" sz="1380" dirty="0"/>
-          </a:p>
-          <a:p>
-            <a:r>
-              <a:rPr lang="en-US" sz="1380" dirty="0">
+              <a:t>The brief should define the public health problem, intended public.</a:t>
+            </a:r>
+            <a:endParaRPr lang="en-US" sz="1220" dirty="0"/>
+          </a:p>
+          <a:p>
+            <a:pPr indent="0" marL="0">
+              <a:buNone/>
+            </a:pPr>
+            <a:r>
+              <a:rPr lang="en-US" sz="1220" dirty="0">
                 <a:solidFill>
                   <a:srgbClr val="17364A"/>
                 </a:solidFill>
@@ -8430,9 +8565,9 @@
                 <a:ea typeface="Aptos" pitchFamily="34" charset="-122"/>
                 <a:cs typeface="Aptos" pitchFamily="34" charset="-120"/>
               </a:rPr>
-              <a:t>The exercise should result in a decision-support document that helps leaders and.</a:t>
-            </a:r>
-            <a:endParaRPr lang="en-US" sz="1380" dirty="0"/>
+              <a:t>The exercise should result in a decision-support document that.</a:t>
+            </a:r>
+            <a:endParaRPr lang="en-US" sz="1220" dirty="0"/>
           </a:p>
         </p:txBody>
       </p:sp>
@@ -8510,17 +8645,17 @@
         </p:nvSpPr>
         <p:spPr>
           <a:xfrm>
-            <a:off x="7799832" y="5001768"/>
-            <a:ext cx="3145536" cy="502920"/>
-          </a:xfrm>
-          <a:prstGeom prst="rect">
-            <a:avLst/>
-          </a:prstGeom>
-          <a:noFill/>
-          <a:ln/>
-        </p:spPr>
-        <p:txBody>
-          <a:bodyPr wrap="square" lIns="0" tIns="0" rIns="0" bIns="0" rtlCol="0" anchor="t">
+            <a:off x="7799832" y="4974336"/>
+            <a:ext cx="3145536" cy="576072"/>
+          </a:xfrm>
+          <a:prstGeom prst="rect">
+            <a:avLst/>
+          </a:prstGeom>
+          <a:noFill/>
+          <a:ln/>
+        </p:spPr>
+        <p:txBody>
+          <a:bodyPr wrap="square" lIns="254" tIns="254" rIns="254" bIns="254" rtlCol="0" anchor="t">
             <a:normAutofit/>
           </a:bodyPr>
           <a:lstStyle/>
@@ -8529,7 +8664,7 @@
               <a:buNone/>
             </a:pPr>
             <a:r>
-              <a:rPr lang="en-US" sz="1550" dirty="0">
+              <a:rPr lang="en-US" sz="1320" dirty="0">
                 <a:solidFill>
                   <a:srgbClr val="17364A"/>
                 </a:solidFill>
@@ -8537,9 +8672,9 @@
                 <a:ea typeface="Aptos" pitchFamily="34" charset="-122"/>
                 <a:cs typeface="Aptos" pitchFamily="34" charset="-120"/>
               </a:rPr>
-              <a:t>Use the assignment to test whether you can explain the concept, apply it to a realistic public health situation, and identify what would need review before the work moves forward.</a:t>
-            </a:r>
-            <a:endParaRPr lang="en-US" sz="1550" dirty="0"/>
+              <a:t>Use the assignment to test whether you can explain the concept, apply it to a realistic public health situation, and.</a:t>
+            </a:r>
+            <a:endParaRPr lang="en-US" sz="1320" dirty="0"/>
           </a:p>
         </p:txBody>
       </p:sp>
@@ -8840,49 +8975,58 @@
           <a:ln/>
         </p:spPr>
         <p:txBody>
-          <a:bodyPr wrap="square" lIns="635" tIns="635" rIns="635" bIns="635" rtlCol="0" anchor="t">
+          <a:bodyPr wrap="square" lIns="1016" tIns="1016" rIns="1016" bIns="1016" rtlCol="0" anchor="t">
             <a:normAutofit/>
           </a:bodyPr>
           <a:lstStyle/>
           <a:p>
+            <a:pPr indent="0" marL="0">
+              <a:buNone/>
+            </a:pPr>
             <a:r>
               <a:rPr lang="en-US" sz="2100" dirty="0">
                 <a:solidFill>
-                  <a:srgbClr val="17364A"/>
-                </a:solidFill>
-                <a:latin typeface="Aptos" pitchFamily="34" charset="0"/>
-                <a:ea typeface="Aptos" pitchFamily="34" charset="-122"/>
-                <a:cs typeface="Aptos" pitchFamily="34" charset="-120"/>
-              </a:rPr>
-              <a:t>AI for Social Good review brief</a:t>
+                  <a:srgbClr val="003A63"/>
+                </a:solidFill>
+                <a:latin typeface="Aptos" pitchFamily="34" charset="0"/>
+                <a:ea typeface="Aptos" pitchFamily="34" charset="-122"/>
+                <a:cs typeface="Aptos" pitchFamily="34" charset="-120"/>
+              </a:rPr>
+              <a:t>• AI for Social Good review brief</a:t>
             </a:r>
             <a:endParaRPr lang="en-US" sz="2100" dirty="0"/>
           </a:p>
           <a:p>
+            <a:pPr indent="0" marL="0">
+              <a:buNone/>
+            </a:pPr>
             <a:r>
               <a:rPr lang="en-US" sz="2100" dirty="0">
                 <a:solidFill>
-                  <a:srgbClr val="17364A"/>
-                </a:solidFill>
-                <a:latin typeface="Aptos" pitchFamily="34" charset="0"/>
-                <a:ea typeface="Aptos" pitchFamily="34" charset="-122"/>
-                <a:cs typeface="Aptos" pitchFamily="34" charset="-120"/>
-              </a:rPr>
-              <a:t>Public value and equity assessment</a:t>
+                  <a:srgbClr val="003A63"/>
+                </a:solidFill>
+                <a:latin typeface="Aptos" pitchFamily="34" charset="0"/>
+                <a:ea typeface="Aptos" pitchFamily="34" charset="-122"/>
+                <a:cs typeface="Aptos" pitchFamily="34" charset="-120"/>
+              </a:rPr>
+              <a:t>• Public value and equity assessment</a:t>
             </a:r>
             <a:endParaRPr lang="en-US" sz="2100" dirty="0"/>
           </a:p>
           <a:p>
+            <a:pPr indent="0" marL="0">
+              <a:buNone/>
+            </a:pPr>
             <a:r>
               <a:rPr lang="en-US" sz="2100" dirty="0">
                 <a:solidFill>
-                  <a:srgbClr val="17364A"/>
-                </a:solidFill>
-                <a:latin typeface="Aptos" pitchFamily="34" charset="0"/>
-                <a:ea typeface="Aptos" pitchFamily="34" charset="-122"/>
-                <a:cs typeface="Aptos" pitchFamily="34" charset="-120"/>
-              </a:rPr>
-              <a:t>Community engagement and accessibility plan</a:t>
+                  <a:srgbClr val="003A63"/>
+                </a:solidFill>
+                <a:latin typeface="Aptos" pitchFamily="34" charset="0"/>
+                <a:ea typeface="Aptos" pitchFamily="34" charset="-122"/>
+                <a:cs typeface="Aptos" pitchFamily="34" charset="-120"/>
+              </a:rPr>
+              <a:t>• Community engagement and accessibility plan</a:t>
             </a:r>
             <a:endParaRPr lang="en-US" sz="2100" dirty="0"/>
           </a:p>
@@ -8962,17 +9106,17 @@
         </p:nvSpPr>
         <p:spPr>
           <a:xfrm>
-            <a:off x="7799832" y="1828800"/>
-            <a:ext cx="3145536" cy="685800"/>
-          </a:xfrm>
-          <a:prstGeom prst="rect">
-            <a:avLst/>
-          </a:prstGeom>
-          <a:noFill/>
-          <a:ln/>
-        </p:spPr>
-        <p:txBody>
-          <a:bodyPr wrap="square" lIns="0" tIns="0" rIns="0" bIns="0" rtlCol="0" anchor="t">
+            <a:off x="7799832" y="1801368"/>
+            <a:ext cx="3145536" cy="758952"/>
+          </a:xfrm>
+          <a:prstGeom prst="rect">
+            <a:avLst/>
+          </a:prstGeom>
+          <a:noFill/>
+          <a:ln/>
+        </p:spPr>
+        <p:txBody>
+          <a:bodyPr wrap="square" lIns="254" tIns="254" rIns="254" bIns="254" rtlCol="0" anchor="t">
             <a:normAutofit/>
           </a:bodyPr>
           <a:lstStyle/>
@@ -8981,7 +9125,7 @@
               <a:buNone/>
             </a:pPr>
             <a:r>
-              <a:rPr lang="en-US" sz="1550" dirty="0">
+              <a:rPr lang="en-US" sz="1320" dirty="0">
                 <a:solidFill>
                   <a:srgbClr val="17364A"/>
                 </a:solidFill>
@@ -8991,7 +9135,7 @@
               </a:rPr>
               <a:t>AI for Social Good review brief</a:t>
             </a:r>
-            <a:endParaRPr lang="en-US" sz="1550" dirty="0"/>
+            <a:endParaRPr lang="en-US" sz="1320" dirty="0"/>
           </a:p>
         </p:txBody>
       </p:sp>
@@ -9079,13 +9223,16 @@
           <a:ln/>
         </p:spPr>
         <p:txBody>
-          <a:bodyPr wrap="square" lIns="254" tIns="254" rIns="254" bIns="254" rtlCol="0" anchor="t">
+          <a:bodyPr wrap="square" lIns="508" tIns="508" rIns="508" bIns="508" rtlCol="0" anchor="t">
             <a:normAutofit/>
           </a:bodyPr>
           <a:lstStyle/>
           <a:p>
-            <a:r>
-              <a:rPr lang="en-US" sz="1380" dirty="0">
+            <a:pPr indent="0" marL="0">
+              <a:buNone/>
+            </a:pPr>
+            <a:r>
+              <a:rPr lang="en-US" sz="1220" dirty="0">
                 <a:solidFill>
                   <a:srgbClr val="17364A"/>
                 </a:solidFill>
@@ -9095,11 +9242,14 @@
               </a:rPr>
               <a:t>AI for Social Good review brief</a:t>
             </a:r>
-            <a:endParaRPr lang="en-US" sz="1380" dirty="0"/>
-          </a:p>
-          <a:p>
-            <a:r>
-              <a:rPr lang="en-US" sz="1380" dirty="0">
+            <a:endParaRPr lang="en-US" sz="1220" dirty="0"/>
+          </a:p>
+          <a:p>
+            <a:pPr indent="0" marL="0">
+              <a:buNone/>
+            </a:pPr>
+            <a:r>
+              <a:rPr lang="en-US" sz="1220" dirty="0">
                 <a:solidFill>
                   <a:srgbClr val="17364A"/>
                 </a:solidFill>
@@ -9109,11 +9259,14 @@
               </a:rPr>
               <a:t>Public value and equity assessment</a:t>
             </a:r>
-            <a:endParaRPr lang="en-US" sz="1380" dirty="0"/>
-          </a:p>
-          <a:p>
-            <a:r>
-              <a:rPr lang="en-US" sz="1380" dirty="0">
+            <a:endParaRPr lang="en-US" sz="1220" dirty="0"/>
+          </a:p>
+          <a:p>
+            <a:pPr indent="0" marL="0">
+              <a:buNone/>
+            </a:pPr>
+            <a:r>
+              <a:rPr lang="en-US" sz="1220" dirty="0">
                 <a:solidFill>
                   <a:srgbClr val="17364A"/>
                 </a:solidFill>
@@ -9123,7 +9276,7 @@
               </a:rPr>
               <a:t>Community engagement and accessibility plan</a:t>
             </a:r>
-            <a:endParaRPr lang="en-US" sz="1380" dirty="0"/>
+            <a:endParaRPr lang="en-US" sz="1220" dirty="0"/>
           </a:p>
         </p:txBody>
       </p:sp>
@@ -9201,17 +9354,17 @@
         </p:nvSpPr>
         <p:spPr>
           <a:xfrm>
-            <a:off x="7799832" y="5001768"/>
-            <a:ext cx="3145536" cy="502920"/>
-          </a:xfrm>
-          <a:prstGeom prst="rect">
-            <a:avLst/>
-          </a:prstGeom>
-          <a:noFill/>
-          <a:ln/>
-        </p:spPr>
-        <p:txBody>
-          <a:bodyPr wrap="square" lIns="0" tIns="0" rIns="0" bIns="0" rtlCol="0" anchor="t">
+            <a:off x="7799832" y="4974336"/>
+            <a:ext cx="3145536" cy="576072"/>
+          </a:xfrm>
+          <a:prstGeom prst="rect">
+            <a:avLst/>
+          </a:prstGeom>
+          <a:noFill/>
+          <a:ln/>
+        </p:spPr>
+        <p:txBody>
+          <a:bodyPr wrap="square" lIns="254" tIns="254" rIns="254" bIns="254" rtlCol="0" anchor="t">
             <a:normAutofit/>
           </a:bodyPr>
           <a:lstStyle/>
@@ -9220,7 +9373,7 @@
               <a:buNone/>
             </a:pPr>
             <a:r>
-              <a:rPr lang="en-US" sz="1550" dirty="0">
+              <a:rPr lang="en-US" sz="1320" dirty="0">
                 <a:solidFill>
                   <a:srgbClr val="17364A"/>
                 </a:solidFill>
@@ -9228,9 +9381,9 @@
                 <a:ea typeface="Aptos" pitchFamily="34" charset="-122"/>
                 <a:cs typeface="Aptos" pitchFamily="34" charset="-120"/>
               </a:rPr>
-              <a:t>Connect the concept to public health purpose, responsible use, required safeguards, documentation, and the next action a department should take.</a:t>
-            </a:r>
-            <a:endParaRPr lang="en-US" sz="1550" dirty="0"/>
+              <a:t>Connect the concept to public health purpose, responsible use, required safeguards, documentation, and the next action a.</a:t>
+            </a:r>
+            <a:endParaRPr lang="en-US" sz="1320" dirty="0"/>
           </a:p>
         </p:txBody>
       </p:sp>
@@ -9531,21 +9684,24 @@
           <a:ln/>
         </p:spPr>
         <p:txBody>
-          <a:bodyPr wrap="square" lIns="635" tIns="635" rIns="635" bIns="635" rtlCol="0" anchor="t">
+          <a:bodyPr wrap="square" lIns="1016" tIns="1016" rIns="1016" bIns="1016" rtlCol="0" anchor="t">
             <a:normAutofit/>
           </a:bodyPr>
           <a:lstStyle/>
           <a:p>
+            <a:pPr indent="0" marL="0">
+              <a:buNone/>
+            </a:pPr>
             <a:r>
               <a:rPr lang="en-US" sz="2100" dirty="0">
                 <a:solidFill>
-                  <a:srgbClr val="17364A"/>
-                </a:solidFill>
-                <a:latin typeface="Aptos" pitchFamily="34" charset="0"/>
-                <a:ea typeface="Aptos" pitchFamily="34" charset="-122"/>
-                <a:cs typeface="Aptos" pitchFamily="34" charset="-120"/>
-              </a:rPr>
-              <a:t>Impact and unintended-consequence measurement plan</a:t>
+                  <a:srgbClr val="003A63"/>
+                </a:solidFill>
+                <a:latin typeface="Aptos" pitchFamily="34" charset="0"/>
+                <a:ea typeface="Aptos" pitchFamily="34" charset="-122"/>
+                <a:cs typeface="Aptos" pitchFamily="34" charset="-120"/>
+              </a:rPr>
+              <a:t>• Impact and unintended-consequence measurement plan</a:t>
             </a:r>
             <a:endParaRPr lang="en-US" sz="2100" dirty="0"/>
           </a:p>
@@ -9625,17 +9781,17 @@
         </p:nvSpPr>
         <p:spPr>
           <a:xfrm>
-            <a:off x="7799832" y="1828800"/>
-            <a:ext cx="3145536" cy="685800"/>
-          </a:xfrm>
-          <a:prstGeom prst="rect">
-            <a:avLst/>
-          </a:prstGeom>
-          <a:noFill/>
-          <a:ln/>
-        </p:spPr>
-        <p:txBody>
-          <a:bodyPr wrap="square" lIns="0" tIns="0" rIns="0" bIns="0" rtlCol="0" anchor="t">
+            <a:off x="7799832" y="1801368"/>
+            <a:ext cx="3145536" cy="758952"/>
+          </a:xfrm>
+          <a:prstGeom prst="rect">
+            <a:avLst/>
+          </a:prstGeom>
+          <a:noFill/>
+          <a:ln/>
+        </p:spPr>
+        <p:txBody>
+          <a:bodyPr wrap="square" lIns="254" tIns="254" rIns="254" bIns="254" rtlCol="0" anchor="t">
             <a:normAutofit/>
           </a:bodyPr>
           <a:lstStyle/>
@@ -9644,7 +9800,7 @@
               <a:buNone/>
             </a:pPr>
             <a:r>
-              <a:rPr lang="en-US" sz="1550" dirty="0">
+              <a:rPr lang="en-US" sz="1320" dirty="0">
                 <a:solidFill>
                   <a:srgbClr val="17364A"/>
                 </a:solidFill>
@@ -9654,7 +9810,7 @@
               </a:rPr>
               <a:t>Impact and unintended-consequence measurement plan</a:t>
             </a:r>
-            <a:endParaRPr lang="en-US" sz="1550" dirty="0"/>
+            <a:endParaRPr lang="en-US" sz="1320" dirty="0"/>
           </a:p>
         </p:txBody>
       </p:sp>
@@ -9742,13 +9898,16 @@
           <a:ln/>
         </p:spPr>
         <p:txBody>
-          <a:bodyPr wrap="square" lIns="254" tIns="254" rIns="254" bIns="254" rtlCol="0" anchor="t">
+          <a:bodyPr wrap="square" lIns="508" tIns="508" rIns="508" bIns="508" rtlCol="0" anchor="t">
             <a:normAutofit/>
           </a:bodyPr>
           <a:lstStyle/>
           <a:p>
-            <a:r>
-              <a:rPr lang="en-US" sz="1380" dirty="0">
+            <a:pPr indent="0" marL="0">
+              <a:buNone/>
+            </a:pPr>
+            <a:r>
+              <a:rPr lang="en-US" sz="1220" dirty="0">
                 <a:solidFill>
                   <a:srgbClr val="17364A"/>
                 </a:solidFill>
@@ -9758,7 +9917,7 @@
               </a:rPr>
               <a:t>Impact and unintended-consequence measurement plan</a:t>
             </a:r>
-            <a:endParaRPr lang="en-US" sz="1380" dirty="0"/>
+            <a:endParaRPr lang="en-US" sz="1220" dirty="0"/>
           </a:p>
         </p:txBody>
       </p:sp>
@@ -9836,17 +9995,17 @@
         </p:nvSpPr>
         <p:spPr>
           <a:xfrm>
-            <a:off x="7799832" y="5001768"/>
-            <a:ext cx="3145536" cy="502920"/>
-          </a:xfrm>
-          <a:prstGeom prst="rect">
-            <a:avLst/>
-          </a:prstGeom>
-          <a:noFill/>
-          <a:ln/>
-        </p:spPr>
-        <p:txBody>
-          <a:bodyPr wrap="square" lIns="0" tIns="0" rIns="0" bIns="0" rtlCol="0" anchor="t">
+            <a:off x="7799832" y="4974336"/>
+            <a:ext cx="3145536" cy="576072"/>
+          </a:xfrm>
+          <a:prstGeom prst="rect">
+            <a:avLst/>
+          </a:prstGeom>
+          <a:noFill/>
+          <a:ln/>
+        </p:spPr>
+        <p:txBody>
+          <a:bodyPr wrap="square" lIns="254" tIns="254" rIns="254" bIns="254" rtlCol="0" anchor="t">
             <a:normAutofit/>
           </a:bodyPr>
           <a:lstStyle/>
@@ -9855,7 +10014,7 @@
               <a:buNone/>
             </a:pPr>
             <a:r>
-              <a:rPr lang="en-US" sz="1550" dirty="0">
+              <a:rPr lang="en-US" sz="1320" dirty="0">
                 <a:solidFill>
                   <a:srgbClr val="17364A"/>
                 </a:solidFill>
@@ -9863,9 +10022,9 @@
                 <a:ea typeface="Aptos" pitchFamily="34" charset="-122"/>
                 <a:cs typeface="Aptos" pitchFamily="34" charset="-120"/>
               </a:rPr>
-              <a:t>Connect the concept to public health purpose, responsible use, required safeguards, documentation, and the next action a department should take.</a:t>
-            </a:r>
-            <a:endParaRPr lang="en-US" sz="1550" dirty="0"/>
+              <a:t>Connect the concept to public health purpose, responsible use, required safeguards, documentation, and the next action a.</a:t>
+            </a:r>
+            <a:endParaRPr lang="en-US" sz="1320" dirty="0"/>
           </a:p>
         </p:txBody>
       </p:sp>
@@ -10166,49 +10325,58 @@
           <a:ln/>
         </p:spPr>
         <p:txBody>
-          <a:bodyPr wrap="square" lIns="635" tIns="635" rIns="635" bIns="635" rtlCol="0" anchor="t">
+          <a:bodyPr wrap="square" lIns="1016" tIns="1016" rIns="1016" bIns="1016" rtlCol="0" anchor="t">
             <a:normAutofit/>
           </a:bodyPr>
           <a:lstStyle/>
           <a:p>
+            <a:pPr indent="0" marL="0">
+              <a:buNone/>
+            </a:pPr>
             <a:r>
               <a:rPr lang="en-US" sz="2100" dirty="0">
                 <a:solidFill>
-                  <a:srgbClr val="17364A"/>
-                </a:solidFill>
-                <a:latin typeface="Aptos" pitchFamily="34" charset="0"/>
-                <a:ea typeface="Aptos" pitchFamily="34" charset="-122"/>
-                <a:cs typeface="Aptos" pitchFamily="34" charset="-120"/>
-              </a:rPr>
-              <a:t>AI for Social Good refers to the intentional use of artificial intelligence to improve public well-being, reduce.</a:t>
+                  <a:srgbClr val="003A63"/>
+                </a:solidFill>
+                <a:latin typeface="Aptos" pitchFamily="34" charset="0"/>
+                <a:ea typeface="Aptos" pitchFamily="34" charset="-122"/>
+                <a:cs typeface="Aptos" pitchFamily="34" charset="-120"/>
+              </a:rPr>
+              <a:t>• AI for Social Good refers to the intentional use of artificial intelligence to improve public.</a:t>
             </a:r>
             <a:endParaRPr lang="en-US" sz="2100" dirty="0"/>
           </a:p>
           <a:p>
+            <a:pPr indent="0" marL="0">
+              <a:buNone/>
+            </a:pPr>
             <a:r>
               <a:rPr lang="en-US" sz="2100" dirty="0">
                 <a:solidFill>
-                  <a:srgbClr val="17364A"/>
-                </a:solidFill>
-                <a:latin typeface="Aptos" pitchFamily="34" charset="0"/>
-                <a:ea typeface="Aptos" pitchFamily="34" charset="-122"/>
-                <a:cs typeface="Aptos" pitchFamily="34" charset="-120"/>
-              </a:rPr>
-              <a:t>For public health, this concept is not abstract.</a:t>
+                  <a:srgbClr val="003A63"/>
+                </a:solidFill>
+                <a:latin typeface="Aptos" pitchFamily="34" charset="0"/>
+                <a:ea typeface="Aptos" pitchFamily="34" charset="-122"/>
+                <a:cs typeface="Aptos" pitchFamily="34" charset="-120"/>
+              </a:rPr>
+              <a:t>• For public health, this concept is not abstract.</a:t>
             </a:r>
             <a:endParaRPr lang="en-US" sz="2100" dirty="0"/>
           </a:p>
           <a:p>
+            <a:pPr indent="0" marL="0">
+              <a:buNone/>
+            </a:pPr>
             <a:r>
               <a:rPr lang="en-US" sz="2100" dirty="0">
                 <a:solidFill>
-                  <a:srgbClr val="17364A"/>
-                </a:solidFill>
-                <a:latin typeface="Aptos" pitchFamily="34" charset="0"/>
-                <a:ea typeface="Aptos" pitchFamily="34" charset="-122"/>
-                <a:cs typeface="Aptos" pitchFamily="34" charset="-120"/>
-              </a:rPr>
-              <a:t>Public health agencies already work to prevent disease, protect communities, improve access, and reduce inequities.</a:t>
+                  <a:srgbClr val="003A63"/>
+                </a:solidFill>
+                <a:latin typeface="Aptos" pitchFamily="34" charset="0"/>
+                <a:ea typeface="Aptos" pitchFamily="34" charset="-122"/>
+                <a:cs typeface="Aptos" pitchFamily="34" charset="-120"/>
+              </a:rPr>
+              <a:t>• Public health agencies already work to prevent disease, protect communities, improve access,.</a:t>
             </a:r>
             <a:endParaRPr lang="en-US" sz="2100" dirty="0"/>
           </a:p>
@@ -10288,17 +10456,17 @@
         </p:nvSpPr>
         <p:spPr>
           <a:xfrm>
-            <a:off x="8074152" y="1920240"/>
-            <a:ext cx="2825496" cy="1280160"/>
-          </a:xfrm>
-          <a:prstGeom prst="rect">
-            <a:avLst/>
-          </a:prstGeom>
-          <a:noFill/>
-          <a:ln/>
-        </p:spPr>
-        <p:txBody>
-          <a:bodyPr wrap="square" lIns="0" tIns="0" rIns="0" bIns="0" rtlCol="0" anchor="t">
+            <a:off x="8074152" y="1892808"/>
+            <a:ext cx="2825496" cy="1353312"/>
+          </a:xfrm>
+          <a:prstGeom prst="rect">
+            <a:avLst/>
+          </a:prstGeom>
+          <a:noFill/>
+          <a:ln/>
+        </p:spPr>
+        <p:txBody>
+          <a:bodyPr wrap="square" lIns="254" tIns="254" rIns="254" bIns="254" rtlCol="0" anchor="t">
             <a:normAutofit/>
           </a:bodyPr>
           <a:lstStyle/>
@@ -10307,7 +10475,7 @@
               <a:buNone/>
             </a:pPr>
             <a:r>
-              <a:rPr lang="en-US" sz="1550" dirty="0">
+              <a:rPr lang="en-US" sz="1320" dirty="0">
                 <a:solidFill>
                   <a:srgbClr val="17364A"/>
                 </a:solidFill>
@@ -10315,43 +10483,9 @@
                 <a:ea typeface="Aptos" pitchFamily="34" charset="-122"/>
                 <a:cs typeface="Aptos" pitchFamily="34" charset="-120"/>
               </a:rPr>
-              <a:t>Level: introductory</a:t>
-            </a:r>
-            <a:endParaRPr lang="en-US" sz="1550" dirty="0"/>
-          </a:p>
-          <a:p>
-            <a:pPr indent="0" marL="0">
-              <a:buNone/>
-            </a:pPr>
-            <a:r>
-              <a:rPr lang="en-US" sz="1550" dirty="0">
-                <a:solidFill>
-                  <a:srgbClr val="17364A"/>
-                </a:solidFill>
-                <a:latin typeface="Aptos" pitchFamily="34" charset="0"/>
-                <a:ea typeface="Aptos" pitchFamily="34" charset="-122"/>
-                <a:cs typeface="Aptos" pitchFamily="34" charset="-120"/>
-              </a:rPr>
-              <a:t>Primary track: Shared Foundational / Introductory Course</a:t>
-            </a:r>
-            <a:endParaRPr lang="en-US" sz="1550" dirty="0"/>
-          </a:p>
-          <a:p>
-            <a:pPr indent="0" marL="0">
-              <a:buNone/>
-            </a:pPr>
-            <a:r>
-              <a:rPr lang="en-US" sz="1550" dirty="0">
-                <a:solidFill>
-                  <a:srgbClr val="17364A"/>
-                </a:solidFill>
-                <a:latin typeface="Aptos" pitchFamily="34" charset="0"/>
-                <a:ea typeface="Aptos" pitchFamily="34" charset="-122"/>
-                <a:cs typeface="Aptos" pitchFamily="34" charset="-120"/>
-              </a:rPr>
-              <a:t>Appears in tracks: shared-foundational, policy, communications</a:t>
-            </a:r>
-            <a:endParaRPr lang="en-US" sz="1550" dirty="0"/>
+              <a:t>Level: introductory Primary track: Shared Foundational / Introductory Course Appears in tracks: shared-foundational,.</a:t>
+            </a:r>
+            <a:endParaRPr lang="en-US" sz="1320" dirty="0"/>
           </a:p>
         </p:txBody>
       </p:sp>
@@ -10439,13 +10573,16 @@
           <a:ln/>
         </p:spPr>
         <p:txBody>
-          <a:bodyPr wrap="square" lIns="254" tIns="254" rIns="254" bIns="254" rtlCol="0" anchor="t">
+          <a:bodyPr wrap="square" lIns="508" tIns="508" rIns="508" bIns="508" rtlCol="0" anchor="t">
             <a:normAutofit/>
           </a:bodyPr>
           <a:lstStyle/>
           <a:p>
-            <a:r>
-              <a:rPr lang="en-US" sz="1380" dirty="0">
+            <a:pPr indent="0" marL="0">
+              <a:buNone/>
+            </a:pPr>
+            <a:r>
+              <a:rPr lang="en-US" sz="1220" dirty="0">
                 <a:solidFill>
                   <a:srgbClr val="17364A"/>
                 </a:solidFill>
@@ -10455,11 +10592,14 @@
               </a:rPr>
               <a:t>Read the module for shared vocabulary and context.</a:t>
             </a:r>
-            <a:endParaRPr lang="en-US" sz="1380" dirty="0"/>
-          </a:p>
-          <a:p>
-            <a:r>
-              <a:rPr lang="en-US" sz="1380" dirty="0">
+            <a:endParaRPr lang="en-US" sz="1220" dirty="0"/>
+          </a:p>
+          <a:p>
+            <a:pPr indent="0" marL="0">
+              <a:buNone/>
+            </a:pPr>
+            <a:r>
+              <a:rPr lang="en-US" sz="1220" dirty="0">
                 <a:solidFill>
                   <a:srgbClr val="17364A"/>
                 </a:solidFill>
@@ -10469,11 +10609,14 @@
               </a:rPr>
               <a:t>Complete the practical exercise to apply the concept.</a:t>
             </a:r>
-            <a:endParaRPr lang="en-US" sz="1380" dirty="0"/>
-          </a:p>
-          <a:p>
-            <a:r>
-              <a:rPr lang="en-US" sz="1380" dirty="0">
+            <a:endParaRPr lang="en-US" sz="1220" dirty="0"/>
+          </a:p>
+          <a:p>
+            <a:pPr indent="0" marL="0">
+              <a:buNone/>
+            </a:pPr>
+            <a:r>
+              <a:rPr lang="en-US" sz="1220" dirty="0">
                 <a:solidFill>
                   <a:srgbClr val="17364A"/>
                 </a:solidFill>
@@ -10483,7 +10626,7 @@
               </a:rPr>
               <a:t>Use the notes and references for deeper review.</a:t>
             </a:r>
-            <a:endParaRPr lang="en-US" sz="1380" dirty="0"/>
+            <a:endParaRPr lang="en-US" sz="1220" dirty="0"/>
           </a:p>
         </p:txBody>
       </p:sp>
@@ -10784,49 +10927,58 @@
           <a:ln/>
         </p:spPr>
         <p:txBody>
-          <a:bodyPr wrap="square" lIns="635" tIns="635" rIns="635" bIns="635" rtlCol="0" anchor="t">
+          <a:bodyPr wrap="square" lIns="1016" tIns="1016" rIns="1016" bIns="1016" rtlCol="0" anchor="t">
             <a:normAutofit/>
           </a:bodyPr>
           <a:lstStyle/>
           <a:p>
+            <a:pPr indent="0" marL="0">
+              <a:buNone/>
+            </a:pPr>
             <a:r>
               <a:rPr lang="en-US" sz="2100" dirty="0">
                 <a:solidFill>
-                  <a:srgbClr val="17364A"/>
-                </a:solidFill>
-                <a:latin typeface="Aptos" pitchFamily="34" charset="0"/>
-                <a:ea typeface="Aptos" pitchFamily="34" charset="-122"/>
-                <a:cs typeface="Aptos" pitchFamily="34" charset="-120"/>
-              </a:rPr>
-              <a:t>AI for Social Good review brief</a:t>
+                  <a:srgbClr val="003A63"/>
+                </a:solidFill>
+                <a:latin typeface="Aptos" pitchFamily="34" charset="0"/>
+                <a:ea typeface="Aptos" pitchFamily="34" charset="-122"/>
+                <a:cs typeface="Aptos" pitchFamily="34" charset="-120"/>
+              </a:rPr>
+              <a:t>• AI for Social Good review brief</a:t>
             </a:r>
             <a:endParaRPr lang="en-US" sz="2100" dirty="0"/>
           </a:p>
           <a:p>
+            <a:pPr indent="0" marL="0">
+              <a:buNone/>
+            </a:pPr>
             <a:r>
               <a:rPr lang="en-US" sz="2100" dirty="0">
                 <a:solidFill>
-                  <a:srgbClr val="17364A"/>
-                </a:solidFill>
-                <a:latin typeface="Aptos" pitchFamily="34" charset="0"/>
-                <a:ea typeface="Aptos" pitchFamily="34" charset="-122"/>
-                <a:cs typeface="Aptos" pitchFamily="34" charset="-120"/>
-              </a:rPr>
-              <a:t>Public value and equity assessment</a:t>
+                  <a:srgbClr val="003A63"/>
+                </a:solidFill>
+                <a:latin typeface="Aptos" pitchFamily="34" charset="0"/>
+                <a:ea typeface="Aptos" pitchFamily="34" charset="-122"/>
+                <a:cs typeface="Aptos" pitchFamily="34" charset="-120"/>
+              </a:rPr>
+              <a:t>• Public value and equity assessment</a:t>
             </a:r>
             <a:endParaRPr lang="en-US" sz="2100" dirty="0"/>
           </a:p>
           <a:p>
+            <a:pPr indent="0" marL="0">
+              <a:buNone/>
+            </a:pPr>
             <a:r>
               <a:rPr lang="en-US" sz="2100" dirty="0">
                 <a:solidFill>
-                  <a:srgbClr val="17364A"/>
-                </a:solidFill>
-                <a:latin typeface="Aptos" pitchFamily="34" charset="0"/>
-                <a:ea typeface="Aptos" pitchFamily="34" charset="-122"/>
-                <a:cs typeface="Aptos" pitchFamily="34" charset="-120"/>
-              </a:rPr>
-              <a:t>Community engagement and accessibility plan</a:t>
+                  <a:srgbClr val="003A63"/>
+                </a:solidFill>
+                <a:latin typeface="Aptos" pitchFamily="34" charset="0"/>
+                <a:ea typeface="Aptos" pitchFamily="34" charset="-122"/>
+                <a:cs typeface="Aptos" pitchFamily="34" charset="-120"/>
+              </a:rPr>
+              <a:t>• Community engagement and accessibility plan</a:t>
             </a:r>
             <a:endParaRPr lang="en-US" sz="2100" dirty="0"/>
           </a:p>
@@ -10906,17 +11058,17 @@
         </p:nvSpPr>
         <p:spPr>
           <a:xfrm>
-            <a:off x="7799832" y="1828800"/>
-            <a:ext cx="3145536" cy="685800"/>
-          </a:xfrm>
-          <a:prstGeom prst="rect">
-            <a:avLst/>
-          </a:prstGeom>
-          <a:noFill/>
-          <a:ln/>
-        </p:spPr>
-        <p:txBody>
-          <a:bodyPr wrap="square" lIns="0" tIns="0" rIns="0" bIns="0" rtlCol="0" anchor="t">
+            <a:off x="7799832" y="1801368"/>
+            <a:ext cx="3145536" cy="758952"/>
+          </a:xfrm>
+          <a:prstGeom prst="rect">
+            <a:avLst/>
+          </a:prstGeom>
+          <a:noFill/>
+          <a:ln/>
+        </p:spPr>
+        <p:txBody>
+          <a:bodyPr wrap="square" lIns="254" tIns="254" rIns="254" bIns="254" rtlCol="0" anchor="t">
             <a:normAutofit/>
           </a:bodyPr>
           <a:lstStyle/>
@@ -10925,7 +11077,7 @@
               <a:buNone/>
             </a:pPr>
             <a:r>
-              <a:rPr lang="en-US" sz="1550" dirty="0">
+              <a:rPr lang="en-US" sz="1320" dirty="0">
                 <a:solidFill>
                   <a:srgbClr val="17364A"/>
                 </a:solidFill>
@@ -10935,7 +11087,7 @@
               </a:rPr>
               <a:t>AI for Social Good review brief</a:t>
             </a:r>
-            <a:endParaRPr lang="en-US" sz="1550" dirty="0"/>
+            <a:endParaRPr lang="en-US" sz="1320" dirty="0"/>
           </a:p>
         </p:txBody>
       </p:sp>
@@ -11023,13 +11175,16 @@
           <a:ln/>
         </p:spPr>
         <p:txBody>
-          <a:bodyPr wrap="square" lIns="254" tIns="254" rIns="254" bIns="254" rtlCol="0" anchor="t">
+          <a:bodyPr wrap="square" lIns="508" tIns="508" rIns="508" bIns="508" rtlCol="0" anchor="t">
             <a:normAutofit/>
           </a:bodyPr>
           <a:lstStyle/>
           <a:p>
-            <a:r>
-              <a:rPr lang="en-US" sz="1380" dirty="0">
+            <a:pPr indent="0" marL="0">
+              <a:buNone/>
+            </a:pPr>
+            <a:r>
+              <a:rPr lang="en-US" sz="1220" dirty="0">
                 <a:solidFill>
                   <a:srgbClr val="17364A"/>
                 </a:solidFill>
@@ -11039,11 +11194,14 @@
               </a:rPr>
               <a:t>AI for Social Good review brief</a:t>
             </a:r>
-            <a:endParaRPr lang="en-US" sz="1380" dirty="0"/>
-          </a:p>
-          <a:p>
-            <a:r>
-              <a:rPr lang="en-US" sz="1380" dirty="0">
+            <a:endParaRPr lang="en-US" sz="1220" dirty="0"/>
+          </a:p>
+          <a:p>
+            <a:pPr indent="0" marL="0">
+              <a:buNone/>
+            </a:pPr>
+            <a:r>
+              <a:rPr lang="en-US" sz="1220" dirty="0">
                 <a:solidFill>
                   <a:srgbClr val="17364A"/>
                 </a:solidFill>
@@ -11053,11 +11211,14 @@
               </a:rPr>
               <a:t>Public value and equity assessment</a:t>
             </a:r>
-            <a:endParaRPr lang="en-US" sz="1380" dirty="0"/>
-          </a:p>
-          <a:p>
-            <a:r>
-              <a:rPr lang="en-US" sz="1380" dirty="0">
+            <a:endParaRPr lang="en-US" sz="1220" dirty="0"/>
+          </a:p>
+          <a:p>
+            <a:pPr indent="0" marL="0">
+              <a:buNone/>
+            </a:pPr>
+            <a:r>
+              <a:rPr lang="en-US" sz="1220" dirty="0">
                 <a:solidFill>
                   <a:srgbClr val="17364A"/>
                 </a:solidFill>
@@ -11067,7 +11228,7 @@
               </a:rPr>
               <a:t>Community engagement and accessibility plan</a:t>
             </a:r>
-            <a:endParaRPr lang="en-US" sz="1380" dirty="0"/>
+            <a:endParaRPr lang="en-US" sz="1220" dirty="0"/>
           </a:p>
         </p:txBody>
       </p:sp>
@@ -11145,17 +11306,17 @@
         </p:nvSpPr>
         <p:spPr>
           <a:xfrm>
-            <a:off x="7799832" y="5001768"/>
-            <a:ext cx="3145536" cy="502920"/>
-          </a:xfrm>
-          <a:prstGeom prst="rect">
-            <a:avLst/>
-          </a:prstGeom>
-          <a:noFill/>
-          <a:ln/>
-        </p:spPr>
-        <p:txBody>
-          <a:bodyPr wrap="square" lIns="0" tIns="0" rIns="0" bIns="0" rtlCol="0" anchor="t">
+            <a:off x="7799832" y="4974336"/>
+            <a:ext cx="3145536" cy="576072"/>
+          </a:xfrm>
+          <a:prstGeom prst="rect">
+            <a:avLst/>
+          </a:prstGeom>
+          <a:noFill/>
+          <a:ln/>
+        </p:spPr>
+        <p:txBody>
+          <a:bodyPr wrap="square" lIns="254" tIns="254" rIns="254" bIns="254" rtlCol="0" anchor="t">
             <a:normAutofit/>
           </a:bodyPr>
           <a:lstStyle/>
@@ -11164,7 +11325,7 @@
               <a:buNone/>
             </a:pPr>
             <a:r>
-              <a:rPr lang="en-US" sz="1550" dirty="0">
+              <a:rPr lang="en-US" sz="1320" dirty="0">
                 <a:solidFill>
                   <a:srgbClr val="17364A"/>
                 </a:solidFill>
@@ -11172,9 +11333,9 @@
                 <a:ea typeface="Aptos" pitchFamily="34" charset="-122"/>
                 <a:cs typeface="Aptos" pitchFamily="34" charset="-120"/>
               </a:rPr>
-              <a:t>Use the assignment to test whether you can explain the concept, apply it to a realistic public health situation, and identify what would need review before the work moves forward.</a:t>
-            </a:r>
-            <a:endParaRPr lang="en-US" sz="1550" dirty="0"/>
+              <a:t>Use the assignment to test whether you can explain the concept, apply it to a realistic public health situation, and.</a:t>
+            </a:r>
+            <a:endParaRPr lang="en-US" sz="1320" dirty="0"/>
           </a:p>
         </p:txBody>
       </p:sp>
@@ -11475,49 +11636,58 @@
           <a:ln/>
         </p:spPr>
         <p:txBody>
-          <a:bodyPr wrap="square" lIns="635" tIns="635" rIns="635" bIns="635" rtlCol="0" anchor="t">
+          <a:bodyPr wrap="square" lIns="1016" tIns="1016" rIns="1016" bIns="1016" rtlCol="0" anchor="t">
             <a:normAutofit/>
           </a:bodyPr>
           <a:lstStyle/>
           <a:p>
+            <a:pPr indent="0" marL="0">
+              <a:buNone/>
+            </a:pPr>
             <a:r>
               <a:rPr lang="en-US" sz="2100" dirty="0">
                 <a:solidFill>
-                  <a:srgbClr val="17364A"/>
-                </a:solidFill>
-                <a:latin typeface="Aptos" pitchFamily="34" charset="0"/>
-                <a:ea typeface="Aptos" pitchFamily="34" charset="-122"/>
-                <a:cs typeface="Aptos" pitchFamily="34" charset="-120"/>
-              </a:rPr>
-              <a:t>1. What is the best definition of AI for Social Good in public health?</a:t>
+                  <a:srgbClr val="003A63"/>
+                </a:solidFill>
+                <a:latin typeface="Aptos" pitchFamily="34" charset="0"/>
+                <a:ea typeface="Aptos" pitchFamily="34" charset="-122"/>
+                <a:cs typeface="Aptos" pitchFamily="34" charset="-120"/>
+              </a:rPr>
+              <a:t>• 1. What is the best definition of AI for Social Good in public health?</a:t>
             </a:r>
             <a:endParaRPr lang="en-US" sz="2100" dirty="0"/>
           </a:p>
           <a:p>
+            <a:pPr indent="0" marL="0">
+              <a:buNone/>
+            </a:pPr>
             <a:r>
               <a:rPr lang="en-US" sz="2100" dirty="0">
                 <a:solidFill>
-                  <a:srgbClr val="17364A"/>
-                </a:solidFill>
-                <a:latin typeface="Aptos" pitchFamily="34" charset="0"/>
-                <a:ea typeface="Aptos" pitchFamily="34" charset="-122"/>
-                <a:cs typeface="Aptos" pitchFamily="34" charset="-120"/>
-              </a:rPr>
-              <a:t>2. Why is efficiency alone not enough to show social good?</a:t>
+                  <a:srgbClr val="003A63"/>
+                </a:solidFill>
+                <a:latin typeface="Aptos" pitchFamily="34" charset="0"/>
+                <a:ea typeface="Aptos" pitchFamily="34" charset="-122"/>
+                <a:cs typeface="Aptos" pitchFamily="34" charset="-120"/>
+              </a:rPr>
+              <a:t>• 2. Why is efficiency alone not enough to show social good?</a:t>
             </a:r>
             <a:endParaRPr lang="en-US" sz="2100" dirty="0"/>
           </a:p>
           <a:p>
+            <a:pPr indent="0" marL="0">
+              <a:buNone/>
+            </a:pPr>
             <a:r>
               <a:rPr lang="en-US" sz="2100" dirty="0">
                 <a:solidFill>
-                  <a:srgbClr val="17364A"/>
-                </a:solidFill>
-                <a:latin typeface="Aptos" pitchFamily="34" charset="0"/>
-                <a:ea typeface="Aptos" pitchFamily="34" charset="-122"/>
-                <a:cs typeface="Aptos" pitchFamily="34" charset="-120"/>
-              </a:rPr>
-              <a:t>3. What does equity by design require?</a:t>
+                  <a:srgbClr val="003A63"/>
+                </a:solidFill>
+                <a:latin typeface="Aptos" pitchFamily="34" charset="0"/>
+                <a:ea typeface="Aptos" pitchFamily="34" charset="-122"/>
+                <a:cs typeface="Aptos" pitchFamily="34" charset="-120"/>
+              </a:rPr>
+              <a:t>• 3. What does equity by design require?</a:t>
             </a:r>
             <a:endParaRPr lang="en-US" sz="2100" dirty="0"/>
           </a:p>
@@ -11597,17 +11767,17 @@
         </p:nvSpPr>
         <p:spPr>
           <a:xfrm>
-            <a:off x="7799832" y="1828800"/>
-            <a:ext cx="3145536" cy="685800"/>
-          </a:xfrm>
-          <a:prstGeom prst="rect">
-            <a:avLst/>
-          </a:prstGeom>
-          <a:noFill/>
-          <a:ln/>
-        </p:spPr>
-        <p:txBody>
-          <a:bodyPr wrap="square" lIns="0" tIns="0" rIns="0" bIns="0" rtlCol="0" anchor="t">
+            <a:off x="7799832" y="1801368"/>
+            <a:ext cx="3145536" cy="758952"/>
+          </a:xfrm>
+          <a:prstGeom prst="rect">
+            <a:avLst/>
+          </a:prstGeom>
+          <a:noFill/>
+          <a:ln/>
+        </p:spPr>
+        <p:txBody>
+          <a:bodyPr wrap="square" lIns="254" tIns="254" rIns="254" bIns="254" rtlCol="0" anchor="t">
             <a:normAutofit/>
           </a:bodyPr>
           <a:lstStyle/>
@@ -11616,7 +11786,7 @@
               <a:buNone/>
             </a:pPr>
             <a:r>
-              <a:rPr lang="en-US" sz="1550" dirty="0">
+              <a:rPr lang="en-US" sz="1320" dirty="0">
                 <a:solidFill>
                   <a:srgbClr val="17364A"/>
                 </a:solidFill>
@@ -11626,7 +11796,7 @@
               </a:rPr>
               <a:t>1. What is the best definition of AI for Social Good in public health?</a:t>
             </a:r>
-            <a:endParaRPr lang="en-US" sz="1550" dirty="0"/>
+            <a:endParaRPr lang="en-US" sz="1320" dirty="0"/>
           </a:p>
         </p:txBody>
       </p:sp>
@@ -11714,13 +11884,16 @@
           <a:ln/>
         </p:spPr>
         <p:txBody>
-          <a:bodyPr wrap="square" lIns="254" tIns="254" rIns="254" bIns="254" rtlCol="0" anchor="t">
+          <a:bodyPr wrap="square" lIns="508" tIns="508" rIns="508" bIns="508" rtlCol="0" anchor="t">
             <a:normAutofit/>
           </a:bodyPr>
           <a:lstStyle/>
           <a:p>
-            <a:r>
-              <a:rPr lang="en-US" sz="1380" dirty="0">
+            <a:pPr indent="0" marL="0">
+              <a:buNone/>
+            </a:pPr>
+            <a:r>
+              <a:rPr lang="en-US" sz="1220" dirty="0">
                 <a:solidFill>
                   <a:srgbClr val="17364A"/>
                 </a:solidFill>
@@ -11730,11 +11903,14 @@
               </a:rPr>
               <a:t>1.</a:t>
             </a:r>
-            <a:endParaRPr lang="en-US" sz="1380" dirty="0"/>
-          </a:p>
-          <a:p>
-            <a:r>
-              <a:rPr lang="en-US" sz="1380" dirty="0">
+            <a:endParaRPr lang="en-US" sz="1220" dirty="0"/>
+          </a:p>
+          <a:p>
+            <a:pPr indent="0" marL="0">
+              <a:buNone/>
+            </a:pPr>
+            <a:r>
+              <a:rPr lang="en-US" sz="1220" dirty="0">
                 <a:solidFill>
                   <a:srgbClr val="17364A"/>
                 </a:solidFill>
@@ -11744,11 +11920,14 @@
               </a:rPr>
               <a:t>What is the best definition of AI for Social Good in public health?</a:t>
             </a:r>
-            <a:endParaRPr lang="en-US" sz="1380" dirty="0"/>
-          </a:p>
-          <a:p>
-            <a:r>
-              <a:rPr lang="en-US" sz="1380" dirty="0">
+            <a:endParaRPr lang="en-US" sz="1220" dirty="0"/>
+          </a:p>
+          <a:p>
+            <a:pPr indent="0" marL="0">
+              <a:buNone/>
+            </a:pPr>
+            <a:r>
+              <a:rPr lang="en-US" sz="1220" dirty="0">
                 <a:solidFill>
                   <a:srgbClr val="17364A"/>
                 </a:solidFill>
@@ -11758,7 +11937,7 @@
               </a:rPr>
               <a:t>2.</a:t>
             </a:r>
-            <a:endParaRPr lang="en-US" sz="1380" dirty="0"/>
+            <a:endParaRPr lang="en-US" sz="1220" dirty="0"/>
           </a:p>
         </p:txBody>
       </p:sp>
@@ -11836,17 +12015,17 @@
         </p:nvSpPr>
         <p:spPr>
           <a:xfrm>
-            <a:off x="7799832" y="5001768"/>
-            <a:ext cx="3145536" cy="502920"/>
-          </a:xfrm>
-          <a:prstGeom prst="rect">
-            <a:avLst/>
-          </a:prstGeom>
-          <a:noFill/>
-          <a:ln/>
-        </p:spPr>
-        <p:txBody>
-          <a:bodyPr wrap="square" lIns="0" tIns="0" rIns="0" bIns="0" rtlCol="0" anchor="t">
+            <a:off x="7799832" y="4974336"/>
+            <a:ext cx="3145536" cy="576072"/>
+          </a:xfrm>
+          <a:prstGeom prst="rect">
+            <a:avLst/>
+          </a:prstGeom>
+          <a:noFill/>
+          <a:ln/>
+        </p:spPr>
+        <p:txBody>
+          <a:bodyPr wrap="square" lIns="254" tIns="254" rIns="254" bIns="254" rtlCol="0" anchor="t">
             <a:normAutofit/>
           </a:bodyPr>
           <a:lstStyle/>
@@ -11855,7 +12034,7 @@
               <a:buNone/>
             </a:pPr>
             <a:r>
-              <a:rPr lang="en-US" sz="1550" dirty="0">
+              <a:rPr lang="en-US" sz="1320" dirty="0">
                 <a:solidFill>
                   <a:srgbClr val="17364A"/>
                 </a:solidFill>
@@ -11863,9 +12042,9 @@
                 <a:ea typeface="Aptos" pitchFamily="34" charset="-122"/>
                 <a:cs typeface="Aptos" pitchFamily="34" charset="-120"/>
               </a:rPr>
-              <a:t>Use the assignment to test whether you can explain the concept, apply it to a realistic public health situation, and identify what would need review before the work moves forward.</a:t>
-            </a:r>
-            <a:endParaRPr lang="en-US" sz="1550" dirty="0"/>
+              <a:t>Use the assignment to test whether you can explain the concept, apply it to a realistic public health situation, and.</a:t>
+            </a:r>
+            <a:endParaRPr lang="en-US" sz="1320" dirty="0"/>
           </a:p>
         </p:txBody>
       </p:sp>
@@ -12166,49 +12345,58 @@
           <a:ln/>
         </p:spPr>
         <p:txBody>
-          <a:bodyPr wrap="square" lIns="635" tIns="635" rIns="635" bIns="635" rtlCol="0" anchor="t">
+          <a:bodyPr wrap="square" lIns="1016" tIns="1016" rIns="1016" bIns="1016" rtlCol="0" anchor="t">
             <a:normAutofit/>
           </a:bodyPr>
           <a:lstStyle/>
           <a:p>
+            <a:pPr indent="0" marL="0">
+              <a:buNone/>
+            </a:pPr>
             <a:r>
               <a:rPr lang="en-US" sz="2100" dirty="0">
                 <a:solidFill>
-                  <a:srgbClr val="17364A"/>
-                </a:solidFill>
-                <a:latin typeface="Aptos" pitchFamily="34" charset="0"/>
-                <a:ea typeface="Aptos" pitchFamily="34" charset="-122"/>
-                <a:cs typeface="Aptos" pitchFamily="34" charset="-120"/>
-              </a:rPr>
-              <a:t>WHO Ethics and Governance of Artificial Intelligence for Health:.</a:t>
+                  <a:srgbClr val="003A63"/>
+                </a:solidFill>
+                <a:latin typeface="Aptos" pitchFamily="34" charset="0"/>
+                <a:ea typeface="Aptos" pitchFamily="34" charset="-122"/>
+                <a:cs typeface="Aptos" pitchFamily="34" charset="-120"/>
+              </a:rPr>
+              <a:t>• WHO Ethics and Governance of Artificial Intelligence for Health:.</a:t>
             </a:r>
             <a:endParaRPr lang="en-US" sz="2100" dirty="0"/>
           </a:p>
           <a:p>
+            <a:pPr indent="0" marL="0">
+              <a:buNone/>
+            </a:pPr>
             <a:r>
               <a:rPr lang="en-US" sz="2100" dirty="0">
                 <a:solidFill>
-                  <a:srgbClr val="17364A"/>
-                </a:solidFill>
-                <a:latin typeface="Aptos" pitchFamily="34" charset="0"/>
-                <a:ea typeface="Aptos" pitchFamily="34" charset="-122"/>
-                <a:cs typeface="Aptos" pitchFamily="34" charset="-120"/>
-              </a:rPr>
-              <a:t>WHO Guidance on Large Multi-Modal Models: https://www.who.int/publications/i/item/9789240084759</a:t>
+                  <a:srgbClr val="003A63"/>
+                </a:solidFill>
+                <a:latin typeface="Aptos" pitchFamily="34" charset="0"/>
+                <a:ea typeface="Aptos" pitchFamily="34" charset="-122"/>
+                <a:cs typeface="Aptos" pitchFamily="34" charset="-120"/>
+              </a:rPr>
+              <a:t>• WHO Guidance on Large Multi-Modal Models: https://www.who.int/publications/i/item/9789240084759</a:t>
             </a:r>
             <a:endParaRPr lang="en-US" sz="2100" dirty="0"/>
           </a:p>
           <a:p>
+            <a:pPr indent="0" marL="0">
+              <a:buNone/>
+            </a:pPr>
             <a:r>
               <a:rPr lang="en-US" sz="2100" dirty="0">
                 <a:solidFill>
-                  <a:srgbClr val="17364A"/>
-                </a:solidFill>
-                <a:latin typeface="Aptos" pitchFamily="34" charset="0"/>
-                <a:ea typeface="Aptos" pitchFamily="34" charset="-122"/>
-                <a:cs typeface="Aptos" pitchFamily="34" charset="-120"/>
-              </a:rPr>
-              <a:t>NIST Artificial Intelligence Risk Management Framework:.</a:t>
+                  <a:srgbClr val="003A63"/>
+                </a:solidFill>
+                <a:latin typeface="Aptos" pitchFamily="34" charset="0"/>
+                <a:ea typeface="Aptos" pitchFamily="34" charset="-122"/>
+                <a:cs typeface="Aptos" pitchFamily="34" charset="-120"/>
+              </a:rPr>
+              <a:t>• NIST Artificial Intelligence Risk Management Framework:.</a:t>
             </a:r>
             <a:endParaRPr lang="en-US" sz="2100" dirty="0"/>
           </a:p>
@@ -12288,17 +12476,17 @@
         </p:nvSpPr>
         <p:spPr>
           <a:xfrm>
-            <a:off x="7799832" y="1828800"/>
-            <a:ext cx="3145536" cy="685800"/>
-          </a:xfrm>
-          <a:prstGeom prst="rect">
-            <a:avLst/>
-          </a:prstGeom>
-          <a:noFill/>
-          <a:ln/>
-        </p:spPr>
-        <p:txBody>
-          <a:bodyPr wrap="square" lIns="0" tIns="0" rIns="0" bIns="0" rtlCol="0" anchor="t">
+            <a:off x="7799832" y="1801368"/>
+            <a:ext cx="3145536" cy="758952"/>
+          </a:xfrm>
+          <a:prstGeom prst="rect">
+            <a:avLst/>
+          </a:prstGeom>
+          <a:noFill/>
+          <a:ln/>
+        </p:spPr>
+        <p:txBody>
+          <a:bodyPr wrap="square" lIns="254" tIns="254" rIns="254" bIns="254" rtlCol="0" anchor="t">
             <a:normAutofit/>
           </a:bodyPr>
           <a:lstStyle/>
@@ -12307,7 +12495,7 @@
               <a:buNone/>
             </a:pPr>
             <a:r>
-              <a:rPr lang="en-US" sz="1550" dirty="0">
+              <a:rPr lang="en-US" sz="1320" dirty="0">
                 <a:solidFill>
                   <a:srgbClr val="17364A"/>
                 </a:solidFill>
@@ -12317,7 +12505,7 @@
               </a:rPr>
               <a:t>WHO Ethics and Governance of Artificial Intelligence for Health:.</a:t>
             </a:r>
-            <a:endParaRPr lang="en-US" sz="1550" dirty="0"/>
+            <a:endParaRPr lang="en-US" sz="1320" dirty="0"/>
           </a:p>
         </p:txBody>
       </p:sp>
@@ -12405,13 +12593,16 @@
           <a:ln/>
         </p:spPr>
         <p:txBody>
-          <a:bodyPr wrap="square" lIns="254" tIns="254" rIns="254" bIns="254" rtlCol="0" anchor="t">
+          <a:bodyPr wrap="square" lIns="508" tIns="508" rIns="508" bIns="508" rtlCol="0" anchor="t">
             <a:normAutofit/>
           </a:bodyPr>
           <a:lstStyle/>
           <a:p>
-            <a:r>
-              <a:rPr lang="en-US" sz="1380" dirty="0">
+            <a:pPr indent="0" marL="0">
+              <a:buNone/>
+            </a:pPr>
+            <a:r>
+              <a:rPr lang="en-US" sz="1220" dirty="0">
                 <a:solidFill>
                   <a:srgbClr val="17364A"/>
                 </a:solidFill>
@@ -12421,11 +12612,14 @@
               </a:rPr>
               <a:t>WHO Ethics and Governance of Artificial Intelligence for Health:.</a:t>
             </a:r>
-            <a:endParaRPr lang="en-US" sz="1380" dirty="0"/>
-          </a:p>
-          <a:p>
-            <a:r>
-              <a:rPr lang="en-US" sz="1380" dirty="0">
+            <a:endParaRPr lang="en-US" sz="1220" dirty="0"/>
+          </a:p>
+          <a:p>
+            <a:pPr indent="0" marL="0">
+              <a:buNone/>
+            </a:pPr>
+            <a:r>
+              <a:rPr lang="en-US" sz="1220" dirty="0">
                 <a:solidFill>
                   <a:srgbClr val="17364A"/>
                 </a:solidFill>
@@ -12435,11 +12629,14 @@
               </a:rPr>
               <a:t>NIST Artificial Intelligence Risk Management Framework:.</a:t>
             </a:r>
-            <a:endParaRPr lang="en-US" sz="1380" dirty="0"/>
-          </a:p>
-          <a:p>
-            <a:r>
-              <a:rPr lang="en-US" sz="1380" dirty="0">
+            <a:endParaRPr lang="en-US" sz="1220" dirty="0"/>
+          </a:p>
+          <a:p>
+            <a:pPr indent="0" marL="0">
+              <a:buNone/>
+            </a:pPr>
+            <a:r>
+              <a:rPr lang="en-US" sz="1220" dirty="0">
                 <a:solidFill>
                   <a:srgbClr val="17364A"/>
                 </a:solidFill>
@@ -12449,7 +12646,7 @@
               </a:rPr>
               <a:t>CDC Public Health Data Strategy:.</a:t>
             </a:r>
-            <a:endParaRPr lang="en-US" sz="1380" dirty="0"/>
+            <a:endParaRPr lang="en-US" sz="1220" dirty="0"/>
           </a:p>
         </p:txBody>
       </p:sp>
@@ -12527,17 +12724,17 @@
         </p:nvSpPr>
         <p:spPr>
           <a:xfrm>
-            <a:off x="7799832" y="5001768"/>
-            <a:ext cx="3145536" cy="502920"/>
-          </a:xfrm>
-          <a:prstGeom prst="rect">
-            <a:avLst/>
-          </a:prstGeom>
-          <a:noFill/>
-          <a:ln/>
-        </p:spPr>
-        <p:txBody>
-          <a:bodyPr wrap="square" lIns="0" tIns="0" rIns="0" bIns="0" rtlCol="0" anchor="t">
+            <a:off x="7799832" y="4974336"/>
+            <a:ext cx="3145536" cy="576072"/>
+          </a:xfrm>
+          <a:prstGeom prst="rect">
+            <a:avLst/>
+          </a:prstGeom>
+          <a:noFill/>
+          <a:ln/>
+        </p:spPr>
+        <p:txBody>
+          <a:bodyPr wrap="square" lIns="254" tIns="254" rIns="254" bIns="254" rtlCol="0" anchor="t">
             <a:normAutofit/>
           </a:bodyPr>
           <a:lstStyle/>
@@ -12546,7 +12743,7 @@
               <a:buNone/>
             </a:pPr>
             <a:r>
-              <a:rPr lang="en-US" sz="1550" dirty="0">
+              <a:rPr lang="en-US" sz="1320" dirty="0">
                 <a:solidFill>
                   <a:srgbClr val="17364A"/>
                 </a:solidFill>
@@ -12554,9 +12751,9 @@
                 <a:ea typeface="Aptos" pitchFamily="34" charset="-122"/>
                 <a:cs typeface="Aptos" pitchFamily="34" charset="-120"/>
               </a:rPr>
-              <a:t>Connect the concept to public health purpose, responsible use, required safeguards, documentation, and the next action a department should take.</a:t>
-            </a:r>
-            <a:endParaRPr lang="en-US" sz="1550" dirty="0"/>
+              <a:t>Connect the concept to public health purpose, responsible use, required safeguards, documentation, and the next action a.</a:t>
+            </a:r>
+            <a:endParaRPr lang="en-US" sz="1320" dirty="0"/>
           </a:p>
         </p:txBody>
       </p:sp>
@@ -12857,63 +13054,75 @@
           <a:ln/>
         </p:spPr>
         <p:txBody>
-          <a:bodyPr wrap="square" lIns="635" tIns="635" rIns="635" bIns="635" rtlCol="0" anchor="t">
+          <a:bodyPr wrap="square" lIns="1016" tIns="1016" rIns="1016" bIns="1016" rtlCol="0" anchor="t">
             <a:normAutofit/>
           </a:bodyPr>
           <a:lstStyle/>
           <a:p>
+            <a:pPr indent="0" marL="0">
+              <a:buNone/>
+            </a:pPr>
             <a:r>
               <a:rPr lang="en-US" sz="1900" dirty="0">
                 <a:solidFill>
-                  <a:srgbClr val="17364A"/>
-                </a:solidFill>
-                <a:latin typeface="Aptos" pitchFamily="34" charset="0"/>
-                <a:ea typeface="Aptos" pitchFamily="34" charset="-122"/>
-                <a:cs typeface="Aptos" pitchFamily="34" charset="-120"/>
-              </a:rPr>
-              <a:t>Play 4: Engage Stakeholders - This lesson informs Play 4 by helping learners connect the lesson topic to.</a:t>
+                  <a:srgbClr val="003A63"/>
+                </a:solidFill>
+                <a:latin typeface="Aptos" pitchFamily="34" charset="0"/>
+                <a:ea typeface="Aptos" pitchFamily="34" charset="-122"/>
+                <a:cs typeface="Aptos" pitchFamily="34" charset="-120"/>
+              </a:rPr>
+              <a:t>• Play 4: Engage Stakeholders - This lesson informs Play 4 by helping learners connect the.</a:t>
             </a:r>
             <a:endParaRPr lang="en-US" sz="1900" dirty="0"/>
           </a:p>
           <a:p>
+            <a:pPr indent="0" marL="0">
+              <a:buNone/>
+            </a:pPr>
             <a:r>
               <a:rPr lang="en-US" sz="1900" dirty="0">
                 <a:solidFill>
-                  <a:srgbClr val="17364A"/>
-                </a:solidFill>
-                <a:latin typeface="Aptos" pitchFamily="34" charset="0"/>
-                <a:ea typeface="Aptos" pitchFamily="34" charset="-122"/>
-                <a:cs typeface="Aptos" pitchFamily="34" charset="-120"/>
-              </a:rPr>
-              <a:t>Play 7: Prioritize Use Cases - This lesson informs Play 7 by helping learners connect the lesson topic to.</a:t>
+                  <a:srgbClr val="003A63"/>
+                </a:solidFill>
+                <a:latin typeface="Aptos" pitchFamily="34" charset="0"/>
+                <a:ea typeface="Aptos" pitchFamily="34" charset="-122"/>
+                <a:cs typeface="Aptos" pitchFamily="34" charset="-120"/>
+              </a:rPr>
+              <a:t>• Play 7: Prioritize Use Cases - This lesson informs Play 7 by helping learners connect the.</a:t>
             </a:r>
             <a:endParaRPr lang="en-US" sz="1900" dirty="0"/>
           </a:p>
           <a:p>
+            <a:pPr indent="0" marL="0">
+              <a:buNone/>
+            </a:pPr>
             <a:r>
               <a:rPr lang="en-US" sz="1900" dirty="0">
                 <a:solidFill>
-                  <a:srgbClr val="17364A"/>
-                </a:solidFill>
-                <a:latin typeface="Aptos" pitchFamily="34" charset="0"/>
-                <a:ea typeface="Aptos" pitchFamily="34" charset="-122"/>
-                <a:cs typeface="Aptos" pitchFamily="34" charset="-120"/>
-              </a:rPr>
-              <a:t>Play 1: Vision &amp; Guardrails - This lesson informs Play 1 by helping learners connect the lesson topic to.</a:t>
+                  <a:srgbClr val="003A63"/>
+                </a:solidFill>
+                <a:latin typeface="Aptos" pitchFamily="34" charset="0"/>
+                <a:ea typeface="Aptos" pitchFamily="34" charset="-122"/>
+                <a:cs typeface="Aptos" pitchFamily="34" charset="-120"/>
+              </a:rPr>
+              <a:t>• Play 1: Vision &amp; Guardrails - This lesson informs Play 1 by helping learners connect the.</a:t>
             </a:r>
             <a:endParaRPr lang="en-US" sz="1900" dirty="0"/>
           </a:p>
           <a:p>
+            <a:pPr indent="0" marL="0">
+              <a:buNone/>
+            </a:pPr>
             <a:r>
               <a:rPr lang="en-US" sz="1900" dirty="0">
                 <a:solidFill>
-                  <a:srgbClr val="17364A"/>
-                </a:solidFill>
-                <a:latin typeface="Aptos" pitchFamily="34" charset="0"/>
-                <a:ea typeface="Aptos" pitchFamily="34" charset="-122"/>
-                <a:cs typeface="Aptos" pitchFamily="34" charset="-120"/>
-              </a:rPr>
-              <a:t>Play 13: Monitor and Evaluate AI Systems - This lesson informs Play 13 by helping learners connect the.</a:t>
+                  <a:srgbClr val="003A63"/>
+                </a:solidFill>
+                <a:latin typeface="Aptos" pitchFamily="34" charset="0"/>
+                <a:ea typeface="Aptos" pitchFamily="34" charset="-122"/>
+                <a:cs typeface="Aptos" pitchFamily="34" charset="-120"/>
+              </a:rPr>
+              <a:t>• Play 13: Monitor and Evaluate AI Systems - This lesson informs Play 13 by helping learners.</a:t>
             </a:r>
             <a:endParaRPr lang="en-US" sz="1900" dirty="0"/>
           </a:p>
@@ -12993,17 +13202,17 @@
         </p:nvSpPr>
         <p:spPr>
           <a:xfrm>
-            <a:off x="8211312" y="1920240"/>
-            <a:ext cx="2734056" cy="1463040"/>
-          </a:xfrm>
-          <a:prstGeom prst="rect">
-            <a:avLst/>
-          </a:prstGeom>
-          <a:noFill/>
-          <a:ln/>
-        </p:spPr>
-        <p:txBody>
-          <a:bodyPr wrap="square" lIns="0" tIns="0" rIns="0" bIns="0" rtlCol="0" anchor="t">
+            <a:off x="8211312" y="1892808"/>
+            <a:ext cx="2734056" cy="1536192"/>
+          </a:xfrm>
+          <a:prstGeom prst="rect">
+            <a:avLst/>
+          </a:prstGeom>
+          <a:noFill/>
+          <a:ln/>
+        </p:spPr>
+        <p:txBody>
+          <a:bodyPr wrap="square" lIns="254" tIns="254" rIns="254" bIns="254" rtlCol="0" anchor="t">
             <a:normAutofit/>
           </a:bodyPr>
           <a:lstStyle/>
@@ -13012,7 +13221,7 @@
               <a:buNone/>
             </a:pPr>
             <a:r>
-              <a:rPr lang="en-US" sz="1550" dirty="0">
+              <a:rPr lang="en-US" sz="1320" dirty="0">
                 <a:solidFill>
                   <a:srgbClr val="17364A"/>
                 </a:solidFill>
@@ -13020,9 +13229,9 @@
                 <a:ea typeface="Aptos" pitchFamily="34" charset="-122"/>
                 <a:cs typeface="Aptos" pitchFamily="34" charset="-120"/>
               </a:rPr>
-              <a:t>Use the related plays to identify decisions, participants, timing, approvals, and documentation needed for responsible implementation.</a:t>
-            </a:r>
-            <a:endParaRPr lang="en-US" sz="1550" dirty="0"/>
+              <a:t>Use the related plays to identify decisions, participants, timing, approvals, and documentation needed for responsible.</a:t>
+            </a:r>
+            <a:endParaRPr lang="en-US" sz="1320" dirty="0"/>
           </a:p>
         </p:txBody>
       </p:sp>
@@ -13110,13 +13319,16 @@
           <a:ln/>
         </p:spPr>
         <p:txBody>
-          <a:bodyPr wrap="square" lIns="254" tIns="254" rIns="254" bIns="254" rtlCol="0" anchor="t">
+          <a:bodyPr wrap="square" lIns="508" tIns="508" rIns="508" bIns="508" rtlCol="0" anchor="t">
             <a:normAutofit/>
           </a:bodyPr>
           <a:lstStyle/>
           <a:p>
-            <a:r>
-              <a:rPr lang="en-US" sz="1380" dirty="0">
+            <a:pPr indent="0" marL="0">
+              <a:buNone/>
+            </a:pPr>
+            <a:r>
+              <a:rPr lang="en-US" sz="1220" dirty="0">
                 <a:solidFill>
                   <a:srgbClr val="17364A"/>
                 </a:solidFill>
@@ -13126,11 +13338,14 @@
               </a:rPr>
               <a:t>Locate the decision point in the playbook sequence.</a:t>
             </a:r>
-            <a:endParaRPr lang="en-US" sz="1380" dirty="0"/>
-          </a:p>
-          <a:p>
-            <a:r>
-              <a:rPr lang="en-US" sz="1380" dirty="0">
+            <a:endParaRPr lang="en-US" sz="1220" dirty="0"/>
+          </a:p>
+          <a:p>
+            <a:pPr indent="0" marL="0">
+              <a:buNone/>
+            </a:pPr>
+            <a:r>
+              <a:rPr lang="en-US" sz="1220" dirty="0">
                 <a:solidFill>
                   <a:srgbClr val="17364A"/>
                 </a:solidFill>
@@ -13140,11 +13355,14 @@
               </a:rPr>
               <a:t>Identify who should participate in the work.</a:t>
             </a:r>
-            <a:endParaRPr lang="en-US" sz="1380" dirty="0"/>
-          </a:p>
-          <a:p>
-            <a:r>
-              <a:rPr lang="en-US" sz="1380" dirty="0">
+            <a:endParaRPr lang="en-US" sz="1220" dirty="0"/>
+          </a:p>
+          <a:p>
+            <a:pPr indent="0" marL="0">
+              <a:buNone/>
+            </a:pPr>
+            <a:r>
+              <a:rPr lang="en-US" sz="1220" dirty="0">
                 <a:solidFill>
                   <a:srgbClr val="17364A"/>
                 </a:solidFill>
@@ -13154,7 +13372,7 @@
               </a:rPr>
               <a:t>Document the review, approval, or implementation step.</a:t>
             </a:r>
-            <a:endParaRPr lang="en-US" sz="1380" dirty="0"/>
+            <a:endParaRPr lang="en-US" sz="1220" dirty="0"/>
           </a:p>
         </p:txBody>
       </p:sp>
@@ -13455,63 +13673,75 @@
           <a:ln/>
         </p:spPr>
         <p:txBody>
-          <a:bodyPr wrap="square" lIns="635" tIns="635" rIns="635" bIns="635" rtlCol="0" anchor="t">
+          <a:bodyPr wrap="square" lIns="1016" tIns="1016" rIns="1016" bIns="1016" rtlCol="0" anchor="t">
             <a:normAutofit/>
           </a:bodyPr>
           <a:lstStyle/>
           <a:p>
+            <a:pPr indent="0" marL="0">
+              <a:buNone/>
+            </a:pPr>
             <a:r>
               <a:rPr lang="en-US" sz="1850" dirty="0">
                 <a:solidFill>
-                  <a:srgbClr val="17364A"/>
-                </a:solidFill>
-                <a:latin typeface="Aptos" pitchFamily="34" charset="0"/>
-                <a:ea typeface="Aptos" pitchFamily="34" charset="-122"/>
-                <a:cs typeface="Aptos" pitchFamily="34" charset="-120"/>
-              </a:rPr>
-              <a:t>Tool 20: Community Engagement Planning (Planning) - Use this tool to complete or strengthen the practical.</a:t>
+                  <a:srgbClr val="003A63"/>
+                </a:solidFill>
+                <a:latin typeface="Aptos" pitchFamily="34" charset="0"/>
+                <a:ea typeface="Aptos" pitchFamily="34" charset="-122"/>
+                <a:cs typeface="Aptos" pitchFamily="34" charset="-120"/>
+              </a:rPr>
+              <a:t>• Tool 20: Community Engagement Planning (Planning) - Use this tool to complete or strengthen.</a:t>
             </a:r>
             <a:endParaRPr lang="en-US" sz="1850" dirty="0"/>
           </a:p>
           <a:p>
+            <a:pPr indent="0" marL="0">
+              <a:buNone/>
+            </a:pPr>
             <a:r>
               <a:rPr lang="en-US" sz="1850" dirty="0">
                 <a:solidFill>
-                  <a:srgbClr val="17364A"/>
-                </a:solidFill>
-                <a:latin typeface="Aptos" pitchFamily="34" charset="0"/>
-                <a:ea typeface="Aptos" pitchFamily="34" charset="-122"/>
-                <a:cs typeface="Aptos" pitchFamily="34" charset="-120"/>
-              </a:rPr>
-              <a:t>Tool 21: Stakeholder Mapping &amp; RACI (Template) - Use this tool to complete or strengthen the practical.</a:t>
+                  <a:srgbClr val="003A63"/>
+                </a:solidFill>
+                <a:latin typeface="Aptos" pitchFamily="34" charset="0"/>
+                <a:ea typeface="Aptos" pitchFamily="34" charset="-122"/>
+                <a:cs typeface="Aptos" pitchFamily="34" charset="-120"/>
+              </a:rPr>
+              <a:t>• Tool 21: Stakeholder Mapping &amp; RACI (Template) - Use this tool to complete or strengthen the.</a:t>
             </a:r>
             <a:endParaRPr lang="en-US" sz="1850" dirty="0"/>
           </a:p>
           <a:p>
+            <a:pPr indent="0" marL="0">
+              <a:buNone/>
+            </a:pPr>
             <a:r>
               <a:rPr lang="en-US" sz="1850" dirty="0">
                 <a:solidFill>
-                  <a:srgbClr val="17364A"/>
-                </a:solidFill>
-                <a:latin typeface="Aptos" pitchFamily="34" charset="0"/>
-                <a:ea typeface="Aptos" pitchFamily="34" charset="-122"/>
-                <a:cs typeface="Aptos" pitchFamily="34" charset="-120"/>
-              </a:rPr>
-              <a:t>Tool 22: Missing Voices Analysis (Checklist) - Use this tool to complete or strengthen the practical.</a:t>
+                  <a:srgbClr val="003A63"/>
+                </a:solidFill>
+                <a:latin typeface="Aptos" pitchFamily="34" charset="0"/>
+                <a:ea typeface="Aptos" pitchFamily="34" charset="-122"/>
+                <a:cs typeface="Aptos" pitchFamily="34" charset="-120"/>
+              </a:rPr>
+              <a:t>• Tool 22: Missing Voices Analysis (Checklist) - Use this tool to complete or strengthen the.</a:t>
             </a:r>
             <a:endParaRPr lang="en-US" sz="1850" dirty="0"/>
           </a:p>
           <a:p>
+            <a:pPr indent="0" marL="0">
+              <a:buNone/>
+            </a:pPr>
             <a:r>
               <a:rPr lang="en-US" sz="1850" dirty="0">
                 <a:solidFill>
-                  <a:srgbClr val="17364A"/>
-                </a:solidFill>
-                <a:latin typeface="Aptos" pitchFamily="34" charset="0"/>
-                <a:ea typeface="Aptos" pitchFamily="34" charset="-122"/>
-                <a:cs typeface="Aptos" pitchFamily="34" charset="-120"/>
-              </a:rPr>
-              <a:t>Tool 4: AI Policy Landscape Scan (Worksheet) - Use AI Policy Landscape Scan to translate this lesson into a.</a:t>
+                  <a:srgbClr val="003A63"/>
+                </a:solidFill>
+                <a:latin typeface="Aptos" pitchFamily="34" charset="0"/>
+                <a:ea typeface="Aptos" pitchFamily="34" charset="-122"/>
+                <a:cs typeface="Aptos" pitchFamily="34" charset="-120"/>
+              </a:rPr>
+              <a:t>• Tool 4: AI Policy Landscape Scan (Worksheet) - Use AI Policy Landscape Scan to translate this.</a:t>
             </a:r>
             <a:endParaRPr lang="en-US" sz="1850" dirty="0"/>
           </a:p>
@@ -13591,17 +13821,17 @@
         </p:nvSpPr>
         <p:spPr>
           <a:xfrm>
-            <a:off x="8211312" y="1920240"/>
-            <a:ext cx="2734056" cy="1463040"/>
-          </a:xfrm>
-          <a:prstGeom prst="rect">
-            <a:avLst/>
-          </a:prstGeom>
-          <a:noFill/>
-          <a:ln/>
-        </p:spPr>
-        <p:txBody>
-          <a:bodyPr wrap="square" lIns="0" tIns="0" rIns="0" bIns="0" rtlCol="0" anchor="t">
+            <a:off x="8211312" y="1892808"/>
+            <a:ext cx="2734056" cy="1536192"/>
+          </a:xfrm>
+          <a:prstGeom prst="rect">
+            <a:avLst/>
+          </a:prstGeom>
+          <a:noFill/>
+          <a:ln/>
+        </p:spPr>
+        <p:txBody>
+          <a:bodyPr wrap="square" lIns="254" tIns="254" rIns="254" bIns="254" rtlCol="0" anchor="t">
             <a:normAutofit/>
           </a:bodyPr>
           <a:lstStyle/>
@@ -13610,7 +13840,7 @@
               <a:buNone/>
             </a:pPr>
             <a:r>
-              <a:rPr lang="en-US" sz="1550" dirty="0">
+              <a:rPr lang="en-US" sz="1320" dirty="0">
                 <a:solidFill>
                   <a:srgbClr val="17364A"/>
                 </a:solidFill>
@@ -13618,9 +13848,9 @@
                 <a:ea typeface="Aptos" pitchFamily="34" charset="-122"/>
                 <a:cs typeface="Aptos" pitchFamily="34" charset="-120"/>
               </a:rPr>
-              <a:t>Use linked tools when your department needs a structured worksheet, template, checklist, review process, or documentation artifact.</a:t>
-            </a:r>
-            <a:endParaRPr lang="en-US" sz="1550" dirty="0"/>
+              <a:t>Use linked tools when your department needs a structured worksheet, template, checklist, review process, or.</a:t>
+            </a:r>
+            <a:endParaRPr lang="en-US" sz="1320" dirty="0"/>
           </a:p>
         </p:txBody>
       </p:sp>
@@ -13708,13 +13938,16 @@
           <a:ln/>
         </p:spPr>
         <p:txBody>
-          <a:bodyPr wrap="square" lIns="254" tIns="254" rIns="254" bIns="254" rtlCol="0" anchor="t">
+          <a:bodyPr wrap="square" lIns="508" tIns="508" rIns="508" bIns="508" rtlCol="0" anchor="t">
             <a:normAutofit/>
           </a:bodyPr>
           <a:lstStyle/>
           <a:p>
-            <a:r>
-              <a:rPr lang="en-US" sz="1380" dirty="0">
+            <a:pPr indent="0" marL="0">
+              <a:buNone/>
+            </a:pPr>
+            <a:r>
+              <a:rPr lang="en-US" sz="1220" dirty="0">
                 <a:solidFill>
                   <a:srgbClr val="17364A"/>
                 </a:solidFill>
@@ -13724,11 +13957,14 @@
               </a:rPr>
               <a:t>Use a tool when no comparable local process exists.</a:t>
             </a:r>
-            <a:endParaRPr lang="en-US" sz="1380" dirty="0"/>
-          </a:p>
-          <a:p>
-            <a:r>
-              <a:rPr lang="en-US" sz="1380" dirty="0">
+            <a:endParaRPr lang="en-US" sz="1220" dirty="0"/>
+          </a:p>
+          <a:p>
+            <a:pPr indent="0" marL="0">
+              <a:buNone/>
+            </a:pPr>
+            <a:r>
+              <a:rPr lang="en-US" sz="1220" dirty="0">
                 <a:solidFill>
                   <a:srgbClr val="17364A"/>
                 </a:solidFill>
@@ -13736,13 +13972,16 @@
                 <a:ea typeface="Aptos" pitchFamily="34" charset="-122"/>
                 <a:cs typeface="Aptos" pitchFamily="34" charset="-120"/>
               </a:rPr>
-              <a:t>Adapt existing department templates when they already fit the purpose.</a:t>
-            </a:r>
-            <a:endParaRPr lang="en-US" sz="1380" dirty="0"/>
-          </a:p>
-          <a:p>
-            <a:r>
-              <a:rPr lang="en-US" sz="1380" dirty="0">
+              <a:t>Adapt existing department templates when they already fit the.</a:t>
+            </a:r>
+            <a:endParaRPr lang="en-US" sz="1220" dirty="0"/>
+          </a:p>
+          <a:p>
+            <a:pPr indent="0" marL="0">
+              <a:buNone/>
+            </a:pPr>
+            <a:r>
+              <a:rPr lang="en-US" sz="1220" dirty="0">
                 <a:solidFill>
                   <a:srgbClr val="17364A"/>
                 </a:solidFill>
@@ -13752,7 +13991,7 @@
               </a:rPr>
               <a:t>Save the completed artifact as evidence of the decision.</a:t>
             </a:r>
-            <a:endParaRPr lang="en-US" sz="1380" dirty="0"/>
+            <a:endParaRPr lang="en-US" sz="1220" dirty="0"/>
           </a:p>
         </p:txBody>
       </p:sp>
@@ -14053,49 +14292,58 @@
           <a:ln/>
         </p:spPr>
         <p:txBody>
-          <a:bodyPr wrap="square" lIns="635" tIns="635" rIns="635" bIns="635" rtlCol="0" anchor="t">
+          <a:bodyPr wrap="square" lIns="1016" tIns="1016" rIns="1016" bIns="1016" rtlCol="0" anchor="t">
             <a:normAutofit/>
           </a:bodyPr>
           <a:lstStyle/>
           <a:p>
+            <a:pPr indent="0" marL="0">
+              <a:buNone/>
+            </a:pPr>
             <a:r>
               <a:rPr lang="en-US" sz="2100" dirty="0">
                 <a:solidFill>
-                  <a:srgbClr val="17364A"/>
-                </a:solidFill>
-                <a:latin typeface="Aptos" pitchFamily="34" charset="0"/>
-                <a:ea typeface="Aptos" pitchFamily="34" charset="-122"/>
-                <a:cs typeface="Aptos" pitchFamily="34" charset="-120"/>
-              </a:rPr>
-              <a:t>Define AI for Social Good in public health terms.</a:t>
+                  <a:srgbClr val="003A63"/>
+                </a:solidFill>
+                <a:latin typeface="Aptos" pitchFamily="34" charset="0"/>
+                <a:ea typeface="Aptos" pitchFamily="34" charset="-122"/>
+                <a:cs typeface="Aptos" pitchFamily="34" charset="-120"/>
+              </a:rPr>
+              <a:t>• Define AI for Social Good in public health terms.</a:t>
             </a:r>
             <a:endParaRPr lang="en-US" sz="2100" dirty="0"/>
           </a:p>
           <a:p>
+            <a:pPr indent="0" marL="0">
+              <a:buNone/>
+            </a:pPr>
             <a:r>
               <a:rPr lang="en-US" sz="2100" dirty="0">
                 <a:solidFill>
-                  <a:srgbClr val="17364A"/>
-                </a:solidFill>
-                <a:latin typeface="Aptos" pitchFamily="34" charset="0"/>
-                <a:ea typeface="Aptos" pitchFamily="34" charset="-122"/>
-                <a:cs typeface="Aptos" pitchFamily="34" charset="-120"/>
-              </a:rPr>
-              <a:t>Distinguish public benefit from novelty, efficiency, or automation alone.</a:t>
+                  <a:srgbClr val="003A63"/>
+                </a:solidFill>
+                <a:latin typeface="Aptos" pitchFamily="34" charset="0"/>
+                <a:ea typeface="Aptos" pitchFamily="34" charset="-122"/>
+                <a:cs typeface="Aptos" pitchFamily="34" charset="-120"/>
+              </a:rPr>
+              <a:t>• Distinguish public benefit from novelty, efficiency, or automation alone.</a:t>
             </a:r>
             <a:endParaRPr lang="en-US" sz="2100" dirty="0"/>
           </a:p>
           <a:p>
+            <a:pPr indent="0" marL="0">
+              <a:buNone/>
+            </a:pPr>
             <a:r>
               <a:rPr lang="en-US" sz="2100" dirty="0">
                 <a:solidFill>
-                  <a:srgbClr val="17364A"/>
-                </a:solidFill>
-                <a:latin typeface="Aptos" pitchFamily="34" charset="0"/>
-                <a:ea typeface="Aptos" pitchFamily="34" charset="-122"/>
-                <a:cs typeface="Aptos" pitchFamily="34" charset="-120"/>
-              </a:rPr>
-              <a:t>Identify how AI can support public health values, including equity, transparency, accessibility,.</a:t>
+                  <a:srgbClr val="003A63"/>
+                </a:solidFill>
+                <a:latin typeface="Aptos" pitchFamily="34" charset="0"/>
+                <a:ea typeface="Aptos" pitchFamily="34" charset="-122"/>
+                <a:cs typeface="Aptos" pitchFamily="34" charset="-120"/>
+              </a:rPr>
+              <a:t>• Identify how AI can support public health values, including equity, transparency,.</a:t>
             </a:r>
             <a:endParaRPr lang="en-US" sz="2100" dirty="0"/>
           </a:p>
@@ -14175,17 +14423,17 @@
         </p:nvSpPr>
         <p:spPr>
           <a:xfrm>
-            <a:off x="7799832" y="1828800"/>
-            <a:ext cx="3145536" cy="685800"/>
-          </a:xfrm>
-          <a:prstGeom prst="rect">
-            <a:avLst/>
-          </a:prstGeom>
-          <a:noFill/>
-          <a:ln/>
-        </p:spPr>
-        <p:txBody>
-          <a:bodyPr wrap="square" lIns="0" tIns="0" rIns="0" bIns="0" rtlCol="0" anchor="t">
+            <a:off x="7799832" y="1801368"/>
+            <a:ext cx="3145536" cy="758952"/>
+          </a:xfrm>
+          <a:prstGeom prst="rect">
+            <a:avLst/>
+          </a:prstGeom>
+          <a:noFill/>
+          <a:ln/>
+        </p:spPr>
+        <p:txBody>
+          <a:bodyPr wrap="square" lIns="254" tIns="254" rIns="254" bIns="254" rtlCol="0" anchor="t">
             <a:normAutofit/>
           </a:bodyPr>
           <a:lstStyle/>
@@ -14194,7 +14442,7 @@
               <a:buNone/>
             </a:pPr>
             <a:r>
-              <a:rPr lang="en-US" sz="1550" dirty="0">
+              <a:rPr lang="en-US" sz="1320" dirty="0">
                 <a:solidFill>
                   <a:srgbClr val="17364A"/>
                 </a:solidFill>
@@ -14204,7 +14452,7 @@
               </a:rPr>
               <a:t>Define AI for Social Good in public health terms.</a:t>
             </a:r>
-            <a:endParaRPr lang="en-US" sz="1550" dirty="0"/>
+            <a:endParaRPr lang="en-US" sz="1320" dirty="0"/>
           </a:p>
         </p:txBody>
       </p:sp>
@@ -14292,13 +14540,16 @@
           <a:ln/>
         </p:spPr>
         <p:txBody>
-          <a:bodyPr wrap="square" lIns="254" tIns="254" rIns="254" bIns="254" rtlCol="0" anchor="t">
+          <a:bodyPr wrap="square" lIns="508" tIns="508" rIns="508" bIns="508" rtlCol="0" anchor="t">
             <a:normAutofit/>
           </a:bodyPr>
           <a:lstStyle/>
           <a:p>
-            <a:r>
-              <a:rPr lang="en-US" sz="1380" dirty="0">
+            <a:pPr indent="0" marL="0">
+              <a:buNone/>
+            </a:pPr>
+            <a:r>
+              <a:rPr lang="en-US" sz="1220" dirty="0">
                 <a:solidFill>
                   <a:srgbClr val="17364A"/>
                 </a:solidFill>
@@ -14306,13 +14557,16 @@
                 <a:ea typeface="Aptos" pitchFamily="34" charset="-122"/>
                 <a:cs typeface="Aptos" pitchFamily="34" charset="-120"/>
               </a:rPr>
-              <a:t>Identify how AI can support public health values, including equity, transparency,.</a:t>
-            </a:r>
-            <a:endParaRPr lang="en-US" sz="1380" dirty="0"/>
-          </a:p>
-          <a:p>
-            <a:r>
-              <a:rPr lang="en-US" sz="1380" dirty="0">
+              <a:t>Identify how AI can support public health values, including.</a:t>
+            </a:r>
+            <a:endParaRPr lang="en-US" sz="1220" dirty="0"/>
+          </a:p>
+          <a:p>
+            <a:pPr indent="0" marL="0">
+              <a:buNone/>
+            </a:pPr>
+            <a:r>
+              <a:rPr lang="en-US" sz="1220" dirty="0">
                 <a:solidFill>
                   <a:srgbClr val="17364A"/>
                 </a:solidFill>
@@ -14320,13 +14574,16 @@
                 <a:ea typeface="Aptos" pitchFamily="34" charset="-122"/>
                 <a:cs typeface="Aptos" pitchFamily="34" charset="-120"/>
               </a:rPr>
-              <a:t>Assess potential harms, including exclusion, surveillance burden, stigma, resource.</a:t>
-            </a:r>
-            <a:endParaRPr lang="en-US" sz="1380" dirty="0"/>
-          </a:p>
-          <a:p>
-            <a:r>
-              <a:rPr lang="en-US" sz="1380" dirty="0">
+              <a:t>Assess potential harms, including exclusion, surveillance burden,.</a:t>
+            </a:r>
+            <a:endParaRPr lang="en-US" sz="1220" dirty="0"/>
+          </a:p>
+          <a:p>
+            <a:pPr indent="0" marL="0">
+              <a:buNone/>
+            </a:pPr>
+            <a:r>
+              <a:rPr lang="en-US" sz="1220" dirty="0">
                 <a:solidFill>
                   <a:srgbClr val="17364A"/>
                 </a:solidFill>
@@ -14336,7 +14593,7 @@
               </a:rPr>
               <a:t>Design community-centered safeguards for socially beneficial AI use.</a:t>
             </a:r>
-            <a:endParaRPr lang="en-US" sz="1380" dirty="0"/>
+            <a:endParaRPr lang="en-US" sz="1220" dirty="0"/>
           </a:p>
         </p:txBody>
       </p:sp>
@@ -14414,17 +14671,17 @@
         </p:nvSpPr>
         <p:spPr>
           <a:xfrm>
-            <a:off x="7799832" y="5001768"/>
-            <a:ext cx="3145536" cy="502920"/>
-          </a:xfrm>
-          <a:prstGeom prst="rect">
-            <a:avLst/>
-          </a:prstGeom>
-          <a:noFill/>
-          <a:ln/>
-        </p:spPr>
-        <p:txBody>
-          <a:bodyPr wrap="square" lIns="0" tIns="0" rIns="0" bIns="0" rtlCol="0" anchor="t">
+            <a:off x="7799832" y="4974336"/>
+            <a:ext cx="3145536" cy="576072"/>
+          </a:xfrm>
+          <a:prstGeom prst="rect">
+            <a:avLst/>
+          </a:prstGeom>
+          <a:noFill/>
+          <a:ln/>
+        </p:spPr>
+        <p:txBody>
+          <a:bodyPr wrap="square" lIns="254" tIns="254" rIns="254" bIns="254" rtlCol="0" anchor="t">
             <a:normAutofit/>
           </a:bodyPr>
           <a:lstStyle/>
@@ -14433,7 +14690,7 @@
               <a:buNone/>
             </a:pPr>
             <a:r>
-              <a:rPr lang="en-US" sz="1550" dirty="0">
+              <a:rPr lang="en-US" sz="1320" dirty="0">
                 <a:solidFill>
                   <a:srgbClr val="17364A"/>
                 </a:solidFill>
@@ -14441,9 +14698,9 @@
                 <a:ea typeface="Aptos" pitchFamily="34" charset="-122"/>
                 <a:cs typeface="Aptos" pitchFamily="34" charset="-120"/>
               </a:rPr>
-              <a:t>Use the assignment to test whether you can explain the concept, apply it to a realistic public health situation, and identify what would need review before the work moves forward.</a:t>
-            </a:r>
-            <a:endParaRPr lang="en-US" sz="1550" dirty="0"/>
+              <a:t>Use the assignment to test whether you can explain the concept, apply it to a realistic public health situation, and.</a:t>
+            </a:r>
+            <a:endParaRPr lang="en-US" sz="1320" dirty="0"/>
           </a:p>
         </p:txBody>
       </p:sp>
@@ -14744,21 +15001,24 @@
           <a:ln/>
         </p:spPr>
         <p:txBody>
-          <a:bodyPr wrap="square" lIns="635" tIns="635" rIns="635" bIns="635" rtlCol="0" anchor="t">
+          <a:bodyPr wrap="square" lIns="1016" tIns="1016" rIns="1016" bIns="1016" rtlCol="0" anchor="t">
             <a:normAutofit/>
           </a:bodyPr>
           <a:lstStyle/>
           <a:p>
+            <a:pPr indent="0" marL="0">
+              <a:buNone/>
+            </a:pPr>
             <a:r>
               <a:rPr lang="en-US" sz="2100" dirty="0">
                 <a:solidFill>
-                  <a:srgbClr val="17364A"/>
-                </a:solidFill>
-                <a:latin typeface="Aptos" pitchFamily="34" charset="0"/>
-                <a:ea typeface="Aptos" pitchFamily="34" charset="-122"/>
-                <a:cs typeface="Aptos" pitchFamily="34" charset="-120"/>
-              </a:rPr>
-              <a:t>Produce an AI for Social Good review brief for a public health use case.</a:t>
+                  <a:srgbClr val="003A63"/>
+                </a:solidFill>
+                <a:latin typeface="Aptos" pitchFamily="34" charset="0"/>
+                <a:ea typeface="Aptos" pitchFamily="34" charset="-122"/>
+                <a:cs typeface="Aptos" pitchFamily="34" charset="-120"/>
+              </a:rPr>
+              <a:t>• Produce an AI for Social Good review brief for a public health use case.</a:t>
             </a:r>
             <a:endParaRPr lang="en-US" sz="2100" dirty="0"/>
           </a:p>
@@ -14838,17 +15098,17 @@
         </p:nvSpPr>
         <p:spPr>
           <a:xfrm>
-            <a:off x="7799832" y="1828800"/>
-            <a:ext cx="3145536" cy="685800"/>
-          </a:xfrm>
-          <a:prstGeom prst="rect">
-            <a:avLst/>
-          </a:prstGeom>
-          <a:noFill/>
-          <a:ln/>
-        </p:spPr>
-        <p:txBody>
-          <a:bodyPr wrap="square" lIns="0" tIns="0" rIns="0" bIns="0" rtlCol="0" anchor="t">
+            <a:off x="7799832" y="1801368"/>
+            <a:ext cx="3145536" cy="758952"/>
+          </a:xfrm>
+          <a:prstGeom prst="rect">
+            <a:avLst/>
+          </a:prstGeom>
+          <a:noFill/>
+          <a:ln/>
+        </p:spPr>
+        <p:txBody>
+          <a:bodyPr wrap="square" lIns="254" tIns="254" rIns="254" bIns="254" rtlCol="0" anchor="t">
             <a:normAutofit/>
           </a:bodyPr>
           <a:lstStyle/>
@@ -14857,7 +15117,7 @@
               <a:buNone/>
             </a:pPr>
             <a:r>
-              <a:rPr lang="en-US" sz="1550" dirty="0">
+              <a:rPr lang="en-US" sz="1320" dirty="0">
                 <a:solidFill>
                   <a:srgbClr val="17364A"/>
                 </a:solidFill>
@@ -14867,7 +15127,7 @@
               </a:rPr>
               <a:t>Produce an AI for Social Good review brief for a public health use case.</a:t>
             </a:r>
-            <a:endParaRPr lang="en-US" sz="1550" dirty="0"/>
+            <a:endParaRPr lang="en-US" sz="1320" dirty="0"/>
           </a:p>
         </p:txBody>
       </p:sp>
@@ -14955,13 +15215,16 @@
           <a:ln/>
         </p:spPr>
         <p:txBody>
-          <a:bodyPr wrap="square" lIns="254" tIns="254" rIns="254" bIns="254" rtlCol="0" anchor="t">
+          <a:bodyPr wrap="square" lIns="508" tIns="508" rIns="508" bIns="508" rtlCol="0" anchor="t">
             <a:normAutofit/>
           </a:bodyPr>
           <a:lstStyle/>
           <a:p>
-            <a:r>
-              <a:rPr lang="en-US" sz="1380" dirty="0">
+            <a:pPr indent="0" marL="0">
+              <a:buNone/>
+            </a:pPr>
+            <a:r>
+              <a:rPr lang="en-US" sz="1220" dirty="0">
                 <a:solidFill>
                   <a:srgbClr val="17364A"/>
                 </a:solidFill>
@@ -14969,9 +15232,9 @@
                 <a:ea typeface="Aptos" pitchFamily="34" charset="-122"/>
                 <a:cs typeface="Aptos" pitchFamily="34" charset="-120"/>
               </a:rPr>
-              <a:t>Produce an AI for Social Good review brief for a public health use case.</a:t>
-            </a:r>
-            <a:endParaRPr lang="en-US" sz="1380" dirty="0"/>
+              <a:t>Produce an AI for Social Good review brief for a public health use.</a:t>
+            </a:r>
+            <a:endParaRPr lang="en-US" sz="1220" dirty="0"/>
           </a:p>
         </p:txBody>
       </p:sp>
@@ -15049,17 +15312,17 @@
         </p:nvSpPr>
         <p:spPr>
           <a:xfrm>
-            <a:off x="7799832" y="5001768"/>
-            <a:ext cx="3145536" cy="502920"/>
-          </a:xfrm>
-          <a:prstGeom prst="rect">
-            <a:avLst/>
-          </a:prstGeom>
-          <a:noFill/>
-          <a:ln/>
-        </p:spPr>
-        <p:txBody>
-          <a:bodyPr wrap="square" lIns="0" tIns="0" rIns="0" bIns="0" rtlCol="0" anchor="t">
+            <a:off x="7799832" y="4974336"/>
+            <a:ext cx="3145536" cy="576072"/>
+          </a:xfrm>
+          <a:prstGeom prst="rect">
+            <a:avLst/>
+          </a:prstGeom>
+          <a:noFill/>
+          <a:ln/>
+        </p:spPr>
+        <p:txBody>
+          <a:bodyPr wrap="square" lIns="254" tIns="254" rIns="254" bIns="254" rtlCol="0" anchor="t">
             <a:normAutofit/>
           </a:bodyPr>
           <a:lstStyle/>
@@ -15068,7 +15331,7 @@
               <a:buNone/>
             </a:pPr>
             <a:r>
-              <a:rPr lang="en-US" sz="1550" dirty="0">
+              <a:rPr lang="en-US" sz="1320" dirty="0">
                 <a:solidFill>
                   <a:srgbClr val="17364A"/>
                 </a:solidFill>
@@ -15076,9 +15339,9 @@
                 <a:ea typeface="Aptos" pitchFamily="34" charset="-122"/>
                 <a:cs typeface="Aptos" pitchFamily="34" charset="-120"/>
               </a:rPr>
-              <a:t>Use the assignment to test whether you can explain the concept, apply it to a realistic public health situation, and identify what would need review before the work moves forward.</a:t>
-            </a:r>
-            <a:endParaRPr lang="en-US" sz="1550" dirty="0"/>
+              <a:t>Use the assignment to test whether you can explain the concept, apply it to a realistic public health situation, and.</a:t>
+            </a:r>
+            <a:endParaRPr lang="en-US" sz="1320" dirty="0"/>
           </a:p>
         </p:txBody>
       </p:sp>
@@ -15379,49 +15642,58 @@
           <a:ln/>
         </p:spPr>
         <p:txBody>
-          <a:bodyPr wrap="square" lIns="635" tIns="635" rIns="635" bIns="635" rtlCol="0" anchor="t">
+          <a:bodyPr wrap="square" lIns="1016" tIns="1016" rIns="1016" bIns="1016" rtlCol="0" anchor="t">
             <a:normAutofit/>
           </a:bodyPr>
           <a:lstStyle/>
           <a:p>
+            <a:pPr indent="0" marL="0">
+              <a:buNone/>
+            </a:pPr>
             <a:r>
               <a:rPr lang="en-US" sz="2100" dirty="0">
                 <a:solidFill>
-                  <a:srgbClr val="17364A"/>
-                </a:solidFill>
-                <a:latin typeface="Aptos" pitchFamily="34" charset="0"/>
-                <a:ea typeface="Aptos" pitchFamily="34" charset="-122"/>
-                <a:cs typeface="Aptos" pitchFamily="34" charset="-120"/>
-              </a:rPr>
-              <a:t>AI for Social Good refers to the intentional use of artificial intelligence to improve public.</a:t>
+                  <a:srgbClr val="003A63"/>
+                </a:solidFill>
+                <a:latin typeface="Aptos" pitchFamily="34" charset="0"/>
+                <a:ea typeface="Aptos" pitchFamily="34" charset="-122"/>
+                <a:cs typeface="Aptos" pitchFamily="34" charset="-120"/>
+              </a:rPr>
+              <a:t>• AI for Social Good refers to the intentional use of artificial intelligence to improve public.</a:t>
             </a:r>
             <a:endParaRPr lang="en-US" sz="2100" dirty="0"/>
           </a:p>
           <a:p>
+            <a:pPr indent="0" marL="0">
+              <a:buNone/>
+            </a:pPr>
             <a:r>
               <a:rPr lang="en-US" sz="2100" dirty="0">
                 <a:solidFill>
-                  <a:srgbClr val="17364A"/>
-                </a:solidFill>
-                <a:latin typeface="Aptos" pitchFamily="34" charset="0"/>
-                <a:ea typeface="Aptos" pitchFamily="34" charset="-122"/>
-                <a:cs typeface="Aptos" pitchFamily="34" charset="-120"/>
-              </a:rPr>
-              <a:t>For public health, this concept is not abstract.</a:t>
+                  <a:srgbClr val="003A63"/>
+                </a:solidFill>
+                <a:latin typeface="Aptos" pitchFamily="34" charset="0"/>
+                <a:ea typeface="Aptos" pitchFamily="34" charset="-122"/>
+                <a:cs typeface="Aptos" pitchFamily="34" charset="-120"/>
+              </a:rPr>
+              <a:t>• For public health, this concept is not abstract.</a:t>
             </a:r>
             <a:endParaRPr lang="en-US" sz="2100" dirty="0"/>
           </a:p>
           <a:p>
+            <a:pPr indent="0" marL="0">
+              <a:buNone/>
+            </a:pPr>
             <a:r>
               <a:rPr lang="en-US" sz="2100" dirty="0">
                 <a:solidFill>
-                  <a:srgbClr val="17364A"/>
-                </a:solidFill>
-                <a:latin typeface="Aptos" pitchFamily="34" charset="0"/>
-                <a:ea typeface="Aptos" pitchFamily="34" charset="-122"/>
-                <a:cs typeface="Aptos" pitchFamily="34" charset="-120"/>
-              </a:rPr>
-              <a:t>Public health agencies already work to prevent disease, protect communities, improve access, and reduce.</a:t>
+                  <a:srgbClr val="003A63"/>
+                </a:solidFill>
+                <a:latin typeface="Aptos" pitchFamily="34" charset="0"/>
+                <a:ea typeface="Aptos" pitchFamily="34" charset="-122"/>
+                <a:cs typeface="Aptos" pitchFamily="34" charset="-120"/>
+              </a:rPr>
+              <a:t>• Public health agencies already work to prevent disease, protect communities, improve access,.</a:t>
             </a:r>
             <a:endParaRPr lang="en-US" sz="2100" dirty="0"/>
           </a:p>
@@ -15501,17 +15773,17 @@
         </p:nvSpPr>
         <p:spPr>
           <a:xfrm>
-            <a:off x="7799832" y="1828800"/>
-            <a:ext cx="3145536" cy="685800"/>
-          </a:xfrm>
-          <a:prstGeom prst="rect">
-            <a:avLst/>
-          </a:prstGeom>
-          <a:noFill/>
-          <a:ln/>
-        </p:spPr>
-        <p:txBody>
-          <a:bodyPr wrap="square" lIns="0" tIns="0" rIns="0" bIns="0" rtlCol="0" anchor="t">
+            <a:off x="7799832" y="1801368"/>
+            <a:ext cx="3145536" cy="758952"/>
+          </a:xfrm>
+          <a:prstGeom prst="rect">
+            <a:avLst/>
+          </a:prstGeom>
+          <a:noFill/>
+          <a:ln/>
+        </p:spPr>
+        <p:txBody>
+          <a:bodyPr wrap="square" lIns="254" tIns="254" rIns="254" bIns="254" rtlCol="0" anchor="t">
             <a:normAutofit/>
           </a:bodyPr>
           <a:lstStyle/>
@@ -15520,7 +15792,7 @@
               <a:buNone/>
             </a:pPr>
             <a:r>
-              <a:rPr lang="en-US" sz="1550" dirty="0">
+              <a:rPr lang="en-US" sz="1320" dirty="0">
                 <a:solidFill>
                   <a:srgbClr val="17364A"/>
                 </a:solidFill>
@@ -15530,7 +15802,7 @@
               </a:rPr>
               <a:t>AI for Social Good refers to the intentional use of artificial intelligence to improve public.</a:t>
             </a:r>
-            <a:endParaRPr lang="en-US" sz="1550" dirty="0"/>
+            <a:endParaRPr lang="en-US" sz="1320" dirty="0"/>
           </a:p>
         </p:txBody>
       </p:sp>
@@ -15618,13 +15890,16 @@
           <a:ln/>
         </p:spPr>
         <p:txBody>
-          <a:bodyPr wrap="square" lIns="254" tIns="254" rIns="254" bIns="254" rtlCol="0" anchor="t">
+          <a:bodyPr wrap="square" lIns="508" tIns="508" rIns="508" bIns="508" rtlCol="0" anchor="t">
             <a:normAutofit/>
           </a:bodyPr>
           <a:lstStyle/>
           <a:p>
-            <a:r>
-              <a:rPr lang="en-US" sz="1380" dirty="0">
+            <a:pPr indent="0" marL="0">
+              <a:buNone/>
+            </a:pPr>
+            <a:r>
+              <a:rPr lang="en-US" sz="1220" dirty="0">
                 <a:solidFill>
                   <a:srgbClr val="17364A"/>
                 </a:solidFill>
@@ -15632,13 +15907,16 @@
                 <a:ea typeface="Aptos" pitchFamily="34" charset="-122"/>
                 <a:cs typeface="Aptos" pitchFamily="34" charset="-120"/>
               </a:rPr>
-              <a:t>AI for Social Good refers to the intentional use of artificial intelligence to improve.</a:t>
-            </a:r>
-            <a:endParaRPr lang="en-US" sz="1380" dirty="0"/>
-          </a:p>
-          <a:p>
-            <a:r>
-              <a:rPr lang="en-US" sz="1380" dirty="0">
+              <a:t>AI for Social Good refers to the intentional use of artificial.</a:t>
+            </a:r>
+            <a:endParaRPr lang="en-US" sz="1220" dirty="0"/>
+          </a:p>
+          <a:p>
+            <a:pPr indent="0" marL="0">
+              <a:buNone/>
+            </a:pPr>
+            <a:r>
+              <a:rPr lang="en-US" sz="1220" dirty="0">
                 <a:solidFill>
                   <a:srgbClr val="17364A"/>
                 </a:solidFill>
@@ -15646,13 +15924,16 @@
                 <a:ea typeface="Aptos" pitchFamily="34" charset="-122"/>
                 <a:cs typeface="Aptos" pitchFamily="34" charset="-120"/>
               </a:rPr>
-              <a:t>Public health agencies already work to prevent disease, protect communities, improve.</a:t>
-            </a:r>
-            <a:endParaRPr lang="en-US" sz="1380" dirty="0"/>
-          </a:p>
-          <a:p>
-            <a:r>
-              <a:rPr lang="en-US" sz="1380" dirty="0">
+              <a:t>Public health agencies already work to prevent disease, protect.</a:t>
+            </a:r>
+            <a:endParaRPr lang="en-US" sz="1220" dirty="0"/>
+          </a:p>
+          <a:p>
+            <a:pPr indent="0" marL="0">
+              <a:buNone/>
+            </a:pPr>
+            <a:r>
+              <a:rPr lang="en-US" sz="1220" dirty="0">
                 <a:solidFill>
                   <a:srgbClr val="17364A"/>
                 </a:solidFill>
@@ -15660,9 +15941,9 @@
                 <a:ea typeface="Aptos" pitchFamily="34" charset="-122"/>
                 <a:cs typeface="Aptos" pitchFamily="34" charset="-120"/>
               </a:rPr>
-              <a:t>AI for Social Good should therefore be judged by whether it advances public health values.</a:t>
-            </a:r>
-            <a:endParaRPr lang="en-US" sz="1380" dirty="0"/>
+              <a:t>AI for Social Good should therefore be judged by whether it.</a:t>
+            </a:r>
+            <a:endParaRPr lang="en-US" sz="1220" dirty="0"/>
           </a:p>
         </p:txBody>
       </p:sp>
@@ -15740,17 +16021,17 @@
         </p:nvSpPr>
         <p:spPr>
           <a:xfrm>
-            <a:off x="7799832" y="5001768"/>
-            <a:ext cx="3145536" cy="502920"/>
-          </a:xfrm>
-          <a:prstGeom prst="rect">
-            <a:avLst/>
-          </a:prstGeom>
-          <a:noFill/>
-          <a:ln/>
-        </p:spPr>
-        <p:txBody>
-          <a:bodyPr wrap="square" lIns="0" tIns="0" rIns="0" bIns="0" rtlCol="0" anchor="t">
+            <a:off x="7799832" y="4974336"/>
+            <a:ext cx="3145536" cy="576072"/>
+          </a:xfrm>
+          <a:prstGeom prst="rect">
+            <a:avLst/>
+          </a:prstGeom>
+          <a:noFill/>
+          <a:ln/>
+        </p:spPr>
+        <p:txBody>
+          <a:bodyPr wrap="square" lIns="254" tIns="254" rIns="254" bIns="254" rtlCol="0" anchor="t">
             <a:normAutofit/>
           </a:bodyPr>
           <a:lstStyle/>
@@ -15759,7 +16040,7 @@
               <a:buNone/>
             </a:pPr>
             <a:r>
-              <a:rPr lang="en-US" sz="1550" dirty="0">
+              <a:rPr lang="en-US" sz="1320" dirty="0">
                 <a:solidFill>
                   <a:srgbClr val="17364A"/>
                 </a:solidFill>
@@ -15767,9 +16048,9 @@
                 <a:ea typeface="Aptos" pitchFamily="34" charset="-122"/>
                 <a:cs typeface="Aptos" pitchFamily="34" charset="-120"/>
               </a:rPr>
-              <a:t>Connect the concept to public health purpose, responsible use, required safeguards, documentation, and the next action a department should take.</a:t>
-            </a:r>
-            <a:endParaRPr lang="en-US" sz="1550" dirty="0"/>
+              <a:t>Connect the concept to public health purpose, responsible use, required safeguards, documentation, and the next action a.</a:t>
+            </a:r>
+            <a:endParaRPr lang="en-US" sz="1320" dirty="0"/>
           </a:p>
         </p:txBody>
       </p:sp>
@@ -16070,49 +16351,58 @@
           <a:ln/>
         </p:spPr>
         <p:txBody>
-          <a:bodyPr wrap="square" lIns="635" tIns="635" rIns="635" bIns="635" rtlCol="0" anchor="t">
+          <a:bodyPr wrap="square" lIns="1016" tIns="1016" rIns="1016" bIns="1016" rtlCol="0" anchor="t">
             <a:normAutofit/>
           </a:bodyPr>
           <a:lstStyle/>
           <a:p>
+            <a:pPr indent="0" marL="0">
+              <a:buNone/>
+            </a:pPr>
             <a:r>
               <a:rPr lang="en-US" sz="2100" dirty="0">
                 <a:solidFill>
-                  <a:srgbClr val="17364A"/>
-                </a:solidFill>
-                <a:latin typeface="Aptos" pitchFamily="34" charset="0"/>
-                <a:ea typeface="Aptos" pitchFamily="34" charset="-122"/>
-                <a:cs typeface="Aptos" pitchFamily="34" charset="-120"/>
-              </a:rPr>
-              <a:t>Public health is uniquely positioned to use AI for social good because its mission is population.</a:t>
+                  <a:srgbClr val="003A63"/>
+                </a:solidFill>
+                <a:latin typeface="Aptos" pitchFamily="34" charset="0"/>
+                <a:ea typeface="Aptos" pitchFamily="34" charset="-122"/>
+                <a:cs typeface="Aptos" pitchFamily="34" charset="-120"/>
+              </a:rPr>
+              <a:t>• Public health is uniquely positioned to use AI for social good because its mission is.</a:t>
             </a:r>
             <a:endParaRPr lang="en-US" sz="2100" dirty="0"/>
           </a:p>
           <a:p>
+            <a:pPr indent="0" marL="0">
+              <a:buNone/>
+            </a:pPr>
             <a:r>
               <a:rPr lang="en-US" sz="2100" dirty="0">
                 <a:solidFill>
-                  <a:srgbClr val="17364A"/>
-                </a:solidFill>
-                <a:latin typeface="Aptos" pitchFamily="34" charset="0"/>
-                <a:ea typeface="Aptos" pitchFamily="34" charset="-122"/>
-                <a:cs typeface="Aptos" pitchFamily="34" charset="-120"/>
-              </a:rPr>
-              <a:t>AI can help agencies identify emerging needs, improve access to information, reduce administrative.</a:t>
+                  <a:srgbClr val="003A63"/>
+                </a:solidFill>
+                <a:latin typeface="Aptos" pitchFamily="34" charset="0"/>
+                <a:ea typeface="Aptos" pitchFamily="34" charset="-122"/>
+                <a:cs typeface="Aptos" pitchFamily="34" charset="-120"/>
+              </a:rPr>
+              <a:t>• AI can help agencies identify emerging needs, improve access to information, reduce.</a:t>
             </a:r>
             <a:endParaRPr lang="en-US" sz="2100" dirty="0"/>
           </a:p>
           <a:p>
+            <a:pPr indent="0" marL="0">
+              <a:buNone/>
+            </a:pPr>
             <a:r>
               <a:rPr lang="en-US" sz="2100" dirty="0">
                 <a:solidFill>
-                  <a:srgbClr val="17364A"/>
-                </a:solidFill>
-                <a:latin typeface="Aptos" pitchFamily="34" charset="0"/>
-                <a:ea typeface="Aptos" pitchFamily="34" charset="-122"/>
-                <a:cs typeface="Aptos" pitchFamily="34" charset="-120"/>
-              </a:rPr>
-              <a:t>These benefits are especially important when agencies face workforce shortages, fragmented systems, and.</a:t>
+                  <a:srgbClr val="003A63"/>
+                </a:solidFill>
+                <a:latin typeface="Aptos" pitchFamily="34" charset="0"/>
+                <a:ea typeface="Aptos" pitchFamily="34" charset="-122"/>
+                <a:cs typeface="Aptos" pitchFamily="34" charset="-120"/>
+              </a:rPr>
+              <a:t>• These benefits are especially important when agencies face workforce shortages, fragmented.</a:t>
             </a:r>
             <a:endParaRPr lang="en-US" sz="2100" dirty="0"/>
           </a:p>
@@ -16192,17 +16482,17 @@
         </p:nvSpPr>
         <p:spPr>
           <a:xfrm>
-            <a:off x="7799832" y="1828800"/>
-            <a:ext cx="3145536" cy="685800"/>
-          </a:xfrm>
-          <a:prstGeom prst="rect">
-            <a:avLst/>
-          </a:prstGeom>
-          <a:noFill/>
-          <a:ln/>
-        </p:spPr>
-        <p:txBody>
-          <a:bodyPr wrap="square" lIns="0" tIns="0" rIns="0" bIns="0" rtlCol="0" anchor="t">
+            <a:off x="7799832" y="1801368"/>
+            <a:ext cx="3145536" cy="758952"/>
+          </a:xfrm>
+          <a:prstGeom prst="rect">
+            <a:avLst/>
+          </a:prstGeom>
+          <a:noFill/>
+          <a:ln/>
+        </p:spPr>
+        <p:txBody>
+          <a:bodyPr wrap="square" lIns="254" tIns="254" rIns="254" bIns="254" rtlCol="0" anchor="t">
             <a:normAutofit/>
           </a:bodyPr>
           <a:lstStyle/>
@@ -16211,7 +16501,7 @@
               <a:buNone/>
             </a:pPr>
             <a:r>
-              <a:rPr lang="en-US" sz="1550" dirty="0">
+              <a:rPr lang="en-US" sz="1320" dirty="0">
                 <a:solidFill>
                   <a:srgbClr val="17364A"/>
                 </a:solidFill>
@@ -16221,7 +16511,7 @@
               </a:rPr>
               <a:t>Public health is uniquely positioned to use AI for social good because its mission is population.</a:t>
             </a:r>
-            <a:endParaRPr lang="en-US" sz="1550" dirty="0"/>
+            <a:endParaRPr lang="en-US" sz="1320" dirty="0"/>
           </a:p>
         </p:txBody>
       </p:sp>
@@ -16309,13 +16599,16 @@
           <a:ln/>
         </p:spPr>
         <p:txBody>
-          <a:bodyPr wrap="square" lIns="254" tIns="254" rIns="254" bIns="254" rtlCol="0" anchor="t">
+          <a:bodyPr wrap="square" lIns="508" tIns="508" rIns="508" bIns="508" rtlCol="0" anchor="t">
             <a:normAutofit/>
           </a:bodyPr>
           <a:lstStyle/>
           <a:p>
-            <a:r>
-              <a:rPr lang="en-US" sz="1380" dirty="0">
+            <a:pPr indent="0" marL="0">
+              <a:buNone/>
+            </a:pPr>
+            <a:r>
+              <a:rPr lang="en-US" sz="1220" dirty="0">
                 <a:solidFill>
                   <a:srgbClr val="17364A"/>
                 </a:solidFill>
@@ -16323,13 +16616,16 @@
                 <a:ea typeface="Aptos" pitchFamily="34" charset="-122"/>
                 <a:cs typeface="Aptos" pitchFamily="34" charset="-120"/>
               </a:rPr>
-              <a:t>Public health is uniquely positioned to use AI for social good because its mission is.</a:t>
-            </a:r>
-            <a:endParaRPr lang="en-US" sz="1380" dirty="0"/>
-          </a:p>
-          <a:p>
-            <a:r>
-              <a:rPr lang="en-US" sz="1380" dirty="0">
+              <a:t>Public health is uniquely positioned to use AI for social good.</a:t>
+            </a:r>
+            <a:endParaRPr lang="en-US" sz="1220" dirty="0"/>
+          </a:p>
+          <a:p>
+            <a:pPr indent="0" marL="0">
+              <a:buNone/>
+            </a:pPr>
+            <a:r>
+              <a:rPr lang="en-US" sz="1220" dirty="0">
                 <a:solidFill>
                   <a:srgbClr val="17364A"/>
                 </a:solidFill>
@@ -16337,13 +16633,16 @@
                 <a:ea typeface="Aptos" pitchFamily="34" charset="-122"/>
                 <a:cs typeface="Aptos" pitchFamily="34" charset="-120"/>
               </a:rPr>
-              <a:t>AI can help agencies identify emerging needs, improve access to information, reduce.</a:t>
-            </a:r>
-            <a:endParaRPr lang="en-US" sz="1380" dirty="0"/>
-          </a:p>
-          <a:p>
-            <a:r>
-              <a:rPr lang="en-US" sz="1380" dirty="0">
+              <a:t>AI can help agencies identify emerging needs, improve access to.</a:t>
+            </a:r>
+            <a:endParaRPr lang="en-US" sz="1220" dirty="0"/>
+          </a:p>
+          <a:p>
+            <a:pPr indent="0" marL="0">
+              <a:buNone/>
+            </a:pPr>
+            <a:r>
+              <a:rPr lang="en-US" sz="1220" dirty="0">
                 <a:solidFill>
                   <a:srgbClr val="17364A"/>
                 </a:solidFill>
@@ -16351,9 +16650,9 @@
                 <a:ea typeface="Aptos" pitchFamily="34" charset="-122"/>
                 <a:cs typeface="Aptos" pitchFamily="34" charset="-120"/>
               </a:rPr>
-              <a:t>These benefits are especially important when agencies face workforce shortages, fragmented.</a:t>
-            </a:r>
-            <a:endParaRPr lang="en-US" sz="1380" dirty="0"/>
+              <a:t>These benefits are especially important when agencies face.</a:t>
+            </a:r>
+            <a:endParaRPr lang="en-US" sz="1220" dirty="0"/>
           </a:p>
         </p:txBody>
       </p:sp>
@@ -16431,17 +16730,17 @@
         </p:nvSpPr>
         <p:spPr>
           <a:xfrm>
-            <a:off x="7799832" y="5001768"/>
-            <a:ext cx="3145536" cy="502920"/>
-          </a:xfrm>
-          <a:prstGeom prst="rect">
-            <a:avLst/>
-          </a:prstGeom>
-          <a:noFill/>
-          <a:ln/>
-        </p:spPr>
-        <p:txBody>
-          <a:bodyPr wrap="square" lIns="0" tIns="0" rIns="0" bIns="0" rtlCol="0" anchor="t">
+            <a:off x="7799832" y="4974336"/>
+            <a:ext cx="3145536" cy="576072"/>
+          </a:xfrm>
+          <a:prstGeom prst="rect">
+            <a:avLst/>
+          </a:prstGeom>
+          <a:noFill/>
+          <a:ln/>
+        </p:spPr>
+        <p:txBody>
+          <a:bodyPr wrap="square" lIns="254" tIns="254" rIns="254" bIns="254" rtlCol="0" anchor="t">
             <a:normAutofit/>
           </a:bodyPr>
           <a:lstStyle/>
@@ -16450,7 +16749,7 @@
               <a:buNone/>
             </a:pPr>
             <a:r>
-              <a:rPr lang="en-US" sz="1550" dirty="0">
+              <a:rPr lang="en-US" sz="1320" dirty="0">
                 <a:solidFill>
                   <a:srgbClr val="17364A"/>
                 </a:solidFill>
@@ -16458,9 +16757,9 @@
                 <a:ea typeface="Aptos" pitchFamily="34" charset="-122"/>
                 <a:cs typeface="Aptos" pitchFamily="34" charset="-120"/>
               </a:rPr>
-              <a:t>Connect the concept to public health purpose, responsible use, required safeguards, documentation, and the next action a department should take.</a:t>
-            </a:r>
-            <a:endParaRPr lang="en-US" sz="1550" dirty="0"/>
+              <a:t>Connect the concept to public health purpose, responsible use, required safeguards, documentation, and the next action a.</a:t>
+            </a:r>
+            <a:endParaRPr lang="en-US" sz="1320" dirty="0"/>
           </a:p>
         </p:txBody>
       </p:sp>
@@ -16761,49 +17060,58 @@
           <a:ln/>
         </p:spPr>
         <p:txBody>
-          <a:bodyPr wrap="square" lIns="635" tIns="635" rIns="635" bIns="635" rtlCol="0" anchor="t">
+          <a:bodyPr wrap="square" lIns="1016" tIns="1016" rIns="1016" bIns="1016" rtlCol="0" anchor="t">
             <a:normAutofit/>
           </a:bodyPr>
           <a:lstStyle/>
           <a:p>
+            <a:pPr indent="0" marL="0">
+              <a:buNone/>
+            </a:pPr>
             <a:r>
               <a:rPr lang="en-US" sz="2100" dirty="0">
                 <a:solidFill>
-                  <a:srgbClr val="17364A"/>
-                </a:solidFill>
-                <a:latin typeface="Aptos" pitchFamily="34" charset="0"/>
-                <a:ea typeface="Aptos" pitchFamily="34" charset="-122"/>
-                <a:cs typeface="Aptos" pitchFamily="34" charset="-120"/>
-              </a:rPr>
-              <a:t>A health department may use AI to improve access to maternal and child health resources.</a:t>
+                  <a:srgbClr val="003A63"/>
+                </a:solidFill>
+                <a:latin typeface="Aptos" pitchFamily="34" charset="0"/>
+                <a:ea typeface="Aptos" pitchFamily="34" charset="-122"/>
+                <a:cs typeface="Aptos" pitchFamily="34" charset="-120"/>
+              </a:rPr>
+              <a:t>• A health department may use AI to improve access to maternal and child health resources.</a:t>
             </a:r>
             <a:endParaRPr lang="en-US" sz="2100" dirty="0"/>
           </a:p>
           <a:p>
+            <a:pPr indent="0" marL="0">
+              <a:buNone/>
+            </a:pPr>
             <a:r>
               <a:rPr lang="en-US" sz="2100" dirty="0">
                 <a:solidFill>
-                  <a:srgbClr val="17364A"/>
-                </a:solidFill>
-                <a:latin typeface="Aptos" pitchFamily="34" charset="0"/>
-                <a:ea typeface="Aptos" pitchFamily="34" charset="-122"/>
-                <a:cs typeface="Aptos" pitchFamily="34" charset="-120"/>
-              </a:rPr>
-              <a:t>A tool could help staff identify service gaps, summarize eligibility rules, translate plain-language.</a:t>
+                  <a:srgbClr val="003A63"/>
+                </a:solidFill>
+                <a:latin typeface="Aptos" pitchFamily="34" charset="0"/>
+                <a:ea typeface="Aptos" pitchFamily="34" charset="-122"/>
+                <a:cs typeface="Aptos" pitchFamily="34" charset="-120"/>
+              </a:rPr>
+              <a:t>• A tool could help staff identify service gaps, summarize eligibility rules, translate.</a:t>
             </a:r>
             <a:endParaRPr lang="en-US" sz="2100" dirty="0"/>
           </a:p>
           <a:p>
+            <a:pPr indent="0" marL="0">
+              <a:buNone/>
+            </a:pPr>
             <a:r>
               <a:rPr lang="en-US" sz="2100" dirty="0">
                 <a:solidFill>
-                  <a:srgbClr val="17364A"/>
-                </a:solidFill>
-                <a:latin typeface="Aptos" pitchFamily="34" charset="0"/>
-                <a:ea typeface="Aptos" pitchFamily="34" charset="-122"/>
-                <a:cs typeface="Aptos" pitchFamily="34" charset="-120"/>
-              </a:rPr>
-              <a:t>If designed well, the tool could reduce administrative burden and improve timely access to services.</a:t>
+                  <a:srgbClr val="003A63"/>
+                </a:solidFill>
+                <a:latin typeface="Aptos" pitchFamily="34" charset="0"/>
+                <a:ea typeface="Aptos" pitchFamily="34" charset="-122"/>
+                <a:cs typeface="Aptos" pitchFamily="34" charset="-120"/>
+              </a:rPr>
+              <a:t>• If designed well, the tool could reduce administrative burden and improve timely access to.</a:t>
             </a:r>
             <a:endParaRPr lang="en-US" sz="2100" dirty="0"/>
           </a:p>
@@ -16883,17 +17191,17 @@
         </p:nvSpPr>
         <p:spPr>
           <a:xfrm>
-            <a:off x="7799832" y="1828800"/>
-            <a:ext cx="3145536" cy="685800"/>
-          </a:xfrm>
-          <a:prstGeom prst="rect">
-            <a:avLst/>
-          </a:prstGeom>
-          <a:noFill/>
-          <a:ln/>
-        </p:spPr>
-        <p:txBody>
-          <a:bodyPr wrap="square" lIns="0" tIns="0" rIns="0" bIns="0" rtlCol="0" anchor="t">
+            <a:off x="7799832" y="1801368"/>
+            <a:ext cx="3145536" cy="758952"/>
+          </a:xfrm>
+          <a:prstGeom prst="rect">
+            <a:avLst/>
+          </a:prstGeom>
+          <a:noFill/>
+          <a:ln/>
+        </p:spPr>
+        <p:txBody>
+          <a:bodyPr wrap="square" lIns="254" tIns="254" rIns="254" bIns="254" rtlCol="0" anchor="t">
             <a:normAutofit/>
           </a:bodyPr>
           <a:lstStyle/>
@@ -16902,7 +17210,7 @@
               <a:buNone/>
             </a:pPr>
             <a:r>
-              <a:rPr lang="en-US" sz="1550" dirty="0">
+              <a:rPr lang="en-US" sz="1320" dirty="0">
                 <a:solidFill>
                   <a:srgbClr val="17364A"/>
                 </a:solidFill>
@@ -16912,7 +17220,7 @@
               </a:rPr>
               <a:t>A health department may use AI to improve access to maternal and child health resources.</a:t>
             </a:r>
-            <a:endParaRPr lang="en-US" sz="1550" dirty="0"/>
+            <a:endParaRPr lang="en-US" sz="1320" dirty="0"/>
           </a:p>
         </p:txBody>
       </p:sp>
@@ -17000,13 +17308,16 @@
           <a:ln/>
         </p:spPr>
         <p:txBody>
-          <a:bodyPr wrap="square" lIns="254" tIns="254" rIns="254" bIns="254" rtlCol="0" anchor="t">
+          <a:bodyPr wrap="square" lIns="508" tIns="508" rIns="508" bIns="508" rtlCol="0" anchor="t">
             <a:normAutofit/>
           </a:bodyPr>
           <a:lstStyle/>
           <a:p>
-            <a:r>
-              <a:rPr lang="en-US" sz="1380" dirty="0">
+            <a:pPr indent="0" marL="0">
+              <a:buNone/>
+            </a:pPr>
+            <a:r>
+              <a:rPr lang="en-US" sz="1220" dirty="0">
                 <a:solidFill>
                   <a:srgbClr val="17364A"/>
                 </a:solidFill>
@@ -17014,13 +17325,16 @@
                 <a:ea typeface="Aptos" pitchFamily="34" charset="-122"/>
                 <a:cs typeface="Aptos" pitchFamily="34" charset="-120"/>
               </a:rPr>
-              <a:t>A tool could help staff identify service gaps, summarize eligibility rules, translate.</a:t>
-            </a:r>
-            <a:endParaRPr lang="en-US" sz="1380" dirty="0"/>
-          </a:p>
-          <a:p>
-            <a:r>
-              <a:rPr lang="en-US" sz="1380" dirty="0">
+              <a:t>A tool could help staff identify service gaps, summarize.</a:t>
+            </a:r>
+            <a:endParaRPr lang="en-US" sz="1220" dirty="0"/>
+          </a:p>
+          <a:p>
+            <a:pPr indent="0" marL="0">
+              <a:buNone/>
+            </a:pPr>
+            <a:r>
+              <a:rPr lang="en-US" sz="1220" dirty="0">
                 <a:solidFill>
                   <a:srgbClr val="17364A"/>
                 </a:solidFill>
@@ -17028,13 +17342,16 @@
                 <a:ea typeface="Aptos" pitchFamily="34" charset="-122"/>
                 <a:cs typeface="Aptos" pitchFamily="34" charset="-120"/>
               </a:rPr>
-              <a:t>The same tool could fail if it assumes internet access, uses only English content,.</a:t>
-            </a:r>
-            <a:endParaRPr lang="en-US" sz="1380" dirty="0"/>
-          </a:p>
-          <a:p>
-            <a:r>
-              <a:rPr lang="en-US" sz="1380" dirty="0">
+              <a:t>The same tool could fail if it assumes internet access, uses only.</a:t>
+            </a:r>
+            <a:endParaRPr lang="en-US" sz="1220" dirty="0"/>
+          </a:p>
+          <a:p>
+            <a:pPr indent="0" marL="0">
+              <a:buNone/>
+            </a:pPr>
+            <a:r>
+              <a:rPr lang="en-US" sz="1220" dirty="0">
                 <a:solidFill>
                   <a:srgbClr val="17364A"/>
                 </a:solidFill>
@@ -17042,9 +17359,9 @@
                 <a:ea typeface="Aptos" pitchFamily="34" charset="-122"/>
                 <a:cs typeface="Aptos" pitchFamily="34" charset="-120"/>
               </a:rPr>
-              <a:t>An AI for Social Good review would examine community needs, access barriers, language and.</a:t>
-            </a:r>
-            <a:endParaRPr lang="en-US" sz="1380" dirty="0"/>
+              <a:t>An AI for Social Good review would examine community needs, access.</a:t>
+            </a:r>
+            <a:endParaRPr lang="en-US" sz="1220" dirty="0"/>
           </a:p>
         </p:txBody>
       </p:sp>
@@ -17122,17 +17439,17 @@
         </p:nvSpPr>
         <p:spPr>
           <a:xfrm>
-            <a:off x="7799832" y="5001768"/>
-            <a:ext cx="3145536" cy="502920"/>
-          </a:xfrm>
-          <a:prstGeom prst="rect">
-            <a:avLst/>
-          </a:prstGeom>
-          <a:noFill/>
-          <a:ln/>
-        </p:spPr>
-        <p:txBody>
-          <a:bodyPr wrap="square" lIns="0" tIns="0" rIns="0" bIns="0" rtlCol="0" anchor="t">
+            <a:off x="7799832" y="4974336"/>
+            <a:ext cx="3145536" cy="576072"/>
+          </a:xfrm>
+          <a:prstGeom prst="rect">
+            <a:avLst/>
+          </a:prstGeom>
+          <a:noFill/>
+          <a:ln/>
+        </p:spPr>
+        <p:txBody>
+          <a:bodyPr wrap="square" lIns="254" tIns="254" rIns="254" bIns="254" rtlCol="0" anchor="t">
             <a:normAutofit/>
           </a:bodyPr>
           <a:lstStyle/>
@@ -17141,7 +17458,7 @@
               <a:buNone/>
             </a:pPr>
             <a:r>
-              <a:rPr lang="en-US" sz="1550" dirty="0">
+              <a:rPr lang="en-US" sz="1320" dirty="0">
                 <a:solidFill>
                   <a:srgbClr val="17364A"/>
                 </a:solidFill>
@@ -17149,9 +17466,9 @@
                 <a:ea typeface="Aptos" pitchFamily="34" charset="-122"/>
                 <a:cs typeface="Aptos" pitchFamily="34" charset="-120"/>
               </a:rPr>
-              <a:t>Connect the concept to public health purpose, responsible use, required safeguards, documentation, and the next action a department should take.</a:t>
-            </a:r>
-            <a:endParaRPr lang="en-US" sz="1550" dirty="0"/>
+              <a:t>Connect the concept to public health purpose, responsible use, required safeguards, documentation, and the next action a.</a:t>
+            </a:r>
+            <a:endParaRPr lang="en-US" sz="1320" dirty="0"/>
           </a:p>
         </p:txBody>
       </p:sp>

--- a/downloads/presentations/modules/int-190.pptx
+++ b/downloads/presentations/modules/int-190.pptx
@@ -3420,11 +3420,11 @@
         <p:spPr>
           <a:xfrm>
             <a:off x="7635240" y="1325880"/>
-            <a:ext cx="3474720" cy="1325880"/>
+            <a:ext cx="3474720" cy="1207008"/>
           </a:xfrm>
           <a:prstGeom prst="roundRect">
             <a:avLst>
-              <a:gd name="adj" fmla="val 8276"/>
+              <a:gd name="adj" fmla="val 9091"/>
             </a:avLst>
           </a:prstGeom>
           <a:solidFill>
@@ -3486,7 +3486,7 @@
         <p:spPr>
           <a:xfrm>
             <a:off x="7799832" y="1801368"/>
-            <a:ext cx="3145536" cy="758952"/>
+            <a:ext cx="3145536" cy="640080"/>
           </a:xfrm>
           <a:prstGeom prst="rect">
             <a:avLst/>
@@ -3526,12 +3526,12 @@
         </p:nvSpPr>
         <p:spPr>
           <a:xfrm>
-            <a:off x="7635240" y="2788920"/>
-            <a:ext cx="3474720" cy="1536192"/>
+            <a:off x="7635240" y="2670048"/>
+            <a:ext cx="3474720" cy="1377086"/>
           </a:xfrm>
           <a:prstGeom prst="roundRect">
             <a:avLst>
-              <a:gd name="adj" fmla="val 7143"/>
+              <a:gd name="adj" fmla="val 7968"/>
             </a:avLst>
           </a:prstGeom>
           <a:solidFill>
@@ -3553,8 +3553,8 @@
         </p:nvSpPr>
         <p:spPr>
           <a:xfrm>
-            <a:off x="7799832" y="2935224"/>
-            <a:ext cx="3145536" cy="256032"/>
+            <a:off x="7799832" y="2798064"/>
+            <a:ext cx="3145536" cy="237744"/>
           </a:xfrm>
           <a:prstGeom prst="rect">
             <a:avLst/>
@@ -3570,7 +3570,7 @@
               <a:buNone/>
             </a:pPr>
             <a:r>
-              <a:rPr lang="en-US" sz="1300" b="1" dirty="0">
+              <a:rPr lang="en-US" sz="1250" b="1" dirty="0">
                 <a:solidFill>
                   <a:srgbClr val="0068B7"/>
                 </a:solidFill>
@@ -3578,101 +3578,317 @@
                 <a:ea typeface="Aptos" pitchFamily="34" charset="-122"/>
                 <a:cs typeface="Aptos" pitchFamily="34" charset="-120"/>
               </a:rPr>
-              <a:t>Concept checkpoints</a:t>
-            </a:r>
-            <a:endParaRPr lang="en-US" sz="1300" dirty="0"/>
-          </a:p>
-        </p:txBody>
-      </p:sp>
-      <p:sp>
-        <p:nvSpPr>
-          <p:cNvPr id="15" name="Text 13"/>
-          <p:cNvSpPr/>
-          <p:nvPr/>
-        </p:nvSpPr>
-        <p:spPr>
-          <a:xfrm>
-            <a:off x="7818120" y="3300984"/>
-            <a:ext cx="3090672" cy="877824"/>
-          </a:xfrm>
-          <a:prstGeom prst="rect">
-            <a:avLst/>
-          </a:prstGeom>
-          <a:noFill/>
-          <a:ln/>
-        </p:spPr>
-        <p:txBody>
-          <a:bodyPr wrap="square" lIns="508" tIns="508" rIns="508" bIns="508" rtlCol="0" anchor="t">
+              <a:t>Human-in-the-loop use</a:t>
+            </a:r>
+            <a:endParaRPr lang="en-US" sz="1250" dirty="0"/>
+          </a:p>
+        </p:txBody>
+      </p:sp>
+      <p:sp>
+        <p:nvSpPr>
+          <p:cNvPr id="15" name="Shape 13"/>
+          <p:cNvSpPr/>
+          <p:nvPr/>
+        </p:nvSpPr>
+        <p:spPr>
+          <a:xfrm>
+            <a:off x="8763000" y="3351276"/>
+            <a:ext cx="164592" cy="0"/>
+          </a:xfrm>
+          <a:prstGeom prst="line">
+            <a:avLst/>
+          </a:prstGeom>
+          <a:noFill/>
+          <a:ln w="15240">
+            <a:solidFill>
+              <a:srgbClr val="8ABBD8"/>
+            </a:solidFill>
+            <a:prstDash val="solid"/>
+          </a:ln>
+        </p:spPr>
+      </p:sp>
+      <p:sp>
+        <p:nvSpPr>
+          <p:cNvPr id="16" name="Shape 14"/>
+          <p:cNvSpPr/>
+          <p:nvPr/>
+        </p:nvSpPr>
+        <p:spPr>
+          <a:xfrm>
+            <a:off x="7872984" y="3200400"/>
+            <a:ext cx="890016" cy="301752"/>
+          </a:xfrm>
+          <a:prstGeom prst="roundRect">
+            <a:avLst>
+              <a:gd name="adj" fmla="val 24242"/>
+            </a:avLst>
+          </a:prstGeom>
+          <a:solidFill>
+            <a:srgbClr val="0068B7"/>
+          </a:solidFill>
+          <a:ln w="12700">
+            <a:solidFill>
+              <a:srgbClr val="0068B7"/>
+            </a:solidFill>
+            <a:prstDash val="solid"/>
+          </a:ln>
+        </p:spPr>
+      </p:sp>
+      <p:sp>
+        <p:nvSpPr>
+          <p:cNvPr id="17" name="Text 15"/>
+          <p:cNvSpPr/>
+          <p:nvPr/>
+        </p:nvSpPr>
+        <p:spPr>
+          <a:xfrm>
+            <a:off x="7909560" y="3273552"/>
+            <a:ext cx="816864" cy="146304"/>
+          </a:xfrm>
+          <a:prstGeom prst="rect">
+            <a:avLst/>
+          </a:prstGeom>
+          <a:noFill/>
+          <a:ln/>
+        </p:spPr>
+        <p:txBody>
+          <a:bodyPr wrap="square" lIns="0" tIns="0" rIns="0" bIns="0" rtlCol="0" anchor="ctr">
             <a:normAutofit/>
           </a:bodyPr>
           <a:lstStyle/>
           <a:p>
-            <a:pPr indent="0" marL="0">
-              <a:buNone/>
-            </a:pPr>
-            <a:r>
-              <a:rPr lang="en-US" sz="1220" dirty="0">
-                <a:solidFill>
-                  <a:srgbClr val="17364A"/>
-                </a:solidFill>
-                <a:latin typeface="Aptos" pitchFamily="34" charset="0"/>
-                <a:ea typeface="Aptos" pitchFamily="34" charset="-122"/>
-                <a:cs typeface="Aptos" pitchFamily="34" charset="-120"/>
-              </a:rPr>
-              <a:t>For example, “use a chatbot” is not a problem definition. “Reduce.</a:t>
-            </a:r>
-            <a:endParaRPr lang="en-US" sz="1220" dirty="0"/>
-          </a:p>
-          <a:p>
-            <a:pPr indent="0" marL="0">
-              <a:buNone/>
-            </a:pPr>
-            <a:r>
-              <a:rPr lang="en-US" sz="1220" dirty="0">
-                <a:solidFill>
-                  <a:srgbClr val="17364A"/>
-                </a:solidFill>
-                <a:latin typeface="Aptos" pitchFamily="34" charset="0"/>
-                <a:ea typeface="Aptos" pitchFamily="34" charset="-122"/>
-                <a:cs typeface="Aptos" pitchFamily="34" charset="-120"/>
-              </a:rPr>
-              <a:t>Starting with the problem helps agencies avoid technology-driven.</a:t>
-            </a:r>
-            <a:endParaRPr lang="en-US" sz="1220" dirty="0"/>
-          </a:p>
-          <a:p>
-            <a:pPr indent="0" marL="0">
-              <a:buNone/>
-            </a:pPr>
-            <a:r>
-              <a:rPr lang="en-US" sz="1220" dirty="0">
-                <a:solidFill>
-                  <a:srgbClr val="17364A"/>
-                </a:solidFill>
-                <a:latin typeface="Aptos" pitchFamily="34" charset="0"/>
-                <a:ea typeface="Aptos" pitchFamily="34" charset="-122"/>
-                <a:cs typeface="Aptos" pitchFamily="34" charset="-120"/>
-              </a:rPr>
-              <a:t>Equity by design requires agencies to identify who is included,.</a:t>
-            </a:r>
-            <a:endParaRPr lang="en-US" sz="1220" dirty="0"/>
-          </a:p>
-        </p:txBody>
-      </p:sp>
-      <p:sp>
-        <p:nvSpPr>
-          <p:cNvPr id="16" name="Shape 14"/>
-          <p:cNvSpPr/>
-          <p:nvPr/>
-        </p:nvSpPr>
-        <p:spPr>
-          <a:xfrm>
-            <a:off x="7635240" y="4498848"/>
-            <a:ext cx="3474720" cy="1143000"/>
+            <a:pPr algn="ctr" indent="0" marL="0">
+              <a:buNone/>
+            </a:pPr>
+            <a:r>
+              <a:rPr lang="en-US" sz="880" b="1" dirty="0">
+                <a:solidFill>
+                  <a:srgbClr val="FFFFFF"/>
+                </a:solidFill>
+                <a:latin typeface="Aptos" pitchFamily="34" charset="0"/>
+                <a:ea typeface="Aptos" pitchFamily="34" charset="-122"/>
+                <a:cs typeface="Aptos" pitchFamily="34" charset="-120"/>
+              </a:rPr>
+              <a:t>Input</a:t>
+            </a:r>
+            <a:endParaRPr lang="en-US" sz="880" dirty="0"/>
+          </a:p>
+        </p:txBody>
+      </p:sp>
+      <p:sp>
+        <p:nvSpPr>
+          <p:cNvPr id="18" name="Shape 16"/>
+          <p:cNvSpPr/>
+          <p:nvPr/>
+        </p:nvSpPr>
+        <p:spPr>
+          <a:xfrm>
+            <a:off x="9817608" y="3351276"/>
+            <a:ext cx="164592" cy="0"/>
+          </a:xfrm>
+          <a:prstGeom prst="line">
+            <a:avLst/>
+          </a:prstGeom>
+          <a:noFill/>
+          <a:ln w="15240">
+            <a:solidFill>
+              <a:srgbClr val="8ABBD8"/>
+            </a:solidFill>
+            <a:prstDash val="solid"/>
+          </a:ln>
+        </p:spPr>
+      </p:sp>
+      <p:sp>
+        <p:nvSpPr>
+          <p:cNvPr id="19" name="Shape 17"/>
+          <p:cNvSpPr/>
+          <p:nvPr/>
+        </p:nvSpPr>
+        <p:spPr>
+          <a:xfrm>
+            <a:off x="8927592" y="3200400"/>
+            <a:ext cx="890016" cy="301752"/>
           </a:xfrm>
           <a:prstGeom prst="roundRect">
             <a:avLst>
-              <a:gd name="adj" fmla="val 9600"/>
+              <a:gd name="adj" fmla="val 24242"/>
+            </a:avLst>
+          </a:prstGeom>
+          <a:solidFill>
+            <a:srgbClr val="2F8A28"/>
+          </a:solidFill>
+          <a:ln w="12700">
+            <a:solidFill>
+              <a:srgbClr val="2F8A28"/>
+            </a:solidFill>
+            <a:prstDash val="solid"/>
+          </a:ln>
+        </p:spPr>
+      </p:sp>
+      <p:sp>
+        <p:nvSpPr>
+          <p:cNvPr id="20" name="Text 18"/>
+          <p:cNvSpPr/>
+          <p:nvPr/>
+        </p:nvSpPr>
+        <p:spPr>
+          <a:xfrm>
+            <a:off x="8964168" y="3273552"/>
+            <a:ext cx="816864" cy="146304"/>
+          </a:xfrm>
+          <a:prstGeom prst="rect">
+            <a:avLst/>
+          </a:prstGeom>
+          <a:noFill/>
+          <a:ln/>
+        </p:spPr>
+        <p:txBody>
+          <a:bodyPr wrap="square" lIns="0" tIns="0" rIns="0" bIns="0" rtlCol="0" anchor="ctr">
+            <a:normAutofit/>
+          </a:bodyPr>
+          <a:lstStyle/>
+          <a:p>
+            <a:pPr algn="ctr" indent="0" marL="0">
+              <a:buNone/>
+            </a:pPr>
+            <a:r>
+              <a:rPr lang="en-US" sz="880" b="1" dirty="0">
+                <a:solidFill>
+                  <a:srgbClr val="FFFFFF"/>
+                </a:solidFill>
+                <a:latin typeface="Aptos" pitchFamily="34" charset="0"/>
+                <a:ea typeface="Aptos" pitchFamily="34" charset="-122"/>
+                <a:cs typeface="Aptos" pitchFamily="34" charset="-120"/>
+              </a:rPr>
+              <a:t>AI assist</a:t>
+            </a:r>
+            <a:endParaRPr lang="en-US" sz="880" dirty="0"/>
+          </a:p>
+        </p:txBody>
+      </p:sp>
+      <p:sp>
+        <p:nvSpPr>
+          <p:cNvPr id="21" name="Shape 19"/>
+          <p:cNvSpPr/>
+          <p:nvPr/>
+        </p:nvSpPr>
+        <p:spPr>
+          <a:xfrm>
+            <a:off x="9982200" y="3200400"/>
+            <a:ext cx="890016" cy="301752"/>
+          </a:xfrm>
+          <a:prstGeom prst="roundRect">
+            <a:avLst>
+              <a:gd name="adj" fmla="val 24242"/>
+            </a:avLst>
+          </a:prstGeom>
+          <a:solidFill>
+            <a:srgbClr val="6A4CA3"/>
+          </a:solidFill>
+          <a:ln w="12700">
+            <a:solidFill>
+              <a:srgbClr val="6A4CA3"/>
+            </a:solidFill>
+            <a:prstDash val="solid"/>
+          </a:ln>
+        </p:spPr>
+      </p:sp>
+      <p:sp>
+        <p:nvSpPr>
+          <p:cNvPr id="22" name="Text 20"/>
+          <p:cNvSpPr/>
+          <p:nvPr/>
+        </p:nvSpPr>
+        <p:spPr>
+          <a:xfrm>
+            <a:off x="10018776" y="3273552"/>
+            <a:ext cx="816864" cy="146304"/>
+          </a:xfrm>
+          <a:prstGeom prst="rect">
+            <a:avLst/>
+          </a:prstGeom>
+          <a:noFill/>
+          <a:ln/>
+        </p:spPr>
+        <p:txBody>
+          <a:bodyPr wrap="square" lIns="0" tIns="0" rIns="0" bIns="0" rtlCol="0" anchor="ctr">
+            <a:normAutofit/>
+          </a:bodyPr>
+          <a:lstStyle/>
+          <a:p>
+            <a:pPr algn="ctr" indent="0" marL="0">
+              <a:buNone/>
+            </a:pPr>
+            <a:r>
+              <a:rPr lang="en-US" sz="880" b="1" dirty="0">
+                <a:solidFill>
+                  <a:srgbClr val="FFFFFF"/>
+                </a:solidFill>
+                <a:latin typeface="Aptos" pitchFamily="34" charset="0"/>
+                <a:ea typeface="Aptos" pitchFamily="34" charset="-122"/>
+                <a:cs typeface="Aptos" pitchFamily="34" charset="-120"/>
+              </a:rPr>
+              <a:t>Review</a:t>
+            </a:r>
+            <a:endParaRPr lang="en-US" sz="880" dirty="0"/>
+          </a:p>
+        </p:txBody>
+      </p:sp>
+      <p:sp>
+        <p:nvSpPr>
+          <p:cNvPr id="23" name="Text 21"/>
+          <p:cNvSpPr/>
+          <p:nvPr/>
+        </p:nvSpPr>
+        <p:spPr>
+          <a:xfrm>
+            <a:off x="7854696" y="3694176"/>
+            <a:ext cx="3035808" cy="206654"/>
+          </a:xfrm>
+          <a:prstGeom prst="rect">
+            <a:avLst/>
+          </a:prstGeom>
+          <a:noFill/>
+          <a:ln/>
+        </p:spPr>
+        <p:txBody>
+          <a:bodyPr wrap="square" lIns="254" tIns="254" rIns="254" bIns="254" rtlCol="0" anchor="t">
+            <a:normAutofit/>
+          </a:bodyPr>
+          <a:lstStyle/>
+          <a:p>
+            <a:pPr indent="0" marL="0">
+              <a:buNone/>
+            </a:pPr>
+            <a:r>
+              <a:rPr lang="en-US" sz="1120" dirty="0">
+                <a:solidFill>
+                  <a:srgbClr val="17364A"/>
+                </a:solidFill>
+                <a:latin typeface="Aptos" pitchFamily="34" charset="0"/>
+                <a:ea typeface="Aptos" pitchFamily="34" charset="-122"/>
+                <a:cs typeface="Aptos" pitchFamily="34" charset="-120"/>
+              </a:rPr>
+              <a:t>AI can support work, but public health judgment remains responsible for interpretation and final use.</a:t>
+            </a:r>
+            <a:endParaRPr lang="en-US" sz="1120" dirty="0"/>
+          </a:p>
+        </p:txBody>
+      </p:sp>
+      <p:sp>
+        <p:nvSpPr>
+          <p:cNvPr id="24" name="Shape 22"/>
+          <p:cNvSpPr/>
+          <p:nvPr/>
+        </p:nvSpPr>
+        <p:spPr>
+          <a:xfrm>
+            <a:off x="7635240" y="4184294"/>
+            <a:ext cx="3474720" cy="1466698"/>
+          </a:xfrm>
+          <a:prstGeom prst="roundRect">
+            <a:avLst>
+              <a:gd name="adj" fmla="val 7481"/>
             </a:avLst>
           </a:prstGeom>
           <a:solidFill>
@@ -3688,13 +3904,13 @@
       </p:sp>
       <p:sp>
         <p:nvSpPr>
-          <p:cNvPr id="17" name="Text 15"/>
-          <p:cNvSpPr/>
-          <p:nvPr/>
-        </p:nvSpPr>
-        <p:spPr>
-          <a:xfrm>
-            <a:off x="7799832" y="4645152"/>
+          <p:cNvPr id="25" name="Text 23"/>
+          <p:cNvSpPr/>
+          <p:nvPr/>
+        </p:nvSpPr>
+        <p:spPr>
+          <a:xfrm>
+            <a:off x="7799832" y="4330598"/>
             <a:ext cx="3145536" cy="256032"/>
           </a:xfrm>
           <a:prstGeom prst="rect">
@@ -3727,14 +3943,14 @@
       </p:sp>
       <p:sp>
         <p:nvSpPr>
-          <p:cNvPr id="18" name="Text 16"/>
-          <p:cNvSpPr/>
-          <p:nvPr/>
-        </p:nvSpPr>
-        <p:spPr>
-          <a:xfrm>
-            <a:off x="7799832" y="4974336"/>
-            <a:ext cx="3145536" cy="576072"/>
+          <p:cNvPr id="26" name="Text 24"/>
+          <p:cNvSpPr/>
+          <p:nvPr/>
+        </p:nvSpPr>
+        <p:spPr>
+          <a:xfrm>
+            <a:off x="7799832" y="4659782"/>
+            <a:ext cx="3145536" cy="899770"/>
           </a:xfrm>
           <a:prstGeom prst="rect">
             <a:avLst/>
@@ -3760,7 +3976,7 @@
                 <a:ea typeface="Aptos" pitchFamily="34" charset="-122"/>
                 <a:cs typeface="Aptos" pitchFamily="34" charset="-120"/>
               </a:rPr>
-              <a:t>Connect the concept to public health purpose, responsible use, required safeguards, documentation, and the next action a.</a:t>
+              <a:t>Connect the concept to public health purpose, responsible use, required safeguards, documentation, and the next action a department should take.</a:t>
             </a:r>
             <a:endParaRPr lang="en-US" sz="1320" dirty="0"/>
           </a:p>
@@ -4129,11 +4345,11 @@
         <p:spPr>
           <a:xfrm>
             <a:off x="7635240" y="1325880"/>
-            <a:ext cx="3474720" cy="1325880"/>
+            <a:ext cx="3474720" cy="1207008"/>
           </a:xfrm>
           <a:prstGeom prst="roundRect">
             <a:avLst>
-              <a:gd name="adj" fmla="val 8276"/>
+              <a:gd name="adj" fmla="val 9091"/>
             </a:avLst>
           </a:prstGeom>
           <a:solidFill>
@@ -4195,7 +4411,7 @@
         <p:spPr>
           <a:xfrm>
             <a:off x="7799832" y="1801368"/>
-            <a:ext cx="3145536" cy="758952"/>
+            <a:ext cx="3145536" cy="640080"/>
           </a:xfrm>
           <a:prstGeom prst="rect">
             <a:avLst/>
@@ -4235,12 +4451,12 @@
         </p:nvSpPr>
         <p:spPr>
           <a:xfrm>
-            <a:off x="7635240" y="2788920"/>
-            <a:ext cx="3474720" cy="1536192"/>
+            <a:off x="7635240" y="2670048"/>
+            <a:ext cx="3474720" cy="1377086"/>
           </a:xfrm>
           <a:prstGeom prst="roundRect">
             <a:avLst>
-              <a:gd name="adj" fmla="val 7143"/>
+              <a:gd name="adj" fmla="val 7968"/>
             </a:avLst>
           </a:prstGeom>
           <a:solidFill>
@@ -4262,7 +4478,7 @@
         </p:nvSpPr>
         <p:spPr>
           <a:xfrm>
-            <a:off x="7799832" y="2935224"/>
+            <a:off x="7799832" y="2816352"/>
             <a:ext cx="3145536" cy="256032"/>
           </a:xfrm>
           <a:prstGeom prst="rect">
@@ -4301,8 +4517,8 @@
         </p:nvSpPr>
         <p:spPr>
           <a:xfrm>
-            <a:off x="7818120" y="3300984"/>
-            <a:ext cx="3090672" cy="877824"/>
+            <a:off x="7818120" y="3182112"/>
+            <a:ext cx="3090672" cy="718718"/>
           </a:xfrm>
           <a:prstGeom prst="rect">
             <a:avLst/>
@@ -4376,12 +4592,12 @@
         </p:nvSpPr>
         <p:spPr>
           <a:xfrm>
-            <a:off x="7635240" y="4498848"/>
-            <a:ext cx="3474720" cy="1143000"/>
+            <a:off x="7635240" y="4184294"/>
+            <a:ext cx="3474720" cy="1466698"/>
           </a:xfrm>
           <a:prstGeom prst="roundRect">
             <a:avLst>
-              <a:gd name="adj" fmla="val 9600"/>
+              <a:gd name="adj" fmla="val 7481"/>
             </a:avLst>
           </a:prstGeom>
           <a:solidFill>
@@ -4403,7 +4619,7 @@
         </p:nvSpPr>
         <p:spPr>
           <a:xfrm>
-            <a:off x="7799832" y="4645152"/>
+            <a:off x="7799832" y="4330598"/>
             <a:ext cx="3145536" cy="256032"/>
           </a:xfrm>
           <a:prstGeom prst="rect">
@@ -4442,8 +4658,8 @@
         </p:nvSpPr>
         <p:spPr>
           <a:xfrm>
-            <a:off x="7799832" y="4974336"/>
-            <a:ext cx="3145536" cy="576072"/>
+            <a:off x="7799832" y="4659782"/>
+            <a:ext cx="3145536" cy="899770"/>
           </a:xfrm>
           <a:prstGeom prst="rect">
             <a:avLst/>
@@ -4469,7 +4685,7 @@
                 <a:ea typeface="Aptos" pitchFamily="34" charset="-122"/>
                 <a:cs typeface="Aptos" pitchFamily="34" charset="-120"/>
               </a:rPr>
-              <a:t>Connect the concept to public health purpose, responsible use, required safeguards, documentation, and the next action a.</a:t>
+              <a:t>Connect the concept to public health purpose, responsible use, required safeguards, documentation, and the next action a department should take.</a:t>
             </a:r>
             <a:endParaRPr lang="en-US" sz="1320" dirty="0"/>
           </a:p>
@@ -4838,11 +5054,11 @@
         <p:spPr>
           <a:xfrm>
             <a:off x="7635240" y="1325880"/>
-            <a:ext cx="3474720" cy="1325880"/>
+            <a:ext cx="3474720" cy="1207008"/>
           </a:xfrm>
           <a:prstGeom prst="roundRect">
             <a:avLst>
-              <a:gd name="adj" fmla="val 8276"/>
+              <a:gd name="adj" fmla="val 9091"/>
             </a:avLst>
           </a:prstGeom>
           <a:solidFill>
@@ -4904,7 +5120,7 @@
         <p:spPr>
           <a:xfrm>
             <a:off x="7799832" y="1801368"/>
-            <a:ext cx="3145536" cy="758952"/>
+            <a:ext cx="3145536" cy="640080"/>
           </a:xfrm>
           <a:prstGeom prst="rect">
             <a:avLst/>
@@ -4944,7 +5160,7 @@
         </p:nvSpPr>
         <p:spPr>
           <a:xfrm>
-            <a:off x="7635240" y="2788920"/>
+            <a:off x="7635240" y="2670048"/>
             <a:ext cx="3474720" cy="1536192"/>
           </a:xfrm>
           <a:prstGeom prst="roundRect">
@@ -4971,7 +5187,7 @@
         </p:nvSpPr>
         <p:spPr>
           <a:xfrm>
-            <a:off x="7799832" y="2935224"/>
+            <a:off x="7799832" y="2816352"/>
             <a:ext cx="3145536" cy="256032"/>
           </a:xfrm>
           <a:prstGeom prst="rect">
@@ -5010,7 +5226,7 @@
         </p:nvSpPr>
         <p:spPr>
           <a:xfrm>
-            <a:off x="7818120" y="3300984"/>
+            <a:off x="7818120" y="3182112"/>
             <a:ext cx="3090672" cy="877824"/>
           </a:xfrm>
           <a:prstGeom prst="rect">
@@ -5085,12 +5301,12 @@
         </p:nvSpPr>
         <p:spPr>
           <a:xfrm>
-            <a:off x="7635240" y="4498848"/>
-            <a:ext cx="3474720" cy="1143000"/>
+            <a:off x="7635240" y="4343400"/>
+            <a:ext cx="3474720" cy="1255471"/>
           </a:xfrm>
           <a:prstGeom prst="roundRect">
             <a:avLst>
-              <a:gd name="adj" fmla="val 9600"/>
+              <a:gd name="adj" fmla="val 8740"/>
             </a:avLst>
           </a:prstGeom>
           <a:solidFill>
@@ -5112,7 +5328,7 @@
         </p:nvSpPr>
         <p:spPr>
           <a:xfrm>
-            <a:off x="7799832" y="4645152"/>
+            <a:off x="7799832" y="4489704"/>
             <a:ext cx="3145536" cy="256032"/>
           </a:xfrm>
           <a:prstGeom prst="rect">
@@ -5151,8 +5367,8 @@
         </p:nvSpPr>
         <p:spPr>
           <a:xfrm>
-            <a:off x="7799832" y="4974336"/>
-            <a:ext cx="3145536" cy="576072"/>
+            <a:off x="7799832" y="4818888"/>
+            <a:ext cx="3145536" cy="688543"/>
           </a:xfrm>
           <a:prstGeom prst="rect">
             <a:avLst/>
@@ -5178,7 +5394,7 @@
                 <a:ea typeface="Aptos" pitchFamily="34" charset="-122"/>
                 <a:cs typeface="Aptos" pitchFamily="34" charset="-120"/>
               </a:rPr>
-              <a:t>Identify what could go wrong, who could be affected, what safeguards are needed, and what evidence should be reviewed.</a:t>
+              <a:t>Identify what could go wrong, who could be affected, what safeguards are needed, and what evidence should be reviewed before use.</a:t>
             </a:r>
             <a:endParaRPr lang="en-US" sz="1320" dirty="0"/>
           </a:p>
@@ -5547,11 +5763,11 @@
         <p:spPr>
           <a:xfrm>
             <a:off x="7635240" y="1325880"/>
-            <a:ext cx="3474720" cy="1325880"/>
+            <a:ext cx="3474720" cy="1207008"/>
           </a:xfrm>
           <a:prstGeom prst="roundRect">
             <a:avLst>
-              <a:gd name="adj" fmla="val 8276"/>
+              <a:gd name="adj" fmla="val 9091"/>
             </a:avLst>
           </a:prstGeom>
           <a:solidFill>
@@ -5613,7 +5829,7 @@
         <p:spPr>
           <a:xfrm>
             <a:off x="7799832" y="1801368"/>
-            <a:ext cx="3145536" cy="758952"/>
+            <a:ext cx="3145536" cy="640080"/>
           </a:xfrm>
           <a:prstGeom prst="rect">
             <a:avLst/>
@@ -5653,7 +5869,7 @@
         </p:nvSpPr>
         <p:spPr>
           <a:xfrm>
-            <a:off x="7635240" y="2788920"/>
+            <a:off x="7635240" y="2670048"/>
             <a:ext cx="3474720" cy="1536192"/>
           </a:xfrm>
           <a:prstGeom prst="roundRect">
@@ -5680,7 +5896,7 @@
         </p:nvSpPr>
         <p:spPr>
           <a:xfrm>
-            <a:off x="7799832" y="2935224"/>
+            <a:off x="7799832" y="2816352"/>
             <a:ext cx="3145536" cy="256032"/>
           </a:xfrm>
           <a:prstGeom prst="rect">
@@ -5719,7 +5935,7 @@
         </p:nvSpPr>
         <p:spPr>
           <a:xfrm>
-            <a:off x="7818120" y="3300984"/>
+            <a:off x="7818120" y="3182112"/>
             <a:ext cx="3090672" cy="877824"/>
           </a:xfrm>
           <a:prstGeom prst="rect">
@@ -5794,12 +6010,12 @@
         </p:nvSpPr>
         <p:spPr>
           <a:xfrm>
-            <a:off x="7635240" y="4498848"/>
-            <a:ext cx="3474720" cy="1143000"/>
+            <a:off x="7635240" y="4343400"/>
+            <a:ext cx="3474720" cy="1255471"/>
           </a:xfrm>
           <a:prstGeom prst="roundRect">
             <a:avLst>
-              <a:gd name="adj" fmla="val 9600"/>
+              <a:gd name="adj" fmla="val 8740"/>
             </a:avLst>
           </a:prstGeom>
           <a:solidFill>
@@ -5821,7 +6037,7 @@
         </p:nvSpPr>
         <p:spPr>
           <a:xfrm>
-            <a:off x="7799832" y="4645152"/>
+            <a:off x="7799832" y="4489704"/>
             <a:ext cx="3145536" cy="256032"/>
           </a:xfrm>
           <a:prstGeom prst="rect">
@@ -5860,8 +6076,8 @@
         </p:nvSpPr>
         <p:spPr>
           <a:xfrm>
-            <a:off x="7799832" y="4974336"/>
-            <a:ext cx="3145536" cy="576072"/>
+            <a:off x="7799832" y="4818888"/>
+            <a:ext cx="3145536" cy="688543"/>
           </a:xfrm>
           <a:prstGeom prst="rect">
             <a:avLst/>
@@ -5887,7 +6103,7 @@
                 <a:ea typeface="Aptos" pitchFamily="34" charset="-122"/>
                 <a:cs typeface="Aptos" pitchFamily="34" charset="-120"/>
               </a:rPr>
-              <a:t>Identify what could go wrong, who could be affected, what safeguards are needed, and what evidence should be reviewed.</a:t>
+              <a:t>Identify what could go wrong, who could be affected, what safeguards are needed, and what evidence should be reviewed before use.</a:t>
             </a:r>
             <a:endParaRPr lang="en-US" sz="1320" dirty="0"/>
           </a:p>
@@ -6256,11 +6472,11 @@
         <p:spPr>
           <a:xfrm>
             <a:off x="7635240" y="1325880"/>
-            <a:ext cx="3474720" cy="1325880"/>
+            <a:ext cx="3474720" cy="1207008"/>
           </a:xfrm>
           <a:prstGeom prst="roundRect">
             <a:avLst>
-              <a:gd name="adj" fmla="val 8276"/>
+              <a:gd name="adj" fmla="val 9091"/>
             </a:avLst>
           </a:prstGeom>
           <a:solidFill>
@@ -6322,7 +6538,7 @@
         <p:spPr>
           <a:xfrm>
             <a:off x="7799832" y="1801368"/>
-            <a:ext cx="3145536" cy="758952"/>
+            <a:ext cx="3145536" cy="640080"/>
           </a:xfrm>
           <a:prstGeom prst="rect">
             <a:avLst/>
@@ -6362,12 +6578,12 @@
         </p:nvSpPr>
         <p:spPr>
           <a:xfrm>
-            <a:off x="7635240" y="2788920"/>
-            <a:ext cx="3474720" cy="1536192"/>
+            <a:off x="7635240" y="2670048"/>
+            <a:ext cx="3474720" cy="1377086"/>
           </a:xfrm>
           <a:prstGeom prst="roundRect">
             <a:avLst>
-              <a:gd name="adj" fmla="val 7143"/>
+              <a:gd name="adj" fmla="val 7968"/>
             </a:avLst>
           </a:prstGeom>
           <a:solidFill>
@@ -6389,7 +6605,7 @@
         </p:nvSpPr>
         <p:spPr>
           <a:xfrm>
-            <a:off x="7799832" y="2935224"/>
+            <a:off x="7799832" y="2816352"/>
             <a:ext cx="3145536" cy="256032"/>
           </a:xfrm>
           <a:prstGeom prst="rect">
@@ -6428,8 +6644,8 @@
         </p:nvSpPr>
         <p:spPr>
           <a:xfrm>
-            <a:off x="7818120" y="3300984"/>
-            <a:ext cx="3090672" cy="877824"/>
+            <a:off x="7818120" y="3182112"/>
+            <a:ext cx="3090672" cy="718718"/>
           </a:xfrm>
           <a:prstGeom prst="rect">
             <a:avLst/>
@@ -6503,12 +6719,12 @@
         </p:nvSpPr>
         <p:spPr>
           <a:xfrm>
-            <a:off x="7635240" y="4498848"/>
-            <a:ext cx="3474720" cy="1143000"/>
+            <a:off x="7635240" y="4184294"/>
+            <a:ext cx="3474720" cy="1466698"/>
           </a:xfrm>
           <a:prstGeom prst="roundRect">
             <a:avLst>
-              <a:gd name="adj" fmla="val 9600"/>
+              <a:gd name="adj" fmla="val 7481"/>
             </a:avLst>
           </a:prstGeom>
           <a:solidFill>
@@ -6530,7 +6746,7 @@
         </p:nvSpPr>
         <p:spPr>
           <a:xfrm>
-            <a:off x="7799832" y="4645152"/>
+            <a:off x="7799832" y="4330598"/>
             <a:ext cx="3145536" cy="256032"/>
           </a:xfrm>
           <a:prstGeom prst="rect">
@@ -6569,8 +6785,8 @@
         </p:nvSpPr>
         <p:spPr>
           <a:xfrm>
-            <a:off x="7799832" y="4974336"/>
-            <a:ext cx="3145536" cy="576072"/>
+            <a:off x="7799832" y="4659782"/>
+            <a:ext cx="3145536" cy="899770"/>
           </a:xfrm>
           <a:prstGeom prst="rect">
             <a:avLst/>
@@ -6596,7 +6812,7 @@
                 <a:ea typeface="Aptos" pitchFamily="34" charset="-122"/>
                 <a:cs typeface="Aptos" pitchFamily="34" charset="-120"/>
               </a:rPr>
-              <a:t>Use the concept to clarify workflow changes, dependencies, staffing, procurement requirements, training needs, and.</a:t>
+              <a:t>Use the concept to clarify workflow changes, dependencies, staffing, procurement requirements, training needs, and implementation checkpoints.</a:t>
             </a:r>
             <a:endParaRPr lang="en-US" sz="1320" dirty="0"/>
           </a:p>
@@ -6965,11 +7181,11 @@
         <p:spPr>
           <a:xfrm>
             <a:off x="7635240" y="1325880"/>
-            <a:ext cx="3474720" cy="1325880"/>
+            <a:ext cx="3474720" cy="1207008"/>
           </a:xfrm>
           <a:prstGeom prst="roundRect">
             <a:avLst>
-              <a:gd name="adj" fmla="val 8276"/>
+              <a:gd name="adj" fmla="val 9091"/>
             </a:avLst>
           </a:prstGeom>
           <a:solidFill>
@@ -7031,7 +7247,7 @@
         <p:spPr>
           <a:xfrm>
             <a:off x="7799832" y="1801368"/>
-            <a:ext cx="3145536" cy="758952"/>
+            <a:ext cx="3145536" cy="640080"/>
           </a:xfrm>
           <a:prstGeom prst="rect">
             <a:avLst/>
@@ -7071,12 +7287,12 @@
         </p:nvSpPr>
         <p:spPr>
           <a:xfrm>
-            <a:off x="7635240" y="2788920"/>
-            <a:ext cx="3474720" cy="1536192"/>
+            <a:off x="7635240" y="2670048"/>
+            <a:ext cx="3474720" cy="1377086"/>
           </a:xfrm>
           <a:prstGeom prst="roundRect">
             <a:avLst>
-              <a:gd name="adj" fmla="val 7143"/>
+              <a:gd name="adj" fmla="val 7968"/>
             </a:avLst>
           </a:prstGeom>
           <a:solidFill>
@@ -7098,7 +7314,7 @@
         </p:nvSpPr>
         <p:spPr>
           <a:xfrm>
-            <a:off x="7799832" y="2935224"/>
+            <a:off x="7799832" y="2816352"/>
             <a:ext cx="3145536" cy="256032"/>
           </a:xfrm>
           <a:prstGeom prst="rect">
@@ -7137,8 +7353,8 @@
         </p:nvSpPr>
         <p:spPr>
           <a:xfrm>
-            <a:off x="7818120" y="3300984"/>
-            <a:ext cx="3090672" cy="877824"/>
+            <a:off x="7818120" y="3182112"/>
+            <a:ext cx="3090672" cy="718718"/>
           </a:xfrm>
           <a:prstGeom prst="rect">
             <a:avLst/>
@@ -7212,12 +7428,12 @@
         </p:nvSpPr>
         <p:spPr>
           <a:xfrm>
-            <a:off x="7635240" y="4498848"/>
-            <a:ext cx="3474720" cy="1143000"/>
+            <a:off x="7635240" y="4184294"/>
+            <a:ext cx="3474720" cy="1466698"/>
           </a:xfrm>
           <a:prstGeom prst="roundRect">
             <a:avLst>
-              <a:gd name="adj" fmla="val 9600"/>
+              <a:gd name="adj" fmla="val 7481"/>
             </a:avLst>
           </a:prstGeom>
           <a:solidFill>
@@ -7239,7 +7455,7 @@
         </p:nvSpPr>
         <p:spPr>
           <a:xfrm>
-            <a:off x="7799832" y="4645152"/>
+            <a:off x="7799832" y="4330598"/>
             <a:ext cx="3145536" cy="256032"/>
           </a:xfrm>
           <a:prstGeom prst="rect">
@@ -7278,8 +7494,8 @@
         </p:nvSpPr>
         <p:spPr>
           <a:xfrm>
-            <a:off x="7799832" y="4974336"/>
-            <a:ext cx="3145536" cy="576072"/>
+            <a:off x="7799832" y="4659782"/>
+            <a:ext cx="3145536" cy="899770"/>
           </a:xfrm>
           <a:prstGeom prst="rect">
             <a:avLst/>
@@ -7305,7 +7521,7 @@
                 <a:ea typeface="Aptos" pitchFamily="34" charset="-122"/>
                 <a:cs typeface="Aptos" pitchFamily="34" charset="-120"/>
               </a:rPr>
-              <a:t>Connect the concept to public health purpose, responsible use, required safeguards, documentation, and the next action a.</a:t>
+              <a:t>Connect the concept to public health purpose, responsible use, required safeguards, documentation, and the next action a department should take.</a:t>
             </a:r>
             <a:endParaRPr lang="en-US" sz="1320" dirty="0"/>
           </a:p>
@@ -7657,11 +7873,11 @@
         <p:spPr>
           <a:xfrm>
             <a:off x="7635240" y="1325880"/>
-            <a:ext cx="3474720" cy="1325880"/>
+            <a:ext cx="3474720" cy="1207008"/>
           </a:xfrm>
           <a:prstGeom prst="roundRect">
             <a:avLst>
-              <a:gd name="adj" fmla="val 8276"/>
+              <a:gd name="adj" fmla="val 9091"/>
             </a:avLst>
           </a:prstGeom>
           <a:solidFill>
@@ -7723,7 +7939,7 @@
         <p:spPr>
           <a:xfrm>
             <a:off x="7799832" y="1801368"/>
-            <a:ext cx="3145536" cy="758952"/>
+            <a:ext cx="3145536" cy="640080"/>
           </a:xfrm>
           <a:prstGeom prst="rect">
             <a:avLst/>
@@ -7763,12 +7979,12 @@
         </p:nvSpPr>
         <p:spPr>
           <a:xfrm>
-            <a:off x="7635240" y="2788920"/>
-            <a:ext cx="3474720" cy="1536192"/>
+            <a:off x="7635240" y="2670048"/>
+            <a:ext cx="3474720" cy="1377086"/>
           </a:xfrm>
           <a:prstGeom prst="roundRect">
             <a:avLst>
-              <a:gd name="adj" fmla="val 7143"/>
+              <a:gd name="adj" fmla="val 7968"/>
             </a:avLst>
           </a:prstGeom>
           <a:solidFill>
@@ -7790,7 +8006,7 @@
         </p:nvSpPr>
         <p:spPr>
           <a:xfrm>
-            <a:off x="7799832" y="2935224"/>
+            <a:off x="7799832" y="2816352"/>
             <a:ext cx="3145536" cy="256032"/>
           </a:xfrm>
           <a:prstGeom prst="rect">
@@ -7829,8 +8045,8 @@
         </p:nvSpPr>
         <p:spPr>
           <a:xfrm>
-            <a:off x="7818120" y="3300984"/>
-            <a:ext cx="3090672" cy="877824"/>
+            <a:off x="7818120" y="3182112"/>
+            <a:ext cx="3090672" cy="718718"/>
           </a:xfrm>
           <a:prstGeom prst="rect">
             <a:avLst/>
@@ -7887,12 +8103,12 @@
         </p:nvSpPr>
         <p:spPr>
           <a:xfrm>
-            <a:off x="7635240" y="4498848"/>
-            <a:ext cx="3474720" cy="1143000"/>
+            <a:off x="7635240" y="4184294"/>
+            <a:ext cx="3474720" cy="1466698"/>
           </a:xfrm>
           <a:prstGeom prst="roundRect">
             <a:avLst>
-              <a:gd name="adj" fmla="val 9600"/>
+              <a:gd name="adj" fmla="val 7481"/>
             </a:avLst>
           </a:prstGeom>
           <a:solidFill>
@@ -7914,7 +8130,7 @@
         </p:nvSpPr>
         <p:spPr>
           <a:xfrm>
-            <a:off x="7799832" y="4645152"/>
+            <a:off x="7799832" y="4330598"/>
             <a:ext cx="3145536" cy="256032"/>
           </a:xfrm>
           <a:prstGeom prst="rect">
@@ -7953,8 +8169,8 @@
         </p:nvSpPr>
         <p:spPr>
           <a:xfrm>
-            <a:off x="7799832" y="4974336"/>
-            <a:ext cx="3145536" cy="576072"/>
+            <a:off x="7799832" y="4659782"/>
+            <a:ext cx="3145536" cy="899770"/>
           </a:xfrm>
           <a:prstGeom prst="rect">
             <a:avLst/>
@@ -7980,7 +8196,7 @@
                 <a:ea typeface="Aptos" pitchFamily="34" charset="-122"/>
                 <a:cs typeface="Aptos" pitchFamily="34" charset="-120"/>
               </a:rPr>
-              <a:t>Connect the concept to public health purpose, responsible use, required safeguards, documentation, and the next action a.</a:t>
+              <a:t>Connect the concept to public health purpose, responsible use, required safeguards, documentation, and the next action a department should take.</a:t>
             </a:r>
             <a:endParaRPr lang="en-US" sz="1320" dirty="0"/>
           </a:p>
@@ -8349,11 +8565,11 @@
         <p:spPr>
           <a:xfrm>
             <a:off x="7635240" y="1325880"/>
-            <a:ext cx="3474720" cy="1325880"/>
+            <a:ext cx="3474720" cy="1207008"/>
           </a:xfrm>
           <a:prstGeom prst="roundRect">
             <a:avLst>
-              <a:gd name="adj" fmla="val 8276"/>
+              <a:gd name="adj" fmla="val 9091"/>
             </a:avLst>
           </a:prstGeom>
           <a:solidFill>
@@ -8415,7 +8631,7 @@
         <p:spPr>
           <a:xfrm>
             <a:off x="7799832" y="1801368"/>
-            <a:ext cx="3145536" cy="758952"/>
+            <a:ext cx="3145536" cy="640080"/>
           </a:xfrm>
           <a:prstGeom prst="rect">
             <a:avLst/>
@@ -8455,12 +8671,12 @@
         </p:nvSpPr>
         <p:spPr>
           <a:xfrm>
-            <a:off x="7635240" y="2788920"/>
-            <a:ext cx="3474720" cy="1536192"/>
+            <a:off x="7635240" y="2670048"/>
+            <a:ext cx="3474720" cy="1377086"/>
           </a:xfrm>
           <a:prstGeom prst="roundRect">
             <a:avLst>
-              <a:gd name="adj" fmla="val 7143"/>
+              <a:gd name="adj" fmla="val 7968"/>
             </a:avLst>
           </a:prstGeom>
           <a:solidFill>
@@ -8482,7 +8698,7 @@
         </p:nvSpPr>
         <p:spPr>
           <a:xfrm>
-            <a:off x="7799832" y="2935224"/>
+            <a:off x="7799832" y="2816352"/>
             <a:ext cx="3145536" cy="256032"/>
           </a:xfrm>
           <a:prstGeom prst="rect">
@@ -8521,8 +8737,8 @@
         </p:nvSpPr>
         <p:spPr>
           <a:xfrm>
-            <a:off x="7818120" y="3300984"/>
-            <a:ext cx="3090672" cy="877824"/>
+            <a:off x="7818120" y="3182112"/>
+            <a:ext cx="3090672" cy="718718"/>
           </a:xfrm>
           <a:prstGeom prst="rect">
             <a:avLst/>
@@ -8579,12 +8795,12 @@
         </p:nvSpPr>
         <p:spPr>
           <a:xfrm>
-            <a:off x="7635240" y="4498848"/>
-            <a:ext cx="3474720" cy="1143000"/>
+            <a:off x="7635240" y="4184294"/>
+            <a:ext cx="3474720" cy="1466698"/>
           </a:xfrm>
           <a:prstGeom prst="roundRect">
             <a:avLst>
-              <a:gd name="adj" fmla="val 9600"/>
+              <a:gd name="adj" fmla="val 7481"/>
             </a:avLst>
           </a:prstGeom>
           <a:solidFill>
@@ -8606,7 +8822,7 @@
         </p:nvSpPr>
         <p:spPr>
           <a:xfrm>
-            <a:off x="7799832" y="4645152"/>
+            <a:off x="7799832" y="4330598"/>
             <a:ext cx="3145536" cy="256032"/>
           </a:xfrm>
           <a:prstGeom prst="rect">
@@ -8645,8 +8861,8 @@
         </p:nvSpPr>
         <p:spPr>
           <a:xfrm>
-            <a:off x="7799832" y="4974336"/>
-            <a:ext cx="3145536" cy="576072"/>
+            <a:off x="7799832" y="4659782"/>
+            <a:ext cx="3145536" cy="899770"/>
           </a:xfrm>
           <a:prstGeom prst="rect">
             <a:avLst/>
@@ -8672,7 +8888,7 @@
                 <a:ea typeface="Aptos" pitchFamily="34" charset="-122"/>
                 <a:cs typeface="Aptos" pitchFamily="34" charset="-120"/>
               </a:rPr>
-              <a:t>Use the assignment to test whether you can explain the concept, apply it to a realistic public health situation, and.</a:t>
+              <a:t>Use the assignment to test whether you can explain the concept, apply it to a realistic public health situation, and identify what would need review before the work moves forward.</a:t>
             </a:r>
             <a:endParaRPr lang="en-US" sz="1320" dirty="0"/>
           </a:p>
@@ -9041,11 +9257,11 @@
         <p:spPr>
           <a:xfrm>
             <a:off x="7635240" y="1325880"/>
-            <a:ext cx="3474720" cy="1325880"/>
+            <a:ext cx="3474720" cy="1207008"/>
           </a:xfrm>
           <a:prstGeom prst="roundRect">
             <a:avLst>
-              <a:gd name="adj" fmla="val 8276"/>
+              <a:gd name="adj" fmla="val 9091"/>
             </a:avLst>
           </a:prstGeom>
           <a:solidFill>
@@ -9107,7 +9323,7 @@
         <p:spPr>
           <a:xfrm>
             <a:off x="7799832" y="1801368"/>
-            <a:ext cx="3145536" cy="758952"/>
+            <a:ext cx="3145536" cy="640080"/>
           </a:xfrm>
           <a:prstGeom prst="rect">
             <a:avLst/>
@@ -9147,12 +9363,12 @@
         </p:nvSpPr>
         <p:spPr>
           <a:xfrm>
-            <a:off x="7635240" y="2788920"/>
-            <a:ext cx="3474720" cy="1536192"/>
+            <a:off x="7635240" y="2670048"/>
+            <a:ext cx="3474720" cy="1377086"/>
           </a:xfrm>
           <a:prstGeom prst="roundRect">
             <a:avLst>
-              <a:gd name="adj" fmla="val 7143"/>
+              <a:gd name="adj" fmla="val 7968"/>
             </a:avLst>
           </a:prstGeom>
           <a:solidFill>
@@ -9174,7 +9390,7 @@
         </p:nvSpPr>
         <p:spPr>
           <a:xfrm>
-            <a:off x="7799832" y="2935224"/>
+            <a:off x="7799832" y="2816352"/>
             <a:ext cx="3145536" cy="256032"/>
           </a:xfrm>
           <a:prstGeom prst="rect">
@@ -9213,8 +9429,8 @@
         </p:nvSpPr>
         <p:spPr>
           <a:xfrm>
-            <a:off x="7818120" y="3300984"/>
-            <a:ext cx="3090672" cy="877824"/>
+            <a:off x="7818120" y="3182112"/>
+            <a:ext cx="3090672" cy="718718"/>
           </a:xfrm>
           <a:prstGeom prst="rect">
             <a:avLst/>
@@ -9288,12 +9504,12 @@
         </p:nvSpPr>
         <p:spPr>
           <a:xfrm>
-            <a:off x="7635240" y="4498848"/>
-            <a:ext cx="3474720" cy="1143000"/>
+            <a:off x="7635240" y="4184294"/>
+            <a:ext cx="3474720" cy="1466698"/>
           </a:xfrm>
           <a:prstGeom prst="roundRect">
             <a:avLst>
-              <a:gd name="adj" fmla="val 9600"/>
+              <a:gd name="adj" fmla="val 7481"/>
             </a:avLst>
           </a:prstGeom>
           <a:solidFill>
@@ -9315,7 +9531,7 @@
         </p:nvSpPr>
         <p:spPr>
           <a:xfrm>
-            <a:off x="7799832" y="4645152"/>
+            <a:off x="7799832" y="4330598"/>
             <a:ext cx="3145536" cy="256032"/>
           </a:xfrm>
           <a:prstGeom prst="rect">
@@ -9354,8 +9570,8 @@
         </p:nvSpPr>
         <p:spPr>
           <a:xfrm>
-            <a:off x="7799832" y="4974336"/>
-            <a:ext cx="3145536" cy="576072"/>
+            <a:off x="7799832" y="4659782"/>
+            <a:ext cx="3145536" cy="899770"/>
           </a:xfrm>
           <a:prstGeom prst="rect">
             <a:avLst/>
@@ -9381,7 +9597,7 @@
                 <a:ea typeface="Aptos" pitchFamily="34" charset="-122"/>
                 <a:cs typeface="Aptos" pitchFamily="34" charset="-120"/>
               </a:rPr>
-              <a:t>Connect the concept to public health purpose, responsible use, required safeguards, documentation, and the next action a.</a:t>
+              <a:t>Connect the concept to public health purpose, responsible use, required safeguards, documentation, and the next action a department should take.</a:t>
             </a:r>
             <a:endParaRPr lang="en-US" sz="1320" dirty="0"/>
           </a:p>
@@ -9716,11 +9932,11 @@
         <p:spPr>
           <a:xfrm>
             <a:off x="7635240" y="1325880"/>
-            <a:ext cx="3474720" cy="1325880"/>
+            <a:ext cx="3474720" cy="1207008"/>
           </a:xfrm>
           <a:prstGeom prst="roundRect">
             <a:avLst>
-              <a:gd name="adj" fmla="val 8276"/>
+              <a:gd name="adj" fmla="val 9091"/>
             </a:avLst>
           </a:prstGeom>
           <a:solidFill>
@@ -9782,7 +9998,7 @@
         <p:spPr>
           <a:xfrm>
             <a:off x="7799832" y="1801368"/>
-            <a:ext cx="3145536" cy="758952"/>
+            <a:ext cx="3145536" cy="640080"/>
           </a:xfrm>
           <a:prstGeom prst="rect">
             <a:avLst/>
@@ -9822,12 +10038,12 @@
         </p:nvSpPr>
         <p:spPr>
           <a:xfrm>
-            <a:off x="7635240" y="2788920"/>
-            <a:ext cx="3474720" cy="1536192"/>
+            <a:off x="7635240" y="2670048"/>
+            <a:ext cx="3474720" cy="1377086"/>
           </a:xfrm>
           <a:prstGeom prst="roundRect">
             <a:avLst>
-              <a:gd name="adj" fmla="val 7143"/>
+              <a:gd name="adj" fmla="val 7968"/>
             </a:avLst>
           </a:prstGeom>
           <a:solidFill>
@@ -9849,7 +10065,7 @@
         </p:nvSpPr>
         <p:spPr>
           <a:xfrm>
-            <a:off x="7799832" y="2935224"/>
+            <a:off x="7799832" y="2816352"/>
             <a:ext cx="3145536" cy="256032"/>
           </a:xfrm>
           <a:prstGeom prst="rect">
@@ -9888,8 +10104,8 @@
         </p:nvSpPr>
         <p:spPr>
           <a:xfrm>
-            <a:off x="7818120" y="3300984"/>
-            <a:ext cx="3090672" cy="877824"/>
+            <a:off x="7818120" y="3182112"/>
+            <a:ext cx="3090672" cy="718718"/>
           </a:xfrm>
           <a:prstGeom prst="rect">
             <a:avLst/>
@@ -9929,12 +10145,12 @@
         </p:nvSpPr>
         <p:spPr>
           <a:xfrm>
-            <a:off x="7635240" y="4498848"/>
-            <a:ext cx="3474720" cy="1143000"/>
+            <a:off x="7635240" y="4184294"/>
+            <a:ext cx="3474720" cy="1466698"/>
           </a:xfrm>
           <a:prstGeom prst="roundRect">
             <a:avLst>
-              <a:gd name="adj" fmla="val 9600"/>
+              <a:gd name="adj" fmla="val 7481"/>
             </a:avLst>
           </a:prstGeom>
           <a:solidFill>
@@ -9956,7 +10172,7 @@
         </p:nvSpPr>
         <p:spPr>
           <a:xfrm>
-            <a:off x="7799832" y="4645152"/>
+            <a:off x="7799832" y="4330598"/>
             <a:ext cx="3145536" cy="256032"/>
           </a:xfrm>
           <a:prstGeom prst="rect">
@@ -9995,8 +10211,8 @@
         </p:nvSpPr>
         <p:spPr>
           <a:xfrm>
-            <a:off x="7799832" y="4974336"/>
-            <a:ext cx="3145536" cy="576072"/>
+            <a:off x="7799832" y="4659782"/>
+            <a:ext cx="3145536" cy="899770"/>
           </a:xfrm>
           <a:prstGeom prst="rect">
             <a:avLst/>
@@ -10022,7 +10238,7 @@
                 <a:ea typeface="Aptos" pitchFamily="34" charset="-122"/>
                 <a:cs typeface="Aptos" pitchFamily="34" charset="-120"/>
               </a:rPr>
-              <a:t>Connect the concept to public health purpose, responsible use, required safeguards, documentation, and the next action a.</a:t>
+              <a:t>Connect the concept to public health purpose, responsible use, required safeguards, documentation, and the next action a department should take.</a:t>
             </a:r>
             <a:endParaRPr lang="en-US" sz="1320" dirty="0"/>
           </a:p>
@@ -10483,7 +10699,7 @@
                 <a:ea typeface="Aptos" pitchFamily="34" charset="-122"/>
                 <a:cs typeface="Aptos" pitchFamily="34" charset="-120"/>
               </a:rPr>
-              <a:t>Level: introductory Primary track: Shared Foundational / Introductory Course Appears in tracks: shared-foundational,.</a:t>
+              <a:t>Level: introductory Primary track: Shared Foundational / Introductory Course Appears in tracks: shared-foundational, policy, communications</a:t>
             </a:r>
             <a:endParaRPr lang="en-US" sz="1320" dirty="0"/>
           </a:p>
@@ -10993,11 +11209,11 @@
         <p:spPr>
           <a:xfrm>
             <a:off x="7635240" y="1325880"/>
-            <a:ext cx="3474720" cy="1325880"/>
+            <a:ext cx="3474720" cy="1207008"/>
           </a:xfrm>
           <a:prstGeom prst="roundRect">
             <a:avLst>
-              <a:gd name="adj" fmla="val 8276"/>
+              <a:gd name="adj" fmla="val 9091"/>
             </a:avLst>
           </a:prstGeom>
           <a:solidFill>
@@ -11059,7 +11275,7 @@
         <p:spPr>
           <a:xfrm>
             <a:off x="7799832" y="1801368"/>
-            <a:ext cx="3145536" cy="758952"/>
+            <a:ext cx="3145536" cy="640080"/>
           </a:xfrm>
           <a:prstGeom prst="rect">
             <a:avLst/>
@@ -11099,12 +11315,12 @@
         </p:nvSpPr>
         <p:spPr>
           <a:xfrm>
-            <a:off x="7635240" y="2788920"/>
-            <a:ext cx="3474720" cy="1536192"/>
+            <a:off x="7635240" y="2670048"/>
+            <a:ext cx="3474720" cy="1377086"/>
           </a:xfrm>
           <a:prstGeom prst="roundRect">
             <a:avLst>
-              <a:gd name="adj" fmla="val 7143"/>
+              <a:gd name="adj" fmla="val 7968"/>
             </a:avLst>
           </a:prstGeom>
           <a:solidFill>
@@ -11126,7 +11342,7 @@
         </p:nvSpPr>
         <p:spPr>
           <a:xfrm>
-            <a:off x="7799832" y="2935224"/>
+            <a:off x="7799832" y="2816352"/>
             <a:ext cx="3145536" cy="256032"/>
           </a:xfrm>
           <a:prstGeom prst="rect">
@@ -11165,8 +11381,8 @@
         </p:nvSpPr>
         <p:spPr>
           <a:xfrm>
-            <a:off x="7818120" y="3300984"/>
-            <a:ext cx="3090672" cy="877824"/>
+            <a:off x="7818120" y="3182112"/>
+            <a:ext cx="3090672" cy="718718"/>
           </a:xfrm>
           <a:prstGeom prst="rect">
             <a:avLst/>
@@ -11240,12 +11456,12 @@
         </p:nvSpPr>
         <p:spPr>
           <a:xfrm>
-            <a:off x="7635240" y="4498848"/>
-            <a:ext cx="3474720" cy="1143000"/>
+            <a:off x="7635240" y="4184294"/>
+            <a:ext cx="3474720" cy="1466698"/>
           </a:xfrm>
           <a:prstGeom prst="roundRect">
             <a:avLst>
-              <a:gd name="adj" fmla="val 9600"/>
+              <a:gd name="adj" fmla="val 7481"/>
             </a:avLst>
           </a:prstGeom>
           <a:solidFill>
@@ -11267,7 +11483,7 @@
         </p:nvSpPr>
         <p:spPr>
           <a:xfrm>
-            <a:off x="7799832" y="4645152"/>
+            <a:off x="7799832" y="4330598"/>
             <a:ext cx="3145536" cy="256032"/>
           </a:xfrm>
           <a:prstGeom prst="rect">
@@ -11306,8 +11522,8 @@
         </p:nvSpPr>
         <p:spPr>
           <a:xfrm>
-            <a:off x="7799832" y="4974336"/>
-            <a:ext cx="3145536" cy="576072"/>
+            <a:off x="7799832" y="4659782"/>
+            <a:ext cx="3145536" cy="899770"/>
           </a:xfrm>
           <a:prstGeom prst="rect">
             <a:avLst/>
@@ -11333,7 +11549,7 @@
                 <a:ea typeface="Aptos" pitchFamily="34" charset="-122"/>
                 <a:cs typeface="Aptos" pitchFamily="34" charset="-120"/>
               </a:rPr>
-              <a:t>Use the assignment to test whether you can explain the concept, apply it to a realistic public health situation, and.</a:t>
+              <a:t>Use the assignment to test whether you can explain the concept, apply it to a realistic public health situation, and identify what would need review before the work moves forward.</a:t>
             </a:r>
             <a:endParaRPr lang="en-US" sz="1320" dirty="0"/>
           </a:p>
@@ -11702,11 +11918,11 @@
         <p:spPr>
           <a:xfrm>
             <a:off x="7635240" y="1325880"/>
-            <a:ext cx="3474720" cy="1325880"/>
+            <a:ext cx="3474720" cy="1207008"/>
           </a:xfrm>
           <a:prstGeom prst="roundRect">
             <a:avLst>
-              <a:gd name="adj" fmla="val 8276"/>
+              <a:gd name="adj" fmla="val 9091"/>
             </a:avLst>
           </a:prstGeom>
           <a:solidFill>
@@ -11768,7 +11984,7 @@
         <p:spPr>
           <a:xfrm>
             <a:off x="7799832" y="1801368"/>
-            <a:ext cx="3145536" cy="758952"/>
+            <a:ext cx="3145536" cy="640080"/>
           </a:xfrm>
           <a:prstGeom prst="rect">
             <a:avLst/>
@@ -11808,12 +12024,12 @@
         </p:nvSpPr>
         <p:spPr>
           <a:xfrm>
-            <a:off x="7635240" y="2788920"/>
-            <a:ext cx="3474720" cy="1536192"/>
+            <a:off x="7635240" y="2670048"/>
+            <a:ext cx="3474720" cy="1377086"/>
           </a:xfrm>
           <a:prstGeom prst="roundRect">
             <a:avLst>
-              <a:gd name="adj" fmla="val 7143"/>
+              <a:gd name="adj" fmla="val 7968"/>
             </a:avLst>
           </a:prstGeom>
           <a:solidFill>
@@ -11835,7 +12051,7 @@
         </p:nvSpPr>
         <p:spPr>
           <a:xfrm>
-            <a:off x="7799832" y="2935224"/>
+            <a:off x="7799832" y="2816352"/>
             <a:ext cx="3145536" cy="256032"/>
           </a:xfrm>
           <a:prstGeom prst="rect">
@@ -11874,8 +12090,8 @@
         </p:nvSpPr>
         <p:spPr>
           <a:xfrm>
-            <a:off x="7818120" y="3300984"/>
-            <a:ext cx="3090672" cy="877824"/>
+            <a:off x="7818120" y="3182112"/>
+            <a:ext cx="3090672" cy="718718"/>
           </a:xfrm>
           <a:prstGeom prst="rect">
             <a:avLst/>
@@ -11949,12 +12165,12 @@
         </p:nvSpPr>
         <p:spPr>
           <a:xfrm>
-            <a:off x="7635240" y="4498848"/>
-            <a:ext cx="3474720" cy="1143000"/>
+            <a:off x="7635240" y="4184294"/>
+            <a:ext cx="3474720" cy="1466698"/>
           </a:xfrm>
           <a:prstGeom prst="roundRect">
             <a:avLst>
-              <a:gd name="adj" fmla="val 9600"/>
+              <a:gd name="adj" fmla="val 7481"/>
             </a:avLst>
           </a:prstGeom>
           <a:solidFill>
@@ -11976,7 +12192,7 @@
         </p:nvSpPr>
         <p:spPr>
           <a:xfrm>
-            <a:off x="7799832" y="4645152"/>
+            <a:off x="7799832" y="4330598"/>
             <a:ext cx="3145536" cy="256032"/>
           </a:xfrm>
           <a:prstGeom prst="rect">
@@ -12015,8 +12231,8 @@
         </p:nvSpPr>
         <p:spPr>
           <a:xfrm>
-            <a:off x="7799832" y="4974336"/>
-            <a:ext cx="3145536" cy="576072"/>
+            <a:off x="7799832" y="4659782"/>
+            <a:ext cx="3145536" cy="899770"/>
           </a:xfrm>
           <a:prstGeom prst="rect">
             <a:avLst/>
@@ -12042,7 +12258,7 @@
                 <a:ea typeface="Aptos" pitchFamily="34" charset="-122"/>
                 <a:cs typeface="Aptos" pitchFamily="34" charset="-120"/>
               </a:rPr>
-              <a:t>Use the assignment to test whether you can explain the concept, apply it to a realistic public health situation, and.</a:t>
+              <a:t>Use the assignment to test whether you can explain the concept, apply it to a realistic public health situation, and identify what would need review before the work moves forward.</a:t>
             </a:r>
             <a:endParaRPr lang="en-US" sz="1320" dirty="0"/>
           </a:p>
@@ -12411,11 +12627,11 @@
         <p:spPr>
           <a:xfrm>
             <a:off x="7635240" y="1325880"/>
-            <a:ext cx="3474720" cy="1325880"/>
+            <a:ext cx="3474720" cy="1207008"/>
           </a:xfrm>
           <a:prstGeom prst="roundRect">
             <a:avLst>
-              <a:gd name="adj" fmla="val 8276"/>
+              <a:gd name="adj" fmla="val 9091"/>
             </a:avLst>
           </a:prstGeom>
           <a:solidFill>
@@ -12477,7 +12693,7 @@
         <p:spPr>
           <a:xfrm>
             <a:off x="7799832" y="1801368"/>
-            <a:ext cx="3145536" cy="758952"/>
+            <a:ext cx="3145536" cy="640080"/>
           </a:xfrm>
           <a:prstGeom prst="rect">
             <a:avLst/>
@@ -12517,12 +12733,12 @@
         </p:nvSpPr>
         <p:spPr>
           <a:xfrm>
-            <a:off x="7635240" y="2788920"/>
-            <a:ext cx="3474720" cy="1536192"/>
+            <a:off x="7635240" y="2670048"/>
+            <a:ext cx="3474720" cy="1377086"/>
           </a:xfrm>
           <a:prstGeom prst="roundRect">
             <a:avLst>
-              <a:gd name="adj" fmla="val 7143"/>
+              <a:gd name="adj" fmla="val 7968"/>
             </a:avLst>
           </a:prstGeom>
           <a:solidFill>
@@ -12544,7 +12760,7 @@
         </p:nvSpPr>
         <p:spPr>
           <a:xfrm>
-            <a:off x="7799832" y="2935224"/>
+            <a:off x="7799832" y="2816352"/>
             <a:ext cx="3145536" cy="256032"/>
           </a:xfrm>
           <a:prstGeom prst="rect">
@@ -12583,8 +12799,8 @@
         </p:nvSpPr>
         <p:spPr>
           <a:xfrm>
-            <a:off x="7818120" y="3300984"/>
-            <a:ext cx="3090672" cy="877824"/>
+            <a:off x="7818120" y="3182112"/>
+            <a:ext cx="3090672" cy="718718"/>
           </a:xfrm>
           <a:prstGeom prst="rect">
             <a:avLst/>
@@ -12658,12 +12874,12 @@
         </p:nvSpPr>
         <p:spPr>
           <a:xfrm>
-            <a:off x="7635240" y="4498848"/>
-            <a:ext cx="3474720" cy="1143000"/>
+            <a:off x="7635240" y="4184294"/>
+            <a:ext cx="3474720" cy="1466698"/>
           </a:xfrm>
           <a:prstGeom prst="roundRect">
             <a:avLst>
-              <a:gd name="adj" fmla="val 9600"/>
+              <a:gd name="adj" fmla="val 7481"/>
             </a:avLst>
           </a:prstGeom>
           <a:solidFill>
@@ -12685,7 +12901,7 @@
         </p:nvSpPr>
         <p:spPr>
           <a:xfrm>
-            <a:off x="7799832" y="4645152"/>
+            <a:off x="7799832" y="4330598"/>
             <a:ext cx="3145536" cy="256032"/>
           </a:xfrm>
           <a:prstGeom prst="rect">
@@ -12724,8 +12940,8 @@
         </p:nvSpPr>
         <p:spPr>
           <a:xfrm>
-            <a:off x="7799832" y="4974336"/>
-            <a:ext cx="3145536" cy="576072"/>
+            <a:off x="7799832" y="4659782"/>
+            <a:ext cx="3145536" cy="899770"/>
           </a:xfrm>
           <a:prstGeom prst="rect">
             <a:avLst/>
@@ -12751,7 +12967,7 @@
                 <a:ea typeface="Aptos" pitchFamily="34" charset="-122"/>
                 <a:cs typeface="Aptos" pitchFamily="34" charset="-120"/>
               </a:rPr>
-              <a:t>Connect the concept to public health purpose, responsible use, required safeguards, documentation, and the next action a.</a:t>
+              <a:t>Connect the concept to public health purpose, responsible use, required safeguards, documentation, and the next action a department should take.</a:t>
             </a:r>
             <a:endParaRPr lang="en-US" sz="1320" dirty="0"/>
           </a:p>
@@ -13229,7 +13445,7 @@
                 <a:ea typeface="Aptos" pitchFamily="34" charset="-122"/>
                 <a:cs typeface="Aptos" pitchFamily="34" charset="-120"/>
               </a:rPr>
-              <a:t>Use the related plays to identify decisions, participants, timing, approvals, and documentation needed for responsible.</a:t>
+              <a:t>Use the related plays to identify decisions, participants, timing, approvals, and documentation needed for responsible implementation.</a:t>
             </a:r>
             <a:endParaRPr lang="en-US" sz="1320" dirty="0"/>
           </a:p>
@@ -13848,7 +14064,7 @@
                 <a:ea typeface="Aptos" pitchFamily="34" charset="-122"/>
                 <a:cs typeface="Aptos" pitchFamily="34" charset="-120"/>
               </a:rPr>
-              <a:t>Use linked tools when your department needs a structured worksheet, template, checklist, review process, or.</a:t>
+              <a:t>Use linked tools when your department needs a structured worksheet, template, checklist, review process, or documentation artifact.</a:t>
             </a:r>
             <a:endParaRPr lang="en-US" sz="1320" dirty="0"/>
           </a:p>
@@ -14358,11 +14574,11 @@
         <p:spPr>
           <a:xfrm>
             <a:off x="7635240" y="1325880"/>
-            <a:ext cx="3474720" cy="1325880"/>
+            <a:ext cx="3474720" cy="1207008"/>
           </a:xfrm>
           <a:prstGeom prst="roundRect">
             <a:avLst>
-              <a:gd name="adj" fmla="val 8276"/>
+              <a:gd name="adj" fmla="val 9091"/>
             </a:avLst>
           </a:prstGeom>
           <a:solidFill>
@@ -14424,7 +14640,7 @@
         <p:spPr>
           <a:xfrm>
             <a:off x="7799832" y="1801368"/>
-            <a:ext cx="3145536" cy="758952"/>
+            <a:ext cx="3145536" cy="640080"/>
           </a:xfrm>
           <a:prstGeom prst="rect">
             <a:avLst/>
@@ -14464,12 +14680,12 @@
         </p:nvSpPr>
         <p:spPr>
           <a:xfrm>
-            <a:off x="7635240" y="2788920"/>
-            <a:ext cx="3474720" cy="1536192"/>
+            <a:off x="7635240" y="2670048"/>
+            <a:ext cx="3474720" cy="1377086"/>
           </a:xfrm>
           <a:prstGeom prst="roundRect">
             <a:avLst>
-              <a:gd name="adj" fmla="val 7143"/>
+              <a:gd name="adj" fmla="val 7968"/>
             </a:avLst>
           </a:prstGeom>
           <a:solidFill>
@@ -14491,7 +14707,7 @@
         </p:nvSpPr>
         <p:spPr>
           <a:xfrm>
-            <a:off x="7799832" y="2935224"/>
+            <a:off x="7799832" y="2816352"/>
             <a:ext cx="3145536" cy="256032"/>
           </a:xfrm>
           <a:prstGeom prst="rect">
@@ -14530,8 +14746,8 @@
         </p:nvSpPr>
         <p:spPr>
           <a:xfrm>
-            <a:off x="7818120" y="3300984"/>
-            <a:ext cx="3090672" cy="877824"/>
+            <a:off x="7818120" y="3182112"/>
+            <a:ext cx="3090672" cy="718718"/>
           </a:xfrm>
           <a:prstGeom prst="rect">
             <a:avLst/>
@@ -14605,12 +14821,12 @@
         </p:nvSpPr>
         <p:spPr>
           <a:xfrm>
-            <a:off x="7635240" y="4498848"/>
-            <a:ext cx="3474720" cy="1143000"/>
+            <a:off x="7635240" y="4184294"/>
+            <a:ext cx="3474720" cy="1466698"/>
           </a:xfrm>
           <a:prstGeom prst="roundRect">
             <a:avLst>
-              <a:gd name="adj" fmla="val 9600"/>
+              <a:gd name="adj" fmla="val 7481"/>
             </a:avLst>
           </a:prstGeom>
           <a:solidFill>
@@ -14632,7 +14848,7 @@
         </p:nvSpPr>
         <p:spPr>
           <a:xfrm>
-            <a:off x="7799832" y="4645152"/>
+            <a:off x="7799832" y="4330598"/>
             <a:ext cx="3145536" cy="256032"/>
           </a:xfrm>
           <a:prstGeom prst="rect">
@@ -14671,8 +14887,8 @@
         </p:nvSpPr>
         <p:spPr>
           <a:xfrm>
-            <a:off x="7799832" y="4974336"/>
-            <a:ext cx="3145536" cy="576072"/>
+            <a:off x="7799832" y="4659782"/>
+            <a:ext cx="3145536" cy="899770"/>
           </a:xfrm>
           <a:prstGeom prst="rect">
             <a:avLst/>
@@ -14698,7 +14914,7 @@
                 <a:ea typeface="Aptos" pitchFamily="34" charset="-122"/>
                 <a:cs typeface="Aptos" pitchFamily="34" charset="-120"/>
               </a:rPr>
-              <a:t>Use the assignment to test whether you can explain the concept, apply it to a realistic public health situation, and.</a:t>
+              <a:t>Use the assignment to test whether you can explain the concept, apply it to a realistic public health situation, and identify what would need review before the work moves forward.</a:t>
             </a:r>
             <a:endParaRPr lang="en-US" sz="1320" dirty="0"/>
           </a:p>
@@ -15033,11 +15249,11 @@
         <p:spPr>
           <a:xfrm>
             <a:off x="7635240" y="1325880"/>
-            <a:ext cx="3474720" cy="1325880"/>
+            <a:ext cx="3474720" cy="1207008"/>
           </a:xfrm>
           <a:prstGeom prst="roundRect">
             <a:avLst>
-              <a:gd name="adj" fmla="val 8276"/>
+              <a:gd name="adj" fmla="val 9091"/>
             </a:avLst>
           </a:prstGeom>
           <a:solidFill>
@@ -15099,7 +15315,7 @@
         <p:spPr>
           <a:xfrm>
             <a:off x="7799832" y="1801368"/>
-            <a:ext cx="3145536" cy="758952"/>
+            <a:ext cx="3145536" cy="640080"/>
           </a:xfrm>
           <a:prstGeom prst="rect">
             <a:avLst/>
@@ -15139,12 +15355,12 @@
         </p:nvSpPr>
         <p:spPr>
           <a:xfrm>
-            <a:off x="7635240" y="2788920"/>
-            <a:ext cx="3474720" cy="1536192"/>
+            <a:off x="7635240" y="2670048"/>
+            <a:ext cx="3474720" cy="1377086"/>
           </a:xfrm>
           <a:prstGeom prst="roundRect">
             <a:avLst>
-              <a:gd name="adj" fmla="val 7143"/>
+              <a:gd name="adj" fmla="val 7968"/>
             </a:avLst>
           </a:prstGeom>
           <a:solidFill>
@@ -15166,7 +15382,7 @@
         </p:nvSpPr>
         <p:spPr>
           <a:xfrm>
-            <a:off x="7799832" y="2935224"/>
+            <a:off x="7799832" y="2816352"/>
             <a:ext cx="3145536" cy="256032"/>
           </a:xfrm>
           <a:prstGeom prst="rect">
@@ -15205,8 +15421,8 @@
         </p:nvSpPr>
         <p:spPr>
           <a:xfrm>
-            <a:off x="7818120" y="3300984"/>
-            <a:ext cx="3090672" cy="877824"/>
+            <a:off x="7818120" y="3182112"/>
+            <a:ext cx="3090672" cy="718718"/>
           </a:xfrm>
           <a:prstGeom prst="rect">
             <a:avLst/>
@@ -15246,12 +15462,12 @@
         </p:nvSpPr>
         <p:spPr>
           <a:xfrm>
-            <a:off x="7635240" y="4498848"/>
-            <a:ext cx="3474720" cy="1143000"/>
+            <a:off x="7635240" y="4184294"/>
+            <a:ext cx="3474720" cy="1466698"/>
           </a:xfrm>
           <a:prstGeom prst="roundRect">
             <a:avLst>
-              <a:gd name="adj" fmla="val 9600"/>
+              <a:gd name="adj" fmla="val 7481"/>
             </a:avLst>
           </a:prstGeom>
           <a:solidFill>
@@ -15273,7 +15489,7 @@
         </p:nvSpPr>
         <p:spPr>
           <a:xfrm>
-            <a:off x="7799832" y="4645152"/>
+            <a:off x="7799832" y="4330598"/>
             <a:ext cx="3145536" cy="256032"/>
           </a:xfrm>
           <a:prstGeom prst="rect">
@@ -15312,8 +15528,8 @@
         </p:nvSpPr>
         <p:spPr>
           <a:xfrm>
-            <a:off x="7799832" y="4974336"/>
-            <a:ext cx="3145536" cy="576072"/>
+            <a:off x="7799832" y="4659782"/>
+            <a:ext cx="3145536" cy="899770"/>
           </a:xfrm>
           <a:prstGeom prst="rect">
             <a:avLst/>
@@ -15339,7 +15555,7 @@
                 <a:ea typeface="Aptos" pitchFamily="34" charset="-122"/>
                 <a:cs typeface="Aptos" pitchFamily="34" charset="-120"/>
               </a:rPr>
-              <a:t>Use the assignment to test whether you can explain the concept, apply it to a realistic public health situation, and.</a:t>
+              <a:t>Use the assignment to test whether you can explain the concept, apply it to a realistic public health situation, and identify what would need review before the work moves forward.</a:t>
             </a:r>
             <a:endParaRPr lang="en-US" sz="1320" dirty="0"/>
           </a:p>
@@ -15708,11 +15924,11 @@
         <p:spPr>
           <a:xfrm>
             <a:off x="7635240" y="1325880"/>
-            <a:ext cx="3474720" cy="1325880"/>
+            <a:ext cx="3474720" cy="1207008"/>
           </a:xfrm>
           <a:prstGeom prst="roundRect">
             <a:avLst>
-              <a:gd name="adj" fmla="val 8276"/>
+              <a:gd name="adj" fmla="val 9091"/>
             </a:avLst>
           </a:prstGeom>
           <a:solidFill>
@@ -15774,7 +15990,7 @@
         <p:spPr>
           <a:xfrm>
             <a:off x="7799832" y="1801368"/>
-            <a:ext cx="3145536" cy="758952"/>
+            <a:ext cx="3145536" cy="640080"/>
           </a:xfrm>
           <a:prstGeom prst="rect">
             <a:avLst/>
@@ -15800,7 +16016,7 @@
                 <a:ea typeface="Aptos" pitchFamily="34" charset="-122"/>
                 <a:cs typeface="Aptos" pitchFamily="34" charset="-120"/>
               </a:rPr>
-              <a:t>AI for Social Good refers to the intentional use of artificial intelligence to improve public.</a:t>
+              <a:t>AI for Social Good refers to the intentional use of artificial intelligence to improve.</a:t>
             </a:r>
             <a:endParaRPr lang="en-US" sz="1320" dirty="0"/>
           </a:p>
@@ -15814,12 +16030,12 @@
         </p:nvSpPr>
         <p:spPr>
           <a:xfrm>
-            <a:off x="7635240" y="2788920"/>
-            <a:ext cx="3474720" cy="1536192"/>
+            <a:off x="7635240" y="2670048"/>
+            <a:ext cx="3474720" cy="1377086"/>
           </a:xfrm>
           <a:prstGeom prst="roundRect">
             <a:avLst>
-              <a:gd name="adj" fmla="val 7143"/>
+              <a:gd name="adj" fmla="val 7968"/>
             </a:avLst>
           </a:prstGeom>
           <a:solidFill>
@@ -15841,8 +16057,8 @@
         </p:nvSpPr>
         <p:spPr>
           <a:xfrm>
-            <a:off x="7799832" y="2935224"/>
-            <a:ext cx="3145536" cy="256032"/>
+            <a:off x="7799832" y="2798064"/>
+            <a:ext cx="3145536" cy="237744"/>
           </a:xfrm>
           <a:prstGeom prst="rect">
             <a:avLst/>
@@ -15858,7 +16074,7 @@
               <a:buNone/>
             </a:pPr>
             <a:r>
-              <a:rPr lang="en-US" sz="1300" b="1" dirty="0">
+              <a:rPr lang="en-US" sz="1250" b="1" dirty="0">
                 <a:solidFill>
                   <a:srgbClr val="0068B7"/>
                 </a:solidFill>
@@ -15866,101 +16082,317 @@
                 <a:ea typeface="Aptos" pitchFamily="34" charset="-122"/>
                 <a:cs typeface="Aptos" pitchFamily="34" charset="-120"/>
               </a:rPr>
-              <a:t>Concept checkpoints</a:t>
-            </a:r>
-            <a:endParaRPr lang="en-US" sz="1300" dirty="0"/>
-          </a:p>
-        </p:txBody>
-      </p:sp>
-      <p:sp>
-        <p:nvSpPr>
-          <p:cNvPr id="15" name="Text 13"/>
-          <p:cNvSpPr/>
-          <p:nvPr/>
-        </p:nvSpPr>
-        <p:spPr>
-          <a:xfrm>
-            <a:off x="7818120" y="3300984"/>
-            <a:ext cx="3090672" cy="877824"/>
-          </a:xfrm>
-          <a:prstGeom prst="rect">
-            <a:avLst/>
-          </a:prstGeom>
-          <a:noFill/>
-          <a:ln/>
-        </p:spPr>
-        <p:txBody>
-          <a:bodyPr wrap="square" lIns="508" tIns="508" rIns="508" bIns="508" rtlCol="0" anchor="t">
+              <a:t>Human-in-the-loop use</a:t>
+            </a:r>
+            <a:endParaRPr lang="en-US" sz="1250" dirty="0"/>
+          </a:p>
+        </p:txBody>
+      </p:sp>
+      <p:sp>
+        <p:nvSpPr>
+          <p:cNvPr id="15" name="Shape 13"/>
+          <p:cNvSpPr/>
+          <p:nvPr/>
+        </p:nvSpPr>
+        <p:spPr>
+          <a:xfrm>
+            <a:off x="8763000" y="3351276"/>
+            <a:ext cx="164592" cy="0"/>
+          </a:xfrm>
+          <a:prstGeom prst="line">
+            <a:avLst/>
+          </a:prstGeom>
+          <a:noFill/>
+          <a:ln w="15240">
+            <a:solidFill>
+              <a:srgbClr val="8ABBD8"/>
+            </a:solidFill>
+            <a:prstDash val="solid"/>
+          </a:ln>
+        </p:spPr>
+      </p:sp>
+      <p:sp>
+        <p:nvSpPr>
+          <p:cNvPr id="16" name="Shape 14"/>
+          <p:cNvSpPr/>
+          <p:nvPr/>
+        </p:nvSpPr>
+        <p:spPr>
+          <a:xfrm>
+            <a:off x="7872984" y="3200400"/>
+            <a:ext cx="890016" cy="301752"/>
+          </a:xfrm>
+          <a:prstGeom prst="roundRect">
+            <a:avLst>
+              <a:gd name="adj" fmla="val 24242"/>
+            </a:avLst>
+          </a:prstGeom>
+          <a:solidFill>
+            <a:srgbClr val="0068B7"/>
+          </a:solidFill>
+          <a:ln w="12700">
+            <a:solidFill>
+              <a:srgbClr val="0068B7"/>
+            </a:solidFill>
+            <a:prstDash val="solid"/>
+          </a:ln>
+        </p:spPr>
+      </p:sp>
+      <p:sp>
+        <p:nvSpPr>
+          <p:cNvPr id="17" name="Text 15"/>
+          <p:cNvSpPr/>
+          <p:nvPr/>
+        </p:nvSpPr>
+        <p:spPr>
+          <a:xfrm>
+            <a:off x="7909560" y="3273552"/>
+            <a:ext cx="816864" cy="146304"/>
+          </a:xfrm>
+          <a:prstGeom prst="rect">
+            <a:avLst/>
+          </a:prstGeom>
+          <a:noFill/>
+          <a:ln/>
+        </p:spPr>
+        <p:txBody>
+          <a:bodyPr wrap="square" lIns="0" tIns="0" rIns="0" bIns="0" rtlCol="0" anchor="ctr">
             <a:normAutofit/>
           </a:bodyPr>
           <a:lstStyle/>
           <a:p>
-            <a:pPr indent="0" marL="0">
-              <a:buNone/>
-            </a:pPr>
-            <a:r>
-              <a:rPr lang="en-US" sz="1220" dirty="0">
-                <a:solidFill>
-                  <a:srgbClr val="17364A"/>
-                </a:solidFill>
-                <a:latin typeface="Aptos" pitchFamily="34" charset="0"/>
-                <a:ea typeface="Aptos" pitchFamily="34" charset="-122"/>
-                <a:cs typeface="Aptos" pitchFamily="34" charset="-120"/>
-              </a:rPr>
-              <a:t>AI for Social Good refers to the intentional use of artificial.</a:t>
-            </a:r>
-            <a:endParaRPr lang="en-US" sz="1220" dirty="0"/>
-          </a:p>
-          <a:p>
-            <a:pPr indent="0" marL="0">
-              <a:buNone/>
-            </a:pPr>
-            <a:r>
-              <a:rPr lang="en-US" sz="1220" dirty="0">
-                <a:solidFill>
-                  <a:srgbClr val="17364A"/>
-                </a:solidFill>
-                <a:latin typeface="Aptos" pitchFamily="34" charset="0"/>
-                <a:ea typeface="Aptos" pitchFamily="34" charset="-122"/>
-                <a:cs typeface="Aptos" pitchFamily="34" charset="-120"/>
-              </a:rPr>
-              <a:t>Public health agencies already work to prevent disease, protect.</a:t>
-            </a:r>
-            <a:endParaRPr lang="en-US" sz="1220" dirty="0"/>
-          </a:p>
-          <a:p>
-            <a:pPr indent="0" marL="0">
-              <a:buNone/>
-            </a:pPr>
-            <a:r>
-              <a:rPr lang="en-US" sz="1220" dirty="0">
-                <a:solidFill>
-                  <a:srgbClr val="17364A"/>
-                </a:solidFill>
-                <a:latin typeface="Aptos" pitchFamily="34" charset="0"/>
-                <a:ea typeface="Aptos" pitchFamily="34" charset="-122"/>
-                <a:cs typeface="Aptos" pitchFamily="34" charset="-120"/>
-              </a:rPr>
-              <a:t>AI for Social Good should therefore be judged by whether it.</a:t>
-            </a:r>
-            <a:endParaRPr lang="en-US" sz="1220" dirty="0"/>
-          </a:p>
-        </p:txBody>
-      </p:sp>
-      <p:sp>
-        <p:nvSpPr>
-          <p:cNvPr id="16" name="Shape 14"/>
-          <p:cNvSpPr/>
-          <p:nvPr/>
-        </p:nvSpPr>
-        <p:spPr>
-          <a:xfrm>
-            <a:off x="7635240" y="4498848"/>
-            <a:ext cx="3474720" cy="1143000"/>
+            <a:pPr algn="ctr" indent="0" marL="0">
+              <a:buNone/>
+            </a:pPr>
+            <a:r>
+              <a:rPr lang="en-US" sz="880" b="1" dirty="0">
+                <a:solidFill>
+                  <a:srgbClr val="FFFFFF"/>
+                </a:solidFill>
+                <a:latin typeface="Aptos" pitchFamily="34" charset="0"/>
+                <a:ea typeface="Aptos" pitchFamily="34" charset="-122"/>
+                <a:cs typeface="Aptos" pitchFamily="34" charset="-120"/>
+              </a:rPr>
+              <a:t>Input</a:t>
+            </a:r>
+            <a:endParaRPr lang="en-US" sz="880" dirty="0"/>
+          </a:p>
+        </p:txBody>
+      </p:sp>
+      <p:sp>
+        <p:nvSpPr>
+          <p:cNvPr id="18" name="Shape 16"/>
+          <p:cNvSpPr/>
+          <p:nvPr/>
+        </p:nvSpPr>
+        <p:spPr>
+          <a:xfrm>
+            <a:off x="9817608" y="3351276"/>
+            <a:ext cx="164592" cy="0"/>
+          </a:xfrm>
+          <a:prstGeom prst="line">
+            <a:avLst/>
+          </a:prstGeom>
+          <a:noFill/>
+          <a:ln w="15240">
+            <a:solidFill>
+              <a:srgbClr val="8ABBD8"/>
+            </a:solidFill>
+            <a:prstDash val="solid"/>
+          </a:ln>
+        </p:spPr>
+      </p:sp>
+      <p:sp>
+        <p:nvSpPr>
+          <p:cNvPr id="19" name="Shape 17"/>
+          <p:cNvSpPr/>
+          <p:nvPr/>
+        </p:nvSpPr>
+        <p:spPr>
+          <a:xfrm>
+            <a:off x="8927592" y="3200400"/>
+            <a:ext cx="890016" cy="301752"/>
           </a:xfrm>
           <a:prstGeom prst="roundRect">
             <a:avLst>
-              <a:gd name="adj" fmla="val 9600"/>
+              <a:gd name="adj" fmla="val 24242"/>
+            </a:avLst>
+          </a:prstGeom>
+          <a:solidFill>
+            <a:srgbClr val="2F8A28"/>
+          </a:solidFill>
+          <a:ln w="12700">
+            <a:solidFill>
+              <a:srgbClr val="2F8A28"/>
+            </a:solidFill>
+            <a:prstDash val="solid"/>
+          </a:ln>
+        </p:spPr>
+      </p:sp>
+      <p:sp>
+        <p:nvSpPr>
+          <p:cNvPr id="20" name="Text 18"/>
+          <p:cNvSpPr/>
+          <p:nvPr/>
+        </p:nvSpPr>
+        <p:spPr>
+          <a:xfrm>
+            <a:off x="8964168" y="3273552"/>
+            <a:ext cx="816864" cy="146304"/>
+          </a:xfrm>
+          <a:prstGeom prst="rect">
+            <a:avLst/>
+          </a:prstGeom>
+          <a:noFill/>
+          <a:ln/>
+        </p:spPr>
+        <p:txBody>
+          <a:bodyPr wrap="square" lIns="0" tIns="0" rIns="0" bIns="0" rtlCol="0" anchor="ctr">
+            <a:normAutofit/>
+          </a:bodyPr>
+          <a:lstStyle/>
+          <a:p>
+            <a:pPr algn="ctr" indent="0" marL="0">
+              <a:buNone/>
+            </a:pPr>
+            <a:r>
+              <a:rPr lang="en-US" sz="880" b="1" dirty="0">
+                <a:solidFill>
+                  <a:srgbClr val="FFFFFF"/>
+                </a:solidFill>
+                <a:latin typeface="Aptos" pitchFamily="34" charset="0"/>
+                <a:ea typeface="Aptos" pitchFamily="34" charset="-122"/>
+                <a:cs typeface="Aptos" pitchFamily="34" charset="-120"/>
+              </a:rPr>
+              <a:t>AI assist</a:t>
+            </a:r>
+            <a:endParaRPr lang="en-US" sz="880" dirty="0"/>
+          </a:p>
+        </p:txBody>
+      </p:sp>
+      <p:sp>
+        <p:nvSpPr>
+          <p:cNvPr id="21" name="Shape 19"/>
+          <p:cNvSpPr/>
+          <p:nvPr/>
+        </p:nvSpPr>
+        <p:spPr>
+          <a:xfrm>
+            <a:off x="9982200" y="3200400"/>
+            <a:ext cx="890016" cy="301752"/>
+          </a:xfrm>
+          <a:prstGeom prst="roundRect">
+            <a:avLst>
+              <a:gd name="adj" fmla="val 24242"/>
+            </a:avLst>
+          </a:prstGeom>
+          <a:solidFill>
+            <a:srgbClr val="6A4CA3"/>
+          </a:solidFill>
+          <a:ln w="12700">
+            <a:solidFill>
+              <a:srgbClr val="6A4CA3"/>
+            </a:solidFill>
+            <a:prstDash val="solid"/>
+          </a:ln>
+        </p:spPr>
+      </p:sp>
+      <p:sp>
+        <p:nvSpPr>
+          <p:cNvPr id="22" name="Text 20"/>
+          <p:cNvSpPr/>
+          <p:nvPr/>
+        </p:nvSpPr>
+        <p:spPr>
+          <a:xfrm>
+            <a:off x="10018776" y="3273552"/>
+            <a:ext cx="816864" cy="146304"/>
+          </a:xfrm>
+          <a:prstGeom prst="rect">
+            <a:avLst/>
+          </a:prstGeom>
+          <a:noFill/>
+          <a:ln/>
+        </p:spPr>
+        <p:txBody>
+          <a:bodyPr wrap="square" lIns="0" tIns="0" rIns="0" bIns="0" rtlCol="0" anchor="ctr">
+            <a:normAutofit/>
+          </a:bodyPr>
+          <a:lstStyle/>
+          <a:p>
+            <a:pPr algn="ctr" indent="0" marL="0">
+              <a:buNone/>
+            </a:pPr>
+            <a:r>
+              <a:rPr lang="en-US" sz="880" b="1" dirty="0">
+                <a:solidFill>
+                  <a:srgbClr val="FFFFFF"/>
+                </a:solidFill>
+                <a:latin typeface="Aptos" pitchFamily="34" charset="0"/>
+                <a:ea typeface="Aptos" pitchFamily="34" charset="-122"/>
+                <a:cs typeface="Aptos" pitchFamily="34" charset="-120"/>
+              </a:rPr>
+              <a:t>Review</a:t>
+            </a:r>
+            <a:endParaRPr lang="en-US" sz="880" dirty="0"/>
+          </a:p>
+        </p:txBody>
+      </p:sp>
+      <p:sp>
+        <p:nvSpPr>
+          <p:cNvPr id="23" name="Text 21"/>
+          <p:cNvSpPr/>
+          <p:nvPr/>
+        </p:nvSpPr>
+        <p:spPr>
+          <a:xfrm>
+            <a:off x="7854696" y="3694176"/>
+            <a:ext cx="3035808" cy="206654"/>
+          </a:xfrm>
+          <a:prstGeom prst="rect">
+            <a:avLst/>
+          </a:prstGeom>
+          <a:noFill/>
+          <a:ln/>
+        </p:spPr>
+        <p:txBody>
+          <a:bodyPr wrap="square" lIns="254" tIns="254" rIns="254" bIns="254" rtlCol="0" anchor="t">
+            <a:normAutofit/>
+          </a:bodyPr>
+          <a:lstStyle/>
+          <a:p>
+            <a:pPr indent="0" marL="0">
+              <a:buNone/>
+            </a:pPr>
+            <a:r>
+              <a:rPr lang="en-US" sz="1120" dirty="0">
+                <a:solidFill>
+                  <a:srgbClr val="17364A"/>
+                </a:solidFill>
+                <a:latin typeface="Aptos" pitchFamily="34" charset="0"/>
+                <a:ea typeface="Aptos" pitchFamily="34" charset="-122"/>
+                <a:cs typeface="Aptos" pitchFamily="34" charset="-120"/>
+              </a:rPr>
+              <a:t>AI can support work, but public health judgment remains responsible for interpretation and final use.</a:t>
+            </a:r>
+            <a:endParaRPr lang="en-US" sz="1120" dirty="0"/>
+          </a:p>
+        </p:txBody>
+      </p:sp>
+      <p:sp>
+        <p:nvSpPr>
+          <p:cNvPr id="24" name="Shape 22"/>
+          <p:cNvSpPr/>
+          <p:nvPr/>
+        </p:nvSpPr>
+        <p:spPr>
+          <a:xfrm>
+            <a:off x="7635240" y="4184294"/>
+            <a:ext cx="3474720" cy="1466698"/>
+          </a:xfrm>
+          <a:prstGeom prst="roundRect">
+            <a:avLst>
+              <a:gd name="adj" fmla="val 7481"/>
             </a:avLst>
           </a:prstGeom>
           <a:solidFill>
@@ -15976,13 +16408,13 @@
       </p:sp>
       <p:sp>
         <p:nvSpPr>
-          <p:cNvPr id="17" name="Text 15"/>
-          <p:cNvSpPr/>
-          <p:nvPr/>
-        </p:nvSpPr>
-        <p:spPr>
-          <a:xfrm>
-            <a:off x="7799832" y="4645152"/>
+          <p:cNvPr id="25" name="Text 23"/>
+          <p:cNvSpPr/>
+          <p:nvPr/>
+        </p:nvSpPr>
+        <p:spPr>
+          <a:xfrm>
+            <a:off x="7799832" y="4330598"/>
             <a:ext cx="3145536" cy="256032"/>
           </a:xfrm>
           <a:prstGeom prst="rect">
@@ -16015,14 +16447,14 @@
       </p:sp>
       <p:sp>
         <p:nvSpPr>
-          <p:cNvPr id="18" name="Text 16"/>
-          <p:cNvSpPr/>
-          <p:nvPr/>
-        </p:nvSpPr>
-        <p:spPr>
-          <a:xfrm>
-            <a:off x="7799832" y="4974336"/>
-            <a:ext cx="3145536" cy="576072"/>
+          <p:cNvPr id="26" name="Text 24"/>
+          <p:cNvSpPr/>
+          <p:nvPr/>
+        </p:nvSpPr>
+        <p:spPr>
+          <a:xfrm>
+            <a:off x="7799832" y="4659782"/>
+            <a:ext cx="3145536" cy="899770"/>
           </a:xfrm>
           <a:prstGeom prst="rect">
             <a:avLst/>
@@ -16048,7 +16480,7 @@
                 <a:ea typeface="Aptos" pitchFamily="34" charset="-122"/>
                 <a:cs typeface="Aptos" pitchFamily="34" charset="-120"/>
               </a:rPr>
-              <a:t>Connect the concept to public health purpose, responsible use, required safeguards, documentation, and the next action a.</a:t>
+              <a:t>Connect the concept to public health purpose, responsible use, required safeguards, documentation, and the next action a department should take.</a:t>
             </a:r>
             <a:endParaRPr lang="en-US" sz="1320" dirty="0"/>
           </a:p>
@@ -16417,11 +16849,11 @@
         <p:spPr>
           <a:xfrm>
             <a:off x="7635240" y="1325880"/>
-            <a:ext cx="3474720" cy="1325880"/>
+            <a:ext cx="3474720" cy="1255471"/>
           </a:xfrm>
           <a:prstGeom prst="roundRect">
             <a:avLst>
-              <a:gd name="adj" fmla="val 8276"/>
+              <a:gd name="adj" fmla="val 8740"/>
             </a:avLst>
           </a:prstGeom>
           <a:solidFill>
@@ -16483,7 +16915,7 @@
         <p:spPr>
           <a:xfrm>
             <a:off x="7799832" y="1801368"/>
-            <a:ext cx="3145536" cy="758952"/>
+            <a:ext cx="3145536" cy="688543"/>
           </a:xfrm>
           <a:prstGeom prst="rect">
             <a:avLst/>
@@ -16523,12 +16955,12 @@
         </p:nvSpPr>
         <p:spPr>
           <a:xfrm>
-            <a:off x="7635240" y="2788920"/>
-            <a:ext cx="3474720" cy="1536192"/>
+            <a:off x="7635240" y="2718511"/>
+            <a:ext cx="3474720" cy="1328623"/>
           </a:xfrm>
           <a:prstGeom prst="roundRect">
             <a:avLst>
-              <a:gd name="adj" fmla="val 7143"/>
+              <a:gd name="adj" fmla="val 8259"/>
             </a:avLst>
           </a:prstGeom>
           <a:solidFill>
@@ -16550,8 +16982,8 @@
         </p:nvSpPr>
         <p:spPr>
           <a:xfrm>
-            <a:off x="7799832" y="2935224"/>
-            <a:ext cx="3145536" cy="256032"/>
+            <a:off x="7799832" y="2846527"/>
+            <a:ext cx="3145536" cy="237744"/>
           </a:xfrm>
           <a:prstGeom prst="rect">
             <a:avLst/>
@@ -16567,7 +16999,7 @@
               <a:buNone/>
             </a:pPr>
             <a:r>
-              <a:rPr lang="en-US" sz="1300" b="1" dirty="0">
+              <a:rPr lang="en-US" sz="1250" b="1" dirty="0">
                 <a:solidFill>
                   <a:srgbClr val="0068B7"/>
                 </a:solidFill>
@@ -16575,101 +17007,317 @@
                 <a:ea typeface="Aptos" pitchFamily="34" charset="-122"/>
                 <a:cs typeface="Aptos" pitchFamily="34" charset="-120"/>
               </a:rPr>
-              <a:t>Concept checkpoints</a:t>
-            </a:r>
-            <a:endParaRPr lang="en-US" sz="1300" dirty="0"/>
-          </a:p>
-        </p:txBody>
-      </p:sp>
-      <p:sp>
-        <p:nvSpPr>
-          <p:cNvPr id="15" name="Text 13"/>
-          <p:cNvSpPr/>
-          <p:nvPr/>
-        </p:nvSpPr>
-        <p:spPr>
-          <a:xfrm>
-            <a:off x="7818120" y="3300984"/>
-            <a:ext cx="3090672" cy="877824"/>
-          </a:xfrm>
-          <a:prstGeom prst="rect">
-            <a:avLst/>
-          </a:prstGeom>
-          <a:noFill/>
-          <a:ln/>
-        </p:spPr>
-        <p:txBody>
-          <a:bodyPr wrap="square" lIns="508" tIns="508" rIns="508" bIns="508" rtlCol="0" anchor="t">
+              <a:t>Human-in-the-loop use</a:t>
+            </a:r>
+            <a:endParaRPr lang="en-US" sz="1250" dirty="0"/>
+          </a:p>
+        </p:txBody>
+      </p:sp>
+      <p:sp>
+        <p:nvSpPr>
+          <p:cNvPr id="15" name="Shape 13"/>
+          <p:cNvSpPr/>
+          <p:nvPr/>
+        </p:nvSpPr>
+        <p:spPr>
+          <a:xfrm>
+            <a:off x="8763000" y="3399739"/>
+            <a:ext cx="164592" cy="0"/>
+          </a:xfrm>
+          <a:prstGeom prst="line">
+            <a:avLst/>
+          </a:prstGeom>
+          <a:noFill/>
+          <a:ln w="15240">
+            <a:solidFill>
+              <a:srgbClr val="8ABBD8"/>
+            </a:solidFill>
+            <a:prstDash val="solid"/>
+          </a:ln>
+        </p:spPr>
+      </p:sp>
+      <p:sp>
+        <p:nvSpPr>
+          <p:cNvPr id="16" name="Shape 14"/>
+          <p:cNvSpPr/>
+          <p:nvPr/>
+        </p:nvSpPr>
+        <p:spPr>
+          <a:xfrm>
+            <a:off x="7872984" y="3248863"/>
+            <a:ext cx="890016" cy="301752"/>
+          </a:xfrm>
+          <a:prstGeom prst="roundRect">
+            <a:avLst>
+              <a:gd name="adj" fmla="val 24242"/>
+            </a:avLst>
+          </a:prstGeom>
+          <a:solidFill>
+            <a:srgbClr val="0068B7"/>
+          </a:solidFill>
+          <a:ln w="12700">
+            <a:solidFill>
+              <a:srgbClr val="0068B7"/>
+            </a:solidFill>
+            <a:prstDash val="solid"/>
+          </a:ln>
+        </p:spPr>
+      </p:sp>
+      <p:sp>
+        <p:nvSpPr>
+          <p:cNvPr id="17" name="Text 15"/>
+          <p:cNvSpPr/>
+          <p:nvPr/>
+        </p:nvSpPr>
+        <p:spPr>
+          <a:xfrm>
+            <a:off x="7909560" y="3322015"/>
+            <a:ext cx="816864" cy="146304"/>
+          </a:xfrm>
+          <a:prstGeom prst="rect">
+            <a:avLst/>
+          </a:prstGeom>
+          <a:noFill/>
+          <a:ln/>
+        </p:spPr>
+        <p:txBody>
+          <a:bodyPr wrap="square" lIns="0" tIns="0" rIns="0" bIns="0" rtlCol="0" anchor="ctr">
             <a:normAutofit/>
           </a:bodyPr>
           <a:lstStyle/>
           <a:p>
-            <a:pPr indent="0" marL="0">
-              <a:buNone/>
-            </a:pPr>
-            <a:r>
-              <a:rPr lang="en-US" sz="1220" dirty="0">
-                <a:solidFill>
-                  <a:srgbClr val="17364A"/>
-                </a:solidFill>
-                <a:latin typeface="Aptos" pitchFamily="34" charset="0"/>
-                <a:ea typeface="Aptos" pitchFamily="34" charset="-122"/>
-                <a:cs typeface="Aptos" pitchFamily="34" charset="-120"/>
-              </a:rPr>
-              <a:t>Public health is uniquely positioned to use AI for social good.</a:t>
-            </a:r>
-            <a:endParaRPr lang="en-US" sz="1220" dirty="0"/>
-          </a:p>
-          <a:p>
-            <a:pPr indent="0" marL="0">
-              <a:buNone/>
-            </a:pPr>
-            <a:r>
-              <a:rPr lang="en-US" sz="1220" dirty="0">
-                <a:solidFill>
-                  <a:srgbClr val="17364A"/>
-                </a:solidFill>
-                <a:latin typeface="Aptos" pitchFamily="34" charset="0"/>
-                <a:ea typeface="Aptos" pitchFamily="34" charset="-122"/>
-                <a:cs typeface="Aptos" pitchFamily="34" charset="-120"/>
-              </a:rPr>
-              <a:t>AI can help agencies identify emerging needs, improve access to.</a:t>
-            </a:r>
-            <a:endParaRPr lang="en-US" sz="1220" dirty="0"/>
-          </a:p>
-          <a:p>
-            <a:pPr indent="0" marL="0">
-              <a:buNone/>
-            </a:pPr>
-            <a:r>
-              <a:rPr lang="en-US" sz="1220" dirty="0">
-                <a:solidFill>
-                  <a:srgbClr val="17364A"/>
-                </a:solidFill>
-                <a:latin typeface="Aptos" pitchFamily="34" charset="0"/>
-                <a:ea typeface="Aptos" pitchFamily="34" charset="-122"/>
-                <a:cs typeface="Aptos" pitchFamily="34" charset="-120"/>
-              </a:rPr>
-              <a:t>These benefits are especially important when agencies face.</a:t>
-            </a:r>
-            <a:endParaRPr lang="en-US" sz="1220" dirty="0"/>
-          </a:p>
-        </p:txBody>
-      </p:sp>
-      <p:sp>
-        <p:nvSpPr>
-          <p:cNvPr id="16" name="Shape 14"/>
-          <p:cNvSpPr/>
-          <p:nvPr/>
-        </p:nvSpPr>
-        <p:spPr>
-          <a:xfrm>
-            <a:off x="7635240" y="4498848"/>
-            <a:ext cx="3474720" cy="1143000"/>
+            <a:pPr algn="ctr" indent="0" marL="0">
+              <a:buNone/>
+            </a:pPr>
+            <a:r>
+              <a:rPr lang="en-US" sz="880" b="1" dirty="0">
+                <a:solidFill>
+                  <a:srgbClr val="FFFFFF"/>
+                </a:solidFill>
+                <a:latin typeface="Aptos" pitchFamily="34" charset="0"/>
+                <a:ea typeface="Aptos" pitchFamily="34" charset="-122"/>
+                <a:cs typeface="Aptos" pitchFamily="34" charset="-120"/>
+              </a:rPr>
+              <a:t>Input</a:t>
+            </a:r>
+            <a:endParaRPr lang="en-US" sz="880" dirty="0"/>
+          </a:p>
+        </p:txBody>
+      </p:sp>
+      <p:sp>
+        <p:nvSpPr>
+          <p:cNvPr id="18" name="Shape 16"/>
+          <p:cNvSpPr/>
+          <p:nvPr/>
+        </p:nvSpPr>
+        <p:spPr>
+          <a:xfrm>
+            <a:off x="9817608" y="3399739"/>
+            <a:ext cx="164592" cy="0"/>
+          </a:xfrm>
+          <a:prstGeom prst="line">
+            <a:avLst/>
+          </a:prstGeom>
+          <a:noFill/>
+          <a:ln w="15240">
+            <a:solidFill>
+              <a:srgbClr val="8ABBD8"/>
+            </a:solidFill>
+            <a:prstDash val="solid"/>
+          </a:ln>
+        </p:spPr>
+      </p:sp>
+      <p:sp>
+        <p:nvSpPr>
+          <p:cNvPr id="19" name="Shape 17"/>
+          <p:cNvSpPr/>
+          <p:nvPr/>
+        </p:nvSpPr>
+        <p:spPr>
+          <a:xfrm>
+            <a:off x="8927592" y="3248863"/>
+            <a:ext cx="890016" cy="301752"/>
           </a:xfrm>
           <a:prstGeom prst="roundRect">
             <a:avLst>
-              <a:gd name="adj" fmla="val 9600"/>
+              <a:gd name="adj" fmla="val 24242"/>
+            </a:avLst>
+          </a:prstGeom>
+          <a:solidFill>
+            <a:srgbClr val="2F8A28"/>
+          </a:solidFill>
+          <a:ln w="12700">
+            <a:solidFill>
+              <a:srgbClr val="2F8A28"/>
+            </a:solidFill>
+            <a:prstDash val="solid"/>
+          </a:ln>
+        </p:spPr>
+      </p:sp>
+      <p:sp>
+        <p:nvSpPr>
+          <p:cNvPr id="20" name="Text 18"/>
+          <p:cNvSpPr/>
+          <p:nvPr/>
+        </p:nvSpPr>
+        <p:spPr>
+          <a:xfrm>
+            <a:off x="8964168" y="3322015"/>
+            <a:ext cx="816864" cy="146304"/>
+          </a:xfrm>
+          <a:prstGeom prst="rect">
+            <a:avLst/>
+          </a:prstGeom>
+          <a:noFill/>
+          <a:ln/>
+        </p:spPr>
+        <p:txBody>
+          <a:bodyPr wrap="square" lIns="0" tIns="0" rIns="0" bIns="0" rtlCol="0" anchor="ctr">
+            <a:normAutofit/>
+          </a:bodyPr>
+          <a:lstStyle/>
+          <a:p>
+            <a:pPr algn="ctr" indent="0" marL="0">
+              <a:buNone/>
+            </a:pPr>
+            <a:r>
+              <a:rPr lang="en-US" sz="880" b="1" dirty="0">
+                <a:solidFill>
+                  <a:srgbClr val="FFFFFF"/>
+                </a:solidFill>
+                <a:latin typeface="Aptos" pitchFamily="34" charset="0"/>
+                <a:ea typeface="Aptos" pitchFamily="34" charset="-122"/>
+                <a:cs typeface="Aptos" pitchFamily="34" charset="-120"/>
+              </a:rPr>
+              <a:t>AI assist</a:t>
+            </a:r>
+            <a:endParaRPr lang="en-US" sz="880" dirty="0"/>
+          </a:p>
+        </p:txBody>
+      </p:sp>
+      <p:sp>
+        <p:nvSpPr>
+          <p:cNvPr id="21" name="Shape 19"/>
+          <p:cNvSpPr/>
+          <p:nvPr/>
+        </p:nvSpPr>
+        <p:spPr>
+          <a:xfrm>
+            <a:off x="9982200" y="3248863"/>
+            <a:ext cx="890016" cy="301752"/>
+          </a:xfrm>
+          <a:prstGeom prst="roundRect">
+            <a:avLst>
+              <a:gd name="adj" fmla="val 24242"/>
+            </a:avLst>
+          </a:prstGeom>
+          <a:solidFill>
+            <a:srgbClr val="6A4CA3"/>
+          </a:solidFill>
+          <a:ln w="12700">
+            <a:solidFill>
+              <a:srgbClr val="6A4CA3"/>
+            </a:solidFill>
+            <a:prstDash val="solid"/>
+          </a:ln>
+        </p:spPr>
+      </p:sp>
+      <p:sp>
+        <p:nvSpPr>
+          <p:cNvPr id="22" name="Text 20"/>
+          <p:cNvSpPr/>
+          <p:nvPr/>
+        </p:nvSpPr>
+        <p:spPr>
+          <a:xfrm>
+            <a:off x="10018776" y="3322015"/>
+            <a:ext cx="816864" cy="146304"/>
+          </a:xfrm>
+          <a:prstGeom prst="rect">
+            <a:avLst/>
+          </a:prstGeom>
+          <a:noFill/>
+          <a:ln/>
+        </p:spPr>
+        <p:txBody>
+          <a:bodyPr wrap="square" lIns="0" tIns="0" rIns="0" bIns="0" rtlCol="0" anchor="ctr">
+            <a:normAutofit/>
+          </a:bodyPr>
+          <a:lstStyle/>
+          <a:p>
+            <a:pPr algn="ctr" indent="0" marL="0">
+              <a:buNone/>
+            </a:pPr>
+            <a:r>
+              <a:rPr lang="en-US" sz="880" b="1" dirty="0">
+                <a:solidFill>
+                  <a:srgbClr val="FFFFFF"/>
+                </a:solidFill>
+                <a:latin typeface="Aptos" pitchFamily="34" charset="0"/>
+                <a:ea typeface="Aptos" pitchFamily="34" charset="-122"/>
+                <a:cs typeface="Aptos" pitchFamily="34" charset="-120"/>
+              </a:rPr>
+              <a:t>Review</a:t>
+            </a:r>
+            <a:endParaRPr lang="en-US" sz="880" dirty="0"/>
+          </a:p>
+        </p:txBody>
+      </p:sp>
+      <p:sp>
+        <p:nvSpPr>
+          <p:cNvPr id="23" name="Text 21"/>
+          <p:cNvSpPr/>
+          <p:nvPr/>
+        </p:nvSpPr>
+        <p:spPr>
+          <a:xfrm>
+            <a:off x="7854696" y="3742639"/>
+            <a:ext cx="3035808" cy="158191"/>
+          </a:xfrm>
+          <a:prstGeom prst="rect">
+            <a:avLst/>
+          </a:prstGeom>
+          <a:noFill/>
+          <a:ln/>
+        </p:spPr>
+        <p:txBody>
+          <a:bodyPr wrap="square" lIns="254" tIns="254" rIns="254" bIns="254" rtlCol="0" anchor="t">
+            <a:normAutofit/>
+          </a:bodyPr>
+          <a:lstStyle/>
+          <a:p>
+            <a:pPr indent="0" marL="0">
+              <a:buNone/>
+            </a:pPr>
+            <a:r>
+              <a:rPr lang="en-US" sz="1120" dirty="0">
+                <a:solidFill>
+                  <a:srgbClr val="17364A"/>
+                </a:solidFill>
+                <a:latin typeface="Aptos" pitchFamily="34" charset="0"/>
+                <a:ea typeface="Aptos" pitchFamily="34" charset="-122"/>
+                <a:cs typeface="Aptos" pitchFamily="34" charset="-120"/>
+              </a:rPr>
+              <a:t>AI can support work, but public health judgment remains responsible for interpretation and final use.</a:t>
+            </a:r>
+            <a:endParaRPr lang="en-US" sz="1120" dirty="0"/>
+          </a:p>
+        </p:txBody>
+      </p:sp>
+      <p:sp>
+        <p:nvSpPr>
+          <p:cNvPr id="24" name="Shape 22"/>
+          <p:cNvSpPr/>
+          <p:nvPr/>
+        </p:nvSpPr>
+        <p:spPr>
+          <a:xfrm>
+            <a:off x="7635240" y="4184294"/>
+            <a:ext cx="3474720" cy="1466698"/>
+          </a:xfrm>
+          <a:prstGeom prst="roundRect">
+            <a:avLst>
+              <a:gd name="adj" fmla="val 7481"/>
             </a:avLst>
           </a:prstGeom>
           <a:solidFill>
@@ -16685,13 +17333,13 @@
       </p:sp>
       <p:sp>
         <p:nvSpPr>
-          <p:cNvPr id="17" name="Text 15"/>
-          <p:cNvSpPr/>
-          <p:nvPr/>
-        </p:nvSpPr>
-        <p:spPr>
-          <a:xfrm>
-            <a:off x="7799832" y="4645152"/>
+          <p:cNvPr id="25" name="Text 23"/>
+          <p:cNvSpPr/>
+          <p:nvPr/>
+        </p:nvSpPr>
+        <p:spPr>
+          <a:xfrm>
+            <a:off x="7799832" y="4330598"/>
             <a:ext cx="3145536" cy="256032"/>
           </a:xfrm>
           <a:prstGeom prst="rect">
@@ -16724,14 +17372,14 @@
       </p:sp>
       <p:sp>
         <p:nvSpPr>
-          <p:cNvPr id="18" name="Text 16"/>
-          <p:cNvSpPr/>
-          <p:nvPr/>
-        </p:nvSpPr>
-        <p:spPr>
-          <a:xfrm>
-            <a:off x="7799832" y="4974336"/>
-            <a:ext cx="3145536" cy="576072"/>
+          <p:cNvPr id="26" name="Text 24"/>
+          <p:cNvSpPr/>
+          <p:nvPr/>
+        </p:nvSpPr>
+        <p:spPr>
+          <a:xfrm>
+            <a:off x="7799832" y="4659782"/>
+            <a:ext cx="3145536" cy="899770"/>
           </a:xfrm>
           <a:prstGeom prst="rect">
             <a:avLst/>
@@ -16757,7 +17405,7 @@
                 <a:ea typeface="Aptos" pitchFamily="34" charset="-122"/>
                 <a:cs typeface="Aptos" pitchFamily="34" charset="-120"/>
               </a:rPr>
-              <a:t>Connect the concept to public health purpose, responsible use, required safeguards, documentation, and the next action a.</a:t>
+              <a:t>Connect the concept to public health purpose, responsible use, required safeguards, documentation, and the next action a department should take.</a:t>
             </a:r>
             <a:endParaRPr lang="en-US" sz="1320" dirty="0"/>
           </a:p>
@@ -17126,11 +17774,11 @@
         <p:spPr>
           <a:xfrm>
             <a:off x="7635240" y="1325880"/>
-            <a:ext cx="3474720" cy="1325880"/>
+            <a:ext cx="3474720" cy="1207008"/>
           </a:xfrm>
           <a:prstGeom prst="roundRect">
             <a:avLst>
-              <a:gd name="adj" fmla="val 8276"/>
+              <a:gd name="adj" fmla="val 9091"/>
             </a:avLst>
           </a:prstGeom>
           <a:solidFill>
@@ -17192,7 +17840,7 @@
         <p:spPr>
           <a:xfrm>
             <a:off x="7799832" y="1801368"/>
-            <a:ext cx="3145536" cy="758952"/>
+            <a:ext cx="3145536" cy="640080"/>
           </a:xfrm>
           <a:prstGeom prst="rect">
             <a:avLst/>
@@ -17232,12 +17880,12 @@
         </p:nvSpPr>
         <p:spPr>
           <a:xfrm>
-            <a:off x="7635240" y="2788920"/>
-            <a:ext cx="3474720" cy="1536192"/>
+            <a:off x="7635240" y="2670048"/>
+            <a:ext cx="3474720" cy="1377086"/>
           </a:xfrm>
           <a:prstGeom prst="roundRect">
             <a:avLst>
-              <a:gd name="adj" fmla="val 7143"/>
+              <a:gd name="adj" fmla="val 7968"/>
             </a:avLst>
           </a:prstGeom>
           <a:solidFill>
@@ -17259,7 +17907,7 @@
         </p:nvSpPr>
         <p:spPr>
           <a:xfrm>
-            <a:off x="7799832" y="2935224"/>
+            <a:off x="7799832" y="2816352"/>
             <a:ext cx="3145536" cy="256032"/>
           </a:xfrm>
           <a:prstGeom prst="rect">
@@ -17298,8 +17946,8 @@
         </p:nvSpPr>
         <p:spPr>
           <a:xfrm>
-            <a:off x="7818120" y="3300984"/>
-            <a:ext cx="3090672" cy="877824"/>
+            <a:off x="7818120" y="3182112"/>
+            <a:ext cx="3090672" cy="718718"/>
           </a:xfrm>
           <a:prstGeom prst="rect">
             <a:avLst/>
@@ -17373,12 +18021,12 @@
         </p:nvSpPr>
         <p:spPr>
           <a:xfrm>
-            <a:off x="7635240" y="4498848"/>
-            <a:ext cx="3474720" cy="1143000"/>
+            <a:off x="7635240" y="4184294"/>
+            <a:ext cx="3474720" cy="1466698"/>
           </a:xfrm>
           <a:prstGeom prst="roundRect">
             <a:avLst>
-              <a:gd name="adj" fmla="val 9600"/>
+              <a:gd name="adj" fmla="val 7481"/>
             </a:avLst>
           </a:prstGeom>
           <a:solidFill>
@@ -17400,7 +18048,7 @@
         </p:nvSpPr>
         <p:spPr>
           <a:xfrm>
-            <a:off x="7799832" y="4645152"/>
+            <a:off x="7799832" y="4330598"/>
             <a:ext cx="3145536" cy="256032"/>
           </a:xfrm>
           <a:prstGeom prst="rect">
@@ -17439,8 +18087,8 @@
         </p:nvSpPr>
         <p:spPr>
           <a:xfrm>
-            <a:off x="7799832" y="4974336"/>
-            <a:ext cx="3145536" cy="576072"/>
+            <a:off x="7799832" y="4659782"/>
+            <a:ext cx="3145536" cy="899770"/>
           </a:xfrm>
           <a:prstGeom prst="rect">
             <a:avLst/>
@@ -17466,7 +18114,7 @@
                 <a:ea typeface="Aptos" pitchFamily="34" charset="-122"/>
                 <a:cs typeface="Aptos" pitchFamily="34" charset="-120"/>
               </a:rPr>
-              <a:t>Connect the concept to public health purpose, responsible use, required safeguards, documentation, and the next action a.</a:t>
+              <a:t>Connect the concept to public health purpose, responsible use, required safeguards, documentation, and the next action a department should take.</a:t>
             </a:r>
             <a:endParaRPr lang="en-US" sz="1320" dirty="0"/>
           </a:p>

--- a/downloads/presentations/modules/int-190.pptx
+++ b/downloads/presentations/modules/int-190.pptx
@@ -3344,8 +3344,8 @@
         </p:nvSpPr>
         <p:spPr>
           <a:xfrm>
-            <a:off x="868680" y="1508760"/>
-            <a:ext cx="6309360" cy="4160520"/>
+            <a:off x="822960" y="1463040"/>
+            <a:ext cx="6565392" cy="4343400"/>
           </a:xfrm>
           <a:prstGeom prst="rect">
             <a:avLst/>
@@ -3363,7 +3363,7 @@
               <a:buNone/>
             </a:pPr>
             <a:r>
-              <a:rPr lang="en-US" sz="2100" dirty="0">
+              <a:rPr lang="en-US" sz="1920" dirty="0">
                 <a:solidFill>
                   <a:srgbClr val="003A63"/>
                 </a:solidFill>
@@ -3373,14 +3373,14 @@
               </a:rPr>
               <a:t>• AI for Social Good begins with problem definition.</a:t>
             </a:r>
-            <a:endParaRPr lang="en-US" sz="2100" dirty="0"/>
-          </a:p>
-          <a:p>
-            <a:pPr indent="0" marL="0">
-              <a:buNone/>
-            </a:pPr>
-            <a:r>
-              <a:rPr lang="en-US" sz="2100" dirty="0">
+            <a:endParaRPr lang="en-US" sz="1920" dirty="0"/>
+          </a:p>
+          <a:p>
+            <a:pPr indent="0" marL="0">
+              <a:buNone/>
+            </a:pPr>
+            <a:r>
+              <a:rPr lang="en-US" sz="1920" dirty="0">
                 <a:solidFill>
                   <a:srgbClr val="003A63"/>
                 </a:solidFill>
@@ -3390,14 +3390,14 @@
               </a:rPr>
               <a:t>• The problem should be a public health problem, not a technology opportunity.</a:t>
             </a:r>
-            <a:endParaRPr lang="en-US" sz="2100" dirty="0"/>
-          </a:p>
-          <a:p>
-            <a:pPr indent="0" marL="0">
-              <a:buNone/>
-            </a:pPr>
-            <a:r>
-              <a:rPr lang="en-US" sz="2100" dirty="0">
+            <a:endParaRPr lang="en-US" sz="1920" dirty="0"/>
+          </a:p>
+          <a:p>
+            <a:pPr indent="0" marL="0">
+              <a:buNone/>
+            </a:pPr>
+            <a:r>
+              <a:rPr lang="en-US" sz="1920" dirty="0">
                 <a:solidFill>
                   <a:srgbClr val="003A63"/>
                 </a:solidFill>
@@ -3405,9 +3405,9 @@
                 <a:ea typeface="Aptos" pitchFamily="34" charset="-122"/>
                 <a:cs typeface="Aptos" pitchFamily="34" charset="-120"/>
               </a:rPr>
-              <a:t>• For example, “use a chatbot” is not a problem definition. “Reduce delays in connecting.</a:t>
-            </a:r>
-            <a:endParaRPr lang="en-US" sz="2100" dirty="0"/>
+              <a:t>• For example, “use a chatbot” is not a problem definition. “Reduce delays in.</a:t>
+            </a:r>
+            <a:endParaRPr lang="en-US" sz="1920" dirty="0"/>
           </a:p>
         </p:txBody>
       </p:sp>
@@ -3419,12 +3419,12 @@
         </p:nvSpPr>
         <p:spPr>
           <a:xfrm>
-            <a:off x="7635240" y="1325880"/>
-            <a:ext cx="3474720" cy="1207008"/>
+            <a:off x="7543800" y="1325880"/>
+            <a:ext cx="3611880" cy="1261872"/>
           </a:xfrm>
           <a:prstGeom prst="roundRect">
             <a:avLst>
-              <a:gd name="adj" fmla="val 9091"/>
+              <a:gd name="adj" fmla="val 8696"/>
             </a:avLst>
           </a:prstGeom>
           <a:solidFill>
@@ -3446,8 +3446,8 @@
         </p:nvSpPr>
         <p:spPr>
           <a:xfrm>
-            <a:off x="7799832" y="1472184"/>
-            <a:ext cx="3145536" cy="256032"/>
+            <a:off x="7708392" y="1453896"/>
+            <a:ext cx="3282696" cy="228600"/>
           </a:xfrm>
           <a:prstGeom prst="rect">
             <a:avLst/>
@@ -3463,7 +3463,7 @@
               <a:buNone/>
             </a:pPr>
             <a:r>
-              <a:rPr lang="en-US" sz="1300" b="1" dirty="0">
+              <a:rPr lang="en-US" sz="1220" b="1" dirty="0">
                 <a:solidFill>
                   <a:srgbClr val="0068B7"/>
                 </a:solidFill>
@@ -3473,7 +3473,7 @@
               </a:rPr>
               <a:t>Core concept</a:t>
             </a:r>
-            <a:endParaRPr lang="en-US" sz="1300" dirty="0"/>
+            <a:endParaRPr lang="en-US" sz="1220" dirty="0"/>
           </a:p>
         </p:txBody>
       </p:sp>
@@ -3485,8 +3485,8 @@
         </p:nvSpPr>
         <p:spPr>
           <a:xfrm>
-            <a:off x="7799832" y="1801368"/>
-            <a:ext cx="3145536" cy="640080"/>
+            <a:off x="7708392" y="1764792"/>
+            <a:ext cx="3282696" cy="749808"/>
           </a:xfrm>
           <a:prstGeom prst="rect">
             <a:avLst/>
@@ -3504,7 +3504,7 @@
               <a:buNone/>
             </a:pPr>
             <a:r>
-              <a:rPr lang="en-US" sz="1320" dirty="0">
+              <a:rPr lang="en-US" sz="1220" dirty="0">
                 <a:solidFill>
                   <a:srgbClr val="17364A"/>
                 </a:solidFill>
@@ -3514,7 +3514,7 @@
               </a:rPr>
               <a:t>AI for Social Good begins with problem definition.</a:t>
             </a:r>
-            <a:endParaRPr lang="en-US" sz="1320" dirty="0"/>
+            <a:endParaRPr lang="en-US" sz="1220" dirty="0"/>
           </a:p>
         </p:txBody>
       </p:sp>
@@ -3526,12 +3526,12 @@
         </p:nvSpPr>
         <p:spPr>
           <a:xfrm>
-            <a:off x="7635240" y="2670048"/>
-            <a:ext cx="3474720" cy="1377086"/>
+            <a:off x="7543800" y="2724912"/>
+            <a:ext cx="3611880" cy="1527048"/>
           </a:xfrm>
           <a:prstGeom prst="roundRect">
             <a:avLst>
-              <a:gd name="adj" fmla="val 7968"/>
+              <a:gd name="adj" fmla="val 7186"/>
             </a:avLst>
           </a:prstGeom>
           <a:solidFill>
@@ -3553,24 +3553,26 @@
         </p:nvSpPr>
         <p:spPr>
           <a:xfrm>
-            <a:off x="7799832" y="2798064"/>
-            <a:ext cx="3145536" cy="237744"/>
-          </a:xfrm>
-          <a:prstGeom prst="rect">
-            <a:avLst/>
-          </a:prstGeom>
-          <a:noFill/>
-          <a:ln/>
-        </p:spPr>
-        <p:txBody>
-          <a:bodyPr wrap="square" lIns="0" tIns="0" rIns="0" bIns="0" rtlCol="0" anchor="ctr"/>
-          <a:lstStyle/>
-          <a:p>
-            <a:pPr indent="0" marL="0">
-              <a:buNone/>
-            </a:pPr>
-            <a:r>
-              <a:rPr lang="en-US" sz="1250" b="1" dirty="0">
+            <a:off x="7708392" y="2852928"/>
+            <a:ext cx="3282696" cy="219456"/>
+          </a:xfrm>
+          <a:prstGeom prst="rect">
+            <a:avLst/>
+          </a:prstGeom>
+          <a:noFill/>
+          <a:ln/>
+        </p:spPr>
+        <p:txBody>
+          <a:bodyPr wrap="square" lIns="0" tIns="0" rIns="0" bIns="0" rtlCol="0" anchor="ctr">
+            <a:normAutofit/>
+          </a:bodyPr>
+          <a:lstStyle/>
+          <a:p>
+            <a:pPr indent="0" marL="0">
+              <a:buNone/>
+            </a:pPr>
+            <a:r>
+              <a:rPr lang="en-US" sz="1160" b="1" dirty="0">
                 <a:solidFill>
                   <a:srgbClr val="0068B7"/>
                 </a:solidFill>
@@ -3580,7 +3582,7 @@
               </a:rPr>
               <a:t>Human-in-the-loop use</a:t>
             </a:r>
-            <a:endParaRPr lang="en-US" sz="1250" dirty="0"/>
+            <a:endParaRPr lang="en-US" sz="1160" dirty="0"/>
           </a:p>
         </p:txBody>
       </p:sp>
@@ -3592,7 +3594,7 @@
         </p:nvSpPr>
         <p:spPr>
           <a:xfrm>
-            <a:off x="8763000" y="3351276"/>
+            <a:off x="8717280" y="3406140"/>
             <a:ext cx="164592" cy="0"/>
           </a:xfrm>
           <a:prstGeom prst="line">
@@ -3615,8 +3617,8 @@
         </p:nvSpPr>
         <p:spPr>
           <a:xfrm>
-            <a:off x="7872984" y="3200400"/>
-            <a:ext cx="890016" cy="301752"/>
+            <a:off x="7781544" y="3255264"/>
+            <a:ext cx="935736" cy="301752"/>
           </a:xfrm>
           <a:prstGeom prst="roundRect">
             <a:avLst>
@@ -3642,8 +3644,8 @@
         </p:nvSpPr>
         <p:spPr>
           <a:xfrm>
-            <a:off x="7909560" y="3273552"/>
-            <a:ext cx="816864" cy="146304"/>
+            <a:off x="7818120" y="3328416"/>
+            <a:ext cx="862584" cy="146304"/>
           </a:xfrm>
           <a:prstGeom prst="rect">
             <a:avLst/>
@@ -3683,7 +3685,7 @@
         </p:nvSpPr>
         <p:spPr>
           <a:xfrm>
-            <a:off x="9817608" y="3351276"/>
+            <a:off x="9817608" y="3406140"/>
             <a:ext cx="164592" cy="0"/>
           </a:xfrm>
           <a:prstGeom prst="line">
@@ -3706,8 +3708,8 @@
         </p:nvSpPr>
         <p:spPr>
           <a:xfrm>
-            <a:off x="8927592" y="3200400"/>
-            <a:ext cx="890016" cy="301752"/>
+            <a:off x="8881872" y="3255264"/>
+            <a:ext cx="935736" cy="301752"/>
           </a:xfrm>
           <a:prstGeom prst="roundRect">
             <a:avLst>
@@ -3733,8 +3735,8 @@
         </p:nvSpPr>
         <p:spPr>
           <a:xfrm>
-            <a:off x="8964168" y="3273552"/>
-            <a:ext cx="816864" cy="146304"/>
+            <a:off x="8918448" y="3328416"/>
+            <a:ext cx="862584" cy="146304"/>
           </a:xfrm>
           <a:prstGeom prst="rect">
             <a:avLst/>
@@ -3774,8 +3776,8 @@
         </p:nvSpPr>
         <p:spPr>
           <a:xfrm>
-            <a:off x="9982200" y="3200400"/>
-            <a:ext cx="890016" cy="301752"/>
+            <a:off x="9982200" y="3255264"/>
+            <a:ext cx="935736" cy="301752"/>
           </a:xfrm>
           <a:prstGeom prst="roundRect">
             <a:avLst>
@@ -3801,8 +3803,8 @@
         </p:nvSpPr>
         <p:spPr>
           <a:xfrm>
-            <a:off x="10018776" y="3273552"/>
-            <a:ext cx="816864" cy="146304"/>
+            <a:off x="10018776" y="3328416"/>
+            <a:ext cx="862584" cy="146304"/>
           </a:xfrm>
           <a:prstGeom prst="rect">
             <a:avLst/>
@@ -3842,8 +3844,8 @@
         </p:nvSpPr>
         <p:spPr>
           <a:xfrm>
-            <a:off x="7854696" y="3694176"/>
-            <a:ext cx="3035808" cy="206654"/>
+            <a:off x="7763256" y="3749040"/>
+            <a:ext cx="3172968" cy="356616"/>
           </a:xfrm>
           <a:prstGeom prst="rect">
             <a:avLst/>
@@ -3861,7 +3863,7 @@
               <a:buNone/>
             </a:pPr>
             <a:r>
-              <a:rPr lang="en-US" sz="1120" dirty="0">
+              <a:rPr lang="en-US" sz="1040" dirty="0">
                 <a:solidFill>
                   <a:srgbClr val="17364A"/>
                 </a:solidFill>
@@ -3869,9 +3871,9 @@
                 <a:ea typeface="Aptos" pitchFamily="34" charset="-122"/>
                 <a:cs typeface="Aptos" pitchFamily="34" charset="-120"/>
               </a:rPr>
-              <a:t>AI can support work, but public health judgment remains responsible for interpretation and final use.</a:t>
-            </a:r>
-            <a:endParaRPr lang="en-US" sz="1120" dirty="0"/>
+              <a:t>AI can support work, but public health judgment remains responsible.</a:t>
+            </a:r>
+            <a:endParaRPr lang="en-US" sz="1040" dirty="0"/>
           </a:p>
         </p:txBody>
       </p:sp>
@@ -3883,12 +3885,12 @@
         </p:nvSpPr>
         <p:spPr>
           <a:xfrm>
-            <a:off x="7635240" y="4184294"/>
-            <a:ext cx="3474720" cy="1466698"/>
+            <a:off x="7543800" y="4389120"/>
+            <a:ext cx="3611880" cy="1261872"/>
           </a:xfrm>
           <a:prstGeom prst="roundRect">
             <a:avLst>
-              <a:gd name="adj" fmla="val 7481"/>
+              <a:gd name="adj" fmla="val 8696"/>
             </a:avLst>
           </a:prstGeom>
           <a:solidFill>
@@ -3910,8 +3912,8 @@
         </p:nvSpPr>
         <p:spPr>
           <a:xfrm>
-            <a:off x="7799832" y="4330598"/>
-            <a:ext cx="3145536" cy="256032"/>
+            <a:off x="7708392" y="4517136"/>
+            <a:ext cx="3282696" cy="228600"/>
           </a:xfrm>
           <a:prstGeom prst="rect">
             <a:avLst/>
@@ -3927,7 +3929,7 @@
               <a:buNone/>
             </a:pPr>
             <a:r>
-              <a:rPr lang="en-US" sz="1300" b="1" dirty="0">
+              <a:rPr lang="en-US" sz="1220" b="1" dirty="0">
                 <a:solidFill>
                   <a:srgbClr val="0068B7"/>
                 </a:solidFill>
@@ -3937,7 +3939,7 @@
               </a:rPr>
               <a:t>Apply it</a:t>
             </a:r>
-            <a:endParaRPr lang="en-US" sz="1300" dirty="0"/>
+            <a:endParaRPr lang="en-US" sz="1220" dirty="0"/>
           </a:p>
         </p:txBody>
       </p:sp>
@@ -3949,8 +3951,8 @@
         </p:nvSpPr>
         <p:spPr>
           <a:xfrm>
-            <a:off x="7799832" y="4659782"/>
-            <a:ext cx="3145536" cy="899770"/>
+            <a:off x="7708392" y="4828032"/>
+            <a:ext cx="3282696" cy="749808"/>
           </a:xfrm>
           <a:prstGeom prst="rect">
             <a:avLst/>
@@ -3968,7 +3970,7 @@
               <a:buNone/>
             </a:pPr>
             <a:r>
-              <a:rPr lang="en-US" sz="1320" dirty="0">
+              <a:rPr lang="en-US" sz="1220" dirty="0">
                 <a:solidFill>
                   <a:srgbClr val="17364A"/>
                 </a:solidFill>
@@ -3976,9 +3978,9 @@
                 <a:ea typeface="Aptos" pitchFamily="34" charset="-122"/>
                 <a:cs typeface="Aptos" pitchFamily="34" charset="-120"/>
               </a:rPr>
-              <a:t>Connect the concept to public health purpose, responsible use, required safeguards, documentation, and the next action a department should take.</a:t>
-            </a:r>
-            <a:endParaRPr lang="en-US" sz="1320" dirty="0"/>
+              <a:t>Connect the concept to public health purpose, responsible use, required.</a:t>
+            </a:r>
+            <a:endParaRPr lang="en-US" sz="1220" dirty="0"/>
           </a:p>
         </p:txBody>
       </p:sp>
@@ -4269,8 +4271,8 @@
         </p:nvSpPr>
         <p:spPr>
           <a:xfrm>
-            <a:off x="868680" y="1508760"/>
-            <a:ext cx="6309360" cy="4160520"/>
+            <a:off x="822960" y="1463040"/>
+            <a:ext cx="6565392" cy="4343400"/>
           </a:xfrm>
           <a:prstGeom prst="rect">
             <a:avLst/>
@@ -4288,7 +4290,7 @@
               <a:buNone/>
             </a:pPr>
             <a:r>
-              <a:rPr lang="en-US" sz="2100" dirty="0">
+              <a:rPr lang="en-US" sz="1920" dirty="0">
                 <a:solidFill>
                   <a:srgbClr val="003A63"/>
                 </a:solidFill>
@@ -4298,14 +4300,14 @@
               </a:rPr>
               <a:t>• Measuring social good requires more than counting users or outputs.</a:t>
             </a:r>
-            <a:endParaRPr lang="en-US" sz="2100" dirty="0"/>
-          </a:p>
-          <a:p>
-            <a:pPr indent="0" marL="0">
-              <a:buNone/>
-            </a:pPr>
-            <a:r>
-              <a:rPr lang="en-US" sz="2100" dirty="0">
+            <a:endParaRPr lang="en-US" sz="1920" dirty="0"/>
+          </a:p>
+          <a:p>
+            <a:pPr indent="0" marL="0">
+              <a:buNone/>
+            </a:pPr>
+            <a:r>
+              <a:rPr lang="en-US" sz="1920" dirty="0">
                 <a:solidFill>
                   <a:srgbClr val="003A63"/>
                 </a:solidFill>
@@ -4313,16 +4315,16 @@
                 <a:ea typeface="Aptos" pitchFamily="34" charset="-122"/>
                 <a:cs typeface="Aptos" pitchFamily="34" charset="-120"/>
               </a:rPr>
-              <a:t>• Agencies should measure whether the AI-supported workflow improves timeliness, access, quality,.</a:t>
-            </a:r>
-            <a:endParaRPr lang="en-US" sz="2100" dirty="0"/>
-          </a:p>
-          <a:p>
-            <a:pPr indent="0" marL="0">
-              <a:buNone/>
-            </a:pPr>
-            <a:r>
-              <a:rPr lang="en-US" sz="2100" dirty="0">
+              <a:t>• Agencies should measure whether the AI-supported workflow improves.</a:t>
+            </a:r>
+            <a:endParaRPr lang="en-US" sz="1920" dirty="0"/>
+          </a:p>
+          <a:p>
+            <a:pPr indent="0" marL="0">
+              <a:buNone/>
+            </a:pPr>
+            <a:r>
+              <a:rPr lang="en-US" sz="1920" dirty="0">
                 <a:solidFill>
                   <a:srgbClr val="003A63"/>
                 </a:solidFill>
@@ -4330,9 +4332,9 @@
                 <a:ea typeface="Aptos" pitchFamily="34" charset="-122"/>
                 <a:cs typeface="Aptos" pitchFamily="34" charset="-120"/>
               </a:rPr>
-              <a:t>• They should also monitor unintended consequences, such as reduced service quality, increased.</a:t>
-            </a:r>
-            <a:endParaRPr lang="en-US" sz="2100" dirty="0"/>
+              <a:t>• They should also monitor unintended consequences, such as reduced service.</a:t>
+            </a:r>
+            <a:endParaRPr lang="en-US" sz="1920" dirty="0"/>
           </a:p>
         </p:txBody>
       </p:sp>
@@ -4344,12 +4346,12 @@
         </p:nvSpPr>
         <p:spPr>
           <a:xfrm>
-            <a:off x="7635240" y="1325880"/>
-            <a:ext cx="3474720" cy="1207008"/>
+            <a:off x="7543800" y="1325880"/>
+            <a:ext cx="3611880" cy="1261872"/>
           </a:xfrm>
           <a:prstGeom prst="roundRect">
             <a:avLst>
-              <a:gd name="adj" fmla="val 9091"/>
+              <a:gd name="adj" fmla="val 8696"/>
             </a:avLst>
           </a:prstGeom>
           <a:solidFill>
@@ -4371,8 +4373,8 @@
         </p:nvSpPr>
         <p:spPr>
           <a:xfrm>
-            <a:off x="7799832" y="1472184"/>
-            <a:ext cx="3145536" cy="256032"/>
+            <a:off x="7708392" y="1453896"/>
+            <a:ext cx="3282696" cy="228600"/>
           </a:xfrm>
           <a:prstGeom prst="rect">
             <a:avLst/>
@@ -4388,7 +4390,7 @@
               <a:buNone/>
             </a:pPr>
             <a:r>
-              <a:rPr lang="en-US" sz="1300" b="1" dirty="0">
+              <a:rPr lang="en-US" sz="1220" b="1" dirty="0">
                 <a:solidFill>
                   <a:srgbClr val="0068B7"/>
                 </a:solidFill>
@@ -4398,7 +4400,7 @@
               </a:rPr>
               <a:t>Core concept</a:t>
             </a:r>
-            <a:endParaRPr lang="en-US" sz="1300" dirty="0"/>
+            <a:endParaRPr lang="en-US" sz="1220" dirty="0"/>
           </a:p>
         </p:txBody>
       </p:sp>
@@ -4410,8 +4412,8 @@
         </p:nvSpPr>
         <p:spPr>
           <a:xfrm>
-            <a:off x="7799832" y="1801368"/>
-            <a:ext cx="3145536" cy="640080"/>
+            <a:off x="7708392" y="1764792"/>
+            <a:ext cx="3282696" cy="749808"/>
           </a:xfrm>
           <a:prstGeom prst="rect">
             <a:avLst/>
@@ -4429,7 +4431,7 @@
               <a:buNone/>
             </a:pPr>
             <a:r>
-              <a:rPr lang="en-US" sz="1320" dirty="0">
+              <a:rPr lang="en-US" sz="1220" dirty="0">
                 <a:solidFill>
                   <a:srgbClr val="17364A"/>
                 </a:solidFill>
@@ -4439,7 +4441,7 @@
               </a:rPr>
               <a:t>Measuring social good requires more than counting users or outputs.</a:t>
             </a:r>
-            <a:endParaRPr lang="en-US" sz="1320" dirty="0"/>
+            <a:endParaRPr lang="en-US" sz="1220" dirty="0"/>
           </a:p>
         </p:txBody>
       </p:sp>
@@ -4451,12 +4453,12 @@
         </p:nvSpPr>
         <p:spPr>
           <a:xfrm>
-            <a:off x="7635240" y="2670048"/>
-            <a:ext cx="3474720" cy="1377086"/>
+            <a:off x="7543800" y="2724912"/>
+            <a:ext cx="3611880" cy="1527048"/>
           </a:xfrm>
           <a:prstGeom prst="roundRect">
             <a:avLst>
-              <a:gd name="adj" fmla="val 7968"/>
+              <a:gd name="adj" fmla="val 7186"/>
             </a:avLst>
           </a:prstGeom>
           <a:solidFill>
@@ -4478,8 +4480,8 @@
         </p:nvSpPr>
         <p:spPr>
           <a:xfrm>
-            <a:off x="7799832" y="2816352"/>
-            <a:ext cx="3145536" cy="256032"/>
+            <a:off x="7708392" y="2852928"/>
+            <a:ext cx="3282696" cy="228600"/>
           </a:xfrm>
           <a:prstGeom prst="rect">
             <a:avLst/>
@@ -4495,7 +4497,7 @@
               <a:buNone/>
             </a:pPr>
             <a:r>
-              <a:rPr lang="en-US" sz="1300" b="1" dirty="0">
+              <a:rPr lang="en-US" sz="1220" b="1" dirty="0">
                 <a:solidFill>
                   <a:srgbClr val="0068B7"/>
                 </a:solidFill>
@@ -4505,7 +4507,7 @@
               </a:rPr>
               <a:t>Concept checkpoints</a:t>
             </a:r>
-            <a:endParaRPr lang="en-US" sz="1300" dirty="0"/>
+            <a:endParaRPr lang="en-US" sz="1220" dirty="0"/>
           </a:p>
         </p:txBody>
       </p:sp>
@@ -4517,8 +4519,8 @@
         </p:nvSpPr>
         <p:spPr>
           <a:xfrm>
-            <a:off x="7818120" y="3182112"/>
-            <a:ext cx="3090672" cy="718718"/>
+            <a:off x="7726680" y="3182112"/>
+            <a:ext cx="3227832" cy="960120"/>
           </a:xfrm>
           <a:prstGeom prst="rect">
             <a:avLst/>
@@ -4536,7 +4538,7 @@
               <a:buNone/>
             </a:pPr>
             <a:r>
-              <a:rPr lang="en-US" sz="1220" dirty="0">
+              <a:rPr lang="en-US" sz="1140" dirty="0">
                 <a:solidFill>
                   <a:srgbClr val="17364A"/>
                 </a:solidFill>
@@ -4544,16 +4546,16 @@
                 <a:ea typeface="Aptos" pitchFamily="34" charset="-122"/>
                 <a:cs typeface="Aptos" pitchFamily="34" charset="-120"/>
               </a:rPr>
-              <a:t>Agencies should measure whether the AI-supported workflow improves.</a:t>
-            </a:r>
-            <a:endParaRPr lang="en-US" sz="1220" dirty="0"/>
-          </a:p>
-          <a:p>
-            <a:pPr indent="0" marL="0">
-              <a:buNone/>
-            </a:pPr>
-            <a:r>
-              <a:rPr lang="en-US" sz="1220" dirty="0">
+              <a:t>Agencies should measure whether the AI-supported.</a:t>
+            </a:r>
+            <a:endParaRPr lang="en-US" sz="1140" dirty="0"/>
+          </a:p>
+          <a:p>
+            <a:pPr indent="0" marL="0">
+              <a:buNone/>
+            </a:pPr>
+            <a:r>
+              <a:rPr lang="en-US" sz="1140" dirty="0">
                 <a:solidFill>
                   <a:srgbClr val="17364A"/>
                 </a:solidFill>
@@ -4561,16 +4563,16 @@
                 <a:ea typeface="Aptos" pitchFamily="34" charset="-122"/>
                 <a:cs typeface="Aptos" pitchFamily="34" charset="-120"/>
               </a:rPr>
-              <a:t>They should also monitor unintended consequences, such as reduced.</a:t>
-            </a:r>
-            <a:endParaRPr lang="en-US" sz="1220" dirty="0"/>
-          </a:p>
-          <a:p>
-            <a:pPr indent="0" marL="0">
-              <a:buNone/>
-            </a:pPr>
-            <a:r>
-              <a:rPr lang="en-US" sz="1220" dirty="0">
+              <a:t>They should also monitor unintended consequences,.</a:t>
+            </a:r>
+            <a:endParaRPr lang="en-US" sz="1140" dirty="0"/>
+          </a:p>
+          <a:p>
+            <a:pPr indent="0" marL="0">
+              <a:buNone/>
+            </a:pPr>
+            <a:r>
+              <a:rPr lang="en-US" sz="1140" dirty="0">
                 <a:solidFill>
                   <a:srgbClr val="17364A"/>
                 </a:solidFill>
@@ -4578,9 +4580,9 @@
                 <a:ea typeface="Aptos" pitchFamily="34" charset="-122"/>
                 <a:cs typeface="Aptos" pitchFamily="34" charset="-120"/>
               </a:rPr>
-              <a:t>Responsible innovation includes sunset and rollback planning.</a:t>
-            </a:r>
-            <a:endParaRPr lang="en-US" sz="1220" dirty="0"/>
+              <a:t>Responsible innovation includes sunset and.</a:t>
+            </a:r>
+            <a:endParaRPr lang="en-US" sz="1140" dirty="0"/>
           </a:p>
         </p:txBody>
       </p:sp>
@@ -4592,12 +4594,12 @@
         </p:nvSpPr>
         <p:spPr>
           <a:xfrm>
-            <a:off x="7635240" y="4184294"/>
-            <a:ext cx="3474720" cy="1466698"/>
+            <a:off x="7543800" y="4389120"/>
+            <a:ext cx="3611880" cy="1261872"/>
           </a:xfrm>
           <a:prstGeom prst="roundRect">
             <a:avLst>
-              <a:gd name="adj" fmla="val 7481"/>
+              <a:gd name="adj" fmla="val 8696"/>
             </a:avLst>
           </a:prstGeom>
           <a:solidFill>
@@ -4619,8 +4621,8 @@
         </p:nvSpPr>
         <p:spPr>
           <a:xfrm>
-            <a:off x="7799832" y="4330598"/>
-            <a:ext cx="3145536" cy="256032"/>
+            <a:off x="7708392" y="4517136"/>
+            <a:ext cx="3282696" cy="228600"/>
           </a:xfrm>
           <a:prstGeom prst="rect">
             <a:avLst/>
@@ -4636,7 +4638,7 @@
               <a:buNone/>
             </a:pPr>
             <a:r>
-              <a:rPr lang="en-US" sz="1300" b="1" dirty="0">
+              <a:rPr lang="en-US" sz="1220" b="1" dirty="0">
                 <a:solidFill>
                   <a:srgbClr val="0068B7"/>
                 </a:solidFill>
@@ -4646,7 +4648,7 @@
               </a:rPr>
               <a:t>Apply it</a:t>
             </a:r>
-            <a:endParaRPr lang="en-US" sz="1300" dirty="0"/>
+            <a:endParaRPr lang="en-US" sz="1220" dirty="0"/>
           </a:p>
         </p:txBody>
       </p:sp>
@@ -4658,8 +4660,8 @@
         </p:nvSpPr>
         <p:spPr>
           <a:xfrm>
-            <a:off x="7799832" y="4659782"/>
-            <a:ext cx="3145536" cy="899770"/>
+            <a:off x="7708392" y="4828032"/>
+            <a:ext cx="3282696" cy="749808"/>
           </a:xfrm>
           <a:prstGeom prst="rect">
             <a:avLst/>
@@ -4677,7 +4679,7 @@
               <a:buNone/>
             </a:pPr>
             <a:r>
-              <a:rPr lang="en-US" sz="1320" dirty="0">
+              <a:rPr lang="en-US" sz="1220" dirty="0">
                 <a:solidFill>
                   <a:srgbClr val="17364A"/>
                 </a:solidFill>
@@ -4685,9 +4687,9 @@
                 <a:ea typeface="Aptos" pitchFamily="34" charset="-122"/>
                 <a:cs typeface="Aptos" pitchFamily="34" charset="-120"/>
               </a:rPr>
-              <a:t>Connect the concept to public health purpose, responsible use, required safeguards, documentation, and the next action a department should take.</a:t>
-            </a:r>
-            <a:endParaRPr lang="en-US" sz="1320" dirty="0"/>
+              <a:t>Connect the concept to public health purpose, responsible use, required.</a:t>
+            </a:r>
+            <a:endParaRPr lang="en-US" sz="1220" dirty="0"/>
           </a:p>
         </p:txBody>
       </p:sp>
@@ -4978,8 +4980,8 @@
         </p:nvSpPr>
         <p:spPr>
           <a:xfrm>
-            <a:off x="868680" y="1508760"/>
-            <a:ext cx="6309360" cy="4160520"/>
+            <a:off x="822960" y="1463040"/>
+            <a:ext cx="6565392" cy="4343400"/>
           </a:xfrm>
           <a:prstGeom prst="rect">
             <a:avLst/>
@@ -4997,7 +4999,7 @@
               <a:buNone/>
             </a:pPr>
             <a:r>
-              <a:rPr lang="en-US" sz="2100" dirty="0">
+              <a:rPr lang="en-US" sz="1920" dirty="0">
                 <a:solidFill>
                   <a:srgbClr val="003A63"/>
                 </a:solidFill>
@@ -5007,14 +5009,14 @@
               </a:rPr>
               <a:t>• Technology-first design.</a:t>
             </a:r>
-            <a:endParaRPr lang="en-US" sz="2100" dirty="0"/>
-          </a:p>
-          <a:p>
-            <a:pPr indent="0" marL="0">
-              <a:buNone/>
-            </a:pPr>
-            <a:r>
-              <a:rPr lang="en-US" sz="2100" dirty="0">
+            <a:endParaRPr lang="en-US" sz="1920" dirty="0"/>
+          </a:p>
+          <a:p>
+            <a:pPr indent="0" marL="0">
+              <a:buNone/>
+            </a:pPr>
+            <a:r>
+              <a:rPr lang="en-US" sz="1920" dirty="0">
                 <a:solidFill>
                   <a:srgbClr val="003A63"/>
                 </a:solidFill>
@@ -5022,16 +5024,16 @@
                 <a:ea typeface="Aptos" pitchFamily="34" charset="-122"/>
                 <a:cs typeface="Aptos" pitchFamily="34" charset="-120"/>
               </a:rPr>
-              <a:t>• A tool may be adopted because it is novel rather than because it solves a public health problem.</a:t>
-            </a:r>
-            <a:endParaRPr lang="en-US" sz="2100" dirty="0"/>
-          </a:p>
-          <a:p>
-            <a:pPr indent="0" marL="0">
-              <a:buNone/>
-            </a:pPr>
-            <a:r>
-              <a:rPr lang="en-US" sz="2100" dirty="0">
+              <a:t>• A tool may be adopted because it is novel rather than because it solves a.</a:t>
+            </a:r>
+            <a:endParaRPr lang="en-US" sz="1920" dirty="0"/>
+          </a:p>
+          <a:p>
+            <a:pPr indent="0" marL="0">
+              <a:buNone/>
+            </a:pPr>
+            <a:r>
+              <a:rPr lang="en-US" sz="1920" dirty="0">
                 <a:solidFill>
                   <a:srgbClr val="003A63"/>
                 </a:solidFill>
@@ -5039,9 +5041,9 @@
                 <a:ea typeface="Aptos" pitchFamily="34" charset="-122"/>
                 <a:cs typeface="Aptos" pitchFamily="34" charset="-120"/>
               </a:rPr>
-              <a:t>• Guardrails include problem-first planning, alternatives analysis, and public value criteria.</a:t>
-            </a:r>
-            <a:endParaRPr lang="en-US" sz="2100" dirty="0"/>
+              <a:t>• Guardrails include problem-first planning, alternatives analysis, and public.</a:t>
+            </a:r>
+            <a:endParaRPr lang="en-US" sz="1920" dirty="0"/>
           </a:p>
         </p:txBody>
       </p:sp>
@@ -5053,12 +5055,12 @@
         </p:nvSpPr>
         <p:spPr>
           <a:xfrm>
-            <a:off x="7635240" y="1325880"/>
-            <a:ext cx="3474720" cy="1207008"/>
+            <a:off x="7543800" y="1325880"/>
+            <a:ext cx="3611880" cy="1261872"/>
           </a:xfrm>
           <a:prstGeom prst="roundRect">
             <a:avLst>
-              <a:gd name="adj" fmla="val 9091"/>
+              <a:gd name="adj" fmla="val 8696"/>
             </a:avLst>
           </a:prstGeom>
           <a:solidFill>
@@ -5080,8 +5082,8 @@
         </p:nvSpPr>
         <p:spPr>
           <a:xfrm>
-            <a:off x="7799832" y="1472184"/>
-            <a:ext cx="3145536" cy="256032"/>
+            <a:off x="7708392" y="1453896"/>
+            <a:ext cx="3282696" cy="228600"/>
           </a:xfrm>
           <a:prstGeom prst="rect">
             <a:avLst/>
@@ -5097,7 +5099,7 @@
               <a:buNone/>
             </a:pPr>
             <a:r>
-              <a:rPr lang="en-US" sz="1300" b="1" dirty="0">
+              <a:rPr lang="en-US" sz="1220" b="1" dirty="0">
                 <a:solidFill>
                   <a:srgbClr val="0068B7"/>
                 </a:solidFill>
@@ -5107,7 +5109,7 @@
               </a:rPr>
               <a:t>Risk check</a:t>
             </a:r>
-            <a:endParaRPr lang="en-US" sz="1300" dirty="0"/>
+            <a:endParaRPr lang="en-US" sz="1220" dirty="0"/>
           </a:p>
         </p:txBody>
       </p:sp>
@@ -5119,8 +5121,8 @@
         </p:nvSpPr>
         <p:spPr>
           <a:xfrm>
-            <a:off x="7799832" y="1801368"/>
-            <a:ext cx="3145536" cy="640080"/>
+            <a:off x="7708392" y="1764792"/>
+            <a:ext cx="3282696" cy="749808"/>
           </a:xfrm>
           <a:prstGeom prst="rect">
             <a:avLst/>
@@ -5138,7 +5140,7 @@
               <a:buNone/>
             </a:pPr>
             <a:r>
-              <a:rPr lang="en-US" sz="1320" dirty="0">
+              <a:rPr lang="en-US" sz="1220" dirty="0">
                 <a:solidFill>
                   <a:srgbClr val="17364A"/>
                 </a:solidFill>
@@ -5148,7 +5150,7 @@
               </a:rPr>
               <a:t>Technology-first design.</a:t>
             </a:r>
-            <a:endParaRPr lang="en-US" sz="1320" dirty="0"/>
+            <a:endParaRPr lang="en-US" sz="1220" dirty="0"/>
           </a:p>
         </p:txBody>
       </p:sp>
@@ -5160,12 +5162,12 @@
         </p:nvSpPr>
         <p:spPr>
           <a:xfrm>
-            <a:off x="7635240" y="2670048"/>
-            <a:ext cx="3474720" cy="1536192"/>
+            <a:off x="7543800" y="2724912"/>
+            <a:ext cx="3611880" cy="1527048"/>
           </a:xfrm>
           <a:prstGeom prst="roundRect">
             <a:avLst>
-              <a:gd name="adj" fmla="val 7143"/>
+              <a:gd name="adj" fmla="val 7186"/>
             </a:avLst>
           </a:prstGeom>
           <a:solidFill>
@@ -5187,8 +5189,8 @@
         </p:nvSpPr>
         <p:spPr>
           <a:xfrm>
-            <a:off x="7799832" y="2816352"/>
-            <a:ext cx="3145536" cy="256032"/>
+            <a:off x="7708392" y="2852928"/>
+            <a:ext cx="3282696" cy="228600"/>
           </a:xfrm>
           <a:prstGeom prst="rect">
             <a:avLst/>
@@ -5204,7 +5206,7 @@
               <a:buNone/>
             </a:pPr>
             <a:r>
-              <a:rPr lang="en-US" sz="1300" b="1" dirty="0">
+              <a:rPr lang="en-US" sz="1220" b="1" dirty="0">
                 <a:solidFill>
                   <a:srgbClr val="0068B7"/>
                 </a:solidFill>
@@ -5214,7 +5216,7 @@
               </a:rPr>
               <a:t>Concept checkpoints</a:t>
             </a:r>
-            <a:endParaRPr lang="en-US" sz="1300" dirty="0"/>
+            <a:endParaRPr lang="en-US" sz="1220" dirty="0"/>
           </a:p>
         </p:txBody>
       </p:sp>
@@ -5226,8 +5228,8 @@
         </p:nvSpPr>
         <p:spPr>
           <a:xfrm>
-            <a:off x="7818120" y="3182112"/>
-            <a:ext cx="3090672" cy="877824"/>
+            <a:off x="7726680" y="3182112"/>
+            <a:ext cx="3227832" cy="960120"/>
           </a:xfrm>
           <a:prstGeom prst="rect">
             <a:avLst/>
@@ -5245,7 +5247,7 @@
               <a:buNone/>
             </a:pPr>
             <a:r>
-              <a:rPr lang="en-US" sz="1220" dirty="0">
+              <a:rPr lang="en-US" sz="1140" dirty="0">
                 <a:solidFill>
                   <a:srgbClr val="17364A"/>
                 </a:solidFill>
@@ -5255,14 +5257,14 @@
               </a:rPr>
               <a:t>Unequal benefit.</a:t>
             </a:r>
-            <a:endParaRPr lang="en-US" sz="1220" dirty="0"/>
-          </a:p>
-          <a:p>
-            <a:pPr indent="0" marL="0">
-              <a:buNone/>
-            </a:pPr>
-            <a:r>
-              <a:rPr lang="en-US" sz="1220" dirty="0">
+            <a:endParaRPr lang="en-US" sz="1140" dirty="0"/>
+          </a:p>
+          <a:p>
+            <a:pPr indent="0" marL="0">
+              <a:buNone/>
+            </a:pPr>
+            <a:r>
+              <a:rPr lang="en-US" sz="1140" dirty="0">
                 <a:solidFill>
                   <a:srgbClr val="17364A"/>
                 </a:solidFill>
@@ -5270,16 +5272,16 @@
                 <a:ea typeface="Aptos" pitchFamily="34" charset="-122"/>
                 <a:cs typeface="Aptos" pitchFamily="34" charset="-120"/>
               </a:rPr>
-              <a:t>AI may help people with strong digital access while excluding.</a:t>
-            </a:r>
-            <a:endParaRPr lang="en-US" sz="1220" dirty="0"/>
-          </a:p>
-          <a:p>
-            <a:pPr indent="0" marL="0">
-              <a:buNone/>
-            </a:pPr>
-            <a:r>
-              <a:rPr lang="en-US" sz="1220" dirty="0">
+              <a:t>AI may help people with strong digital access.</a:t>
+            </a:r>
+            <a:endParaRPr lang="en-US" sz="1140" dirty="0"/>
+          </a:p>
+          <a:p>
+            <a:pPr indent="0" marL="0">
+              <a:buNone/>
+            </a:pPr>
+            <a:r>
+              <a:rPr lang="en-US" sz="1140" dirty="0">
                 <a:solidFill>
                   <a:srgbClr val="17364A"/>
                 </a:solidFill>
@@ -5287,9 +5289,9 @@
                 <a:ea typeface="Aptos" pitchFamily="34" charset="-122"/>
                 <a:cs typeface="Aptos" pitchFamily="34" charset="-120"/>
               </a:rPr>
-              <a:t>Guardrails include language access, accessibility, offline.</a:t>
-            </a:r>
-            <a:endParaRPr lang="en-US" sz="1220" dirty="0"/>
+              <a:t>Guardrails include language access, accessibility,.</a:t>
+            </a:r>
+            <a:endParaRPr lang="en-US" sz="1140" dirty="0"/>
           </a:p>
         </p:txBody>
       </p:sp>
@@ -5301,12 +5303,12 @@
         </p:nvSpPr>
         <p:spPr>
           <a:xfrm>
-            <a:off x="7635240" y="4343400"/>
-            <a:ext cx="3474720" cy="1255471"/>
+            <a:off x="7543800" y="4389120"/>
+            <a:ext cx="3611880" cy="1261872"/>
           </a:xfrm>
           <a:prstGeom prst="roundRect">
             <a:avLst>
-              <a:gd name="adj" fmla="val 8740"/>
+              <a:gd name="adj" fmla="val 8696"/>
             </a:avLst>
           </a:prstGeom>
           <a:solidFill>
@@ -5328,8 +5330,8 @@
         </p:nvSpPr>
         <p:spPr>
           <a:xfrm>
-            <a:off x="7799832" y="4489704"/>
-            <a:ext cx="3145536" cy="256032"/>
+            <a:off x="7708392" y="4517136"/>
+            <a:ext cx="3282696" cy="228600"/>
           </a:xfrm>
           <a:prstGeom prst="rect">
             <a:avLst/>
@@ -5345,7 +5347,7 @@
               <a:buNone/>
             </a:pPr>
             <a:r>
-              <a:rPr lang="en-US" sz="1300" b="1" dirty="0">
+              <a:rPr lang="en-US" sz="1220" b="1" dirty="0">
                 <a:solidFill>
                   <a:srgbClr val="0068B7"/>
                 </a:solidFill>
@@ -5355,7 +5357,7 @@
               </a:rPr>
               <a:t>Safeguard to plan</a:t>
             </a:r>
-            <a:endParaRPr lang="en-US" sz="1300" dirty="0"/>
+            <a:endParaRPr lang="en-US" sz="1220" dirty="0"/>
           </a:p>
         </p:txBody>
       </p:sp>
@@ -5367,8 +5369,8 @@
         </p:nvSpPr>
         <p:spPr>
           <a:xfrm>
-            <a:off x="7799832" y="4818888"/>
-            <a:ext cx="3145536" cy="688543"/>
+            <a:off x="7708392" y="4828032"/>
+            <a:ext cx="3282696" cy="749808"/>
           </a:xfrm>
           <a:prstGeom prst="rect">
             <a:avLst/>
@@ -5386,7 +5388,7 @@
               <a:buNone/>
             </a:pPr>
             <a:r>
-              <a:rPr lang="en-US" sz="1320" dirty="0">
+              <a:rPr lang="en-US" sz="1220" dirty="0">
                 <a:solidFill>
                   <a:srgbClr val="17364A"/>
                 </a:solidFill>
@@ -5394,9 +5396,9 @@
                 <a:ea typeface="Aptos" pitchFamily="34" charset="-122"/>
                 <a:cs typeface="Aptos" pitchFamily="34" charset="-120"/>
               </a:rPr>
-              <a:t>Identify what could go wrong, who could be affected, what safeguards are needed, and what evidence should be reviewed before use.</a:t>
-            </a:r>
-            <a:endParaRPr lang="en-US" sz="1320" dirty="0"/>
+              <a:t>Identify what could go wrong, who could be affected, what safeguards are needed,.</a:t>
+            </a:r>
+            <a:endParaRPr lang="en-US" sz="1220" dirty="0"/>
           </a:p>
         </p:txBody>
       </p:sp>
@@ -5687,8 +5689,8 @@
         </p:nvSpPr>
         <p:spPr>
           <a:xfrm>
-            <a:off x="868680" y="1508760"/>
-            <a:ext cx="6309360" cy="4160520"/>
+            <a:off x="822960" y="1463040"/>
+            <a:ext cx="6565392" cy="4343400"/>
           </a:xfrm>
           <a:prstGeom prst="rect">
             <a:avLst/>
@@ -5706,7 +5708,7 @@
               <a:buNone/>
             </a:pPr>
             <a:r>
-              <a:rPr lang="en-US" sz="2100" dirty="0">
+              <a:rPr lang="en-US" sz="1920" dirty="0">
                 <a:solidFill>
                   <a:srgbClr val="003A63"/>
                 </a:solidFill>
@@ -5716,14 +5718,14 @@
               </a:rPr>
               <a:t>• Resource diversion.</a:t>
             </a:r>
-            <a:endParaRPr lang="en-US" sz="2100" dirty="0"/>
-          </a:p>
-          <a:p>
-            <a:pPr indent="0" marL="0">
-              <a:buNone/>
-            </a:pPr>
-            <a:r>
-              <a:rPr lang="en-US" sz="2100" dirty="0">
+            <a:endParaRPr lang="en-US" sz="1920" dirty="0"/>
+          </a:p>
+          <a:p>
+            <a:pPr indent="0" marL="0">
+              <a:buNone/>
+            </a:pPr>
+            <a:r>
+              <a:rPr lang="en-US" sz="1920" dirty="0">
                 <a:solidFill>
                   <a:srgbClr val="003A63"/>
                 </a:solidFill>
@@ -5731,16 +5733,16 @@
                 <a:ea typeface="Aptos" pitchFamily="34" charset="-122"/>
                 <a:cs typeface="Aptos" pitchFamily="34" charset="-120"/>
               </a:rPr>
-              <a:t>• AI projects may consume resources that could be used for more effective interventions.</a:t>
-            </a:r>
-            <a:endParaRPr lang="en-US" sz="2100" dirty="0"/>
-          </a:p>
-          <a:p>
-            <a:pPr indent="0" marL="0">
-              <a:buNone/>
-            </a:pPr>
-            <a:r>
-              <a:rPr lang="en-US" sz="2100" dirty="0">
+              <a:t>• AI projects may consume resources that could be used for more effective.</a:t>
+            </a:r>
+            <a:endParaRPr lang="en-US" sz="1920" dirty="0"/>
+          </a:p>
+          <a:p>
+            <a:pPr indent="0" marL="0">
+              <a:buNone/>
+            </a:pPr>
+            <a:r>
+              <a:rPr lang="en-US" sz="1920" dirty="0">
                 <a:solidFill>
                   <a:srgbClr val="003A63"/>
                 </a:solidFill>
@@ -5748,9 +5750,9 @@
                 <a:ea typeface="Aptos" pitchFamily="34" charset="-122"/>
                 <a:cs typeface="Aptos" pitchFamily="34" charset="-120"/>
               </a:rPr>
-              <a:t>• Guardrails include impact measurement, cost-benefit review, and periodic reassessment.</a:t>
-            </a:r>
-            <a:endParaRPr lang="en-US" sz="2100" dirty="0"/>
+              <a:t>• Guardrails include impact measurement, cost-benefit review, and periodic.</a:t>
+            </a:r>
+            <a:endParaRPr lang="en-US" sz="1920" dirty="0"/>
           </a:p>
         </p:txBody>
       </p:sp>
@@ -5762,12 +5764,12 @@
         </p:nvSpPr>
         <p:spPr>
           <a:xfrm>
-            <a:off x="7635240" y="1325880"/>
-            <a:ext cx="3474720" cy="1207008"/>
+            <a:off x="7543800" y="1325880"/>
+            <a:ext cx="3611880" cy="1261872"/>
           </a:xfrm>
           <a:prstGeom prst="roundRect">
             <a:avLst>
-              <a:gd name="adj" fmla="val 9091"/>
+              <a:gd name="adj" fmla="val 8696"/>
             </a:avLst>
           </a:prstGeom>
           <a:solidFill>
@@ -5789,8 +5791,8 @@
         </p:nvSpPr>
         <p:spPr>
           <a:xfrm>
-            <a:off x="7799832" y="1472184"/>
-            <a:ext cx="3145536" cy="256032"/>
+            <a:off x="7708392" y="1453896"/>
+            <a:ext cx="3282696" cy="228600"/>
           </a:xfrm>
           <a:prstGeom prst="rect">
             <a:avLst/>
@@ -5806,7 +5808,7 @@
               <a:buNone/>
             </a:pPr>
             <a:r>
-              <a:rPr lang="en-US" sz="1300" b="1" dirty="0">
+              <a:rPr lang="en-US" sz="1220" b="1" dirty="0">
                 <a:solidFill>
                   <a:srgbClr val="0068B7"/>
                 </a:solidFill>
@@ -5816,7 +5818,7 @@
               </a:rPr>
               <a:t>Risk check</a:t>
             </a:r>
-            <a:endParaRPr lang="en-US" sz="1300" dirty="0"/>
+            <a:endParaRPr lang="en-US" sz="1220" dirty="0"/>
           </a:p>
         </p:txBody>
       </p:sp>
@@ -5828,8 +5830,8 @@
         </p:nvSpPr>
         <p:spPr>
           <a:xfrm>
-            <a:off x="7799832" y="1801368"/>
-            <a:ext cx="3145536" cy="640080"/>
+            <a:off x="7708392" y="1764792"/>
+            <a:ext cx="3282696" cy="749808"/>
           </a:xfrm>
           <a:prstGeom prst="rect">
             <a:avLst/>
@@ -5847,7 +5849,7 @@
               <a:buNone/>
             </a:pPr>
             <a:r>
-              <a:rPr lang="en-US" sz="1320" dirty="0">
+              <a:rPr lang="en-US" sz="1220" dirty="0">
                 <a:solidFill>
                   <a:srgbClr val="17364A"/>
                 </a:solidFill>
@@ -5857,7 +5859,7 @@
               </a:rPr>
               <a:t>Resource diversion.</a:t>
             </a:r>
-            <a:endParaRPr lang="en-US" sz="1320" dirty="0"/>
+            <a:endParaRPr lang="en-US" sz="1220" dirty="0"/>
           </a:p>
         </p:txBody>
       </p:sp>
@@ -5869,12 +5871,12 @@
         </p:nvSpPr>
         <p:spPr>
           <a:xfrm>
-            <a:off x="7635240" y="2670048"/>
-            <a:ext cx="3474720" cy="1536192"/>
+            <a:off x="7543800" y="2724912"/>
+            <a:ext cx="3611880" cy="1527048"/>
           </a:xfrm>
           <a:prstGeom prst="roundRect">
             <a:avLst>
-              <a:gd name="adj" fmla="val 7143"/>
+              <a:gd name="adj" fmla="val 7186"/>
             </a:avLst>
           </a:prstGeom>
           <a:solidFill>
@@ -5896,8 +5898,8 @@
         </p:nvSpPr>
         <p:spPr>
           <a:xfrm>
-            <a:off x="7799832" y="2816352"/>
-            <a:ext cx="3145536" cy="256032"/>
+            <a:off x="7708392" y="2852928"/>
+            <a:ext cx="3282696" cy="228600"/>
           </a:xfrm>
           <a:prstGeom prst="rect">
             <a:avLst/>
@@ -5913,7 +5915,7 @@
               <a:buNone/>
             </a:pPr>
             <a:r>
-              <a:rPr lang="en-US" sz="1300" b="1" dirty="0">
+              <a:rPr lang="en-US" sz="1220" b="1" dirty="0">
                 <a:solidFill>
                   <a:srgbClr val="0068B7"/>
                 </a:solidFill>
@@ -5923,7 +5925,7 @@
               </a:rPr>
               <a:t>Concept checkpoints</a:t>
             </a:r>
-            <a:endParaRPr lang="en-US" sz="1300" dirty="0"/>
+            <a:endParaRPr lang="en-US" sz="1220" dirty="0"/>
           </a:p>
         </p:txBody>
       </p:sp>
@@ -5935,8 +5937,8 @@
         </p:nvSpPr>
         <p:spPr>
           <a:xfrm>
-            <a:off x="7818120" y="3182112"/>
-            <a:ext cx="3090672" cy="877824"/>
+            <a:off x="7726680" y="3182112"/>
+            <a:ext cx="3227832" cy="960120"/>
           </a:xfrm>
           <a:prstGeom prst="rect">
             <a:avLst/>
@@ -5954,7 +5956,7 @@
               <a:buNone/>
             </a:pPr>
             <a:r>
-              <a:rPr lang="en-US" sz="1220" dirty="0">
+              <a:rPr lang="en-US" sz="1140" dirty="0">
                 <a:solidFill>
                   <a:srgbClr val="17364A"/>
                 </a:solidFill>
@@ -5964,14 +5966,14 @@
               </a:rPr>
               <a:t>Resource diversion.</a:t>
             </a:r>
-            <a:endParaRPr lang="en-US" sz="1220" dirty="0"/>
-          </a:p>
-          <a:p>
-            <a:pPr indent="0" marL="0">
-              <a:buNone/>
-            </a:pPr>
-            <a:r>
-              <a:rPr lang="en-US" sz="1220" dirty="0">
+            <a:endParaRPr lang="en-US" sz="1140" dirty="0"/>
+          </a:p>
+          <a:p>
+            <a:pPr indent="0" marL="0">
+              <a:buNone/>
+            </a:pPr>
+            <a:r>
+              <a:rPr lang="en-US" sz="1140" dirty="0">
                 <a:solidFill>
                   <a:srgbClr val="17364A"/>
                 </a:solidFill>
@@ -5979,16 +5981,16 @@
                 <a:ea typeface="Aptos" pitchFamily="34" charset="-122"/>
                 <a:cs typeface="Aptos" pitchFamily="34" charset="-120"/>
               </a:rPr>
-              <a:t>AI projects may consume resources that could be used for more.</a:t>
-            </a:r>
-            <a:endParaRPr lang="en-US" sz="1220" dirty="0"/>
-          </a:p>
-          <a:p>
-            <a:pPr indent="0" marL="0">
-              <a:buNone/>
-            </a:pPr>
-            <a:r>
-              <a:rPr lang="en-US" sz="1220" dirty="0">
+              <a:t>AI projects may consume resources that could be.</a:t>
+            </a:r>
+            <a:endParaRPr lang="en-US" sz="1140" dirty="0"/>
+          </a:p>
+          <a:p>
+            <a:pPr indent="0" marL="0">
+              <a:buNone/>
+            </a:pPr>
+            <a:r>
+              <a:rPr lang="en-US" sz="1140" dirty="0">
                 <a:solidFill>
                   <a:srgbClr val="17364A"/>
                 </a:solidFill>
@@ -5996,9 +5998,9 @@
                 <a:ea typeface="Aptos" pitchFamily="34" charset="-122"/>
                 <a:cs typeface="Aptos" pitchFamily="34" charset="-120"/>
               </a:rPr>
-              <a:t>Guardrails include impact measurement, cost-benefit review, and.</a:t>
-            </a:r>
-            <a:endParaRPr lang="en-US" sz="1220" dirty="0"/>
+              <a:t>Guardrails include impact measurement,.</a:t>
+            </a:r>
+            <a:endParaRPr lang="en-US" sz="1140" dirty="0"/>
           </a:p>
         </p:txBody>
       </p:sp>
@@ -6010,12 +6012,12 @@
         </p:nvSpPr>
         <p:spPr>
           <a:xfrm>
-            <a:off x="7635240" y="4343400"/>
-            <a:ext cx="3474720" cy="1255471"/>
+            <a:off x="7543800" y="4389120"/>
+            <a:ext cx="3611880" cy="1261872"/>
           </a:xfrm>
           <a:prstGeom prst="roundRect">
             <a:avLst>
-              <a:gd name="adj" fmla="val 8740"/>
+              <a:gd name="adj" fmla="val 8696"/>
             </a:avLst>
           </a:prstGeom>
           <a:solidFill>
@@ -6037,8 +6039,8 @@
         </p:nvSpPr>
         <p:spPr>
           <a:xfrm>
-            <a:off x="7799832" y="4489704"/>
-            <a:ext cx="3145536" cy="256032"/>
+            <a:off x="7708392" y="4517136"/>
+            <a:ext cx="3282696" cy="228600"/>
           </a:xfrm>
           <a:prstGeom prst="rect">
             <a:avLst/>
@@ -6054,7 +6056,7 @@
               <a:buNone/>
             </a:pPr>
             <a:r>
-              <a:rPr lang="en-US" sz="1300" b="1" dirty="0">
+              <a:rPr lang="en-US" sz="1220" b="1" dirty="0">
                 <a:solidFill>
                   <a:srgbClr val="0068B7"/>
                 </a:solidFill>
@@ -6064,7 +6066,7 @@
               </a:rPr>
               <a:t>Safeguard to plan</a:t>
             </a:r>
-            <a:endParaRPr lang="en-US" sz="1300" dirty="0"/>
+            <a:endParaRPr lang="en-US" sz="1220" dirty="0"/>
           </a:p>
         </p:txBody>
       </p:sp>
@@ -6076,8 +6078,8 @@
         </p:nvSpPr>
         <p:spPr>
           <a:xfrm>
-            <a:off x="7799832" y="4818888"/>
-            <a:ext cx="3145536" cy="688543"/>
+            <a:off x="7708392" y="4828032"/>
+            <a:ext cx="3282696" cy="749808"/>
           </a:xfrm>
           <a:prstGeom prst="rect">
             <a:avLst/>
@@ -6095,7 +6097,7 @@
               <a:buNone/>
             </a:pPr>
             <a:r>
-              <a:rPr lang="en-US" sz="1320" dirty="0">
+              <a:rPr lang="en-US" sz="1220" dirty="0">
                 <a:solidFill>
                   <a:srgbClr val="17364A"/>
                 </a:solidFill>
@@ -6103,9 +6105,9 @@
                 <a:ea typeface="Aptos" pitchFamily="34" charset="-122"/>
                 <a:cs typeface="Aptos" pitchFamily="34" charset="-120"/>
               </a:rPr>
-              <a:t>Identify what could go wrong, who could be affected, what safeguards are needed, and what evidence should be reviewed before use.</a:t>
-            </a:r>
-            <a:endParaRPr lang="en-US" sz="1320" dirty="0"/>
+              <a:t>Identify what could go wrong, who could be affected, what safeguards are needed,.</a:t>
+            </a:r>
+            <a:endParaRPr lang="en-US" sz="1220" dirty="0"/>
           </a:p>
         </p:txBody>
       </p:sp>
@@ -6396,8 +6398,8 @@
         </p:nvSpPr>
         <p:spPr>
           <a:xfrm>
-            <a:off x="868680" y="1508760"/>
-            <a:ext cx="6309360" cy="4160520"/>
+            <a:off x="822960" y="1463040"/>
+            <a:ext cx="6565392" cy="4343400"/>
           </a:xfrm>
           <a:prstGeom prst="rect">
             <a:avLst/>
@@ -6415,7 +6417,7 @@
               <a:buNone/>
             </a:pPr>
             <a:r>
-              <a:rPr lang="en-US" sz="2100" dirty="0">
+              <a:rPr lang="en-US" sz="1920" dirty="0">
                 <a:solidFill>
                   <a:srgbClr val="003A63"/>
                 </a:solidFill>
@@ -6425,14 +6427,14 @@
               </a:rPr>
               <a:t>• AI for Social Good applies to every AI method.</a:t>
             </a:r>
-            <a:endParaRPr lang="en-US" sz="2100" dirty="0"/>
-          </a:p>
-          <a:p>
-            <a:pPr indent="0" marL="0">
-              <a:buNone/>
-            </a:pPr>
-            <a:r>
-              <a:rPr lang="en-US" sz="2100" dirty="0">
+            <a:endParaRPr lang="en-US" sz="1920" dirty="0"/>
+          </a:p>
+          <a:p>
+            <a:pPr indent="0" marL="0">
+              <a:buNone/>
+            </a:pPr>
+            <a:r>
+              <a:rPr lang="en-US" sz="1920" dirty="0">
                 <a:solidFill>
                   <a:srgbClr val="003A63"/>
                 </a:solidFill>
@@ -6440,16 +6442,16 @@
                 <a:ea typeface="Aptos" pitchFamily="34" charset="-122"/>
                 <a:cs typeface="Aptos" pitchFamily="34" charset="-120"/>
               </a:rPr>
-              <a:t>• Generative AI may improve plain-language communication, but it must be accurate, accessible,.</a:t>
-            </a:r>
-            <a:endParaRPr lang="en-US" sz="2100" dirty="0"/>
-          </a:p>
-          <a:p>
-            <a:pPr indent="0" marL="0">
-              <a:buNone/>
-            </a:pPr>
-            <a:r>
-              <a:rPr lang="en-US" sz="2100" dirty="0">
+              <a:t>• Generative AI may improve plain-language communication, but it must be.</a:t>
+            </a:r>
+            <a:endParaRPr lang="en-US" sz="1920" dirty="0"/>
+          </a:p>
+          <a:p>
+            <a:pPr indent="0" marL="0">
+              <a:buNone/>
+            </a:pPr>
+            <a:r>
+              <a:rPr lang="en-US" sz="1920" dirty="0">
                 <a:solidFill>
                   <a:srgbClr val="003A63"/>
                 </a:solidFill>
@@ -6457,9 +6459,9 @@
                 <a:ea typeface="Aptos" pitchFamily="34" charset="-122"/>
                 <a:cs typeface="Aptos" pitchFamily="34" charset="-120"/>
               </a:rPr>
-              <a:t>• Predictive analytics may guide supportive outreach, but it should not become a tool for.</a:t>
-            </a:r>
-            <a:endParaRPr lang="en-US" sz="2100" dirty="0"/>
+              <a:t>• Predictive analytics may guide supportive outreach, but it should not become.</a:t>
+            </a:r>
+            <a:endParaRPr lang="en-US" sz="1920" dirty="0"/>
           </a:p>
         </p:txBody>
       </p:sp>
@@ -6471,12 +6473,12 @@
         </p:nvSpPr>
         <p:spPr>
           <a:xfrm>
-            <a:off x="7635240" y="1325880"/>
-            <a:ext cx="3474720" cy="1207008"/>
+            <a:off x="7543800" y="1325880"/>
+            <a:ext cx="3611880" cy="1261872"/>
           </a:xfrm>
           <a:prstGeom prst="roundRect">
             <a:avLst>
-              <a:gd name="adj" fmla="val 9091"/>
+              <a:gd name="adj" fmla="val 8696"/>
             </a:avLst>
           </a:prstGeom>
           <a:solidFill>
@@ -6498,8 +6500,8 @@
         </p:nvSpPr>
         <p:spPr>
           <a:xfrm>
-            <a:off x="7799832" y="1472184"/>
-            <a:ext cx="3145536" cy="256032"/>
+            <a:off x="7708392" y="1453896"/>
+            <a:ext cx="3282696" cy="228600"/>
           </a:xfrm>
           <a:prstGeom prst="rect">
             <a:avLst/>
@@ -6515,7 +6517,7 @@
               <a:buNone/>
             </a:pPr>
             <a:r>
-              <a:rPr lang="en-US" sz="1300" b="1" dirty="0">
+              <a:rPr lang="en-US" sz="1220" b="1" dirty="0">
                 <a:solidFill>
                   <a:srgbClr val="0068B7"/>
                 </a:solidFill>
@@ -6525,7 +6527,7 @@
               </a:rPr>
               <a:t>Implementation cue</a:t>
             </a:r>
-            <a:endParaRPr lang="en-US" sz="1300" dirty="0"/>
+            <a:endParaRPr lang="en-US" sz="1220" dirty="0"/>
           </a:p>
         </p:txBody>
       </p:sp>
@@ -6537,8 +6539,8 @@
         </p:nvSpPr>
         <p:spPr>
           <a:xfrm>
-            <a:off x="7799832" y="1801368"/>
-            <a:ext cx="3145536" cy="640080"/>
+            <a:off x="7708392" y="1764792"/>
+            <a:ext cx="3282696" cy="749808"/>
           </a:xfrm>
           <a:prstGeom prst="rect">
             <a:avLst/>
@@ -6556,7 +6558,7 @@
               <a:buNone/>
             </a:pPr>
             <a:r>
-              <a:rPr lang="en-US" sz="1320" dirty="0">
+              <a:rPr lang="en-US" sz="1220" dirty="0">
                 <a:solidFill>
                   <a:srgbClr val="17364A"/>
                 </a:solidFill>
@@ -6566,7 +6568,7 @@
               </a:rPr>
               <a:t>AI for Social Good applies to every AI method.</a:t>
             </a:r>
-            <a:endParaRPr lang="en-US" sz="1320" dirty="0"/>
+            <a:endParaRPr lang="en-US" sz="1220" dirty="0"/>
           </a:p>
         </p:txBody>
       </p:sp>
@@ -6578,12 +6580,12 @@
         </p:nvSpPr>
         <p:spPr>
           <a:xfrm>
-            <a:off x="7635240" y="2670048"/>
-            <a:ext cx="3474720" cy="1377086"/>
+            <a:off x="7543800" y="2724912"/>
+            <a:ext cx="3611880" cy="1527048"/>
           </a:xfrm>
           <a:prstGeom prst="roundRect">
             <a:avLst>
-              <a:gd name="adj" fmla="val 7968"/>
+              <a:gd name="adj" fmla="val 7186"/>
             </a:avLst>
           </a:prstGeom>
           <a:solidFill>
@@ -6605,8 +6607,8 @@
         </p:nvSpPr>
         <p:spPr>
           <a:xfrm>
-            <a:off x="7799832" y="2816352"/>
-            <a:ext cx="3145536" cy="256032"/>
+            <a:off x="7708392" y="2852928"/>
+            <a:ext cx="3282696" cy="228600"/>
           </a:xfrm>
           <a:prstGeom prst="rect">
             <a:avLst/>
@@ -6622,7 +6624,7 @@
               <a:buNone/>
             </a:pPr>
             <a:r>
-              <a:rPr lang="en-US" sz="1300" b="1" dirty="0">
+              <a:rPr lang="en-US" sz="1220" b="1" dirty="0">
                 <a:solidFill>
                   <a:srgbClr val="0068B7"/>
                 </a:solidFill>
@@ -6632,7 +6634,7 @@
               </a:rPr>
               <a:t>Concept checkpoints</a:t>
             </a:r>
-            <a:endParaRPr lang="en-US" sz="1300" dirty="0"/>
+            <a:endParaRPr lang="en-US" sz="1220" dirty="0"/>
           </a:p>
         </p:txBody>
       </p:sp>
@@ -6644,8 +6646,8 @@
         </p:nvSpPr>
         <p:spPr>
           <a:xfrm>
-            <a:off x="7818120" y="3182112"/>
-            <a:ext cx="3090672" cy="718718"/>
+            <a:off x="7726680" y="3182112"/>
+            <a:ext cx="3227832" cy="960120"/>
           </a:xfrm>
           <a:prstGeom prst="rect">
             <a:avLst/>
@@ -6663,7 +6665,7 @@
               <a:buNone/>
             </a:pPr>
             <a:r>
-              <a:rPr lang="en-US" sz="1220" dirty="0">
+              <a:rPr lang="en-US" sz="1140" dirty="0">
                 <a:solidFill>
                   <a:srgbClr val="17364A"/>
                 </a:solidFill>
@@ -6671,16 +6673,16 @@
                 <a:ea typeface="Aptos" pitchFamily="34" charset="-122"/>
                 <a:cs typeface="Aptos" pitchFamily="34" charset="-120"/>
               </a:rPr>
-              <a:t>Generative AI may improve plain-language communication, but it.</a:t>
-            </a:r>
-            <a:endParaRPr lang="en-US" sz="1220" dirty="0"/>
-          </a:p>
-          <a:p>
-            <a:pPr indent="0" marL="0">
-              <a:buNone/>
-            </a:pPr>
-            <a:r>
-              <a:rPr lang="en-US" sz="1220" dirty="0">
+              <a:t>Generative AI may improve plain-language.</a:t>
+            </a:r>
+            <a:endParaRPr lang="en-US" sz="1140" dirty="0"/>
+          </a:p>
+          <a:p>
+            <a:pPr indent="0" marL="0">
+              <a:buNone/>
+            </a:pPr>
+            <a:r>
+              <a:rPr lang="en-US" sz="1140" dirty="0">
                 <a:solidFill>
                   <a:srgbClr val="17364A"/>
                 </a:solidFill>
@@ -6688,16 +6690,16 @@
                 <a:ea typeface="Aptos" pitchFamily="34" charset="-122"/>
                 <a:cs typeface="Aptos" pitchFamily="34" charset="-120"/>
               </a:rPr>
-              <a:t>RAG systems may improve staff access to guidance, but they must.</a:t>
-            </a:r>
-            <a:endParaRPr lang="en-US" sz="1220" dirty="0"/>
-          </a:p>
-          <a:p>
-            <a:pPr indent="0" marL="0">
-              <a:buNone/>
-            </a:pPr>
-            <a:r>
-              <a:rPr lang="en-US" sz="1220" dirty="0">
+              <a:t>RAG systems may improve staff access to guidance,.</a:t>
+            </a:r>
+            <a:endParaRPr lang="en-US" sz="1140" dirty="0"/>
+          </a:p>
+          <a:p>
+            <a:pPr indent="0" marL="0">
+              <a:buNone/>
+            </a:pPr>
+            <a:r>
+              <a:rPr lang="en-US" sz="1140" dirty="0">
                 <a:solidFill>
                   <a:srgbClr val="17364A"/>
                 </a:solidFill>
@@ -6705,9 +6707,9 @@
                 <a:ea typeface="Aptos" pitchFamily="34" charset="-122"/>
                 <a:cs typeface="Aptos" pitchFamily="34" charset="-120"/>
               </a:rPr>
-              <a:t>Agentic workflows may reduce burden, but they require boundaries.</a:t>
-            </a:r>
-            <a:endParaRPr lang="en-US" sz="1220" dirty="0"/>
+              <a:t>Agentic workflows may reduce burden, but they.</a:t>
+            </a:r>
+            <a:endParaRPr lang="en-US" sz="1140" dirty="0"/>
           </a:p>
         </p:txBody>
       </p:sp>
@@ -6719,12 +6721,12 @@
         </p:nvSpPr>
         <p:spPr>
           <a:xfrm>
-            <a:off x="7635240" y="4184294"/>
-            <a:ext cx="3474720" cy="1466698"/>
+            <a:off x="7543800" y="4389120"/>
+            <a:ext cx="3611880" cy="1261872"/>
           </a:xfrm>
           <a:prstGeom prst="roundRect">
             <a:avLst>
-              <a:gd name="adj" fmla="val 7481"/>
+              <a:gd name="adj" fmla="val 8696"/>
             </a:avLst>
           </a:prstGeom>
           <a:solidFill>
@@ -6746,8 +6748,8 @@
         </p:nvSpPr>
         <p:spPr>
           <a:xfrm>
-            <a:off x="7799832" y="4330598"/>
-            <a:ext cx="3145536" cy="256032"/>
+            <a:off x="7708392" y="4517136"/>
+            <a:ext cx="3282696" cy="228600"/>
           </a:xfrm>
           <a:prstGeom prst="rect">
             <a:avLst/>
@@ -6763,7 +6765,7 @@
               <a:buNone/>
             </a:pPr>
             <a:r>
-              <a:rPr lang="en-US" sz="1300" b="1" dirty="0">
+              <a:rPr lang="en-US" sz="1220" b="1" dirty="0">
                 <a:solidFill>
                   <a:srgbClr val="0068B7"/>
                 </a:solidFill>
@@ -6773,7 +6775,7 @@
               </a:rPr>
               <a:t>Next action</a:t>
             </a:r>
-            <a:endParaRPr lang="en-US" sz="1300" dirty="0"/>
+            <a:endParaRPr lang="en-US" sz="1220" dirty="0"/>
           </a:p>
         </p:txBody>
       </p:sp>
@@ -6785,8 +6787,8 @@
         </p:nvSpPr>
         <p:spPr>
           <a:xfrm>
-            <a:off x="7799832" y="4659782"/>
-            <a:ext cx="3145536" cy="899770"/>
+            <a:off x="7708392" y="4828032"/>
+            <a:ext cx="3282696" cy="749808"/>
           </a:xfrm>
           <a:prstGeom prst="rect">
             <a:avLst/>
@@ -6804,7 +6806,7 @@
               <a:buNone/>
             </a:pPr>
             <a:r>
-              <a:rPr lang="en-US" sz="1320" dirty="0">
+              <a:rPr lang="en-US" sz="1220" dirty="0">
                 <a:solidFill>
                   <a:srgbClr val="17364A"/>
                 </a:solidFill>
@@ -6812,9 +6814,9 @@
                 <a:ea typeface="Aptos" pitchFamily="34" charset="-122"/>
                 <a:cs typeface="Aptos" pitchFamily="34" charset="-120"/>
               </a:rPr>
-              <a:t>Use the concept to clarify workflow changes, dependencies, staffing, procurement requirements, training needs, and implementation checkpoints.</a:t>
-            </a:r>
-            <a:endParaRPr lang="en-US" sz="1320" dirty="0"/>
+              <a:t>Use the concept to clarify workflow changes, dependencies, staffing, procurement.</a:t>
+            </a:r>
+            <a:endParaRPr lang="en-US" sz="1220" dirty="0"/>
           </a:p>
         </p:txBody>
       </p:sp>
@@ -7105,8 +7107,8 @@
         </p:nvSpPr>
         <p:spPr>
           <a:xfrm>
-            <a:off x="868680" y="1508760"/>
-            <a:ext cx="6309360" cy="4160520"/>
+            <a:off x="822960" y="1463040"/>
+            <a:ext cx="6565392" cy="4343400"/>
           </a:xfrm>
           <a:prstGeom prst="rect">
             <a:avLst/>
@@ -7124,7 +7126,7 @@
               <a:buNone/>
             </a:pPr>
             <a:r>
-              <a:rPr lang="en-US" sz="2100" dirty="0">
+              <a:rPr lang="en-US" sz="1920" dirty="0">
                 <a:solidFill>
                   <a:srgbClr val="003A63"/>
                 </a:solidFill>
@@ -7134,14 +7136,14 @@
               </a:rPr>
               <a:t>• What public health problem would this AI use address?</a:t>
             </a:r>
-            <a:endParaRPr lang="en-US" sz="2100" dirty="0"/>
-          </a:p>
-          <a:p>
-            <a:pPr indent="0" marL="0">
-              <a:buNone/>
-            </a:pPr>
-            <a:r>
-              <a:rPr lang="en-US" sz="2100" dirty="0">
+            <a:endParaRPr lang="en-US" sz="1920" dirty="0"/>
+          </a:p>
+          <a:p>
+            <a:pPr indent="0" marL="0">
+              <a:buNone/>
+            </a:pPr>
+            <a:r>
+              <a:rPr lang="en-US" sz="1920" dirty="0">
                 <a:solidFill>
                   <a:srgbClr val="003A63"/>
                 </a:solidFill>
@@ -7151,14 +7153,14 @@
               </a:rPr>
               <a:t>• Who would benefit, and who could be excluded or harmed?</a:t>
             </a:r>
-            <a:endParaRPr lang="en-US" sz="2100" dirty="0"/>
-          </a:p>
-          <a:p>
-            <a:pPr indent="0" marL="0">
-              <a:buNone/>
-            </a:pPr>
-            <a:r>
-              <a:rPr lang="en-US" sz="2100" dirty="0">
+            <a:endParaRPr lang="en-US" sz="1920" dirty="0"/>
+          </a:p>
+          <a:p>
+            <a:pPr indent="0" marL="0">
+              <a:buNone/>
+            </a:pPr>
+            <a:r>
+              <a:rPr lang="en-US" sz="1920" dirty="0">
                 <a:solidFill>
                   <a:srgbClr val="003A63"/>
                 </a:solidFill>
@@ -7168,7 +7170,7 @@
               </a:rPr>
               <a:t>• How were affected communities involved in defining the need and safeguards?</a:t>
             </a:r>
-            <a:endParaRPr lang="en-US" sz="2100" dirty="0"/>
+            <a:endParaRPr lang="en-US" sz="1920" dirty="0"/>
           </a:p>
         </p:txBody>
       </p:sp>
@@ -7180,12 +7182,12 @@
         </p:nvSpPr>
         <p:spPr>
           <a:xfrm>
-            <a:off x="7635240" y="1325880"/>
-            <a:ext cx="3474720" cy="1207008"/>
+            <a:off x="7543800" y="1325880"/>
+            <a:ext cx="3611880" cy="1261872"/>
           </a:xfrm>
           <a:prstGeom prst="roundRect">
             <a:avLst>
-              <a:gd name="adj" fmla="val 9091"/>
+              <a:gd name="adj" fmla="val 8696"/>
             </a:avLst>
           </a:prstGeom>
           <a:solidFill>
@@ -7207,8 +7209,8 @@
         </p:nvSpPr>
         <p:spPr>
           <a:xfrm>
-            <a:off x="7799832" y="1472184"/>
-            <a:ext cx="3145536" cy="256032"/>
+            <a:off x="7708392" y="1453896"/>
+            <a:ext cx="3282696" cy="228600"/>
           </a:xfrm>
           <a:prstGeom prst="rect">
             <a:avLst/>
@@ -7224,7 +7226,7 @@
               <a:buNone/>
             </a:pPr>
             <a:r>
-              <a:rPr lang="en-US" sz="1300" b="1" dirty="0">
+              <a:rPr lang="en-US" sz="1220" b="1" dirty="0">
                 <a:solidFill>
                   <a:srgbClr val="0068B7"/>
                 </a:solidFill>
@@ -7234,7 +7236,7 @@
               </a:rPr>
               <a:t>Core concept</a:t>
             </a:r>
-            <a:endParaRPr lang="en-US" sz="1300" dirty="0"/>
+            <a:endParaRPr lang="en-US" sz="1220" dirty="0"/>
           </a:p>
         </p:txBody>
       </p:sp>
@@ -7246,8 +7248,8 @@
         </p:nvSpPr>
         <p:spPr>
           <a:xfrm>
-            <a:off x="7799832" y="1801368"/>
-            <a:ext cx="3145536" cy="640080"/>
+            <a:off x="7708392" y="1764792"/>
+            <a:ext cx="3282696" cy="749808"/>
           </a:xfrm>
           <a:prstGeom prst="rect">
             <a:avLst/>
@@ -7265,7 +7267,7 @@
               <a:buNone/>
             </a:pPr>
             <a:r>
-              <a:rPr lang="en-US" sz="1320" dirty="0">
+              <a:rPr lang="en-US" sz="1220" dirty="0">
                 <a:solidFill>
                   <a:srgbClr val="17364A"/>
                 </a:solidFill>
@@ -7275,7 +7277,7 @@
               </a:rPr>
               <a:t>What public health problem would this AI use address?</a:t>
             </a:r>
-            <a:endParaRPr lang="en-US" sz="1320" dirty="0"/>
+            <a:endParaRPr lang="en-US" sz="1220" dirty="0"/>
           </a:p>
         </p:txBody>
       </p:sp>
@@ -7287,12 +7289,12 @@
         </p:nvSpPr>
         <p:spPr>
           <a:xfrm>
-            <a:off x="7635240" y="2670048"/>
-            <a:ext cx="3474720" cy="1377086"/>
+            <a:off x="7543800" y="2724912"/>
+            <a:ext cx="3611880" cy="1527048"/>
           </a:xfrm>
           <a:prstGeom prst="roundRect">
             <a:avLst>
-              <a:gd name="adj" fmla="val 7968"/>
+              <a:gd name="adj" fmla="val 7186"/>
             </a:avLst>
           </a:prstGeom>
           <a:solidFill>
@@ -7314,8 +7316,8 @@
         </p:nvSpPr>
         <p:spPr>
           <a:xfrm>
-            <a:off x="7799832" y="2816352"/>
-            <a:ext cx="3145536" cy="256032"/>
+            <a:off x="7708392" y="2852928"/>
+            <a:ext cx="3282696" cy="228600"/>
           </a:xfrm>
           <a:prstGeom prst="rect">
             <a:avLst/>
@@ -7331,7 +7333,7 @@
               <a:buNone/>
             </a:pPr>
             <a:r>
-              <a:rPr lang="en-US" sz="1300" b="1" dirty="0">
+              <a:rPr lang="en-US" sz="1220" b="1" dirty="0">
                 <a:solidFill>
                   <a:srgbClr val="0068B7"/>
                 </a:solidFill>
@@ -7341,7 +7343,7 @@
               </a:rPr>
               <a:t>Concept checkpoints</a:t>
             </a:r>
-            <a:endParaRPr lang="en-US" sz="1300" dirty="0"/>
+            <a:endParaRPr lang="en-US" sz="1220" dirty="0"/>
           </a:p>
         </p:txBody>
       </p:sp>
@@ -7353,8 +7355,8 @@
         </p:nvSpPr>
         <p:spPr>
           <a:xfrm>
-            <a:off x="7818120" y="3182112"/>
-            <a:ext cx="3090672" cy="718718"/>
+            <a:off x="7726680" y="3182112"/>
+            <a:ext cx="3227832" cy="960120"/>
           </a:xfrm>
           <a:prstGeom prst="rect">
             <a:avLst/>
@@ -7372,7 +7374,7 @@
               <a:buNone/>
             </a:pPr>
             <a:r>
-              <a:rPr lang="en-US" sz="1220" dirty="0">
+              <a:rPr lang="en-US" sz="1140" dirty="0">
                 <a:solidFill>
                   <a:srgbClr val="17364A"/>
                 </a:solidFill>
@@ -7380,16 +7382,16 @@
                 <a:ea typeface="Aptos" pitchFamily="34" charset="-122"/>
                 <a:cs typeface="Aptos" pitchFamily="34" charset="-120"/>
               </a:rPr>
-              <a:t>What public health problem would this AI use address?</a:t>
-            </a:r>
-            <a:endParaRPr lang="en-US" sz="1220" dirty="0"/>
-          </a:p>
-          <a:p>
-            <a:pPr indent="0" marL="0">
-              <a:buNone/>
-            </a:pPr>
-            <a:r>
-              <a:rPr lang="en-US" sz="1220" dirty="0">
+              <a:t>What public health problem would this AI use.</a:t>
+            </a:r>
+            <a:endParaRPr lang="en-US" sz="1140" dirty="0"/>
+          </a:p>
+          <a:p>
+            <a:pPr indent="0" marL="0">
+              <a:buNone/>
+            </a:pPr>
+            <a:r>
+              <a:rPr lang="en-US" sz="1140" dirty="0">
                 <a:solidFill>
                   <a:srgbClr val="17364A"/>
                 </a:solidFill>
@@ -7397,16 +7399,16 @@
                 <a:ea typeface="Aptos" pitchFamily="34" charset="-122"/>
                 <a:cs typeface="Aptos" pitchFamily="34" charset="-120"/>
               </a:rPr>
-              <a:t>Who would benefit, and who could be excluded or harmed?</a:t>
-            </a:r>
-            <a:endParaRPr lang="en-US" sz="1220" dirty="0"/>
-          </a:p>
-          <a:p>
-            <a:pPr indent="0" marL="0">
-              <a:buNone/>
-            </a:pPr>
-            <a:r>
-              <a:rPr lang="en-US" sz="1220" dirty="0">
+              <a:t>Who would benefit, and who could be excluded or.</a:t>
+            </a:r>
+            <a:endParaRPr lang="en-US" sz="1140" dirty="0"/>
+          </a:p>
+          <a:p>
+            <a:pPr indent="0" marL="0">
+              <a:buNone/>
+            </a:pPr>
+            <a:r>
+              <a:rPr lang="en-US" sz="1140" dirty="0">
                 <a:solidFill>
                   <a:srgbClr val="17364A"/>
                 </a:solidFill>
@@ -7414,9 +7416,9 @@
                 <a:ea typeface="Aptos" pitchFamily="34" charset="-122"/>
                 <a:cs typeface="Aptos" pitchFamily="34" charset="-120"/>
               </a:rPr>
-              <a:t>How were affected communities involved in defining the need and.</a:t>
-            </a:r>
-            <a:endParaRPr lang="en-US" sz="1220" dirty="0"/>
+              <a:t>How were affected communities involved in defining.</a:t>
+            </a:r>
+            <a:endParaRPr lang="en-US" sz="1140" dirty="0"/>
           </a:p>
         </p:txBody>
       </p:sp>
@@ -7428,12 +7430,12 @@
         </p:nvSpPr>
         <p:spPr>
           <a:xfrm>
-            <a:off x="7635240" y="4184294"/>
-            <a:ext cx="3474720" cy="1466698"/>
+            <a:off x="7543800" y="4389120"/>
+            <a:ext cx="3611880" cy="1261872"/>
           </a:xfrm>
           <a:prstGeom prst="roundRect">
             <a:avLst>
-              <a:gd name="adj" fmla="val 7481"/>
+              <a:gd name="adj" fmla="val 8696"/>
             </a:avLst>
           </a:prstGeom>
           <a:solidFill>
@@ -7455,8 +7457,8 @@
         </p:nvSpPr>
         <p:spPr>
           <a:xfrm>
-            <a:off x="7799832" y="4330598"/>
-            <a:ext cx="3145536" cy="256032"/>
+            <a:off x="7708392" y="4517136"/>
+            <a:ext cx="3282696" cy="228600"/>
           </a:xfrm>
           <a:prstGeom prst="rect">
             <a:avLst/>
@@ -7472,7 +7474,7 @@
               <a:buNone/>
             </a:pPr>
             <a:r>
-              <a:rPr lang="en-US" sz="1300" b="1" dirty="0">
+              <a:rPr lang="en-US" sz="1220" b="1" dirty="0">
                 <a:solidFill>
                   <a:srgbClr val="0068B7"/>
                 </a:solidFill>
@@ -7482,7 +7484,7 @@
               </a:rPr>
               <a:t>Apply it</a:t>
             </a:r>
-            <a:endParaRPr lang="en-US" sz="1300" dirty="0"/>
+            <a:endParaRPr lang="en-US" sz="1220" dirty="0"/>
           </a:p>
         </p:txBody>
       </p:sp>
@@ -7494,8 +7496,8 @@
         </p:nvSpPr>
         <p:spPr>
           <a:xfrm>
-            <a:off x="7799832" y="4659782"/>
-            <a:ext cx="3145536" cy="899770"/>
+            <a:off x="7708392" y="4828032"/>
+            <a:ext cx="3282696" cy="749808"/>
           </a:xfrm>
           <a:prstGeom prst="rect">
             <a:avLst/>
@@ -7513,7 +7515,7 @@
               <a:buNone/>
             </a:pPr>
             <a:r>
-              <a:rPr lang="en-US" sz="1320" dirty="0">
+              <a:rPr lang="en-US" sz="1220" dirty="0">
                 <a:solidFill>
                   <a:srgbClr val="17364A"/>
                 </a:solidFill>
@@ -7521,9 +7523,9 @@
                 <a:ea typeface="Aptos" pitchFamily="34" charset="-122"/>
                 <a:cs typeface="Aptos" pitchFamily="34" charset="-120"/>
               </a:rPr>
-              <a:t>Connect the concept to public health purpose, responsible use, required safeguards, documentation, and the next action a department should take.</a:t>
-            </a:r>
-            <a:endParaRPr lang="en-US" sz="1320" dirty="0"/>
+              <a:t>Connect the concept to public health purpose, responsible use, required.</a:t>
+            </a:r>
+            <a:endParaRPr lang="en-US" sz="1220" dirty="0"/>
           </a:p>
         </p:txBody>
       </p:sp>
@@ -7814,8 +7816,8 @@
         </p:nvSpPr>
         <p:spPr>
           <a:xfrm>
-            <a:off x="868680" y="1508760"/>
-            <a:ext cx="6309360" cy="4160520"/>
+            <a:off x="822960" y="1463040"/>
+            <a:ext cx="6565392" cy="4343400"/>
           </a:xfrm>
           <a:prstGeom prst="rect">
             <a:avLst/>
@@ -7833,7 +7835,7 @@
               <a:buNone/>
             </a:pPr>
             <a:r>
-              <a:rPr lang="en-US" sz="2100" dirty="0">
+              <a:rPr lang="en-US" sz="1920" dirty="0">
                 <a:solidFill>
                   <a:srgbClr val="003A63"/>
                 </a:solidFill>
@@ -7843,14 +7845,14 @@
               </a:rPr>
               <a:t>• What non-AI alternatives should be considered?</a:t>
             </a:r>
-            <a:endParaRPr lang="en-US" sz="2100" dirty="0"/>
-          </a:p>
-          <a:p>
-            <a:pPr indent="0" marL="0">
-              <a:buNone/>
-            </a:pPr>
-            <a:r>
-              <a:rPr lang="en-US" sz="2100" dirty="0">
+            <a:endParaRPr lang="en-US" sz="1920" dirty="0"/>
+          </a:p>
+          <a:p>
+            <a:pPr indent="0" marL="0">
+              <a:buNone/>
+            </a:pPr>
+            <a:r>
+              <a:rPr lang="en-US" sz="1920" dirty="0">
                 <a:solidFill>
                   <a:srgbClr val="003A63"/>
                 </a:solidFill>
@@ -7858,9 +7860,9 @@
                 <a:ea typeface="Aptos" pitchFamily="34" charset="-122"/>
                 <a:cs typeface="Aptos" pitchFamily="34" charset="-120"/>
               </a:rPr>
-              <a:t>• How will the agency measure public value, equity, trust, and unintended consequences?</a:t>
-            </a:r>
-            <a:endParaRPr lang="en-US" sz="2100" dirty="0"/>
+              <a:t>• How will the agency measure public value, equity, trust, and unintended.</a:t>
+            </a:r>
+            <a:endParaRPr lang="en-US" sz="1920" dirty="0"/>
           </a:p>
         </p:txBody>
       </p:sp>
@@ -7872,12 +7874,12 @@
         </p:nvSpPr>
         <p:spPr>
           <a:xfrm>
-            <a:off x="7635240" y="1325880"/>
-            <a:ext cx="3474720" cy="1207008"/>
+            <a:off x="7543800" y="1325880"/>
+            <a:ext cx="3611880" cy="1261872"/>
           </a:xfrm>
           <a:prstGeom prst="roundRect">
             <a:avLst>
-              <a:gd name="adj" fmla="val 9091"/>
+              <a:gd name="adj" fmla="val 8696"/>
             </a:avLst>
           </a:prstGeom>
           <a:solidFill>
@@ -7899,8 +7901,8 @@
         </p:nvSpPr>
         <p:spPr>
           <a:xfrm>
-            <a:off x="7799832" y="1472184"/>
-            <a:ext cx="3145536" cy="256032"/>
+            <a:off x="7708392" y="1453896"/>
+            <a:ext cx="3282696" cy="228600"/>
           </a:xfrm>
           <a:prstGeom prst="rect">
             <a:avLst/>
@@ -7916,7 +7918,7 @@
               <a:buNone/>
             </a:pPr>
             <a:r>
-              <a:rPr lang="en-US" sz="1300" b="1" dirty="0">
+              <a:rPr lang="en-US" sz="1220" b="1" dirty="0">
                 <a:solidFill>
                   <a:srgbClr val="0068B7"/>
                 </a:solidFill>
@@ -7926,7 +7928,7 @@
               </a:rPr>
               <a:t>Core concept</a:t>
             </a:r>
-            <a:endParaRPr lang="en-US" sz="1300" dirty="0"/>
+            <a:endParaRPr lang="en-US" sz="1220" dirty="0"/>
           </a:p>
         </p:txBody>
       </p:sp>
@@ -7938,8 +7940,8 @@
         </p:nvSpPr>
         <p:spPr>
           <a:xfrm>
-            <a:off x="7799832" y="1801368"/>
-            <a:ext cx="3145536" cy="640080"/>
+            <a:off x="7708392" y="1764792"/>
+            <a:ext cx="3282696" cy="749808"/>
           </a:xfrm>
           <a:prstGeom prst="rect">
             <a:avLst/>
@@ -7957,7 +7959,7 @@
               <a:buNone/>
             </a:pPr>
             <a:r>
-              <a:rPr lang="en-US" sz="1320" dirty="0">
+              <a:rPr lang="en-US" sz="1220" dirty="0">
                 <a:solidFill>
                   <a:srgbClr val="17364A"/>
                 </a:solidFill>
@@ -7967,7 +7969,7 @@
               </a:rPr>
               <a:t>What non-AI alternatives should be considered?</a:t>
             </a:r>
-            <a:endParaRPr lang="en-US" sz="1320" dirty="0"/>
+            <a:endParaRPr lang="en-US" sz="1220" dirty="0"/>
           </a:p>
         </p:txBody>
       </p:sp>
@@ -7979,12 +7981,12 @@
         </p:nvSpPr>
         <p:spPr>
           <a:xfrm>
-            <a:off x="7635240" y="2670048"/>
-            <a:ext cx="3474720" cy="1377086"/>
+            <a:off x="7543800" y="2724912"/>
+            <a:ext cx="3611880" cy="1527048"/>
           </a:xfrm>
           <a:prstGeom prst="roundRect">
             <a:avLst>
-              <a:gd name="adj" fmla="val 7968"/>
+              <a:gd name="adj" fmla="val 7186"/>
             </a:avLst>
           </a:prstGeom>
           <a:solidFill>
@@ -8006,8 +8008,8 @@
         </p:nvSpPr>
         <p:spPr>
           <a:xfrm>
-            <a:off x="7799832" y="2816352"/>
-            <a:ext cx="3145536" cy="256032"/>
+            <a:off x="7708392" y="2852928"/>
+            <a:ext cx="3282696" cy="228600"/>
           </a:xfrm>
           <a:prstGeom prst="rect">
             <a:avLst/>
@@ -8023,7 +8025,7 @@
               <a:buNone/>
             </a:pPr>
             <a:r>
-              <a:rPr lang="en-US" sz="1300" b="1" dirty="0">
+              <a:rPr lang="en-US" sz="1220" b="1" dirty="0">
                 <a:solidFill>
                   <a:srgbClr val="0068B7"/>
                 </a:solidFill>
@@ -8033,7 +8035,7 @@
               </a:rPr>
               <a:t>Concept checkpoints</a:t>
             </a:r>
-            <a:endParaRPr lang="en-US" sz="1300" dirty="0"/>
+            <a:endParaRPr lang="en-US" sz="1220" dirty="0"/>
           </a:p>
         </p:txBody>
       </p:sp>
@@ -8045,8 +8047,8 @@
         </p:nvSpPr>
         <p:spPr>
           <a:xfrm>
-            <a:off x="7818120" y="3182112"/>
-            <a:ext cx="3090672" cy="718718"/>
+            <a:off x="7726680" y="3182112"/>
+            <a:ext cx="3227832" cy="960120"/>
           </a:xfrm>
           <a:prstGeom prst="rect">
             <a:avLst/>
@@ -8064,7 +8066,7 @@
               <a:buNone/>
             </a:pPr>
             <a:r>
-              <a:rPr lang="en-US" sz="1220" dirty="0">
+              <a:rPr lang="en-US" sz="1140" dirty="0">
                 <a:solidFill>
                   <a:srgbClr val="17364A"/>
                 </a:solidFill>
@@ -8074,14 +8076,14 @@
               </a:rPr>
               <a:t>What non-AI alternatives should be considered?</a:t>
             </a:r>
-            <a:endParaRPr lang="en-US" sz="1220" dirty="0"/>
-          </a:p>
-          <a:p>
-            <a:pPr indent="0" marL="0">
-              <a:buNone/>
-            </a:pPr>
-            <a:r>
-              <a:rPr lang="en-US" sz="1220" dirty="0">
+            <a:endParaRPr lang="en-US" sz="1140" dirty="0"/>
+          </a:p>
+          <a:p>
+            <a:pPr indent="0" marL="0">
+              <a:buNone/>
+            </a:pPr>
+            <a:r>
+              <a:rPr lang="en-US" sz="1140" dirty="0">
                 <a:solidFill>
                   <a:srgbClr val="17364A"/>
                 </a:solidFill>
@@ -8089,9 +8091,9 @@
                 <a:ea typeface="Aptos" pitchFamily="34" charset="-122"/>
                 <a:cs typeface="Aptos" pitchFamily="34" charset="-120"/>
               </a:rPr>
-              <a:t>How will the agency measure public value, equity, trust, and.</a:t>
-            </a:r>
-            <a:endParaRPr lang="en-US" sz="1220" dirty="0"/>
+              <a:t>How will the agency measure public value, equity,.</a:t>
+            </a:r>
+            <a:endParaRPr lang="en-US" sz="1140" dirty="0"/>
           </a:p>
         </p:txBody>
       </p:sp>
@@ -8103,12 +8105,12 @@
         </p:nvSpPr>
         <p:spPr>
           <a:xfrm>
-            <a:off x="7635240" y="4184294"/>
-            <a:ext cx="3474720" cy="1466698"/>
+            <a:off x="7543800" y="4389120"/>
+            <a:ext cx="3611880" cy="1261872"/>
           </a:xfrm>
           <a:prstGeom prst="roundRect">
             <a:avLst>
-              <a:gd name="adj" fmla="val 7481"/>
+              <a:gd name="adj" fmla="val 8696"/>
             </a:avLst>
           </a:prstGeom>
           <a:solidFill>
@@ -8130,8 +8132,8 @@
         </p:nvSpPr>
         <p:spPr>
           <a:xfrm>
-            <a:off x="7799832" y="4330598"/>
-            <a:ext cx="3145536" cy="256032"/>
+            <a:off x="7708392" y="4517136"/>
+            <a:ext cx="3282696" cy="228600"/>
           </a:xfrm>
           <a:prstGeom prst="rect">
             <a:avLst/>
@@ -8147,7 +8149,7 @@
               <a:buNone/>
             </a:pPr>
             <a:r>
-              <a:rPr lang="en-US" sz="1300" b="1" dirty="0">
+              <a:rPr lang="en-US" sz="1220" b="1" dirty="0">
                 <a:solidFill>
                   <a:srgbClr val="0068B7"/>
                 </a:solidFill>
@@ -8157,7 +8159,7 @@
               </a:rPr>
               <a:t>Apply it</a:t>
             </a:r>
-            <a:endParaRPr lang="en-US" sz="1300" dirty="0"/>
+            <a:endParaRPr lang="en-US" sz="1220" dirty="0"/>
           </a:p>
         </p:txBody>
       </p:sp>
@@ -8169,8 +8171,8 @@
         </p:nvSpPr>
         <p:spPr>
           <a:xfrm>
-            <a:off x="7799832" y="4659782"/>
-            <a:ext cx="3145536" cy="899770"/>
+            <a:off x="7708392" y="4828032"/>
+            <a:ext cx="3282696" cy="749808"/>
           </a:xfrm>
           <a:prstGeom prst="rect">
             <a:avLst/>
@@ -8188,7 +8190,7 @@
               <a:buNone/>
             </a:pPr>
             <a:r>
-              <a:rPr lang="en-US" sz="1320" dirty="0">
+              <a:rPr lang="en-US" sz="1220" dirty="0">
                 <a:solidFill>
                   <a:srgbClr val="17364A"/>
                 </a:solidFill>
@@ -8196,9 +8198,9 @@
                 <a:ea typeface="Aptos" pitchFamily="34" charset="-122"/>
                 <a:cs typeface="Aptos" pitchFamily="34" charset="-120"/>
               </a:rPr>
-              <a:t>Connect the concept to public health purpose, responsible use, required safeguards, documentation, and the next action a department should take.</a:t>
-            </a:r>
-            <a:endParaRPr lang="en-US" sz="1320" dirty="0"/>
+              <a:t>Connect the concept to public health purpose, responsible use, required.</a:t>
+            </a:r>
+            <a:endParaRPr lang="en-US" sz="1220" dirty="0"/>
           </a:p>
         </p:txBody>
       </p:sp>
@@ -8489,8 +8491,8 @@
         </p:nvSpPr>
         <p:spPr>
           <a:xfrm>
-            <a:off x="868680" y="1508760"/>
-            <a:ext cx="6309360" cy="4160520"/>
+            <a:off x="822960" y="1463040"/>
+            <a:ext cx="6565392" cy="4343400"/>
           </a:xfrm>
           <a:prstGeom prst="rect">
             <a:avLst/>
@@ -8508,7 +8510,7 @@
               <a:buNone/>
             </a:pPr>
             <a:r>
-              <a:rPr lang="en-US" sz="2100" dirty="0">
+              <a:rPr lang="en-US" sz="1920" dirty="0">
                 <a:solidFill>
                   <a:srgbClr val="003A63"/>
                 </a:solidFill>
@@ -8518,14 +8520,14 @@
               </a:rPr>
               <a:t>• Create an AI for Social Good review brief for one public health use case.</a:t>
             </a:r>
-            <a:endParaRPr lang="en-US" sz="2100" dirty="0"/>
-          </a:p>
-          <a:p>
-            <a:pPr indent="0" marL="0">
-              <a:buNone/>
-            </a:pPr>
-            <a:r>
-              <a:rPr lang="en-US" sz="2100" dirty="0">
+            <a:endParaRPr lang="en-US" sz="1920" dirty="0"/>
+          </a:p>
+          <a:p>
+            <a:pPr indent="0" marL="0">
+              <a:buNone/>
+            </a:pPr>
+            <a:r>
+              <a:rPr lang="en-US" sz="1920" dirty="0">
                 <a:solidFill>
                   <a:srgbClr val="003A63"/>
                 </a:solidFill>
@@ -8533,16 +8535,16 @@
                 <a:ea typeface="Aptos" pitchFamily="34" charset="-122"/>
                 <a:cs typeface="Aptos" pitchFamily="34" charset="-120"/>
               </a:rPr>
-              <a:t>• The brief should define the public health problem, intended public benefit, affected.</a:t>
-            </a:r>
-            <a:endParaRPr lang="en-US" sz="2100" dirty="0"/>
-          </a:p>
-          <a:p>
-            <a:pPr indent="0" marL="0">
-              <a:buNone/>
-            </a:pPr>
-            <a:r>
-              <a:rPr lang="en-US" sz="2100" dirty="0">
+              <a:t>• The brief should define the public health problem, intended public benefit,.</a:t>
+            </a:r>
+            <a:endParaRPr lang="en-US" sz="1920" dirty="0"/>
+          </a:p>
+          <a:p>
+            <a:pPr indent="0" marL="0">
+              <a:buNone/>
+            </a:pPr>
+            <a:r>
+              <a:rPr lang="en-US" sz="1920" dirty="0">
                 <a:solidFill>
                   <a:srgbClr val="003A63"/>
                 </a:solidFill>
@@ -8550,9 +8552,9 @@
                 <a:ea typeface="Aptos" pitchFamily="34" charset="-122"/>
                 <a:cs typeface="Aptos" pitchFamily="34" charset="-120"/>
               </a:rPr>
-              <a:t>• The exercise should result in a decision-support document that helps leaders and governance.</a:t>
-            </a:r>
-            <a:endParaRPr lang="en-US" sz="2100" dirty="0"/>
+              <a:t>• The exercise should result in a decision-support document that helps leaders.</a:t>
+            </a:r>
+            <a:endParaRPr lang="en-US" sz="1920" dirty="0"/>
           </a:p>
         </p:txBody>
       </p:sp>
@@ -8564,12 +8566,12 @@
         </p:nvSpPr>
         <p:spPr>
           <a:xfrm>
-            <a:off x="7635240" y="1325880"/>
-            <a:ext cx="3474720" cy="1207008"/>
+            <a:off x="7543800" y="1325880"/>
+            <a:ext cx="3611880" cy="1261872"/>
           </a:xfrm>
           <a:prstGeom prst="roundRect">
             <a:avLst>
-              <a:gd name="adj" fmla="val 9091"/>
+              <a:gd name="adj" fmla="val 8696"/>
             </a:avLst>
           </a:prstGeom>
           <a:solidFill>
@@ -8591,8 +8593,8 @@
         </p:nvSpPr>
         <p:spPr>
           <a:xfrm>
-            <a:off x="7799832" y="1472184"/>
-            <a:ext cx="3145536" cy="256032"/>
+            <a:off x="7708392" y="1453896"/>
+            <a:ext cx="3282696" cy="228600"/>
           </a:xfrm>
           <a:prstGeom prst="rect">
             <a:avLst/>
@@ -8608,7 +8610,7 @@
               <a:buNone/>
             </a:pPr>
             <a:r>
-              <a:rPr lang="en-US" sz="1300" b="1" dirty="0">
+              <a:rPr lang="en-US" sz="1220" b="1" dirty="0">
                 <a:solidFill>
                   <a:srgbClr val="0068B7"/>
                 </a:solidFill>
@@ -8618,7 +8620,7 @@
               </a:rPr>
               <a:t>Practice focus</a:t>
             </a:r>
-            <a:endParaRPr lang="en-US" sz="1300" dirty="0"/>
+            <a:endParaRPr lang="en-US" sz="1220" dirty="0"/>
           </a:p>
         </p:txBody>
       </p:sp>
@@ -8630,8 +8632,8 @@
         </p:nvSpPr>
         <p:spPr>
           <a:xfrm>
-            <a:off x="7799832" y="1801368"/>
-            <a:ext cx="3145536" cy="640080"/>
+            <a:off x="7708392" y="1764792"/>
+            <a:ext cx="3282696" cy="749808"/>
           </a:xfrm>
           <a:prstGeom prst="rect">
             <a:avLst/>
@@ -8649,7 +8651,7 @@
               <a:buNone/>
             </a:pPr>
             <a:r>
-              <a:rPr lang="en-US" sz="1320" dirty="0">
+              <a:rPr lang="en-US" sz="1220" dirty="0">
                 <a:solidFill>
                   <a:srgbClr val="17364A"/>
                 </a:solidFill>
@@ -8659,7 +8661,7 @@
               </a:rPr>
               <a:t>Create an AI for Social Good review brief for one public health use case.</a:t>
             </a:r>
-            <a:endParaRPr lang="en-US" sz="1320" dirty="0"/>
+            <a:endParaRPr lang="en-US" sz="1220" dirty="0"/>
           </a:p>
         </p:txBody>
       </p:sp>
@@ -8671,12 +8673,12 @@
         </p:nvSpPr>
         <p:spPr>
           <a:xfrm>
-            <a:off x="7635240" y="2670048"/>
-            <a:ext cx="3474720" cy="1377086"/>
+            <a:off x="7543800" y="2724912"/>
+            <a:ext cx="3611880" cy="1527048"/>
           </a:xfrm>
           <a:prstGeom prst="roundRect">
             <a:avLst>
-              <a:gd name="adj" fmla="val 7968"/>
+              <a:gd name="adj" fmla="val 7186"/>
             </a:avLst>
           </a:prstGeom>
           <a:solidFill>
@@ -8698,8 +8700,8 @@
         </p:nvSpPr>
         <p:spPr>
           <a:xfrm>
-            <a:off x="7799832" y="2816352"/>
-            <a:ext cx="3145536" cy="256032"/>
+            <a:off x="7708392" y="2852928"/>
+            <a:ext cx="3282696" cy="228600"/>
           </a:xfrm>
           <a:prstGeom prst="rect">
             <a:avLst/>
@@ -8715,7 +8717,7 @@
               <a:buNone/>
             </a:pPr>
             <a:r>
-              <a:rPr lang="en-US" sz="1300" b="1" dirty="0">
+              <a:rPr lang="en-US" sz="1220" b="1" dirty="0">
                 <a:solidFill>
                   <a:srgbClr val="0068B7"/>
                 </a:solidFill>
@@ -8725,7 +8727,7 @@
               </a:rPr>
               <a:t>Concept checkpoints</a:t>
             </a:r>
-            <a:endParaRPr lang="en-US" sz="1300" dirty="0"/>
+            <a:endParaRPr lang="en-US" sz="1220" dirty="0"/>
           </a:p>
         </p:txBody>
       </p:sp>
@@ -8737,8 +8739,8 @@
         </p:nvSpPr>
         <p:spPr>
           <a:xfrm>
-            <a:off x="7818120" y="3182112"/>
-            <a:ext cx="3090672" cy="718718"/>
+            <a:off x="7726680" y="3182112"/>
+            <a:ext cx="3227832" cy="960120"/>
           </a:xfrm>
           <a:prstGeom prst="rect">
             <a:avLst/>
@@ -8756,7 +8758,7 @@
               <a:buNone/>
             </a:pPr>
             <a:r>
-              <a:rPr lang="en-US" sz="1220" dirty="0">
+              <a:rPr lang="en-US" sz="1140" dirty="0">
                 <a:solidFill>
                   <a:srgbClr val="17364A"/>
                 </a:solidFill>
@@ -8764,16 +8766,16 @@
                 <a:ea typeface="Aptos" pitchFamily="34" charset="-122"/>
                 <a:cs typeface="Aptos" pitchFamily="34" charset="-120"/>
               </a:rPr>
-              <a:t>The brief should define the public health problem, intended public.</a:t>
-            </a:r>
-            <a:endParaRPr lang="en-US" sz="1220" dirty="0"/>
-          </a:p>
-          <a:p>
-            <a:pPr indent="0" marL="0">
-              <a:buNone/>
-            </a:pPr>
-            <a:r>
-              <a:rPr lang="en-US" sz="1220" dirty="0">
+              <a:t>The brief should define the public health problem,.</a:t>
+            </a:r>
+            <a:endParaRPr lang="en-US" sz="1140" dirty="0"/>
+          </a:p>
+          <a:p>
+            <a:pPr indent="0" marL="0">
+              <a:buNone/>
+            </a:pPr>
+            <a:r>
+              <a:rPr lang="en-US" sz="1140" dirty="0">
                 <a:solidFill>
                   <a:srgbClr val="17364A"/>
                 </a:solidFill>
@@ -8781,9 +8783,9 @@
                 <a:ea typeface="Aptos" pitchFamily="34" charset="-122"/>
                 <a:cs typeface="Aptos" pitchFamily="34" charset="-120"/>
               </a:rPr>
-              <a:t>The exercise should result in a decision-support document that.</a:t>
-            </a:r>
-            <a:endParaRPr lang="en-US" sz="1220" dirty="0"/>
+              <a:t>The exercise should result in a decision-support.</a:t>
+            </a:r>
+            <a:endParaRPr lang="en-US" sz="1140" dirty="0"/>
           </a:p>
         </p:txBody>
       </p:sp>
@@ -8795,12 +8797,12 @@
         </p:nvSpPr>
         <p:spPr>
           <a:xfrm>
-            <a:off x="7635240" y="4184294"/>
-            <a:ext cx="3474720" cy="1466698"/>
+            <a:off x="7543800" y="4389120"/>
+            <a:ext cx="3611880" cy="1261872"/>
           </a:xfrm>
           <a:prstGeom prst="roundRect">
             <a:avLst>
-              <a:gd name="adj" fmla="val 7481"/>
+              <a:gd name="adj" fmla="val 8696"/>
             </a:avLst>
           </a:prstGeom>
           <a:solidFill>
@@ -8822,8 +8824,8 @@
         </p:nvSpPr>
         <p:spPr>
           <a:xfrm>
-            <a:off x="7799832" y="4330598"/>
-            <a:ext cx="3145536" cy="256032"/>
+            <a:off x="7708392" y="4517136"/>
+            <a:ext cx="3282696" cy="228600"/>
           </a:xfrm>
           <a:prstGeom prst="rect">
             <a:avLst/>
@@ -8839,7 +8841,7 @@
               <a:buNone/>
             </a:pPr>
             <a:r>
-              <a:rPr lang="en-US" sz="1300" b="1" dirty="0">
+              <a:rPr lang="en-US" sz="1220" b="1" dirty="0">
                 <a:solidFill>
                   <a:srgbClr val="0068B7"/>
                 </a:solidFill>
@@ -8849,7 +8851,7 @@
               </a:rPr>
               <a:t>What to produce</a:t>
             </a:r>
-            <a:endParaRPr lang="en-US" sz="1300" dirty="0"/>
+            <a:endParaRPr lang="en-US" sz="1220" dirty="0"/>
           </a:p>
         </p:txBody>
       </p:sp>
@@ -8861,8 +8863,8 @@
         </p:nvSpPr>
         <p:spPr>
           <a:xfrm>
-            <a:off x="7799832" y="4659782"/>
-            <a:ext cx="3145536" cy="899770"/>
+            <a:off x="7708392" y="4828032"/>
+            <a:ext cx="3282696" cy="749808"/>
           </a:xfrm>
           <a:prstGeom prst="rect">
             <a:avLst/>
@@ -8880,7 +8882,7 @@
               <a:buNone/>
             </a:pPr>
             <a:r>
-              <a:rPr lang="en-US" sz="1320" dirty="0">
+              <a:rPr lang="en-US" sz="1220" dirty="0">
                 <a:solidFill>
                   <a:srgbClr val="17364A"/>
                 </a:solidFill>
@@ -8888,9 +8890,9 @@
                 <a:ea typeface="Aptos" pitchFamily="34" charset="-122"/>
                 <a:cs typeface="Aptos" pitchFamily="34" charset="-120"/>
               </a:rPr>
-              <a:t>Use the assignment to test whether you can explain the concept, apply it to a realistic public health situation, and identify what would need review before the work moves forward.</a:t>
-            </a:r>
-            <a:endParaRPr lang="en-US" sz="1320" dirty="0"/>
+              <a:t>Use the assignment to test whether you can explain the concept, apply it to a.</a:t>
+            </a:r>
+            <a:endParaRPr lang="en-US" sz="1220" dirty="0"/>
           </a:p>
         </p:txBody>
       </p:sp>
@@ -9181,8 +9183,8 @@
         </p:nvSpPr>
         <p:spPr>
           <a:xfrm>
-            <a:off x="868680" y="1508760"/>
-            <a:ext cx="6309360" cy="4160520"/>
+            <a:off x="822960" y="1463040"/>
+            <a:ext cx="6565392" cy="4343400"/>
           </a:xfrm>
           <a:prstGeom prst="rect">
             <a:avLst/>
@@ -9200,7 +9202,7 @@
               <a:buNone/>
             </a:pPr>
             <a:r>
-              <a:rPr lang="en-US" sz="2100" dirty="0">
+              <a:rPr lang="en-US" sz="1920" dirty="0">
                 <a:solidFill>
                   <a:srgbClr val="003A63"/>
                 </a:solidFill>
@@ -9210,14 +9212,14 @@
               </a:rPr>
               <a:t>• AI for Social Good review brief</a:t>
             </a:r>
-            <a:endParaRPr lang="en-US" sz="2100" dirty="0"/>
-          </a:p>
-          <a:p>
-            <a:pPr indent="0" marL="0">
-              <a:buNone/>
-            </a:pPr>
-            <a:r>
-              <a:rPr lang="en-US" sz="2100" dirty="0">
+            <a:endParaRPr lang="en-US" sz="1920" dirty="0"/>
+          </a:p>
+          <a:p>
+            <a:pPr indent="0" marL="0">
+              <a:buNone/>
+            </a:pPr>
+            <a:r>
+              <a:rPr lang="en-US" sz="1920" dirty="0">
                 <a:solidFill>
                   <a:srgbClr val="003A63"/>
                 </a:solidFill>
@@ -9227,14 +9229,14 @@
               </a:rPr>
               <a:t>• Public value and equity assessment</a:t>
             </a:r>
-            <a:endParaRPr lang="en-US" sz="2100" dirty="0"/>
-          </a:p>
-          <a:p>
-            <a:pPr indent="0" marL="0">
-              <a:buNone/>
-            </a:pPr>
-            <a:r>
-              <a:rPr lang="en-US" sz="2100" dirty="0">
+            <a:endParaRPr lang="en-US" sz="1920" dirty="0"/>
+          </a:p>
+          <a:p>
+            <a:pPr indent="0" marL="0">
+              <a:buNone/>
+            </a:pPr>
+            <a:r>
+              <a:rPr lang="en-US" sz="1920" dirty="0">
                 <a:solidFill>
                   <a:srgbClr val="003A63"/>
                 </a:solidFill>
@@ -9244,7 +9246,7 @@
               </a:rPr>
               <a:t>• Community engagement and accessibility plan</a:t>
             </a:r>
-            <a:endParaRPr lang="en-US" sz="2100" dirty="0"/>
+            <a:endParaRPr lang="en-US" sz="1920" dirty="0"/>
           </a:p>
         </p:txBody>
       </p:sp>
@@ -9256,12 +9258,12 @@
         </p:nvSpPr>
         <p:spPr>
           <a:xfrm>
-            <a:off x="7635240" y="1325880"/>
-            <a:ext cx="3474720" cy="1207008"/>
+            <a:off x="7543800" y="1325880"/>
+            <a:ext cx="3611880" cy="1261872"/>
           </a:xfrm>
           <a:prstGeom prst="roundRect">
             <a:avLst>
-              <a:gd name="adj" fmla="val 9091"/>
+              <a:gd name="adj" fmla="val 8696"/>
             </a:avLst>
           </a:prstGeom>
           <a:solidFill>
@@ -9283,8 +9285,8 @@
         </p:nvSpPr>
         <p:spPr>
           <a:xfrm>
-            <a:off x="7799832" y="1472184"/>
-            <a:ext cx="3145536" cy="256032"/>
+            <a:off x="7708392" y="1453896"/>
+            <a:ext cx="3282696" cy="228600"/>
           </a:xfrm>
           <a:prstGeom prst="rect">
             <a:avLst/>
@@ -9300,7 +9302,7 @@
               <a:buNone/>
             </a:pPr>
             <a:r>
-              <a:rPr lang="en-US" sz="1300" b="1" dirty="0">
+              <a:rPr lang="en-US" sz="1220" b="1" dirty="0">
                 <a:solidFill>
                   <a:srgbClr val="0068B7"/>
                 </a:solidFill>
@@ -9310,7 +9312,7 @@
               </a:rPr>
               <a:t>Core concept</a:t>
             </a:r>
-            <a:endParaRPr lang="en-US" sz="1300" dirty="0"/>
+            <a:endParaRPr lang="en-US" sz="1220" dirty="0"/>
           </a:p>
         </p:txBody>
       </p:sp>
@@ -9322,8 +9324,8 @@
         </p:nvSpPr>
         <p:spPr>
           <a:xfrm>
-            <a:off x="7799832" y="1801368"/>
-            <a:ext cx="3145536" cy="640080"/>
+            <a:off x="7708392" y="1764792"/>
+            <a:ext cx="3282696" cy="749808"/>
           </a:xfrm>
           <a:prstGeom prst="rect">
             <a:avLst/>
@@ -9341,7 +9343,7 @@
               <a:buNone/>
             </a:pPr>
             <a:r>
-              <a:rPr lang="en-US" sz="1320" dirty="0">
+              <a:rPr lang="en-US" sz="1220" dirty="0">
                 <a:solidFill>
                   <a:srgbClr val="17364A"/>
                 </a:solidFill>
@@ -9351,7 +9353,7 @@
               </a:rPr>
               <a:t>AI for Social Good review brief</a:t>
             </a:r>
-            <a:endParaRPr lang="en-US" sz="1320" dirty="0"/>
+            <a:endParaRPr lang="en-US" sz="1220" dirty="0"/>
           </a:p>
         </p:txBody>
       </p:sp>
@@ -9363,12 +9365,12 @@
         </p:nvSpPr>
         <p:spPr>
           <a:xfrm>
-            <a:off x="7635240" y="2670048"/>
-            <a:ext cx="3474720" cy="1377086"/>
+            <a:off x="7543800" y="2724912"/>
+            <a:ext cx="3611880" cy="1527048"/>
           </a:xfrm>
           <a:prstGeom prst="roundRect">
             <a:avLst>
-              <a:gd name="adj" fmla="val 7968"/>
+              <a:gd name="adj" fmla="val 7186"/>
             </a:avLst>
           </a:prstGeom>
           <a:solidFill>
@@ -9390,8 +9392,8 @@
         </p:nvSpPr>
         <p:spPr>
           <a:xfrm>
-            <a:off x="7799832" y="2816352"/>
-            <a:ext cx="3145536" cy="256032"/>
+            <a:off x="7708392" y="2852928"/>
+            <a:ext cx="3282696" cy="228600"/>
           </a:xfrm>
           <a:prstGeom prst="rect">
             <a:avLst/>
@@ -9407,7 +9409,7 @@
               <a:buNone/>
             </a:pPr>
             <a:r>
-              <a:rPr lang="en-US" sz="1300" b="1" dirty="0">
+              <a:rPr lang="en-US" sz="1220" b="1" dirty="0">
                 <a:solidFill>
                   <a:srgbClr val="0068B7"/>
                 </a:solidFill>
@@ -9417,7 +9419,7 @@
               </a:rPr>
               <a:t>Concept checkpoints</a:t>
             </a:r>
-            <a:endParaRPr lang="en-US" sz="1300" dirty="0"/>
+            <a:endParaRPr lang="en-US" sz="1220" dirty="0"/>
           </a:p>
         </p:txBody>
       </p:sp>
@@ -9429,8 +9431,8 @@
         </p:nvSpPr>
         <p:spPr>
           <a:xfrm>
-            <a:off x="7818120" y="3182112"/>
-            <a:ext cx="3090672" cy="718718"/>
+            <a:off x="7726680" y="3182112"/>
+            <a:ext cx="3227832" cy="960120"/>
           </a:xfrm>
           <a:prstGeom prst="rect">
             <a:avLst/>
@@ -9448,7 +9450,7 @@
               <a:buNone/>
             </a:pPr>
             <a:r>
-              <a:rPr lang="en-US" sz="1220" dirty="0">
+              <a:rPr lang="en-US" sz="1140" dirty="0">
                 <a:solidFill>
                   <a:srgbClr val="17364A"/>
                 </a:solidFill>
@@ -9458,14 +9460,14 @@
               </a:rPr>
               <a:t>AI for Social Good review brief</a:t>
             </a:r>
-            <a:endParaRPr lang="en-US" sz="1220" dirty="0"/>
-          </a:p>
-          <a:p>
-            <a:pPr indent="0" marL="0">
-              <a:buNone/>
-            </a:pPr>
-            <a:r>
-              <a:rPr lang="en-US" sz="1220" dirty="0">
+            <a:endParaRPr lang="en-US" sz="1140" dirty="0"/>
+          </a:p>
+          <a:p>
+            <a:pPr indent="0" marL="0">
+              <a:buNone/>
+            </a:pPr>
+            <a:r>
+              <a:rPr lang="en-US" sz="1140" dirty="0">
                 <a:solidFill>
                   <a:srgbClr val="17364A"/>
                 </a:solidFill>
@@ -9475,14 +9477,14 @@
               </a:rPr>
               <a:t>Public value and equity assessment</a:t>
             </a:r>
-            <a:endParaRPr lang="en-US" sz="1220" dirty="0"/>
-          </a:p>
-          <a:p>
-            <a:pPr indent="0" marL="0">
-              <a:buNone/>
-            </a:pPr>
-            <a:r>
-              <a:rPr lang="en-US" sz="1220" dirty="0">
+            <a:endParaRPr lang="en-US" sz="1140" dirty="0"/>
+          </a:p>
+          <a:p>
+            <a:pPr indent="0" marL="0">
+              <a:buNone/>
+            </a:pPr>
+            <a:r>
+              <a:rPr lang="en-US" sz="1140" dirty="0">
                 <a:solidFill>
                   <a:srgbClr val="17364A"/>
                 </a:solidFill>
@@ -9492,7 +9494,7 @@
               </a:rPr>
               <a:t>Community engagement and accessibility plan</a:t>
             </a:r>
-            <a:endParaRPr lang="en-US" sz="1220" dirty="0"/>
+            <a:endParaRPr lang="en-US" sz="1140" dirty="0"/>
           </a:p>
         </p:txBody>
       </p:sp>
@@ -9504,12 +9506,12 @@
         </p:nvSpPr>
         <p:spPr>
           <a:xfrm>
-            <a:off x="7635240" y="4184294"/>
-            <a:ext cx="3474720" cy="1466698"/>
+            <a:off x="7543800" y="4389120"/>
+            <a:ext cx="3611880" cy="1261872"/>
           </a:xfrm>
           <a:prstGeom prst="roundRect">
             <a:avLst>
-              <a:gd name="adj" fmla="val 7481"/>
+              <a:gd name="adj" fmla="val 8696"/>
             </a:avLst>
           </a:prstGeom>
           <a:solidFill>
@@ -9531,8 +9533,8 @@
         </p:nvSpPr>
         <p:spPr>
           <a:xfrm>
-            <a:off x="7799832" y="4330598"/>
-            <a:ext cx="3145536" cy="256032"/>
+            <a:off x="7708392" y="4517136"/>
+            <a:ext cx="3282696" cy="228600"/>
           </a:xfrm>
           <a:prstGeom prst="rect">
             <a:avLst/>
@@ -9548,7 +9550,7 @@
               <a:buNone/>
             </a:pPr>
             <a:r>
-              <a:rPr lang="en-US" sz="1300" b="1" dirty="0">
+              <a:rPr lang="en-US" sz="1220" b="1" dirty="0">
                 <a:solidFill>
                   <a:srgbClr val="0068B7"/>
                 </a:solidFill>
@@ -9558,7 +9560,7 @@
               </a:rPr>
               <a:t>Apply it</a:t>
             </a:r>
-            <a:endParaRPr lang="en-US" sz="1300" dirty="0"/>
+            <a:endParaRPr lang="en-US" sz="1220" dirty="0"/>
           </a:p>
         </p:txBody>
       </p:sp>
@@ -9570,8 +9572,8 @@
         </p:nvSpPr>
         <p:spPr>
           <a:xfrm>
-            <a:off x="7799832" y="4659782"/>
-            <a:ext cx="3145536" cy="899770"/>
+            <a:off x="7708392" y="4828032"/>
+            <a:ext cx="3282696" cy="749808"/>
           </a:xfrm>
           <a:prstGeom prst="rect">
             <a:avLst/>
@@ -9589,7 +9591,7 @@
               <a:buNone/>
             </a:pPr>
             <a:r>
-              <a:rPr lang="en-US" sz="1320" dirty="0">
+              <a:rPr lang="en-US" sz="1220" dirty="0">
                 <a:solidFill>
                   <a:srgbClr val="17364A"/>
                 </a:solidFill>
@@ -9597,9 +9599,9 @@
                 <a:ea typeface="Aptos" pitchFamily="34" charset="-122"/>
                 <a:cs typeface="Aptos" pitchFamily="34" charset="-120"/>
               </a:rPr>
-              <a:t>Connect the concept to public health purpose, responsible use, required safeguards, documentation, and the next action a department should take.</a:t>
-            </a:r>
-            <a:endParaRPr lang="en-US" sz="1320" dirty="0"/>
+              <a:t>Connect the concept to public health purpose, responsible use, required.</a:t>
+            </a:r>
+            <a:endParaRPr lang="en-US" sz="1220" dirty="0"/>
           </a:p>
         </p:txBody>
       </p:sp>
@@ -9890,8 +9892,8 @@
         </p:nvSpPr>
         <p:spPr>
           <a:xfrm>
-            <a:off x="868680" y="1508760"/>
-            <a:ext cx="6309360" cy="4160520"/>
+            <a:off x="822960" y="1463040"/>
+            <a:ext cx="6565392" cy="4343400"/>
           </a:xfrm>
           <a:prstGeom prst="rect">
             <a:avLst/>
@@ -9909,7 +9911,7 @@
               <a:buNone/>
             </a:pPr>
             <a:r>
-              <a:rPr lang="en-US" sz="2100" dirty="0">
+              <a:rPr lang="en-US" sz="1920" dirty="0">
                 <a:solidFill>
                   <a:srgbClr val="003A63"/>
                 </a:solidFill>
@@ -9919,7 +9921,7 @@
               </a:rPr>
               <a:t>• Impact and unintended-consequence measurement plan</a:t>
             </a:r>
-            <a:endParaRPr lang="en-US" sz="2100" dirty="0"/>
+            <a:endParaRPr lang="en-US" sz="1920" dirty="0"/>
           </a:p>
         </p:txBody>
       </p:sp>
@@ -9931,12 +9933,12 @@
         </p:nvSpPr>
         <p:spPr>
           <a:xfrm>
-            <a:off x="7635240" y="1325880"/>
-            <a:ext cx="3474720" cy="1207008"/>
+            <a:off x="7543800" y="1325880"/>
+            <a:ext cx="3611880" cy="1261872"/>
           </a:xfrm>
           <a:prstGeom prst="roundRect">
             <a:avLst>
-              <a:gd name="adj" fmla="val 9091"/>
+              <a:gd name="adj" fmla="val 8696"/>
             </a:avLst>
           </a:prstGeom>
           <a:solidFill>
@@ -9958,8 +9960,8 @@
         </p:nvSpPr>
         <p:spPr>
           <a:xfrm>
-            <a:off x="7799832" y="1472184"/>
-            <a:ext cx="3145536" cy="256032"/>
+            <a:off x="7708392" y="1453896"/>
+            <a:ext cx="3282696" cy="228600"/>
           </a:xfrm>
           <a:prstGeom prst="rect">
             <a:avLst/>
@@ -9975,7 +9977,7 @@
               <a:buNone/>
             </a:pPr>
             <a:r>
-              <a:rPr lang="en-US" sz="1300" b="1" dirty="0">
+              <a:rPr lang="en-US" sz="1220" b="1" dirty="0">
                 <a:solidFill>
                   <a:srgbClr val="0068B7"/>
                 </a:solidFill>
@@ -9985,7 +9987,7 @@
               </a:rPr>
               <a:t>Core concept</a:t>
             </a:r>
-            <a:endParaRPr lang="en-US" sz="1300" dirty="0"/>
+            <a:endParaRPr lang="en-US" sz="1220" dirty="0"/>
           </a:p>
         </p:txBody>
       </p:sp>
@@ -9997,8 +9999,8 @@
         </p:nvSpPr>
         <p:spPr>
           <a:xfrm>
-            <a:off x="7799832" y="1801368"/>
-            <a:ext cx="3145536" cy="640080"/>
+            <a:off x="7708392" y="1764792"/>
+            <a:ext cx="3282696" cy="749808"/>
           </a:xfrm>
           <a:prstGeom prst="rect">
             <a:avLst/>
@@ -10016,7 +10018,7 @@
               <a:buNone/>
             </a:pPr>
             <a:r>
-              <a:rPr lang="en-US" sz="1320" dirty="0">
+              <a:rPr lang="en-US" sz="1220" dirty="0">
                 <a:solidFill>
                   <a:srgbClr val="17364A"/>
                 </a:solidFill>
@@ -10026,7 +10028,7 @@
               </a:rPr>
               <a:t>Impact and unintended-consequence measurement plan</a:t>
             </a:r>
-            <a:endParaRPr lang="en-US" sz="1320" dirty="0"/>
+            <a:endParaRPr lang="en-US" sz="1220" dirty="0"/>
           </a:p>
         </p:txBody>
       </p:sp>
@@ -10038,12 +10040,12 @@
         </p:nvSpPr>
         <p:spPr>
           <a:xfrm>
-            <a:off x="7635240" y="2670048"/>
-            <a:ext cx="3474720" cy="1377086"/>
+            <a:off x="7543800" y="2724912"/>
+            <a:ext cx="3611880" cy="1527048"/>
           </a:xfrm>
           <a:prstGeom prst="roundRect">
             <a:avLst>
-              <a:gd name="adj" fmla="val 7968"/>
+              <a:gd name="adj" fmla="val 7186"/>
             </a:avLst>
           </a:prstGeom>
           <a:solidFill>
@@ -10065,8 +10067,8 @@
         </p:nvSpPr>
         <p:spPr>
           <a:xfrm>
-            <a:off x="7799832" y="2816352"/>
-            <a:ext cx="3145536" cy="256032"/>
+            <a:off x="7708392" y="2852928"/>
+            <a:ext cx="3282696" cy="228600"/>
           </a:xfrm>
           <a:prstGeom prst="rect">
             <a:avLst/>
@@ -10082,7 +10084,7 @@
               <a:buNone/>
             </a:pPr>
             <a:r>
-              <a:rPr lang="en-US" sz="1300" b="1" dirty="0">
+              <a:rPr lang="en-US" sz="1220" b="1" dirty="0">
                 <a:solidFill>
                   <a:srgbClr val="0068B7"/>
                 </a:solidFill>
@@ -10092,7 +10094,7 @@
               </a:rPr>
               <a:t>Concept checkpoints</a:t>
             </a:r>
-            <a:endParaRPr lang="en-US" sz="1300" dirty="0"/>
+            <a:endParaRPr lang="en-US" sz="1220" dirty="0"/>
           </a:p>
         </p:txBody>
       </p:sp>
@@ -10104,8 +10106,8 @@
         </p:nvSpPr>
         <p:spPr>
           <a:xfrm>
-            <a:off x="7818120" y="3182112"/>
-            <a:ext cx="3090672" cy="718718"/>
+            <a:off x="7726680" y="3182112"/>
+            <a:ext cx="3227832" cy="960120"/>
           </a:xfrm>
           <a:prstGeom prst="rect">
             <a:avLst/>
@@ -10123,7 +10125,7 @@
               <a:buNone/>
             </a:pPr>
             <a:r>
-              <a:rPr lang="en-US" sz="1220" dirty="0">
+              <a:rPr lang="en-US" sz="1140" dirty="0">
                 <a:solidFill>
                   <a:srgbClr val="17364A"/>
                 </a:solidFill>
@@ -10133,7 +10135,7 @@
               </a:rPr>
               <a:t>Impact and unintended-consequence measurement plan</a:t>
             </a:r>
-            <a:endParaRPr lang="en-US" sz="1220" dirty="0"/>
+            <a:endParaRPr lang="en-US" sz="1140" dirty="0"/>
           </a:p>
         </p:txBody>
       </p:sp>
@@ -10145,12 +10147,12 @@
         </p:nvSpPr>
         <p:spPr>
           <a:xfrm>
-            <a:off x="7635240" y="4184294"/>
-            <a:ext cx="3474720" cy="1466698"/>
+            <a:off x="7543800" y="4389120"/>
+            <a:ext cx="3611880" cy="1261872"/>
           </a:xfrm>
           <a:prstGeom prst="roundRect">
             <a:avLst>
-              <a:gd name="adj" fmla="val 7481"/>
+              <a:gd name="adj" fmla="val 8696"/>
             </a:avLst>
           </a:prstGeom>
           <a:solidFill>
@@ -10172,8 +10174,8 @@
         </p:nvSpPr>
         <p:spPr>
           <a:xfrm>
-            <a:off x="7799832" y="4330598"/>
-            <a:ext cx="3145536" cy="256032"/>
+            <a:off x="7708392" y="4517136"/>
+            <a:ext cx="3282696" cy="228600"/>
           </a:xfrm>
           <a:prstGeom prst="rect">
             <a:avLst/>
@@ -10189,7 +10191,7 @@
               <a:buNone/>
             </a:pPr>
             <a:r>
-              <a:rPr lang="en-US" sz="1300" b="1" dirty="0">
+              <a:rPr lang="en-US" sz="1220" b="1" dirty="0">
                 <a:solidFill>
                   <a:srgbClr val="0068B7"/>
                 </a:solidFill>
@@ -10199,7 +10201,7 @@
               </a:rPr>
               <a:t>Apply it</a:t>
             </a:r>
-            <a:endParaRPr lang="en-US" sz="1300" dirty="0"/>
+            <a:endParaRPr lang="en-US" sz="1220" dirty="0"/>
           </a:p>
         </p:txBody>
       </p:sp>
@@ -10211,8 +10213,8 @@
         </p:nvSpPr>
         <p:spPr>
           <a:xfrm>
-            <a:off x="7799832" y="4659782"/>
-            <a:ext cx="3145536" cy="899770"/>
+            <a:off x="7708392" y="4828032"/>
+            <a:ext cx="3282696" cy="749808"/>
           </a:xfrm>
           <a:prstGeom prst="rect">
             <a:avLst/>
@@ -10230,7 +10232,7 @@
               <a:buNone/>
             </a:pPr>
             <a:r>
-              <a:rPr lang="en-US" sz="1320" dirty="0">
+              <a:rPr lang="en-US" sz="1220" dirty="0">
                 <a:solidFill>
                   <a:srgbClr val="17364A"/>
                 </a:solidFill>
@@ -10238,9 +10240,9 @@
                 <a:ea typeface="Aptos" pitchFamily="34" charset="-122"/>
                 <a:cs typeface="Aptos" pitchFamily="34" charset="-120"/>
               </a:rPr>
-              <a:t>Connect the concept to public health purpose, responsible use, required safeguards, documentation, and the next action a department should take.</a:t>
-            </a:r>
-            <a:endParaRPr lang="en-US" sz="1320" dirty="0"/>
+              <a:t>Connect the concept to public health purpose, responsible use, required.</a:t>
+            </a:r>
+            <a:endParaRPr lang="en-US" sz="1220" dirty="0"/>
           </a:p>
         </p:txBody>
       </p:sp>
@@ -10558,7 +10560,7 @@
                 <a:ea typeface="Aptos" pitchFamily="34" charset="-122"/>
                 <a:cs typeface="Aptos" pitchFamily="34" charset="-120"/>
               </a:rPr>
-              <a:t>• AI for Social Good refers to the intentional use of artificial intelligence to improve public.</a:t>
+              <a:t>• AI for Social Good refers to the intentional use of artificial intelligence.</a:t>
             </a:r>
             <a:endParaRPr lang="en-US" sz="2100" dirty="0"/>
           </a:p>
@@ -10592,7 +10594,7 @@
                 <a:ea typeface="Aptos" pitchFamily="34" charset="-122"/>
                 <a:cs typeface="Aptos" pitchFamily="34" charset="-120"/>
               </a:rPr>
-              <a:t>• Public health agencies already work to prevent disease, protect communities, improve access,.</a:t>
+              <a:t>• Public health agencies already work to prevent disease, protect communities,.</a:t>
             </a:r>
             <a:endParaRPr lang="en-US" sz="2100" dirty="0"/>
           </a:p>
@@ -10633,8 +10635,8 @@
         </p:nvSpPr>
         <p:spPr>
           <a:xfrm>
-            <a:off x="8074152" y="1563624"/>
-            <a:ext cx="2825496" cy="256032"/>
+            <a:off x="8074152" y="1545336"/>
+            <a:ext cx="2825496" cy="228600"/>
           </a:xfrm>
           <a:prstGeom prst="rect">
             <a:avLst/>
@@ -10650,7 +10652,7 @@
               <a:buNone/>
             </a:pPr>
             <a:r>
-              <a:rPr lang="en-US" sz="1300" b="1" dirty="0">
+              <a:rPr lang="en-US" sz="1220" b="1" dirty="0">
                 <a:solidFill>
                   <a:srgbClr val="0068B7"/>
                 </a:solidFill>
@@ -10660,7 +10662,7 @@
               </a:rPr>
               <a:t>Module details</a:t>
             </a:r>
-            <a:endParaRPr lang="en-US" sz="1300" dirty="0"/>
+            <a:endParaRPr lang="en-US" sz="1220" dirty="0"/>
           </a:p>
         </p:txBody>
       </p:sp>
@@ -10672,8 +10674,8 @@
         </p:nvSpPr>
         <p:spPr>
           <a:xfrm>
-            <a:off x="8074152" y="1892808"/>
-            <a:ext cx="2825496" cy="1353312"/>
+            <a:off x="8074152" y="1856232"/>
+            <a:ext cx="2825496" cy="1408176"/>
           </a:xfrm>
           <a:prstGeom prst="rect">
             <a:avLst/>
@@ -10691,7 +10693,7 @@
               <a:buNone/>
             </a:pPr>
             <a:r>
-              <a:rPr lang="en-US" sz="1320" dirty="0">
+              <a:rPr lang="en-US" sz="1220" dirty="0">
                 <a:solidFill>
                   <a:srgbClr val="17364A"/>
                 </a:solidFill>
@@ -10699,9 +10701,9 @@
                 <a:ea typeface="Aptos" pitchFamily="34" charset="-122"/>
                 <a:cs typeface="Aptos" pitchFamily="34" charset="-120"/>
               </a:rPr>
-              <a:t>Level: introductory Primary track: Shared Foundational / Introductory Course Appears in tracks: shared-foundational, policy, communications</a:t>
-            </a:r>
-            <a:endParaRPr lang="en-US" sz="1320" dirty="0"/>
+              <a:t>Level: introductory Primary track: Shared Foundational / Introductory Course.</a:t>
+            </a:r>
+            <a:endParaRPr lang="en-US" sz="1220" dirty="0"/>
           </a:p>
         </p:txBody>
       </p:sp>
@@ -10740,8 +10742,8 @@
         </p:nvSpPr>
         <p:spPr>
           <a:xfrm>
-            <a:off x="8074152" y="3822192"/>
-            <a:ext cx="2825496" cy="256032"/>
+            <a:off x="8074152" y="3803904"/>
+            <a:ext cx="2825496" cy="228600"/>
           </a:xfrm>
           <a:prstGeom prst="rect">
             <a:avLst/>
@@ -10757,7 +10759,7 @@
               <a:buNone/>
             </a:pPr>
             <a:r>
-              <a:rPr lang="en-US" sz="1300" b="1" dirty="0">
+              <a:rPr lang="en-US" sz="1220" b="1" dirty="0">
                 <a:solidFill>
                   <a:srgbClr val="0068B7"/>
                 </a:solidFill>
@@ -10767,7 +10769,7 @@
               </a:rPr>
               <a:t>Learning sequence</a:t>
             </a:r>
-            <a:endParaRPr lang="en-US" sz="1300" dirty="0"/>
+            <a:endParaRPr lang="en-US" sz="1220" dirty="0"/>
           </a:p>
         </p:txBody>
       </p:sp>
@@ -10779,8 +10781,8 @@
         </p:nvSpPr>
         <p:spPr>
           <a:xfrm>
-            <a:off x="8092440" y="4187952"/>
-            <a:ext cx="2770632" cy="1033272"/>
+            <a:off x="8092440" y="4133088"/>
+            <a:ext cx="2770632" cy="1124712"/>
           </a:xfrm>
           <a:prstGeom prst="rect">
             <a:avLst/>
@@ -10798,7 +10800,7 @@
               <a:buNone/>
             </a:pPr>
             <a:r>
-              <a:rPr lang="en-US" sz="1220" dirty="0">
+              <a:rPr lang="en-US" sz="1140" dirty="0">
                 <a:solidFill>
                   <a:srgbClr val="17364A"/>
                 </a:solidFill>
@@ -10808,14 +10810,14 @@
               </a:rPr>
               <a:t>Read the module for shared vocabulary and context.</a:t>
             </a:r>
-            <a:endParaRPr lang="en-US" sz="1220" dirty="0"/>
-          </a:p>
-          <a:p>
-            <a:pPr indent="0" marL="0">
-              <a:buNone/>
-            </a:pPr>
-            <a:r>
-              <a:rPr lang="en-US" sz="1220" dirty="0">
+            <a:endParaRPr lang="en-US" sz="1140" dirty="0"/>
+          </a:p>
+          <a:p>
+            <a:pPr indent="0" marL="0">
+              <a:buNone/>
+            </a:pPr>
+            <a:r>
+              <a:rPr lang="en-US" sz="1140" dirty="0">
                 <a:solidFill>
                   <a:srgbClr val="17364A"/>
                 </a:solidFill>
@@ -10823,16 +10825,16 @@
                 <a:ea typeface="Aptos" pitchFamily="34" charset="-122"/>
                 <a:cs typeface="Aptos" pitchFamily="34" charset="-120"/>
               </a:rPr>
-              <a:t>Complete the practical exercise to apply the concept.</a:t>
-            </a:r>
-            <a:endParaRPr lang="en-US" sz="1220" dirty="0"/>
-          </a:p>
-          <a:p>
-            <a:pPr indent="0" marL="0">
-              <a:buNone/>
-            </a:pPr>
-            <a:r>
-              <a:rPr lang="en-US" sz="1220" dirty="0">
+              <a:t>Complete the practical exercise to apply the.</a:t>
+            </a:r>
+            <a:endParaRPr lang="en-US" sz="1140" dirty="0"/>
+          </a:p>
+          <a:p>
+            <a:pPr indent="0" marL="0">
+              <a:buNone/>
+            </a:pPr>
+            <a:r>
+              <a:rPr lang="en-US" sz="1140" dirty="0">
                 <a:solidFill>
                   <a:srgbClr val="17364A"/>
                 </a:solidFill>
@@ -10842,7 +10844,7 @@
               </a:rPr>
               <a:t>Use the notes and references for deeper review.</a:t>
             </a:r>
-            <a:endParaRPr lang="en-US" sz="1220" dirty="0"/>
+            <a:endParaRPr lang="en-US" sz="1140" dirty="0"/>
           </a:p>
         </p:txBody>
       </p:sp>
@@ -11133,8 +11135,8 @@
         </p:nvSpPr>
         <p:spPr>
           <a:xfrm>
-            <a:off x="868680" y="1508760"/>
-            <a:ext cx="6309360" cy="4160520"/>
+            <a:off x="822960" y="1463040"/>
+            <a:ext cx="6565392" cy="4343400"/>
           </a:xfrm>
           <a:prstGeom prst="rect">
             <a:avLst/>
@@ -11152,7 +11154,7 @@
               <a:buNone/>
             </a:pPr>
             <a:r>
-              <a:rPr lang="en-US" sz="2100" dirty="0">
+              <a:rPr lang="en-US" sz="1920" dirty="0">
                 <a:solidFill>
                   <a:srgbClr val="003A63"/>
                 </a:solidFill>
@@ -11162,14 +11164,14 @@
               </a:rPr>
               <a:t>• AI for Social Good review brief</a:t>
             </a:r>
-            <a:endParaRPr lang="en-US" sz="2100" dirty="0"/>
-          </a:p>
-          <a:p>
-            <a:pPr indent="0" marL="0">
-              <a:buNone/>
-            </a:pPr>
-            <a:r>
-              <a:rPr lang="en-US" sz="2100" dirty="0">
+            <a:endParaRPr lang="en-US" sz="1920" dirty="0"/>
+          </a:p>
+          <a:p>
+            <a:pPr indent="0" marL="0">
+              <a:buNone/>
+            </a:pPr>
+            <a:r>
+              <a:rPr lang="en-US" sz="1920" dirty="0">
                 <a:solidFill>
                   <a:srgbClr val="003A63"/>
                 </a:solidFill>
@@ -11179,14 +11181,14 @@
               </a:rPr>
               <a:t>• Public value and equity assessment</a:t>
             </a:r>
-            <a:endParaRPr lang="en-US" sz="2100" dirty="0"/>
-          </a:p>
-          <a:p>
-            <a:pPr indent="0" marL="0">
-              <a:buNone/>
-            </a:pPr>
-            <a:r>
-              <a:rPr lang="en-US" sz="2100" dirty="0">
+            <a:endParaRPr lang="en-US" sz="1920" dirty="0"/>
+          </a:p>
+          <a:p>
+            <a:pPr indent="0" marL="0">
+              <a:buNone/>
+            </a:pPr>
+            <a:r>
+              <a:rPr lang="en-US" sz="1920" dirty="0">
                 <a:solidFill>
                   <a:srgbClr val="003A63"/>
                 </a:solidFill>
@@ -11196,7 +11198,7 @@
               </a:rPr>
               <a:t>• Community engagement and accessibility plan</a:t>
             </a:r>
-            <a:endParaRPr lang="en-US" sz="2100" dirty="0"/>
+            <a:endParaRPr lang="en-US" sz="1920" dirty="0"/>
           </a:p>
         </p:txBody>
       </p:sp>
@@ -11208,12 +11210,12 @@
         </p:nvSpPr>
         <p:spPr>
           <a:xfrm>
-            <a:off x="7635240" y="1325880"/>
-            <a:ext cx="3474720" cy="1207008"/>
+            <a:off x="7543800" y="1325880"/>
+            <a:ext cx="3611880" cy="1261872"/>
           </a:xfrm>
           <a:prstGeom prst="roundRect">
             <a:avLst>
-              <a:gd name="adj" fmla="val 9091"/>
+              <a:gd name="adj" fmla="val 8696"/>
             </a:avLst>
           </a:prstGeom>
           <a:solidFill>
@@ -11235,8 +11237,8 @@
         </p:nvSpPr>
         <p:spPr>
           <a:xfrm>
-            <a:off x="7799832" y="1472184"/>
-            <a:ext cx="3145536" cy="256032"/>
+            <a:off x="7708392" y="1453896"/>
+            <a:ext cx="3282696" cy="228600"/>
           </a:xfrm>
           <a:prstGeom prst="rect">
             <a:avLst/>
@@ -11252,7 +11254,7 @@
               <a:buNone/>
             </a:pPr>
             <a:r>
-              <a:rPr lang="en-US" sz="1300" b="1" dirty="0">
+              <a:rPr lang="en-US" sz="1220" b="1" dirty="0">
                 <a:solidFill>
                   <a:srgbClr val="0068B7"/>
                 </a:solidFill>
@@ -11262,7 +11264,7 @@
               </a:rPr>
               <a:t>Practice focus</a:t>
             </a:r>
-            <a:endParaRPr lang="en-US" sz="1300" dirty="0"/>
+            <a:endParaRPr lang="en-US" sz="1220" dirty="0"/>
           </a:p>
         </p:txBody>
       </p:sp>
@@ -11274,8 +11276,8 @@
         </p:nvSpPr>
         <p:spPr>
           <a:xfrm>
-            <a:off x="7799832" y="1801368"/>
-            <a:ext cx="3145536" cy="640080"/>
+            <a:off x="7708392" y="1764792"/>
+            <a:ext cx="3282696" cy="749808"/>
           </a:xfrm>
           <a:prstGeom prst="rect">
             <a:avLst/>
@@ -11293,7 +11295,7 @@
               <a:buNone/>
             </a:pPr>
             <a:r>
-              <a:rPr lang="en-US" sz="1320" dirty="0">
+              <a:rPr lang="en-US" sz="1220" dirty="0">
                 <a:solidFill>
                   <a:srgbClr val="17364A"/>
                 </a:solidFill>
@@ -11303,7 +11305,7 @@
               </a:rPr>
               <a:t>AI for Social Good review brief</a:t>
             </a:r>
-            <a:endParaRPr lang="en-US" sz="1320" dirty="0"/>
+            <a:endParaRPr lang="en-US" sz="1220" dirty="0"/>
           </a:p>
         </p:txBody>
       </p:sp>
@@ -11315,12 +11317,12 @@
         </p:nvSpPr>
         <p:spPr>
           <a:xfrm>
-            <a:off x="7635240" y="2670048"/>
-            <a:ext cx="3474720" cy="1377086"/>
+            <a:off x="7543800" y="2724912"/>
+            <a:ext cx="3611880" cy="1527048"/>
           </a:xfrm>
           <a:prstGeom prst="roundRect">
             <a:avLst>
-              <a:gd name="adj" fmla="val 7968"/>
+              <a:gd name="adj" fmla="val 7186"/>
             </a:avLst>
           </a:prstGeom>
           <a:solidFill>
@@ -11342,8 +11344,8 @@
         </p:nvSpPr>
         <p:spPr>
           <a:xfrm>
-            <a:off x="7799832" y="2816352"/>
-            <a:ext cx="3145536" cy="256032"/>
+            <a:off x="7708392" y="2852928"/>
+            <a:ext cx="3282696" cy="228600"/>
           </a:xfrm>
           <a:prstGeom prst="rect">
             <a:avLst/>
@@ -11359,7 +11361,7 @@
               <a:buNone/>
             </a:pPr>
             <a:r>
-              <a:rPr lang="en-US" sz="1300" b="1" dirty="0">
+              <a:rPr lang="en-US" sz="1220" b="1" dirty="0">
                 <a:solidFill>
                   <a:srgbClr val="0068B7"/>
                 </a:solidFill>
@@ -11369,7 +11371,7 @@
               </a:rPr>
               <a:t>Concept checkpoints</a:t>
             </a:r>
-            <a:endParaRPr lang="en-US" sz="1300" dirty="0"/>
+            <a:endParaRPr lang="en-US" sz="1220" dirty="0"/>
           </a:p>
         </p:txBody>
       </p:sp>
@@ -11381,8 +11383,8 @@
         </p:nvSpPr>
         <p:spPr>
           <a:xfrm>
-            <a:off x="7818120" y="3182112"/>
-            <a:ext cx="3090672" cy="718718"/>
+            <a:off x="7726680" y="3182112"/>
+            <a:ext cx="3227832" cy="960120"/>
           </a:xfrm>
           <a:prstGeom prst="rect">
             <a:avLst/>
@@ -11400,7 +11402,7 @@
               <a:buNone/>
             </a:pPr>
             <a:r>
-              <a:rPr lang="en-US" sz="1220" dirty="0">
+              <a:rPr lang="en-US" sz="1140" dirty="0">
                 <a:solidFill>
                   <a:srgbClr val="17364A"/>
                 </a:solidFill>
@@ -11410,14 +11412,14 @@
               </a:rPr>
               <a:t>AI for Social Good review brief</a:t>
             </a:r>
-            <a:endParaRPr lang="en-US" sz="1220" dirty="0"/>
-          </a:p>
-          <a:p>
-            <a:pPr indent="0" marL="0">
-              <a:buNone/>
-            </a:pPr>
-            <a:r>
-              <a:rPr lang="en-US" sz="1220" dirty="0">
+            <a:endParaRPr lang="en-US" sz="1140" dirty="0"/>
+          </a:p>
+          <a:p>
+            <a:pPr indent="0" marL="0">
+              <a:buNone/>
+            </a:pPr>
+            <a:r>
+              <a:rPr lang="en-US" sz="1140" dirty="0">
                 <a:solidFill>
                   <a:srgbClr val="17364A"/>
                 </a:solidFill>
@@ -11427,14 +11429,14 @@
               </a:rPr>
               <a:t>Public value and equity assessment</a:t>
             </a:r>
-            <a:endParaRPr lang="en-US" sz="1220" dirty="0"/>
-          </a:p>
-          <a:p>
-            <a:pPr indent="0" marL="0">
-              <a:buNone/>
-            </a:pPr>
-            <a:r>
-              <a:rPr lang="en-US" sz="1220" dirty="0">
+            <a:endParaRPr lang="en-US" sz="1140" dirty="0"/>
+          </a:p>
+          <a:p>
+            <a:pPr indent="0" marL="0">
+              <a:buNone/>
+            </a:pPr>
+            <a:r>
+              <a:rPr lang="en-US" sz="1140" dirty="0">
                 <a:solidFill>
                   <a:srgbClr val="17364A"/>
                 </a:solidFill>
@@ -11444,7 +11446,7 @@
               </a:rPr>
               <a:t>Community engagement and accessibility plan</a:t>
             </a:r>
-            <a:endParaRPr lang="en-US" sz="1220" dirty="0"/>
+            <a:endParaRPr lang="en-US" sz="1140" dirty="0"/>
           </a:p>
         </p:txBody>
       </p:sp>
@@ -11456,12 +11458,12 @@
         </p:nvSpPr>
         <p:spPr>
           <a:xfrm>
-            <a:off x="7635240" y="4184294"/>
-            <a:ext cx="3474720" cy="1466698"/>
+            <a:off x="7543800" y="4389120"/>
+            <a:ext cx="3611880" cy="1261872"/>
           </a:xfrm>
           <a:prstGeom prst="roundRect">
             <a:avLst>
-              <a:gd name="adj" fmla="val 7481"/>
+              <a:gd name="adj" fmla="val 8696"/>
             </a:avLst>
           </a:prstGeom>
           <a:solidFill>
@@ -11483,8 +11485,8 @@
         </p:nvSpPr>
         <p:spPr>
           <a:xfrm>
-            <a:off x="7799832" y="4330598"/>
-            <a:ext cx="3145536" cy="256032"/>
+            <a:off x="7708392" y="4517136"/>
+            <a:ext cx="3282696" cy="228600"/>
           </a:xfrm>
           <a:prstGeom prst="rect">
             <a:avLst/>
@@ -11500,7 +11502,7 @@
               <a:buNone/>
             </a:pPr>
             <a:r>
-              <a:rPr lang="en-US" sz="1300" b="1" dirty="0">
+              <a:rPr lang="en-US" sz="1220" b="1" dirty="0">
                 <a:solidFill>
                   <a:srgbClr val="0068B7"/>
                 </a:solidFill>
@@ -11510,7 +11512,7 @@
               </a:rPr>
               <a:t>What to produce</a:t>
             </a:r>
-            <a:endParaRPr lang="en-US" sz="1300" dirty="0"/>
+            <a:endParaRPr lang="en-US" sz="1220" dirty="0"/>
           </a:p>
         </p:txBody>
       </p:sp>
@@ -11522,8 +11524,8 @@
         </p:nvSpPr>
         <p:spPr>
           <a:xfrm>
-            <a:off x="7799832" y="4659782"/>
-            <a:ext cx="3145536" cy="899770"/>
+            <a:off x="7708392" y="4828032"/>
+            <a:ext cx="3282696" cy="749808"/>
           </a:xfrm>
           <a:prstGeom prst="rect">
             <a:avLst/>
@@ -11541,7 +11543,7 @@
               <a:buNone/>
             </a:pPr>
             <a:r>
-              <a:rPr lang="en-US" sz="1320" dirty="0">
+              <a:rPr lang="en-US" sz="1220" dirty="0">
                 <a:solidFill>
                   <a:srgbClr val="17364A"/>
                 </a:solidFill>
@@ -11549,9 +11551,9 @@
                 <a:ea typeface="Aptos" pitchFamily="34" charset="-122"/>
                 <a:cs typeface="Aptos" pitchFamily="34" charset="-120"/>
               </a:rPr>
-              <a:t>Use the assignment to test whether you can explain the concept, apply it to a realistic public health situation, and identify what would need review before the work moves forward.</a:t>
-            </a:r>
-            <a:endParaRPr lang="en-US" sz="1320" dirty="0"/>
+              <a:t>Use the assignment to test whether you can explain the concept, apply it to a.</a:t>
+            </a:r>
+            <a:endParaRPr lang="en-US" sz="1220" dirty="0"/>
           </a:p>
         </p:txBody>
       </p:sp>
@@ -11842,8 +11844,8 @@
         </p:nvSpPr>
         <p:spPr>
           <a:xfrm>
-            <a:off x="868680" y="1508760"/>
-            <a:ext cx="6309360" cy="4160520"/>
+            <a:off x="822960" y="1463040"/>
+            <a:ext cx="6565392" cy="4343400"/>
           </a:xfrm>
           <a:prstGeom prst="rect">
             <a:avLst/>
@@ -11861,7 +11863,7 @@
               <a:buNone/>
             </a:pPr>
             <a:r>
-              <a:rPr lang="en-US" sz="2100" dirty="0">
+              <a:rPr lang="en-US" sz="1920" dirty="0">
                 <a:solidFill>
                   <a:srgbClr val="003A63"/>
                 </a:solidFill>
@@ -11871,14 +11873,14 @@
               </a:rPr>
               <a:t>• 1. What is the best definition of AI for Social Good in public health?</a:t>
             </a:r>
-            <a:endParaRPr lang="en-US" sz="2100" dirty="0"/>
-          </a:p>
-          <a:p>
-            <a:pPr indent="0" marL="0">
-              <a:buNone/>
-            </a:pPr>
-            <a:r>
-              <a:rPr lang="en-US" sz="2100" dirty="0">
+            <a:endParaRPr lang="en-US" sz="1920" dirty="0"/>
+          </a:p>
+          <a:p>
+            <a:pPr indent="0" marL="0">
+              <a:buNone/>
+            </a:pPr>
+            <a:r>
+              <a:rPr lang="en-US" sz="1920" dirty="0">
                 <a:solidFill>
                   <a:srgbClr val="003A63"/>
                 </a:solidFill>
@@ -11888,14 +11890,14 @@
               </a:rPr>
               <a:t>• 2. Why is efficiency alone not enough to show social good?</a:t>
             </a:r>
-            <a:endParaRPr lang="en-US" sz="2100" dirty="0"/>
-          </a:p>
-          <a:p>
-            <a:pPr indent="0" marL="0">
-              <a:buNone/>
-            </a:pPr>
-            <a:r>
-              <a:rPr lang="en-US" sz="2100" dirty="0">
+            <a:endParaRPr lang="en-US" sz="1920" dirty="0"/>
+          </a:p>
+          <a:p>
+            <a:pPr indent="0" marL="0">
+              <a:buNone/>
+            </a:pPr>
+            <a:r>
+              <a:rPr lang="en-US" sz="1920" dirty="0">
                 <a:solidFill>
                   <a:srgbClr val="003A63"/>
                 </a:solidFill>
@@ -11905,7 +11907,7 @@
               </a:rPr>
               <a:t>• 3. What does equity by design require?</a:t>
             </a:r>
-            <a:endParaRPr lang="en-US" sz="2100" dirty="0"/>
+            <a:endParaRPr lang="en-US" sz="1920" dirty="0"/>
           </a:p>
         </p:txBody>
       </p:sp>
@@ -11917,12 +11919,12 @@
         </p:nvSpPr>
         <p:spPr>
           <a:xfrm>
-            <a:off x="7635240" y="1325880"/>
-            <a:ext cx="3474720" cy="1207008"/>
+            <a:off x="7543800" y="1325880"/>
+            <a:ext cx="3611880" cy="1261872"/>
           </a:xfrm>
           <a:prstGeom prst="roundRect">
             <a:avLst>
-              <a:gd name="adj" fmla="val 9091"/>
+              <a:gd name="adj" fmla="val 8696"/>
             </a:avLst>
           </a:prstGeom>
           <a:solidFill>
@@ -11944,8 +11946,8 @@
         </p:nvSpPr>
         <p:spPr>
           <a:xfrm>
-            <a:off x="7799832" y="1472184"/>
-            <a:ext cx="3145536" cy="256032"/>
+            <a:off x="7708392" y="1453896"/>
+            <a:ext cx="3282696" cy="228600"/>
           </a:xfrm>
           <a:prstGeom prst="rect">
             <a:avLst/>
@@ -11961,7 +11963,7 @@
               <a:buNone/>
             </a:pPr>
             <a:r>
-              <a:rPr lang="en-US" sz="1300" b="1" dirty="0">
+              <a:rPr lang="en-US" sz="1220" b="1" dirty="0">
                 <a:solidFill>
                   <a:srgbClr val="0068B7"/>
                 </a:solidFill>
@@ -11971,7 +11973,7 @@
               </a:rPr>
               <a:t>Practice focus</a:t>
             </a:r>
-            <a:endParaRPr lang="en-US" sz="1300" dirty="0"/>
+            <a:endParaRPr lang="en-US" sz="1220" dirty="0"/>
           </a:p>
         </p:txBody>
       </p:sp>
@@ -11983,8 +11985,8 @@
         </p:nvSpPr>
         <p:spPr>
           <a:xfrm>
-            <a:off x="7799832" y="1801368"/>
-            <a:ext cx="3145536" cy="640080"/>
+            <a:off x="7708392" y="1764792"/>
+            <a:ext cx="3282696" cy="749808"/>
           </a:xfrm>
           <a:prstGeom prst="rect">
             <a:avLst/>
@@ -12002,7 +12004,7 @@
               <a:buNone/>
             </a:pPr>
             <a:r>
-              <a:rPr lang="en-US" sz="1320" dirty="0">
+              <a:rPr lang="en-US" sz="1220" dirty="0">
                 <a:solidFill>
                   <a:srgbClr val="17364A"/>
                 </a:solidFill>
@@ -12012,7 +12014,7 @@
               </a:rPr>
               <a:t>1. What is the best definition of AI for Social Good in public health?</a:t>
             </a:r>
-            <a:endParaRPr lang="en-US" sz="1320" dirty="0"/>
+            <a:endParaRPr lang="en-US" sz="1220" dirty="0"/>
           </a:p>
         </p:txBody>
       </p:sp>
@@ -12024,12 +12026,12 @@
         </p:nvSpPr>
         <p:spPr>
           <a:xfrm>
-            <a:off x="7635240" y="2670048"/>
-            <a:ext cx="3474720" cy="1377086"/>
+            <a:off x="7543800" y="2724912"/>
+            <a:ext cx="3611880" cy="1527048"/>
           </a:xfrm>
           <a:prstGeom prst="roundRect">
             <a:avLst>
-              <a:gd name="adj" fmla="val 7968"/>
+              <a:gd name="adj" fmla="val 7186"/>
             </a:avLst>
           </a:prstGeom>
           <a:solidFill>
@@ -12051,8 +12053,8 @@
         </p:nvSpPr>
         <p:spPr>
           <a:xfrm>
-            <a:off x="7799832" y="2816352"/>
-            <a:ext cx="3145536" cy="256032"/>
+            <a:off x="7708392" y="2852928"/>
+            <a:ext cx="3282696" cy="228600"/>
           </a:xfrm>
           <a:prstGeom prst="rect">
             <a:avLst/>
@@ -12068,7 +12070,7 @@
               <a:buNone/>
             </a:pPr>
             <a:r>
-              <a:rPr lang="en-US" sz="1300" b="1" dirty="0">
+              <a:rPr lang="en-US" sz="1220" b="1" dirty="0">
                 <a:solidFill>
                   <a:srgbClr val="0068B7"/>
                 </a:solidFill>
@@ -12078,7 +12080,7 @@
               </a:rPr>
               <a:t>Concept checkpoints</a:t>
             </a:r>
-            <a:endParaRPr lang="en-US" sz="1300" dirty="0"/>
+            <a:endParaRPr lang="en-US" sz="1220" dirty="0"/>
           </a:p>
         </p:txBody>
       </p:sp>
@@ -12090,8 +12092,8 @@
         </p:nvSpPr>
         <p:spPr>
           <a:xfrm>
-            <a:off x="7818120" y="3182112"/>
-            <a:ext cx="3090672" cy="718718"/>
+            <a:off x="7726680" y="3182112"/>
+            <a:ext cx="3227832" cy="960120"/>
           </a:xfrm>
           <a:prstGeom prst="rect">
             <a:avLst/>
@@ -12109,7 +12111,7 @@
               <a:buNone/>
             </a:pPr>
             <a:r>
-              <a:rPr lang="en-US" sz="1220" dirty="0">
+              <a:rPr lang="en-US" sz="1140" dirty="0">
                 <a:solidFill>
                   <a:srgbClr val="17364A"/>
                 </a:solidFill>
@@ -12119,14 +12121,14 @@
               </a:rPr>
               <a:t>1.</a:t>
             </a:r>
-            <a:endParaRPr lang="en-US" sz="1220" dirty="0"/>
-          </a:p>
-          <a:p>
-            <a:pPr indent="0" marL="0">
-              <a:buNone/>
-            </a:pPr>
-            <a:r>
-              <a:rPr lang="en-US" sz="1220" dirty="0">
+            <a:endParaRPr lang="en-US" sz="1140" dirty="0"/>
+          </a:p>
+          <a:p>
+            <a:pPr indent="0" marL="0">
+              <a:buNone/>
+            </a:pPr>
+            <a:r>
+              <a:rPr lang="en-US" sz="1140" dirty="0">
                 <a:solidFill>
                   <a:srgbClr val="17364A"/>
                 </a:solidFill>
@@ -12134,16 +12136,16 @@
                 <a:ea typeface="Aptos" pitchFamily="34" charset="-122"/>
                 <a:cs typeface="Aptos" pitchFamily="34" charset="-120"/>
               </a:rPr>
-              <a:t>What is the best definition of AI for Social Good in public health?</a:t>
-            </a:r>
-            <a:endParaRPr lang="en-US" sz="1220" dirty="0"/>
-          </a:p>
-          <a:p>
-            <a:pPr indent="0" marL="0">
-              <a:buNone/>
-            </a:pPr>
-            <a:r>
-              <a:rPr lang="en-US" sz="1220" dirty="0">
+              <a:t>What is the best definition of AI for Social Good.</a:t>
+            </a:r>
+            <a:endParaRPr lang="en-US" sz="1140" dirty="0"/>
+          </a:p>
+          <a:p>
+            <a:pPr indent="0" marL="0">
+              <a:buNone/>
+            </a:pPr>
+            <a:r>
+              <a:rPr lang="en-US" sz="1140" dirty="0">
                 <a:solidFill>
                   <a:srgbClr val="17364A"/>
                 </a:solidFill>
@@ -12153,7 +12155,7 @@
               </a:rPr>
               <a:t>2.</a:t>
             </a:r>
-            <a:endParaRPr lang="en-US" sz="1220" dirty="0"/>
+            <a:endParaRPr lang="en-US" sz="1140" dirty="0"/>
           </a:p>
         </p:txBody>
       </p:sp>
@@ -12165,12 +12167,12 @@
         </p:nvSpPr>
         <p:spPr>
           <a:xfrm>
-            <a:off x="7635240" y="4184294"/>
-            <a:ext cx="3474720" cy="1466698"/>
+            <a:off x="7543800" y="4389120"/>
+            <a:ext cx="3611880" cy="1261872"/>
           </a:xfrm>
           <a:prstGeom prst="roundRect">
             <a:avLst>
-              <a:gd name="adj" fmla="val 7481"/>
+              <a:gd name="adj" fmla="val 8696"/>
             </a:avLst>
           </a:prstGeom>
           <a:solidFill>
@@ -12192,8 +12194,8 @@
         </p:nvSpPr>
         <p:spPr>
           <a:xfrm>
-            <a:off x="7799832" y="4330598"/>
-            <a:ext cx="3145536" cy="256032"/>
+            <a:off x="7708392" y="4517136"/>
+            <a:ext cx="3282696" cy="228600"/>
           </a:xfrm>
           <a:prstGeom prst="rect">
             <a:avLst/>
@@ -12209,7 +12211,7 @@
               <a:buNone/>
             </a:pPr>
             <a:r>
-              <a:rPr lang="en-US" sz="1300" b="1" dirty="0">
+              <a:rPr lang="en-US" sz="1220" b="1" dirty="0">
                 <a:solidFill>
                   <a:srgbClr val="0068B7"/>
                 </a:solidFill>
@@ -12219,7 +12221,7 @@
               </a:rPr>
               <a:t>What to produce</a:t>
             </a:r>
-            <a:endParaRPr lang="en-US" sz="1300" dirty="0"/>
+            <a:endParaRPr lang="en-US" sz="1220" dirty="0"/>
           </a:p>
         </p:txBody>
       </p:sp>
@@ -12231,8 +12233,8 @@
         </p:nvSpPr>
         <p:spPr>
           <a:xfrm>
-            <a:off x="7799832" y="4659782"/>
-            <a:ext cx="3145536" cy="899770"/>
+            <a:off x="7708392" y="4828032"/>
+            <a:ext cx="3282696" cy="749808"/>
           </a:xfrm>
           <a:prstGeom prst="rect">
             <a:avLst/>
@@ -12250,7 +12252,7 @@
               <a:buNone/>
             </a:pPr>
             <a:r>
-              <a:rPr lang="en-US" sz="1320" dirty="0">
+              <a:rPr lang="en-US" sz="1220" dirty="0">
                 <a:solidFill>
                   <a:srgbClr val="17364A"/>
                 </a:solidFill>
@@ -12258,9 +12260,9 @@
                 <a:ea typeface="Aptos" pitchFamily="34" charset="-122"/>
                 <a:cs typeface="Aptos" pitchFamily="34" charset="-120"/>
               </a:rPr>
-              <a:t>Use the assignment to test whether you can explain the concept, apply it to a realistic public health situation, and identify what would need review before the work moves forward.</a:t>
-            </a:r>
-            <a:endParaRPr lang="en-US" sz="1320" dirty="0"/>
+              <a:t>Use the assignment to test whether you can explain the concept, apply it to a.</a:t>
+            </a:r>
+            <a:endParaRPr lang="en-US" sz="1220" dirty="0"/>
           </a:p>
         </p:txBody>
       </p:sp>
@@ -12551,8 +12553,8 @@
         </p:nvSpPr>
         <p:spPr>
           <a:xfrm>
-            <a:off x="868680" y="1508760"/>
-            <a:ext cx="6309360" cy="4160520"/>
+            <a:off x="822960" y="1463040"/>
+            <a:ext cx="6565392" cy="4343400"/>
           </a:xfrm>
           <a:prstGeom prst="rect">
             <a:avLst/>
@@ -12570,7 +12572,7 @@
               <a:buNone/>
             </a:pPr>
             <a:r>
-              <a:rPr lang="en-US" sz="2100" dirty="0">
+              <a:rPr lang="en-US" sz="1920" dirty="0">
                 <a:solidFill>
                   <a:srgbClr val="003A63"/>
                 </a:solidFill>
@@ -12580,14 +12582,14 @@
               </a:rPr>
               <a:t>• WHO Ethics and Governance of Artificial Intelligence for Health:.</a:t>
             </a:r>
-            <a:endParaRPr lang="en-US" sz="2100" dirty="0"/>
-          </a:p>
-          <a:p>
-            <a:pPr indent="0" marL="0">
-              <a:buNone/>
-            </a:pPr>
-            <a:r>
-              <a:rPr lang="en-US" sz="2100" dirty="0">
+            <a:endParaRPr lang="en-US" sz="1920" dirty="0"/>
+          </a:p>
+          <a:p>
+            <a:pPr indent="0" marL="0">
+              <a:buNone/>
+            </a:pPr>
+            <a:r>
+              <a:rPr lang="en-US" sz="1920" dirty="0">
                 <a:solidFill>
                   <a:srgbClr val="003A63"/>
                 </a:solidFill>
@@ -12595,16 +12597,16 @@
                 <a:ea typeface="Aptos" pitchFamily="34" charset="-122"/>
                 <a:cs typeface="Aptos" pitchFamily="34" charset="-120"/>
               </a:rPr>
-              <a:t>• WHO Guidance on Large Multi-Modal Models: https://www.who.int/publications/i/item/9789240084759</a:t>
-            </a:r>
-            <a:endParaRPr lang="en-US" sz="2100" dirty="0"/>
-          </a:p>
-          <a:p>
-            <a:pPr indent="0" marL="0">
-              <a:buNone/>
-            </a:pPr>
-            <a:r>
-              <a:rPr lang="en-US" sz="2100" dirty="0">
+              <a:t>• WHO Guidance on Large Multi-Modal Models:.</a:t>
+            </a:r>
+            <a:endParaRPr lang="en-US" sz="1920" dirty="0"/>
+          </a:p>
+          <a:p>
+            <a:pPr indent="0" marL="0">
+              <a:buNone/>
+            </a:pPr>
+            <a:r>
+              <a:rPr lang="en-US" sz="1920" dirty="0">
                 <a:solidFill>
                   <a:srgbClr val="003A63"/>
                 </a:solidFill>
@@ -12614,7 +12616,7 @@
               </a:rPr>
               <a:t>• NIST Artificial Intelligence Risk Management Framework:.</a:t>
             </a:r>
-            <a:endParaRPr lang="en-US" sz="2100" dirty="0"/>
+            <a:endParaRPr lang="en-US" sz="1920" dirty="0"/>
           </a:p>
         </p:txBody>
       </p:sp>
@@ -12626,12 +12628,12 @@
         </p:nvSpPr>
         <p:spPr>
           <a:xfrm>
-            <a:off x="7635240" y="1325880"/>
-            <a:ext cx="3474720" cy="1207008"/>
+            <a:off x="7543800" y="1325880"/>
+            <a:ext cx="3611880" cy="1261872"/>
           </a:xfrm>
           <a:prstGeom prst="roundRect">
             <a:avLst>
-              <a:gd name="adj" fmla="val 9091"/>
+              <a:gd name="adj" fmla="val 8696"/>
             </a:avLst>
           </a:prstGeom>
           <a:solidFill>
@@ -12653,8 +12655,8 @@
         </p:nvSpPr>
         <p:spPr>
           <a:xfrm>
-            <a:off x="7799832" y="1472184"/>
-            <a:ext cx="3145536" cy="256032"/>
+            <a:off x="7708392" y="1453896"/>
+            <a:ext cx="3282696" cy="228600"/>
           </a:xfrm>
           <a:prstGeom prst="rect">
             <a:avLst/>
@@ -12670,7 +12672,7 @@
               <a:buNone/>
             </a:pPr>
             <a:r>
-              <a:rPr lang="en-US" sz="1300" b="1" dirty="0">
+              <a:rPr lang="en-US" sz="1220" b="1" dirty="0">
                 <a:solidFill>
                   <a:srgbClr val="0068B7"/>
                 </a:solidFill>
@@ -12680,7 +12682,7 @@
               </a:rPr>
               <a:t>Core concept</a:t>
             </a:r>
-            <a:endParaRPr lang="en-US" sz="1300" dirty="0"/>
+            <a:endParaRPr lang="en-US" sz="1220" dirty="0"/>
           </a:p>
         </p:txBody>
       </p:sp>
@@ -12692,8 +12694,8 @@
         </p:nvSpPr>
         <p:spPr>
           <a:xfrm>
-            <a:off x="7799832" y="1801368"/>
-            <a:ext cx="3145536" cy="640080"/>
+            <a:off x="7708392" y="1764792"/>
+            <a:ext cx="3282696" cy="749808"/>
           </a:xfrm>
           <a:prstGeom prst="rect">
             <a:avLst/>
@@ -12711,7 +12713,7 @@
               <a:buNone/>
             </a:pPr>
             <a:r>
-              <a:rPr lang="en-US" sz="1320" dirty="0">
+              <a:rPr lang="en-US" sz="1220" dirty="0">
                 <a:solidFill>
                   <a:srgbClr val="17364A"/>
                 </a:solidFill>
@@ -12721,7 +12723,7 @@
               </a:rPr>
               <a:t>WHO Ethics and Governance of Artificial Intelligence for Health:.</a:t>
             </a:r>
-            <a:endParaRPr lang="en-US" sz="1320" dirty="0"/>
+            <a:endParaRPr lang="en-US" sz="1220" dirty="0"/>
           </a:p>
         </p:txBody>
       </p:sp>
@@ -12733,12 +12735,12 @@
         </p:nvSpPr>
         <p:spPr>
           <a:xfrm>
-            <a:off x="7635240" y="2670048"/>
-            <a:ext cx="3474720" cy="1377086"/>
+            <a:off x="7543800" y="2724912"/>
+            <a:ext cx="3611880" cy="1527048"/>
           </a:xfrm>
           <a:prstGeom prst="roundRect">
             <a:avLst>
-              <a:gd name="adj" fmla="val 7968"/>
+              <a:gd name="adj" fmla="val 7186"/>
             </a:avLst>
           </a:prstGeom>
           <a:solidFill>
@@ -12760,8 +12762,8 @@
         </p:nvSpPr>
         <p:spPr>
           <a:xfrm>
-            <a:off x="7799832" y="2816352"/>
-            <a:ext cx="3145536" cy="256032"/>
+            <a:off x="7708392" y="2852928"/>
+            <a:ext cx="3282696" cy="228600"/>
           </a:xfrm>
           <a:prstGeom prst="rect">
             <a:avLst/>
@@ -12777,7 +12779,7 @@
               <a:buNone/>
             </a:pPr>
             <a:r>
-              <a:rPr lang="en-US" sz="1300" b="1" dirty="0">
+              <a:rPr lang="en-US" sz="1220" b="1" dirty="0">
                 <a:solidFill>
                   <a:srgbClr val="0068B7"/>
                 </a:solidFill>
@@ -12787,7 +12789,7 @@
               </a:rPr>
               <a:t>Concept checkpoints</a:t>
             </a:r>
-            <a:endParaRPr lang="en-US" sz="1300" dirty="0"/>
+            <a:endParaRPr lang="en-US" sz="1220" dirty="0"/>
           </a:p>
         </p:txBody>
       </p:sp>
@@ -12799,8 +12801,8 @@
         </p:nvSpPr>
         <p:spPr>
           <a:xfrm>
-            <a:off x="7818120" y="3182112"/>
-            <a:ext cx="3090672" cy="718718"/>
+            <a:off x="7726680" y="3182112"/>
+            <a:ext cx="3227832" cy="960120"/>
           </a:xfrm>
           <a:prstGeom prst="rect">
             <a:avLst/>
@@ -12818,7 +12820,7 @@
               <a:buNone/>
             </a:pPr>
             <a:r>
-              <a:rPr lang="en-US" sz="1220" dirty="0">
+              <a:rPr lang="en-US" sz="1140" dirty="0">
                 <a:solidFill>
                   <a:srgbClr val="17364A"/>
                 </a:solidFill>
@@ -12826,16 +12828,16 @@
                 <a:ea typeface="Aptos" pitchFamily="34" charset="-122"/>
                 <a:cs typeface="Aptos" pitchFamily="34" charset="-120"/>
               </a:rPr>
-              <a:t>WHO Ethics and Governance of Artificial Intelligence for Health:.</a:t>
-            </a:r>
-            <a:endParaRPr lang="en-US" sz="1220" dirty="0"/>
-          </a:p>
-          <a:p>
-            <a:pPr indent="0" marL="0">
-              <a:buNone/>
-            </a:pPr>
-            <a:r>
-              <a:rPr lang="en-US" sz="1220" dirty="0">
+              <a:t>WHO Ethics and Governance of Artificial.</a:t>
+            </a:r>
+            <a:endParaRPr lang="en-US" sz="1140" dirty="0"/>
+          </a:p>
+          <a:p>
+            <a:pPr indent="0" marL="0">
+              <a:buNone/>
+            </a:pPr>
+            <a:r>
+              <a:rPr lang="en-US" sz="1140" dirty="0">
                 <a:solidFill>
                   <a:srgbClr val="17364A"/>
                 </a:solidFill>
@@ -12843,16 +12845,16 @@
                 <a:ea typeface="Aptos" pitchFamily="34" charset="-122"/>
                 <a:cs typeface="Aptos" pitchFamily="34" charset="-120"/>
               </a:rPr>
-              <a:t>NIST Artificial Intelligence Risk Management Framework:.</a:t>
-            </a:r>
-            <a:endParaRPr lang="en-US" sz="1220" dirty="0"/>
-          </a:p>
-          <a:p>
-            <a:pPr indent="0" marL="0">
-              <a:buNone/>
-            </a:pPr>
-            <a:r>
-              <a:rPr lang="en-US" sz="1220" dirty="0">
+              <a:t>NIST Artificial Intelligence Risk Management.</a:t>
+            </a:r>
+            <a:endParaRPr lang="en-US" sz="1140" dirty="0"/>
+          </a:p>
+          <a:p>
+            <a:pPr indent="0" marL="0">
+              <a:buNone/>
+            </a:pPr>
+            <a:r>
+              <a:rPr lang="en-US" sz="1140" dirty="0">
                 <a:solidFill>
                   <a:srgbClr val="17364A"/>
                 </a:solidFill>
@@ -12862,7 +12864,7 @@
               </a:rPr>
               <a:t>CDC Public Health Data Strategy:.</a:t>
             </a:r>
-            <a:endParaRPr lang="en-US" sz="1220" dirty="0"/>
+            <a:endParaRPr lang="en-US" sz="1140" dirty="0"/>
           </a:p>
         </p:txBody>
       </p:sp>
@@ -12874,12 +12876,12 @@
         </p:nvSpPr>
         <p:spPr>
           <a:xfrm>
-            <a:off x="7635240" y="4184294"/>
-            <a:ext cx="3474720" cy="1466698"/>
+            <a:off x="7543800" y="4389120"/>
+            <a:ext cx="3611880" cy="1261872"/>
           </a:xfrm>
           <a:prstGeom prst="roundRect">
             <a:avLst>
-              <a:gd name="adj" fmla="val 7481"/>
+              <a:gd name="adj" fmla="val 8696"/>
             </a:avLst>
           </a:prstGeom>
           <a:solidFill>
@@ -12901,8 +12903,8 @@
         </p:nvSpPr>
         <p:spPr>
           <a:xfrm>
-            <a:off x="7799832" y="4330598"/>
-            <a:ext cx="3145536" cy="256032"/>
+            <a:off x="7708392" y="4517136"/>
+            <a:ext cx="3282696" cy="228600"/>
           </a:xfrm>
           <a:prstGeom prst="rect">
             <a:avLst/>
@@ -12918,7 +12920,7 @@
               <a:buNone/>
             </a:pPr>
             <a:r>
-              <a:rPr lang="en-US" sz="1300" b="1" dirty="0">
+              <a:rPr lang="en-US" sz="1220" b="1" dirty="0">
                 <a:solidFill>
                   <a:srgbClr val="0068B7"/>
                 </a:solidFill>
@@ -12928,7 +12930,7 @@
               </a:rPr>
               <a:t>Apply it</a:t>
             </a:r>
-            <a:endParaRPr lang="en-US" sz="1300" dirty="0"/>
+            <a:endParaRPr lang="en-US" sz="1220" dirty="0"/>
           </a:p>
         </p:txBody>
       </p:sp>
@@ -12940,8 +12942,8 @@
         </p:nvSpPr>
         <p:spPr>
           <a:xfrm>
-            <a:off x="7799832" y="4659782"/>
-            <a:ext cx="3145536" cy="899770"/>
+            <a:off x="7708392" y="4828032"/>
+            <a:ext cx="3282696" cy="749808"/>
           </a:xfrm>
           <a:prstGeom prst="rect">
             <a:avLst/>
@@ -12959,7 +12961,7 @@
               <a:buNone/>
             </a:pPr>
             <a:r>
-              <a:rPr lang="en-US" sz="1320" dirty="0">
+              <a:rPr lang="en-US" sz="1220" dirty="0">
                 <a:solidFill>
                   <a:srgbClr val="17364A"/>
                 </a:solidFill>
@@ -12967,9 +12969,9 @@
                 <a:ea typeface="Aptos" pitchFamily="34" charset="-122"/>
                 <a:cs typeface="Aptos" pitchFamily="34" charset="-120"/>
               </a:rPr>
-              <a:t>Connect the concept to public health purpose, responsible use, required safeguards, documentation, and the next action a department should take.</a:t>
-            </a:r>
-            <a:endParaRPr lang="en-US" sz="1320" dirty="0"/>
+              <a:t>Connect the concept to public health purpose, responsible use, required.</a:t>
+            </a:r>
+            <a:endParaRPr lang="en-US" sz="1220" dirty="0"/>
           </a:p>
         </p:txBody>
       </p:sp>
@@ -13287,7 +13289,7 @@
                 <a:ea typeface="Aptos" pitchFamily="34" charset="-122"/>
                 <a:cs typeface="Aptos" pitchFamily="34" charset="-120"/>
               </a:rPr>
-              <a:t>• Play 4: Engage Stakeholders - This lesson informs Play 4 by helping learners connect the.</a:t>
+              <a:t>• Play 4: Engage Stakeholders - This lesson informs Play 4 by helping learners.</a:t>
             </a:r>
             <a:endParaRPr lang="en-US" sz="1900" dirty="0"/>
           </a:p>
@@ -13304,7 +13306,7 @@
                 <a:ea typeface="Aptos" pitchFamily="34" charset="-122"/>
                 <a:cs typeface="Aptos" pitchFamily="34" charset="-120"/>
               </a:rPr>
-              <a:t>• Play 7: Prioritize Use Cases - This lesson informs Play 7 by helping learners connect the.</a:t>
+              <a:t>• Play 7: Prioritize Use Cases - This lesson informs Play 7 by helping.</a:t>
             </a:r>
             <a:endParaRPr lang="en-US" sz="1900" dirty="0"/>
           </a:p>
@@ -13321,7 +13323,7 @@
                 <a:ea typeface="Aptos" pitchFamily="34" charset="-122"/>
                 <a:cs typeface="Aptos" pitchFamily="34" charset="-120"/>
               </a:rPr>
-              <a:t>• Play 1: Vision &amp; Guardrails - This lesson informs Play 1 by helping learners connect the.</a:t>
+              <a:t>• Play 1: Vision &amp; Guardrails - This lesson informs Play 1 by helping learners.</a:t>
             </a:r>
             <a:endParaRPr lang="en-US" sz="1900" dirty="0"/>
           </a:p>
@@ -13338,7 +13340,7 @@
                 <a:ea typeface="Aptos" pitchFamily="34" charset="-122"/>
                 <a:cs typeface="Aptos" pitchFamily="34" charset="-120"/>
               </a:rPr>
-              <a:t>• Play 13: Monitor and Evaluate AI Systems - This lesson informs Play 13 by helping learners.</a:t>
+              <a:t>• Play 13: Monitor and Evaluate AI Systems - This lesson informs Play 13 by.</a:t>
             </a:r>
             <a:endParaRPr lang="en-US" sz="1900" dirty="0"/>
           </a:p>
@@ -13379,8 +13381,8 @@
         </p:nvSpPr>
         <p:spPr>
           <a:xfrm>
-            <a:off x="8211312" y="1563624"/>
-            <a:ext cx="2734056" cy="256032"/>
+            <a:off x="8211312" y="1545336"/>
+            <a:ext cx="2734056" cy="228600"/>
           </a:xfrm>
           <a:prstGeom prst="rect">
             <a:avLst/>
@@ -13396,7 +13398,7 @@
               <a:buNone/>
             </a:pPr>
             <a:r>
-              <a:rPr lang="en-US" sz="1300" b="1" dirty="0">
+              <a:rPr lang="en-US" sz="1220" b="1" dirty="0">
                 <a:solidFill>
                   <a:srgbClr val="0068B7"/>
                 </a:solidFill>
@@ -13406,7 +13408,7 @@
               </a:rPr>
               <a:t>Apply the lesson</a:t>
             </a:r>
-            <a:endParaRPr lang="en-US" sz="1300" dirty="0"/>
+            <a:endParaRPr lang="en-US" sz="1220" dirty="0"/>
           </a:p>
         </p:txBody>
       </p:sp>
@@ -13418,8 +13420,8 @@
         </p:nvSpPr>
         <p:spPr>
           <a:xfrm>
-            <a:off x="8211312" y="1892808"/>
-            <a:ext cx="2734056" cy="1536192"/>
+            <a:off x="8211312" y="1856232"/>
+            <a:ext cx="2734056" cy="1591056"/>
           </a:xfrm>
           <a:prstGeom prst="rect">
             <a:avLst/>
@@ -13437,7 +13439,7 @@
               <a:buNone/>
             </a:pPr>
             <a:r>
-              <a:rPr lang="en-US" sz="1320" dirty="0">
+              <a:rPr lang="en-US" sz="1220" dirty="0">
                 <a:solidFill>
                   <a:srgbClr val="17364A"/>
                 </a:solidFill>
@@ -13445,9 +13447,9 @@
                 <a:ea typeface="Aptos" pitchFamily="34" charset="-122"/>
                 <a:cs typeface="Aptos" pitchFamily="34" charset="-120"/>
               </a:rPr>
-              <a:t>Use the related plays to identify decisions, participants, timing, approvals, and documentation needed for responsible implementation.</a:t>
-            </a:r>
-            <a:endParaRPr lang="en-US" sz="1320" dirty="0"/>
+              <a:t>Use the related plays to identify decisions, participants, timing, approvals,.</a:t>
+            </a:r>
+            <a:endParaRPr lang="en-US" sz="1220" dirty="0"/>
           </a:p>
         </p:txBody>
       </p:sp>
@@ -13486,8 +13488,8 @@
         </p:nvSpPr>
         <p:spPr>
           <a:xfrm>
-            <a:off x="8211312" y="3941064"/>
-            <a:ext cx="2734056" cy="256032"/>
+            <a:off x="8211312" y="3922776"/>
+            <a:ext cx="2734056" cy="228600"/>
           </a:xfrm>
           <a:prstGeom prst="rect">
             <a:avLst/>
@@ -13503,7 +13505,7 @@
               <a:buNone/>
             </a:pPr>
             <a:r>
-              <a:rPr lang="en-US" sz="1300" b="1" dirty="0">
+              <a:rPr lang="en-US" sz="1220" b="1" dirty="0">
                 <a:solidFill>
                   <a:srgbClr val="0068B7"/>
                 </a:solidFill>
@@ -13513,7 +13515,7 @@
               </a:rPr>
               <a:t>Use the play links to</a:t>
             </a:r>
-            <a:endParaRPr lang="en-US" sz="1300" dirty="0"/>
+            <a:endParaRPr lang="en-US" sz="1220" dirty="0"/>
           </a:p>
         </p:txBody>
       </p:sp>
@@ -13525,8 +13527,8 @@
         </p:nvSpPr>
         <p:spPr>
           <a:xfrm>
-            <a:off x="8229600" y="4306824"/>
-            <a:ext cx="2679192" cy="941832"/>
+            <a:off x="8229600" y="4251960"/>
+            <a:ext cx="2679192" cy="1033272"/>
           </a:xfrm>
           <a:prstGeom prst="rect">
             <a:avLst/>
@@ -13544,7 +13546,7 @@
               <a:buNone/>
             </a:pPr>
             <a:r>
-              <a:rPr lang="en-US" sz="1220" dirty="0">
+              <a:rPr lang="en-US" sz="1140" dirty="0">
                 <a:solidFill>
                   <a:srgbClr val="17364A"/>
                 </a:solidFill>
@@ -13554,14 +13556,14 @@
               </a:rPr>
               <a:t>Locate the decision point in the playbook sequence.</a:t>
             </a:r>
-            <a:endParaRPr lang="en-US" sz="1220" dirty="0"/>
-          </a:p>
-          <a:p>
-            <a:pPr indent="0" marL="0">
-              <a:buNone/>
-            </a:pPr>
-            <a:r>
-              <a:rPr lang="en-US" sz="1220" dirty="0">
+            <a:endParaRPr lang="en-US" sz="1140" dirty="0"/>
+          </a:p>
+          <a:p>
+            <a:pPr indent="0" marL="0">
+              <a:buNone/>
+            </a:pPr>
+            <a:r>
+              <a:rPr lang="en-US" sz="1140" dirty="0">
                 <a:solidFill>
                   <a:srgbClr val="17364A"/>
                 </a:solidFill>
@@ -13571,14 +13573,14 @@
               </a:rPr>
               <a:t>Identify who should participate in the work.</a:t>
             </a:r>
-            <a:endParaRPr lang="en-US" sz="1220" dirty="0"/>
-          </a:p>
-          <a:p>
-            <a:pPr indent="0" marL="0">
-              <a:buNone/>
-            </a:pPr>
-            <a:r>
-              <a:rPr lang="en-US" sz="1220" dirty="0">
+            <a:endParaRPr lang="en-US" sz="1140" dirty="0"/>
+          </a:p>
+          <a:p>
+            <a:pPr indent="0" marL="0">
+              <a:buNone/>
+            </a:pPr>
+            <a:r>
+              <a:rPr lang="en-US" sz="1140" dirty="0">
                 <a:solidFill>
                   <a:srgbClr val="17364A"/>
                 </a:solidFill>
@@ -13586,9 +13588,9 @@
                 <a:ea typeface="Aptos" pitchFamily="34" charset="-122"/>
                 <a:cs typeface="Aptos" pitchFamily="34" charset="-120"/>
               </a:rPr>
-              <a:t>Document the review, approval, or implementation step.</a:t>
-            </a:r>
-            <a:endParaRPr lang="en-US" sz="1220" dirty="0"/>
+              <a:t>Document the review, approval, or implementation.</a:t>
+            </a:r>
+            <a:endParaRPr lang="en-US" sz="1140" dirty="0"/>
           </a:p>
         </p:txBody>
       </p:sp>
@@ -13906,7 +13908,7 @@
                 <a:ea typeface="Aptos" pitchFamily="34" charset="-122"/>
                 <a:cs typeface="Aptos" pitchFamily="34" charset="-120"/>
               </a:rPr>
-              <a:t>• Tool 20: Community Engagement Planning (Planning) - Use this tool to complete or strengthen.</a:t>
+              <a:t>• Tool 20: Community Engagement Planning (Planning) - Use this tool to.</a:t>
             </a:r>
             <a:endParaRPr lang="en-US" sz="1850" dirty="0"/>
           </a:p>
@@ -13923,7 +13925,7 @@
                 <a:ea typeface="Aptos" pitchFamily="34" charset="-122"/>
                 <a:cs typeface="Aptos" pitchFamily="34" charset="-120"/>
               </a:rPr>
-              <a:t>• Tool 21: Stakeholder Mapping &amp; RACI (Template) - Use this tool to complete or strengthen the.</a:t>
+              <a:t>• Tool 21: Stakeholder Mapping &amp; RACI (Template) - Use this tool to complete.</a:t>
             </a:r>
             <a:endParaRPr lang="en-US" sz="1850" dirty="0"/>
           </a:p>
@@ -13940,7 +13942,7 @@
                 <a:ea typeface="Aptos" pitchFamily="34" charset="-122"/>
                 <a:cs typeface="Aptos" pitchFamily="34" charset="-120"/>
               </a:rPr>
-              <a:t>• Tool 22: Missing Voices Analysis (Checklist) - Use this tool to complete or strengthen the.</a:t>
+              <a:t>• Tool 22: Missing Voices Analysis (Checklist) - Use this tool to complete or.</a:t>
             </a:r>
             <a:endParaRPr lang="en-US" sz="1850" dirty="0"/>
           </a:p>
@@ -13957,7 +13959,7 @@
                 <a:ea typeface="Aptos" pitchFamily="34" charset="-122"/>
                 <a:cs typeface="Aptos" pitchFamily="34" charset="-120"/>
               </a:rPr>
-              <a:t>• Tool 4: AI Policy Landscape Scan (Worksheet) - Use AI Policy Landscape Scan to translate this.</a:t>
+              <a:t>• Tool 4: AI Policy Landscape Scan (Worksheet) - Use AI Policy Landscape Scan.</a:t>
             </a:r>
             <a:endParaRPr lang="en-US" sz="1850" dirty="0"/>
           </a:p>
@@ -13998,8 +14000,8 @@
         </p:nvSpPr>
         <p:spPr>
           <a:xfrm>
-            <a:off x="8211312" y="1563624"/>
-            <a:ext cx="2734056" cy="256032"/>
+            <a:off x="8211312" y="1545336"/>
+            <a:ext cx="2734056" cy="228600"/>
           </a:xfrm>
           <a:prstGeom prst="rect">
             <a:avLst/>
@@ -14015,7 +14017,7 @@
               <a:buNone/>
             </a:pPr>
             <a:r>
-              <a:rPr lang="en-US" sz="1300" b="1" dirty="0">
+              <a:rPr lang="en-US" sz="1220" b="1" dirty="0">
                 <a:solidFill>
                   <a:srgbClr val="0068B7"/>
                 </a:solidFill>
@@ -14025,7 +14027,7 @@
               </a:rPr>
               <a:t>Use the tools</a:t>
             </a:r>
-            <a:endParaRPr lang="en-US" sz="1300" dirty="0"/>
+            <a:endParaRPr lang="en-US" sz="1220" dirty="0"/>
           </a:p>
         </p:txBody>
       </p:sp>
@@ -14037,8 +14039,8 @@
         </p:nvSpPr>
         <p:spPr>
           <a:xfrm>
-            <a:off x="8211312" y="1892808"/>
-            <a:ext cx="2734056" cy="1536192"/>
+            <a:off x="8211312" y="1856232"/>
+            <a:ext cx="2734056" cy="1591056"/>
           </a:xfrm>
           <a:prstGeom prst="rect">
             <a:avLst/>
@@ -14056,7 +14058,7 @@
               <a:buNone/>
             </a:pPr>
             <a:r>
-              <a:rPr lang="en-US" sz="1320" dirty="0">
+              <a:rPr lang="en-US" sz="1220" dirty="0">
                 <a:solidFill>
                   <a:srgbClr val="17364A"/>
                 </a:solidFill>
@@ -14064,9 +14066,9 @@
                 <a:ea typeface="Aptos" pitchFamily="34" charset="-122"/>
                 <a:cs typeface="Aptos" pitchFamily="34" charset="-120"/>
               </a:rPr>
-              <a:t>Use linked tools when your department needs a structured worksheet, template, checklist, review process, or documentation artifact.</a:t>
-            </a:r>
-            <a:endParaRPr lang="en-US" sz="1320" dirty="0"/>
+              <a:t>Use linked tools when your department needs a structured worksheet, template,.</a:t>
+            </a:r>
+            <a:endParaRPr lang="en-US" sz="1220" dirty="0"/>
           </a:p>
         </p:txBody>
       </p:sp>
@@ -14105,8 +14107,8 @@
         </p:nvSpPr>
         <p:spPr>
           <a:xfrm>
-            <a:off x="8211312" y="3941064"/>
-            <a:ext cx="2734056" cy="256032"/>
+            <a:off x="8211312" y="3922776"/>
+            <a:ext cx="2734056" cy="228600"/>
           </a:xfrm>
           <a:prstGeom prst="rect">
             <a:avLst/>
@@ -14122,7 +14124,7 @@
               <a:buNone/>
             </a:pPr>
             <a:r>
-              <a:rPr lang="en-US" sz="1300" b="1" dirty="0">
+              <a:rPr lang="en-US" sz="1220" b="1" dirty="0">
                 <a:solidFill>
                   <a:srgbClr val="0068B7"/>
                 </a:solidFill>
@@ -14132,7 +14134,7 @@
               </a:rPr>
               <a:t>Tool selection cues</a:t>
             </a:r>
-            <a:endParaRPr lang="en-US" sz="1300" dirty="0"/>
+            <a:endParaRPr lang="en-US" sz="1220" dirty="0"/>
           </a:p>
         </p:txBody>
       </p:sp>
@@ -14144,8 +14146,8 @@
         </p:nvSpPr>
         <p:spPr>
           <a:xfrm>
-            <a:off x="8229600" y="4306824"/>
-            <a:ext cx="2679192" cy="941832"/>
+            <a:off x="8229600" y="4251960"/>
+            <a:ext cx="2679192" cy="1033272"/>
           </a:xfrm>
           <a:prstGeom prst="rect">
             <a:avLst/>
@@ -14163,7 +14165,7 @@
               <a:buNone/>
             </a:pPr>
             <a:r>
-              <a:rPr lang="en-US" sz="1220" dirty="0">
+              <a:rPr lang="en-US" sz="1140" dirty="0">
                 <a:solidFill>
                   <a:srgbClr val="17364A"/>
                 </a:solidFill>
@@ -14173,14 +14175,14 @@
               </a:rPr>
               <a:t>Use a tool when no comparable local process exists.</a:t>
             </a:r>
-            <a:endParaRPr lang="en-US" sz="1220" dirty="0"/>
-          </a:p>
-          <a:p>
-            <a:pPr indent="0" marL="0">
-              <a:buNone/>
-            </a:pPr>
-            <a:r>
-              <a:rPr lang="en-US" sz="1220" dirty="0">
+            <a:endParaRPr lang="en-US" sz="1140" dirty="0"/>
+          </a:p>
+          <a:p>
+            <a:pPr indent="0" marL="0">
+              <a:buNone/>
+            </a:pPr>
+            <a:r>
+              <a:rPr lang="en-US" sz="1140" dirty="0">
                 <a:solidFill>
                   <a:srgbClr val="17364A"/>
                 </a:solidFill>
@@ -14188,16 +14190,16 @@
                 <a:ea typeface="Aptos" pitchFamily="34" charset="-122"/>
                 <a:cs typeface="Aptos" pitchFamily="34" charset="-120"/>
               </a:rPr>
-              <a:t>Adapt existing department templates when they already fit the.</a:t>
-            </a:r>
-            <a:endParaRPr lang="en-US" sz="1220" dirty="0"/>
-          </a:p>
-          <a:p>
-            <a:pPr indent="0" marL="0">
-              <a:buNone/>
-            </a:pPr>
-            <a:r>
-              <a:rPr lang="en-US" sz="1220" dirty="0">
+              <a:t>Adapt existing department templates when they.</a:t>
+            </a:r>
+            <a:endParaRPr lang="en-US" sz="1140" dirty="0"/>
+          </a:p>
+          <a:p>
+            <a:pPr indent="0" marL="0">
+              <a:buNone/>
+            </a:pPr>
+            <a:r>
+              <a:rPr lang="en-US" sz="1140" dirty="0">
                 <a:solidFill>
                   <a:srgbClr val="17364A"/>
                 </a:solidFill>
@@ -14205,9 +14207,9 @@
                 <a:ea typeface="Aptos" pitchFamily="34" charset="-122"/>
                 <a:cs typeface="Aptos" pitchFamily="34" charset="-120"/>
               </a:rPr>
-              <a:t>Save the completed artifact as evidence of the decision.</a:t>
-            </a:r>
-            <a:endParaRPr lang="en-US" sz="1220" dirty="0"/>
+              <a:t>Save the completed artifact as evidence of the.</a:t>
+            </a:r>
+            <a:endParaRPr lang="en-US" sz="1140" dirty="0"/>
           </a:p>
         </p:txBody>
       </p:sp>
@@ -14498,8 +14500,8 @@
         </p:nvSpPr>
         <p:spPr>
           <a:xfrm>
-            <a:off x="868680" y="1508760"/>
-            <a:ext cx="6309360" cy="4160520"/>
+            <a:off x="822960" y="1463040"/>
+            <a:ext cx="6565392" cy="4343400"/>
           </a:xfrm>
           <a:prstGeom prst="rect">
             <a:avLst/>
@@ -14517,7 +14519,7 @@
               <a:buNone/>
             </a:pPr>
             <a:r>
-              <a:rPr lang="en-US" sz="2100" dirty="0">
+              <a:rPr lang="en-US" sz="1920" dirty="0">
                 <a:solidFill>
                   <a:srgbClr val="003A63"/>
                 </a:solidFill>
@@ -14527,14 +14529,14 @@
               </a:rPr>
               <a:t>• Define AI for Social Good in public health terms.</a:t>
             </a:r>
-            <a:endParaRPr lang="en-US" sz="2100" dirty="0"/>
-          </a:p>
-          <a:p>
-            <a:pPr indent="0" marL="0">
-              <a:buNone/>
-            </a:pPr>
-            <a:r>
-              <a:rPr lang="en-US" sz="2100" dirty="0">
+            <a:endParaRPr lang="en-US" sz="1920" dirty="0"/>
+          </a:p>
+          <a:p>
+            <a:pPr indent="0" marL="0">
+              <a:buNone/>
+            </a:pPr>
+            <a:r>
+              <a:rPr lang="en-US" sz="1920" dirty="0">
                 <a:solidFill>
                   <a:srgbClr val="003A63"/>
                 </a:solidFill>
@@ -14544,14 +14546,14 @@
               </a:rPr>
               <a:t>• Distinguish public benefit from novelty, efficiency, or automation alone.</a:t>
             </a:r>
-            <a:endParaRPr lang="en-US" sz="2100" dirty="0"/>
-          </a:p>
-          <a:p>
-            <a:pPr indent="0" marL="0">
-              <a:buNone/>
-            </a:pPr>
-            <a:r>
-              <a:rPr lang="en-US" sz="2100" dirty="0">
+            <a:endParaRPr lang="en-US" sz="1920" dirty="0"/>
+          </a:p>
+          <a:p>
+            <a:pPr indent="0" marL="0">
+              <a:buNone/>
+            </a:pPr>
+            <a:r>
+              <a:rPr lang="en-US" sz="1920" dirty="0">
                 <a:solidFill>
                   <a:srgbClr val="003A63"/>
                 </a:solidFill>
@@ -14559,9 +14561,9 @@
                 <a:ea typeface="Aptos" pitchFamily="34" charset="-122"/>
                 <a:cs typeface="Aptos" pitchFamily="34" charset="-120"/>
               </a:rPr>
-              <a:t>• Identify how AI can support public health values, including equity, transparency,.</a:t>
-            </a:r>
-            <a:endParaRPr lang="en-US" sz="2100" dirty="0"/>
+              <a:t>• Identify how AI can support public health values, including equity,.</a:t>
+            </a:r>
+            <a:endParaRPr lang="en-US" sz="1920" dirty="0"/>
           </a:p>
         </p:txBody>
       </p:sp>
@@ -14573,12 +14575,12 @@
         </p:nvSpPr>
         <p:spPr>
           <a:xfrm>
-            <a:off x="7635240" y="1325880"/>
-            <a:ext cx="3474720" cy="1207008"/>
+            <a:off x="7543800" y="1325880"/>
+            <a:ext cx="3611880" cy="1261872"/>
           </a:xfrm>
           <a:prstGeom prst="roundRect">
             <a:avLst>
-              <a:gd name="adj" fmla="val 9091"/>
+              <a:gd name="adj" fmla="val 8696"/>
             </a:avLst>
           </a:prstGeom>
           <a:solidFill>
@@ -14600,8 +14602,8 @@
         </p:nvSpPr>
         <p:spPr>
           <a:xfrm>
-            <a:off x="7799832" y="1472184"/>
-            <a:ext cx="3145536" cy="256032"/>
+            <a:off x="7708392" y="1453896"/>
+            <a:ext cx="3282696" cy="228600"/>
           </a:xfrm>
           <a:prstGeom prst="rect">
             <a:avLst/>
@@ -14617,7 +14619,7 @@
               <a:buNone/>
             </a:pPr>
             <a:r>
-              <a:rPr lang="en-US" sz="1300" b="1" dirty="0">
+              <a:rPr lang="en-US" sz="1220" b="1" dirty="0">
                 <a:solidFill>
                   <a:srgbClr val="0068B7"/>
                 </a:solidFill>
@@ -14627,7 +14629,7 @@
               </a:rPr>
               <a:t>Practice focus</a:t>
             </a:r>
-            <a:endParaRPr lang="en-US" sz="1300" dirty="0"/>
+            <a:endParaRPr lang="en-US" sz="1220" dirty="0"/>
           </a:p>
         </p:txBody>
       </p:sp>
@@ -14639,8 +14641,8 @@
         </p:nvSpPr>
         <p:spPr>
           <a:xfrm>
-            <a:off x="7799832" y="1801368"/>
-            <a:ext cx="3145536" cy="640080"/>
+            <a:off x="7708392" y="1764792"/>
+            <a:ext cx="3282696" cy="749808"/>
           </a:xfrm>
           <a:prstGeom prst="rect">
             <a:avLst/>
@@ -14658,7 +14660,7 @@
               <a:buNone/>
             </a:pPr>
             <a:r>
-              <a:rPr lang="en-US" sz="1320" dirty="0">
+              <a:rPr lang="en-US" sz="1220" dirty="0">
                 <a:solidFill>
                   <a:srgbClr val="17364A"/>
                 </a:solidFill>
@@ -14668,7 +14670,7 @@
               </a:rPr>
               <a:t>Define AI for Social Good in public health terms.</a:t>
             </a:r>
-            <a:endParaRPr lang="en-US" sz="1320" dirty="0"/>
+            <a:endParaRPr lang="en-US" sz="1220" dirty="0"/>
           </a:p>
         </p:txBody>
       </p:sp>
@@ -14680,12 +14682,12 @@
         </p:nvSpPr>
         <p:spPr>
           <a:xfrm>
-            <a:off x="7635240" y="2670048"/>
-            <a:ext cx="3474720" cy="1377086"/>
+            <a:off x="7543800" y="2724912"/>
+            <a:ext cx="3611880" cy="1527048"/>
           </a:xfrm>
           <a:prstGeom prst="roundRect">
             <a:avLst>
-              <a:gd name="adj" fmla="val 7968"/>
+              <a:gd name="adj" fmla="val 7186"/>
             </a:avLst>
           </a:prstGeom>
           <a:solidFill>
@@ -14707,8 +14709,8 @@
         </p:nvSpPr>
         <p:spPr>
           <a:xfrm>
-            <a:off x="7799832" y="2816352"/>
-            <a:ext cx="3145536" cy="256032"/>
+            <a:off x="7708392" y="2852928"/>
+            <a:ext cx="3282696" cy="228600"/>
           </a:xfrm>
           <a:prstGeom prst="rect">
             <a:avLst/>
@@ -14724,7 +14726,7 @@
               <a:buNone/>
             </a:pPr>
             <a:r>
-              <a:rPr lang="en-US" sz="1300" b="1" dirty="0">
+              <a:rPr lang="en-US" sz="1220" b="1" dirty="0">
                 <a:solidFill>
                   <a:srgbClr val="0068B7"/>
                 </a:solidFill>
@@ -14734,7 +14736,7 @@
               </a:rPr>
               <a:t>Concept checkpoints</a:t>
             </a:r>
-            <a:endParaRPr lang="en-US" sz="1300" dirty="0"/>
+            <a:endParaRPr lang="en-US" sz="1220" dirty="0"/>
           </a:p>
         </p:txBody>
       </p:sp>
@@ -14746,8 +14748,8 @@
         </p:nvSpPr>
         <p:spPr>
           <a:xfrm>
-            <a:off x="7818120" y="3182112"/>
-            <a:ext cx="3090672" cy="718718"/>
+            <a:off x="7726680" y="3182112"/>
+            <a:ext cx="3227832" cy="960120"/>
           </a:xfrm>
           <a:prstGeom prst="rect">
             <a:avLst/>
@@ -14765,7 +14767,7 @@
               <a:buNone/>
             </a:pPr>
             <a:r>
-              <a:rPr lang="en-US" sz="1220" dirty="0">
+              <a:rPr lang="en-US" sz="1140" dirty="0">
                 <a:solidFill>
                   <a:srgbClr val="17364A"/>
                 </a:solidFill>
@@ -14773,16 +14775,16 @@
                 <a:ea typeface="Aptos" pitchFamily="34" charset="-122"/>
                 <a:cs typeface="Aptos" pitchFamily="34" charset="-120"/>
               </a:rPr>
-              <a:t>Identify how AI can support public health values, including.</a:t>
-            </a:r>
-            <a:endParaRPr lang="en-US" sz="1220" dirty="0"/>
-          </a:p>
-          <a:p>
-            <a:pPr indent="0" marL="0">
-              <a:buNone/>
-            </a:pPr>
-            <a:r>
-              <a:rPr lang="en-US" sz="1220" dirty="0">
+              <a:t>Identify how AI can support public health values,.</a:t>
+            </a:r>
+            <a:endParaRPr lang="en-US" sz="1140" dirty="0"/>
+          </a:p>
+          <a:p>
+            <a:pPr indent="0" marL="0">
+              <a:buNone/>
+            </a:pPr>
+            <a:r>
+              <a:rPr lang="en-US" sz="1140" dirty="0">
                 <a:solidFill>
                   <a:srgbClr val="17364A"/>
                 </a:solidFill>
@@ -14790,16 +14792,16 @@
                 <a:ea typeface="Aptos" pitchFamily="34" charset="-122"/>
                 <a:cs typeface="Aptos" pitchFamily="34" charset="-120"/>
               </a:rPr>
-              <a:t>Assess potential harms, including exclusion, surveillance burden,.</a:t>
-            </a:r>
-            <a:endParaRPr lang="en-US" sz="1220" dirty="0"/>
-          </a:p>
-          <a:p>
-            <a:pPr indent="0" marL="0">
-              <a:buNone/>
-            </a:pPr>
-            <a:r>
-              <a:rPr lang="en-US" sz="1220" dirty="0">
+              <a:t>Assess potential harms, including exclusion,.</a:t>
+            </a:r>
+            <a:endParaRPr lang="en-US" sz="1140" dirty="0"/>
+          </a:p>
+          <a:p>
+            <a:pPr indent="0" marL="0">
+              <a:buNone/>
+            </a:pPr>
+            <a:r>
+              <a:rPr lang="en-US" sz="1140" dirty="0">
                 <a:solidFill>
                   <a:srgbClr val="17364A"/>
                 </a:solidFill>
@@ -14807,9 +14809,9 @@
                 <a:ea typeface="Aptos" pitchFamily="34" charset="-122"/>
                 <a:cs typeface="Aptos" pitchFamily="34" charset="-120"/>
               </a:rPr>
-              <a:t>Design community-centered safeguards for socially beneficial AI use.</a:t>
-            </a:r>
-            <a:endParaRPr lang="en-US" sz="1220" dirty="0"/>
+              <a:t>Design community-centered safeguards for socially.</a:t>
+            </a:r>
+            <a:endParaRPr lang="en-US" sz="1140" dirty="0"/>
           </a:p>
         </p:txBody>
       </p:sp>
@@ -14821,12 +14823,12 @@
         </p:nvSpPr>
         <p:spPr>
           <a:xfrm>
-            <a:off x="7635240" y="4184294"/>
-            <a:ext cx="3474720" cy="1466698"/>
+            <a:off x="7543800" y="4389120"/>
+            <a:ext cx="3611880" cy="1261872"/>
           </a:xfrm>
           <a:prstGeom prst="roundRect">
             <a:avLst>
-              <a:gd name="adj" fmla="val 7481"/>
+              <a:gd name="adj" fmla="val 8696"/>
             </a:avLst>
           </a:prstGeom>
           <a:solidFill>
@@ -14848,8 +14850,8 @@
         </p:nvSpPr>
         <p:spPr>
           <a:xfrm>
-            <a:off x="7799832" y="4330598"/>
-            <a:ext cx="3145536" cy="256032"/>
+            <a:off x="7708392" y="4517136"/>
+            <a:ext cx="3282696" cy="228600"/>
           </a:xfrm>
           <a:prstGeom prst="rect">
             <a:avLst/>
@@ -14865,7 +14867,7 @@
               <a:buNone/>
             </a:pPr>
             <a:r>
-              <a:rPr lang="en-US" sz="1300" b="1" dirty="0">
+              <a:rPr lang="en-US" sz="1220" b="1" dirty="0">
                 <a:solidFill>
                   <a:srgbClr val="0068B7"/>
                 </a:solidFill>
@@ -14875,7 +14877,7 @@
               </a:rPr>
               <a:t>What to produce</a:t>
             </a:r>
-            <a:endParaRPr lang="en-US" sz="1300" dirty="0"/>
+            <a:endParaRPr lang="en-US" sz="1220" dirty="0"/>
           </a:p>
         </p:txBody>
       </p:sp>
@@ -14887,8 +14889,8 @@
         </p:nvSpPr>
         <p:spPr>
           <a:xfrm>
-            <a:off x="7799832" y="4659782"/>
-            <a:ext cx="3145536" cy="899770"/>
+            <a:off x="7708392" y="4828032"/>
+            <a:ext cx="3282696" cy="749808"/>
           </a:xfrm>
           <a:prstGeom prst="rect">
             <a:avLst/>
@@ -14906,7 +14908,7 @@
               <a:buNone/>
             </a:pPr>
             <a:r>
-              <a:rPr lang="en-US" sz="1320" dirty="0">
+              <a:rPr lang="en-US" sz="1220" dirty="0">
                 <a:solidFill>
                   <a:srgbClr val="17364A"/>
                 </a:solidFill>
@@ -14914,9 +14916,9 @@
                 <a:ea typeface="Aptos" pitchFamily="34" charset="-122"/>
                 <a:cs typeface="Aptos" pitchFamily="34" charset="-120"/>
               </a:rPr>
-              <a:t>Use the assignment to test whether you can explain the concept, apply it to a realistic public health situation, and identify what would need review before the work moves forward.</a:t>
-            </a:r>
-            <a:endParaRPr lang="en-US" sz="1320" dirty="0"/>
+              <a:t>Use the assignment to test whether you can explain the concept, apply it to a.</a:t>
+            </a:r>
+            <a:endParaRPr lang="en-US" sz="1220" dirty="0"/>
           </a:p>
         </p:txBody>
       </p:sp>
@@ -15207,8 +15209,8 @@
         </p:nvSpPr>
         <p:spPr>
           <a:xfrm>
-            <a:off x="868680" y="1508760"/>
-            <a:ext cx="6309360" cy="4160520"/>
+            <a:off x="822960" y="1463040"/>
+            <a:ext cx="6565392" cy="4343400"/>
           </a:xfrm>
           <a:prstGeom prst="rect">
             <a:avLst/>
@@ -15226,7 +15228,7 @@
               <a:buNone/>
             </a:pPr>
             <a:r>
-              <a:rPr lang="en-US" sz="2100" dirty="0">
+              <a:rPr lang="en-US" sz="1920" dirty="0">
                 <a:solidFill>
                   <a:srgbClr val="003A63"/>
                 </a:solidFill>
@@ -15236,7 +15238,7 @@
               </a:rPr>
               <a:t>• Produce an AI for Social Good review brief for a public health use case.</a:t>
             </a:r>
-            <a:endParaRPr lang="en-US" sz="2100" dirty="0"/>
+            <a:endParaRPr lang="en-US" sz="1920" dirty="0"/>
           </a:p>
         </p:txBody>
       </p:sp>
@@ -15248,12 +15250,12 @@
         </p:nvSpPr>
         <p:spPr>
           <a:xfrm>
-            <a:off x="7635240" y="1325880"/>
-            <a:ext cx="3474720" cy="1207008"/>
+            <a:off x="7543800" y="1325880"/>
+            <a:ext cx="3611880" cy="1261872"/>
           </a:xfrm>
           <a:prstGeom prst="roundRect">
             <a:avLst>
-              <a:gd name="adj" fmla="val 9091"/>
+              <a:gd name="adj" fmla="val 8696"/>
             </a:avLst>
           </a:prstGeom>
           <a:solidFill>
@@ -15275,8 +15277,8 @@
         </p:nvSpPr>
         <p:spPr>
           <a:xfrm>
-            <a:off x="7799832" y="1472184"/>
-            <a:ext cx="3145536" cy="256032"/>
+            <a:off x="7708392" y="1453896"/>
+            <a:ext cx="3282696" cy="228600"/>
           </a:xfrm>
           <a:prstGeom prst="rect">
             <a:avLst/>
@@ -15292,7 +15294,7 @@
               <a:buNone/>
             </a:pPr>
             <a:r>
-              <a:rPr lang="en-US" sz="1300" b="1" dirty="0">
+              <a:rPr lang="en-US" sz="1220" b="1" dirty="0">
                 <a:solidFill>
                   <a:srgbClr val="0068B7"/>
                 </a:solidFill>
@@ -15302,7 +15304,7 @@
               </a:rPr>
               <a:t>Practice focus</a:t>
             </a:r>
-            <a:endParaRPr lang="en-US" sz="1300" dirty="0"/>
+            <a:endParaRPr lang="en-US" sz="1220" dirty="0"/>
           </a:p>
         </p:txBody>
       </p:sp>
@@ -15314,8 +15316,8 @@
         </p:nvSpPr>
         <p:spPr>
           <a:xfrm>
-            <a:off x="7799832" y="1801368"/>
-            <a:ext cx="3145536" cy="640080"/>
+            <a:off x="7708392" y="1764792"/>
+            <a:ext cx="3282696" cy="749808"/>
           </a:xfrm>
           <a:prstGeom prst="rect">
             <a:avLst/>
@@ -15333,7 +15335,7 @@
               <a:buNone/>
             </a:pPr>
             <a:r>
-              <a:rPr lang="en-US" sz="1320" dirty="0">
+              <a:rPr lang="en-US" sz="1220" dirty="0">
                 <a:solidFill>
                   <a:srgbClr val="17364A"/>
                 </a:solidFill>
@@ -15343,7 +15345,7 @@
               </a:rPr>
               <a:t>Produce an AI for Social Good review brief for a public health use case.</a:t>
             </a:r>
-            <a:endParaRPr lang="en-US" sz="1320" dirty="0"/>
+            <a:endParaRPr lang="en-US" sz="1220" dirty="0"/>
           </a:p>
         </p:txBody>
       </p:sp>
@@ -15355,12 +15357,12 @@
         </p:nvSpPr>
         <p:spPr>
           <a:xfrm>
-            <a:off x="7635240" y="2670048"/>
-            <a:ext cx="3474720" cy="1377086"/>
+            <a:off x="7543800" y="2724912"/>
+            <a:ext cx="3611880" cy="1527048"/>
           </a:xfrm>
           <a:prstGeom prst="roundRect">
             <a:avLst>
-              <a:gd name="adj" fmla="val 7968"/>
+              <a:gd name="adj" fmla="val 7186"/>
             </a:avLst>
           </a:prstGeom>
           <a:solidFill>
@@ -15382,8 +15384,8 @@
         </p:nvSpPr>
         <p:spPr>
           <a:xfrm>
-            <a:off x="7799832" y="2816352"/>
-            <a:ext cx="3145536" cy="256032"/>
+            <a:off x="7708392" y="2852928"/>
+            <a:ext cx="3282696" cy="228600"/>
           </a:xfrm>
           <a:prstGeom prst="rect">
             <a:avLst/>
@@ -15399,7 +15401,7 @@
               <a:buNone/>
             </a:pPr>
             <a:r>
-              <a:rPr lang="en-US" sz="1300" b="1" dirty="0">
+              <a:rPr lang="en-US" sz="1220" b="1" dirty="0">
                 <a:solidFill>
                   <a:srgbClr val="0068B7"/>
                 </a:solidFill>
@@ -15409,7 +15411,7 @@
               </a:rPr>
               <a:t>Concept checkpoints</a:t>
             </a:r>
-            <a:endParaRPr lang="en-US" sz="1300" dirty="0"/>
+            <a:endParaRPr lang="en-US" sz="1220" dirty="0"/>
           </a:p>
         </p:txBody>
       </p:sp>
@@ -15421,8 +15423,8 @@
         </p:nvSpPr>
         <p:spPr>
           <a:xfrm>
-            <a:off x="7818120" y="3182112"/>
-            <a:ext cx="3090672" cy="718718"/>
+            <a:off x="7726680" y="3182112"/>
+            <a:ext cx="3227832" cy="960120"/>
           </a:xfrm>
           <a:prstGeom prst="rect">
             <a:avLst/>
@@ -15440,7 +15442,7 @@
               <a:buNone/>
             </a:pPr>
             <a:r>
-              <a:rPr lang="en-US" sz="1220" dirty="0">
+              <a:rPr lang="en-US" sz="1140" dirty="0">
                 <a:solidFill>
                   <a:srgbClr val="17364A"/>
                 </a:solidFill>
@@ -15448,9 +15450,9 @@
                 <a:ea typeface="Aptos" pitchFamily="34" charset="-122"/>
                 <a:cs typeface="Aptos" pitchFamily="34" charset="-120"/>
               </a:rPr>
-              <a:t>Produce an AI for Social Good review brief for a public health use.</a:t>
-            </a:r>
-            <a:endParaRPr lang="en-US" sz="1220" dirty="0"/>
+              <a:t>Produce an AI for Social Good review brief for a.</a:t>
+            </a:r>
+            <a:endParaRPr lang="en-US" sz="1140" dirty="0"/>
           </a:p>
         </p:txBody>
       </p:sp>
@@ -15462,12 +15464,12 @@
         </p:nvSpPr>
         <p:spPr>
           <a:xfrm>
-            <a:off x="7635240" y="4184294"/>
-            <a:ext cx="3474720" cy="1466698"/>
+            <a:off x="7543800" y="4389120"/>
+            <a:ext cx="3611880" cy="1261872"/>
           </a:xfrm>
           <a:prstGeom prst="roundRect">
             <a:avLst>
-              <a:gd name="adj" fmla="val 7481"/>
+              <a:gd name="adj" fmla="val 8696"/>
             </a:avLst>
           </a:prstGeom>
           <a:solidFill>
@@ -15489,8 +15491,8 @@
         </p:nvSpPr>
         <p:spPr>
           <a:xfrm>
-            <a:off x="7799832" y="4330598"/>
-            <a:ext cx="3145536" cy="256032"/>
+            <a:off x="7708392" y="4517136"/>
+            <a:ext cx="3282696" cy="228600"/>
           </a:xfrm>
           <a:prstGeom prst="rect">
             <a:avLst/>
@@ -15506,7 +15508,7 @@
               <a:buNone/>
             </a:pPr>
             <a:r>
-              <a:rPr lang="en-US" sz="1300" b="1" dirty="0">
+              <a:rPr lang="en-US" sz="1220" b="1" dirty="0">
                 <a:solidFill>
                   <a:srgbClr val="0068B7"/>
                 </a:solidFill>
@@ -15516,7 +15518,7 @@
               </a:rPr>
               <a:t>What to produce</a:t>
             </a:r>
-            <a:endParaRPr lang="en-US" sz="1300" dirty="0"/>
+            <a:endParaRPr lang="en-US" sz="1220" dirty="0"/>
           </a:p>
         </p:txBody>
       </p:sp>
@@ -15528,8 +15530,8 @@
         </p:nvSpPr>
         <p:spPr>
           <a:xfrm>
-            <a:off x="7799832" y="4659782"/>
-            <a:ext cx="3145536" cy="899770"/>
+            <a:off x="7708392" y="4828032"/>
+            <a:ext cx="3282696" cy="749808"/>
           </a:xfrm>
           <a:prstGeom prst="rect">
             <a:avLst/>
@@ -15547,7 +15549,7 @@
               <a:buNone/>
             </a:pPr>
             <a:r>
-              <a:rPr lang="en-US" sz="1320" dirty="0">
+              <a:rPr lang="en-US" sz="1220" dirty="0">
                 <a:solidFill>
                   <a:srgbClr val="17364A"/>
                 </a:solidFill>
@@ -15555,9 +15557,9 @@
                 <a:ea typeface="Aptos" pitchFamily="34" charset="-122"/>
                 <a:cs typeface="Aptos" pitchFamily="34" charset="-120"/>
               </a:rPr>
-              <a:t>Use the assignment to test whether you can explain the concept, apply it to a realistic public health situation, and identify what would need review before the work moves forward.</a:t>
-            </a:r>
-            <a:endParaRPr lang="en-US" sz="1320" dirty="0"/>
+              <a:t>Use the assignment to test whether you can explain the concept, apply it to a.</a:t>
+            </a:r>
+            <a:endParaRPr lang="en-US" sz="1220" dirty="0"/>
           </a:p>
         </p:txBody>
       </p:sp>
@@ -15848,8 +15850,8 @@
         </p:nvSpPr>
         <p:spPr>
           <a:xfrm>
-            <a:off x="868680" y="1508760"/>
-            <a:ext cx="6309360" cy="4160520"/>
+            <a:off x="822960" y="1463040"/>
+            <a:ext cx="6565392" cy="4343400"/>
           </a:xfrm>
           <a:prstGeom prst="rect">
             <a:avLst/>
@@ -15867,7 +15869,7 @@
               <a:buNone/>
             </a:pPr>
             <a:r>
-              <a:rPr lang="en-US" sz="2100" dirty="0">
+              <a:rPr lang="en-US" sz="1920" dirty="0">
                 <a:solidFill>
                   <a:srgbClr val="003A63"/>
                 </a:solidFill>
@@ -15875,16 +15877,16 @@
                 <a:ea typeface="Aptos" pitchFamily="34" charset="-122"/>
                 <a:cs typeface="Aptos" pitchFamily="34" charset="-120"/>
               </a:rPr>
-              <a:t>• AI for Social Good refers to the intentional use of artificial intelligence to improve public.</a:t>
-            </a:r>
-            <a:endParaRPr lang="en-US" sz="2100" dirty="0"/>
-          </a:p>
-          <a:p>
-            <a:pPr indent="0" marL="0">
-              <a:buNone/>
-            </a:pPr>
-            <a:r>
-              <a:rPr lang="en-US" sz="2100" dirty="0">
+              <a:t>• AI for Social Good refers to the intentional use of artificial intelligence.</a:t>
+            </a:r>
+            <a:endParaRPr lang="en-US" sz="1920" dirty="0"/>
+          </a:p>
+          <a:p>
+            <a:pPr indent="0" marL="0">
+              <a:buNone/>
+            </a:pPr>
+            <a:r>
+              <a:rPr lang="en-US" sz="1920" dirty="0">
                 <a:solidFill>
                   <a:srgbClr val="003A63"/>
                 </a:solidFill>
@@ -15894,14 +15896,14 @@
               </a:rPr>
               <a:t>• For public health, this concept is not abstract.</a:t>
             </a:r>
-            <a:endParaRPr lang="en-US" sz="2100" dirty="0"/>
-          </a:p>
-          <a:p>
-            <a:pPr indent="0" marL="0">
-              <a:buNone/>
-            </a:pPr>
-            <a:r>
-              <a:rPr lang="en-US" sz="2100" dirty="0">
+            <a:endParaRPr lang="en-US" sz="1920" dirty="0"/>
+          </a:p>
+          <a:p>
+            <a:pPr indent="0" marL="0">
+              <a:buNone/>
+            </a:pPr>
+            <a:r>
+              <a:rPr lang="en-US" sz="1920" dirty="0">
                 <a:solidFill>
                   <a:srgbClr val="003A63"/>
                 </a:solidFill>
@@ -15909,9 +15911,9 @@
                 <a:ea typeface="Aptos" pitchFamily="34" charset="-122"/>
                 <a:cs typeface="Aptos" pitchFamily="34" charset="-120"/>
               </a:rPr>
-              <a:t>• Public health agencies already work to prevent disease, protect communities, improve access,.</a:t>
-            </a:r>
-            <a:endParaRPr lang="en-US" sz="2100" dirty="0"/>
+              <a:t>• Public health agencies already work to prevent disease, protect communities,.</a:t>
+            </a:r>
+            <a:endParaRPr lang="en-US" sz="1920" dirty="0"/>
           </a:p>
         </p:txBody>
       </p:sp>
@@ -15923,12 +15925,12 @@
         </p:nvSpPr>
         <p:spPr>
           <a:xfrm>
-            <a:off x="7635240" y="1325880"/>
-            <a:ext cx="3474720" cy="1207008"/>
+            <a:off x="7543800" y="1325880"/>
+            <a:ext cx="3611880" cy="1261872"/>
           </a:xfrm>
           <a:prstGeom prst="roundRect">
             <a:avLst>
-              <a:gd name="adj" fmla="val 9091"/>
+              <a:gd name="adj" fmla="val 8696"/>
             </a:avLst>
           </a:prstGeom>
           <a:solidFill>
@@ -15950,8 +15952,8 @@
         </p:nvSpPr>
         <p:spPr>
           <a:xfrm>
-            <a:off x="7799832" y="1472184"/>
-            <a:ext cx="3145536" cy="256032"/>
+            <a:off x="7708392" y="1453896"/>
+            <a:ext cx="3282696" cy="228600"/>
           </a:xfrm>
           <a:prstGeom prst="rect">
             <a:avLst/>
@@ -15967,7 +15969,7 @@
               <a:buNone/>
             </a:pPr>
             <a:r>
-              <a:rPr lang="en-US" sz="1300" b="1" dirty="0">
+              <a:rPr lang="en-US" sz="1220" b="1" dirty="0">
                 <a:solidFill>
                   <a:srgbClr val="0068B7"/>
                 </a:solidFill>
@@ -15977,7 +15979,7 @@
               </a:rPr>
               <a:t>Core concept</a:t>
             </a:r>
-            <a:endParaRPr lang="en-US" sz="1300" dirty="0"/>
+            <a:endParaRPr lang="en-US" sz="1220" dirty="0"/>
           </a:p>
         </p:txBody>
       </p:sp>
@@ -15989,8 +15991,8 @@
         </p:nvSpPr>
         <p:spPr>
           <a:xfrm>
-            <a:off x="7799832" y="1801368"/>
-            <a:ext cx="3145536" cy="640080"/>
+            <a:off x="7708392" y="1764792"/>
+            <a:ext cx="3282696" cy="749808"/>
           </a:xfrm>
           <a:prstGeom prst="rect">
             <a:avLst/>
@@ -16008,7 +16010,7 @@
               <a:buNone/>
             </a:pPr>
             <a:r>
-              <a:rPr lang="en-US" sz="1320" dirty="0">
+              <a:rPr lang="en-US" sz="1220" dirty="0">
                 <a:solidFill>
                   <a:srgbClr val="17364A"/>
                 </a:solidFill>
@@ -16016,9 +16018,9 @@
                 <a:ea typeface="Aptos" pitchFamily="34" charset="-122"/>
                 <a:cs typeface="Aptos" pitchFamily="34" charset="-120"/>
               </a:rPr>
-              <a:t>AI for Social Good refers to the intentional use of artificial intelligence to improve.</a:t>
-            </a:r>
-            <a:endParaRPr lang="en-US" sz="1320" dirty="0"/>
+              <a:t>AI for Social Good refers to the intentional use of artificial intelligence to.</a:t>
+            </a:r>
+            <a:endParaRPr lang="en-US" sz="1220" dirty="0"/>
           </a:p>
         </p:txBody>
       </p:sp>
@@ -16030,12 +16032,12 @@
         </p:nvSpPr>
         <p:spPr>
           <a:xfrm>
-            <a:off x="7635240" y="2670048"/>
-            <a:ext cx="3474720" cy="1377086"/>
+            <a:off x="7543800" y="2724912"/>
+            <a:ext cx="3611880" cy="1527048"/>
           </a:xfrm>
           <a:prstGeom prst="roundRect">
             <a:avLst>
-              <a:gd name="adj" fmla="val 7968"/>
+              <a:gd name="adj" fmla="val 7186"/>
             </a:avLst>
           </a:prstGeom>
           <a:solidFill>
@@ -16057,24 +16059,26 @@
         </p:nvSpPr>
         <p:spPr>
           <a:xfrm>
-            <a:off x="7799832" y="2798064"/>
-            <a:ext cx="3145536" cy="237744"/>
-          </a:xfrm>
-          <a:prstGeom prst="rect">
-            <a:avLst/>
-          </a:prstGeom>
-          <a:noFill/>
-          <a:ln/>
-        </p:spPr>
-        <p:txBody>
-          <a:bodyPr wrap="square" lIns="0" tIns="0" rIns="0" bIns="0" rtlCol="0" anchor="ctr"/>
-          <a:lstStyle/>
-          <a:p>
-            <a:pPr indent="0" marL="0">
-              <a:buNone/>
-            </a:pPr>
-            <a:r>
-              <a:rPr lang="en-US" sz="1250" b="1" dirty="0">
+            <a:off x="7708392" y="2852928"/>
+            <a:ext cx="3282696" cy="219456"/>
+          </a:xfrm>
+          <a:prstGeom prst="rect">
+            <a:avLst/>
+          </a:prstGeom>
+          <a:noFill/>
+          <a:ln/>
+        </p:spPr>
+        <p:txBody>
+          <a:bodyPr wrap="square" lIns="0" tIns="0" rIns="0" bIns="0" rtlCol="0" anchor="ctr">
+            <a:normAutofit/>
+          </a:bodyPr>
+          <a:lstStyle/>
+          <a:p>
+            <a:pPr indent="0" marL="0">
+              <a:buNone/>
+            </a:pPr>
+            <a:r>
+              <a:rPr lang="en-US" sz="1160" b="1" dirty="0">
                 <a:solidFill>
                   <a:srgbClr val="0068B7"/>
                 </a:solidFill>
@@ -16084,7 +16088,7 @@
               </a:rPr>
               <a:t>Human-in-the-loop use</a:t>
             </a:r>
-            <a:endParaRPr lang="en-US" sz="1250" dirty="0"/>
+            <a:endParaRPr lang="en-US" sz="1160" dirty="0"/>
           </a:p>
         </p:txBody>
       </p:sp>
@@ -16096,7 +16100,7 @@
         </p:nvSpPr>
         <p:spPr>
           <a:xfrm>
-            <a:off x="8763000" y="3351276"/>
+            <a:off x="8717280" y="3406140"/>
             <a:ext cx="164592" cy="0"/>
           </a:xfrm>
           <a:prstGeom prst="line">
@@ -16119,8 +16123,8 @@
         </p:nvSpPr>
         <p:spPr>
           <a:xfrm>
-            <a:off x="7872984" y="3200400"/>
-            <a:ext cx="890016" cy="301752"/>
+            <a:off x="7781544" y="3255264"/>
+            <a:ext cx="935736" cy="301752"/>
           </a:xfrm>
           <a:prstGeom prst="roundRect">
             <a:avLst>
@@ -16146,8 +16150,8 @@
         </p:nvSpPr>
         <p:spPr>
           <a:xfrm>
-            <a:off x="7909560" y="3273552"/>
-            <a:ext cx="816864" cy="146304"/>
+            <a:off x="7818120" y="3328416"/>
+            <a:ext cx="862584" cy="146304"/>
           </a:xfrm>
           <a:prstGeom prst="rect">
             <a:avLst/>
@@ -16187,7 +16191,7 @@
         </p:nvSpPr>
         <p:spPr>
           <a:xfrm>
-            <a:off x="9817608" y="3351276"/>
+            <a:off x="9817608" y="3406140"/>
             <a:ext cx="164592" cy="0"/>
           </a:xfrm>
           <a:prstGeom prst="line">
@@ -16210,8 +16214,8 @@
         </p:nvSpPr>
         <p:spPr>
           <a:xfrm>
-            <a:off x="8927592" y="3200400"/>
-            <a:ext cx="890016" cy="301752"/>
+            <a:off x="8881872" y="3255264"/>
+            <a:ext cx="935736" cy="301752"/>
           </a:xfrm>
           <a:prstGeom prst="roundRect">
             <a:avLst>
@@ -16237,8 +16241,8 @@
         </p:nvSpPr>
         <p:spPr>
           <a:xfrm>
-            <a:off x="8964168" y="3273552"/>
-            <a:ext cx="816864" cy="146304"/>
+            <a:off x="8918448" y="3328416"/>
+            <a:ext cx="862584" cy="146304"/>
           </a:xfrm>
           <a:prstGeom prst="rect">
             <a:avLst/>
@@ -16278,8 +16282,8 @@
         </p:nvSpPr>
         <p:spPr>
           <a:xfrm>
-            <a:off x="9982200" y="3200400"/>
-            <a:ext cx="890016" cy="301752"/>
+            <a:off x="9982200" y="3255264"/>
+            <a:ext cx="935736" cy="301752"/>
           </a:xfrm>
           <a:prstGeom prst="roundRect">
             <a:avLst>
@@ -16305,8 +16309,8 @@
         </p:nvSpPr>
         <p:spPr>
           <a:xfrm>
-            <a:off x="10018776" y="3273552"/>
-            <a:ext cx="816864" cy="146304"/>
+            <a:off x="10018776" y="3328416"/>
+            <a:ext cx="862584" cy="146304"/>
           </a:xfrm>
           <a:prstGeom prst="rect">
             <a:avLst/>
@@ -16346,8 +16350,8 @@
         </p:nvSpPr>
         <p:spPr>
           <a:xfrm>
-            <a:off x="7854696" y="3694176"/>
-            <a:ext cx="3035808" cy="206654"/>
+            <a:off x="7763256" y="3749040"/>
+            <a:ext cx="3172968" cy="356616"/>
           </a:xfrm>
           <a:prstGeom prst="rect">
             <a:avLst/>
@@ -16365,7 +16369,7 @@
               <a:buNone/>
             </a:pPr>
             <a:r>
-              <a:rPr lang="en-US" sz="1120" dirty="0">
+              <a:rPr lang="en-US" sz="1040" dirty="0">
                 <a:solidFill>
                   <a:srgbClr val="17364A"/>
                 </a:solidFill>
@@ -16373,9 +16377,9 @@
                 <a:ea typeface="Aptos" pitchFamily="34" charset="-122"/>
                 <a:cs typeface="Aptos" pitchFamily="34" charset="-120"/>
               </a:rPr>
-              <a:t>AI can support work, but public health judgment remains responsible for interpretation and final use.</a:t>
-            </a:r>
-            <a:endParaRPr lang="en-US" sz="1120" dirty="0"/>
+              <a:t>AI can support work, but public health judgment remains responsible.</a:t>
+            </a:r>
+            <a:endParaRPr lang="en-US" sz="1040" dirty="0"/>
           </a:p>
         </p:txBody>
       </p:sp>
@@ -16387,12 +16391,12 @@
         </p:nvSpPr>
         <p:spPr>
           <a:xfrm>
-            <a:off x="7635240" y="4184294"/>
-            <a:ext cx="3474720" cy="1466698"/>
+            <a:off x="7543800" y="4389120"/>
+            <a:ext cx="3611880" cy="1261872"/>
           </a:xfrm>
           <a:prstGeom prst="roundRect">
             <a:avLst>
-              <a:gd name="adj" fmla="val 7481"/>
+              <a:gd name="adj" fmla="val 8696"/>
             </a:avLst>
           </a:prstGeom>
           <a:solidFill>
@@ -16414,8 +16418,8 @@
         </p:nvSpPr>
         <p:spPr>
           <a:xfrm>
-            <a:off x="7799832" y="4330598"/>
-            <a:ext cx="3145536" cy="256032"/>
+            <a:off x="7708392" y="4517136"/>
+            <a:ext cx="3282696" cy="228600"/>
           </a:xfrm>
           <a:prstGeom prst="rect">
             <a:avLst/>
@@ -16431,7 +16435,7 @@
               <a:buNone/>
             </a:pPr>
             <a:r>
-              <a:rPr lang="en-US" sz="1300" b="1" dirty="0">
+              <a:rPr lang="en-US" sz="1220" b="1" dirty="0">
                 <a:solidFill>
                   <a:srgbClr val="0068B7"/>
                 </a:solidFill>
@@ -16441,7 +16445,7 @@
               </a:rPr>
               <a:t>Apply it</a:t>
             </a:r>
-            <a:endParaRPr lang="en-US" sz="1300" dirty="0"/>
+            <a:endParaRPr lang="en-US" sz="1220" dirty="0"/>
           </a:p>
         </p:txBody>
       </p:sp>
@@ -16453,8 +16457,8 @@
         </p:nvSpPr>
         <p:spPr>
           <a:xfrm>
-            <a:off x="7799832" y="4659782"/>
-            <a:ext cx="3145536" cy="899770"/>
+            <a:off x="7708392" y="4828032"/>
+            <a:ext cx="3282696" cy="749808"/>
           </a:xfrm>
           <a:prstGeom prst="rect">
             <a:avLst/>
@@ -16472,7 +16476,7 @@
               <a:buNone/>
             </a:pPr>
             <a:r>
-              <a:rPr lang="en-US" sz="1320" dirty="0">
+              <a:rPr lang="en-US" sz="1220" dirty="0">
                 <a:solidFill>
                   <a:srgbClr val="17364A"/>
                 </a:solidFill>
@@ -16480,9 +16484,9 @@
                 <a:ea typeface="Aptos" pitchFamily="34" charset="-122"/>
                 <a:cs typeface="Aptos" pitchFamily="34" charset="-120"/>
               </a:rPr>
-              <a:t>Connect the concept to public health purpose, responsible use, required safeguards, documentation, and the next action a department should take.</a:t>
-            </a:r>
-            <a:endParaRPr lang="en-US" sz="1320" dirty="0"/>
+              <a:t>Connect the concept to public health purpose, responsible use, required.</a:t>
+            </a:r>
+            <a:endParaRPr lang="en-US" sz="1220" dirty="0"/>
           </a:p>
         </p:txBody>
       </p:sp>
@@ -16773,8 +16777,8 @@
         </p:nvSpPr>
         <p:spPr>
           <a:xfrm>
-            <a:off x="868680" y="1508760"/>
-            <a:ext cx="6309360" cy="4160520"/>
+            <a:off x="822960" y="1463040"/>
+            <a:ext cx="6565392" cy="4343400"/>
           </a:xfrm>
           <a:prstGeom prst="rect">
             <a:avLst/>
@@ -16792,7 +16796,7 @@
               <a:buNone/>
             </a:pPr>
             <a:r>
-              <a:rPr lang="en-US" sz="2100" dirty="0">
+              <a:rPr lang="en-US" sz="1920" dirty="0">
                 <a:solidFill>
                   <a:srgbClr val="003A63"/>
                 </a:solidFill>
@@ -16800,16 +16804,16 @@
                 <a:ea typeface="Aptos" pitchFamily="34" charset="-122"/>
                 <a:cs typeface="Aptos" pitchFamily="34" charset="-120"/>
               </a:rPr>
-              <a:t>• Public health is uniquely positioned to use AI for social good because its mission is.</a:t>
-            </a:r>
-            <a:endParaRPr lang="en-US" sz="2100" dirty="0"/>
-          </a:p>
-          <a:p>
-            <a:pPr indent="0" marL="0">
-              <a:buNone/>
-            </a:pPr>
-            <a:r>
-              <a:rPr lang="en-US" sz="2100" dirty="0">
+              <a:t>• Public health is uniquely positioned to use AI for social good because its.</a:t>
+            </a:r>
+            <a:endParaRPr lang="en-US" sz="1920" dirty="0"/>
+          </a:p>
+          <a:p>
+            <a:pPr indent="0" marL="0">
+              <a:buNone/>
+            </a:pPr>
+            <a:r>
+              <a:rPr lang="en-US" sz="1920" dirty="0">
                 <a:solidFill>
                   <a:srgbClr val="003A63"/>
                 </a:solidFill>
@@ -16817,16 +16821,16 @@
                 <a:ea typeface="Aptos" pitchFamily="34" charset="-122"/>
                 <a:cs typeface="Aptos" pitchFamily="34" charset="-120"/>
               </a:rPr>
-              <a:t>• AI can help agencies identify emerging needs, improve access to information, reduce.</a:t>
-            </a:r>
-            <a:endParaRPr lang="en-US" sz="2100" dirty="0"/>
-          </a:p>
-          <a:p>
-            <a:pPr indent="0" marL="0">
-              <a:buNone/>
-            </a:pPr>
-            <a:r>
-              <a:rPr lang="en-US" sz="2100" dirty="0">
+              <a:t>• AI can help agencies identify emerging needs, improve access to information,.</a:t>
+            </a:r>
+            <a:endParaRPr lang="en-US" sz="1920" dirty="0"/>
+          </a:p>
+          <a:p>
+            <a:pPr indent="0" marL="0">
+              <a:buNone/>
+            </a:pPr>
+            <a:r>
+              <a:rPr lang="en-US" sz="1920" dirty="0">
                 <a:solidFill>
                   <a:srgbClr val="003A63"/>
                 </a:solidFill>
@@ -16834,9 +16838,9 @@
                 <a:ea typeface="Aptos" pitchFamily="34" charset="-122"/>
                 <a:cs typeface="Aptos" pitchFamily="34" charset="-120"/>
               </a:rPr>
-              <a:t>• These benefits are especially important when agencies face workforce shortages, fragmented.</a:t>
-            </a:r>
-            <a:endParaRPr lang="en-US" sz="2100" dirty="0"/>
+              <a:t>• These benefits are especially important when agencies face workforce.</a:t>
+            </a:r>
+            <a:endParaRPr lang="en-US" sz="1920" dirty="0"/>
           </a:p>
         </p:txBody>
       </p:sp>
@@ -16848,12 +16852,12 @@
         </p:nvSpPr>
         <p:spPr>
           <a:xfrm>
-            <a:off x="7635240" y="1325880"/>
-            <a:ext cx="3474720" cy="1255471"/>
+            <a:off x="7543800" y="1325880"/>
+            <a:ext cx="3611880" cy="1261872"/>
           </a:xfrm>
           <a:prstGeom prst="roundRect">
             <a:avLst>
-              <a:gd name="adj" fmla="val 8740"/>
+              <a:gd name="adj" fmla="val 8696"/>
             </a:avLst>
           </a:prstGeom>
           <a:solidFill>
@@ -16875,8 +16879,8 @@
         </p:nvSpPr>
         <p:spPr>
           <a:xfrm>
-            <a:off x="7799832" y="1472184"/>
-            <a:ext cx="3145536" cy="256032"/>
+            <a:off x="7708392" y="1453896"/>
+            <a:ext cx="3282696" cy="228600"/>
           </a:xfrm>
           <a:prstGeom prst="rect">
             <a:avLst/>
@@ -16892,7 +16896,7 @@
               <a:buNone/>
             </a:pPr>
             <a:r>
-              <a:rPr lang="en-US" sz="1300" b="1" dirty="0">
+              <a:rPr lang="en-US" sz="1220" b="1" dirty="0">
                 <a:solidFill>
                   <a:srgbClr val="0068B7"/>
                 </a:solidFill>
@@ -16902,7 +16906,7 @@
               </a:rPr>
               <a:t>Core concept</a:t>
             </a:r>
-            <a:endParaRPr lang="en-US" sz="1300" dirty="0"/>
+            <a:endParaRPr lang="en-US" sz="1220" dirty="0"/>
           </a:p>
         </p:txBody>
       </p:sp>
@@ -16914,8 +16918,8 @@
         </p:nvSpPr>
         <p:spPr>
           <a:xfrm>
-            <a:off x="7799832" y="1801368"/>
-            <a:ext cx="3145536" cy="688543"/>
+            <a:off x="7708392" y="1764792"/>
+            <a:ext cx="3282696" cy="749808"/>
           </a:xfrm>
           <a:prstGeom prst="rect">
             <a:avLst/>
@@ -16933,7 +16937,7 @@
               <a:buNone/>
             </a:pPr>
             <a:r>
-              <a:rPr lang="en-US" sz="1320" dirty="0">
+              <a:rPr lang="en-US" sz="1220" dirty="0">
                 <a:solidFill>
                   <a:srgbClr val="17364A"/>
                 </a:solidFill>
@@ -16941,9 +16945,9 @@
                 <a:ea typeface="Aptos" pitchFamily="34" charset="-122"/>
                 <a:cs typeface="Aptos" pitchFamily="34" charset="-120"/>
               </a:rPr>
-              <a:t>Public health is uniquely positioned to use AI for social good because its mission is population.</a:t>
-            </a:r>
-            <a:endParaRPr lang="en-US" sz="1320" dirty="0"/>
+              <a:t>Public health is uniquely positioned to use AI for social good because its.</a:t>
+            </a:r>
+            <a:endParaRPr lang="en-US" sz="1220" dirty="0"/>
           </a:p>
         </p:txBody>
       </p:sp>
@@ -16955,12 +16959,12 @@
         </p:nvSpPr>
         <p:spPr>
           <a:xfrm>
-            <a:off x="7635240" y="2718511"/>
-            <a:ext cx="3474720" cy="1328623"/>
+            <a:off x="7543800" y="2724912"/>
+            <a:ext cx="3611880" cy="1527048"/>
           </a:xfrm>
           <a:prstGeom prst="roundRect">
             <a:avLst>
-              <a:gd name="adj" fmla="val 8259"/>
+              <a:gd name="adj" fmla="val 7186"/>
             </a:avLst>
           </a:prstGeom>
           <a:solidFill>
@@ -16982,24 +16986,26 @@
         </p:nvSpPr>
         <p:spPr>
           <a:xfrm>
-            <a:off x="7799832" y="2846527"/>
-            <a:ext cx="3145536" cy="237744"/>
-          </a:xfrm>
-          <a:prstGeom prst="rect">
-            <a:avLst/>
-          </a:prstGeom>
-          <a:noFill/>
-          <a:ln/>
-        </p:spPr>
-        <p:txBody>
-          <a:bodyPr wrap="square" lIns="0" tIns="0" rIns="0" bIns="0" rtlCol="0" anchor="ctr"/>
-          <a:lstStyle/>
-          <a:p>
-            <a:pPr indent="0" marL="0">
-              <a:buNone/>
-            </a:pPr>
-            <a:r>
-              <a:rPr lang="en-US" sz="1250" b="1" dirty="0">
+            <a:off x="7708392" y="2852928"/>
+            <a:ext cx="3282696" cy="219456"/>
+          </a:xfrm>
+          <a:prstGeom prst="rect">
+            <a:avLst/>
+          </a:prstGeom>
+          <a:noFill/>
+          <a:ln/>
+        </p:spPr>
+        <p:txBody>
+          <a:bodyPr wrap="square" lIns="0" tIns="0" rIns="0" bIns="0" rtlCol="0" anchor="ctr">
+            <a:normAutofit/>
+          </a:bodyPr>
+          <a:lstStyle/>
+          <a:p>
+            <a:pPr indent="0" marL="0">
+              <a:buNone/>
+            </a:pPr>
+            <a:r>
+              <a:rPr lang="en-US" sz="1160" b="1" dirty="0">
                 <a:solidFill>
                   <a:srgbClr val="0068B7"/>
                 </a:solidFill>
@@ -17009,7 +17015,7 @@
               </a:rPr>
               <a:t>Human-in-the-loop use</a:t>
             </a:r>
-            <a:endParaRPr lang="en-US" sz="1250" dirty="0"/>
+            <a:endParaRPr lang="en-US" sz="1160" dirty="0"/>
           </a:p>
         </p:txBody>
       </p:sp>
@@ -17021,7 +17027,7 @@
         </p:nvSpPr>
         <p:spPr>
           <a:xfrm>
-            <a:off x="8763000" y="3399739"/>
+            <a:off x="8717280" y="3406140"/>
             <a:ext cx="164592" cy="0"/>
           </a:xfrm>
           <a:prstGeom prst="line">
@@ -17044,8 +17050,8 @@
         </p:nvSpPr>
         <p:spPr>
           <a:xfrm>
-            <a:off x="7872984" y="3248863"/>
-            <a:ext cx="890016" cy="301752"/>
+            <a:off x="7781544" y="3255264"/>
+            <a:ext cx="935736" cy="301752"/>
           </a:xfrm>
           <a:prstGeom prst="roundRect">
             <a:avLst>
@@ -17071,8 +17077,8 @@
         </p:nvSpPr>
         <p:spPr>
           <a:xfrm>
-            <a:off x="7909560" y="3322015"/>
-            <a:ext cx="816864" cy="146304"/>
+            <a:off x="7818120" y="3328416"/>
+            <a:ext cx="862584" cy="146304"/>
           </a:xfrm>
           <a:prstGeom prst="rect">
             <a:avLst/>
@@ -17112,7 +17118,7 @@
         </p:nvSpPr>
         <p:spPr>
           <a:xfrm>
-            <a:off x="9817608" y="3399739"/>
+            <a:off x="9817608" y="3406140"/>
             <a:ext cx="164592" cy="0"/>
           </a:xfrm>
           <a:prstGeom prst="line">
@@ -17135,8 +17141,8 @@
         </p:nvSpPr>
         <p:spPr>
           <a:xfrm>
-            <a:off x="8927592" y="3248863"/>
-            <a:ext cx="890016" cy="301752"/>
+            <a:off x="8881872" y="3255264"/>
+            <a:ext cx="935736" cy="301752"/>
           </a:xfrm>
           <a:prstGeom prst="roundRect">
             <a:avLst>
@@ -17162,8 +17168,8 @@
         </p:nvSpPr>
         <p:spPr>
           <a:xfrm>
-            <a:off x="8964168" y="3322015"/>
-            <a:ext cx="816864" cy="146304"/>
+            <a:off x="8918448" y="3328416"/>
+            <a:ext cx="862584" cy="146304"/>
           </a:xfrm>
           <a:prstGeom prst="rect">
             <a:avLst/>
@@ -17203,8 +17209,8 @@
         </p:nvSpPr>
         <p:spPr>
           <a:xfrm>
-            <a:off x="9982200" y="3248863"/>
-            <a:ext cx="890016" cy="301752"/>
+            <a:off x="9982200" y="3255264"/>
+            <a:ext cx="935736" cy="301752"/>
           </a:xfrm>
           <a:prstGeom prst="roundRect">
             <a:avLst>
@@ -17230,8 +17236,8 @@
         </p:nvSpPr>
         <p:spPr>
           <a:xfrm>
-            <a:off x="10018776" y="3322015"/>
-            <a:ext cx="816864" cy="146304"/>
+            <a:off x="10018776" y="3328416"/>
+            <a:ext cx="862584" cy="146304"/>
           </a:xfrm>
           <a:prstGeom prst="rect">
             <a:avLst/>
@@ -17271,8 +17277,8 @@
         </p:nvSpPr>
         <p:spPr>
           <a:xfrm>
-            <a:off x="7854696" y="3742639"/>
-            <a:ext cx="3035808" cy="158191"/>
+            <a:off x="7763256" y="3749040"/>
+            <a:ext cx="3172968" cy="356616"/>
           </a:xfrm>
           <a:prstGeom prst="rect">
             <a:avLst/>
@@ -17290,7 +17296,7 @@
               <a:buNone/>
             </a:pPr>
             <a:r>
-              <a:rPr lang="en-US" sz="1120" dirty="0">
+              <a:rPr lang="en-US" sz="1040" dirty="0">
                 <a:solidFill>
                   <a:srgbClr val="17364A"/>
                 </a:solidFill>
@@ -17298,9 +17304,9 @@
                 <a:ea typeface="Aptos" pitchFamily="34" charset="-122"/>
                 <a:cs typeface="Aptos" pitchFamily="34" charset="-120"/>
               </a:rPr>
-              <a:t>AI can support work, but public health judgment remains responsible for interpretation and final use.</a:t>
-            </a:r>
-            <a:endParaRPr lang="en-US" sz="1120" dirty="0"/>
+              <a:t>AI can support work, but public health judgment remains responsible.</a:t>
+            </a:r>
+            <a:endParaRPr lang="en-US" sz="1040" dirty="0"/>
           </a:p>
         </p:txBody>
       </p:sp>
@@ -17312,12 +17318,12 @@
         </p:nvSpPr>
         <p:spPr>
           <a:xfrm>
-            <a:off x="7635240" y="4184294"/>
-            <a:ext cx="3474720" cy="1466698"/>
+            <a:off x="7543800" y="4389120"/>
+            <a:ext cx="3611880" cy="1261872"/>
           </a:xfrm>
           <a:prstGeom prst="roundRect">
             <a:avLst>
-              <a:gd name="adj" fmla="val 7481"/>
+              <a:gd name="adj" fmla="val 8696"/>
             </a:avLst>
           </a:prstGeom>
           <a:solidFill>
@@ -17339,8 +17345,8 @@
         </p:nvSpPr>
         <p:spPr>
           <a:xfrm>
-            <a:off x="7799832" y="4330598"/>
-            <a:ext cx="3145536" cy="256032"/>
+            <a:off x="7708392" y="4517136"/>
+            <a:ext cx="3282696" cy="228600"/>
           </a:xfrm>
           <a:prstGeom prst="rect">
             <a:avLst/>
@@ -17356,7 +17362,7 @@
               <a:buNone/>
             </a:pPr>
             <a:r>
-              <a:rPr lang="en-US" sz="1300" b="1" dirty="0">
+              <a:rPr lang="en-US" sz="1220" b="1" dirty="0">
                 <a:solidFill>
                   <a:srgbClr val="0068B7"/>
                 </a:solidFill>
@@ -17366,7 +17372,7 @@
               </a:rPr>
               <a:t>Apply it</a:t>
             </a:r>
-            <a:endParaRPr lang="en-US" sz="1300" dirty="0"/>
+            <a:endParaRPr lang="en-US" sz="1220" dirty="0"/>
           </a:p>
         </p:txBody>
       </p:sp>
@@ -17378,8 +17384,8 @@
         </p:nvSpPr>
         <p:spPr>
           <a:xfrm>
-            <a:off x="7799832" y="4659782"/>
-            <a:ext cx="3145536" cy="899770"/>
+            <a:off x="7708392" y="4828032"/>
+            <a:ext cx="3282696" cy="749808"/>
           </a:xfrm>
           <a:prstGeom prst="rect">
             <a:avLst/>
@@ -17397,7 +17403,7 @@
               <a:buNone/>
             </a:pPr>
             <a:r>
-              <a:rPr lang="en-US" sz="1320" dirty="0">
+              <a:rPr lang="en-US" sz="1220" dirty="0">
                 <a:solidFill>
                   <a:srgbClr val="17364A"/>
                 </a:solidFill>
@@ -17405,9 +17411,9 @@
                 <a:ea typeface="Aptos" pitchFamily="34" charset="-122"/>
                 <a:cs typeface="Aptos" pitchFamily="34" charset="-120"/>
               </a:rPr>
-              <a:t>Connect the concept to public health purpose, responsible use, required safeguards, documentation, and the next action a department should take.</a:t>
-            </a:r>
-            <a:endParaRPr lang="en-US" sz="1320" dirty="0"/>
+              <a:t>Connect the concept to public health purpose, responsible use, required.</a:t>
+            </a:r>
+            <a:endParaRPr lang="en-US" sz="1220" dirty="0"/>
           </a:p>
         </p:txBody>
       </p:sp>
@@ -17698,8 +17704,8 @@
         </p:nvSpPr>
         <p:spPr>
           <a:xfrm>
-            <a:off x="868680" y="1508760"/>
-            <a:ext cx="6309360" cy="4160520"/>
+            <a:off x="822960" y="1463040"/>
+            <a:ext cx="6565392" cy="4343400"/>
           </a:xfrm>
           <a:prstGeom prst="rect">
             <a:avLst/>
@@ -17717,7 +17723,7 @@
               <a:buNone/>
             </a:pPr>
             <a:r>
-              <a:rPr lang="en-US" sz="2100" dirty="0">
+              <a:rPr lang="en-US" sz="1920" dirty="0">
                 <a:solidFill>
                   <a:srgbClr val="003A63"/>
                 </a:solidFill>
@@ -17725,16 +17731,16 @@
                 <a:ea typeface="Aptos" pitchFamily="34" charset="-122"/>
                 <a:cs typeface="Aptos" pitchFamily="34" charset="-120"/>
               </a:rPr>
-              <a:t>• A health department may use AI to improve access to maternal and child health resources.</a:t>
-            </a:r>
-            <a:endParaRPr lang="en-US" sz="2100" dirty="0"/>
-          </a:p>
-          <a:p>
-            <a:pPr indent="0" marL="0">
-              <a:buNone/>
-            </a:pPr>
-            <a:r>
-              <a:rPr lang="en-US" sz="2100" dirty="0">
+              <a:t>• A health department may use AI to improve access to maternal and child.</a:t>
+            </a:r>
+            <a:endParaRPr lang="en-US" sz="1920" dirty="0"/>
+          </a:p>
+          <a:p>
+            <a:pPr indent="0" marL="0">
+              <a:buNone/>
+            </a:pPr>
+            <a:r>
+              <a:rPr lang="en-US" sz="1920" dirty="0">
                 <a:solidFill>
                   <a:srgbClr val="003A63"/>
                 </a:solidFill>
@@ -17742,16 +17748,16 @@
                 <a:ea typeface="Aptos" pitchFamily="34" charset="-122"/>
                 <a:cs typeface="Aptos" pitchFamily="34" charset="-120"/>
               </a:rPr>
-              <a:t>• A tool could help staff identify service gaps, summarize eligibility rules, translate.</a:t>
-            </a:r>
-            <a:endParaRPr lang="en-US" sz="2100" dirty="0"/>
-          </a:p>
-          <a:p>
-            <a:pPr indent="0" marL="0">
-              <a:buNone/>
-            </a:pPr>
-            <a:r>
-              <a:rPr lang="en-US" sz="2100" dirty="0">
+              <a:t>• A tool could help staff identify service gaps, summarize eligibility rules,.</a:t>
+            </a:r>
+            <a:endParaRPr lang="en-US" sz="1920" dirty="0"/>
+          </a:p>
+          <a:p>
+            <a:pPr indent="0" marL="0">
+              <a:buNone/>
+            </a:pPr>
+            <a:r>
+              <a:rPr lang="en-US" sz="1920" dirty="0">
                 <a:solidFill>
                   <a:srgbClr val="003A63"/>
                 </a:solidFill>
@@ -17759,9 +17765,9 @@
                 <a:ea typeface="Aptos" pitchFamily="34" charset="-122"/>
                 <a:cs typeface="Aptos" pitchFamily="34" charset="-120"/>
               </a:rPr>
-              <a:t>• If designed well, the tool could reduce administrative burden and improve timely access to.</a:t>
-            </a:r>
-            <a:endParaRPr lang="en-US" sz="2100" dirty="0"/>
+              <a:t>• If designed well, the tool could reduce administrative burden and improve.</a:t>
+            </a:r>
+            <a:endParaRPr lang="en-US" sz="1920" dirty="0"/>
           </a:p>
         </p:txBody>
       </p:sp>
@@ -17773,12 +17779,12 @@
         </p:nvSpPr>
         <p:spPr>
           <a:xfrm>
-            <a:off x="7635240" y="1325880"/>
-            <a:ext cx="3474720" cy="1207008"/>
+            <a:off x="7543800" y="1325880"/>
+            <a:ext cx="3611880" cy="1261872"/>
           </a:xfrm>
           <a:prstGeom prst="roundRect">
             <a:avLst>
-              <a:gd name="adj" fmla="val 9091"/>
+              <a:gd name="adj" fmla="val 8696"/>
             </a:avLst>
           </a:prstGeom>
           <a:solidFill>
@@ -17800,8 +17806,8 @@
         </p:nvSpPr>
         <p:spPr>
           <a:xfrm>
-            <a:off x="7799832" y="1472184"/>
-            <a:ext cx="3145536" cy="256032"/>
+            <a:off x="7708392" y="1453896"/>
+            <a:ext cx="3282696" cy="228600"/>
           </a:xfrm>
           <a:prstGeom prst="rect">
             <a:avLst/>
@@ -17817,7 +17823,7 @@
               <a:buNone/>
             </a:pPr>
             <a:r>
-              <a:rPr lang="en-US" sz="1300" b="1" dirty="0">
+              <a:rPr lang="en-US" sz="1220" b="1" dirty="0">
                 <a:solidFill>
                   <a:srgbClr val="0068B7"/>
                 </a:solidFill>
@@ -17827,7 +17833,7 @@
               </a:rPr>
               <a:t>Core concept</a:t>
             </a:r>
-            <a:endParaRPr lang="en-US" sz="1300" dirty="0"/>
+            <a:endParaRPr lang="en-US" sz="1220" dirty="0"/>
           </a:p>
         </p:txBody>
       </p:sp>
@@ -17839,8 +17845,8 @@
         </p:nvSpPr>
         <p:spPr>
           <a:xfrm>
-            <a:off x="7799832" y="1801368"/>
-            <a:ext cx="3145536" cy="640080"/>
+            <a:off x="7708392" y="1764792"/>
+            <a:ext cx="3282696" cy="749808"/>
           </a:xfrm>
           <a:prstGeom prst="rect">
             <a:avLst/>
@@ -17858,7 +17864,7 @@
               <a:buNone/>
             </a:pPr>
             <a:r>
-              <a:rPr lang="en-US" sz="1320" dirty="0">
+              <a:rPr lang="en-US" sz="1220" dirty="0">
                 <a:solidFill>
                   <a:srgbClr val="17364A"/>
                 </a:solidFill>
@@ -17866,9 +17872,9 @@
                 <a:ea typeface="Aptos" pitchFamily="34" charset="-122"/>
                 <a:cs typeface="Aptos" pitchFamily="34" charset="-120"/>
               </a:rPr>
-              <a:t>A health department may use AI to improve access to maternal and child health resources.</a:t>
-            </a:r>
-            <a:endParaRPr lang="en-US" sz="1320" dirty="0"/>
+              <a:t>A health department may use AI to improve access to maternal and child health.</a:t>
+            </a:r>
+            <a:endParaRPr lang="en-US" sz="1220" dirty="0"/>
           </a:p>
         </p:txBody>
       </p:sp>
@@ -17880,12 +17886,12 @@
         </p:nvSpPr>
         <p:spPr>
           <a:xfrm>
-            <a:off x="7635240" y="2670048"/>
-            <a:ext cx="3474720" cy="1377086"/>
+            <a:off x="7543800" y="2724912"/>
+            <a:ext cx="3611880" cy="1527048"/>
           </a:xfrm>
           <a:prstGeom prst="roundRect">
             <a:avLst>
-              <a:gd name="adj" fmla="val 7968"/>
+              <a:gd name="adj" fmla="val 7186"/>
             </a:avLst>
           </a:prstGeom>
           <a:solidFill>
@@ -17907,8 +17913,8 @@
         </p:nvSpPr>
         <p:spPr>
           <a:xfrm>
-            <a:off x="7799832" y="2816352"/>
-            <a:ext cx="3145536" cy="256032"/>
+            <a:off x="7708392" y="2852928"/>
+            <a:ext cx="3282696" cy="228600"/>
           </a:xfrm>
           <a:prstGeom prst="rect">
             <a:avLst/>
@@ -17924,7 +17930,7 @@
               <a:buNone/>
             </a:pPr>
             <a:r>
-              <a:rPr lang="en-US" sz="1300" b="1" dirty="0">
+              <a:rPr lang="en-US" sz="1220" b="1" dirty="0">
                 <a:solidFill>
                   <a:srgbClr val="0068B7"/>
                 </a:solidFill>
@@ -17934,7 +17940,7 @@
               </a:rPr>
               <a:t>Concept checkpoints</a:t>
             </a:r>
-            <a:endParaRPr lang="en-US" sz="1300" dirty="0"/>
+            <a:endParaRPr lang="en-US" sz="1220" dirty="0"/>
           </a:p>
         </p:txBody>
       </p:sp>
@@ -17946,8 +17952,8 @@
         </p:nvSpPr>
         <p:spPr>
           <a:xfrm>
-            <a:off x="7818120" y="3182112"/>
-            <a:ext cx="3090672" cy="718718"/>
+            <a:off x="7726680" y="3182112"/>
+            <a:ext cx="3227832" cy="960120"/>
           </a:xfrm>
           <a:prstGeom prst="rect">
             <a:avLst/>
@@ -17965,7 +17971,7 @@
               <a:buNone/>
             </a:pPr>
             <a:r>
-              <a:rPr lang="en-US" sz="1220" dirty="0">
+              <a:rPr lang="en-US" sz="1140" dirty="0">
                 <a:solidFill>
                   <a:srgbClr val="17364A"/>
                 </a:solidFill>
@@ -17973,16 +17979,16 @@
                 <a:ea typeface="Aptos" pitchFamily="34" charset="-122"/>
                 <a:cs typeface="Aptos" pitchFamily="34" charset="-120"/>
               </a:rPr>
-              <a:t>A tool could help staff identify service gaps, summarize.</a:t>
-            </a:r>
-            <a:endParaRPr lang="en-US" sz="1220" dirty="0"/>
-          </a:p>
-          <a:p>
-            <a:pPr indent="0" marL="0">
-              <a:buNone/>
-            </a:pPr>
-            <a:r>
-              <a:rPr lang="en-US" sz="1220" dirty="0">
+              <a:t>A tool could help staff identify service gaps,.</a:t>
+            </a:r>
+            <a:endParaRPr lang="en-US" sz="1140" dirty="0"/>
+          </a:p>
+          <a:p>
+            <a:pPr indent="0" marL="0">
+              <a:buNone/>
+            </a:pPr>
+            <a:r>
+              <a:rPr lang="en-US" sz="1140" dirty="0">
                 <a:solidFill>
                   <a:srgbClr val="17364A"/>
                 </a:solidFill>
@@ -17990,16 +17996,16 @@
                 <a:ea typeface="Aptos" pitchFamily="34" charset="-122"/>
                 <a:cs typeface="Aptos" pitchFamily="34" charset="-120"/>
               </a:rPr>
-              <a:t>The same tool could fail if it assumes internet access, uses only.</a:t>
-            </a:r>
-            <a:endParaRPr lang="en-US" sz="1220" dirty="0"/>
-          </a:p>
-          <a:p>
-            <a:pPr indent="0" marL="0">
-              <a:buNone/>
-            </a:pPr>
-            <a:r>
-              <a:rPr lang="en-US" sz="1220" dirty="0">
+              <a:t>The same tool could fail if it assumes internet.</a:t>
+            </a:r>
+            <a:endParaRPr lang="en-US" sz="1140" dirty="0"/>
+          </a:p>
+          <a:p>
+            <a:pPr indent="0" marL="0">
+              <a:buNone/>
+            </a:pPr>
+            <a:r>
+              <a:rPr lang="en-US" sz="1140" dirty="0">
                 <a:solidFill>
                   <a:srgbClr val="17364A"/>
                 </a:solidFill>
@@ -18007,9 +18013,9 @@
                 <a:ea typeface="Aptos" pitchFamily="34" charset="-122"/>
                 <a:cs typeface="Aptos" pitchFamily="34" charset="-120"/>
               </a:rPr>
-              <a:t>An AI for Social Good review would examine community needs, access.</a:t>
-            </a:r>
-            <a:endParaRPr lang="en-US" sz="1220" dirty="0"/>
+              <a:t>An AI for Social Good review would examine.</a:t>
+            </a:r>
+            <a:endParaRPr lang="en-US" sz="1140" dirty="0"/>
           </a:p>
         </p:txBody>
       </p:sp>
@@ -18021,12 +18027,12 @@
         </p:nvSpPr>
         <p:spPr>
           <a:xfrm>
-            <a:off x="7635240" y="4184294"/>
-            <a:ext cx="3474720" cy="1466698"/>
+            <a:off x="7543800" y="4389120"/>
+            <a:ext cx="3611880" cy="1261872"/>
           </a:xfrm>
           <a:prstGeom prst="roundRect">
             <a:avLst>
-              <a:gd name="adj" fmla="val 7481"/>
+              <a:gd name="adj" fmla="val 8696"/>
             </a:avLst>
           </a:prstGeom>
           <a:solidFill>
@@ -18048,8 +18054,8 @@
         </p:nvSpPr>
         <p:spPr>
           <a:xfrm>
-            <a:off x="7799832" y="4330598"/>
-            <a:ext cx="3145536" cy="256032"/>
+            <a:off x="7708392" y="4517136"/>
+            <a:ext cx="3282696" cy="228600"/>
           </a:xfrm>
           <a:prstGeom prst="rect">
             <a:avLst/>
@@ -18065,7 +18071,7 @@
               <a:buNone/>
             </a:pPr>
             <a:r>
-              <a:rPr lang="en-US" sz="1300" b="1" dirty="0">
+              <a:rPr lang="en-US" sz="1220" b="1" dirty="0">
                 <a:solidFill>
                   <a:srgbClr val="0068B7"/>
                 </a:solidFill>
@@ -18075,7 +18081,7 @@
               </a:rPr>
               <a:t>Apply it</a:t>
             </a:r>
-            <a:endParaRPr lang="en-US" sz="1300" dirty="0"/>
+            <a:endParaRPr lang="en-US" sz="1220" dirty="0"/>
           </a:p>
         </p:txBody>
       </p:sp>
@@ -18087,8 +18093,8 @@
         </p:nvSpPr>
         <p:spPr>
           <a:xfrm>
-            <a:off x="7799832" y="4659782"/>
-            <a:ext cx="3145536" cy="899770"/>
+            <a:off x="7708392" y="4828032"/>
+            <a:ext cx="3282696" cy="749808"/>
           </a:xfrm>
           <a:prstGeom prst="rect">
             <a:avLst/>
@@ -18106,7 +18112,7 @@
               <a:buNone/>
             </a:pPr>
             <a:r>
-              <a:rPr lang="en-US" sz="1320" dirty="0">
+              <a:rPr lang="en-US" sz="1220" dirty="0">
                 <a:solidFill>
                   <a:srgbClr val="17364A"/>
                 </a:solidFill>
@@ -18114,9 +18120,9 @@
                 <a:ea typeface="Aptos" pitchFamily="34" charset="-122"/>
                 <a:cs typeface="Aptos" pitchFamily="34" charset="-120"/>
               </a:rPr>
-              <a:t>Connect the concept to public health purpose, responsible use, required safeguards, documentation, and the next action a department should take.</a:t>
-            </a:r>
-            <a:endParaRPr lang="en-US" sz="1320" dirty="0"/>
+              <a:t>Connect the concept to public health purpose, responsible use, required.</a:t>
+            </a:r>
+            <a:endParaRPr lang="en-US" sz="1220" dirty="0"/>
           </a:p>
         </p:txBody>
       </p:sp>

--- a/downloads/presentations/modules/int-190.pptx
+++ b/downloads/presentations/modules/int-190.pptx
@@ -11871,7 +11871,7 @@
                 <a:ea typeface="Aptos" pitchFamily="34" charset="-122"/>
                 <a:cs typeface="Aptos" pitchFamily="34" charset="-120"/>
               </a:rPr>
-              <a:t>• 1. What is the best definition of AI for Social Good in public health?</a:t>
+              <a:t>1. What is the best definition of AI for Social Good in public health?</a:t>
             </a:r>
             <a:endParaRPr lang="en-US" sz="1920" dirty="0"/>
           </a:p>
@@ -11888,7 +11888,7 @@
                 <a:ea typeface="Aptos" pitchFamily="34" charset="-122"/>
                 <a:cs typeface="Aptos" pitchFamily="34" charset="-120"/>
               </a:rPr>
-              <a:t>• 2. Why is efficiency alone not enough to show social good?</a:t>
+              <a:t>2. Why is efficiency alone not enough to show social good?</a:t>
             </a:r>
             <a:endParaRPr lang="en-US" sz="1920" dirty="0"/>
           </a:p>
@@ -11905,7 +11905,7 @@
                 <a:ea typeface="Aptos" pitchFamily="34" charset="-122"/>
                 <a:cs typeface="Aptos" pitchFamily="34" charset="-120"/>
               </a:rPr>
-              <a:t>• 3. What does equity by design require?</a:t>
+              <a:t>3. What does equity by design require?</a:t>
             </a:r>
             <a:endParaRPr lang="en-US" sz="1920" dirty="0"/>
           </a:p>
@@ -12012,7 +12012,7 @@
                 <a:ea typeface="Aptos" pitchFamily="34" charset="-122"/>
                 <a:cs typeface="Aptos" pitchFamily="34" charset="-120"/>
               </a:rPr>
-              <a:t>1. What is the best definition of AI for Social Good in public health?</a:t>
+              <a:t>What is the best definition of AI for Social Good in public health?</a:t>
             </a:r>
             <a:endParaRPr lang="en-US" sz="1220" dirty="0"/>
           </a:p>
@@ -12119,41 +12119,7 @@
                 <a:ea typeface="Aptos" pitchFamily="34" charset="-122"/>
                 <a:cs typeface="Aptos" pitchFamily="34" charset="-120"/>
               </a:rPr>
-              <a:t>1.</a:t>
-            </a:r>
-            <a:endParaRPr lang="en-US" sz="1140" dirty="0"/>
-          </a:p>
-          <a:p>
-            <a:pPr indent="0" marL="0">
-              <a:buNone/>
-            </a:pPr>
-            <a:r>
-              <a:rPr lang="en-US" sz="1140" dirty="0">
-                <a:solidFill>
-                  <a:srgbClr val="17364A"/>
-                </a:solidFill>
-                <a:latin typeface="Aptos" pitchFamily="34" charset="0"/>
-                <a:ea typeface="Aptos" pitchFamily="34" charset="-122"/>
-                <a:cs typeface="Aptos" pitchFamily="34" charset="-120"/>
-              </a:rPr>
               <a:t>What is the best definition of AI for Social Good.</a:t>
-            </a:r>
-            <a:endParaRPr lang="en-US" sz="1140" dirty="0"/>
-          </a:p>
-          <a:p>
-            <a:pPr indent="0" marL="0">
-              <a:buNone/>
-            </a:pPr>
-            <a:r>
-              <a:rPr lang="en-US" sz="1140" dirty="0">
-                <a:solidFill>
-                  <a:srgbClr val="17364A"/>
-                </a:solidFill>
-                <a:latin typeface="Aptos" pitchFamily="34" charset="0"/>
-                <a:ea typeface="Aptos" pitchFamily="34" charset="-122"/>
-                <a:cs typeface="Aptos" pitchFamily="34" charset="-120"/>
-              </a:rPr>
-              <a:t>2.</a:t>
             </a:r>
             <a:endParaRPr lang="en-US" sz="1140" dirty="0"/>
           </a:p>
